--- a/drafts/Exos_SSLC_Board_Offer_Overview_2026-10-10_r2.pptx
+++ b/drafts/Exos_SSLC_Board_Offer_Overview_2026-10-10_r2.pptx
@@ -863,7 +863,7 @@
           <a:p>
             <a:r>
               <a:rPr lang="en-US" dirty="0"/>
-              <a:t>All three scenarios (Low/Base/High) have identical at-close values: ① $4.36M, ② $5.36M with stock. The $4.36M breaks down as: $2.51M cash + $60K transaction costs + $790K stake credit (non-cash) + ~$500K SSLC debts at face + $500K WC bridge. The $1.0M EAI units are issued at financing close, not at board acceptance, and count toward the Rule 504 $10M rolling cap.</a:t>
+              <a:t>All three scenarios (Low/Base/High) have identical at-close values: ① $3.86M, ② $4.86M with stock. The $3.86M breaks down as: $2.51M cash + $60K transaction costs + $790K stake credit (non-cash) + $500K WC bridge. The $1.0M EAI units are issued at financing close, not at board acceptance, and count toward the Rule 504 $10M rolling cap.</a:t>
             </a:r>
             <a:endParaRPr lang="en-US" dirty="0"/>
           </a:p>
@@ -1039,7 +1039,7 @@
           <a:p>
             <a:r>
               <a:rPr lang="en-US" dirty="0"/>
-              <a:t>③ 5-yr total is ② ($5.36M) + earn-outs. Low = $6.31M / Base = $7.885M (shown as $7.9M) / High = $9.46M (shown as $9.5M). These are rounded for board presentation. ④ TOTAL IF STOCK HELD TO 2031: Low $12.0M / Base $15.8M / High $19.4M — this replaces and is not additive to ③. It assumes RTO completion, ~30% dilution, and management-projected valuations. Forward-looking statements subject to SEC Rule 10b-5. The chart shows the year-by-year compensation build from close through FY31.</a:t>
+              <a:t>③ 5-yr total is ② ($4.86M) + earn-outs. Low = $5.81M / Base = $7.385M (shown as $7.4M) / High = $8.96M (shown as $9.0M). These are rounded for board presentation. ④ TOTAL IF STOCK HELD TO 2031: Low $11.5M / Base $15.3M / High $18.9M — this replaces and is not additive to ③. It assumes RTO completion, ~30% dilution, and management-projected valuations. Forward-looking statements subject to SEC Rule 10b-5. The chart shows the year-by-year compensation build from close through FY31.</a:t>
             </a:r>
             <a:endParaRPr lang="en-US" dirty="0"/>
           </a:p>
@@ -4001,6 +4001,10 @@
           </a:solidFill>
           <a:ln/>
         </p:spPr>
+        <p:txBody>
+          <a:bodyPr/>
+          <a:p/>
+        </p:txBody>
       </p:sp>
       <p:sp>
         <p:nvSpPr>
@@ -4026,6 +4030,10 @@
             <a:prstDash val="solid"/>
           </a:ln>
         </p:spPr>
+        <p:txBody>
+          <a:bodyPr/>
+          <a:p/>
+        </p:txBody>
       </p:sp>
       <p:sp>
         <p:nvSpPr>
@@ -4123,6 +4131,10 @@
             <a:prstDash val="solid"/>
           </a:ln>
         </p:spPr>
+        <p:txBody>
+          <a:bodyPr/>
+          <a:p/>
+        </p:txBody>
       </p:sp>
       <p:sp>
         <p:nvSpPr>
@@ -4220,6 +4232,10 @@
             <a:prstDash val="solid"/>
           </a:ln>
         </p:spPr>
+        <p:txBody>
+          <a:bodyPr/>
+          <a:p/>
+        </p:txBody>
       </p:sp>
       <p:sp>
         <p:nvSpPr>
@@ -4317,77 +4333,9 @@
             <a:prstDash val="solid"/>
           </a:ln>
         </p:spPr>
-      </p:sp>
-      <p:sp>
-        <p:nvSpPr>
-          <p:cNvPr id="14" name="Text 12"/>
-          <p:cNvSpPr txBox="1"/>
-          <p:nvPr/>
-        </p:nvSpPr>
-        <p:spPr>
-          <a:xfrm>
-            <a:off x="1005840" y="2304288"/>
-            <a:ext cx="3657600" cy="347472"/>
-          </a:xfrm>
-          <a:prstGeom prst="rect">
-            <a:avLst/>
-          </a:prstGeom>
-          <a:noFill/>
-          <a:ln/>
-        </p:spPr>
-        <p:txBody>
-          <a:bodyPr wrap="square" rtlCol="0" anchor="ctr"/>
-          <a:lstStyle/>
-          <a:p>
-            <a:pPr indent="0" marL="0">
-              <a:buNone/>
-            </a:pPr>
-            <a:r>
-              <a:rPr lang="en-US" sz="1300" dirty="0">
-                <a:solidFill>
-                  <a:srgbClr val="CCCCCC"/>
-                </a:solidFill>
-              </a:rPr>
-              <a:t>SSLC debts paid at face</a:t>
-            </a:r>
-            <a:endParaRPr lang="en-US" sz="1300" dirty="0"/>
-          </a:p>
-        </p:txBody>
-      </p:sp>
-      <p:sp>
-        <p:nvSpPr>
-          <p:cNvPr id="15" name="Text 13"/>
-          <p:cNvSpPr txBox="1"/>
-          <p:nvPr/>
-        </p:nvSpPr>
-        <p:spPr>
-          <a:xfrm>
-            <a:off x="5486400" y="2304288"/>
-            <a:ext cx="1005840" cy="347472"/>
-          </a:xfrm>
-          <a:prstGeom prst="rect">
-            <a:avLst/>
-          </a:prstGeom>
-          <a:noFill/>
-          <a:ln/>
-        </p:spPr>
-        <p:txBody>
-          <a:bodyPr wrap="square" rtlCol="0" anchor="ctr"/>
-          <a:lstStyle/>
-          <a:p>
-            <a:pPr algn="r" indent="0" marL="0">
-              <a:buNone/>
-            </a:pPr>
-            <a:r>
-              <a:rPr lang="en-US" sz="1300" b="1" dirty="0">
-                <a:solidFill>
-                  <a:srgbClr val="FFFFFF"/>
-                </a:solidFill>
-              </a:rPr>
-              <a:t>~$500K</a:t>
-            </a:r>
-            <a:endParaRPr lang="en-US" sz="1300" dirty="0"/>
-          </a:p>
+        <p:txBody>
+          <a:bodyPr/>
+          <a:p/>
         </p:txBody>
       </p:sp>
       <p:sp>
@@ -4414,6 +4362,10 @@
             <a:prstDash val="solid"/>
           </a:ln>
         </p:spPr>
+        <p:txBody>
+          <a:bodyPr/>
+          <a:p/>
+        </p:txBody>
       </p:sp>
       <p:sp>
         <p:nvSpPr>
@@ -4511,6 +4463,10 @@
             <a:prstDash val="solid"/>
           </a:ln>
         </p:spPr>
+        <p:txBody>
+          <a:bodyPr/>
+          <a:p/>
+        </p:txBody>
       </p:sp>
       <p:sp>
         <p:nvSpPr>
@@ -4542,7 +4498,7 @@
                   <a:srgbClr val="F26A21"/>
                 </a:solidFill>
               </a:rPr>
-              <a:t>① Cash &amp; debt relief at close — target by Feb 15th</a:t>
+              <a:t>① Cash at close — target by Feb 15th</a:t>
             </a:r>
             <a:endParaRPr lang="en-US" sz="1300" dirty="0"/>
           </a:p>
@@ -4578,7 +4534,7 @@
                   <a:srgbClr val="F26A21"/>
                 </a:solidFill>
               </a:rPr>
-              <a:t>$4.36M</a:t>
+              <a:t>$3.86M</a:t>
             </a:r>
             <a:endParaRPr lang="en-US" sz="1800" dirty="0"/>
           </a:p>
@@ -4608,6 +4564,10 @@
             <a:prstDash val="solid"/>
           </a:ln>
         </p:spPr>
+        <p:txBody>
+          <a:bodyPr/>
+          <a:p/>
+        </p:txBody>
       </p:sp>
       <p:sp>
         <p:nvSpPr>
@@ -4705,6 +4665,10 @@
             <a:prstDash val="solid"/>
           </a:ln>
         </p:spPr>
+        <p:txBody>
+          <a:bodyPr/>
+          <a:p/>
+        </p:txBody>
       </p:sp>
       <p:sp>
         <p:nvSpPr>
@@ -4772,7 +4736,7 @@
                   <a:srgbClr val="2ECC71"/>
                 </a:solidFill>
               </a:rPr>
-              <a:t>$5.36M</a:t>
+              <a:t>$4.86M</a:t>
             </a:r>
             <a:endParaRPr lang="en-US" sz="2000" dirty="0"/>
           </a:p>
@@ -8739,6 +8703,10 @@
           </a:solidFill>
           <a:ln/>
         </p:spPr>
+        <p:txBody>
+          <a:bodyPr/>
+          <a:p/>
+        </p:txBody>
       </p:sp>
       <p:sp>
         <p:nvSpPr>
@@ -8800,6 +8768,10 @@
             <a:prstDash val="solid"/>
           </a:ln>
         </p:spPr>
+        <p:txBody>
+          <a:bodyPr/>
+          <a:p/>
+        </p:txBody>
       </p:sp>
       <p:sp>
         <p:nvSpPr>
@@ -8867,7 +8839,7 @@
                   <a:srgbClr val="2ECC71"/>
                 </a:solidFill>
               </a:rPr>
-              <a:t>$6.3M</a:t>
+              <a:t>$5.8M</a:t>
             </a:r>
             <a:endParaRPr lang="en-US" sz="2600" dirty="0"/>
           </a:p>
@@ -8892,6 +8864,10 @@
           </a:solidFill>
           <a:ln/>
         </p:spPr>
+        <p:txBody>
+          <a:bodyPr/>
+          <a:p/>
+        </p:txBody>
       </p:sp>
       <p:sp>
         <p:nvSpPr>
@@ -8953,6 +8929,10 @@
             <a:prstDash val="solid"/>
           </a:ln>
         </p:spPr>
+        <p:txBody>
+          <a:bodyPr/>
+          <a:p/>
+        </p:txBody>
       </p:sp>
       <p:sp>
         <p:nvSpPr>
@@ -9020,7 +9000,7 @@
                   <a:srgbClr val="2ECC71"/>
                 </a:solidFill>
               </a:rPr>
-              <a:t>$7.9M</a:t>
+              <a:t>$7.4M</a:t>
             </a:r>
             <a:endParaRPr lang="en-US" sz="2600" dirty="0"/>
           </a:p>
@@ -9045,6 +9025,10 @@
           </a:solidFill>
           <a:ln/>
         </p:spPr>
+        <p:txBody>
+          <a:bodyPr/>
+          <a:p/>
+        </p:txBody>
       </p:sp>
       <p:sp>
         <p:nvSpPr>
@@ -9106,6 +9090,10 @@
             <a:prstDash val="solid"/>
           </a:ln>
         </p:spPr>
+        <p:txBody>
+          <a:bodyPr/>
+          <a:p/>
+        </p:txBody>
       </p:sp>
       <p:sp>
         <p:nvSpPr>
@@ -9173,7 +9161,7 @@
                   <a:srgbClr val="2ECC71"/>
                 </a:solidFill>
               </a:rPr>
-              <a:t>$9.5M</a:t>
+              <a:t>$9.0M</a:t>
             </a:r>
             <a:endParaRPr lang="en-US" sz="2600" dirty="0"/>
           </a:p>
@@ -9198,6 +9186,10 @@
           </a:solidFill>
           <a:ln/>
         </p:spPr>
+        <p:txBody>
+          <a:bodyPr/>
+          <a:p/>
+        </p:txBody>
       </p:sp>
       <p:sp>
         <p:nvSpPr>
@@ -9257,6 +9249,10 @@
             <a:prstDash val="solid"/>
           </a:ln>
         </p:spPr>
+        <p:txBody>
+          <a:bodyPr/>
+          <a:p/>
+        </p:txBody>
       </p:sp>
       <p:sp>
         <p:nvSpPr>
@@ -9318,6 +9314,10 @@
             <a:prstDash val="solid"/>
           </a:ln>
         </p:spPr>
+        <p:txBody>
+          <a:bodyPr/>
+          <a:p/>
+        </p:txBody>
       </p:sp>
       <p:sp>
         <p:nvSpPr>
@@ -9385,7 +9385,7 @@
                   <a:srgbClr val="F26A21"/>
                 </a:solidFill>
               </a:rPr>
-              <a:t>$12.0M</a:t>
+              <a:t>$11.5M</a:t>
             </a:r>
             <a:endParaRPr lang="en-US" sz="2200" dirty="0"/>
           </a:p>
@@ -9410,6 +9410,10 @@
           </a:solidFill>
           <a:ln/>
         </p:spPr>
+        <p:txBody>
+          <a:bodyPr/>
+          <a:p/>
+        </p:txBody>
       </p:sp>
       <p:sp>
         <p:nvSpPr>
@@ -9471,6 +9475,10 @@
             <a:prstDash val="solid"/>
           </a:ln>
         </p:spPr>
+        <p:txBody>
+          <a:bodyPr/>
+          <a:p/>
+        </p:txBody>
       </p:sp>
       <p:sp>
         <p:nvSpPr>
@@ -9538,7 +9546,7 @@
                   <a:srgbClr val="F26A21"/>
                 </a:solidFill>
               </a:rPr>
-              <a:t>$15.8M</a:t>
+              <a:t>$15.3M</a:t>
             </a:r>
             <a:endParaRPr lang="en-US" sz="2200" dirty="0"/>
           </a:p>
@@ -9563,6 +9571,10 @@
           </a:solidFill>
           <a:ln/>
         </p:spPr>
+        <p:txBody>
+          <a:bodyPr/>
+          <a:p/>
+        </p:txBody>
       </p:sp>
       <p:sp>
         <p:nvSpPr>
@@ -9624,6 +9636,10 @@
             <a:prstDash val="solid"/>
           </a:ln>
         </p:spPr>
+        <p:txBody>
+          <a:bodyPr/>
+          <a:p/>
+        </p:txBody>
       </p:sp>
       <p:sp>
         <p:nvSpPr>
@@ -9691,7 +9707,7 @@
                   <a:srgbClr val="F26A21"/>
                 </a:solidFill>
               </a:rPr>
-              <a:t>$19.4M</a:t>
+              <a:t>$18.9M</a:t>
             </a:r>
             <a:endParaRPr lang="en-US" sz="2200" dirty="0"/>
           </a:p>
@@ -9716,6 +9732,10 @@
           </a:solidFill>
           <a:ln/>
         </p:spPr>
+        <p:txBody>
+          <a:bodyPr/>
+          <a:p/>
+        </p:txBody>
       </p:sp>
       <p:sp>
         <p:nvSpPr>
@@ -9796,6 +9816,10 @@
           </a:solidFill>
           <a:ln/>
         </p:spPr>
+        <p:txBody>
+          <a:bodyPr/>
+          <a:p/>
+        </p:txBody>
       </p:sp>
       <p:sp>
         <p:nvSpPr>
@@ -11189,6 +11213,10 @@
           </a:solidFill>
           <a:ln/>
         </p:spPr>
+        <p:txBody>
+          <a:bodyPr/>
+          <a:p/>
+        </p:txBody>
       </p:sp>
       <p:sp>
         <p:nvSpPr>
@@ -11214,6 +11242,10 @@
             <a:prstDash val="solid"/>
           </a:ln>
         </p:spPr>
+        <p:txBody>
+          <a:bodyPr/>
+          <a:p/>
+        </p:txBody>
       </p:sp>
       <p:sp>
         <p:nvSpPr>
@@ -11311,6 +11343,10 @@
             <a:prstDash val="solid"/>
           </a:ln>
         </p:spPr>
+        <p:txBody>
+          <a:bodyPr/>
+          <a:p/>
+        </p:txBody>
       </p:sp>
       <p:sp>
         <p:nvSpPr>
@@ -11408,77 +11444,9 @@
             <a:prstDash val="solid"/>
           </a:ln>
         </p:spPr>
-      </p:sp>
-      <p:sp>
-        <p:nvSpPr>
-          <p:cNvPr id="11" name="Text 9"/>
-          <p:cNvSpPr txBox="1"/>
-          <p:nvPr/>
-        </p:nvSpPr>
-        <p:spPr>
-          <a:xfrm>
-            <a:off x="548640" y="1719072"/>
-            <a:ext cx="5303520" cy="292608"/>
-          </a:xfrm>
-          <a:prstGeom prst="rect">
-            <a:avLst/>
-          </a:prstGeom>
-          <a:noFill/>
-          <a:ln/>
-        </p:spPr>
-        <p:txBody>
-          <a:bodyPr wrap="square" rtlCol="0" anchor="ctr"/>
-          <a:lstStyle/>
-          <a:p>
-            <a:pPr indent="0" marL="0">
-              <a:buNone/>
-            </a:pPr>
-            <a:r>
-              <a:rPr lang="en-US" sz="1200" b="1" dirty="0">
-                <a:solidFill>
-                  <a:srgbClr val="FFFFFF"/>
-                </a:solidFill>
-              </a:rPr>
-              <a:t>SSLC debts paid at face (~$500K, to verify)</a:t>
-            </a:r>
-            <a:endParaRPr lang="en-US" sz="1200" dirty="0"/>
-          </a:p>
-        </p:txBody>
-      </p:sp>
-      <p:sp>
-        <p:nvSpPr>
-          <p:cNvPr id="12" name="Text 10"/>
-          <p:cNvSpPr txBox="1"/>
-          <p:nvPr/>
-        </p:nvSpPr>
-        <p:spPr>
-          <a:xfrm>
-            <a:off x="5989320" y="1719072"/>
-            <a:ext cx="2606040" cy="292608"/>
-          </a:xfrm>
-          <a:prstGeom prst="rect">
-            <a:avLst/>
-          </a:prstGeom>
-          <a:noFill/>
-          <a:ln/>
-        </p:spPr>
-        <p:txBody>
-          <a:bodyPr wrap="square" rtlCol="0" anchor="ctr"/>
-          <a:lstStyle/>
-          <a:p>
-            <a:pPr algn="r" indent="0" marL="0">
-              <a:buNone/>
-            </a:pPr>
-            <a:r>
-              <a:rPr lang="en-US" sz="1000" dirty="0">
-                <a:solidFill>
-                  <a:srgbClr val="888888"/>
-                </a:solidFill>
-              </a:rPr>
-              <a:t>at financing close (target Feb 15th)</a:t>
-            </a:r>
-            <a:endParaRPr lang="en-US" sz="1000" dirty="0"/>
-          </a:p>
+        <p:txBody>
+          <a:bodyPr/>
+          <a:p/>
         </p:txBody>
       </p:sp>
       <p:sp>
@@ -11505,6 +11473,10 @@
             <a:prstDash val="solid"/>
           </a:ln>
         </p:spPr>
+        <p:txBody>
+          <a:bodyPr/>
+          <a:p/>
+        </p:txBody>
       </p:sp>
       <p:sp>
         <p:nvSpPr>
@@ -11602,6 +11574,10 @@
             <a:prstDash val="solid"/>
           </a:ln>
         </p:spPr>
+        <p:txBody>
+          <a:bodyPr/>
+          <a:p/>
+        </p:txBody>
       </p:sp>
       <p:sp>
         <p:nvSpPr>
@@ -11699,6 +11675,10 @@
             <a:prstDash val="solid"/>
           </a:ln>
         </p:spPr>
+        <p:txBody>
+          <a:bodyPr/>
+          <a:p/>
+        </p:txBody>
       </p:sp>
       <p:sp>
         <p:nvSpPr>
@@ -11796,6 +11776,10 @@
             <a:prstDash val="solid"/>
           </a:ln>
         </p:spPr>
+        <p:txBody>
+          <a:bodyPr/>
+          <a:p/>
+        </p:txBody>
       </p:sp>
       <p:sp>
         <p:nvSpPr>
@@ -11893,6 +11877,10 @@
             <a:prstDash val="solid"/>
           </a:ln>
         </p:spPr>
+        <p:txBody>
+          <a:bodyPr/>
+          <a:p/>
+        </p:txBody>
       </p:sp>
       <p:sp>
         <p:nvSpPr>
@@ -11990,6 +11978,10 @@
             <a:prstDash val="solid"/>
           </a:ln>
         </p:spPr>
+        <p:txBody>
+          <a:bodyPr/>
+          <a:p/>
+        </p:txBody>
       </p:sp>
       <p:sp>
         <p:nvSpPr>

--- a/drafts/Exos_SSLC_Board_Offer_Overview_2026-10-10_r2.pptx
+++ b/drafts/Exos_SSLC_Board_Offer_Overview_2026-10-10_r2.pptx
@@ -8,6 +8,7 @@
     <p:sldId id="256" r:id="rId2"/>
     <p:sldId id="257" r:id="rId3"/>
     <p:sldId id="258" r:id="rId4"/>
+    <p:sldId id="266" r:id="rId17"/>
     <p:sldId id="259" r:id="rId5"/>
     <p:sldId id="260" r:id="rId6"/>
     <p:sldId id="261" r:id="rId7"/>
@@ -641,6 +642,128 @@
 </p:notes>
 </file>
 
+<file path=ppt/notesSlides/notesSlide11.xml><?xml version="1.0" encoding="utf-8"?>
+<p:notes xmlns:a="http://schemas.openxmlformats.org/drawingml/2006/main" xmlns:p="http://schemas.openxmlformats.org/presentationml/2006/main" xmlns:r="http://schemas.openxmlformats.org/officeDocument/2006/relationships">
+  <p:cSld>
+    <p:spTree>
+      <p:nvGrpSpPr>
+        <p:cNvPr id="1" name=""/>
+        <p:cNvGrpSpPr/>
+        <p:nvPr/>
+      </p:nvGrpSpPr>
+      <p:grpSpPr>
+        <a:xfrm>
+          <a:off x="0" y="0"/>
+          <a:ext cx="0" cy="0"/>
+          <a:chOff x="0" y="0"/>
+          <a:chExt cx="0" cy="0"/>
+        </a:xfrm>
+      </p:grpSpPr>
+      <p:sp>
+        <p:nvSpPr>
+          <p:cNvPr id="2" name="Slide Image Placeholder 1"/>
+          <p:cNvSpPr>
+            <a:spLocks noGrp="1"/>
+          </p:cNvSpPr>
+          <p:nvPr>
+            <p:ph type="sldImg" idx="2"/>
+          </p:nvPr>
+        </p:nvSpPr>
+        <p:spPr/>
+      </p:sp>
+      <p:sp>
+        <p:nvSpPr>
+          <p:cNvPr id="3" name="Notes Placeholder 2"/>
+          <p:cNvSpPr>
+            <a:spLocks noGrp="1"/>
+          </p:cNvSpPr>
+          <p:nvPr>
+            <p:ph type="body" idx="3" sz="quarter"/>
+          </p:nvPr>
+        </p:nvSpPr>
+        <p:spPr/>
+        <p:txBody>
+          <a:bodyPr/>
+          <a:lstStyle/>
+          <a:p>
+            <a:r>
+              <a:t>Sources:</a:t>
+            </a:r>
+            <a:br/>
+            <a:r>
+              <a:t>  Equity: QB Balance Sheet 8/21/2026 (data-room/SSLC/2026-7_BS_8-21-26.pdf). Total paid-in $1,014,465; Exos paid $789,572 per AAA Oct 2023.</a:t>
+            </a:r>
+            <a:br/>
+            <a:r>
+              <a:t>  Accum. deficit −$2,571,012.99 per QB BS 8/21/2026.</a:t>
+            </a:r>
+            <a:br/>
+            <a:r>
+              <a:t>  Total equity −$1,403,075 per Board Package 10/6/2026.</a:t>
+            </a:r>
+            <a:br/>
+            <a:r>
+              <a:t>  Debt: Board Package 10/6/2026 + QB BS 8/21. Total loans &amp; notes $1,027,783 confirmed.</a:t>
+            </a:r>
+            <a:br/>
+            <a:r>
+              <a:t>  Facility costs: QB P&amp;L FY26 CONFIRMED $353,978; FY27 Jul–Aug21 $32,860 (partial).</a:t>
+            </a:r>
+            <a:br/>
+            <a:r>
+              <a:t>  2-yr ~$967K estimate uses FY26 monthly rate ~$29.5K/mo for the remainder; CAVEAT: FY25 not on disk.</a:t>
+            </a:r>
+            <a:br/>
+            <a:r>
+              <a:t>  Microcosm offset: 50% share is MANAGEMENT ASSUMPTION — no written cost-sharing agreement found.</a:t>
+            </a:r>
+            <a:br/>
+            <a:r>
+              <a:t>  Must verify: (1) SSLC paid 100% of costs, (2) written agreement, (3) Microcosm's share allocation.</a:t>
+            </a:r>
+            <a:br/>
+            <a:r>
+              <a:t>  At 50% share offset ~$483K &gt; Due-to-Microcosm $451K → net creditor ~$32K.</a:t>
+            </a:r>
+            <a:br/>
+            <a:r>
+              <a:t>  At 40%: net-owe ~$65K; at 60%: net creditor ~$129K.</a:t>
+            </a:r>
+            <a:br/>
+            <a:r>
+              <a:t>  $864K billed-ahead balance: from QB FY27 Q1 actual. Nature disputed; full QB access requested.</a:t>
+            </a:r>
+            <a:br/>
+            <a:r>
+              <a:t>  CAUTION: Do not represent offset as a verified legal claim without written agreement.</a:t>
+            </a:r>
+            <a:br/>
+            <a:r>
+              <a:t>Source file: drafts/SSLC_QB_Equity_Debt_Microcosm_Facility_2026-10-10.xlsx</a:t>
+            </a:r>
+          </a:p>
+        </p:txBody>
+      </p:sp>
+      <p:sp>
+        <p:nvSpPr>
+          <p:cNvPr id="4" name="Slide Number Placeholder 3"/>
+          <p:cNvSpPr>
+            <a:spLocks noGrp="1"/>
+          </p:cNvSpPr>
+          <p:nvPr>
+            <p:ph type="sldNum" idx="5" sz="quarter"/>
+          </p:nvPr>
+        </p:nvSpPr>
+        <p:spPr/>
+      </p:sp>
+    </p:spTree>
+  </p:cSld>
+  <p:clrMapOvr>
+    <a:masterClrMapping/>
+  </p:clrMapOvr>
+</p:notes>
+</file>
+
 <file path=ppt/notesSlides/notesSlide2.xml><?xml version="1.0" encoding="utf-8"?>
 <p:notes xmlns:a="http://schemas.openxmlformats.org/drawingml/2006/main" xmlns:r="http://schemas.openxmlformats.org/officeDocument/2006/relationships" xmlns:p="http://schemas.openxmlformats.org/presentationml/2006/main">
   <p:cSld>
@@ -2901,6 +3024,1781 @@
               <a:t>The Board is asked to confirm §3 exclusivity. Questions and open items welcome.</a:t>
             </a:r>
             <a:endParaRPr lang="en-US" sz="1300" dirty="0"/>
+          </a:p>
+        </p:txBody>
+      </p:sp>
+    </p:spTree>
+  </p:cSld>
+  <p:clrMapOvr>
+    <a:masterClrMapping/>
+  </p:clrMapOvr>
+</p:sld>
+</file>
+
+<file path=ppt/slides/slide11.xml><?xml version="1.0" encoding="utf-8"?>
+<p:sld xmlns:a="http://schemas.openxmlformats.org/drawingml/2006/main" xmlns:p="http://schemas.openxmlformats.org/presentationml/2006/main" xmlns:r="http://schemas.openxmlformats.org/officeDocument/2006/relationships">
+  <p:cSld>
+    <p:bg>
+      <p:bgPr>
+        <a:solidFill>
+          <a:srgbClr val="111111"/>
+        </a:solidFill>
+        <a:effectLst/>
+      </p:bgPr>
+    </p:bg>
+    <p:spTree>
+      <p:nvGrpSpPr>
+        <p:cNvPr id="1" name=""/>
+        <p:cNvGrpSpPr/>
+        <p:nvPr/>
+      </p:nvGrpSpPr>
+      <p:grpSpPr/>
+      <p:sp>
+        <p:nvSpPr>
+          <p:cNvPr id="2" name="Rectangle 1"/>
+          <p:cNvSpPr/>
+          <p:nvPr/>
+        </p:nvSpPr>
+        <p:spPr>
+          <a:xfrm>
+            <a:off x="0" y="0"/>
+            <a:ext cx="9144000" cy="50292"/>
+          </a:xfrm>
+          <a:prstGeom prst="rect">
+            <a:avLst/>
+          </a:prstGeom>
+          <a:solidFill>
+            <a:srgbClr val="F26A21"/>
+          </a:solidFill>
+          <a:ln>
+            <a:noFill/>
+          </a:ln>
+        </p:spPr>
+        <p:style>
+          <a:lnRef idx="1">
+            <a:schemeClr val="accent1"/>
+          </a:lnRef>
+          <a:fillRef idx="3">
+            <a:schemeClr val="accent1"/>
+          </a:fillRef>
+          <a:effectRef idx="2">
+            <a:schemeClr val="accent1"/>
+          </a:effectRef>
+          <a:fontRef idx="minor">
+            <a:schemeClr val="lt1"/>
+          </a:fontRef>
+        </p:style>
+        <p:txBody>
+          <a:bodyPr rtlCol="0" anchor="ctr"/>
+          <a:lstStyle/>
+          <a:p>
+            <a:pPr algn="ctr"/>
+          </a:p>
+        </p:txBody>
+      </p:sp>
+      <p:sp>
+        <p:nvSpPr>
+          <p:cNvPr id="3" name="TextBox 2"/>
+          <p:cNvSpPr txBox="1"/>
+          <p:nvPr/>
+        </p:nvSpPr>
+        <p:spPr>
+          <a:xfrm>
+            <a:off x="228600" y="64008"/>
+            <a:ext cx="8686800" cy="457200"/>
+          </a:xfrm>
+          <a:prstGeom prst="rect">
+            <a:avLst/>
+          </a:prstGeom>
+          <a:noFill/>
+        </p:spPr>
+        <p:txBody>
+          <a:bodyPr wrap="square">
+            <a:spAutoFit/>
+          </a:bodyPr>
+          <a:lstStyle/>
+          <a:p>
+            <a:pPr algn="l"/>
+            <a:r>
+              <a:rPr sz="2000" b="1" i="0">
+                <a:solidFill>
+                  <a:srgbClr val="FFFFFF"/>
+                </a:solidFill>
+                <a:latin typeface="Cambria"/>
+              </a:rPr>
+              <a:t>SSLC Capital &amp; Debt: What's on the Books</a:t>
+            </a:r>
+          </a:p>
+        </p:txBody>
+      </p:sp>
+      <p:sp>
+        <p:nvSpPr>
+          <p:cNvPr id="4" name="Rectangle 3"/>
+          <p:cNvSpPr/>
+          <p:nvPr/>
+        </p:nvSpPr>
+        <p:spPr>
+          <a:xfrm>
+            <a:off x="109728" y="594360"/>
+            <a:ext cx="4160520" cy="2999232"/>
+          </a:xfrm>
+          <a:prstGeom prst="rect">
+            <a:avLst/>
+          </a:prstGeom>
+          <a:solidFill>
+            <a:srgbClr val="222222"/>
+          </a:solidFill>
+          <a:ln>
+            <a:noFill/>
+          </a:ln>
+        </p:spPr>
+        <p:style>
+          <a:lnRef idx="1">
+            <a:schemeClr val="accent1"/>
+          </a:lnRef>
+          <a:fillRef idx="3">
+            <a:schemeClr val="accent1"/>
+          </a:fillRef>
+          <a:effectRef idx="2">
+            <a:schemeClr val="accent1"/>
+          </a:effectRef>
+          <a:fontRef idx="minor">
+            <a:schemeClr val="lt1"/>
+          </a:fontRef>
+        </p:style>
+        <p:txBody>
+          <a:bodyPr rtlCol="0" anchor="ctr"/>
+          <a:lstStyle/>
+          <a:p>
+            <a:pPr algn="ctr"/>
+          </a:p>
+        </p:txBody>
+      </p:sp>
+      <p:sp>
+        <p:nvSpPr>
+          <p:cNvPr id="5" name="Rectangle 4"/>
+          <p:cNvSpPr/>
+          <p:nvPr/>
+        </p:nvSpPr>
+        <p:spPr>
+          <a:xfrm>
+            <a:off x="4407408" y="594360"/>
+            <a:ext cx="4617720" cy="2999232"/>
+          </a:xfrm>
+          <a:prstGeom prst="rect">
+            <a:avLst/>
+          </a:prstGeom>
+          <a:solidFill>
+            <a:srgbClr val="222222"/>
+          </a:solidFill>
+          <a:ln>
+            <a:noFill/>
+          </a:ln>
+        </p:spPr>
+        <p:style>
+          <a:lnRef idx="1">
+            <a:schemeClr val="accent1"/>
+          </a:lnRef>
+          <a:fillRef idx="3">
+            <a:schemeClr val="accent1"/>
+          </a:fillRef>
+          <a:effectRef idx="2">
+            <a:schemeClr val="accent1"/>
+          </a:effectRef>
+          <a:fontRef idx="minor">
+            <a:schemeClr val="lt1"/>
+          </a:fontRef>
+        </p:style>
+        <p:txBody>
+          <a:bodyPr rtlCol="0" anchor="ctr"/>
+          <a:lstStyle/>
+          <a:p>
+            <a:pPr algn="ctr"/>
+          </a:p>
+        </p:txBody>
+      </p:sp>
+      <p:sp>
+        <p:nvSpPr>
+          <p:cNvPr id="6" name="Rectangle 5"/>
+          <p:cNvSpPr/>
+          <p:nvPr/>
+        </p:nvSpPr>
+        <p:spPr>
+          <a:xfrm>
+            <a:off x="109728" y="594360"/>
+            <a:ext cx="4160520" cy="246888"/>
+          </a:xfrm>
+          <a:prstGeom prst="rect">
+            <a:avLst/>
+          </a:prstGeom>
+          <a:solidFill>
+            <a:srgbClr val="1A1A1A"/>
+          </a:solidFill>
+          <a:ln>
+            <a:noFill/>
+          </a:ln>
+        </p:spPr>
+        <p:style>
+          <a:lnRef idx="1">
+            <a:schemeClr val="accent1"/>
+          </a:lnRef>
+          <a:fillRef idx="3">
+            <a:schemeClr val="accent1"/>
+          </a:fillRef>
+          <a:effectRef idx="2">
+            <a:schemeClr val="accent1"/>
+          </a:effectRef>
+          <a:fontRef idx="minor">
+            <a:schemeClr val="lt1"/>
+          </a:fontRef>
+        </p:style>
+        <p:txBody>
+          <a:bodyPr rtlCol="0" anchor="ctr"/>
+          <a:lstStyle/>
+          <a:p>
+            <a:pPr algn="ctr"/>
+          </a:p>
+        </p:txBody>
+      </p:sp>
+      <p:sp>
+        <p:nvSpPr>
+          <p:cNvPr id="7" name="Rectangle 6"/>
+          <p:cNvSpPr/>
+          <p:nvPr/>
+        </p:nvSpPr>
+        <p:spPr>
+          <a:xfrm>
+            <a:off x="4407408" y="594360"/>
+            <a:ext cx="4617720" cy="246888"/>
+          </a:xfrm>
+          <a:prstGeom prst="rect">
+            <a:avLst/>
+          </a:prstGeom>
+          <a:solidFill>
+            <a:srgbClr val="1A1A1A"/>
+          </a:solidFill>
+          <a:ln>
+            <a:noFill/>
+          </a:ln>
+        </p:spPr>
+        <p:style>
+          <a:lnRef idx="1">
+            <a:schemeClr val="accent1"/>
+          </a:lnRef>
+          <a:fillRef idx="3">
+            <a:schemeClr val="accent1"/>
+          </a:fillRef>
+          <a:effectRef idx="2">
+            <a:schemeClr val="accent1"/>
+          </a:effectRef>
+          <a:fontRef idx="minor">
+            <a:schemeClr val="lt1"/>
+          </a:fontRef>
+        </p:style>
+        <p:txBody>
+          <a:bodyPr rtlCol="0" anchor="ctr"/>
+          <a:lstStyle/>
+          <a:p>
+            <a:pPr algn="ctr"/>
+          </a:p>
+        </p:txBody>
+      </p:sp>
+      <p:sp>
+        <p:nvSpPr>
+          <p:cNvPr id="8" name="Rectangle 7"/>
+          <p:cNvSpPr/>
+          <p:nvPr/>
+        </p:nvSpPr>
+        <p:spPr>
+          <a:xfrm>
+            <a:off x="109728" y="594360"/>
+            <a:ext cx="36576" cy="246888"/>
+          </a:xfrm>
+          <a:prstGeom prst="rect">
+            <a:avLst/>
+          </a:prstGeom>
+          <a:solidFill>
+            <a:srgbClr val="F26A21"/>
+          </a:solidFill>
+          <a:ln>
+            <a:noFill/>
+          </a:ln>
+        </p:spPr>
+        <p:style>
+          <a:lnRef idx="1">
+            <a:schemeClr val="accent1"/>
+          </a:lnRef>
+          <a:fillRef idx="3">
+            <a:schemeClr val="accent1"/>
+          </a:fillRef>
+          <a:effectRef idx="2">
+            <a:schemeClr val="accent1"/>
+          </a:effectRef>
+          <a:fontRef idx="minor">
+            <a:schemeClr val="lt1"/>
+          </a:fontRef>
+        </p:style>
+        <p:txBody>
+          <a:bodyPr rtlCol="0" anchor="ctr"/>
+          <a:lstStyle/>
+          <a:p>
+            <a:pPr algn="ctr"/>
+          </a:p>
+        </p:txBody>
+      </p:sp>
+      <p:sp>
+        <p:nvSpPr>
+          <p:cNvPr id="9" name="Rectangle 8"/>
+          <p:cNvSpPr/>
+          <p:nvPr/>
+        </p:nvSpPr>
+        <p:spPr>
+          <a:xfrm>
+            <a:off x="4407408" y="594360"/>
+            <a:ext cx="36576" cy="246888"/>
+          </a:xfrm>
+          <a:prstGeom prst="rect">
+            <a:avLst/>
+          </a:prstGeom>
+          <a:solidFill>
+            <a:srgbClr val="F26A21"/>
+          </a:solidFill>
+          <a:ln>
+            <a:noFill/>
+          </a:ln>
+        </p:spPr>
+        <p:style>
+          <a:lnRef idx="1">
+            <a:schemeClr val="accent1"/>
+          </a:lnRef>
+          <a:fillRef idx="3">
+            <a:schemeClr val="accent1"/>
+          </a:fillRef>
+          <a:effectRef idx="2">
+            <a:schemeClr val="accent1"/>
+          </a:effectRef>
+          <a:fontRef idx="minor">
+            <a:schemeClr val="lt1"/>
+          </a:fontRef>
+        </p:style>
+        <p:txBody>
+          <a:bodyPr rtlCol="0" anchor="ctr"/>
+          <a:lstStyle/>
+          <a:p>
+            <a:pPr algn="ctr"/>
+          </a:p>
+        </p:txBody>
+      </p:sp>
+      <p:sp>
+        <p:nvSpPr>
+          <p:cNvPr id="10" name="TextBox 9"/>
+          <p:cNvSpPr txBox="1"/>
+          <p:nvPr/>
+        </p:nvSpPr>
+        <p:spPr>
+          <a:xfrm>
+            <a:off x="201168" y="640080"/>
+            <a:ext cx="4023359" cy="182880"/>
+          </a:xfrm>
+          <a:prstGeom prst="rect">
+            <a:avLst/>
+          </a:prstGeom>
+          <a:noFill/>
+        </p:spPr>
+        <p:txBody>
+          <a:bodyPr wrap="square">
+            <a:spAutoFit/>
+          </a:bodyPr>
+          <a:lstStyle/>
+          <a:p>
+            <a:pPr algn="l"/>
+            <a:r>
+              <a:rPr sz="850" b="1" i="0">
+                <a:solidFill>
+                  <a:srgbClr val="F26A21"/>
+                </a:solidFill>
+                <a:latin typeface="Calibri"/>
+              </a:rPr>
+              <a:t>WHAT INVESTORS PAID IN</a:t>
+            </a:r>
+          </a:p>
+        </p:txBody>
+      </p:sp>
+      <p:sp>
+        <p:nvSpPr>
+          <p:cNvPr id="11" name="TextBox 10"/>
+          <p:cNvSpPr txBox="1"/>
+          <p:nvPr/>
+        </p:nvSpPr>
+        <p:spPr>
+          <a:xfrm>
+            <a:off x="4498848" y="640080"/>
+            <a:ext cx="4480559" cy="182880"/>
+          </a:xfrm>
+          <a:prstGeom prst="rect">
+            <a:avLst/>
+          </a:prstGeom>
+          <a:noFill/>
+        </p:spPr>
+        <p:txBody>
+          <a:bodyPr wrap="square">
+            <a:spAutoFit/>
+          </a:bodyPr>
+          <a:lstStyle/>
+          <a:p>
+            <a:pPr algn="l"/>
+            <a:r>
+              <a:rPr sz="850" b="1" i="0">
+                <a:solidFill>
+                  <a:srgbClr val="F26A21"/>
+                </a:solidFill>
+                <a:latin typeface="Calibri"/>
+              </a:rPr>
+              <a:t>WHAT SSLC OWES  (10/2/2026)</a:t>
+            </a:r>
+          </a:p>
+        </p:txBody>
+      </p:sp>
+      <p:sp>
+        <p:nvSpPr>
+          <p:cNvPr id="12" name="TextBox 11"/>
+          <p:cNvSpPr txBox="1"/>
+          <p:nvPr/>
+        </p:nvSpPr>
+        <p:spPr>
+          <a:xfrm>
+            <a:off x="219456" y="914400"/>
+            <a:ext cx="2514600" cy="205740"/>
+          </a:xfrm>
+          <a:prstGeom prst="rect">
+            <a:avLst/>
+          </a:prstGeom>
+          <a:noFill/>
+        </p:spPr>
+        <p:txBody>
+          <a:bodyPr wrap="square">
+            <a:spAutoFit/>
+          </a:bodyPr>
+          <a:lstStyle/>
+          <a:p>
+            <a:pPr algn="l"/>
+            <a:r>
+              <a:rPr sz="800" b="0" i="0">
+                <a:solidFill>
+                  <a:srgbClr val="CCCCCC"/>
+                </a:solidFill>
+                <a:latin typeface="Calibri"/>
+              </a:rPr>
+              <a:t>Common stock (Acct 3010)</a:t>
+            </a:r>
+          </a:p>
+        </p:txBody>
+      </p:sp>
+      <p:sp>
+        <p:nvSpPr>
+          <p:cNvPr id="13" name="TextBox 12"/>
+          <p:cNvSpPr txBox="1"/>
+          <p:nvPr/>
+        </p:nvSpPr>
+        <p:spPr>
+          <a:xfrm>
+            <a:off x="2642616" y="914400"/>
+            <a:ext cx="1481328" cy="205740"/>
+          </a:xfrm>
+          <a:prstGeom prst="rect">
+            <a:avLst/>
+          </a:prstGeom>
+          <a:noFill/>
+        </p:spPr>
+        <p:txBody>
+          <a:bodyPr wrap="square">
+            <a:spAutoFit/>
+          </a:bodyPr>
+          <a:lstStyle/>
+          <a:p>
+            <a:pPr algn="r"/>
+            <a:r>
+              <a:rPr sz="900" b="0" i="0">
+                <a:solidFill>
+                  <a:srgbClr val="CCCCCC"/>
+                </a:solidFill>
+                <a:latin typeface="Calibri"/>
+              </a:rPr>
+              <a:t>$1,010,423</a:t>
+            </a:r>
+          </a:p>
+        </p:txBody>
+      </p:sp>
+      <p:sp>
+        <p:nvSpPr>
+          <p:cNvPr id="14" name="TextBox 13"/>
+          <p:cNvSpPr txBox="1"/>
+          <p:nvPr/>
+        </p:nvSpPr>
+        <p:spPr>
+          <a:xfrm>
+            <a:off x="219456" y="1138428"/>
+            <a:ext cx="2514600" cy="205740"/>
+          </a:xfrm>
+          <a:prstGeom prst="rect">
+            <a:avLst/>
+          </a:prstGeom>
+          <a:noFill/>
+        </p:spPr>
+        <p:txBody>
+          <a:bodyPr wrap="square">
+            <a:spAutoFit/>
+          </a:bodyPr>
+          <a:lstStyle/>
+          <a:p>
+            <a:pPr algn="l"/>
+            <a:r>
+              <a:rPr sz="800" b="0" i="0">
+                <a:solidFill>
+                  <a:srgbClr val="CCCCCC"/>
+                </a:solidFill>
+                <a:latin typeface="Calibri"/>
+              </a:rPr>
+              <a:t>APIC (Acct 3020)</a:t>
+            </a:r>
+          </a:p>
+        </p:txBody>
+      </p:sp>
+      <p:sp>
+        <p:nvSpPr>
+          <p:cNvPr id="15" name="TextBox 14"/>
+          <p:cNvSpPr txBox="1"/>
+          <p:nvPr/>
+        </p:nvSpPr>
+        <p:spPr>
+          <a:xfrm>
+            <a:off x="2642616" y="1138428"/>
+            <a:ext cx="1481328" cy="205740"/>
+          </a:xfrm>
+          <a:prstGeom prst="rect">
+            <a:avLst/>
+          </a:prstGeom>
+          <a:noFill/>
+        </p:spPr>
+        <p:txBody>
+          <a:bodyPr wrap="square">
+            <a:spAutoFit/>
+          </a:bodyPr>
+          <a:lstStyle/>
+          <a:p>
+            <a:pPr algn="r"/>
+            <a:r>
+              <a:rPr sz="900" b="0" i="0">
+                <a:solidFill>
+                  <a:srgbClr val="CCCCCC"/>
+                </a:solidFill>
+                <a:latin typeface="Calibri"/>
+              </a:rPr>
+              <a:t>$4,042</a:t>
+            </a:r>
+          </a:p>
+        </p:txBody>
+      </p:sp>
+      <p:sp>
+        <p:nvSpPr>
+          <p:cNvPr id="16" name="Rectangle 15"/>
+          <p:cNvSpPr/>
+          <p:nvPr/>
+        </p:nvSpPr>
+        <p:spPr>
+          <a:xfrm>
+            <a:off x="219456" y="1435608"/>
+            <a:ext cx="3931920" cy="13716"/>
+          </a:xfrm>
+          <a:prstGeom prst="rect">
+            <a:avLst/>
+          </a:prstGeom>
+          <a:solidFill>
+            <a:srgbClr val="888888"/>
+          </a:solidFill>
+          <a:ln>
+            <a:noFill/>
+          </a:ln>
+        </p:spPr>
+        <p:style>
+          <a:lnRef idx="1">
+            <a:schemeClr val="accent1"/>
+          </a:lnRef>
+          <a:fillRef idx="3">
+            <a:schemeClr val="accent1"/>
+          </a:fillRef>
+          <a:effectRef idx="2">
+            <a:schemeClr val="accent1"/>
+          </a:effectRef>
+          <a:fontRef idx="minor">
+            <a:schemeClr val="lt1"/>
+          </a:fontRef>
+        </p:style>
+        <p:txBody>
+          <a:bodyPr rtlCol="0" anchor="ctr"/>
+          <a:lstStyle/>
+          <a:p>
+            <a:pPr algn="ctr"/>
+          </a:p>
+        </p:txBody>
+      </p:sp>
+      <p:sp>
+        <p:nvSpPr>
+          <p:cNvPr id="17" name="TextBox 16"/>
+          <p:cNvSpPr txBox="1"/>
+          <p:nvPr/>
+        </p:nvSpPr>
+        <p:spPr>
+          <a:xfrm>
+            <a:off x="219456" y="1586484"/>
+            <a:ext cx="2514600" cy="205740"/>
+          </a:xfrm>
+          <a:prstGeom prst="rect">
+            <a:avLst/>
+          </a:prstGeom>
+          <a:noFill/>
+        </p:spPr>
+        <p:txBody>
+          <a:bodyPr wrap="square">
+            <a:spAutoFit/>
+          </a:bodyPr>
+          <a:lstStyle/>
+          <a:p>
+            <a:pPr algn="l"/>
+            <a:r>
+              <a:rPr sz="800" b="0" i="0">
+                <a:solidFill>
+                  <a:srgbClr val="CCCCCC"/>
+                </a:solidFill>
+                <a:latin typeface="Calibri"/>
+              </a:rPr>
+              <a:t>Total paid-in capital</a:t>
+            </a:r>
+          </a:p>
+        </p:txBody>
+      </p:sp>
+      <p:sp>
+        <p:nvSpPr>
+          <p:cNvPr id="18" name="TextBox 17"/>
+          <p:cNvSpPr txBox="1"/>
+          <p:nvPr/>
+        </p:nvSpPr>
+        <p:spPr>
+          <a:xfrm>
+            <a:off x="2642616" y="1586484"/>
+            <a:ext cx="1481328" cy="205740"/>
+          </a:xfrm>
+          <a:prstGeom prst="rect">
+            <a:avLst/>
+          </a:prstGeom>
+          <a:noFill/>
+        </p:spPr>
+        <p:txBody>
+          <a:bodyPr wrap="square">
+            <a:spAutoFit/>
+          </a:bodyPr>
+          <a:lstStyle/>
+          <a:p>
+            <a:pPr algn="r"/>
+            <a:r>
+              <a:rPr sz="900" b="1" i="0">
+                <a:solidFill>
+                  <a:srgbClr val="FFFFFF"/>
+                </a:solidFill>
+                <a:latin typeface="Calibri"/>
+              </a:rPr>
+              <a:t>$1,014,465</a:t>
+            </a:r>
+          </a:p>
+        </p:txBody>
+      </p:sp>
+      <p:sp>
+        <p:nvSpPr>
+          <p:cNvPr id="19" name="TextBox 18"/>
+          <p:cNvSpPr txBox="1"/>
+          <p:nvPr/>
+        </p:nvSpPr>
+        <p:spPr>
+          <a:xfrm>
+            <a:off x="219456" y="1810512"/>
+            <a:ext cx="2514600" cy="205740"/>
+          </a:xfrm>
+          <a:prstGeom prst="rect">
+            <a:avLst/>
+          </a:prstGeom>
+          <a:noFill/>
+        </p:spPr>
+        <p:txBody>
+          <a:bodyPr wrap="square">
+            <a:spAutoFit/>
+          </a:bodyPr>
+          <a:lstStyle/>
+          <a:p>
+            <a:pPr algn="l"/>
+            <a:r>
+              <a:rPr sz="800" b="0" i="0">
+                <a:solidFill>
+                  <a:srgbClr val="CCCCCC"/>
+                </a:solidFill>
+                <a:latin typeface="Calibri"/>
+              </a:rPr>
+              <a:t>Exos: 18.06% → $789,572</a:t>
+            </a:r>
+          </a:p>
+        </p:txBody>
+      </p:sp>
+      <p:sp>
+        <p:nvSpPr>
+          <p:cNvPr id="20" name="TextBox 19"/>
+          <p:cNvSpPr txBox="1"/>
+          <p:nvPr/>
+        </p:nvSpPr>
+        <p:spPr>
+          <a:xfrm>
+            <a:off x="2642616" y="1810512"/>
+            <a:ext cx="1481328" cy="205740"/>
+          </a:xfrm>
+          <a:prstGeom prst="rect">
+            <a:avLst/>
+          </a:prstGeom>
+          <a:noFill/>
+        </p:spPr>
+        <p:txBody>
+          <a:bodyPr wrap="square">
+            <a:spAutoFit/>
+          </a:bodyPr>
+          <a:lstStyle/>
+          <a:p>
+            <a:pPr algn="r"/>
+            <a:r>
+              <a:rPr sz="900" b="1" i="0">
+                <a:solidFill>
+                  <a:srgbClr val="F26A21"/>
+                </a:solidFill>
+                <a:latin typeface="Calibri"/>
+              </a:rPr>
+              <a:t>~78% of above</a:t>
+            </a:r>
+          </a:p>
+        </p:txBody>
+      </p:sp>
+      <p:sp>
+        <p:nvSpPr>
+          <p:cNvPr id="21" name="Rectangle 20"/>
+          <p:cNvSpPr/>
+          <p:nvPr/>
+        </p:nvSpPr>
+        <p:spPr>
+          <a:xfrm>
+            <a:off x="219456" y="2107692"/>
+            <a:ext cx="3931920" cy="13716"/>
+          </a:xfrm>
+          <a:prstGeom prst="rect">
+            <a:avLst/>
+          </a:prstGeom>
+          <a:solidFill>
+            <a:srgbClr val="888888"/>
+          </a:solidFill>
+          <a:ln>
+            <a:noFill/>
+          </a:ln>
+        </p:spPr>
+        <p:style>
+          <a:lnRef idx="1">
+            <a:schemeClr val="accent1"/>
+          </a:lnRef>
+          <a:fillRef idx="3">
+            <a:schemeClr val="accent1"/>
+          </a:fillRef>
+          <a:effectRef idx="2">
+            <a:schemeClr val="accent1"/>
+          </a:effectRef>
+          <a:fontRef idx="minor">
+            <a:schemeClr val="lt1"/>
+          </a:fontRef>
+        </p:style>
+        <p:txBody>
+          <a:bodyPr rtlCol="0" anchor="ctr"/>
+          <a:lstStyle/>
+          <a:p>
+            <a:pPr algn="ctr"/>
+          </a:p>
+        </p:txBody>
+      </p:sp>
+      <p:sp>
+        <p:nvSpPr>
+          <p:cNvPr id="22" name="TextBox 21"/>
+          <p:cNvSpPr txBox="1"/>
+          <p:nvPr/>
+        </p:nvSpPr>
+        <p:spPr>
+          <a:xfrm>
+            <a:off x="219456" y="2258568"/>
+            <a:ext cx="2514600" cy="205740"/>
+          </a:xfrm>
+          <a:prstGeom prst="rect">
+            <a:avLst/>
+          </a:prstGeom>
+          <a:noFill/>
+        </p:spPr>
+        <p:txBody>
+          <a:bodyPr wrap="square">
+            <a:spAutoFit/>
+          </a:bodyPr>
+          <a:lstStyle/>
+          <a:p>
+            <a:pPr algn="l"/>
+            <a:r>
+              <a:rPr sz="800" b="0" i="0">
+                <a:solidFill>
+                  <a:srgbClr val="CCCCCC"/>
+                </a:solidFill>
+                <a:latin typeface="Calibri"/>
+              </a:rPr>
+              <a:t>Accum. deficit (thru FY26)</a:t>
+            </a:r>
+          </a:p>
+        </p:txBody>
+      </p:sp>
+      <p:sp>
+        <p:nvSpPr>
+          <p:cNvPr id="23" name="TextBox 22"/>
+          <p:cNvSpPr txBox="1"/>
+          <p:nvPr/>
+        </p:nvSpPr>
+        <p:spPr>
+          <a:xfrm>
+            <a:off x="2642616" y="2258568"/>
+            <a:ext cx="1481328" cy="205740"/>
+          </a:xfrm>
+          <a:prstGeom prst="rect">
+            <a:avLst/>
+          </a:prstGeom>
+          <a:noFill/>
+        </p:spPr>
+        <p:txBody>
+          <a:bodyPr wrap="square">
+            <a:spAutoFit/>
+          </a:bodyPr>
+          <a:lstStyle/>
+          <a:p>
+            <a:pPr algn="r"/>
+            <a:r>
+              <a:rPr sz="900" b="1" i="0">
+                <a:solidFill>
+                  <a:srgbClr val="FF6666"/>
+                </a:solidFill>
+                <a:latin typeface="Calibri"/>
+              </a:rPr>
+              <a:t>−$2,571,013</a:t>
+            </a:r>
+          </a:p>
+        </p:txBody>
+      </p:sp>
+      <p:sp>
+        <p:nvSpPr>
+          <p:cNvPr id="24" name="TextBox 23"/>
+          <p:cNvSpPr txBox="1"/>
+          <p:nvPr/>
+        </p:nvSpPr>
+        <p:spPr>
+          <a:xfrm>
+            <a:off x="219456" y="2482596"/>
+            <a:ext cx="2514600" cy="205740"/>
+          </a:xfrm>
+          <a:prstGeom prst="rect">
+            <a:avLst/>
+          </a:prstGeom>
+          <a:noFill/>
+        </p:spPr>
+        <p:txBody>
+          <a:bodyPr wrap="square">
+            <a:spAutoFit/>
+          </a:bodyPr>
+          <a:lstStyle/>
+          <a:p>
+            <a:pPr algn="l"/>
+            <a:r>
+              <a:rPr sz="800" b="0" i="0">
+                <a:solidFill>
+                  <a:srgbClr val="CCCCCC"/>
+                </a:solidFill>
+                <a:latin typeface="Calibri"/>
+              </a:rPr>
+              <a:t>Total equity (10/2/2026)</a:t>
+            </a:r>
+          </a:p>
+        </p:txBody>
+      </p:sp>
+      <p:sp>
+        <p:nvSpPr>
+          <p:cNvPr id="25" name="TextBox 24"/>
+          <p:cNvSpPr txBox="1"/>
+          <p:nvPr/>
+        </p:nvSpPr>
+        <p:spPr>
+          <a:xfrm>
+            <a:off x="2642616" y="2482596"/>
+            <a:ext cx="1481328" cy="205740"/>
+          </a:xfrm>
+          <a:prstGeom prst="rect">
+            <a:avLst/>
+          </a:prstGeom>
+          <a:noFill/>
+        </p:spPr>
+        <p:txBody>
+          <a:bodyPr wrap="square">
+            <a:spAutoFit/>
+          </a:bodyPr>
+          <a:lstStyle/>
+          <a:p>
+            <a:pPr algn="r"/>
+            <a:r>
+              <a:rPr sz="900" b="1" i="0">
+                <a:solidFill>
+                  <a:srgbClr val="FF6666"/>
+                </a:solidFill>
+                <a:latin typeface="Calibri"/>
+              </a:rPr>
+              <a:t>−$1,403,075</a:t>
+            </a:r>
+          </a:p>
+        </p:txBody>
+      </p:sp>
+      <p:sp>
+        <p:nvSpPr>
+          <p:cNvPr id="26" name="TextBox 25"/>
+          <p:cNvSpPr txBox="1"/>
+          <p:nvPr/>
+        </p:nvSpPr>
+        <p:spPr>
+          <a:xfrm>
+            <a:off x="4517136" y="914400"/>
+            <a:ext cx="2926080" cy="205740"/>
+          </a:xfrm>
+          <a:prstGeom prst="rect">
+            <a:avLst/>
+          </a:prstGeom>
+          <a:noFill/>
+        </p:spPr>
+        <p:txBody>
+          <a:bodyPr wrap="square">
+            <a:spAutoFit/>
+          </a:bodyPr>
+          <a:lstStyle/>
+          <a:p>
+            <a:pPr algn="l"/>
+            <a:r>
+              <a:rPr sz="800" b="0" i="0">
+                <a:solidFill>
+                  <a:srgbClr val="CCCCCC"/>
+                </a:solidFill>
+                <a:latin typeface="Calibri"/>
+              </a:rPr>
+              <a:t>Loans &amp; notes (total)</a:t>
+            </a:r>
+          </a:p>
+        </p:txBody>
+      </p:sp>
+      <p:sp>
+        <p:nvSpPr>
+          <p:cNvPr id="27" name="TextBox 26"/>
+          <p:cNvSpPr txBox="1"/>
+          <p:nvPr/>
+        </p:nvSpPr>
+        <p:spPr>
+          <a:xfrm>
+            <a:off x="7351775" y="914400"/>
+            <a:ext cx="1527047" cy="205740"/>
+          </a:xfrm>
+          <a:prstGeom prst="rect">
+            <a:avLst/>
+          </a:prstGeom>
+          <a:noFill/>
+        </p:spPr>
+        <p:txBody>
+          <a:bodyPr wrap="square">
+            <a:spAutoFit/>
+          </a:bodyPr>
+          <a:lstStyle/>
+          <a:p>
+            <a:pPr algn="r"/>
+            <a:r>
+              <a:rPr sz="1000" b="1" i="0">
+                <a:solidFill>
+                  <a:srgbClr val="FFFFFF"/>
+                </a:solidFill>
+                <a:latin typeface="Calibri"/>
+              </a:rPr>
+              <a:t>$1,027,783</a:t>
+            </a:r>
+          </a:p>
+        </p:txBody>
+      </p:sp>
+      <p:sp>
+        <p:nvSpPr>
+          <p:cNvPr id="28" name="Rectangle 27"/>
+          <p:cNvSpPr/>
+          <p:nvPr/>
+        </p:nvSpPr>
+        <p:spPr>
+          <a:xfrm>
+            <a:off x="4517136" y="1211580"/>
+            <a:ext cx="4389120" cy="13716"/>
+          </a:xfrm>
+          <a:prstGeom prst="rect">
+            <a:avLst/>
+          </a:prstGeom>
+          <a:solidFill>
+            <a:srgbClr val="888888"/>
+          </a:solidFill>
+          <a:ln>
+            <a:noFill/>
+          </a:ln>
+        </p:spPr>
+        <p:style>
+          <a:lnRef idx="1">
+            <a:schemeClr val="accent1"/>
+          </a:lnRef>
+          <a:fillRef idx="3">
+            <a:schemeClr val="accent1"/>
+          </a:fillRef>
+          <a:effectRef idx="2">
+            <a:schemeClr val="accent1"/>
+          </a:effectRef>
+          <a:fontRef idx="minor">
+            <a:schemeClr val="lt1"/>
+          </a:fontRef>
+        </p:style>
+        <p:txBody>
+          <a:bodyPr rtlCol="0" anchor="ctr"/>
+          <a:lstStyle/>
+          <a:p>
+            <a:pPr algn="ctr"/>
+          </a:p>
+        </p:txBody>
+      </p:sp>
+      <p:sp>
+        <p:nvSpPr>
+          <p:cNvPr id="29" name="TextBox 28"/>
+          <p:cNvSpPr txBox="1"/>
+          <p:nvPr/>
+        </p:nvSpPr>
+        <p:spPr>
+          <a:xfrm>
+            <a:off x="4517136" y="1362456"/>
+            <a:ext cx="2926080" cy="205740"/>
+          </a:xfrm>
+          <a:prstGeom prst="rect">
+            <a:avLst/>
+          </a:prstGeom>
+          <a:noFill/>
+        </p:spPr>
+        <p:txBody>
+          <a:bodyPr wrap="square">
+            <a:spAutoFit/>
+          </a:bodyPr>
+          <a:lstStyle/>
+          <a:p>
+            <a:pPr algn="l"/>
+            <a:r>
+              <a:rPr sz="800" b="0" i="0">
+                <a:solidFill>
+                  <a:srgbClr val="CCCCCC"/>
+                </a:solidFill>
+                <a:latin typeface="Calibri"/>
+              </a:rPr>
+              <a:t>Due to Microcosm (Acct 2385)</a:t>
+            </a:r>
+          </a:p>
+        </p:txBody>
+      </p:sp>
+      <p:sp>
+        <p:nvSpPr>
+          <p:cNvPr id="30" name="TextBox 29"/>
+          <p:cNvSpPr txBox="1"/>
+          <p:nvPr/>
+        </p:nvSpPr>
+        <p:spPr>
+          <a:xfrm>
+            <a:off x="7351775" y="1362456"/>
+            <a:ext cx="1527047" cy="205740"/>
+          </a:xfrm>
+          <a:prstGeom prst="rect">
+            <a:avLst/>
+          </a:prstGeom>
+          <a:noFill/>
+        </p:spPr>
+        <p:txBody>
+          <a:bodyPr wrap="square">
+            <a:spAutoFit/>
+          </a:bodyPr>
+          <a:lstStyle/>
+          <a:p>
+            <a:pPr algn="r"/>
+            <a:r>
+              <a:rPr sz="900" b="1" i="0">
+                <a:solidFill>
+                  <a:srgbClr val="FF6666"/>
+                </a:solidFill>
+                <a:latin typeface="Calibri"/>
+              </a:rPr>
+              <a:t>$451,429</a:t>
+            </a:r>
+          </a:p>
+        </p:txBody>
+      </p:sp>
+      <p:sp>
+        <p:nvSpPr>
+          <p:cNvPr id="31" name="TextBox 30"/>
+          <p:cNvSpPr txBox="1"/>
+          <p:nvPr/>
+        </p:nvSpPr>
+        <p:spPr>
+          <a:xfrm>
+            <a:off x="4517136" y="1586484"/>
+            <a:ext cx="2926080" cy="205740"/>
+          </a:xfrm>
+          <a:prstGeom prst="rect">
+            <a:avLst/>
+          </a:prstGeom>
+          <a:noFill/>
+        </p:spPr>
+        <p:txBody>
+          <a:bodyPr wrap="square">
+            <a:spAutoFit/>
+          </a:bodyPr>
+          <a:lstStyle/>
+          <a:p>
+            <a:pPr algn="l"/>
+            <a:r>
+              <a:rPr sz="800" b="0" i="0">
+                <a:solidFill>
+                  <a:srgbClr val="CCCCCC"/>
+                </a:solidFill>
+                <a:latin typeface="Calibri"/>
+              </a:rPr>
+              <a:t>Notes Payable – Bookstore</a:t>
+            </a:r>
+          </a:p>
+        </p:txBody>
+      </p:sp>
+      <p:sp>
+        <p:nvSpPr>
+          <p:cNvPr id="32" name="TextBox 31"/>
+          <p:cNvSpPr txBox="1"/>
+          <p:nvPr/>
+        </p:nvSpPr>
+        <p:spPr>
+          <a:xfrm>
+            <a:off x="7351775" y="1586484"/>
+            <a:ext cx="1527047" cy="205740"/>
+          </a:xfrm>
+          <a:prstGeom prst="rect">
+            <a:avLst/>
+          </a:prstGeom>
+          <a:noFill/>
+        </p:spPr>
+        <p:txBody>
+          <a:bodyPr wrap="square">
+            <a:spAutoFit/>
+          </a:bodyPr>
+          <a:lstStyle/>
+          <a:p>
+            <a:pPr algn="r"/>
+            <a:r>
+              <a:rPr sz="900" b="1" i="0">
+                <a:solidFill>
+                  <a:srgbClr val="FF6666"/>
+                </a:solidFill>
+                <a:latin typeface="Calibri"/>
+              </a:rPr>
+              <a:t>$320,582</a:t>
+            </a:r>
+          </a:p>
+        </p:txBody>
+      </p:sp>
+      <p:sp>
+        <p:nvSpPr>
+          <p:cNvPr id="33" name="TextBox 32"/>
+          <p:cNvSpPr txBox="1"/>
+          <p:nvPr/>
+        </p:nvSpPr>
+        <p:spPr>
+          <a:xfrm>
+            <a:off x="4517136" y="1810512"/>
+            <a:ext cx="2926080" cy="205740"/>
+          </a:xfrm>
+          <a:prstGeom prst="rect">
+            <a:avLst/>
+          </a:prstGeom>
+          <a:noFill/>
+        </p:spPr>
+        <p:txBody>
+          <a:bodyPr wrap="square">
+            <a:spAutoFit/>
+          </a:bodyPr>
+          <a:lstStyle/>
+          <a:p>
+            <a:pPr algn="l"/>
+            <a:r>
+              <a:rPr sz="800" b="0" i="0">
+                <a:solidFill>
+                  <a:srgbClr val="CCCCCC"/>
+                </a:solidFill>
+                <a:latin typeface="Calibri"/>
+              </a:rPr>
+              <a:t>SBA EIDL (Acct 2712)</a:t>
+            </a:r>
+          </a:p>
+        </p:txBody>
+      </p:sp>
+      <p:sp>
+        <p:nvSpPr>
+          <p:cNvPr id="34" name="TextBox 33"/>
+          <p:cNvSpPr txBox="1"/>
+          <p:nvPr/>
+        </p:nvSpPr>
+        <p:spPr>
+          <a:xfrm>
+            <a:off x="7351775" y="1810512"/>
+            <a:ext cx="1527047" cy="205740"/>
+          </a:xfrm>
+          <a:prstGeom prst="rect">
+            <a:avLst/>
+          </a:prstGeom>
+          <a:noFill/>
+        </p:spPr>
+        <p:txBody>
+          <a:bodyPr wrap="square">
+            <a:spAutoFit/>
+          </a:bodyPr>
+          <a:lstStyle/>
+          <a:p>
+            <a:pPr algn="r"/>
+            <a:r>
+              <a:rPr sz="900" b="1" i="0">
+                <a:solidFill>
+                  <a:srgbClr val="FF6666"/>
+                </a:solidFill>
+                <a:latin typeface="Calibri"/>
+              </a:rPr>
+              <a:t>$132,072</a:t>
+            </a:r>
+          </a:p>
+        </p:txBody>
+      </p:sp>
+      <p:sp>
+        <p:nvSpPr>
+          <p:cNvPr id="35" name="TextBox 34"/>
+          <p:cNvSpPr txBox="1"/>
+          <p:nvPr/>
+        </p:nvSpPr>
+        <p:spPr>
+          <a:xfrm>
+            <a:off x="4517136" y="2034540"/>
+            <a:ext cx="2926080" cy="205740"/>
+          </a:xfrm>
+          <a:prstGeom prst="rect">
+            <a:avLst/>
+          </a:prstGeom>
+          <a:noFill/>
+        </p:spPr>
+        <p:txBody>
+          <a:bodyPr wrap="square">
+            <a:spAutoFit/>
+          </a:bodyPr>
+          <a:lstStyle/>
+          <a:p>
+            <a:pPr algn="l"/>
+            <a:r>
+              <a:rPr sz="800" b="0" i="0">
+                <a:solidFill>
+                  <a:srgbClr val="CCCCCC"/>
+                </a:solidFill>
+                <a:latin typeface="Calibri"/>
+              </a:rPr>
+              <a:t>Wertz loan (Acct 2714)</a:t>
+            </a:r>
+          </a:p>
+        </p:txBody>
+      </p:sp>
+      <p:sp>
+        <p:nvSpPr>
+          <p:cNvPr id="36" name="TextBox 35"/>
+          <p:cNvSpPr txBox="1"/>
+          <p:nvPr/>
+        </p:nvSpPr>
+        <p:spPr>
+          <a:xfrm>
+            <a:off x="7351775" y="2034540"/>
+            <a:ext cx="1527047" cy="205740"/>
+          </a:xfrm>
+          <a:prstGeom prst="rect">
+            <a:avLst/>
+          </a:prstGeom>
+          <a:noFill/>
+        </p:spPr>
+        <p:txBody>
+          <a:bodyPr wrap="square">
+            <a:spAutoFit/>
+          </a:bodyPr>
+          <a:lstStyle/>
+          <a:p>
+            <a:pPr algn="r"/>
+            <a:r>
+              <a:rPr sz="900" b="1" i="0">
+                <a:solidFill>
+                  <a:srgbClr val="FF6666"/>
+                </a:solidFill>
+                <a:latin typeface="Calibri"/>
+              </a:rPr>
+              <a:t>$92,500</a:t>
+            </a:r>
+          </a:p>
+        </p:txBody>
+      </p:sp>
+      <p:sp>
+        <p:nvSpPr>
+          <p:cNvPr id="37" name="TextBox 36"/>
+          <p:cNvSpPr txBox="1"/>
+          <p:nvPr/>
+        </p:nvSpPr>
+        <p:spPr>
+          <a:xfrm>
+            <a:off x="4517136" y="2258568"/>
+            <a:ext cx="2926080" cy="205740"/>
+          </a:xfrm>
+          <a:prstGeom prst="rect">
+            <a:avLst/>
+          </a:prstGeom>
+          <a:noFill/>
+        </p:spPr>
+        <p:txBody>
+          <a:bodyPr wrap="square">
+            <a:spAutoFit/>
+          </a:bodyPr>
+          <a:lstStyle/>
+          <a:p>
+            <a:pPr algn="l"/>
+            <a:r>
+              <a:rPr sz="800" b="0" i="0">
+                <a:solidFill>
+                  <a:srgbClr val="CCCCCC"/>
+                </a:solidFill>
+                <a:latin typeface="Calibri"/>
+              </a:rPr>
+              <a:t>Exos loan (11%, Acct 2720)</a:t>
+            </a:r>
+          </a:p>
+        </p:txBody>
+      </p:sp>
+      <p:sp>
+        <p:nvSpPr>
+          <p:cNvPr id="38" name="TextBox 37"/>
+          <p:cNvSpPr txBox="1"/>
+          <p:nvPr/>
+        </p:nvSpPr>
+        <p:spPr>
+          <a:xfrm>
+            <a:off x="7351775" y="2258568"/>
+            <a:ext cx="1527047" cy="205740"/>
+          </a:xfrm>
+          <a:prstGeom prst="rect">
+            <a:avLst/>
+          </a:prstGeom>
+          <a:noFill/>
+        </p:spPr>
+        <p:txBody>
+          <a:bodyPr wrap="square">
+            <a:spAutoFit/>
+          </a:bodyPr>
+          <a:lstStyle/>
+          <a:p>
+            <a:pPr algn="r"/>
+            <a:r>
+              <a:rPr sz="900" b="1" i="0">
+                <a:solidFill>
+                  <a:srgbClr val="F26A21"/>
+                </a:solidFill>
+                <a:latin typeface="Calibri"/>
+              </a:rPr>
+              <a:t>$31,200</a:t>
+            </a:r>
+          </a:p>
+        </p:txBody>
+      </p:sp>
+      <p:sp>
+        <p:nvSpPr>
+          <p:cNvPr id="39" name="Rectangle 38"/>
+          <p:cNvSpPr/>
+          <p:nvPr/>
+        </p:nvSpPr>
+        <p:spPr>
+          <a:xfrm>
+            <a:off x="4517136" y="2555748"/>
+            <a:ext cx="4389120" cy="13716"/>
+          </a:xfrm>
+          <a:prstGeom prst="rect">
+            <a:avLst/>
+          </a:prstGeom>
+          <a:solidFill>
+            <a:srgbClr val="888888"/>
+          </a:solidFill>
+          <a:ln>
+            <a:noFill/>
+          </a:ln>
+        </p:spPr>
+        <p:style>
+          <a:lnRef idx="1">
+            <a:schemeClr val="accent1"/>
+          </a:lnRef>
+          <a:fillRef idx="3">
+            <a:schemeClr val="accent1"/>
+          </a:fillRef>
+          <a:effectRef idx="2">
+            <a:schemeClr val="accent1"/>
+          </a:effectRef>
+          <a:fontRef idx="minor">
+            <a:schemeClr val="lt1"/>
+          </a:fontRef>
+        </p:style>
+        <p:txBody>
+          <a:bodyPr rtlCol="0" anchor="ctr"/>
+          <a:lstStyle/>
+          <a:p>
+            <a:pPr algn="ctr"/>
+          </a:p>
+        </p:txBody>
+      </p:sp>
+      <p:sp>
+        <p:nvSpPr>
+          <p:cNvPr id="40" name="TextBox 39"/>
+          <p:cNvSpPr txBox="1"/>
+          <p:nvPr/>
+        </p:nvSpPr>
+        <p:spPr>
+          <a:xfrm>
+            <a:off x="4517136" y="2482596"/>
+            <a:ext cx="2926080" cy="205740"/>
+          </a:xfrm>
+          <a:prstGeom prst="rect">
+            <a:avLst/>
+          </a:prstGeom>
+          <a:noFill/>
+        </p:spPr>
+        <p:txBody>
+          <a:bodyPr wrap="square">
+            <a:spAutoFit/>
+          </a:bodyPr>
+          <a:lstStyle/>
+          <a:p>
+            <a:pPr algn="l"/>
+            <a:r>
+              <a:rPr sz="800" b="0" i="0">
+                <a:solidFill>
+                  <a:srgbClr val="CCCCCC"/>
+                </a:solidFill>
+                <a:latin typeface="Calibri"/>
+              </a:rPr>
+              <a:t>Total liabilities (10/2)</a:t>
+            </a:r>
+          </a:p>
+        </p:txBody>
+      </p:sp>
+      <p:sp>
+        <p:nvSpPr>
+          <p:cNvPr id="41" name="TextBox 40"/>
+          <p:cNvSpPr txBox="1"/>
+          <p:nvPr/>
+        </p:nvSpPr>
+        <p:spPr>
+          <a:xfrm>
+            <a:off x="7351775" y="2482596"/>
+            <a:ext cx="1527047" cy="205740"/>
+          </a:xfrm>
+          <a:prstGeom prst="rect">
+            <a:avLst/>
+          </a:prstGeom>
+          <a:noFill/>
+        </p:spPr>
+        <p:txBody>
+          <a:bodyPr wrap="square">
+            <a:spAutoFit/>
+          </a:bodyPr>
+          <a:lstStyle/>
+          <a:p>
+            <a:pPr algn="r"/>
+            <a:r>
+              <a:rPr sz="900" b="1" i="0">
+                <a:solidFill>
+                  <a:srgbClr val="FF6666"/>
+                </a:solidFill>
+                <a:latin typeface="Calibri"/>
+              </a:rPr>
+              <a:t>$1,275,622</a:t>
+            </a:r>
+          </a:p>
+        </p:txBody>
+      </p:sp>
+      <p:sp>
+        <p:nvSpPr>
+          <p:cNvPr id="42" name="Rectangle 41"/>
+          <p:cNvSpPr/>
+          <p:nvPr/>
+        </p:nvSpPr>
+        <p:spPr>
+          <a:xfrm>
+            <a:off x="109728" y="3643884"/>
+            <a:ext cx="8924544" cy="749808"/>
+          </a:xfrm>
+          <a:prstGeom prst="rect">
+            <a:avLst/>
+          </a:prstGeom>
+          <a:solidFill>
+            <a:srgbClr val="1E1400"/>
+          </a:solidFill>
+          <a:ln>
+            <a:noFill/>
+          </a:ln>
+        </p:spPr>
+        <p:style>
+          <a:lnRef idx="1">
+            <a:schemeClr val="accent1"/>
+          </a:lnRef>
+          <a:fillRef idx="3">
+            <a:schemeClr val="accent1"/>
+          </a:fillRef>
+          <a:effectRef idx="2">
+            <a:schemeClr val="accent1"/>
+          </a:effectRef>
+          <a:fontRef idx="minor">
+            <a:schemeClr val="lt1"/>
+          </a:fontRef>
+        </p:style>
+        <p:txBody>
+          <a:bodyPr rtlCol="0" anchor="ctr"/>
+          <a:lstStyle/>
+          <a:p>
+            <a:pPr algn="ctr"/>
+          </a:p>
+        </p:txBody>
+      </p:sp>
+      <p:sp>
+        <p:nvSpPr>
+          <p:cNvPr id="43" name="Rectangle 42"/>
+          <p:cNvSpPr/>
+          <p:nvPr/>
+        </p:nvSpPr>
+        <p:spPr>
+          <a:xfrm>
+            <a:off x="109728" y="3643884"/>
+            <a:ext cx="50292" cy="749808"/>
+          </a:xfrm>
+          <a:prstGeom prst="rect">
+            <a:avLst/>
+          </a:prstGeom>
+          <a:solidFill>
+            <a:srgbClr val="F26A21"/>
+          </a:solidFill>
+          <a:ln>
+            <a:noFill/>
+          </a:ln>
+        </p:spPr>
+        <p:style>
+          <a:lnRef idx="1">
+            <a:schemeClr val="accent1"/>
+          </a:lnRef>
+          <a:fillRef idx="3">
+            <a:schemeClr val="accent1"/>
+          </a:fillRef>
+          <a:effectRef idx="2">
+            <a:schemeClr val="accent1"/>
+          </a:effectRef>
+          <a:fontRef idx="minor">
+            <a:schemeClr val="lt1"/>
+          </a:fontRef>
+        </p:style>
+        <p:txBody>
+          <a:bodyPr rtlCol="0" anchor="ctr"/>
+          <a:lstStyle/>
+          <a:p>
+            <a:pPr algn="ctr"/>
+          </a:p>
+        </p:txBody>
+      </p:sp>
+      <p:sp>
+        <p:nvSpPr>
+          <p:cNvPr id="44" name="TextBox 43"/>
+          <p:cNvSpPr txBox="1"/>
+          <p:nvPr/>
+        </p:nvSpPr>
+        <p:spPr>
+          <a:xfrm>
+            <a:off x="219456" y="3680459"/>
+            <a:ext cx="8686800" cy="173736"/>
+          </a:xfrm>
+          <a:prstGeom prst="rect">
+            <a:avLst/>
+          </a:prstGeom>
+          <a:noFill/>
+        </p:spPr>
+        <p:txBody>
+          <a:bodyPr wrap="square">
+            <a:spAutoFit/>
+          </a:bodyPr>
+          <a:lstStyle/>
+          <a:p>
+            <a:pPr algn="l"/>
+            <a:r>
+              <a:rPr sz="800" b="1" i="0">
+                <a:solidFill>
+                  <a:srgbClr val="F26A21"/>
+                </a:solidFill>
+                <a:latin typeface="Calibri"/>
+              </a:rPr>
+              <a:t>UNBOOKED OFFSET  (illustrative — no written cost-sharing agreement on file)</a:t>
+            </a:r>
+          </a:p>
+        </p:txBody>
+      </p:sp>
+      <p:sp>
+        <p:nvSpPr>
+          <p:cNvPr id="45" name="TextBox 44"/>
+          <p:cNvSpPr txBox="1"/>
+          <p:nvPr/>
+        </p:nvSpPr>
+        <p:spPr>
+          <a:xfrm>
+            <a:off x="219456" y="3890772"/>
+            <a:ext cx="8686800" cy="457200"/>
+          </a:xfrm>
+          <a:prstGeom prst="rect">
+            <a:avLst/>
+          </a:prstGeom>
+          <a:noFill/>
+        </p:spPr>
+        <p:txBody>
+          <a:bodyPr wrap="square">
+            <a:spAutoFit/>
+          </a:bodyPr>
+          <a:lstStyle/>
+          <a:p>
+            <a:pPr algn="l"/>
+            <a:r>
+              <a:rPr sz="750" b="0" i="0">
+                <a:solidFill>
+                  <a:srgbClr val="CCCCCC"/>
+                </a:solidFill>
+                <a:latin typeface="Calibri"/>
+              </a:rPr>
+              <a:t>SSLC has paid ~100% of shared Torrance facility costs: ~$354K in FY26 (rent $294K + utilities $31K + other), ~$967K est. Jan 2024–Oct 2026.  At a 50% Microcosm share (illustrative) → ~$483K offsets $451K due to Microcosm = SSLC net creditor ~$32K.  "$864K 'billed-ahead' balance disputed; under review (full QuickBooks access requested)."</a:t>
+            </a:r>
+          </a:p>
+        </p:txBody>
+      </p:sp>
+      <p:sp>
+        <p:nvSpPr>
+          <p:cNvPr id="46" name="TextBox 45"/>
+          <p:cNvSpPr txBox="1"/>
+          <p:nvPr/>
+        </p:nvSpPr>
+        <p:spPr>
+          <a:xfrm>
+            <a:off x="228600" y="4416552"/>
+            <a:ext cx="8229600" cy="155448"/>
+          </a:xfrm>
+          <a:prstGeom prst="rect">
+            <a:avLst/>
+          </a:prstGeom>
+          <a:noFill/>
+        </p:spPr>
+        <p:txBody>
+          <a:bodyPr wrap="square">
+            <a:spAutoFit/>
+          </a:bodyPr>
+          <a:lstStyle/>
+          <a:p>
+            <a:pPr algn="l"/>
+            <a:r>
+              <a:rPr sz="700" b="0" i="1">
+                <a:solidFill>
+                  <a:srgbClr val="888888"/>
+                </a:solidFill>
+                <a:latin typeface="Calibri"/>
+              </a:rPr>
+              <a:t>per SSLC QuickBooks 8/21 and 10/2/2026; Microcosm offset illustrative</a:t>
+            </a:r>
+          </a:p>
+        </p:txBody>
+      </p:sp>
+      <p:sp>
+        <p:nvSpPr>
+          <p:cNvPr id="47" name="TextBox 46"/>
+          <p:cNvSpPr txBox="1"/>
+          <p:nvPr/>
+        </p:nvSpPr>
+        <p:spPr>
+          <a:xfrm>
+            <a:off x="1554480" y="4809744"/>
+            <a:ext cx="6035040" cy="201168"/>
+          </a:xfrm>
+          <a:prstGeom prst="rect">
+            <a:avLst/>
+          </a:prstGeom>
+          <a:noFill/>
+        </p:spPr>
+        <p:txBody>
+          <a:bodyPr wrap="square">
+            <a:spAutoFit/>
+          </a:bodyPr>
+          <a:lstStyle/>
+          <a:p>
+            <a:pPr algn="ctr"/>
+            <a:r>
+              <a:rPr sz="700" b="0" i="1">
+                <a:solidFill>
+                  <a:srgbClr val="888888"/>
+                </a:solidFill>
+                <a:latin typeface="Calibri"/>
+              </a:rPr>
+              <a:t>DRAFT — NEGOTIATING TERMS</a:t>
+            </a:r>
+          </a:p>
+        </p:txBody>
+      </p:sp>
+      <p:sp>
+        <p:nvSpPr>
+          <p:cNvPr id="48" name="TextBox 47"/>
+          <p:cNvSpPr txBox="1"/>
+          <p:nvPr/>
+        </p:nvSpPr>
+        <p:spPr>
+          <a:xfrm>
+            <a:off x="7772400" y="4809744"/>
+            <a:ext cx="1143000" cy="201168"/>
+          </a:xfrm>
+          <a:prstGeom prst="rect">
+            <a:avLst/>
+          </a:prstGeom>
+          <a:noFill/>
+        </p:spPr>
+        <p:txBody>
+          <a:bodyPr wrap="square">
+            <a:spAutoFit/>
+          </a:bodyPr>
+          <a:lstStyle/>
+          <a:p>
+            <a:pPr algn="r"/>
+            <a:r>
+              <a:rPr sz="700" b="0" i="1">
+                <a:solidFill>
+                  <a:srgbClr val="888888"/>
+                </a:solidFill>
+                <a:latin typeface="Calibri"/>
+              </a:rPr>
+              <a:t>CONFIDENTIAL</a:t>
+            </a:r>
           </a:p>
         </p:txBody>
       </p:sp>

--- a/drafts/Exos_SSLC_Board_Offer_Overview_2026-10-10_r2.pptx
+++ b/drafts/Exos_SSLC_Board_Offer_Overview_2026-10-10_r2.pptx
@@ -15,6 +15,7 @@
     <p:sldId id="262" r:id="rId8"/>
     <p:sldId id="263" r:id="rId9"/>
     <p:sldId id="264" r:id="rId10"/>
+    <p:sldId id="267" r:id="rId18"/>
     <p:sldId id="265" r:id="rId11"/>
   </p:sldIdLst>
   <p:notesMasterIdLst>
@@ -599,8 +600,7 @@
           <a:lstStyle/>
           <a:p>
             <a:r>
-              <a:rPr lang="en-US" dirty="0"/>
-              <a:t>The one action needed today is board confirmation of §3 exclusivity in the May 2025 Asset Acquisition Agreement. Once confirmed, the 90-day exclusivity period begins and both teams can proceed to diligence and the definitive agreement. Financing close target: Feb 15th. The financing close triggers ② ($5.36M). The RTO is targeted ~6 months post-financing close but is not assured. All earn-out and milestone payments are independent and verifiable.</a:t>
+              <a:t>The three actions needed today: (1) confirm §3 exclusivity — starts the 90-day window; (2) grant full read-only QB access for reconciliation of the $864K balance and facility costs; (3) consent to ERP/inventory evaluation using the same data. All confidential under the 7/27/2021 NDA. Once Motion 1 is confirmed, the 90-day exclusivity period begins. Financing close target: Feb 15th.</a:t>
             </a:r>
             <a:endParaRPr lang="en-US" dirty="0"/>
           </a:p>
@@ -764,6 +764,96 @@
 </p:notes>
 </file>
 
+<file path=ppt/notesSlides/notesSlide12.xml><?xml version="1.0" encoding="utf-8"?>
+<p:notes xmlns:a="http://schemas.openxmlformats.org/drawingml/2006/main" xmlns:p="http://schemas.openxmlformats.org/presentationml/2006/main" xmlns:r="http://schemas.openxmlformats.org/officeDocument/2006/relationships">
+  <p:cSld>
+    <p:spTree>
+      <p:nvGrpSpPr>
+        <p:cNvPr id="1" name=""/>
+        <p:cNvGrpSpPr/>
+        <p:nvPr/>
+      </p:nvGrpSpPr>
+      <p:grpSpPr>
+        <a:xfrm>
+          <a:off x="0" y="0"/>
+          <a:ext cx="0" cy="0"/>
+          <a:chOff x="0" y="0"/>
+          <a:chExt cx="0" cy="0"/>
+        </a:xfrm>
+      </p:grpSpPr>
+      <p:sp>
+        <p:nvSpPr>
+          <p:cNvPr id="2" name="Slide Image Placeholder 1"/>
+          <p:cNvSpPr>
+            <a:spLocks noGrp="1"/>
+          </p:cNvSpPr>
+          <p:nvPr>
+            <p:ph type="sldImg" idx="2"/>
+          </p:nvPr>
+        </p:nvSpPr>
+        <p:spPr/>
+      </p:sp>
+      <p:sp>
+        <p:nvSpPr>
+          <p:cNvPr id="3" name="Notes Placeholder 2"/>
+          <p:cNvSpPr>
+            <a:spLocks noGrp="1"/>
+          </p:cNvSpPr>
+          <p:nvPr>
+            <p:ph type="body" idx="3" sz="quarter"/>
+          </p:nvPr>
+        </p:nvSpPr>
+        <p:spPr/>
+        <p:txBody>
+          <a:bodyPr/>
+          <a:lstStyle/>
+          <a:p>
+            <a:r>
+              <a:t>Three separate motions for the SSLC Board:</a:t>
+            </a:r>
+            <a:br/>
+            <a:br/>
+            <a:r>
+              <a:t>Motion 1: §3 exclusivity confirmation under May 2025 Asset Acquisition Agreement. 90-day period begins on board approval; extension not unreasonably withheld. This is the gate for diligence, definitive agreement, and financing close.</a:t>
+            </a:r>
+            <a:br/>
+            <a:br/>
+            <a:r>
+              <a:t>Motion 2: Full read-only QB Online access — accountant or all-access user — for John Quinn and one Exos finance reviewer. Legal basis: Cal. Corp. Code §1602 (director inspection right) + AAA §4 confirmatory diligence. Confidential under the 7/27/2021 NDA. Purpose: reconcile the $864K 'billed-ahead' balance (FY27 Q1 QB) and verify the shared Microcosm facility-cost offset before close.</a:t>
+            </a:r>
+            <a:br/>
+            <a:br/>
+            <a:r>
+              <a:t>Motion 3 (separate): Consent to Exos using the same QB data to evaluate its ERP/MRP and inventory systems for the combined operation. Evaluation only — no obligation to implement. Confidential under the NDA.</a:t>
+            </a:r>
+            <a:br/>
+            <a:br/>
+            <a:r>
+              <a:t>Governance: John Quinn is an interested director (Exos is the offeror and Quinn holds an Exos loan to SSLC). He abstains on all three motions; each is decided by the disinterested directors.</a:t>
+            </a:r>
+          </a:p>
+        </p:txBody>
+      </p:sp>
+      <p:sp>
+        <p:nvSpPr>
+          <p:cNvPr id="4" name="Slide Number Placeholder 3"/>
+          <p:cNvSpPr>
+            <a:spLocks noGrp="1"/>
+          </p:cNvSpPr>
+          <p:nvPr>
+            <p:ph type="sldNum" idx="5" sz="quarter"/>
+          </p:nvPr>
+        </p:nvSpPr>
+        <p:spPr/>
+      </p:sp>
+    </p:spTree>
+  </p:cSld>
+  <p:clrMapOvr>
+    <a:masterClrMapping/>
+  </p:clrMapOvr>
+</p:notes>
+</file>
+
 <file path=ppt/notesSlides/notesSlide2.xml><?xml version="1.0" encoding="utf-8"?>
 <p:notes xmlns:a="http://schemas.openxmlformats.org/drawingml/2006/main" xmlns:r="http://schemas.openxmlformats.org/officeDocument/2006/relationships" xmlns:p="http://schemas.openxmlformats.org/presentationml/2006/main">
   <p:cSld>
@@ -809,8 +899,23 @@
           <a:lstStyle/>
           <a:p>
             <a:r>
-              <a:rPr lang="en-US" dirty="0"/>
-              <a:t>The sole action requested of the SSLC board at this meeting is confirmation of the §3 exclusivity provision in the existing May 2025 Asset Acquisition Agreement. Once exclusivity is confirmed, both parties have 90 days to negotiate and execute the definitive agreement and advance to financing close.</a:t>
+              <a:t>The three actions requested of the SSLC board at this meeting:</a:t>
+            </a:r>
+            <a:br/>
+            <a:r>
+              <a:t>  Motion 1: Confirm §3 exclusivity under the May 2025 Asset Acquisition Agreement. 90-day period begins on approval.</a:t>
+            </a:r>
+            <a:br/>
+            <a:r>
+              <a:t>  Motion 2: Grant full read-only QuickBooks Online access to John Quinn and Exos's finance reviewer to reconcile the $864K 'billed-ahead' balance and shared-facility costs. Basis: Cal. Corp. Code §1602 inspection right + AAA confirmatory diligence. Confidential under the 7/27/2021 NDA.</a:t>
+            </a:r>
+            <a:br/>
+            <a:r>
+              <a:t>  Motion 3: Consent to Exos using the same QB data to evaluate its in-house ERP/MRP and inventory systems for the combined operation. Confidential under the NDA.</a:t>
+            </a:r>
+            <a:br/>
+            <a:r>
+              <a:t>Governance: John Quinn abstains on all motions as an interested director.</a:t>
             </a:r>
             <a:endParaRPr lang="en-US" dirty="0"/>
           </a:p>
@@ -2102,6 +2207,2150 @@
 
 <file path=ppt/slides/slide10.xml><?xml version="1.0" encoding="utf-8"?>
 <p:sld xmlns:a="http://schemas.openxmlformats.org/drawingml/2006/main" xmlns:r="http://schemas.openxmlformats.org/officeDocument/2006/relationships" xmlns:p="http://schemas.openxmlformats.org/presentationml/2006/main">
+  <p:cSld name="Slide 9">
+    <p:bg>
+      <p:bgPr>
+        <a:solidFill>
+          <a:srgbClr val="111111"/>
+        </a:solidFill>
+      </p:bgPr>
+    </p:bg>
+    <p:spTree>
+      <p:nvGrpSpPr>
+        <p:cNvPr id="1" name=""/>
+        <p:cNvGrpSpPr/>
+        <p:nvPr/>
+      </p:nvGrpSpPr>
+      <p:grpSpPr>
+        <a:xfrm>
+          <a:off x="0" y="0"/>
+          <a:ext cx="0" cy="0"/>
+          <a:chOff x="0" y="0"/>
+          <a:chExt cx="0" cy="0"/>
+        </a:xfrm>
+      </p:grpSpPr>
+      <p:sp>
+        <p:nvSpPr>
+          <p:cNvPr id="2" name="Text 0"/>
+          <p:cNvSpPr txBox="1"/>
+          <p:nvPr/>
+        </p:nvSpPr>
+        <p:spPr>
+          <a:xfrm>
+            <a:off x="457200" y="274320"/>
+            <a:ext cx="8229600" cy="475488"/>
+          </a:xfrm>
+          <a:prstGeom prst="rect">
+            <a:avLst/>
+          </a:prstGeom>
+          <a:noFill/>
+          <a:ln/>
+        </p:spPr>
+        <p:txBody>
+          <a:bodyPr wrap="square" rtlCol="0" anchor="ctr"/>
+          <a:lstStyle/>
+          <a:p>
+            <a:pPr indent="0" marL="0">
+              <a:buNone/>
+            </a:pPr>
+            <a:r>
+              <a:rPr lang="en-US" sz="2200" b="1" dirty="0">
+                <a:solidFill>
+                  <a:srgbClr val="FFFFFF"/>
+                </a:solidFill>
+                <a:latin typeface="Cambria" pitchFamily="34" charset="0"/>
+                <a:ea typeface="Cambria" pitchFamily="34" charset="-122"/>
+                <a:cs typeface="Cambria" pitchFamily="34" charset="-120"/>
+              </a:rPr>
+              <a:t>Exos Funding Commitments</a:t>
+            </a:r>
+            <a:endParaRPr lang="en-US" sz="2200" dirty="0"/>
+          </a:p>
+        </p:txBody>
+      </p:sp>
+      <p:sp>
+        <p:nvSpPr>
+          <p:cNvPr id="3" name="Shape 1"/>
+          <p:cNvSpPr/>
+          <p:nvPr/>
+        </p:nvSpPr>
+        <p:spPr>
+          <a:xfrm>
+            <a:off x="457200" y="768096"/>
+            <a:ext cx="1371600" cy="36576"/>
+          </a:xfrm>
+          <a:prstGeom prst="rect">
+            <a:avLst/>
+          </a:prstGeom>
+          <a:solidFill>
+            <a:srgbClr val="F26A21"/>
+          </a:solidFill>
+          <a:ln/>
+        </p:spPr>
+        <p:txBody>
+          <a:bodyPr/>
+          <a:p/>
+        </p:txBody>
+      </p:sp>
+      <p:sp>
+        <p:nvSpPr>
+          <p:cNvPr id="4" name="Shape 2"/>
+          <p:cNvSpPr/>
+          <p:nvPr/>
+        </p:nvSpPr>
+        <p:spPr>
+          <a:xfrm>
+            <a:off x="411480" y="914400"/>
+            <a:ext cx="8321040" cy="365760"/>
+          </a:xfrm>
+          <a:prstGeom prst="rect">
+            <a:avLst/>
+          </a:prstGeom>
+          <a:solidFill>
+            <a:srgbClr val="1C1C1C"/>
+          </a:solidFill>
+          <a:ln w="12700">
+            <a:solidFill>
+              <a:srgbClr val="2A2A2A"/>
+            </a:solidFill>
+            <a:prstDash val="solid"/>
+          </a:ln>
+        </p:spPr>
+        <p:txBody>
+          <a:bodyPr/>
+          <a:p/>
+        </p:txBody>
+      </p:sp>
+      <p:sp>
+        <p:nvSpPr>
+          <p:cNvPr id="5" name="Text 3"/>
+          <p:cNvSpPr txBox="1"/>
+          <p:nvPr/>
+        </p:nvSpPr>
+        <p:spPr>
+          <a:xfrm>
+            <a:off x="548640" y="950976"/>
+            <a:ext cx="5303520" cy="292608"/>
+          </a:xfrm>
+          <a:prstGeom prst="rect">
+            <a:avLst/>
+          </a:prstGeom>
+          <a:noFill/>
+          <a:ln/>
+        </p:spPr>
+        <p:txBody>
+          <a:bodyPr wrap="square" rtlCol="0" anchor="ctr"/>
+          <a:lstStyle/>
+          <a:p>
+            <a:pPr indent="0" marL="0">
+              <a:buNone/>
+            </a:pPr>
+            <a:r>
+              <a:rPr lang="en-US" sz="1200" b="1" dirty="0">
+                <a:solidFill>
+                  <a:srgbClr val="FFFFFF"/>
+                </a:solidFill>
+              </a:rPr>
+              <a:t>$2.51M cash</a:t>
+            </a:r>
+            <a:endParaRPr lang="en-US" sz="1200" dirty="0"/>
+          </a:p>
+        </p:txBody>
+      </p:sp>
+      <p:sp>
+        <p:nvSpPr>
+          <p:cNvPr id="6" name="Text 4"/>
+          <p:cNvSpPr txBox="1"/>
+          <p:nvPr/>
+        </p:nvSpPr>
+        <p:spPr>
+          <a:xfrm>
+            <a:off x="5989320" y="950976"/>
+            <a:ext cx="2606040" cy="292608"/>
+          </a:xfrm>
+          <a:prstGeom prst="rect">
+            <a:avLst/>
+          </a:prstGeom>
+          <a:noFill/>
+          <a:ln/>
+        </p:spPr>
+        <p:txBody>
+          <a:bodyPr wrap="square" rtlCol="0" anchor="ctr"/>
+          <a:lstStyle/>
+          <a:p>
+            <a:pPr algn="r" indent="0" marL="0">
+              <a:buNone/>
+            </a:pPr>
+            <a:r>
+              <a:rPr lang="en-US" sz="1000" dirty="0">
+                <a:solidFill>
+                  <a:srgbClr val="888888"/>
+                </a:solidFill>
+              </a:rPr>
+              <a:t>at financing close (target Feb 15th)</a:t>
+            </a:r>
+            <a:endParaRPr lang="en-US" sz="1000" dirty="0"/>
+          </a:p>
+        </p:txBody>
+      </p:sp>
+      <p:sp>
+        <p:nvSpPr>
+          <p:cNvPr id="7" name="Shape 5"/>
+          <p:cNvSpPr/>
+          <p:nvPr/>
+        </p:nvSpPr>
+        <p:spPr>
+          <a:xfrm>
+            <a:off x="411480" y="1298448"/>
+            <a:ext cx="8321040" cy="365760"/>
+          </a:xfrm>
+          <a:prstGeom prst="rect">
+            <a:avLst/>
+          </a:prstGeom>
+          <a:solidFill>
+            <a:srgbClr val="212121"/>
+          </a:solidFill>
+          <a:ln w="12700">
+            <a:solidFill>
+              <a:srgbClr val="2A2A2A"/>
+            </a:solidFill>
+            <a:prstDash val="solid"/>
+          </a:ln>
+        </p:spPr>
+        <p:txBody>
+          <a:bodyPr/>
+          <a:p/>
+        </p:txBody>
+      </p:sp>
+      <p:sp>
+        <p:nvSpPr>
+          <p:cNvPr id="8" name="Text 6"/>
+          <p:cNvSpPr txBox="1"/>
+          <p:nvPr/>
+        </p:nvSpPr>
+        <p:spPr>
+          <a:xfrm>
+            <a:off x="548640" y="1335024"/>
+            <a:ext cx="5303520" cy="292608"/>
+          </a:xfrm>
+          <a:prstGeom prst="rect">
+            <a:avLst/>
+          </a:prstGeom>
+          <a:noFill/>
+          <a:ln/>
+        </p:spPr>
+        <p:txBody>
+          <a:bodyPr wrap="square" rtlCol="0" anchor="ctr"/>
+          <a:lstStyle/>
+          <a:p>
+            <a:pPr indent="0" marL="0">
+              <a:buNone/>
+            </a:pPr>
+            <a:r>
+              <a:rPr lang="en-US" sz="1200" b="1" dirty="0">
+                <a:solidFill>
+                  <a:srgbClr val="FFFFFF"/>
+                </a:solidFill>
+              </a:rPr>
+              <a:t>SSLC transaction costs</a:t>
+            </a:r>
+            <a:endParaRPr lang="en-US" sz="1200" dirty="0"/>
+          </a:p>
+        </p:txBody>
+      </p:sp>
+      <p:sp>
+        <p:nvSpPr>
+          <p:cNvPr id="9" name="Text 7"/>
+          <p:cNvSpPr txBox="1"/>
+          <p:nvPr/>
+        </p:nvSpPr>
+        <p:spPr>
+          <a:xfrm>
+            <a:off x="5989320" y="1335024"/>
+            <a:ext cx="2606040" cy="292608"/>
+          </a:xfrm>
+          <a:prstGeom prst="rect">
+            <a:avLst/>
+          </a:prstGeom>
+          <a:noFill/>
+          <a:ln/>
+        </p:spPr>
+        <p:txBody>
+          <a:bodyPr wrap="square" rtlCol="0" anchor="ctr"/>
+          <a:lstStyle/>
+          <a:p>
+            <a:pPr algn="r" indent="0" marL="0">
+              <a:buNone/>
+            </a:pPr>
+            <a:r>
+              <a:rPr lang="en-US" sz="1000" dirty="0">
+                <a:solidFill>
+                  <a:srgbClr val="888888"/>
+                </a:solidFill>
+              </a:rPr>
+              <a:t>at financing close (target Feb 15th)</a:t>
+            </a:r>
+            <a:endParaRPr lang="en-US" sz="1000" dirty="0"/>
+          </a:p>
+        </p:txBody>
+      </p:sp>
+      <p:sp>
+        <p:nvSpPr>
+          <p:cNvPr id="10" name="Shape 8"/>
+          <p:cNvSpPr/>
+          <p:nvPr/>
+        </p:nvSpPr>
+        <p:spPr>
+          <a:xfrm>
+            <a:off x="411480" y="1682496"/>
+            <a:ext cx="8321040" cy="365760"/>
+          </a:xfrm>
+          <a:prstGeom prst="rect">
+            <a:avLst/>
+          </a:prstGeom>
+          <a:solidFill>
+            <a:srgbClr val="1C1C1C"/>
+          </a:solidFill>
+          <a:ln w="12700">
+            <a:solidFill>
+              <a:srgbClr val="2A2A2A"/>
+            </a:solidFill>
+            <a:prstDash val="solid"/>
+          </a:ln>
+        </p:spPr>
+        <p:txBody>
+          <a:bodyPr/>
+          <a:p/>
+        </p:txBody>
+      </p:sp>
+      <p:sp>
+        <p:nvSpPr>
+          <p:cNvPr id="13" name="Shape 11"/>
+          <p:cNvSpPr/>
+          <p:nvPr/>
+        </p:nvSpPr>
+        <p:spPr>
+          <a:xfrm>
+            <a:off x="411480" y="2066544"/>
+            <a:ext cx="8321040" cy="365760"/>
+          </a:xfrm>
+          <a:prstGeom prst="rect">
+            <a:avLst/>
+          </a:prstGeom>
+          <a:solidFill>
+            <a:srgbClr val="212121"/>
+          </a:solidFill>
+          <a:ln w="12700">
+            <a:solidFill>
+              <a:srgbClr val="2A2A2A"/>
+            </a:solidFill>
+            <a:prstDash val="solid"/>
+          </a:ln>
+        </p:spPr>
+        <p:txBody>
+          <a:bodyPr/>
+          <a:p/>
+        </p:txBody>
+      </p:sp>
+      <p:sp>
+        <p:nvSpPr>
+          <p:cNvPr id="14" name="Text 12"/>
+          <p:cNvSpPr txBox="1"/>
+          <p:nvPr/>
+        </p:nvSpPr>
+        <p:spPr>
+          <a:xfrm>
+            <a:off x="548640" y="2103120"/>
+            <a:ext cx="5303520" cy="292608"/>
+          </a:xfrm>
+          <a:prstGeom prst="rect">
+            <a:avLst/>
+          </a:prstGeom>
+          <a:noFill/>
+          <a:ln/>
+        </p:spPr>
+        <p:txBody>
+          <a:bodyPr wrap="square" rtlCol="0" anchor="ctr"/>
+          <a:lstStyle/>
+          <a:p>
+            <a:pPr indent="0" marL="0">
+              <a:buNone/>
+            </a:pPr>
+            <a:r>
+              <a:rPr lang="en-US" sz="1200" b="1" dirty="0">
+                <a:solidFill>
+                  <a:srgbClr val="FFFFFF"/>
+                </a:solidFill>
+              </a:rPr>
+              <a:t>Working-capital bridge $500K</a:t>
+            </a:r>
+            <a:endParaRPr lang="en-US" sz="1200" dirty="0"/>
+          </a:p>
+        </p:txBody>
+      </p:sp>
+      <p:sp>
+        <p:nvSpPr>
+          <p:cNvPr id="15" name="Text 13"/>
+          <p:cNvSpPr txBox="1"/>
+          <p:nvPr/>
+        </p:nvSpPr>
+        <p:spPr>
+          <a:xfrm>
+            <a:off x="5989320" y="2103120"/>
+            <a:ext cx="2606040" cy="292608"/>
+          </a:xfrm>
+          <a:prstGeom prst="rect">
+            <a:avLst/>
+          </a:prstGeom>
+          <a:noFill/>
+          <a:ln/>
+        </p:spPr>
+        <p:txBody>
+          <a:bodyPr wrap="square" rtlCol="0" anchor="ctr"/>
+          <a:lstStyle/>
+          <a:p>
+            <a:pPr algn="r" indent="0" marL="0">
+              <a:buNone/>
+            </a:pPr>
+            <a:r>
+              <a:rPr lang="en-US" sz="1000" dirty="0">
+                <a:solidFill>
+                  <a:srgbClr val="888888"/>
+                </a:solidFill>
+              </a:rPr>
+              <a:t>at financing close (target Feb 15th)</a:t>
+            </a:r>
+            <a:endParaRPr lang="en-US" sz="1000" dirty="0"/>
+          </a:p>
+        </p:txBody>
+      </p:sp>
+      <p:sp>
+        <p:nvSpPr>
+          <p:cNvPr id="16" name="Shape 14"/>
+          <p:cNvSpPr/>
+          <p:nvPr/>
+        </p:nvSpPr>
+        <p:spPr>
+          <a:xfrm>
+            <a:off x="411480" y="2450592"/>
+            <a:ext cx="8321040" cy="365760"/>
+          </a:xfrm>
+          <a:prstGeom prst="rect">
+            <a:avLst/>
+          </a:prstGeom>
+          <a:solidFill>
+            <a:srgbClr val="1C1C1C"/>
+          </a:solidFill>
+          <a:ln w="12700">
+            <a:solidFill>
+              <a:srgbClr val="2A2A2A"/>
+            </a:solidFill>
+            <a:prstDash val="solid"/>
+          </a:ln>
+        </p:spPr>
+        <p:txBody>
+          <a:bodyPr/>
+          <a:p/>
+        </p:txBody>
+      </p:sp>
+      <p:sp>
+        <p:nvSpPr>
+          <p:cNvPr id="17" name="Text 15"/>
+          <p:cNvSpPr txBox="1"/>
+          <p:nvPr/>
+        </p:nvSpPr>
+        <p:spPr>
+          <a:xfrm>
+            <a:off x="548640" y="2487168"/>
+            <a:ext cx="5303520" cy="292608"/>
+          </a:xfrm>
+          <a:prstGeom prst="rect">
+            <a:avLst/>
+          </a:prstGeom>
+          <a:noFill/>
+          <a:ln/>
+        </p:spPr>
+        <p:txBody>
+          <a:bodyPr wrap="square" rtlCol="0" anchor="ctr"/>
+          <a:lstStyle/>
+          <a:p>
+            <a:pPr indent="0" marL="0">
+              <a:buNone/>
+            </a:pPr>
+            <a:r>
+              <a:rPr lang="en-US" sz="1200" b="1" dirty="0">
+                <a:solidFill>
+                  <a:srgbClr val="FFFFFF"/>
+                </a:solidFill>
+              </a:rPr>
+              <a:t>$1.0M Exos stock (EAI units, Rule 504)</a:t>
+            </a:r>
+            <a:endParaRPr lang="en-US" sz="1200" dirty="0"/>
+          </a:p>
+        </p:txBody>
+      </p:sp>
+      <p:sp>
+        <p:nvSpPr>
+          <p:cNvPr id="18" name="Text 16"/>
+          <p:cNvSpPr txBox="1"/>
+          <p:nvPr/>
+        </p:nvSpPr>
+        <p:spPr>
+          <a:xfrm>
+            <a:off x="5989320" y="2487168"/>
+            <a:ext cx="2606040" cy="292608"/>
+          </a:xfrm>
+          <a:prstGeom prst="rect">
+            <a:avLst/>
+          </a:prstGeom>
+          <a:noFill/>
+          <a:ln/>
+        </p:spPr>
+        <p:txBody>
+          <a:bodyPr wrap="square" rtlCol="0" anchor="ctr"/>
+          <a:lstStyle/>
+          <a:p>
+            <a:pPr algn="r" indent="0" marL="0">
+              <a:buNone/>
+            </a:pPr>
+            <a:r>
+              <a:rPr lang="en-US" sz="1000" dirty="0">
+                <a:solidFill>
+                  <a:srgbClr val="888888"/>
+                </a:solidFill>
+              </a:rPr>
+              <a:t>at financing close (target Feb 15th)</a:t>
+            </a:r>
+            <a:endParaRPr lang="en-US" sz="1000" dirty="0"/>
+          </a:p>
+        </p:txBody>
+      </p:sp>
+      <p:sp>
+        <p:nvSpPr>
+          <p:cNvPr id="19" name="Shape 17"/>
+          <p:cNvSpPr/>
+          <p:nvPr/>
+        </p:nvSpPr>
+        <p:spPr>
+          <a:xfrm>
+            <a:off x="411480" y="2834640"/>
+            <a:ext cx="8321040" cy="365760"/>
+          </a:xfrm>
+          <a:prstGeom prst="rect">
+            <a:avLst/>
+          </a:prstGeom>
+          <a:solidFill>
+            <a:srgbClr val="212121"/>
+          </a:solidFill>
+          <a:ln w="12700">
+            <a:solidFill>
+              <a:srgbClr val="2A2A2A"/>
+            </a:solidFill>
+            <a:prstDash val="solid"/>
+          </a:ln>
+        </p:spPr>
+        <p:txBody>
+          <a:bodyPr/>
+          <a:p/>
+        </p:txBody>
+      </p:sp>
+      <p:sp>
+        <p:nvSpPr>
+          <p:cNvPr id="20" name="Text 18"/>
+          <p:cNvSpPr txBox="1"/>
+          <p:nvPr/>
+        </p:nvSpPr>
+        <p:spPr>
+          <a:xfrm>
+            <a:off x="548640" y="2871216"/>
+            <a:ext cx="5303520" cy="292608"/>
+          </a:xfrm>
+          <a:prstGeom prst="rect">
+            <a:avLst/>
+          </a:prstGeom>
+          <a:noFill/>
+          <a:ln/>
+        </p:spPr>
+        <p:txBody>
+          <a:bodyPr wrap="square" rtlCol="0" anchor="ctr"/>
+          <a:lstStyle/>
+          <a:p>
+            <a:pPr indent="0" marL="0">
+              <a:buNone/>
+            </a:pPr>
+            <a:r>
+              <a:rPr lang="en-US" sz="1200" b="1" dirty="0">
+                <a:solidFill>
+                  <a:srgbClr val="FFFFFF"/>
+                </a:solidFill>
+              </a:rPr>
+              <a:t>Capital in the new year — physical space and a second winder</a:t>
+            </a:r>
+            <a:endParaRPr lang="en-US" sz="1200" dirty="0"/>
+          </a:p>
+        </p:txBody>
+      </p:sp>
+      <p:sp>
+        <p:nvSpPr>
+          <p:cNvPr id="21" name="Text 19"/>
+          <p:cNvSpPr txBox="1"/>
+          <p:nvPr/>
+        </p:nvSpPr>
+        <p:spPr>
+          <a:xfrm>
+            <a:off x="5989320" y="2871216"/>
+            <a:ext cx="2606040" cy="292608"/>
+          </a:xfrm>
+          <a:prstGeom prst="rect">
+            <a:avLst/>
+          </a:prstGeom>
+          <a:noFill/>
+          <a:ln/>
+        </p:spPr>
+        <p:txBody>
+          <a:bodyPr wrap="square" rtlCol="0" anchor="ctr"/>
+          <a:lstStyle/>
+          <a:p>
+            <a:pPr algn="r" indent="0" marL="0">
+              <a:buNone/>
+            </a:pPr>
+            <a:r>
+              <a:rPr lang="en-US" sz="1000" dirty="0">
+                <a:solidFill>
+                  <a:srgbClr val="888888"/>
+                </a:solidFill>
+              </a:rPr>
+              <a:t>(amount TBD; committed at financing close)</a:t>
+            </a:r>
+            <a:endParaRPr lang="en-US" sz="1000" dirty="0"/>
+          </a:p>
+        </p:txBody>
+      </p:sp>
+      <p:sp>
+        <p:nvSpPr>
+          <p:cNvPr id="22" name="Shape 20"/>
+          <p:cNvSpPr/>
+          <p:nvPr/>
+        </p:nvSpPr>
+        <p:spPr>
+          <a:xfrm>
+            <a:off x="411480" y="3218688"/>
+            <a:ext cx="8321040" cy="365760"/>
+          </a:xfrm>
+          <a:prstGeom prst="rect">
+            <a:avLst/>
+          </a:prstGeom>
+          <a:solidFill>
+            <a:srgbClr val="1C1C1C"/>
+          </a:solidFill>
+          <a:ln w="12700">
+            <a:solidFill>
+              <a:srgbClr val="2A2A2A"/>
+            </a:solidFill>
+            <a:prstDash val="solid"/>
+          </a:ln>
+        </p:spPr>
+        <p:txBody>
+          <a:bodyPr/>
+          <a:p/>
+        </p:txBody>
+      </p:sp>
+      <p:sp>
+        <p:nvSpPr>
+          <p:cNvPr id="23" name="Text 21"/>
+          <p:cNvSpPr txBox="1"/>
+          <p:nvPr/>
+        </p:nvSpPr>
+        <p:spPr>
+          <a:xfrm>
+            <a:off x="548640" y="3255264"/>
+            <a:ext cx="5303520" cy="292608"/>
+          </a:xfrm>
+          <a:prstGeom prst="rect">
+            <a:avLst/>
+          </a:prstGeom>
+          <a:noFill/>
+          <a:ln/>
+        </p:spPr>
+        <p:txBody>
+          <a:bodyPr wrap="square" rtlCol="0" anchor="ctr"/>
+          <a:lstStyle/>
+          <a:p>
+            <a:pPr indent="0" marL="0">
+              <a:buNone/>
+            </a:pPr>
+            <a:r>
+              <a:rPr lang="en-US" sz="1200" b="1" dirty="0">
+                <a:solidFill>
+                  <a:srgbClr val="FFFFFF"/>
+                </a:solidFill>
+              </a:rPr>
+              <a:t>Employment offers + option pool</a:t>
+            </a:r>
+            <a:endParaRPr lang="en-US" sz="1200" dirty="0"/>
+          </a:p>
+        </p:txBody>
+      </p:sp>
+      <p:sp>
+        <p:nvSpPr>
+          <p:cNvPr id="24" name="Text 22"/>
+          <p:cNvSpPr txBox="1"/>
+          <p:nvPr/>
+        </p:nvSpPr>
+        <p:spPr>
+          <a:xfrm>
+            <a:off x="5989320" y="3255264"/>
+            <a:ext cx="2606040" cy="292608"/>
+          </a:xfrm>
+          <a:prstGeom prst="rect">
+            <a:avLst/>
+          </a:prstGeom>
+          <a:noFill/>
+          <a:ln/>
+        </p:spPr>
+        <p:txBody>
+          <a:bodyPr wrap="square" rtlCol="0" anchor="ctr"/>
+          <a:lstStyle/>
+          <a:p>
+            <a:pPr algn="r" indent="0" marL="0">
+              <a:buNone/>
+            </a:pPr>
+            <a:r>
+              <a:rPr lang="en-US" sz="1000" dirty="0">
+                <a:solidFill>
+                  <a:srgbClr val="888888"/>
+                </a:solidFill>
+              </a:rPr>
+              <a:t>at financing close (target Feb 15th)</a:t>
+            </a:r>
+            <a:endParaRPr lang="en-US" sz="1000" dirty="0"/>
+          </a:p>
+        </p:txBody>
+      </p:sp>
+      <p:sp>
+        <p:nvSpPr>
+          <p:cNvPr id="25" name="Shape 23"/>
+          <p:cNvSpPr/>
+          <p:nvPr/>
+        </p:nvSpPr>
+        <p:spPr>
+          <a:xfrm>
+            <a:off x="411480" y="3602736"/>
+            <a:ext cx="8321040" cy="365760"/>
+          </a:xfrm>
+          <a:prstGeom prst="rect">
+            <a:avLst/>
+          </a:prstGeom>
+          <a:solidFill>
+            <a:srgbClr val="212121"/>
+          </a:solidFill>
+          <a:ln w="12700">
+            <a:solidFill>
+              <a:srgbClr val="2A2A2A"/>
+            </a:solidFill>
+            <a:prstDash val="solid"/>
+          </a:ln>
+        </p:spPr>
+        <p:txBody>
+          <a:bodyPr/>
+          <a:p/>
+        </p:txBody>
+      </p:sp>
+      <p:sp>
+        <p:nvSpPr>
+          <p:cNvPr id="26" name="Text 24"/>
+          <p:cNvSpPr txBox="1"/>
+          <p:nvPr/>
+        </p:nvSpPr>
+        <p:spPr>
+          <a:xfrm>
+            <a:off x="548640" y="3639312"/>
+            <a:ext cx="5303520" cy="292608"/>
+          </a:xfrm>
+          <a:prstGeom prst="rect">
+            <a:avLst/>
+          </a:prstGeom>
+          <a:noFill/>
+          <a:ln/>
+        </p:spPr>
+        <p:txBody>
+          <a:bodyPr wrap="square" rtlCol="0" anchor="ctr"/>
+          <a:lstStyle/>
+          <a:p>
+            <a:pPr indent="0" marL="0">
+              <a:buNone/>
+            </a:pPr>
+            <a:r>
+              <a:rPr lang="en-US" sz="1200" b="1" dirty="0">
+                <a:solidFill>
+                  <a:srgbClr val="FFFFFF"/>
+                </a:solidFill>
+              </a:rPr>
+              <a:t>Earn-outs on milestones and tank revenue</a:t>
+            </a:r>
+            <a:endParaRPr lang="en-US" sz="1200" dirty="0"/>
+          </a:p>
+        </p:txBody>
+      </p:sp>
+      <p:sp>
+        <p:nvSpPr>
+          <p:cNvPr id="27" name="Text 25"/>
+          <p:cNvSpPr txBox="1"/>
+          <p:nvPr/>
+        </p:nvSpPr>
+        <p:spPr>
+          <a:xfrm>
+            <a:off x="5989320" y="3639312"/>
+            <a:ext cx="2606040" cy="292608"/>
+          </a:xfrm>
+          <a:prstGeom prst="rect">
+            <a:avLst/>
+          </a:prstGeom>
+          <a:noFill/>
+          <a:ln/>
+        </p:spPr>
+        <p:txBody>
+          <a:bodyPr wrap="square" rtlCol="0" anchor="ctr"/>
+          <a:lstStyle/>
+          <a:p>
+            <a:pPr algn="r" indent="0" marL="0">
+              <a:buNone/>
+            </a:pPr>
+            <a:r>
+              <a:rPr lang="en-US" sz="1000" dirty="0">
+                <a:solidFill>
+                  <a:srgbClr val="888888"/>
+                </a:solidFill>
+              </a:rPr>
+              <a:t>FY27–FY31 as triggered</a:t>
+            </a:r>
+            <a:endParaRPr lang="en-US" sz="1000" dirty="0"/>
+          </a:p>
+        </p:txBody>
+      </p:sp>
+      <p:sp>
+        <p:nvSpPr>
+          <p:cNvPr id="28" name="Shape 26"/>
+          <p:cNvSpPr/>
+          <p:nvPr/>
+        </p:nvSpPr>
+        <p:spPr>
+          <a:xfrm>
+            <a:off x="365760" y="4078224"/>
+            <a:ext cx="8412480" cy="594360"/>
+          </a:xfrm>
+          <a:prstGeom prst="rect">
+            <a:avLst/>
+          </a:prstGeom>
+          <a:solidFill>
+            <a:srgbClr val="2A1000"/>
+          </a:solidFill>
+          <a:ln w="12700">
+            <a:solidFill>
+              <a:srgbClr val="F26A21"/>
+            </a:solidFill>
+            <a:prstDash val="solid"/>
+          </a:ln>
+        </p:spPr>
+        <p:txBody>
+          <a:bodyPr/>
+          <a:p/>
+        </p:txBody>
+      </p:sp>
+      <p:sp>
+        <p:nvSpPr>
+          <p:cNvPr id="29" name="Text 27"/>
+          <p:cNvSpPr txBox="1"/>
+          <p:nvPr/>
+        </p:nvSpPr>
+        <p:spPr>
+          <a:xfrm>
+            <a:off x="502920" y="4142232"/>
+            <a:ext cx="8229600" cy="457200"/>
+          </a:xfrm>
+          <a:prstGeom prst="rect">
+            <a:avLst/>
+          </a:prstGeom>
+          <a:noFill/>
+          <a:ln/>
+        </p:spPr>
+        <p:txBody>
+          <a:bodyPr wrap="square" rtlCol="0" anchor="ctr"/>
+          <a:lstStyle/>
+          <a:p>
+            <a:pPr algn="ctr" indent="0" marL="0">
+              <a:buNone/>
+            </a:pPr>
+            <a:r>
+              <a:rPr lang="en-US" sz="1500" b="1" dirty="0">
+                <a:solidFill>
+                  <a:srgbClr val="F26A21"/>
+                </a:solidFill>
+              </a:rPr>
+              <a:t>One decision today: confirm §3 exclusivity  →  90 days  →  financing close target Feb 15th</a:t>
+            </a:r>
+            <a:endParaRPr lang="en-US" sz="1500" dirty="0"/>
+          </a:p>
+        </p:txBody>
+      </p:sp>
+      <p:pic>
+        <p:nvPicPr>
+          <p:cNvPr id="30" name="Image 0" descr="/Users/exomac/.openclaw/workspace/drafts/_exos_white_official.png">    </p:cNvPr>
+          <p:cNvPicPr>
+            <a:picLocks noChangeAspect="1"/>
+          </p:cNvPicPr>
+          <p:nvPr/>
+        </p:nvPicPr>
+        <p:blipFill>
+          <a:blip r:embed="rId1"/>
+          <a:stretch>
+            <a:fillRect/>
+          </a:stretch>
+        </p:blipFill>
+        <p:spPr>
+          <a:xfrm>
+            <a:off x="228600" y="4754880"/>
+            <a:ext cx="1188720" cy="256032"/>
+          </a:xfrm>
+          <a:prstGeom prst="rect">
+            <a:avLst/>
+          </a:prstGeom>
+        </p:spPr>
+      </p:pic>
+      <p:sp>
+        <p:nvSpPr>
+          <p:cNvPr id="31" name="Text 28"/>
+          <p:cNvSpPr txBox="1"/>
+          <p:nvPr/>
+        </p:nvSpPr>
+        <p:spPr>
+          <a:xfrm>
+            <a:off x="1554480" y="4800600"/>
+            <a:ext cx="6035040" cy="228600"/>
+          </a:xfrm>
+          <a:prstGeom prst="rect">
+            <a:avLst/>
+          </a:prstGeom>
+          <a:noFill/>
+          <a:ln/>
+        </p:spPr>
+        <p:txBody>
+          <a:bodyPr wrap="square" rtlCol="0" anchor="ctr"/>
+          <a:lstStyle/>
+          <a:p>
+            <a:pPr algn="ctr" indent="0" marL="0">
+              <a:buNone/>
+            </a:pPr>
+            <a:r>
+              <a:rPr lang="en-US" sz="700" i="1" dirty="0">
+                <a:solidFill>
+                  <a:srgbClr val="888888"/>
+                </a:solidFill>
+              </a:rPr>
+              <a:t>DRAFT — NEGOTIATING TERMS</a:t>
+            </a:r>
+            <a:endParaRPr lang="en-US" sz="700" dirty="0"/>
+          </a:p>
+        </p:txBody>
+      </p:sp>
+      <p:sp>
+        <p:nvSpPr>
+          <p:cNvPr id="32" name="Text 29"/>
+          <p:cNvSpPr txBox="1"/>
+          <p:nvPr/>
+        </p:nvSpPr>
+        <p:spPr>
+          <a:xfrm>
+            <a:off x="7772400" y="4800600"/>
+            <a:ext cx="1143000" cy="228600"/>
+          </a:xfrm>
+          <a:prstGeom prst="rect">
+            <a:avLst/>
+          </a:prstGeom>
+          <a:noFill/>
+          <a:ln/>
+        </p:spPr>
+        <p:txBody>
+          <a:bodyPr wrap="square" rtlCol="0" anchor="ctr"/>
+          <a:lstStyle/>
+          <a:p>
+            <a:pPr algn="r" indent="0" marL="0">
+              <a:buNone/>
+            </a:pPr>
+            <a:r>
+              <a:rPr lang="en-US" sz="700" i="1" dirty="0">
+                <a:solidFill>
+                  <a:srgbClr val="888888"/>
+                </a:solidFill>
+              </a:rPr>
+              <a:t>CONFIDENTIAL</a:t>
+            </a:r>
+            <a:endParaRPr lang="en-US" sz="700" dirty="0"/>
+          </a:p>
+        </p:txBody>
+      </p:sp>
+    </p:spTree>
+  </p:cSld>
+  <p:clrMapOvr>
+    <a:masterClrMapping/>
+  </p:clrMapOvr>
+</p:sld>
+</file>
+
+<file path=ppt/slides/slide11.xml><?xml version="1.0" encoding="utf-8"?>
+<p:sld xmlns:a="http://schemas.openxmlformats.org/drawingml/2006/main" xmlns:p="http://schemas.openxmlformats.org/presentationml/2006/main" xmlns:r="http://schemas.openxmlformats.org/officeDocument/2006/relationships">
+  <p:cSld>
+    <p:bg>
+      <p:bgPr>
+        <a:solidFill>
+          <a:srgbClr val="111111"/>
+        </a:solidFill>
+        <a:effectLst/>
+      </p:bgPr>
+    </p:bg>
+    <p:spTree>
+      <p:nvGrpSpPr>
+        <p:cNvPr id="1" name=""/>
+        <p:cNvGrpSpPr/>
+        <p:nvPr/>
+      </p:nvGrpSpPr>
+      <p:grpSpPr/>
+      <p:sp>
+        <p:nvSpPr>
+          <p:cNvPr id="2" name="Rectangle 1"/>
+          <p:cNvSpPr/>
+          <p:nvPr/>
+        </p:nvSpPr>
+        <p:spPr>
+          <a:xfrm>
+            <a:off x="0" y="0"/>
+            <a:ext cx="9144000" cy="50292"/>
+          </a:xfrm>
+          <a:prstGeom prst="rect">
+            <a:avLst/>
+          </a:prstGeom>
+          <a:solidFill>
+            <a:srgbClr val="F26A21"/>
+          </a:solidFill>
+          <a:ln>
+            <a:noFill/>
+          </a:ln>
+        </p:spPr>
+        <p:style>
+          <a:lnRef idx="1">
+            <a:schemeClr val="accent1"/>
+          </a:lnRef>
+          <a:fillRef idx="3">
+            <a:schemeClr val="accent1"/>
+          </a:fillRef>
+          <a:effectRef idx="2">
+            <a:schemeClr val="accent1"/>
+          </a:effectRef>
+          <a:fontRef idx="minor">
+            <a:schemeClr val="lt1"/>
+          </a:fontRef>
+        </p:style>
+        <p:txBody>
+          <a:bodyPr rtlCol="0" anchor="ctr"/>
+          <a:lstStyle/>
+          <a:p>
+            <a:pPr algn="ctr"/>
+          </a:p>
+        </p:txBody>
+      </p:sp>
+      <p:sp>
+        <p:nvSpPr>
+          <p:cNvPr id="3" name="TextBox 2"/>
+          <p:cNvSpPr txBox="1"/>
+          <p:nvPr/>
+        </p:nvSpPr>
+        <p:spPr>
+          <a:xfrm>
+            <a:off x="228600" y="64008"/>
+            <a:ext cx="8686800" cy="384048"/>
+          </a:xfrm>
+          <a:prstGeom prst="rect">
+            <a:avLst/>
+          </a:prstGeom>
+          <a:noFill/>
+        </p:spPr>
+        <p:txBody>
+          <a:bodyPr wrap="square">
+            <a:spAutoFit/>
+          </a:bodyPr>
+          <a:lstStyle/>
+          <a:p>
+            <a:pPr algn="l"/>
+            <a:r>
+              <a:rPr sz="2000" b="1" i="0">
+                <a:solidFill>
+                  <a:srgbClr val="FFFFFF"/>
+                </a:solidFill>
+                <a:latin typeface="Cambria"/>
+              </a:rPr>
+              <a:t>Board Motions</a:t>
+            </a:r>
+          </a:p>
+        </p:txBody>
+      </p:sp>
+      <p:sp>
+        <p:nvSpPr>
+          <p:cNvPr id="4" name="Rectangle 3"/>
+          <p:cNvSpPr/>
+          <p:nvPr/>
+        </p:nvSpPr>
+        <p:spPr>
+          <a:xfrm>
+            <a:off x="228600" y="457200"/>
+            <a:ext cx="1371600" cy="36576"/>
+          </a:xfrm>
+          <a:prstGeom prst="rect">
+            <a:avLst/>
+          </a:prstGeom>
+          <a:solidFill>
+            <a:srgbClr val="F26A21"/>
+          </a:solidFill>
+          <a:ln>
+            <a:noFill/>
+          </a:ln>
+        </p:spPr>
+        <p:style>
+          <a:lnRef idx="1">
+            <a:schemeClr val="accent1"/>
+          </a:lnRef>
+          <a:fillRef idx="3">
+            <a:schemeClr val="accent1"/>
+          </a:fillRef>
+          <a:effectRef idx="2">
+            <a:schemeClr val="accent1"/>
+          </a:effectRef>
+          <a:fontRef idx="minor">
+            <a:schemeClr val="lt1"/>
+          </a:fontRef>
+        </p:style>
+        <p:txBody>
+          <a:bodyPr rtlCol="0" anchor="ctr"/>
+          <a:lstStyle/>
+          <a:p>
+            <a:pPr algn="ctr"/>
+          </a:p>
+        </p:txBody>
+      </p:sp>
+      <p:sp>
+        <p:nvSpPr>
+          <p:cNvPr id="5" name="Rectangle 4"/>
+          <p:cNvSpPr/>
+          <p:nvPr/>
+        </p:nvSpPr>
+        <p:spPr>
+          <a:xfrm>
+            <a:off x="182880" y="530352"/>
+            <a:ext cx="8778240" cy="1261872"/>
+          </a:xfrm>
+          <a:prstGeom prst="rect">
+            <a:avLst/>
+          </a:prstGeom>
+          <a:solidFill>
+            <a:srgbClr val="1E1E1E"/>
+          </a:solidFill>
+          <a:ln>
+            <a:noFill/>
+          </a:ln>
+        </p:spPr>
+        <p:style>
+          <a:lnRef idx="1">
+            <a:schemeClr val="accent1"/>
+          </a:lnRef>
+          <a:fillRef idx="3">
+            <a:schemeClr val="accent1"/>
+          </a:fillRef>
+          <a:effectRef idx="2">
+            <a:schemeClr val="accent1"/>
+          </a:effectRef>
+          <a:fontRef idx="minor">
+            <a:schemeClr val="lt1"/>
+          </a:fontRef>
+        </p:style>
+        <p:txBody>
+          <a:bodyPr rtlCol="0" anchor="ctr"/>
+          <a:lstStyle/>
+          <a:p>
+            <a:pPr algn="ctr"/>
+          </a:p>
+        </p:txBody>
+      </p:sp>
+      <p:sp>
+        <p:nvSpPr>
+          <p:cNvPr id="6" name="Rectangle 5"/>
+          <p:cNvSpPr/>
+          <p:nvPr/>
+        </p:nvSpPr>
+        <p:spPr>
+          <a:xfrm>
+            <a:off x="182880" y="530352"/>
+            <a:ext cx="50292" cy="1261872"/>
+          </a:xfrm>
+          <a:prstGeom prst="rect">
+            <a:avLst/>
+          </a:prstGeom>
+          <a:solidFill>
+            <a:srgbClr val="F26A21"/>
+          </a:solidFill>
+          <a:ln>
+            <a:noFill/>
+          </a:ln>
+        </p:spPr>
+        <p:style>
+          <a:lnRef idx="1">
+            <a:schemeClr val="accent1"/>
+          </a:lnRef>
+          <a:fillRef idx="3">
+            <a:schemeClr val="accent1"/>
+          </a:fillRef>
+          <a:effectRef idx="2">
+            <a:schemeClr val="accent1"/>
+          </a:effectRef>
+          <a:fontRef idx="minor">
+            <a:schemeClr val="lt1"/>
+          </a:fontRef>
+        </p:style>
+        <p:txBody>
+          <a:bodyPr rtlCol="0" anchor="ctr"/>
+          <a:lstStyle/>
+          <a:p>
+            <a:pPr algn="ctr"/>
+          </a:p>
+        </p:txBody>
+      </p:sp>
+      <p:sp>
+        <p:nvSpPr>
+          <p:cNvPr id="7" name="TextBox 6"/>
+          <p:cNvSpPr txBox="1"/>
+          <p:nvPr/>
+        </p:nvSpPr>
+        <p:spPr>
+          <a:xfrm>
+            <a:off x="274320" y="603503"/>
+            <a:ext cx="457200" cy="457200"/>
+          </a:xfrm>
+          <a:prstGeom prst="rect">
+            <a:avLst/>
+          </a:prstGeom>
+          <a:noFill/>
+        </p:spPr>
+        <p:txBody>
+          <a:bodyPr wrap="square">
+            <a:spAutoFit/>
+          </a:bodyPr>
+          <a:lstStyle/>
+          <a:p>
+            <a:pPr algn="l"/>
+            <a:r>
+              <a:rPr sz="2600" b="1" i="0">
+                <a:solidFill>
+                  <a:srgbClr val="F26A21"/>
+                </a:solidFill>
+                <a:latin typeface="Cambria"/>
+              </a:rPr>
+              <a:t>1</a:t>
+            </a:r>
+          </a:p>
+        </p:txBody>
+      </p:sp>
+      <p:sp>
+        <p:nvSpPr>
+          <p:cNvPr id="8" name="TextBox 7"/>
+          <p:cNvSpPr txBox="1"/>
+          <p:nvPr/>
+        </p:nvSpPr>
+        <p:spPr>
+          <a:xfrm>
+            <a:off x="804672" y="612647"/>
+            <a:ext cx="6583680" cy="274320"/>
+          </a:xfrm>
+          <a:prstGeom prst="rect">
+            <a:avLst/>
+          </a:prstGeom>
+          <a:noFill/>
+        </p:spPr>
+        <p:txBody>
+          <a:bodyPr wrap="square">
+            <a:spAutoFit/>
+          </a:bodyPr>
+          <a:lstStyle/>
+          <a:p>
+            <a:pPr algn="l"/>
+            <a:r>
+              <a:rPr sz="1100" b="1" i="0">
+                <a:solidFill>
+                  <a:srgbClr val="FFFFFF"/>
+                </a:solidFill>
+                <a:latin typeface="Calibri"/>
+              </a:rPr>
+              <a:t>Confirm §3 Exclusivity (May 2025 Asset Acquisition Agreement)</a:t>
+            </a:r>
+          </a:p>
+        </p:txBody>
+      </p:sp>
+      <p:sp>
+        <p:nvSpPr>
+          <p:cNvPr id="9" name="TextBox 8"/>
+          <p:cNvSpPr txBox="1"/>
+          <p:nvPr/>
+        </p:nvSpPr>
+        <p:spPr>
+          <a:xfrm>
+            <a:off x="804672" y="914400"/>
+            <a:ext cx="6217920" cy="786383"/>
+          </a:xfrm>
+          <a:prstGeom prst="rect">
+            <a:avLst/>
+          </a:prstGeom>
+          <a:noFill/>
+        </p:spPr>
+        <p:txBody>
+          <a:bodyPr wrap="square">
+            <a:spAutoFit/>
+          </a:bodyPr>
+          <a:lstStyle/>
+          <a:p>
+            <a:r>
+              <a:rPr sz="800">
+                <a:solidFill>
+                  <a:srgbClr val="CCCCCC"/>
+                </a:solidFill>
+                <a:latin typeface="Calibri"/>
+              </a:rPr>
+              <a:t>Approve a 90-day exclusivity period beginning on the date of this approval.</a:t>
+            </a:r>
+          </a:p>
+          <a:p>
+            <a:r>
+              <a:rPr sz="800">
+                <a:solidFill>
+                  <a:srgbClr val="CCCCCC"/>
+                </a:solidFill>
+                <a:latin typeface="Calibri"/>
+              </a:rPr>
+              <a:t>Extension not unreasonably withheld (per §3). Allows both parties to proceed to</a:t>
+            </a:r>
+          </a:p>
+          <a:p>
+            <a:r>
+              <a:rPr sz="800">
+                <a:solidFill>
+                  <a:srgbClr val="CCCCCC"/>
+                </a:solidFill>
+                <a:latin typeface="Calibri"/>
+              </a:rPr>
+              <a:t>diligence, definitive agreement, and financing close (target: Feb 15th, 2027).</a:t>
+            </a:r>
+          </a:p>
+        </p:txBody>
+      </p:sp>
+      <p:sp>
+        <p:nvSpPr>
+          <p:cNvPr id="10" name="TextBox 9"/>
+          <p:cNvSpPr txBox="1"/>
+          <p:nvPr/>
+        </p:nvSpPr>
+        <p:spPr>
+          <a:xfrm>
+            <a:off x="7452359" y="713232"/>
+            <a:ext cx="1371600" cy="256032"/>
+          </a:xfrm>
+          <a:prstGeom prst="rect">
+            <a:avLst/>
+          </a:prstGeom>
+          <a:noFill/>
+        </p:spPr>
+        <p:txBody>
+          <a:bodyPr wrap="square">
+            <a:spAutoFit/>
+          </a:bodyPr>
+          <a:lstStyle/>
+          <a:p>
+            <a:pPr algn="l"/>
+            <a:r>
+              <a:rPr sz="900" b="0" i="0">
+                <a:solidFill>
+                  <a:srgbClr val="44BB44"/>
+                </a:solidFill>
+                <a:latin typeface="Calibri"/>
+              </a:rPr>
+              <a:t>☐  Approve</a:t>
+            </a:r>
+          </a:p>
+        </p:txBody>
+      </p:sp>
+      <p:sp>
+        <p:nvSpPr>
+          <p:cNvPr id="11" name="TextBox 10"/>
+          <p:cNvSpPr txBox="1"/>
+          <p:nvPr/>
+        </p:nvSpPr>
+        <p:spPr>
+          <a:xfrm>
+            <a:off x="7452359" y="969264"/>
+            <a:ext cx="1371600" cy="256032"/>
+          </a:xfrm>
+          <a:prstGeom prst="rect">
+            <a:avLst/>
+          </a:prstGeom>
+          <a:noFill/>
+        </p:spPr>
+        <p:txBody>
+          <a:bodyPr wrap="square">
+            <a:spAutoFit/>
+          </a:bodyPr>
+          <a:lstStyle/>
+          <a:p>
+            <a:pPr algn="l"/>
+            <a:r>
+              <a:rPr sz="900" b="0" i="0">
+                <a:solidFill>
+                  <a:srgbClr val="FF6666"/>
+                </a:solidFill>
+                <a:latin typeface="Calibri"/>
+              </a:rPr>
+              <a:t>☐  Decline</a:t>
+            </a:r>
+          </a:p>
+        </p:txBody>
+      </p:sp>
+      <p:sp>
+        <p:nvSpPr>
+          <p:cNvPr id="12" name="Rectangle 11"/>
+          <p:cNvSpPr/>
+          <p:nvPr/>
+        </p:nvSpPr>
+        <p:spPr>
+          <a:xfrm>
+            <a:off x="182880" y="1847088"/>
+            <a:ext cx="8778240" cy="1261872"/>
+          </a:xfrm>
+          <a:prstGeom prst="rect">
+            <a:avLst/>
+          </a:prstGeom>
+          <a:solidFill>
+            <a:srgbClr val="1E1E1E"/>
+          </a:solidFill>
+          <a:ln>
+            <a:noFill/>
+          </a:ln>
+        </p:spPr>
+        <p:style>
+          <a:lnRef idx="1">
+            <a:schemeClr val="accent1"/>
+          </a:lnRef>
+          <a:fillRef idx="3">
+            <a:schemeClr val="accent1"/>
+          </a:fillRef>
+          <a:effectRef idx="2">
+            <a:schemeClr val="accent1"/>
+          </a:effectRef>
+          <a:fontRef idx="minor">
+            <a:schemeClr val="lt1"/>
+          </a:fontRef>
+        </p:style>
+        <p:txBody>
+          <a:bodyPr rtlCol="0" anchor="ctr"/>
+          <a:lstStyle/>
+          <a:p>
+            <a:pPr algn="ctr"/>
+          </a:p>
+        </p:txBody>
+      </p:sp>
+      <p:sp>
+        <p:nvSpPr>
+          <p:cNvPr id="13" name="Rectangle 12"/>
+          <p:cNvSpPr/>
+          <p:nvPr/>
+        </p:nvSpPr>
+        <p:spPr>
+          <a:xfrm>
+            <a:off x="182880" y="1847088"/>
+            <a:ext cx="50292" cy="1261872"/>
+          </a:xfrm>
+          <a:prstGeom prst="rect">
+            <a:avLst/>
+          </a:prstGeom>
+          <a:solidFill>
+            <a:srgbClr val="F26A21"/>
+          </a:solidFill>
+          <a:ln>
+            <a:noFill/>
+          </a:ln>
+        </p:spPr>
+        <p:style>
+          <a:lnRef idx="1">
+            <a:schemeClr val="accent1"/>
+          </a:lnRef>
+          <a:fillRef idx="3">
+            <a:schemeClr val="accent1"/>
+          </a:fillRef>
+          <a:effectRef idx="2">
+            <a:schemeClr val="accent1"/>
+          </a:effectRef>
+          <a:fontRef idx="minor">
+            <a:schemeClr val="lt1"/>
+          </a:fontRef>
+        </p:style>
+        <p:txBody>
+          <a:bodyPr rtlCol="0" anchor="ctr"/>
+          <a:lstStyle/>
+          <a:p>
+            <a:pPr algn="ctr"/>
+          </a:p>
+        </p:txBody>
+      </p:sp>
+      <p:sp>
+        <p:nvSpPr>
+          <p:cNvPr id="14" name="TextBox 13"/>
+          <p:cNvSpPr txBox="1"/>
+          <p:nvPr/>
+        </p:nvSpPr>
+        <p:spPr>
+          <a:xfrm>
+            <a:off x="274320" y="1920240"/>
+            <a:ext cx="457200" cy="457200"/>
+          </a:xfrm>
+          <a:prstGeom prst="rect">
+            <a:avLst/>
+          </a:prstGeom>
+          <a:noFill/>
+        </p:spPr>
+        <p:txBody>
+          <a:bodyPr wrap="square">
+            <a:spAutoFit/>
+          </a:bodyPr>
+          <a:lstStyle/>
+          <a:p>
+            <a:pPr algn="l"/>
+            <a:r>
+              <a:rPr sz="2600" b="1" i="0">
+                <a:solidFill>
+                  <a:srgbClr val="F26A21"/>
+                </a:solidFill>
+                <a:latin typeface="Cambria"/>
+              </a:rPr>
+              <a:t>2</a:t>
+            </a:r>
+          </a:p>
+        </p:txBody>
+      </p:sp>
+      <p:sp>
+        <p:nvSpPr>
+          <p:cNvPr id="15" name="TextBox 14"/>
+          <p:cNvSpPr txBox="1"/>
+          <p:nvPr/>
+        </p:nvSpPr>
+        <p:spPr>
+          <a:xfrm>
+            <a:off x="804672" y="1929384"/>
+            <a:ext cx="6583680" cy="274320"/>
+          </a:xfrm>
+          <a:prstGeom prst="rect">
+            <a:avLst/>
+          </a:prstGeom>
+          <a:noFill/>
+        </p:spPr>
+        <p:txBody>
+          <a:bodyPr wrap="square">
+            <a:spAutoFit/>
+          </a:bodyPr>
+          <a:lstStyle/>
+          <a:p>
+            <a:pPr algn="l"/>
+            <a:r>
+              <a:rPr sz="1100" b="1" i="0">
+                <a:solidFill>
+                  <a:srgbClr val="FFFFFF"/>
+                </a:solidFill>
+                <a:latin typeface="Calibri"/>
+              </a:rPr>
+              <a:t>Grant Full Read-Only QuickBooks Online Access for Diligence</a:t>
+            </a:r>
+          </a:p>
+        </p:txBody>
+      </p:sp>
+      <p:sp>
+        <p:nvSpPr>
+          <p:cNvPr id="16" name="TextBox 15"/>
+          <p:cNvSpPr txBox="1"/>
+          <p:nvPr/>
+        </p:nvSpPr>
+        <p:spPr>
+          <a:xfrm>
+            <a:off x="804672" y="2231136"/>
+            <a:ext cx="6217920" cy="786383"/>
+          </a:xfrm>
+          <a:prstGeom prst="rect">
+            <a:avLst/>
+          </a:prstGeom>
+          <a:noFill/>
+        </p:spPr>
+        <p:txBody>
+          <a:bodyPr wrap="square">
+            <a:spAutoFit/>
+          </a:bodyPr>
+          <a:lstStyle/>
+          <a:p>
+            <a:r>
+              <a:rPr sz="800">
+                <a:solidFill>
+                  <a:srgbClr val="CCCCCC"/>
+                </a:solidFill>
+                <a:latin typeface="Calibri"/>
+              </a:rPr>
+              <a:t>Authorize an all-access or accountant user for John Quinn and one Exos finance reviewer.</a:t>
+            </a:r>
+          </a:p>
+          <a:p>
+            <a:r>
+              <a:rPr sz="800">
+                <a:solidFill>
+                  <a:srgbClr val="CCCCCC"/>
+                </a:solidFill>
+                <a:latin typeface="Calibri"/>
+              </a:rPr>
+              <a:t>Purpose: reconcile the $864K "billed-ahead" balance and shared-facility costs (Microcosm</a:t>
+            </a:r>
+          </a:p>
+          <a:p>
+            <a:r>
+              <a:rPr sz="800">
+                <a:solidFill>
+                  <a:srgbClr val="CCCCCC"/>
+                </a:solidFill>
+                <a:latin typeface="Calibri"/>
+              </a:rPr>
+              <a:t>offset) before close.  Basis: Cal. Corp. Code §1602 director inspection right + AAA §4</a:t>
+            </a:r>
+          </a:p>
+          <a:p>
+            <a:r>
+              <a:rPr sz="800">
+                <a:solidFill>
+                  <a:srgbClr val="CCCCCC"/>
+                </a:solidFill>
+                <a:latin typeface="Calibri"/>
+              </a:rPr>
+              <a:t>confirmatory diligence.  Confidential under the 7/27/2021 NDA.</a:t>
+            </a:r>
+          </a:p>
+        </p:txBody>
+      </p:sp>
+      <p:sp>
+        <p:nvSpPr>
+          <p:cNvPr id="17" name="TextBox 16"/>
+          <p:cNvSpPr txBox="1"/>
+          <p:nvPr/>
+        </p:nvSpPr>
+        <p:spPr>
+          <a:xfrm>
+            <a:off x="7452359" y="2029968"/>
+            <a:ext cx="1371600" cy="256032"/>
+          </a:xfrm>
+          <a:prstGeom prst="rect">
+            <a:avLst/>
+          </a:prstGeom>
+          <a:noFill/>
+        </p:spPr>
+        <p:txBody>
+          <a:bodyPr wrap="square">
+            <a:spAutoFit/>
+          </a:bodyPr>
+          <a:lstStyle/>
+          <a:p>
+            <a:pPr algn="l"/>
+            <a:r>
+              <a:rPr sz="900" b="0" i="0">
+                <a:solidFill>
+                  <a:srgbClr val="44BB44"/>
+                </a:solidFill>
+                <a:latin typeface="Calibri"/>
+              </a:rPr>
+              <a:t>☐  Approve</a:t>
+            </a:r>
+          </a:p>
+        </p:txBody>
+      </p:sp>
+      <p:sp>
+        <p:nvSpPr>
+          <p:cNvPr id="18" name="TextBox 17"/>
+          <p:cNvSpPr txBox="1"/>
+          <p:nvPr/>
+        </p:nvSpPr>
+        <p:spPr>
+          <a:xfrm>
+            <a:off x="7452359" y="2286000"/>
+            <a:ext cx="1371600" cy="256032"/>
+          </a:xfrm>
+          <a:prstGeom prst="rect">
+            <a:avLst/>
+          </a:prstGeom>
+          <a:noFill/>
+        </p:spPr>
+        <p:txBody>
+          <a:bodyPr wrap="square">
+            <a:spAutoFit/>
+          </a:bodyPr>
+          <a:lstStyle/>
+          <a:p>
+            <a:pPr algn="l"/>
+            <a:r>
+              <a:rPr sz="900" b="0" i="0">
+                <a:solidFill>
+                  <a:srgbClr val="FF6666"/>
+                </a:solidFill>
+                <a:latin typeface="Calibri"/>
+              </a:rPr>
+              <a:t>☐  Decline</a:t>
+            </a:r>
+          </a:p>
+        </p:txBody>
+      </p:sp>
+      <p:sp>
+        <p:nvSpPr>
+          <p:cNvPr id="19" name="Rectangle 18"/>
+          <p:cNvSpPr/>
+          <p:nvPr/>
+        </p:nvSpPr>
+        <p:spPr>
+          <a:xfrm>
+            <a:off x="182880" y="3163824"/>
+            <a:ext cx="8778240" cy="1097280"/>
+          </a:xfrm>
+          <a:prstGeom prst="rect">
+            <a:avLst/>
+          </a:prstGeom>
+          <a:solidFill>
+            <a:srgbClr val="1E1E1E"/>
+          </a:solidFill>
+          <a:ln>
+            <a:noFill/>
+          </a:ln>
+        </p:spPr>
+        <p:style>
+          <a:lnRef idx="1">
+            <a:schemeClr val="accent1"/>
+          </a:lnRef>
+          <a:fillRef idx="3">
+            <a:schemeClr val="accent1"/>
+          </a:fillRef>
+          <a:effectRef idx="2">
+            <a:schemeClr val="accent1"/>
+          </a:effectRef>
+          <a:fontRef idx="minor">
+            <a:schemeClr val="lt1"/>
+          </a:fontRef>
+        </p:style>
+        <p:txBody>
+          <a:bodyPr rtlCol="0" anchor="ctr"/>
+          <a:lstStyle/>
+          <a:p>
+            <a:pPr algn="ctr"/>
+          </a:p>
+        </p:txBody>
+      </p:sp>
+      <p:sp>
+        <p:nvSpPr>
+          <p:cNvPr id="20" name="Rectangle 19"/>
+          <p:cNvSpPr/>
+          <p:nvPr/>
+        </p:nvSpPr>
+        <p:spPr>
+          <a:xfrm>
+            <a:off x="182880" y="3163824"/>
+            <a:ext cx="50292" cy="1097280"/>
+          </a:xfrm>
+          <a:prstGeom prst="rect">
+            <a:avLst/>
+          </a:prstGeom>
+          <a:solidFill>
+            <a:srgbClr val="F26A21"/>
+          </a:solidFill>
+          <a:ln>
+            <a:noFill/>
+          </a:ln>
+        </p:spPr>
+        <p:style>
+          <a:lnRef idx="1">
+            <a:schemeClr val="accent1"/>
+          </a:lnRef>
+          <a:fillRef idx="3">
+            <a:schemeClr val="accent1"/>
+          </a:fillRef>
+          <a:effectRef idx="2">
+            <a:schemeClr val="accent1"/>
+          </a:effectRef>
+          <a:fontRef idx="minor">
+            <a:schemeClr val="lt1"/>
+          </a:fontRef>
+        </p:style>
+        <p:txBody>
+          <a:bodyPr rtlCol="0" anchor="ctr"/>
+          <a:lstStyle/>
+          <a:p>
+            <a:pPr algn="ctr"/>
+          </a:p>
+        </p:txBody>
+      </p:sp>
+      <p:sp>
+        <p:nvSpPr>
+          <p:cNvPr id="21" name="TextBox 20"/>
+          <p:cNvSpPr txBox="1"/>
+          <p:nvPr/>
+        </p:nvSpPr>
+        <p:spPr>
+          <a:xfrm>
+            <a:off x="274320" y="3236976"/>
+            <a:ext cx="457200" cy="457200"/>
+          </a:xfrm>
+          <a:prstGeom prst="rect">
+            <a:avLst/>
+          </a:prstGeom>
+          <a:noFill/>
+        </p:spPr>
+        <p:txBody>
+          <a:bodyPr wrap="square">
+            <a:spAutoFit/>
+          </a:bodyPr>
+          <a:lstStyle/>
+          <a:p>
+            <a:pPr algn="l"/>
+            <a:r>
+              <a:rPr sz="2600" b="1" i="0">
+                <a:solidFill>
+                  <a:srgbClr val="F26A21"/>
+                </a:solidFill>
+                <a:latin typeface="Cambria"/>
+              </a:rPr>
+              <a:t>3</a:t>
+            </a:r>
+          </a:p>
+        </p:txBody>
+      </p:sp>
+      <p:sp>
+        <p:nvSpPr>
+          <p:cNvPr id="22" name="TextBox 21"/>
+          <p:cNvSpPr txBox="1"/>
+          <p:nvPr/>
+        </p:nvSpPr>
+        <p:spPr>
+          <a:xfrm>
+            <a:off x="804672" y="3246120"/>
+            <a:ext cx="6583680" cy="274320"/>
+          </a:xfrm>
+          <a:prstGeom prst="rect">
+            <a:avLst/>
+          </a:prstGeom>
+          <a:noFill/>
+        </p:spPr>
+        <p:txBody>
+          <a:bodyPr wrap="square">
+            <a:spAutoFit/>
+          </a:bodyPr>
+          <a:lstStyle/>
+          <a:p>
+            <a:pPr algn="l"/>
+            <a:r>
+              <a:rPr sz="1100" b="1" i="0">
+                <a:solidFill>
+                  <a:srgbClr val="FFFFFF"/>
+                </a:solidFill>
+                <a:latin typeface="Calibri"/>
+              </a:rPr>
+              <a:t>Consent to ERP/MRP &amp; Inventory Evaluation (Separate Motion)</a:t>
+            </a:r>
+          </a:p>
+        </p:txBody>
+      </p:sp>
+      <p:sp>
+        <p:nvSpPr>
+          <p:cNvPr id="23" name="TextBox 22"/>
+          <p:cNvSpPr txBox="1"/>
+          <p:nvPr/>
+        </p:nvSpPr>
+        <p:spPr>
+          <a:xfrm>
+            <a:off x="804672" y="3547872"/>
+            <a:ext cx="6217920" cy="621792"/>
+          </a:xfrm>
+          <a:prstGeom prst="rect">
+            <a:avLst/>
+          </a:prstGeom>
+          <a:noFill/>
+        </p:spPr>
+        <p:txBody>
+          <a:bodyPr wrap="square">
+            <a:spAutoFit/>
+          </a:bodyPr>
+          <a:lstStyle/>
+          <a:p>
+            <a:r>
+              <a:rPr sz="800">
+                <a:solidFill>
+                  <a:srgbClr val="CCCCCC"/>
+                </a:solidFill>
+                <a:latin typeface="Calibri"/>
+              </a:rPr>
+              <a:t>Authorize Exos to use the same QB data to evaluate its in-house ERP/MRP and inventory</a:t>
+            </a:r>
+          </a:p>
+          <a:p>
+            <a:r>
+              <a:rPr sz="800">
+                <a:solidFill>
+                  <a:srgbClr val="CCCCCC"/>
+                </a:solidFill>
+                <a:latin typeface="Calibri"/>
+              </a:rPr>
+              <a:t>systems for the combined operation.  Confidential under the NDA.</a:t>
+            </a:r>
+          </a:p>
+          <a:p>
+            <a:r>
+              <a:rPr sz="800">
+                <a:solidFill>
+                  <a:srgbClr val="CCCCCC"/>
+                </a:solidFill>
+                <a:latin typeface="Calibri"/>
+              </a:rPr>
+              <a:t>Does not create any obligation to implement; evaluation only.</a:t>
+            </a:r>
+          </a:p>
+        </p:txBody>
+      </p:sp>
+      <p:sp>
+        <p:nvSpPr>
+          <p:cNvPr id="24" name="TextBox 23"/>
+          <p:cNvSpPr txBox="1"/>
+          <p:nvPr/>
+        </p:nvSpPr>
+        <p:spPr>
+          <a:xfrm>
+            <a:off x="7452359" y="3346704"/>
+            <a:ext cx="1371600" cy="256032"/>
+          </a:xfrm>
+          <a:prstGeom prst="rect">
+            <a:avLst/>
+          </a:prstGeom>
+          <a:noFill/>
+        </p:spPr>
+        <p:txBody>
+          <a:bodyPr wrap="square">
+            <a:spAutoFit/>
+          </a:bodyPr>
+          <a:lstStyle/>
+          <a:p>
+            <a:pPr algn="l"/>
+            <a:r>
+              <a:rPr sz="900" b="0" i="0">
+                <a:solidFill>
+                  <a:srgbClr val="44BB44"/>
+                </a:solidFill>
+                <a:latin typeface="Calibri"/>
+              </a:rPr>
+              <a:t>☐  Approve</a:t>
+            </a:r>
+          </a:p>
+        </p:txBody>
+      </p:sp>
+      <p:sp>
+        <p:nvSpPr>
+          <p:cNvPr id="25" name="TextBox 24"/>
+          <p:cNvSpPr txBox="1"/>
+          <p:nvPr/>
+        </p:nvSpPr>
+        <p:spPr>
+          <a:xfrm>
+            <a:off x="7452359" y="3602736"/>
+            <a:ext cx="1371600" cy="256032"/>
+          </a:xfrm>
+          <a:prstGeom prst="rect">
+            <a:avLst/>
+          </a:prstGeom>
+          <a:noFill/>
+        </p:spPr>
+        <p:txBody>
+          <a:bodyPr wrap="square">
+            <a:spAutoFit/>
+          </a:bodyPr>
+          <a:lstStyle/>
+          <a:p>
+            <a:pPr algn="l"/>
+            <a:r>
+              <a:rPr sz="900" b="0" i="0">
+                <a:solidFill>
+                  <a:srgbClr val="FF6666"/>
+                </a:solidFill>
+                <a:latin typeface="Calibri"/>
+              </a:rPr>
+              <a:t>☐  Decline</a:t>
+            </a:r>
+          </a:p>
+        </p:txBody>
+      </p:sp>
+      <p:sp>
+        <p:nvSpPr>
+          <p:cNvPr id="26" name="Rectangle 25"/>
+          <p:cNvSpPr/>
+          <p:nvPr/>
+        </p:nvSpPr>
+        <p:spPr>
+          <a:xfrm>
+            <a:off x="182880" y="4325112"/>
+            <a:ext cx="8778240" cy="201168"/>
+          </a:xfrm>
+          <a:prstGeom prst="rect">
+            <a:avLst/>
+          </a:prstGeom>
+          <a:solidFill>
+            <a:srgbClr val="1A0A00"/>
+          </a:solidFill>
+          <a:ln>
+            <a:noFill/>
+          </a:ln>
+        </p:spPr>
+        <p:style>
+          <a:lnRef idx="1">
+            <a:schemeClr val="accent1"/>
+          </a:lnRef>
+          <a:fillRef idx="3">
+            <a:schemeClr val="accent1"/>
+          </a:fillRef>
+          <a:effectRef idx="2">
+            <a:schemeClr val="accent1"/>
+          </a:effectRef>
+          <a:fontRef idx="minor">
+            <a:schemeClr val="lt1"/>
+          </a:fontRef>
+        </p:style>
+        <p:txBody>
+          <a:bodyPr rtlCol="0" anchor="ctr"/>
+          <a:lstStyle/>
+          <a:p>
+            <a:pPr algn="ctr"/>
+          </a:p>
+        </p:txBody>
+      </p:sp>
+      <p:sp>
+        <p:nvSpPr>
+          <p:cNvPr id="27" name="TextBox 26"/>
+          <p:cNvSpPr txBox="1"/>
+          <p:nvPr/>
+        </p:nvSpPr>
+        <p:spPr>
+          <a:xfrm>
+            <a:off x="292608" y="4352544"/>
+            <a:ext cx="8549640" cy="155448"/>
+          </a:xfrm>
+          <a:prstGeom prst="rect">
+            <a:avLst/>
+          </a:prstGeom>
+          <a:noFill/>
+        </p:spPr>
+        <p:txBody>
+          <a:bodyPr wrap="square">
+            <a:spAutoFit/>
+          </a:bodyPr>
+          <a:lstStyle/>
+          <a:p>
+            <a:pPr algn="l"/>
+            <a:r>
+              <a:rPr sz="750" b="0" i="1">
+                <a:solidFill>
+                  <a:srgbClr val="F26A21"/>
+                </a:solidFill>
+                <a:latin typeface="Calibri"/>
+              </a:rPr>
+              <a:t>Governance: John Quinn abstains on all motions as an interested director; motions are decided by the disinterested directors.</a:t>
+            </a:r>
+          </a:p>
+        </p:txBody>
+      </p:sp>
+      <p:sp>
+        <p:nvSpPr>
+          <p:cNvPr id="28" name="TextBox 27"/>
+          <p:cNvSpPr txBox="1"/>
+          <p:nvPr/>
+        </p:nvSpPr>
+        <p:spPr>
+          <a:xfrm>
+            <a:off x="1554480" y="4892040"/>
+            <a:ext cx="6035040" cy="201168"/>
+          </a:xfrm>
+          <a:prstGeom prst="rect">
+            <a:avLst/>
+          </a:prstGeom>
+          <a:noFill/>
+        </p:spPr>
+        <p:txBody>
+          <a:bodyPr wrap="square">
+            <a:spAutoFit/>
+          </a:bodyPr>
+          <a:lstStyle/>
+          <a:p>
+            <a:pPr algn="ctr"/>
+            <a:r>
+              <a:rPr sz="700" b="0" i="1">
+                <a:solidFill>
+                  <a:srgbClr val="888888"/>
+                </a:solidFill>
+                <a:latin typeface="Calibri"/>
+              </a:rPr>
+              <a:t>DRAFT — NEGOTIATING TERMS</a:t>
+            </a:r>
+          </a:p>
+        </p:txBody>
+      </p:sp>
+      <p:sp>
+        <p:nvSpPr>
+          <p:cNvPr id="29" name="TextBox 28"/>
+          <p:cNvSpPr txBox="1"/>
+          <p:nvPr/>
+        </p:nvSpPr>
+        <p:spPr>
+          <a:xfrm>
+            <a:off x="7772400" y="4892040"/>
+            <a:ext cx="1143000" cy="201168"/>
+          </a:xfrm>
+          <a:prstGeom prst="rect">
+            <a:avLst/>
+          </a:prstGeom>
+          <a:noFill/>
+        </p:spPr>
+        <p:txBody>
+          <a:bodyPr wrap="square">
+            <a:spAutoFit/>
+          </a:bodyPr>
+          <a:lstStyle/>
+          <a:p>
+            <a:pPr algn="r"/>
+            <a:r>
+              <a:rPr sz="700" b="0" i="1">
+                <a:solidFill>
+                  <a:srgbClr val="888888"/>
+                </a:solidFill>
+                <a:latin typeface="Calibri"/>
+              </a:rPr>
+              <a:t>CONFIDENTIAL</a:t>
+            </a:r>
+          </a:p>
+        </p:txBody>
+      </p:sp>
+    </p:spTree>
+  </p:cSld>
+  <p:clrMapOvr>
+    <a:masterClrMapping/>
+  </p:clrMapOvr>
+</p:sld>
+</file>
+
+<file path=ppt/slides/slide12.xml><?xml version="1.0" encoding="utf-8"?>
+<p:sld xmlns:a="http://schemas.openxmlformats.org/drawingml/2006/main" xmlns:r="http://schemas.openxmlformats.org/officeDocument/2006/relationships" xmlns:p="http://schemas.openxmlformats.org/presentationml/2006/main">
   <p:cSld name="Slide 10">
     <p:bg>
       <p:bgPr>
@@ -2208,6 +4457,10 @@
           </a:solidFill>
           <a:ln/>
         </p:spPr>
+        <p:txBody>
+          <a:bodyPr/>
+          <a:p/>
+        </p:txBody>
       </p:sp>
       <p:sp>
         <p:nvSpPr>
@@ -2231,6 +4484,10 @@
             <a:prstDash val="solid"/>
           </a:ln>
         </p:spPr>
+        <p:txBody>
+          <a:bodyPr/>
+          <a:p/>
+        </p:txBody>
       </p:sp>
       <p:sp>
         <p:nvSpPr>
@@ -2256,6 +4513,10 @@
             <a:prstDash val="solid"/>
           </a:ln>
         </p:spPr>
+        <p:txBody>
+          <a:bodyPr/>
+          <a:p/>
+        </p:txBody>
       </p:sp>
       <p:sp>
         <p:nvSpPr>
@@ -2323,7 +4584,7 @@
                   <a:srgbClr val="FFFFFF"/>
                 </a:solidFill>
               </a:rPr>
-              <a:t>Board Confirms Exclusivity</a:t>
+              <a:t>Board Votes — Three Motions</a:t>
             </a:r>
             <a:endParaRPr lang="en-US" sz="1400" dirty="0"/>
           </a:p>
@@ -2387,6 +4648,10 @@
             <a:prstDash val="solid"/>
           </a:ln>
         </p:spPr>
+        <p:txBody>
+          <a:bodyPr/>
+          <a:p/>
+        </p:txBody>
       </p:sp>
       <p:sp>
         <p:nvSpPr>
@@ -2412,6 +4677,10 @@
             <a:prstDash val="solid"/>
           </a:ln>
         </p:spPr>
+        <p:txBody>
+          <a:bodyPr/>
+          <a:p/>
+        </p:txBody>
       </p:sp>
       <p:sp>
         <p:nvSpPr>
@@ -2543,6 +4812,10 @@
             <a:prstDash val="solid"/>
           </a:ln>
         </p:spPr>
+        <p:txBody>
+          <a:bodyPr/>
+          <a:p/>
+        </p:txBody>
       </p:sp>
       <p:sp>
         <p:nvSpPr>
@@ -2568,6 +4841,10 @@
             <a:prstDash val="solid"/>
           </a:ln>
         </p:spPr>
+        <p:txBody>
+          <a:bodyPr/>
+          <a:p/>
+        </p:txBody>
       </p:sp>
       <p:sp>
         <p:nvSpPr>
@@ -2699,6 +4976,10 @@
             <a:prstDash val="solid"/>
           </a:ln>
         </p:spPr>
+        <p:txBody>
+          <a:bodyPr/>
+          <a:p/>
+        </p:txBody>
       </p:sp>
       <p:sp>
         <p:nvSpPr>
@@ -2724,6 +5005,10 @@
             <a:prstDash val="solid"/>
           </a:ln>
         </p:spPr>
+        <p:txBody>
+          <a:bodyPr/>
+          <a:p/>
+        </p:txBody>
       </p:sp>
       <p:sp>
         <p:nvSpPr>
@@ -2857,6 +5142,10 @@
             <a:prstDash val="solid"/>
           </a:ln>
         </p:spPr>
+        <p:txBody>
+          <a:bodyPr/>
+          <a:p/>
+        </p:txBody>
       </p:sp>
       <p:sp>
         <p:nvSpPr>
@@ -2990,6 +5279,10 @@
             <a:prstDash val="solid"/>
           </a:ln>
         </p:spPr>
+        <p:txBody>
+          <a:bodyPr/>
+          <a:p/>
+        </p:txBody>
       </p:sp>
       <p:sp>
         <p:nvSpPr>
@@ -3021,1784 +5314,9 @@
                   <a:srgbClr val="F26A21"/>
                 </a:solidFill>
               </a:rPr>
-              <a:t>The Board is asked to confirm §3 exclusivity. Questions and open items welcome.</a:t>
+              <a:t>The Board is asked to vote on Motions 1–3. Questions and open items welcome.</a:t>
             </a:r>
             <a:endParaRPr lang="en-US" sz="1300" dirty="0"/>
-          </a:p>
-        </p:txBody>
-      </p:sp>
-    </p:spTree>
-  </p:cSld>
-  <p:clrMapOvr>
-    <a:masterClrMapping/>
-  </p:clrMapOvr>
-</p:sld>
-</file>
-
-<file path=ppt/slides/slide11.xml><?xml version="1.0" encoding="utf-8"?>
-<p:sld xmlns:a="http://schemas.openxmlformats.org/drawingml/2006/main" xmlns:p="http://schemas.openxmlformats.org/presentationml/2006/main" xmlns:r="http://schemas.openxmlformats.org/officeDocument/2006/relationships">
-  <p:cSld>
-    <p:bg>
-      <p:bgPr>
-        <a:solidFill>
-          <a:srgbClr val="111111"/>
-        </a:solidFill>
-        <a:effectLst/>
-      </p:bgPr>
-    </p:bg>
-    <p:spTree>
-      <p:nvGrpSpPr>
-        <p:cNvPr id="1" name=""/>
-        <p:cNvGrpSpPr/>
-        <p:nvPr/>
-      </p:nvGrpSpPr>
-      <p:grpSpPr/>
-      <p:sp>
-        <p:nvSpPr>
-          <p:cNvPr id="2" name="Rectangle 1"/>
-          <p:cNvSpPr/>
-          <p:nvPr/>
-        </p:nvSpPr>
-        <p:spPr>
-          <a:xfrm>
-            <a:off x="0" y="0"/>
-            <a:ext cx="9144000" cy="50292"/>
-          </a:xfrm>
-          <a:prstGeom prst="rect">
-            <a:avLst/>
-          </a:prstGeom>
-          <a:solidFill>
-            <a:srgbClr val="F26A21"/>
-          </a:solidFill>
-          <a:ln>
-            <a:noFill/>
-          </a:ln>
-        </p:spPr>
-        <p:style>
-          <a:lnRef idx="1">
-            <a:schemeClr val="accent1"/>
-          </a:lnRef>
-          <a:fillRef idx="3">
-            <a:schemeClr val="accent1"/>
-          </a:fillRef>
-          <a:effectRef idx="2">
-            <a:schemeClr val="accent1"/>
-          </a:effectRef>
-          <a:fontRef idx="minor">
-            <a:schemeClr val="lt1"/>
-          </a:fontRef>
-        </p:style>
-        <p:txBody>
-          <a:bodyPr rtlCol="0" anchor="ctr"/>
-          <a:lstStyle/>
-          <a:p>
-            <a:pPr algn="ctr"/>
-          </a:p>
-        </p:txBody>
-      </p:sp>
-      <p:sp>
-        <p:nvSpPr>
-          <p:cNvPr id="3" name="TextBox 2"/>
-          <p:cNvSpPr txBox="1"/>
-          <p:nvPr/>
-        </p:nvSpPr>
-        <p:spPr>
-          <a:xfrm>
-            <a:off x="228600" y="64008"/>
-            <a:ext cx="8686800" cy="457200"/>
-          </a:xfrm>
-          <a:prstGeom prst="rect">
-            <a:avLst/>
-          </a:prstGeom>
-          <a:noFill/>
-        </p:spPr>
-        <p:txBody>
-          <a:bodyPr wrap="square">
-            <a:spAutoFit/>
-          </a:bodyPr>
-          <a:lstStyle/>
-          <a:p>
-            <a:pPr algn="l"/>
-            <a:r>
-              <a:rPr sz="2000" b="1" i="0">
-                <a:solidFill>
-                  <a:srgbClr val="FFFFFF"/>
-                </a:solidFill>
-                <a:latin typeface="Cambria"/>
-              </a:rPr>
-              <a:t>SSLC Capital &amp; Debt: What's on the Books</a:t>
-            </a:r>
-          </a:p>
-        </p:txBody>
-      </p:sp>
-      <p:sp>
-        <p:nvSpPr>
-          <p:cNvPr id="4" name="Rectangle 3"/>
-          <p:cNvSpPr/>
-          <p:nvPr/>
-        </p:nvSpPr>
-        <p:spPr>
-          <a:xfrm>
-            <a:off x="109728" y="594360"/>
-            <a:ext cx="4160520" cy="2999232"/>
-          </a:xfrm>
-          <a:prstGeom prst="rect">
-            <a:avLst/>
-          </a:prstGeom>
-          <a:solidFill>
-            <a:srgbClr val="222222"/>
-          </a:solidFill>
-          <a:ln>
-            <a:noFill/>
-          </a:ln>
-        </p:spPr>
-        <p:style>
-          <a:lnRef idx="1">
-            <a:schemeClr val="accent1"/>
-          </a:lnRef>
-          <a:fillRef idx="3">
-            <a:schemeClr val="accent1"/>
-          </a:fillRef>
-          <a:effectRef idx="2">
-            <a:schemeClr val="accent1"/>
-          </a:effectRef>
-          <a:fontRef idx="minor">
-            <a:schemeClr val="lt1"/>
-          </a:fontRef>
-        </p:style>
-        <p:txBody>
-          <a:bodyPr rtlCol="0" anchor="ctr"/>
-          <a:lstStyle/>
-          <a:p>
-            <a:pPr algn="ctr"/>
-          </a:p>
-        </p:txBody>
-      </p:sp>
-      <p:sp>
-        <p:nvSpPr>
-          <p:cNvPr id="5" name="Rectangle 4"/>
-          <p:cNvSpPr/>
-          <p:nvPr/>
-        </p:nvSpPr>
-        <p:spPr>
-          <a:xfrm>
-            <a:off x="4407408" y="594360"/>
-            <a:ext cx="4617720" cy="2999232"/>
-          </a:xfrm>
-          <a:prstGeom prst="rect">
-            <a:avLst/>
-          </a:prstGeom>
-          <a:solidFill>
-            <a:srgbClr val="222222"/>
-          </a:solidFill>
-          <a:ln>
-            <a:noFill/>
-          </a:ln>
-        </p:spPr>
-        <p:style>
-          <a:lnRef idx="1">
-            <a:schemeClr val="accent1"/>
-          </a:lnRef>
-          <a:fillRef idx="3">
-            <a:schemeClr val="accent1"/>
-          </a:fillRef>
-          <a:effectRef idx="2">
-            <a:schemeClr val="accent1"/>
-          </a:effectRef>
-          <a:fontRef idx="minor">
-            <a:schemeClr val="lt1"/>
-          </a:fontRef>
-        </p:style>
-        <p:txBody>
-          <a:bodyPr rtlCol="0" anchor="ctr"/>
-          <a:lstStyle/>
-          <a:p>
-            <a:pPr algn="ctr"/>
-          </a:p>
-        </p:txBody>
-      </p:sp>
-      <p:sp>
-        <p:nvSpPr>
-          <p:cNvPr id="6" name="Rectangle 5"/>
-          <p:cNvSpPr/>
-          <p:nvPr/>
-        </p:nvSpPr>
-        <p:spPr>
-          <a:xfrm>
-            <a:off x="109728" y="594360"/>
-            <a:ext cx="4160520" cy="246888"/>
-          </a:xfrm>
-          <a:prstGeom prst="rect">
-            <a:avLst/>
-          </a:prstGeom>
-          <a:solidFill>
-            <a:srgbClr val="1A1A1A"/>
-          </a:solidFill>
-          <a:ln>
-            <a:noFill/>
-          </a:ln>
-        </p:spPr>
-        <p:style>
-          <a:lnRef idx="1">
-            <a:schemeClr val="accent1"/>
-          </a:lnRef>
-          <a:fillRef idx="3">
-            <a:schemeClr val="accent1"/>
-          </a:fillRef>
-          <a:effectRef idx="2">
-            <a:schemeClr val="accent1"/>
-          </a:effectRef>
-          <a:fontRef idx="minor">
-            <a:schemeClr val="lt1"/>
-          </a:fontRef>
-        </p:style>
-        <p:txBody>
-          <a:bodyPr rtlCol="0" anchor="ctr"/>
-          <a:lstStyle/>
-          <a:p>
-            <a:pPr algn="ctr"/>
-          </a:p>
-        </p:txBody>
-      </p:sp>
-      <p:sp>
-        <p:nvSpPr>
-          <p:cNvPr id="7" name="Rectangle 6"/>
-          <p:cNvSpPr/>
-          <p:nvPr/>
-        </p:nvSpPr>
-        <p:spPr>
-          <a:xfrm>
-            <a:off x="4407408" y="594360"/>
-            <a:ext cx="4617720" cy="246888"/>
-          </a:xfrm>
-          <a:prstGeom prst="rect">
-            <a:avLst/>
-          </a:prstGeom>
-          <a:solidFill>
-            <a:srgbClr val="1A1A1A"/>
-          </a:solidFill>
-          <a:ln>
-            <a:noFill/>
-          </a:ln>
-        </p:spPr>
-        <p:style>
-          <a:lnRef idx="1">
-            <a:schemeClr val="accent1"/>
-          </a:lnRef>
-          <a:fillRef idx="3">
-            <a:schemeClr val="accent1"/>
-          </a:fillRef>
-          <a:effectRef idx="2">
-            <a:schemeClr val="accent1"/>
-          </a:effectRef>
-          <a:fontRef idx="minor">
-            <a:schemeClr val="lt1"/>
-          </a:fontRef>
-        </p:style>
-        <p:txBody>
-          <a:bodyPr rtlCol="0" anchor="ctr"/>
-          <a:lstStyle/>
-          <a:p>
-            <a:pPr algn="ctr"/>
-          </a:p>
-        </p:txBody>
-      </p:sp>
-      <p:sp>
-        <p:nvSpPr>
-          <p:cNvPr id="8" name="Rectangle 7"/>
-          <p:cNvSpPr/>
-          <p:nvPr/>
-        </p:nvSpPr>
-        <p:spPr>
-          <a:xfrm>
-            <a:off x="109728" y="594360"/>
-            <a:ext cx="36576" cy="246888"/>
-          </a:xfrm>
-          <a:prstGeom prst="rect">
-            <a:avLst/>
-          </a:prstGeom>
-          <a:solidFill>
-            <a:srgbClr val="F26A21"/>
-          </a:solidFill>
-          <a:ln>
-            <a:noFill/>
-          </a:ln>
-        </p:spPr>
-        <p:style>
-          <a:lnRef idx="1">
-            <a:schemeClr val="accent1"/>
-          </a:lnRef>
-          <a:fillRef idx="3">
-            <a:schemeClr val="accent1"/>
-          </a:fillRef>
-          <a:effectRef idx="2">
-            <a:schemeClr val="accent1"/>
-          </a:effectRef>
-          <a:fontRef idx="minor">
-            <a:schemeClr val="lt1"/>
-          </a:fontRef>
-        </p:style>
-        <p:txBody>
-          <a:bodyPr rtlCol="0" anchor="ctr"/>
-          <a:lstStyle/>
-          <a:p>
-            <a:pPr algn="ctr"/>
-          </a:p>
-        </p:txBody>
-      </p:sp>
-      <p:sp>
-        <p:nvSpPr>
-          <p:cNvPr id="9" name="Rectangle 8"/>
-          <p:cNvSpPr/>
-          <p:nvPr/>
-        </p:nvSpPr>
-        <p:spPr>
-          <a:xfrm>
-            <a:off x="4407408" y="594360"/>
-            <a:ext cx="36576" cy="246888"/>
-          </a:xfrm>
-          <a:prstGeom prst="rect">
-            <a:avLst/>
-          </a:prstGeom>
-          <a:solidFill>
-            <a:srgbClr val="F26A21"/>
-          </a:solidFill>
-          <a:ln>
-            <a:noFill/>
-          </a:ln>
-        </p:spPr>
-        <p:style>
-          <a:lnRef idx="1">
-            <a:schemeClr val="accent1"/>
-          </a:lnRef>
-          <a:fillRef idx="3">
-            <a:schemeClr val="accent1"/>
-          </a:fillRef>
-          <a:effectRef idx="2">
-            <a:schemeClr val="accent1"/>
-          </a:effectRef>
-          <a:fontRef idx="minor">
-            <a:schemeClr val="lt1"/>
-          </a:fontRef>
-        </p:style>
-        <p:txBody>
-          <a:bodyPr rtlCol="0" anchor="ctr"/>
-          <a:lstStyle/>
-          <a:p>
-            <a:pPr algn="ctr"/>
-          </a:p>
-        </p:txBody>
-      </p:sp>
-      <p:sp>
-        <p:nvSpPr>
-          <p:cNvPr id="10" name="TextBox 9"/>
-          <p:cNvSpPr txBox="1"/>
-          <p:nvPr/>
-        </p:nvSpPr>
-        <p:spPr>
-          <a:xfrm>
-            <a:off x="201168" y="640080"/>
-            <a:ext cx="4023359" cy="182880"/>
-          </a:xfrm>
-          <a:prstGeom prst="rect">
-            <a:avLst/>
-          </a:prstGeom>
-          <a:noFill/>
-        </p:spPr>
-        <p:txBody>
-          <a:bodyPr wrap="square">
-            <a:spAutoFit/>
-          </a:bodyPr>
-          <a:lstStyle/>
-          <a:p>
-            <a:pPr algn="l"/>
-            <a:r>
-              <a:rPr sz="850" b="1" i="0">
-                <a:solidFill>
-                  <a:srgbClr val="F26A21"/>
-                </a:solidFill>
-                <a:latin typeface="Calibri"/>
-              </a:rPr>
-              <a:t>WHAT INVESTORS PAID IN</a:t>
-            </a:r>
-          </a:p>
-        </p:txBody>
-      </p:sp>
-      <p:sp>
-        <p:nvSpPr>
-          <p:cNvPr id="11" name="TextBox 10"/>
-          <p:cNvSpPr txBox="1"/>
-          <p:nvPr/>
-        </p:nvSpPr>
-        <p:spPr>
-          <a:xfrm>
-            <a:off x="4498848" y="640080"/>
-            <a:ext cx="4480559" cy="182880"/>
-          </a:xfrm>
-          <a:prstGeom prst="rect">
-            <a:avLst/>
-          </a:prstGeom>
-          <a:noFill/>
-        </p:spPr>
-        <p:txBody>
-          <a:bodyPr wrap="square">
-            <a:spAutoFit/>
-          </a:bodyPr>
-          <a:lstStyle/>
-          <a:p>
-            <a:pPr algn="l"/>
-            <a:r>
-              <a:rPr sz="850" b="1" i="0">
-                <a:solidFill>
-                  <a:srgbClr val="F26A21"/>
-                </a:solidFill>
-                <a:latin typeface="Calibri"/>
-              </a:rPr>
-              <a:t>WHAT SSLC OWES  (10/2/2026)</a:t>
-            </a:r>
-          </a:p>
-        </p:txBody>
-      </p:sp>
-      <p:sp>
-        <p:nvSpPr>
-          <p:cNvPr id="12" name="TextBox 11"/>
-          <p:cNvSpPr txBox="1"/>
-          <p:nvPr/>
-        </p:nvSpPr>
-        <p:spPr>
-          <a:xfrm>
-            <a:off x="219456" y="914400"/>
-            <a:ext cx="2514600" cy="205740"/>
-          </a:xfrm>
-          <a:prstGeom prst="rect">
-            <a:avLst/>
-          </a:prstGeom>
-          <a:noFill/>
-        </p:spPr>
-        <p:txBody>
-          <a:bodyPr wrap="square">
-            <a:spAutoFit/>
-          </a:bodyPr>
-          <a:lstStyle/>
-          <a:p>
-            <a:pPr algn="l"/>
-            <a:r>
-              <a:rPr sz="800" b="0" i="0">
-                <a:solidFill>
-                  <a:srgbClr val="CCCCCC"/>
-                </a:solidFill>
-                <a:latin typeface="Calibri"/>
-              </a:rPr>
-              <a:t>Common stock (Acct 3010)</a:t>
-            </a:r>
-          </a:p>
-        </p:txBody>
-      </p:sp>
-      <p:sp>
-        <p:nvSpPr>
-          <p:cNvPr id="13" name="TextBox 12"/>
-          <p:cNvSpPr txBox="1"/>
-          <p:nvPr/>
-        </p:nvSpPr>
-        <p:spPr>
-          <a:xfrm>
-            <a:off x="2642616" y="914400"/>
-            <a:ext cx="1481328" cy="205740"/>
-          </a:xfrm>
-          <a:prstGeom prst="rect">
-            <a:avLst/>
-          </a:prstGeom>
-          <a:noFill/>
-        </p:spPr>
-        <p:txBody>
-          <a:bodyPr wrap="square">
-            <a:spAutoFit/>
-          </a:bodyPr>
-          <a:lstStyle/>
-          <a:p>
-            <a:pPr algn="r"/>
-            <a:r>
-              <a:rPr sz="900" b="0" i="0">
-                <a:solidFill>
-                  <a:srgbClr val="CCCCCC"/>
-                </a:solidFill>
-                <a:latin typeface="Calibri"/>
-              </a:rPr>
-              <a:t>$1,010,423</a:t>
-            </a:r>
-          </a:p>
-        </p:txBody>
-      </p:sp>
-      <p:sp>
-        <p:nvSpPr>
-          <p:cNvPr id="14" name="TextBox 13"/>
-          <p:cNvSpPr txBox="1"/>
-          <p:nvPr/>
-        </p:nvSpPr>
-        <p:spPr>
-          <a:xfrm>
-            <a:off x="219456" y="1138428"/>
-            <a:ext cx="2514600" cy="205740"/>
-          </a:xfrm>
-          <a:prstGeom prst="rect">
-            <a:avLst/>
-          </a:prstGeom>
-          <a:noFill/>
-        </p:spPr>
-        <p:txBody>
-          <a:bodyPr wrap="square">
-            <a:spAutoFit/>
-          </a:bodyPr>
-          <a:lstStyle/>
-          <a:p>
-            <a:pPr algn="l"/>
-            <a:r>
-              <a:rPr sz="800" b="0" i="0">
-                <a:solidFill>
-                  <a:srgbClr val="CCCCCC"/>
-                </a:solidFill>
-                <a:latin typeface="Calibri"/>
-              </a:rPr>
-              <a:t>APIC (Acct 3020)</a:t>
-            </a:r>
-          </a:p>
-        </p:txBody>
-      </p:sp>
-      <p:sp>
-        <p:nvSpPr>
-          <p:cNvPr id="15" name="TextBox 14"/>
-          <p:cNvSpPr txBox="1"/>
-          <p:nvPr/>
-        </p:nvSpPr>
-        <p:spPr>
-          <a:xfrm>
-            <a:off x="2642616" y="1138428"/>
-            <a:ext cx="1481328" cy="205740"/>
-          </a:xfrm>
-          <a:prstGeom prst="rect">
-            <a:avLst/>
-          </a:prstGeom>
-          <a:noFill/>
-        </p:spPr>
-        <p:txBody>
-          <a:bodyPr wrap="square">
-            <a:spAutoFit/>
-          </a:bodyPr>
-          <a:lstStyle/>
-          <a:p>
-            <a:pPr algn="r"/>
-            <a:r>
-              <a:rPr sz="900" b="0" i="0">
-                <a:solidFill>
-                  <a:srgbClr val="CCCCCC"/>
-                </a:solidFill>
-                <a:latin typeface="Calibri"/>
-              </a:rPr>
-              <a:t>$4,042</a:t>
-            </a:r>
-          </a:p>
-        </p:txBody>
-      </p:sp>
-      <p:sp>
-        <p:nvSpPr>
-          <p:cNvPr id="16" name="Rectangle 15"/>
-          <p:cNvSpPr/>
-          <p:nvPr/>
-        </p:nvSpPr>
-        <p:spPr>
-          <a:xfrm>
-            <a:off x="219456" y="1435608"/>
-            <a:ext cx="3931920" cy="13716"/>
-          </a:xfrm>
-          <a:prstGeom prst="rect">
-            <a:avLst/>
-          </a:prstGeom>
-          <a:solidFill>
-            <a:srgbClr val="888888"/>
-          </a:solidFill>
-          <a:ln>
-            <a:noFill/>
-          </a:ln>
-        </p:spPr>
-        <p:style>
-          <a:lnRef idx="1">
-            <a:schemeClr val="accent1"/>
-          </a:lnRef>
-          <a:fillRef idx="3">
-            <a:schemeClr val="accent1"/>
-          </a:fillRef>
-          <a:effectRef idx="2">
-            <a:schemeClr val="accent1"/>
-          </a:effectRef>
-          <a:fontRef idx="minor">
-            <a:schemeClr val="lt1"/>
-          </a:fontRef>
-        </p:style>
-        <p:txBody>
-          <a:bodyPr rtlCol="0" anchor="ctr"/>
-          <a:lstStyle/>
-          <a:p>
-            <a:pPr algn="ctr"/>
-          </a:p>
-        </p:txBody>
-      </p:sp>
-      <p:sp>
-        <p:nvSpPr>
-          <p:cNvPr id="17" name="TextBox 16"/>
-          <p:cNvSpPr txBox="1"/>
-          <p:nvPr/>
-        </p:nvSpPr>
-        <p:spPr>
-          <a:xfrm>
-            <a:off x="219456" y="1586484"/>
-            <a:ext cx="2514600" cy="205740"/>
-          </a:xfrm>
-          <a:prstGeom prst="rect">
-            <a:avLst/>
-          </a:prstGeom>
-          <a:noFill/>
-        </p:spPr>
-        <p:txBody>
-          <a:bodyPr wrap="square">
-            <a:spAutoFit/>
-          </a:bodyPr>
-          <a:lstStyle/>
-          <a:p>
-            <a:pPr algn="l"/>
-            <a:r>
-              <a:rPr sz="800" b="0" i="0">
-                <a:solidFill>
-                  <a:srgbClr val="CCCCCC"/>
-                </a:solidFill>
-                <a:latin typeface="Calibri"/>
-              </a:rPr>
-              <a:t>Total paid-in capital</a:t>
-            </a:r>
-          </a:p>
-        </p:txBody>
-      </p:sp>
-      <p:sp>
-        <p:nvSpPr>
-          <p:cNvPr id="18" name="TextBox 17"/>
-          <p:cNvSpPr txBox="1"/>
-          <p:nvPr/>
-        </p:nvSpPr>
-        <p:spPr>
-          <a:xfrm>
-            <a:off x="2642616" y="1586484"/>
-            <a:ext cx="1481328" cy="205740"/>
-          </a:xfrm>
-          <a:prstGeom prst="rect">
-            <a:avLst/>
-          </a:prstGeom>
-          <a:noFill/>
-        </p:spPr>
-        <p:txBody>
-          <a:bodyPr wrap="square">
-            <a:spAutoFit/>
-          </a:bodyPr>
-          <a:lstStyle/>
-          <a:p>
-            <a:pPr algn="r"/>
-            <a:r>
-              <a:rPr sz="900" b="1" i="0">
-                <a:solidFill>
-                  <a:srgbClr val="FFFFFF"/>
-                </a:solidFill>
-                <a:latin typeface="Calibri"/>
-              </a:rPr>
-              <a:t>$1,014,465</a:t>
-            </a:r>
-          </a:p>
-        </p:txBody>
-      </p:sp>
-      <p:sp>
-        <p:nvSpPr>
-          <p:cNvPr id="19" name="TextBox 18"/>
-          <p:cNvSpPr txBox="1"/>
-          <p:nvPr/>
-        </p:nvSpPr>
-        <p:spPr>
-          <a:xfrm>
-            <a:off x="219456" y="1810512"/>
-            <a:ext cx="2514600" cy="205740"/>
-          </a:xfrm>
-          <a:prstGeom prst="rect">
-            <a:avLst/>
-          </a:prstGeom>
-          <a:noFill/>
-        </p:spPr>
-        <p:txBody>
-          <a:bodyPr wrap="square">
-            <a:spAutoFit/>
-          </a:bodyPr>
-          <a:lstStyle/>
-          <a:p>
-            <a:pPr algn="l"/>
-            <a:r>
-              <a:rPr sz="800" b="0" i="0">
-                <a:solidFill>
-                  <a:srgbClr val="CCCCCC"/>
-                </a:solidFill>
-                <a:latin typeface="Calibri"/>
-              </a:rPr>
-              <a:t>Exos: 18.06% → $789,572</a:t>
-            </a:r>
-          </a:p>
-        </p:txBody>
-      </p:sp>
-      <p:sp>
-        <p:nvSpPr>
-          <p:cNvPr id="20" name="TextBox 19"/>
-          <p:cNvSpPr txBox="1"/>
-          <p:nvPr/>
-        </p:nvSpPr>
-        <p:spPr>
-          <a:xfrm>
-            <a:off x="2642616" y="1810512"/>
-            <a:ext cx="1481328" cy="205740"/>
-          </a:xfrm>
-          <a:prstGeom prst="rect">
-            <a:avLst/>
-          </a:prstGeom>
-          <a:noFill/>
-        </p:spPr>
-        <p:txBody>
-          <a:bodyPr wrap="square">
-            <a:spAutoFit/>
-          </a:bodyPr>
-          <a:lstStyle/>
-          <a:p>
-            <a:pPr algn="r"/>
-            <a:r>
-              <a:rPr sz="900" b="1" i="0">
-                <a:solidFill>
-                  <a:srgbClr val="F26A21"/>
-                </a:solidFill>
-                <a:latin typeface="Calibri"/>
-              </a:rPr>
-              <a:t>~78% of above</a:t>
-            </a:r>
-          </a:p>
-        </p:txBody>
-      </p:sp>
-      <p:sp>
-        <p:nvSpPr>
-          <p:cNvPr id="21" name="Rectangle 20"/>
-          <p:cNvSpPr/>
-          <p:nvPr/>
-        </p:nvSpPr>
-        <p:spPr>
-          <a:xfrm>
-            <a:off x="219456" y="2107692"/>
-            <a:ext cx="3931920" cy="13716"/>
-          </a:xfrm>
-          <a:prstGeom prst="rect">
-            <a:avLst/>
-          </a:prstGeom>
-          <a:solidFill>
-            <a:srgbClr val="888888"/>
-          </a:solidFill>
-          <a:ln>
-            <a:noFill/>
-          </a:ln>
-        </p:spPr>
-        <p:style>
-          <a:lnRef idx="1">
-            <a:schemeClr val="accent1"/>
-          </a:lnRef>
-          <a:fillRef idx="3">
-            <a:schemeClr val="accent1"/>
-          </a:fillRef>
-          <a:effectRef idx="2">
-            <a:schemeClr val="accent1"/>
-          </a:effectRef>
-          <a:fontRef idx="minor">
-            <a:schemeClr val="lt1"/>
-          </a:fontRef>
-        </p:style>
-        <p:txBody>
-          <a:bodyPr rtlCol="0" anchor="ctr"/>
-          <a:lstStyle/>
-          <a:p>
-            <a:pPr algn="ctr"/>
-          </a:p>
-        </p:txBody>
-      </p:sp>
-      <p:sp>
-        <p:nvSpPr>
-          <p:cNvPr id="22" name="TextBox 21"/>
-          <p:cNvSpPr txBox="1"/>
-          <p:nvPr/>
-        </p:nvSpPr>
-        <p:spPr>
-          <a:xfrm>
-            <a:off x="219456" y="2258568"/>
-            <a:ext cx="2514600" cy="205740"/>
-          </a:xfrm>
-          <a:prstGeom prst="rect">
-            <a:avLst/>
-          </a:prstGeom>
-          <a:noFill/>
-        </p:spPr>
-        <p:txBody>
-          <a:bodyPr wrap="square">
-            <a:spAutoFit/>
-          </a:bodyPr>
-          <a:lstStyle/>
-          <a:p>
-            <a:pPr algn="l"/>
-            <a:r>
-              <a:rPr sz="800" b="0" i="0">
-                <a:solidFill>
-                  <a:srgbClr val="CCCCCC"/>
-                </a:solidFill>
-                <a:latin typeface="Calibri"/>
-              </a:rPr>
-              <a:t>Accum. deficit (thru FY26)</a:t>
-            </a:r>
-          </a:p>
-        </p:txBody>
-      </p:sp>
-      <p:sp>
-        <p:nvSpPr>
-          <p:cNvPr id="23" name="TextBox 22"/>
-          <p:cNvSpPr txBox="1"/>
-          <p:nvPr/>
-        </p:nvSpPr>
-        <p:spPr>
-          <a:xfrm>
-            <a:off x="2642616" y="2258568"/>
-            <a:ext cx="1481328" cy="205740"/>
-          </a:xfrm>
-          <a:prstGeom prst="rect">
-            <a:avLst/>
-          </a:prstGeom>
-          <a:noFill/>
-        </p:spPr>
-        <p:txBody>
-          <a:bodyPr wrap="square">
-            <a:spAutoFit/>
-          </a:bodyPr>
-          <a:lstStyle/>
-          <a:p>
-            <a:pPr algn="r"/>
-            <a:r>
-              <a:rPr sz="900" b="1" i="0">
-                <a:solidFill>
-                  <a:srgbClr val="FF6666"/>
-                </a:solidFill>
-                <a:latin typeface="Calibri"/>
-              </a:rPr>
-              <a:t>−$2,571,013</a:t>
-            </a:r>
-          </a:p>
-        </p:txBody>
-      </p:sp>
-      <p:sp>
-        <p:nvSpPr>
-          <p:cNvPr id="24" name="TextBox 23"/>
-          <p:cNvSpPr txBox="1"/>
-          <p:nvPr/>
-        </p:nvSpPr>
-        <p:spPr>
-          <a:xfrm>
-            <a:off x="219456" y="2482596"/>
-            <a:ext cx="2514600" cy="205740"/>
-          </a:xfrm>
-          <a:prstGeom prst="rect">
-            <a:avLst/>
-          </a:prstGeom>
-          <a:noFill/>
-        </p:spPr>
-        <p:txBody>
-          <a:bodyPr wrap="square">
-            <a:spAutoFit/>
-          </a:bodyPr>
-          <a:lstStyle/>
-          <a:p>
-            <a:pPr algn="l"/>
-            <a:r>
-              <a:rPr sz="800" b="0" i="0">
-                <a:solidFill>
-                  <a:srgbClr val="CCCCCC"/>
-                </a:solidFill>
-                <a:latin typeface="Calibri"/>
-              </a:rPr>
-              <a:t>Total equity (10/2/2026)</a:t>
-            </a:r>
-          </a:p>
-        </p:txBody>
-      </p:sp>
-      <p:sp>
-        <p:nvSpPr>
-          <p:cNvPr id="25" name="TextBox 24"/>
-          <p:cNvSpPr txBox="1"/>
-          <p:nvPr/>
-        </p:nvSpPr>
-        <p:spPr>
-          <a:xfrm>
-            <a:off x="2642616" y="2482596"/>
-            <a:ext cx="1481328" cy="205740"/>
-          </a:xfrm>
-          <a:prstGeom prst="rect">
-            <a:avLst/>
-          </a:prstGeom>
-          <a:noFill/>
-        </p:spPr>
-        <p:txBody>
-          <a:bodyPr wrap="square">
-            <a:spAutoFit/>
-          </a:bodyPr>
-          <a:lstStyle/>
-          <a:p>
-            <a:pPr algn="r"/>
-            <a:r>
-              <a:rPr sz="900" b="1" i="0">
-                <a:solidFill>
-                  <a:srgbClr val="FF6666"/>
-                </a:solidFill>
-                <a:latin typeface="Calibri"/>
-              </a:rPr>
-              <a:t>−$1,403,075</a:t>
-            </a:r>
-          </a:p>
-        </p:txBody>
-      </p:sp>
-      <p:sp>
-        <p:nvSpPr>
-          <p:cNvPr id="26" name="TextBox 25"/>
-          <p:cNvSpPr txBox="1"/>
-          <p:nvPr/>
-        </p:nvSpPr>
-        <p:spPr>
-          <a:xfrm>
-            <a:off x="4517136" y="914400"/>
-            <a:ext cx="2926080" cy="205740"/>
-          </a:xfrm>
-          <a:prstGeom prst="rect">
-            <a:avLst/>
-          </a:prstGeom>
-          <a:noFill/>
-        </p:spPr>
-        <p:txBody>
-          <a:bodyPr wrap="square">
-            <a:spAutoFit/>
-          </a:bodyPr>
-          <a:lstStyle/>
-          <a:p>
-            <a:pPr algn="l"/>
-            <a:r>
-              <a:rPr sz="800" b="0" i="0">
-                <a:solidFill>
-                  <a:srgbClr val="CCCCCC"/>
-                </a:solidFill>
-                <a:latin typeface="Calibri"/>
-              </a:rPr>
-              <a:t>Loans &amp; notes (total)</a:t>
-            </a:r>
-          </a:p>
-        </p:txBody>
-      </p:sp>
-      <p:sp>
-        <p:nvSpPr>
-          <p:cNvPr id="27" name="TextBox 26"/>
-          <p:cNvSpPr txBox="1"/>
-          <p:nvPr/>
-        </p:nvSpPr>
-        <p:spPr>
-          <a:xfrm>
-            <a:off x="7351775" y="914400"/>
-            <a:ext cx="1527047" cy="205740"/>
-          </a:xfrm>
-          <a:prstGeom prst="rect">
-            <a:avLst/>
-          </a:prstGeom>
-          <a:noFill/>
-        </p:spPr>
-        <p:txBody>
-          <a:bodyPr wrap="square">
-            <a:spAutoFit/>
-          </a:bodyPr>
-          <a:lstStyle/>
-          <a:p>
-            <a:pPr algn="r"/>
-            <a:r>
-              <a:rPr sz="1000" b="1" i="0">
-                <a:solidFill>
-                  <a:srgbClr val="FFFFFF"/>
-                </a:solidFill>
-                <a:latin typeface="Calibri"/>
-              </a:rPr>
-              <a:t>$1,027,783</a:t>
-            </a:r>
-          </a:p>
-        </p:txBody>
-      </p:sp>
-      <p:sp>
-        <p:nvSpPr>
-          <p:cNvPr id="28" name="Rectangle 27"/>
-          <p:cNvSpPr/>
-          <p:nvPr/>
-        </p:nvSpPr>
-        <p:spPr>
-          <a:xfrm>
-            <a:off x="4517136" y="1211580"/>
-            <a:ext cx="4389120" cy="13716"/>
-          </a:xfrm>
-          <a:prstGeom prst="rect">
-            <a:avLst/>
-          </a:prstGeom>
-          <a:solidFill>
-            <a:srgbClr val="888888"/>
-          </a:solidFill>
-          <a:ln>
-            <a:noFill/>
-          </a:ln>
-        </p:spPr>
-        <p:style>
-          <a:lnRef idx="1">
-            <a:schemeClr val="accent1"/>
-          </a:lnRef>
-          <a:fillRef idx="3">
-            <a:schemeClr val="accent1"/>
-          </a:fillRef>
-          <a:effectRef idx="2">
-            <a:schemeClr val="accent1"/>
-          </a:effectRef>
-          <a:fontRef idx="minor">
-            <a:schemeClr val="lt1"/>
-          </a:fontRef>
-        </p:style>
-        <p:txBody>
-          <a:bodyPr rtlCol="0" anchor="ctr"/>
-          <a:lstStyle/>
-          <a:p>
-            <a:pPr algn="ctr"/>
-          </a:p>
-        </p:txBody>
-      </p:sp>
-      <p:sp>
-        <p:nvSpPr>
-          <p:cNvPr id="29" name="TextBox 28"/>
-          <p:cNvSpPr txBox="1"/>
-          <p:nvPr/>
-        </p:nvSpPr>
-        <p:spPr>
-          <a:xfrm>
-            <a:off x="4517136" y="1362456"/>
-            <a:ext cx="2926080" cy="205740"/>
-          </a:xfrm>
-          <a:prstGeom prst="rect">
-            <a:avLst/>
-          </a:prstGeom>
-          <a:noFill/>
-        </p:spPr>
-        <p:txBody>
-          <a:bodyPr wrap="square">
-            <a:spAutoFit/>
-          </a:bodyPr>
-          <a:lstStyle/>
-          <a:p>
-            <a:pPr algn="l"/>
-            <a:r>
-              <a:rPr sz="800" b="0" i="0">
-                <a:solidFill>
-                  <a:srgbClr val="CCCCCC"/>
-                </a:solidFill>
-                <a:latin typeface="Calibri"/>
-              </a:rPr>
-              <a:t>Due to Microcosm (Acct 2385)</a:t>
-            </a:r>
-          </a:p>
-        </p:txBody>
-      </p:sp>
-      <p:sp>
-        <p:nvSpPr>
-          <p:cNvPr id="30" name="TextBox 29"/>
-          <p:cNvSpPr txBox="1"/>
-          <p:nvPr/>
-        </p:nvSpPr>
-        <p:spPr>
-          <a:xfrm>
-            <a:off x="7351775" y="1362456"/>
-            <a:ext cx="1527047" cy="205740"/>
-          </a:xfrm>
-          <a:prstGeom prst="rect">
-            <a:avLst/>
-          </a:prstGeom>
-          <a:noFill/>
-        </p:spPr>
-        <p:txBody>
-          <a:bodyPr wrap="square">
-            <a:spAutoFit/>
-          </a:bodyPr>
-          <a:lstStyle/>
-          <a:p>
-            <a:pPr algn="r"/>
-            <a:r>
-              <a:rPr sz="900" b="1" i="0">
-                <a:solidFill>
-                  <a:srgbClr val="FF6666"/>
-                </a:solidFill>
-                <a:latin typeface="Calibri"/>
-              </a:rPr>
-              <a:t>$451,429</a:t>
-            </a:r>
-          </a:p>
-        </p:txBody>
-      </p:sp>
-      <p:sp>
-        <p:nvSpPr>
-          <p:cNvPr id="31" name="TextBox 30"/>
-          <p:cNvSpPr txBox="1"/>
-          <p:nvPr/>
-        </p:nvSpPr>
-        <p:spPr>
-          <a:xfrm>
-            <a:off x="4517136" y="1586484"/>
-            <a:ext cx="2926080" cy="205740"/>
-          </a:xfrm>
-          <a:prstGeom prst="rect">
-            <a:avLst/>
-          </a:prstGeom>
-          <a:noFill/>
-        </p:spPr>
-        <p:txBody>
-          <a:bodyPr wrap="square">
-            <a:spAutoFit/>
-          </a:bodyPr>
-          <a:lstStyle/>
-          <a:p>
-            <a:pPr algn="l"/>
-            <a:r>
-              <a:rPr sz="800" b="0" i="0">
-                <a:solidFill>
-                  <a:srgbClr val="CCCCCC"/>
-                </a:solidFill>
-                <a:latin typeface="Calibri"/>
-              </a:rPr>
-              <a:t>Notes Payable – Bookstore</a:t>
-            </a:r>
-          </a:p>
-        </p:txBody>
-      </p:sp>
-      <p:sp>
-        <p:nvSpPr>
-          <p:cNvPr id="32" name="TextBox 31"/>
-          <p:cNvSpPr txBox="1"/>
-          <p:nvPr/>
-        </p:nvSpPr>
-        <p:spPr>
-          <a:xfrm>
-            <a:off x="7351775" y="1586484"/>
-            <a:ext cx="1527047" cy="205740"/>
-          </a:xfrm>
-          <a:prstGeom prst="rect">
-            <a:avLst/>
-          </a:prstGeom>
-          <a:noFill/>
-        </p:spPr>
-        <p:txBody>
-          <a:bodyPr wrap="square">
-            <a:spAutoFit/>
-          </a:bodyPr>
-          <a:lstStyle/>
-          <a:p>
-            <a:pPr algn="r"/>
-            <a:r>
-              <a:rPr sz="900" b="1" i="0">
-                <a:solidFill>
-                  <a:srgbClr val="FF6666"/>
-                </a:solidFill>
-                <a:latin typeface="Calibri"/>
-              </a:rPr>
-              <a:t>$320,582</a:t>
-            </a:r>
-          </a:p>
-        </p:txBody>
-      </p:sp>
-      <p:sp>
-        <p:nvSpPr>
-          <p:cNvPr id="33" name="TextBox 32"/>
-          <p:cNvSpPr txBox="1"/>
-          <p:nvPr/>
-        </p:nvSpPr>
-        <p:spPr>
-          <a:xfrm>
-            <a:off x="4517136" y="1810512"/>
-            <a:ext cx="2926080" cy="205740"/>
-          </a:xfrm>
-          <a:prstGeom prst="rect">
-            <a:avLst/>
-          </a:prstGeom>
-          <a:noFill/>
-        </p:spPr>
-        <p:txBody>
-          <a:bodyPr wrap="square">
-            <a:spAutoFit/>
-          </a:bodyPr>
-          <a:lstStyle/>
-          <a:p>
-            <a:pPr algn="l"/>
-            <a:r>
-              <a:rPr sz="800" b="0" i="0">
-                <a:solidFill>
-                  <a:srgbClr val="CCCCCC"/>
-                </a:solidFill>
-                <a:latin typeface="Calibri"/>
-              </a:rPr>
-              <a:t>SBA EIDL (Acct 2712)</a:t>
-            </a:r>
-          </a:p>
-        </p:txBody>
-      </p:sp>
-      <p:sp>
-        <p:nvSpPr>
-          <p:cNvPr id="34" name="TextBox 33"/>
-          <p:cNvSpPr txBox="1"/>
-          <p:nvPr/>
-        </p:nvSpPr>
-        <p:spPr>
-          <a:xfrm>
-            <a:off x="7351775" y="1810512"/>
-            <a:ext cx="1527047" cy="205740"/>
-          </a:xfrm>
-          <a:prstGeom prst="rect">
-            <a:avLst/>
-          </a:prstGeom>
-          <a:noFill/>
-        </p:spPr>
-        <p:txBody>
-          <a:bodyPr wrap="square">
-            <a:spAutoFit/>
-          </a:bodyPr>
-          <a:lstStyle/>
-          <a:p>
-            <a:pPr algn="r"/>
-            <a:r>
-              <a:rPr sz="900" b="1" i="0">
-                <a:solidFill>
-                  <a:srgbClr val="FF6666"/>
-                </a:solidFill>
-                <a:latin typeface="Calibri"/>
-              </a:rPr>
-              <a:t>$132,072</a:t>
-            </a:r>
-          </a:p>
-        </p:txBody>
-      </p:sp>
-      <p:sp>
-        <p:nvSpPr>
-          <p:cNvPr id="35" name="TextBox 34"/>
-          <p:cNvSpPr txBox="1"/>
-          <p:nvPr/>
-        </p:nvSpPr>
-        <p:spPr>
-          <a:xfrm>
-            <a:off x="4517136" y="2034540"/>
-            <a:ext cx="2926080" cy="205740"/>
-          </a:xfrm>
-          <a:prstGeom prst="rect">
-            <a:avLst/>
-          </a:prstGeom>
-          <a:noFill/>
-        </p:spPr>
-        <p:txBody>
-          <a:bodyPr wrap="square">
-            <a:spAutoFit/>
-          </a:bodyPr>
-          <a:lstStyle/>
-          <a:p>
-            <a:pPr algn="l"/>
-            <a:r>
-              <a:rPr sz="800" b="0" i="0">
-                <a:solidFill>
-                  <a:srgbClr val="CCCCCC"/>
-                </a:solidFill>
-                <a:latin typeface="Calibri"/>
-              </a:rPr>
-              <a:t>Wertz loan (Acct 2714)</a:t>
-            </a:r>
-          </a:p>
-        </p:txBody>
-      </p:sp>
-      <p:sp>
-        <p:nvSpPr>
-          <p:cNvPr id="36" name="TextBox 35"/>
-          <p:cNvSpPr txBox="1"/>
-          <p:nvPr/>
-        </p:nvSpPr>
-        <p:spPr>
-          <a:xfrm>
-            <a:off x="7351775" y="2034540"/>
-            <a:ext cx="1527047" cy="205740"/>
-          </a:xfrm>
-          <a:prstGeom prst="rect">
-            <a:avLst/>
-          </a:prstGeom>
-          <a:noFill/>
-        </p:spPr>
-        <p:txBody>
-          <a:bodyPr wrap="square">
-            <a:spAutoFit/>
-          </a:bodyPr>
-          <a:lstStyle/>
-          <a:p>
-            <a:pPr algn="r"/>
-            <a:r>
-              <a:rPr sz="900" b="1" i="0">
-                <a:solidFill>
-                  <a:srgbClr val="FF6666"/>
-                </a:solidFill>
-                <a:latin typeface="Calibri"/>
-              </a:rPr>
-              <a:t>$92,500</a:t>
-            </a:r>
-          </a:p>
-        </p:txBody>
-      </p:sp>
-      <p:sp>
-        <p:nvSpPr>
-          <p:cNvPr id="37" name="TextBox 36"/>
-          <p:cNvSpPr txBox="1"/>
-          <p:nvPr/>
-        </p:nvSpPr>
-        <p:spPr>
-          <a:xfrm>
-            <a:off x="4517136" y="2258568"/>
-            <a:ext cx="2926080" cy="205740"/>
-          </a:xfrm>
-          <a:prstGeom prst="rect">
-            <a:avLst/>
-          </a:prstGeom>
-          <a:noFill/>
-        </p:spPr>
-        <p:txBody>
-          <a:bodyPr wrap="square">
-            <a:spAutoFit/>
-          </a:bodyPr>
-          <a:lstStyle/>
-          <a:p>
-            <a:pPr algn="l"/>
-            <a:r>
-              <a:rPr sz="800" b="0" i="0">
-                <a:solidFill>
-                  <a:srgbClr val="CCCCCC"/>
-                </a:solidFill>
-                <a:latin typeface="Calibri"/>
-              </a:rPr>
-              <a:t>Exos loan (11%, Acct 2720)</a:t>
-            </a:r>
-          </a:p>
-        </p:txBody>
-      </p:sp>
-      <p:sp>
-        <p:nvSpPr>
-          <p:cNvPr id="38" name="TextBox 37"/>
-          <p:cNvSpPr txBox="1"/>
-          <p:nvPr/>
-        </p:nvSpPr>
-        <p:spPr>
-          <a:xfrm>
-            <a:off x="7351775" y="2258568"/>
-            <a:ext cx="1527047" cy="205740"/>
-          </a:xfrm>
-          <a:prstGeom prst="rect">
-            <a:avLst/>
-          </a:prstGeom>
-          <a:noFill/>
-        </p:spPr>
-        <p:txBody>
-          <a:bodyPr wrap="square">
-            <a:spAutoFit/>
-          </a:bodyPr>
-          <a:lstStyle/>
-          <a:p>
-            <a:pPr algn="r"/>
-            <a:r>
-              <a:rPr sz="900" b="1" i="0">
-                <a:solidFill>
-                  <a:srgbClr val="F26A21"/>
-                </a:solidFill>
-                <a:latin typeface="Calibri"/>
-              </a:rPr>
-              <a:t>$31,200</a:t>
-            </a:r>
-          </a:p>
-        </p:txBody>
-      </p:sp>
-      <p:sp>
-        <p:nvSpPr>
-          <p:cNvPr id="39" name="Rectangle 38"/>
-          <p:cNvSpPr/>
-          <p:nvPr/>
-        </p:nvSpPr>
-        <p:spPr>
-          <a:xfrm>
-            <a:off x="4517136" y="2555748"/>
-            <a:ext cx="4389120" cy="13716"/>
-          </a:xfrm>
-          <a:prstGeom prst="rect">
-            <a:avLst/>
-          </a:prstGeom>
-          <a:solidFill>
-            <a:srgbClr val="888888"/>
-          </a:solidFill>
-          <a:ln>
-            <a:noFill/>
-          </a:ln>
-        </p:spPr>
-        <p:style>
-          <a:lnRef idx="1">
-            <a:schemeClr val="accent1"/>
-          </a:lnRef>
-          <a:fillRef idx="3">
-            <a:schemeClr val="accent1"/>
-          </a:fillRef>
-          <a:effectRef idx="2">
-            <a:schemeClr val="accent1"/>
-          </a:effectRef>
-          <a:fontRef idx="minor">
-            <a:schemeClr val="lt1"/>
-          </a:fontRef>
-        </p:style>
-        <p:txBody>
-          <a:bodyPr rtlCol="0" anchor="ctr"/>
-          <a:lstStyle/>
-          <a:p>
-            <a:pPr algn="ctr"/>
-          </a:p>
-        </p:txBody>
-      </p:sp>
-      <p:sp>
-        <p:nvSpPr>
-          <p:cNvPr id="40" name="TextBox 39"/>
-          <p:cNvSpPr txBox="1"/>
-          <p:nvPr/>
-        </p:nvSpPr>
-        <p:spPr>
-          <a:xfrm>
-            <a:off x="4517136" y="2482596"/>
-            <a:ext cx="2926080" cy="205740"/>
-          </a:xfrm>
-          <a:prstGeom prst="rect">
-            <a:avLst/>
-          </a:prstGeom>
-          <a:noFill/>
-        </p:spPr>
-        <p:txBody>
-          <a:bodyPr wrap="square">
-            <a:spAutoFit/>
-          </a:bodyPr>
-          <a:lstStyle/>
-          <a:p>
-            <a:pPr algn="l"/>
-            <a:r>
-              <a:rPr sz="800" b="0" i="0">
-                <a:solidFill>
-                  <a:srgbClr val="CCCCCC"/>
-                </a:solidFill>
-                <a:latin typeface="Calibri"/>
-              </a:rPr>
-              <a:t>Total liabilities (10/2)</a:t>
-            </a:r>
-          </a:p>
-        </p:txBody>
-      </p:sp>
-      <p:sp>
-        <p:nvSpPr>
-          <p:cNvPr id="41" name="TextBox 40"/>
-          <p:cNvSpPr txBox="1"/>
-          <p:nvPr/>
-        </p:nvSpPr>
-        <p:spPr>
-          <a:xfrm>
-            <a:off x="7351775" y="2482596"/>
-            <a:ext cx="1527047" cy="205740"/>
-          </a:xfrm>
-          <a:prstGeom prst="rect">
-            <a:avLst/>
-          </a:prstGeom>
-          <a:noFill/>
-        </p:spPr>
-        <p:txBody>
-          <a:bodyPr wrap="square">
-            <a:spAutoFit/>
-          </a:bodyPr>
-          <a:lstStyle/>
-          <a:p>
-            <a:pPr algn="r"/>
-            <a:r>
-              <a:rPr sz="900" b="1" i="0">
-                <a:solidFill>
-                  <a:srgbClr val="FF6666"/>
-                </a:solidFill>
-                <a:latin typeface="Calibri"/>
-              </a:rPr>
-              <a:t>$1,275,622</a:t>
-            </a:r>
-          </a:p>
-        </p:txBody>
-      </p:sp>
-      <p:sp>
-        <p:nvSpPr>
-          <p:cNvPr id="42" name="Rectangle 41"/>
-          <p:cNvSpPr/>
-          <p:nvPr/>
-        </p:nvSpPr>
-        <p:spPr>
-          <a:xfrm>
-            <a:off x="109728" y="3643884"/>
-            <a:ext cx="8924544" cy="749808"/>
-          </a:xfrm>
-          <a:prstGeom prst="rect">
-            <a:avLst/>
-          </a:prstGeom>
-          <a:solidFill>
-            <a:srgbClr val="1E1400"/>
-          </a:solidFill>
-          <a:ln>
-            <a:noFill/>
-          </a:ln>
-        </p:spPr>
-        <p:style>
-          <a:lnRef idx="1">
-            <a:schemeClr val="accent1"/>
-          </a:lnRef>
-          <a:fillRef idx="3">
-            <a:schemeClr val="accent1"/>
-          </a:fillRef>
-          <a:effectRef idx="2">
-            <a:schemeClr val="accent1"/>
-          </a:effectRef>
-          <a:fontRef idx="minor">
-            <a:schemeClr val="lt1"/>
-          </a:fontRef>
-        </p:style>
-        <p:txBody>
-          <a:bodyPr rtlCol="0" anchor="ctr"/>
-          <a:lstStyle/>
-          <a:p>
-            <a:pPr algn="ctr"/>
-          </a:p>
-        </p:txBody>
-      </p:sp>
-      <p:sp>
-        <p:nvSpPr>
-          <p:cNvPr id="43" name="Rectangle 42"/>
-          <p:cNvSpPr/>
-          <p:nvPr/>
-        </p:nvSpPr>
-        <p:spPr>
-          <a:xfrm>
-            <a:off x="109728" y="3643884"/>
-            <a:ext cx="50292" cy="749808"/>
-          </a:xfrm>
-          <a:prstGeom prst="rect">
-            <a:avLst/>
-          </a:prstGeom>
-          <a:solidFill>
-            <a:srgbClr val="F26A21"/>
-          </a:solidFill>
-          <a:ln>
-            <a:noFill/>
-          </a:ln>
-        </p:spPr>
-        <p:style>
-          <a:lnRef idx="1">
-            <a:schemeClr val="accent1"/>
-          </a:lnRef>
-          <a:fillRef idx="3">
-            <a:schemeClr val="accent1"/>
-          </a:fillRef>
-          <a:effectRef idx="2">
-            <a:schemeClr val="accent1"/>
-          </a:effectRef>
-          <a:fontRef idx="minor">
-            <a:schemeClr val="lt1"/>
-          </a:fontRef>
-        </p:style>
-        <p:txBody>
-          <a:bodyPr rtlCol="0" anchor="ctr"/>
-          <a:lstStyle/>
-          <a:p>
-            <a:pPr algn="ctr"/>
-          </a:p>
-        </p:txBody>
-      </p:sp>
-      <p:sp>
-        <p:nvSpPr>
-          <p:cNvPr id="44" name="TextBox 43"/>
-          <p:cNvSpPr txBox="1"/>
-          <p:nvPr/>
-        </p:nvSpPr>
-        <p:spPr>
-          <a:xfrm>
-            <a:off x="219456" y="3680459"/>
-            <a:ext cx="8686800" cy="173736"/>
-          </a:xfrm>
-          <a:prstGeom prst="rect">
-            <a:avLst/>
-          </a:prstGeom>
-          <a:noFill/>
-        </p:spPr>
-        <p:txBody>
-          <a:bodyPr wrap="square">
-            <a:spAutoFit/>
-          </a:bodyPr>
-          <a:lstStyle/>
-          <a:p>
-            <a:pPr algn="l"/>
-            <a:r>
-              <a:rPr sz="800" b="1" i="0">
-                <a:solidFill>
-                  <a:srgbClr val="F26A21"/>
-                </a:solidFill>
-                <a:latin typeface="Calibri"/>
-              </a:rPr>
-              <a:t>UNBOOKED OFFSET  (illustrative — no written cost-sharing agreement on file)</a:t>
-            </a:r>
-          </a:p>
-        </p:txBody>
-      </p:sp>
-      <p:sp>
-        <p:nvSpPr>
-          <p:cNvPr id="45" name="TextBox 44"/>
-          <p:cNvSpPr txBox="1"/>
-          <p:nvPr/>
-        </p:nvSpPr>
-        <p:spPr>
-          <a:xfrm>
-            <a:off x="219456" y="3890772"/>
-            <a:ext cx="8686800" cy="457200"/>
-          </a:xfrm>
-          <a:prstGeom prst="rect">
-            <a:avLst/>
-          </a:prstGeom>
-          <a:noFill/>
-        </p:spPr>
-        <p:txBody>
-          <a:bodyPr wrap="square">
-            <a:spAutoFit/>
-          </a:bodyPr>
-          <a:lstStyle/>
-          <a:p>
-            <a:pPr algn="l"/>
-            <a:r>
-              <a:rPr sz="750" b="0" i="0">
-                <a:solidFill>
-                  <a:srgbClr val="CCCCCC"/>
-                </a:solidFill>
-                <a:latin typeface="Calibri"/>
-              </a:rPr>
-              <a:t>SSLC has paid ~100% of shared Torrance facility costs: ~$354K in FY26 (rent $294K + utilities $31K + other), ~$967K est. Jan 2024–Oct 2026.  At a 50% Microcosm share (illustrative) → ~$483K offsets $451K due to Microcosm = SSLC net creditor ~$32K.  "$864K 'billed-ahead' balance disputed; under review (full QuickBooks access requested)."</a:t>
-            </a:r>
-          </a:p>
-        </p:txBody>
-      </p:sp>
-      <p:sp>
-        <p:nvSpPr>
-          <p:cNvPr id="46" name="TextBox 45"/>
-          <p:cNvSpPr txBox="1"/>
-          <p:nvPr/>
-        </p:nvSpPr>
-        <p:spPr>
-          <a:xfrm>
-            <a:off x="228600" y="4416552"/>
-            <a:ext cx="8229600" cy="155448"/>
-          </a:xfrm>
-          <a:prstGeom prst="rect">
-            <a:avLst/>
-          </a:prstGeom>
-          <a:noFill/>
-        </p:spPr>
-        <p:txBody>
-          <a:bodyPr wrap="square">
-            <a:spAutoFit/>
-          </a:bodyPr>
-          <a:lstStyle/>
-          <a:p>
-            <a:pPr algn="l"/>
-            <a:r>
-              <a:rPr sz="700" b="0" i="1">
-                <a:solidFill>
-                  <a:srgbClr val="888888"/>
-                </a:solidFill>
-                <a:latin typeface="Calibri"/>
-              </a:rPr>
-              <a:t>per SSLC QuickBooks 8/21 and 10/2/2026; Microcosm offset illustrative</a:t>
-            </a:r>
-          </a:p>
-        </p:txBody>
-      </p:sp>
-      <p:sp>
-        <p:nvSpPr>
-          <p:cNvPr id="47" name="TextBox 46"/>
-          <p:cNvSpPr txBox="1"/>
-          <p:nvPr/>
-        </p:nvSpPr>
-        <p:spPr>
-          <a:xfrm>
-            <a:off x="1554480" y="4809744"/>
-            <a:ext cx="6035040" cy="201168"/>
-          </a:xfrm>
-          <a:prstGeom prst="rect">
-            <a:avLst/>
-          </a:prstGeom>
-          <a:noFill/>
-        </p:spPr>
-        <p:txBody>
-          <a:bodyPr wrap="square">
-            <a:spAutoFit/>
-          </a:bodyPr>
-          <a:lstStyle/>
-          <a:p>
-            <a:pPr algn="ctr"/>
-            <a:r>
-              <a:rPr sz="700" b="0" i="1">
-                <a:solidFill>
-                  <a:srgbClr val="888888"/>
-                </a:solidFill>
-                <a:latin typeface="Calibri"/>
-              </a:rPr>
-              <a:t>DRAFT — NEGOTIATING TERMS</a:t>
-            </a:r>
-          </a:p>
-        </p:txBody>
-      </p:sp>
-      <p:sp>
-        <p:nvSpPr>
-          <p:cNvPr id="48" name="TextBox 47"/>
-          <p:cNvSpPr txBox="1"/>
-          <p:nvPr/>
-        </p:nvSpPr>
-        <p:spPr>
-          <a:xfrm>
-            <a:off x="7772400" y="4809744"/>
-            <a:ext cx="1143000" cy="201168"/>
-          </a:xfrm>
-          <a:prstGeom prst="rect">
-            <a:avLst/>
-          </a:prstGeom>
-          <a:noFill/>
-        </p:spPr>
-        <p:txBody>
-          <a:bodyPr wrap="square">
-            <a:spAutoFit/>
-          </a:bodyPr>
-          <a:lstStyle/>
-          <a:p>
-            <a:pPr algn="r"/>
-            <a:r>
-              <a:rPr sz="700" b="0" i="1">
-                <a:solidFill>
-                  <a:srgbClr val="888888"/>
-                </a:solidFill>
-                <a:latin typeface="Calibri"/>
-              </a:rPr>
-              <a:t>CONFIDENTIAL</a:t>
-            </a:r>
           </a:p>
         </p:txBody>
       </p:sp>
@@ -4906,7 +5424,7 @@
                 <a:ea typeface="Cambria" pitchFamily="34" charset="-122"/>
                 <a:cs typeface="Cambria" pitchFamily="34" charset="-120"/>
               </a:rPr>
-              <a:t>The Board is asked to confirm §3 exclusivity under the May 2025 Asset Acquisition Agreement.</a:t>
+              <a:t>The Board is asked to vote on three motions today.</a:t>
             </a:r>
             <a:endParaRPr lang="en-US" sz="3400" dirty="0"/>
           </a:p>
@@ -4972,6 +5490,10 @@
             <a:prstDash val="solid"/>
           </a:ln>
         </p:spPr>
+        <p:txBody>
+          <a:bodyPr/>
+          <a:p/>
+        </p:txBody>
       </p:sp>
       <p:sp>
         <p:nvSpPr>
@@ -5003,7 +5525,7 @@
                   <a:srgbClr val="F26A21"/>
                 </a:solidFill>
               </a:rPr>
-              <a:t>Exclusivity period: </a:t>
+              <a:t>Motion 1: </a:t>
             </a:r>
             <a:pPr indent="0" marL="0">
               <a:buNone/>
@@ -5014,7 +5536,7 @@
                   <a:srgbClr val="CCCCCC"/>
                 </a:solidFill>
               </a:rPr>
-              <a:t>90 days from board confirmation; extension not unreasonably withheld (§3)
+              <a:t>§3 exclusivity — 90-day window begins on board approval (May 2025 AAA)
 </a:t>
             </a:r>
             <a:pPr indent="0" marL="0">
@@ -5026,7 +5548,7 @@
                   <a:srgbClr val="F26A21"/>
                 </a:solidFill>
               </a:rPr>
-              <a:t>Holdback: </a:t>
+              <a:t>Motion 2: </a:t>
             </a:r>
             <a:pPr indent="0" marL="0">
               <a:buNone/>
@@ -5037,7 +5559,7 @@
                   <a:srgbClr val="CCCCCC"/>
                 </a:solidFill>
               </a:rPr>
-              <a:t>5% escrow, released at 12-month anniversary (§7)
+              <a:t>Full read-only QB Online access for diligence (Cal. Corp. Code §1602 + AAA §4; under 7/27/2021 NDA)
 </a:t>
             </a:r>
             <a:pPr indent="0" marL="0">
@@ -5049,7 +5571,7 @@
                   <a:srgbClr val="F26A21"/>
                 </a:solidFill>
               </a:rPr>
-              <a:t>Agreement basis: </a:t>
+              <a:t>Motion 3: </a:t>
             </a:r>
             <a:pPr indent="0" marL="0">
               <a:buNone/>
@@ -5060,7 +5582,7 @@
                   <a:srgbClr val="CCCCCC"/>
                 </a:solidFill>
               </a:rPr>
-              <a:t>May 2025 Asset Acquisition Agreement — §3 exclusivity trigger</a:t>
+              <a:t>Consent to ERP/MRP &amp; inventory evaluation using QB data (confidential under NDA)</a:t>
             </a:r>
             <a:endParaRPr lang="en-US" sz="1400" dirty="0"/>
           </a:p>
@@ -5818,6 +6340,1781 @@
 </file>
 
 <file path=ppt/slides/slide4.xml><?xml version="1.0" encoding="utf-8"?>
+<p:sld xmlns:a="http://schemas.openxmlformats.org/drawingml/2006/main" xmlns:p="http://schemas.openxmlformats.org/presentationml/2006/main" xmlns:r="http://schemas.openxmlformats.org/officeDocument/2006/relationships">
+  <p:cSld>
+    <p:bg>
+      <p:bgPr>
+        <a:solidFill>
+          <a:srgbClr val="111111"/>
+        </a:solidFill>
+        <a:effectLst/>
+      </p:bgPr>
+    </p:bg>
+    <p:spTree>
+      <p:nvGrpSpPr>
+        <p:cNvPr id="1" name=""/>
+        <p:cNvGrpSpPr/>
+        <p:nvPr/>
+      </p:nvGrpSpPr>
+      <p:grpSpPr/>
+      <p:sp>
+        <p:nvSpPr>
+          <p:cNvPr id="2" name="Rectangle 1"/>
+          <p:cNvSpPr/>
+          <p:nvPr/>
+        </p:nvSpPr>
+        <p:spPr>
+          <a:xfrm>
+            <a:off x="0" y="0"/>
+            <a:ext cx="9144000" cy="50292"/>
+          </a:xfrm>
+          <a:prstGeom prst="rect">
+            <a:avLst/>
+          </a:prstGeom>
+          <a:solidFill>
+            <a:srgbClr val="F26A21"/>
+          </a:solidFill>
+          <a:ln>
+            <a:noFill/>
+          </a:ln>
+        </p:spPr>
+        <p:style>
+          <a:lnRef idx="1">
+            <a:schemeClr val="accent1"/>
+          </a:lnRef>
+          <a:fillRef idx="3">
+            <a:schemeClr val="accent1"/>
+          </a:fillRef>
+          <a:effectRef idx="2">
+            <a:schemeClr val="accent1"/>
+          </a:effectRef>
+          <a:fontRef idx="minor">
+            <a:schemeClr val="lt1"/>
+          </a:fontRef>
+        </p:style>
+        <p:txBody>
+          <a:bodyPr rtlCol="0" anchor="ctr"/>
+          <a:lstStyle/>
+          <a:p>
+            <a:pPr algn="ctr"/>
+          </a:p>
+        </p:txBody>
+      </p:sp>
+      <p:sp>
+        <p:nvSpPr>
+          <p:cNvPr id="3" name="TextBox 2"/>
+          <p:cNvSpPr txBox="1"/>
+          <p:nvPr/>
+        </p:nvSpPr>
+        <p:spPr>
+          <a:xfrm>
+            <a:off x="228600" y="64008"/>
+            <a:ext cx="8686800" cy="457200"/>
+          </a:xfrm>
+          <a:prstGeom prst="rect">
+            <a:avLst/>
+          </a:prstGeom>
+          <a:noFill/>
+        </p:spPr>
+        <p:txBody>
+          <a:bodyPr wrap="square">
+            <a:spAutoFit/>
+          </a:bodyPr>
+          <a:lstStyle/>
+          <a:p>
+            <a:pPr algn="l"/>
+            <a:r>
+              <a:rPr sz="2000" b="1" i="0">
+                <a:solidFill>
+                  <a:srgbClr val="FFFFFF"/>
+                </a:solidFill>
+                <a:latin typeface="Cambria"/>
+              </a:rPr>
+              <a:t>SSLC Capital &amp; Debt: What's on the Books</a:t>
+            </a:r>
+          </a:p>
+        </p:txBody>
+      </p:sp>
+      <p:sp>
+        <p:nvSpPr>
+          <p:cNvPr id="4" name="Rectangle 3"/>
+          <p:cNvSpPr/>
+          <p:nvPr/>
+        </p:nvSpPr>
+        <p:spPr>
+          <a:xfrm>
+            <a:off x="109728" y="594360"/>
+            <a:ext cx="4160520" cy="2999232"/>
+          </a:xfrm>
+          <a:prstGeom prst="rect">
+            <a:avLst/>
+          </a:prstGeom>
+          <a:solidFill>
+            <a:srgbClr val="222222"/>
+          </a:solidFill>
+          <a:ln>
+            <a:noFill/>
+          </a:ln>
+        </p:spPr>
+        <p:style>
+          <a:lnRef idx="1">
+            <a:schemeClr val="accent1"/>
+          </a:lnRef>
+          <a:fillRef idx="3">
+            <a:schemeClr val="accent1"/>
+          </a:fillRef>
+          <a:effectRef idx="2">
+            <a:schemeClr val="accent1"/>
+          </a:effectRef>
+          <a:fontRef idx="minor">
+            <a:schemeClr val="lt1"/>
+          </a:fontRef>
+        </p:style>
+        <p:txBody>
+          <a:bodyPr rtlCol="0" anchor="ctr"/>
+          <a:lstStyle/>
+          <a:p>
+            <a:pPr algn="ctr"/>
+          </a:p>
+        </p:txBody>
+      </p:sp>
+      <p:sp>
+        <p:nvSpPr>
+          <p:cNvPr id="5" name="Rectangle 4"/>
+          <p:cNvSpPr/>
+          <p:nvPr/>
+        </p:nvSpPr>
+        <p:spPr>
+          <a:xfrm>
+            <a:off x="4407408" y="594360"/>
+            <a:ext cx="4617720" cy="2999232"/>
+          </a:xfrm>
+          <a:prstGeom prst="rect">
+            <a:avLst/>
+          </a:prstGeom>
+          <a:solidFill>
+            <a:srgbClr val="222222"/>
+          </a:solidFill>
+          <a:ln>
+            <a:noFill/>
+          </a:ln>
+        </p:spPr>
+        <p:style>
+          <a:lnRef idx="1">
+            <a:schemeClr val="accent1"/>
+          </a:lnRef>
+          <a:fillRef idx="3">
+            <a:schemeClr val="accent1"/>
+          </a:fillRef>
+          <a:effectRef idx="2">
+            <a:schemeClr val="accent1"/>
+          </a:effectRef>
+          <a:fontRef idx="minor">
+            <a:schemeClr val="lt1"/>
+          </a:fontRef>
+        </p:style>
+        <p:txBody>
+          <a:bodyPr rtlCol="0" anchor="ctr"/>
+          <a:lstStyle/>
+          <a:p>
+            <a:pPr algn="ctr"/>
+          </a:p>
+        </p:txBody>
+      </p:sp>
+      <p:sp>
+        <p:nvSpPr>
+          <p:cNvPr id="6" name="Rectangle 5"/>
+          <p:cNvSpPr/>
+          <p:nvPr/>
+        </p:nvSpPr>
+        <p:spPr>
+          <a:xfrm>
+            <a:off x="109728" y="594360"/>
+            <a:ext cx="4160520" cy="246888"/>
+          </a:xfrm>
+          <a:prstGeom prst="rect">
+            <a:avLst/>
+          </a:prstGeom>
+          <a:solidFill>
+            <a:srgbClr val="1A1A1A"/>
+          </a:solidFill>
+          <a:ln>
+            <a:noFill/>
+          </a:ln>
+        </p:spPr>
+        <p:style>
+          <a:lnRef idx="1">
+            <a:schemeClr val="accent1"/>
+          </a:lnRef>
+          <a:fillRef idx="3">
+            <a:schemeClr val="accent1"/>
+          </a:fillRef>
+          <a:effectRef idx="2">
+            <a:schemeClr val="accent1"/>
+          </a:effectRef>
+          <a:fontRef idx="minor">
+            <a:schemeClr val="lt1"/>
+          </a:fontRef>
+        </p:style>
+        <p:txBody>
+          <a:bodyPr rtlCol="0" anchor="ctr"/>
+          <a:lstStyle/>
+          <a:p>
+            <a:pPr algn="ctr"/>
+          </a:p>
+        </p:txBody>
+      </p:sp>
+      <p:sp>
+        <p:nvSpPr>
+          <p:cNvPr id="7" name="Rectangle 6"/>
+          <p:cNvSpPr/>
+          <p:nvPr/>
+        </p:nvSpPr>
+        <p:spPr>
+          <a:xfrm>
+            <a:off x="4407408" y="594360"/>
+            <a:ext cx="4617720" cy="246888"/>
+          </a:xfrm>
+          <a:prstGeom prst="rect">
+            <a:avLst/>
+          </a:prstGeom>
+          <a:solidFill>
+            <a:srgbClr val="1A1A1A"/>
+          </a:solidFill>
+          <a:ln>
+            <a:noFill/>
+          </a:ln>
+        </p:spPr>
+        <p:style>
+          <a:lnRef idx="1">
+            <a:schemeClr val="accent1"/>
+          </a:lnRef>
+          <a:fillRef idx="3">
+            <a:schemeClr val="accent1"/>
+          </a:fillRef>
+          <a:effectRef idx="2">
+            <a:schemeClr val="accent1"/>
+          </a:effectRef>
+          <a:fontRef idx="minor">
+            <a:schemeClr val="lt1"/>
+          </a:fontRef>
+        </p:style>
+        <p:txBody>
+          <a:bodyPr rtlCol="0" anchor="ctr"/>
+          <a:lstStyle/>
+          <a:p>
+            <a:pPr algn="ctr"/>
+          </a:p>
+        </p:txBody>
+      </p:sp>
+      <p:sp>
+        <p:nvSpPr>
+          <p:cNvPr id="8" name="Rectangle 7"/>
+          <p:cNvSpPr/>
+          <p:nvPr/>
+        </p:nvSpPr>
+        <p:spPr>
+          <a:xfrm>
+            <a:off x="109728" y="594360"/>
+            <a:ext cx="36576" cy="246888"/>
+          </a:xfrm>
+          <a:prstGeom prst="rect">
+            <a:avLst/>
+          </a:prstGeom>
+          <a:solidFill>
+            <a:srgbClr val="F26A21"/>
+          </a:solidFill>
+          <a:ln>
+            <a:noFill/>
+          </a:ln>
+        </p:spPr>
+        <p:style>
+          <a:lnRef idx="1">
+            <a:schemeClr val="accent1"/>
+          </a:lnRef>
+          <a:fillRef idx="3">
+            <a:schemeClr val="accent1"/>
+          </a:fillRef>
+          <a:effectRef idx="2">
+            <a:schemeClr val="accent1"/>
+          </a:effectRef>
+          <a:fontRef idx="minor">
+            <a:schemeClr val="lt1"/>
+          </a:fontRef>
+        </p:style>
+        <p:txBody>
+          <a:bodyPr rtlCol="0" anchor="ctr"/>
+          <a:lstStyle/>
+          <a:p>
+            <a:pPr algn="ctr"/>
+          </a:p>
+        </p:txBody>
+      </p:sp>
+      <p:sp>
+        <p:nvSpPr>
+          <p:cNvPr id="9" name="Rectangle 8"/>
+          <p:cNvSpPr/>
+          <p:nvPr/>
+        </p:nvSpPr>
+        <p:spPr>
+          <a:xfrm>
+            <a:off x="4407408" y="594360"/>
+            <a:ext cx="36576" cy="246888"/>
+          </a:xfrm>
+          <a:prstGeom prst="rect">
+            <a:avLst/>
+          </a:prstGeom>
+          <a:solidFill>
+            <a:srgbClr val="F26A21"/>
+          </a:solidFill>
+          <a:ln>
+            <a:noFill/>
+          </a:ln>
+        </p:spPr>
+        <p:style>
+          <a:lnRef idx="1">
+            <a:schemeClr val="accent1"/>
+          </a:lnRef>
+          <a:fillRef idx="3">
+            <a:schemeClr val="accent1"/>
+          </a:fillRef>
+          <a:effectRef idx="2">
+            <a:schemeClr val="accent1"/>
+          </a:effectRef>
+          <a:fontRef idx="minor">
+            <a:schemeClr val="lt1"/>
+          </a:fontRef>
+        </p:style>
+        <p:txBody>
+          <a:bodyPr rtlCol="0" anchor="ctr"/>
+          <a:lstStyle/>
+          <a:p>
+            <a:pPr algn="ctr"/>
+          </a:p>
+        </p:txBody>
+      </p:sp>
+      <p:sp>
+        <p:nvSpPr>
+          <p:cNvPr id="10" name="TextBox 9"/>
+          <p:cNvSpPr txBox="1"/>
+          <p:nvPr/>
+        </p:nvSpPr>
+        <p:spPr>
+          <a:xfrm>
+            <a:off x="201168" y="640080"/>
+            <a:ext cx="4023359" cy="182880"/>
+          </a:xfrm>
+          <a:prstGeom prst="rect">
+            <a:avLst/>
+          </a:prstGeom>
+          <a:noFill/>
+        </p:spPr>
+        <p:txBody>
+          <a:bodyPr wrap="square">
+            <a:spAutoFit/>
+          </a:bodyPr>
+          <a:lstStyle/>
+          <a:p>
+            <a:pPr algn="l"/>
+            <a:r>
+              <a:rPr sz="850" b="1" i="0">
+                <a:solidFill>
+                  <a:srgbClr val="F26A21"/>
+                </a:solidFill>
+                <a:latin typeface="Calibri"/>
+              </a:rPr>
+              <a:t>WHAT INVESTORS PAID IN</a:t>
+            </a:r>
+          </a:p>
+        </p:txBody>
+      </p:sp>
+      <p:sp>
+        <p:nvSpPr>
+          <p:cNvPr id="11" name="TextBox 10"/>
+          <p:cNvSpPr txBox="1"/>
+          <p:nvPr/>
+        </p:nvSpPr>
+        <p:spPr>
+          <a:xfrm>
+            <a:off x="4498848" y="640080"/>
+            <a:ext cx="4480559" cy="182880"/>
+          </a:xfrm>
+          <a:prstGeom prst="rect">
+            <a:avLst/>
+          </a:prstGeom>
+          <a:noFill/>
+        </p:spPr>
+        <p:txBody>
+          <a:bodyPr wrap="square">
+            <a:spAutoFit/>
+          </a:bodyPr>
+          <a:lstStyle/>
+          <a:p>
+            <a:pPr algn="l"/>
+            <a:r>
+              <a:rPr sz="850" b="1" i="0">
+                <a:solidFill>
+                  <a:srgbClr val="F26A21"/>
+                </a:solidFill>
+                <a:latin typeface="Calibri"/>
+              </a:rPr>
+              <a:t>WHAT SSLC OWES  (10/2/2026)</a:t>
+            </a:r>
+          </a:p>
+        </p:txBody>
+      </p:sp>
+      <p:sp>
+        <p:nvSpPr>
+          <p:cNvPr id="12" name="TextBox 11"/>
+          <p:cNvSpPr txBox="1"/>
+          <p:nvPr/>
+        </p:nvSpPr>
+        <p:spPr>
+          <a:xfrm>
+            <a:off x="219456" y="914400"/>
+            <a:ext cx="2514600" cy="205740"/>
+          </a:xfrm>
+          <a:prstGeom prst="rect">
+            <a:avLst/>
+          </a:prstGeom>
+          <a:noFill/>
+        </p:spPr>
+        <p:txBody>
+          <a:bodyPr wrap="square">
+            <a:spAutoFit/>
+          </a:bodyPr>
+          <a:lstStyle/>
+          <a:p>
+            <a:pPr algn="l"/>
+            <a:r>
+              <a:rPr sz="800" b="0" i="0">
+                <a:solidFill>
+                  <a:srgbClr val="CCCCCC"/>
+                </a:solidFill>
+                <a:latin typeface="Calibri"/>
+              </a:rPr>
+              <a:t>Common stock (Acct 3010)</a:t>
+            </a:r>
+          </a:p>
+        </p:txBody>
+      </p:sp>
+      <p:sp>
+        <p:nvSpPr>
+          <p:cNvPr id="13" name="TextBox 12"/>
+          <p:cNvSpPr txBox="1"/>
+          <p:nvPr/>
+        </p:nvSpPr>
+        <p:spPr>
+          <a:xfrm>
+            <a:off x="2642616" y="914400"/>
+            <a:ext cx="1481328" cy="205740"/>
+          </a:xfrm>
+          <a:prstGeom prst="rect">
+            <a:avLst/>
+          </a:prstGeom>
+          <a:noFill/>
+        </p:spPr>
+        <p:txBody>
+          <a:bodyPr wrap="square">
+            <a:spAutoFit/>
+          </a:bodyPr>
+          <a:lstStyle/>
+          <a:p>
+            <a:pPr algn="r"/>
+            <a:r>
+              <a:rPr sz="900" b="0" i="0">
+                <a:solidFill>
+                  <a:srgbClr val="CCCCCC"/>
+                </a:solidFill>
+                <a:latin typeface="Calibri"/>
+              </a:rPr>
+              <a:t>$1,010,423</a:t>
+            </a:r>
+          </a:p>
+        </p:txBody>
+      </p:sp>
+      <p:sp>
+        <p:nvSpPr>
+          <p:cNvPr id="14" name="TextBox 13"/>
+          <p:cNvSpPr txBox="1"/>
+          <p:nvPr/>
+        </p:nvSpPr>
+        <p:spPr>
+          <a:xfrm>
+            <a:off x="219456" y="1138428"/>
+            <a:ext cx="2514600" cy="205740"/>
+          </a:xfrm>
+          <a:prstGeom prst="rect">
+            <a:avLst/>
+          </a:prstGeom>
+          <a:noFill/>
+        </p:spPr>
+        <p:txBody>
+          <a:bodyPr wrap="square">
+            <a:spAutoFit/>
+          </a:bodyPr>
+          <a:lstStyle/>
+          <a:p>
+            <a:pPr algn="l"/>
+            <a:r>
+              <a:rPr sz="800" b="0" i="0">
+                <a:solidFill>
+                  <a:srgbClr val="CCCCCC"/>
+                </a:solidFill>
+                <a:latin typeface="Calibri"/>
+              </a:rPr>
+              <a:t>APIC (Acct 3020)</a:t>
+            </a:r>
+          </a:p>
+        </p:txBody>
+      </p:sp>
+      <p:sp>
+        <p:nvSpPr>
+          <p:cNvPr id="15" name="TextBox 14"/>
+          <p:cNvSpPr txBox="1"/>
+          <p:nvPr/>
+        </p:nvSpPr>
+        <p:spPr>
+          <a:xfrm>
+            <a:off x="2642616" y="1138428"/>
+            <a:ext cx="1481328" cy="205740"/>
+          </a:xfrm>
+          <a:prstGeom prst="rect">
+            <a:avLst/>
+          </a:prstGeom>
+          <a:noFill/>
+        </p:spPr>
+        <p:txBody>
+          <a:bodyPr wrap="square">
+            <a:spAutoFit/>
+          </a:bodyPr>
+          <a:lstStyle/>
+          <a:p>
+            <a:pPr algn="r"/>
+            <a:r>
+              <a:rPr sz="900" b="0" i="0">
+                <a:solidFill>
+                  <a:srgbClr val="CCCCCC"/>
+                </a:solidFill>
+                <a:latin typeface="Calibri"/>
+              </a:rPr>
+              <a:t>$4,042</a:t>
+            </a:r>
+          </a:p>
+        </p:txBody>
+      </p:sp>
+      <p:sp>
+        <p:nvSpPr>
+          <p:cNvPr id="16" name="Rectangle 15"/>
+          <p:cNvSpPr/>
+          <p:nvPr/>
+        </p:nvSpPr>
+        <p:spPr>
+          <a:xfrm>
+            <a:off x="219456" y="1435608"/>
+            <a:ext cx="3931920" cy="13716"/>
+          </a:xfrm>
+          <a:prstGeom prst="rect">
+            <a:avLst/>
+          </a:prstGeom>
+          <a:solidFill>
+            <a:srgbClr val="888888"/>
+          </a:solidFill>
+          <a:ln>
+            <a:noFill/>
+          </a:ln>
+        </p:spPr>
+        <p:style>
+          <a:lnRef idx="1">
+            <a:schemeClr val="accent1"/>
+          </a:lnRef>
+          <a:fillRef idx="3">
+            <a:schemeClr val="accent1"/>
+          </a:fillRef>
+          <a:effectRef idx="2">
+            <a:schemeClr val="accent1"/>
+          </a:effectRef>
+          <a:fontRef idx="minor">
+            <a:schemeClr val="lt1"/>
+          </a:fontRef>
+        </p:style>
+        <p:txBody>
+          <a:bodyPr rtlCol="0" anchor="ctr"/>
+          <a:lstStyle/>
+          <a:p>
+            <a:pPr algn="ctr"/>
+          </a:p>
+        </p:txBody>
+      </p:sp>
+      <p:sp>
+        <p:nvSpPr>
+          <p:cNvPr id="17" name="TextBox 16"/>
+          <p:cNvSpPr txBox="1"/>
+          <p:nvPr/>
+        </p:nvSpPr>
+        <p:spPr>
+          <a:xfrm>
+            <a:off x="219456" y="1586484"/>
+            <a:ext cx="2514600" cy="205740"/>
+          </a:xfrm>
+          <a:prstGeom prst="rect">
+            <a:avLst/>
+          </a:prstGeom>
+          <a:noFill/>
+        </p:spPr>
+        <p:txBody>
+          <a:bodyPr wrap="square">
+            <a:spAutoFit/>
+          </a:bodyPr>
+          <a:lstStyle/>
+          <a:p>
+            <a:pPr algn="l"/>
+            <a:r>
+              <a:rPr sz="800" b="0" i="0">
+                <a:solidFill>
+                  <a:srgbClr val="CCCCCC"/>
+                </a:solidFill>
+                <a:latin typeface="Calibri"/>
+              </a:rPr>
+              <a:t>Total paid-in capital</a:t>
+            </a:r>
+          </a:p>
+        </p:txBody>
+      </p:sp>
+      <p:sp>
+        <p:nvSpPr>
+          <p:cNvPr id="18" name="TextBox 17"/>
+          <p:cNvSpPr txBox="1"/>
+          <p:nvPr/>
+        </p:nvSpPr>
+        <p:spPr>
+          <a:xfrm>
+            <a:off x="2642616" y="1586484"/>
+            <a:ext cx="1481328" cy="205740"/>
+          </a:xfrm>
+          <a:prstGeom prst="rect">
+            <a:avLst/>
+          </a:prstGeom>
+          <a:noFill/>
+        </p:spPr>
+        <p:txBody>
+          <a:bodyPr wrap="square">
+            <a:spAutoFit/>
+          </a:bodyPr>
+          <a:lstStyle/>
+          <a:p>
+            <a:pPr algn="r"/>
+            <a:r>
+              <a:rPr sz="900" b="1" i="0">
+                <a:solidFill>
+                  <a:srgbClr val="FFFFFF"/>
+                </a:solidFill>
+                <a:latin typeface="Calibri"/>
+              </a:rPr>
+              <a:t>$1,014,465</a:t>
+            </a:r>
+          </a:p>
+        </p:txBody>
+      </p:sp>
+      <p:sp>
+        <p:nvSpPr>
+          <p:cNvPr id="19" name="TextBox 18"/>
+          <p:cNvSpPr txBox="1"/>
+          <p:nvPr/>
+        </p:nvSpPr>
+        <p:spPr>
+          <a:xfrm>
+            <a:off x="219456" y="1810512"/>
+            <a:ext cx="2514600" cy="205740"/>
+          </a:xfrm>
+          <a:prstGeom prst="rect">
+            <a:avLst/>
+          </a:prstGeom>
+          <a:noFill/>
+        </p:spPr>
+        <p:txBody>
+          <a:bodyPr wrap="square">
+            <a:spAutoFit/>
+          </a:bodyPr>
+          <a:lstStyle/>
+          <a:p>
+            <a:pPr algn="l"/>
+            <a:r>
+              <a:rPr sz="800" b="0" i="0">
+                <a:solidFill>
+                  <a:srgbClr val="CCCCCC"/>
+                </a:solidFill>
+                <a:latin typeface="Calibri"/>
+              </a:rPr>
+              <a:t>Exos: 18.06% → $789,572</a:t>
+            </a:r>
+          </a:p>
+        </p:txBody>
+      </p:sp>
+      <p:sp>
+        <p:nvSpPr>
+          <p:cNvPr id="20" name="TextBox 19"/>
+          <p:cNvSpPr txBox="1"/>
+          <p:nvPr/>
+        </p:nvSpPr>
+        <p:spPr>
+          <a:xfrm>
+            <a:off x="2642616" y="1810512"/>
+            <a:ext cx="1481328" cy="205740"/>
+          </a:xfrm>
+          <a:prstGeom prst="rect">
+            <a:avLst/>
+          </a:prstGeom>
+          <a:noFill/>
+        </p:spPr>
+        <p:txBody>
+          <a:bodyPr wrap="square">
+            <a:spAutoFit/>
+          </a:bodyPr>
+          <a:lstStyle/>
+          <a:p>
+            <a:pPr algn="r"/>
+            <a:r>
+              <a:rPr sz="900" b="1" i="0">
+                <a:solidFill>
+                  <a:srgbClr val="F26A21"/>
+                </a:solidFill>
+                <a:latin typeface="Calibri"/>
+              </a:rPr>
+              <a:t>~78% of above</a:t>
+            </a:r>
+          </a:p>
+        </p:txBody>
+      </p:sp>
+      <p:sp>
+        <p:nvSpPr>
+          <p:cNvPr id="21" name="Rectangle 20"/>
+          <p:cNvSpPr/>
+          <p:nvPr/>
+        </p:nvSpPr>
+        <p:spPr>
+          <a:xfrm>
+            <a:off x="219456" y="2107692"/>
+            <a:ext cx="3931920" cy="13716"/>
+          </a:xfrm>
+          <a:prstGeom prst="rect">
+            <a:avLst/>
+          </a:prstGeom>
+          <a:solidFill>
+            <a:srgbClr val="888888"/>
+          </a:solidFill>
+          <a:ln>
+            <a:noFill/>
+          </a:ln>
+        </p:spPr>
+        <p:style>
+          <a:lnRef idx="1">
+            <a:schemeClr val="accent1"/>
+          </a:lnRef>
+          <a:fillRef idx="3">
+            <a:schemeClr val="accent1"/>
+          </a:fillRef>
+          <a:effectRef idx="2">
+            <a:schemeClr val="accent1"/>
+          </a:effectRef>
+          <a:fontRef idx="minor">
+            <a:schemeClr val="lt1"/>
+          </a:fontRef>
+        </p:style>
+        <p:txBody>
+          <a:bodyPr rtlCol="0" anchor="ctr"/>
+          <a:lstStyle/>
+          <a:p>
+            <a:pPr algn="ctr"/>
+          </a:p>
+        </p:txBody>
+      </p:sp>
+      <p:sp>
+        <p:nvSpPr>
+          <p:cNvPr id="22" name="TextBox 21"/>
+          <p:cNvSpPr txBox="1"/>
+          <p:nvPr/>
+        </p:nvSpPr>
+        <p:spPr>
+          <a:xfrm>
+            <a:off x="219456" y="2258568"/>
+            <a:ext cx="2514600" cy="205740"/>
+          </a:xfrm>
+          <a:prstGeom prst="rect">
+            <a:avLst/>
+          </a:prstGeom>
+          <a:noFill/>
+        </p:spPr>
+        <p:txBody>
+          <a:bodyPr wrap="square">
+            <a:spAutoFit/>
+          </a:bodyPr>
+          <a:lstStyle/>
+          <a:p>
+            <a:pPr algn="l"/>
+            <a:r>
+              <a:rPr sz="800" b="0" i="0">
+                <a:solidFill>
+                  <a:srgbClr val="CCCCCC"/>
+                </a:solidFill>
+                <a:latin typeface="Calibri"/>
+              </a:rPr>
+              <a:t>Accum. deficit (thru FY26)</a:t>
+            </a:r>
+          </a:p>
+        </p:txBody>
+      </p:sp>
+      <p:sp>
+        <p:nvSpPr>
+          <p:cNvPr id="23" name="TextBox 22"/>
+          <p:cNvSpPr txBox="1"/>
+          <p:nvPr/>
+        </p:nvSpPr>
+        <p:spPr>
+          <a:xfrm>
+            <a:off x="2642616" y="2258568"/>
+            <a:ext cx="1481328" cy="205740"/>
+          </a:xfrm>
+          <a:prstGeom prst="rect">
+            <a:avLst/>
+          </a:prstGeom>
+          <a:noFill/>
+        </p:spPr>
+        <p:txBody>
+          <a:bodyPr wrap="square">
+            <a:spAutoFit/>
+          </a:bodyPr>
+          <a:lstStyle/>
+          <a:p>
+            <a:pPr algn="r"/>
+            <a:r>
+              <a:rPr sz="900" b="1" i="0">
+                <a:solidFill>
+                  <a:srgbClr val="FF6666"/>
+                </a:solidFill>
+                <a:latin typeface="Calibri"/>
+              </a:rPr>
+              <a:t>−$2,571,013</a:t>
+            </a:r>
+          </a:p>
+        </p:txBody>
+      </p:sp>
+      <p:sp>
+        <p:nvSpPr>
+          <p:cNvPr id="24" name="TextBox 23"/>
+          <p:cNvSpPr txBox="1"/>
+          <p:nvPr/>
+        </p:nvSpPr>
+        <p:spPr>
+          <a:xfrm>
+            <a:off x="219456" y="2482596"/>
+            <a:ext cx="2514600" cy="205740"/>
+          </a:xfrm>
+          <a:prstGeom prst="rect">
+            <a:avLst/>
+          </a:prstGeom>
+          <a:noFill/>
+        </p:spPr>
+        <p:txBody>
+          <a:bodyPr wrap="square">
+            <a:spAutoFit/>
+          </a:bodyPr>
+          <a:lstStyle/>
+          <a:p>
+            <a:pPr algn="l"/>
+            <a:r>
+              <a:rPr sz="800" b="0" i="0">
+                <a:solidFill>
+                  <a:srgbClr val="CCCCCC"/>
+                </a:solidFill>
+                <a:latin typeface="Calibri"/>
+              </a:rPr>
+              <a:t>Total equity (10/2/2026)</a:t>
+            </a:r>
+          </a:p>
+        </p:txBody>
+      </p:sp>
+      <p:sp>
+        <p:nvSpPr>
+          <p:cNvPr id="25" name="TextBox 24"/>
+          <p:cNvSpPr txBox="1"/>
+          <p:nvPr/>
+        </p:nvSpPr>
+        <p:spPr>
+          <a:xfrm>
+            <a:off x="2642616" y="2482596"/>
+            <a:ext cx="1481328" cy="205740"/>
+          </a:xfrm>
+          <a:prstGeom prst="rect">
+            <a:avLst/>
+          </a:prstGeom>
+          <a:noFill/>
+        </p:spPr>
+        <p:txBody>
+          <a:bodyPr wrap="square">
+            <a:spAutoFit/>
+          </a:bodyPr>
+          <a:lstStyle/>
+          <a:p>
+            <a:pPr algn="r"/>
+            <a:r>
+              <a:rPr sz="900" b="1" i="0">
+                <a:solidFill>
+                  <a:srgbClr val="FF6666"/>
+                </a:solidFill>
+                <a:latin typeface="Calibri"/>
+              </a:rPr>
+              <a:t>−$1,403,075</a:t>
+            </a:r>
+          </a:p>
+        </p:txBody>
+      </p:sp>
+      <p:sp>
+        <p:nvSpPr>
+          <p:cNvPr id="26" name="TextBox 25"/>
+          <p:cNvSpPr txBox="1"/>
+          <p:nvPr/>
+        </p:nvSpPr>
+        <p:spPr>
+          <a:xfrm>
+            <a:off x="4517136" y="914400"/>
+            <a:ext cx="2926080" cy="205740"/>
+          </a:xfrm>
+          <a:prstGeom prst="rect">
+            <a:avLst/>
+          </a:prstGeom>
+          <a:noFill/>
+        </p:spPr>
+        <p:txBody>
+          <a:bodyPr wrap="square">
+            <a:spAutoFit/>
+          </a:bodyPr>
+          <a:lstStyle/>
+          <a:p>
+            <a:pPr algn="l"/>
+            <a:r>
+              <a:rPr sz="800" b="0" i="0">
+                <a:solidFill>
+                  <a:srgbClr val="CCCCCC"/>
+                </a:solidFill>
+                <a:latin typeface="Calibri"/>
+              </a:rPr>
+              <a:t>Loans &amp; notes (total)</a:t>
+            </a:r>
+          </a:p>
+        </p:txBody>
+      </p:sp>
+      <p:sp>
+        <p:nvSpPr>
+          <p:cNvPr id="27" name="TextBox 26"/>
+          <p:cNvSpPr txBox="1"/>
+          <p:nvPr/>
+        </p:nvSpPr>
+        <p:spPr>
+          <a:xfrm>
+            <a:off x="7351775" y="914400"/>
+            <a:ext cx="1527047" cy="205740"/>
+          </a:xfrm>
+          <a:prstGeom prst="rect">
+            <a:avLst/>
+          </a:prstGeom>
+          <a:noFill/>
+        </p:spPr>
+        <p:txBody>
+          <a:bodyPr wrap="square">
+            <a:spAutoFit/>
+          </a:bodyPr>
+          <a:lstStyle/>
+          <a:p>
+            <a:pPr algn="r"/>
+            <a:r>
+              <a:rPr sz="1000" b="1" i="0">
+                <a:solidFill>
+                  <a:srgbClr val="FFFFFF"/>
+                </a:solidFill>
+                <a:latin typeface="Calibri"/>
+              </a:rPr>
+              <a:t>$1,027,783</a:t>
+            </a:r>
+          </a:p>
+        </p:txBody>
+      </p:sp>
+      <p:sp>
+        <p:nvSpPr>
+          <p:cNvPr id="28" name="Rectangle 27"/>
+          <p:cNvSpPr/>
+          <p:nvPr/>
+        </p:nvSpPr>
+        <p:spPr>
+          <a:xfrm>
+            <a:off x="4517136" y="1211580"/>
+            <a:ext cx="4389120" cy="13716"/>
+          </a:xfrm>
+          <a:prstGeom prst="rect">
+            <a:avLst/>
+          </a:prstGeom>
+          <a:solidFill>
+            <a:srgbClr val="888888"/>
+          </a:solidFill>
+          <a:ln>
+            <a:noFill/>
+          </a:ln>
+        </p:spPr>
+        <p:style>
+          <a:lnRef idx="1">
+            <a:schemeClr val="accent1"/>
+          </a:lnRef>
+          <a:fillRef idx="3">
+            <a:schemeClr val="accent1"/>
+          </a:fillRef>
+          <a:effectRef idx="2">
+            <a:schemeClr val="accent1"/>
+          </a:effectRef>
+          <a:fontRef idx="minor">
+            <a:schemeClr val="lt1"/>
+          </a:fontRef>
+        </p:style>
+        <p:txBody>
+          <a:bodyPr rtlCol="0" anchor="ctr"/>
+          <a:lstStyle/>
+          <a:p>
+            <a:pPr algn="ctr"/>
+          </a:p>
+        </p:txBody>
+      </p:sp>
+      <p:sp>
+        <p:nvSpPr>
+          <p:cNvPr id="29" name="TextBox 28"/>
+          <p:cNvSpPr txBox="1"/>
+          <p:nvPr/>
+        </p:nvSpPr>
+        <p:spPr>
+          <a:xfrm>
+            <a:off x="4517136" y="1362456"/>
+            <a:ext cx="2926080" cy="205740"/>
+          </a:xfrm>
+          <a:prstGeom prst="rect">
+            <a:avLst/>
+          </a:prstGeom>
+          <a:noFill/>
+        </p:spPr>
+        <p:txBody>
+          <a:bodyPr wrap="square">
+            <a:spAutoFit/>
+          </a:bodyPr>
+          <a:lstStyle/>
+          <a:p>
+            <a:pPr algn="l"/>
+            <a:r>
+              <a:rPr sz="800" b="0" i="0">
+                <a:solidFill>
+                  <a:srgbClr val="CCCCCC"/>
+                </a:solidFill>
+                <a:latin typeface="Calibri"/>
+              </a:rPr>
+              <a:t>Due to Microcosm (Acct 2385)</a:t>
+            </a:r>
+          </a:p>
+        </p:txBody>
+      </p:sp>
+      <p:sp>
+        <p:nvSpPr>
+          <p:cNvPr id="30" name="TextBox 29"/>
+          <p:cNvSpPr txBox="1"/>
+          <p:nvPr/>
+        </p:nvSpPr>
+        <p:spPr>
+          <a:xfrm>
+            <a:off x="7351775" y="1362456"/>
+            <a:ext cx="1527047" cy="205740"/>
+          </a:xfrm>
+          <a:prstGeom prst="rect">
+            <a:avLst/>
+          </a:prstGeom>
+          <a:noFill/>
+        </p:spPr>
+        <p:txBody>
+          <a:bodyPr wrap="square">
+            <a:spAutoFit/>
+          </a:bodyPr>
+          <a:lstStyle/>
+          <a:p>
+            <a:pPr algn="r"/>
+            <a:r>
+              <a:rPr sz="900" b="1" i="0">
+                <a:solidFill>
+                  <a:srgbClr val="FF6666"/>
+                </a:solidFill>
+                <a:latin typeface="Calibri"/>
+              </a:rPr>
+              <a:t>$451,429</a:t>
+            </a:r>
+          </a:p>
+        </p:txBody>
+      </p:sp>
+      <p:sp>
+        <p:nvSpPr>
+          <p:cNvPr id="31" name="TextBox 30"/>
+          <p:cNvSpPr txBox="1"/>
+          <p:nvPr/>
+        </p:nvSpPr>
+        <p:spPr>
+          <a:xfrm>
+            <a:off x="4517136" y="1586484"/>
+            <a:ext cx="2926080" cy="205740"/>
+          </a:xfrm>
+          <a:prstGeom prst="rect">
+            <a:avLst/>
+          </a:prstGeom>
+          <a:noFill/>
+        </p:spPr>
+        <p:txBody>
+          <a:bodyPr wrap="square">
+            <a:spAutoFit/>
+          </a:bodyPr>
+          <a:lstStyle/>
+          <a:p>
+            <a:pPr algn="l"/>
+            <a:r>
+              <a:rPr sz="800" b="0" i="0">
+                <a:solidFill>
+                  <a:srgbClr val="CCCCCC"/>
+                </a:solidFill>
+                <a:latin typeface="Calibri"/>
+              </a:rPr>
+              <a:t>Notes Payable – Bookstore</a:t>
+            </a:r>
+          </a:p>
+        </p:txBody>
+      </p:sp>
+      <p:sp>
+        <p:nvSpPr>
+          <p:cNvPr id="32" name="TextBox 31"/>
+          <p:cNvSpPr txBox="1"/>
+          <p:nvPr/>
+        </p:nvSpPr>
+        <p:spPr>
+          <a:xfrm>
+            <a:off x="7351775" y="1586484"/>
+            <a:ext cx="1527047" cy="205740"/>
+          </a:xfrm>
+          <a:prstGeom prst="rect">
+            <a:avLst/>
+          </a:prstGeom>
+          <a:noFill/>
+        </p:spPr>
+        <p:txBody>
+          <a:bodyPr wrap="square">
+            <a:spAutoFit/>
+          </a:bodyPr>
+          <a:lstStyle/>
+          <a:p>
+            <a:pPr algn="r"/>
+            <a:r>
+              <a:rPr sz="900" b="1" i="0">
+                <a:solidFill>
+                  <a:srgbClr val="FF6666"/>
+                </a:solidFill>
+                <a:latin typeface="Calibri"/>
+              </a:rPr>
+              <a:t>$320,582</a:t>
+            </a:r>
+          </a:p>
+        </p:txBody>
+      </p:sp>
+      <p:sp>
+        <p:nvSpPr>
+          <p:cNvPr id="33" name="TextBox 32"/>
+          <p:cNvSpPr txBox="1"/>
+          <p:nvPr/>
+        </p:nvSpPr>
+        <p:spPr>
+          <a:xfrm>
+            <a:off x="4517136" y="1810512"/>
+            <a:ext cx="2926080" cy="205740"/>
+          </a:xfrm>
+          <a:prstGeom prst="rect">
+            <a:avLst/>
+          </a:prstGeom>
+          <a:noFill/>
+        </p:spPr>
+        <p:txBody>
+          <a:bodyPr wrap="square">
+            <a:spAutoFit/>
+          </a:bodyPr>
+          <a:lstStyle/>
+          <a:p>
+            <a:pPr algn="l"/>
+            <a:r>
+              <a:rPr sz="800" b="0" i="0">
+                <a:solidFill>
+                  <a:srgbClr val="CCCCCC"/>
+                </a:solidFill>
+                <a:latin typeface="Calibri"/>
+              </a:rPr>
+              <a:t>SBA EIDL (Acct 2712)</a:t>
+            </a:r>
+          </a:p>
+        </p:txBody>
+      </p:sp>
+      <p:sp>
+        <p:nvSpPr>
+          <p:cNvPr id="34" name="TextBox 33"/>
+          <p:cNvSpPr txBox="1"/>
+          <p:nvPr/>
+        </p:nvSpPr>
+        <p:spPr>
+          <a:xfrm>
+            <a:off x="7351775" y="1810512"/>
+            <a:ext cx="1527047" cy="205740"/>
+          </a:xfrm>
+          <a:prstGeom prst="rect">
+            <a:avLst/>
+          </a:prstGeom>
+          <a:noFill/>
+        </p:spPr>
+        <p:txBody>
+          <a:bodyPr wrap="square">
+            <a:spAutoFit/>
+          </a:bodyPr>
+          <a:lstStyle/>
+          <a:p>
+            <a:pPr algn="r"/>
+            <a:r>
+              <a:rPr sz="900" b="1" i="0">
+                <a:solidFill>
+                  <a:srgbClr val="FF6666"/>
+                </a:solidFill>
+                <a:latin typeface="Calibri"/>
+              </a:rPr>
+              <a:t>$132,072</a:t>
+            </a:r>
+          </a:p>
+        </p:txBody>
+      </p:sp>
+      <p:sp>
+        <p:nvSpPr>
+          <p:cNvPr id="35" name="TextBox 34"/>
+          <p:cNvSpPr txBox="1"/>
+          <p:nvPr/>
+        </p:nvSpPr>
+        <p:spPr>
+          <a:xfrm>
+            <a:off x="4517136" y="2034540"/>
+            <a:ext cx="2926080" cy="205740"/>
+          </a:xfrm>
+          <a:prstGeom prst="rect">
+            <a:avLst/>
+          </a:prstGeom>
+          <a:noFill/>
+        </p:spPr>
+        <p:txBody>
+          <a:bodyPr wrap="square">
+            <a:spAutoFit/>
+          </a:bodyPr>
+          <a:lstStyle/>
+          <a:p>
+            <a:pPr algn="l"/>
+            <a:r>
+              <a:rPr sz="800" b="0" i="0">
+                <a:solidFill>
+                  <a:srgbClr val="CCCCCC"/>
+                </a:solidFill>
+                <a:latin typeface="Calibri"/>
+              </a:rPr>
+              <a:t>Wertz loan (Acct 2714)</a:t>
+            </a:r>
+          </a:p>
+        </p:txBody>
+      </p:sp>
+      <p:sp>
+        <p:nvSpPr>
+          <p:cNvPr id="36" name="TextBox 35"/>
+          <p:cNvSpPr txBox="1"/>
+          <p:nvPr/>
+        </p:nvSpPr>
+        <p:spPr>
+          <a:xfrm>
+            <a:off x="7351775" y="2034540"/>
+            <a:ext cx="1527047" cy="205740"/>
+          </a:xfrm>
+          <a:prstGeom prst="rect">
+            <a:avLst/>
+          </a:prstGeom>
+          <a:noFill/>
+        </p:spPr>
+        <p:txBody>
+          <a:bodyPr wrap="square">
+            <a:spAutoFit/>
+          </a:bodyPr>
+          <a:lstStyle/>
+          <a:p>
+            <a:pPr algn="r"/>
+            <a:r>
+              <a:rPr sz="900" b="1" i="0">
+                <a:solidFill>
+                  <a:srgbClr val="FF6666"/>
+                </a:solidFill>
+                <a:latin typeface="Calibri"/>
+              </a:rPr>
+              <a:t>$92,500</a:t>
+            </a:r>
+          </a:p>
+        </p:txBody>
+      </p:sp>
+      <p:sp>
+        <p:nvSpPr>
+          <p:cNvPr id="37" name="TextBox 36"/>
+          <p:cNvSpPr txBox="1"/>
+          <p:nvPr/>
+        </p:nvSpPr>
+        <p:spPr>
+          <a:xfrm>
+            <a:off x="4517136" y="2258568"/>
+            <a:ext cx="2926080" cy="205740"/>
+          </a:xfrm>
+          <a:prstGeom prst="rect">
+            <a:avLst/>
+          </a:prstGeom>
+          <a:noFill/>
+        </p:spPr>
+        <p:txBody>
+          <a:bodyPr wrap="square">
+            <a:spAutoFit/>
+          </a:bodyPr>
+          <a:lstStyle/>
+          <a:p>
+            <a:pPr algn="l"/>
+            <a:r>
+              <a:rPr sz="800" b="0" i="0">
+                <a:solidFill>
+                  <a:srgbClr val="CCCCCC"/>
+                </a:solidFill>
+                <a:latin typeface="Calibri"/>
+              </a:rPr>
+              <a:t>Exos loan (11%, Acct 2720)</a:t>
+            </a:r>
+          </a:p>
+        </p:txBody>
+      </p:sp>
+      <p:sp>
+        <p:nvSpPr>
+          <p:cNvPr id="38" name="TextBox 37"/>
+          <p:cNvSpPr txBox="1"/>
+          <p:nvPr/>
+        </p:nvSpPr>
+        <p:spPr>
+          <a:xfrm>
+            <a:off x="7351775" y="2258568"/>
+            <a:ext cx="1527047" cy="205740"/>
+          </a:xfrm>
+          <a:prstGeom prst="rect">
+            <a:avLst/>
+          </a:prstGeom>
+          <a:noFill/>
+        </p:spPr>
+        <p:txBody>
+          <a:bodyPr wrap="square">
+            <a:spAutoFit/>
+          </a:bodyPr>
+          <a:lstStyle/>
+          <a:p>
+            <a:pPr algn="r"/>
+            <a:r>
+              <a:rPr sz="900" b="1" i="0">
+                <a:solidFill>
+                  <a:srgbClr val="F26A21"/>
+                </a:solidFill>
+                <a:latin typeface="Calibri"/>
+              </a:rPr>
+              <a:t>$31,200</a:t>
+            </a:r>
+          </a:p>
+        </p:txBody>
+      </p:sp>
+      <p:sp>
+        <p:nvSpPr>
+          <p:cNvPr id="39" name="Rectangle 38"/>
+          <p:cNvSpPr/>
+          <p:nvPr/>
+        </p:nvSpPr>
+        <p:spPr>
+          <a:xfrm>
+            <a:off x="4517136" y="2555748"/>
+            <a:ext cx="4389120" cy="13716"/>
+          </a:xfrm>
+          <a:prstGeom prst="rect">
+            <a:avLst/>
+          </a:prstGeom>
+          <a:solidFill>
+            <a:srgbClr val="888888"/>
+          </a:solidFill>
+          <a:ln>
+            <a:noFill/>
+          </a:ln>
+        </p:spPr>
+        <p:style>
+          <a:lnRef idx="1">
+            <a:schemeClr val="accent1"/>
+          </a:lnRef>
+          <a:fillRef idx="3">
+            <a:schemeClr val="accent1"/>
+          </a:fillRef>
+          <a:effectRef idx="2">
+            <a:schemeClr val="accent1"/>
+          </a:effectRef>
+          <a:fontRef idx="minor">
+            <a:schemeClr val="lt1"/>
+          </a:fontRef>
+        </p:style>
+        <p:txBody>
+          <a:bodyPr rtlCol="0" anchor="ctr"/>
+          <a:lstStyle/>
+          <a:p>
+            <a:pPr algn="ctr"/>
+          </a:p>
+        </p:txBody>
+      </p:sp>
+      <p:sp>
+        <p:nvSpPr>
+          <p:cNvPr id="40" name="TextBox 39"/>
+          <p:cNvSpPr txBox="1"/>
+          <p:nvPr/>
+        </p:nvSpPr>
+        <p:spPr>
+          <a:xfrm>
+            <a:off x="4517136" y="2482596"/>
+            <a:ext cx="2926080" cy="205740"/>
+          </a:xfrm>
+          <a:prstGeom prst="rect">
+            <a:avLst/>
+          </a:prstGeom>
+          <a:noFill/>
+        </p:spPr>
+        <p:txBody>
+          <a:bodyPr wrap="square">
+            <a:spAutoFit/>
+          </a:bodyPr>
+          <a:lstStyle/>
+          <a:p>
+            <a:pPr algn="l"/>
+            <a:r>
+              <a:rPr sz="800" b="0" i="0">
+                <a:solidFill>
+                  <a:srgbClr val="CCCCCC"/>
+                </a:solidFill>
+                <a:latin typeface="Calibri"/>
+              </a:rPr>
+              <a:t>Total liabilities (10/2)</a:t>
+            </a:r>
+          </a:p>
+        </p:txBody>
+      </p:sp>
+      <p:sp>
+        <p:nvSpPr>
+          <p:cNvPr id="41" name="TextBox 40"/>
+          <p:cNvSpPr txBox="1"/>
+          <p:nvPr/>
+        </p:nvSpPr>
+        <p:spPr>
+          <a:xfrm>
+            <a:off x="7351775" y="2482596"/>
+            <a:ext cx="1527047" cy="205740"/>
+          </a:xfrm>
+          <a:prstGeom prst="rect">
+            <a:avLst/>
+          </a:prstGeom>
+          <a:noFill/>
+        </p:spPr>
+        <p:txBody>
+          <a:bodyPr wrap="square">
+            <a:spAutoFit/>
+          </a:bodyPr>
+          <a:lstStyle/>
+          <a:p>
+            <a:pPr algn="r"/>
+            <a:r>
+              <a:rPr sz="900" b="1" i="0">
+                <a:solidFill>
+                  <a:srgbClr val="FF6666"/>
+                </a:solidFill>
+                <a:latin typeface="Calibri"/>
+              </a:rPr>
+              <a:t>$1,275,622</a:t>
+            </a:r>
+          </a:p>
+        </p:txBody>
+      </p:sp>
+      <p:sp>
+        <p:nvSpPr>
+          <p:cNvPr id="42" name="Rectangle 41"/>
+          <p:cNvSpPr/>
+          <p:nvPr/>
+        </p:nvSpPr>
+        <p:spPr>
+          <a:xfrm>
+            <a:off x="109728" y="3643884"/>
+            <a:ext cx="8924544" cy="749808"/>
+          </a:xfrm>
+          <a:prstGeom prst="rect">
+            <a:avLst/>
+          </a:prstGeom>
+          <a:solidFill>
+            <a:srgbClr val="1E1400"/>
+          </a:solidFill>
+          <a:ln>
+            <a:noFill/>
+          </a:ln>
+        </p:spPr>
+        <p:style>
+          <a:lnRef idx="1">
+            <a:schemeClr val="accent1"/>
+          </a:lnRef>
+          <a:fillRef idx="3">
+            <a:schemeClr val="accent1"/>
+          </a:fillRef>
+          <a:effectRef idx="2">
+            <a:schemeClr val="accent1"/>
+          </a:effectRef>
+          <a:fontRef idx="minor">
+            <a:schemeClr val="lt1"/>
+          </a:fontRef>
+        </p:style>
+        <p:txBody>
+          <a:bodyPr rtlCol="0" anchor="ctr"/>
+          <a:lstStyle/>
+          <a:p>
+            <a:pPr algn="ctr"/>
+          </a:p>
+        </p:txBody>
+      </p:sp>
+      <p:sp>
+        <p:nvSpPr>
+          <p:cNvPr id="43" name="Rectangle 42"/>
+          <p:cNvSpPr/>
+          <p:nvPr/>
+        </p:nvSpPr>
+        <p:spPr>
+          <a:xfrm>
+            <a:off x="109728" y="3643884"/>
+            <a:ext cx="50292" cy="749808"/>
+          </a:xfrm>
+          <a:prstGeom prst="rect">
+            <a:avLst/>
+          </a:prstGeom>
+          <a:solidFill>
+            <a:srgbClr val="F26A21"/>
+          </a:solidFill>
+          <a:ln>
+            <a:noFill/>
+          </a:ln>
+        </p:spPr>
+        <p:style>
+          <a:lnRef idx="1">
+            <a:schemeClr val="accent1"/>
+          </a:lnRef>
+          <a:fillRef idx="3">
+            <a:schemeClr val="accent1"/>
+          </a:fillRef>
+          <a:effectRef idx="2">
+            <a:schemeClr val="accent1"/>
+          </a:effectRef>
+          <a:fontRef idx="minor">
+            <a:schemeClr val="lt1"/>
+          </a:fontRef>
+        </p:style>
+        <p:txBody>
+          <a:bodyPr rtlCol="0" anchor="ctr"/>
+          <a:lstStyle/>
+          <a:p>
+            <a:pPr algn="ctr"/>
+          </a:p>
+        </p:txBody>
+      </p:sp>
+      <p:sp>
+        <p:nvSpPr>
+          <p:cNvPr id="44" name="TextBox 43"/>
+          <p:cNvSpPr txBox="1"/>
+          <p:nvPr/>
+        </p:nvSpPr>
+        <p:spPr>
+          <a:xfrm>
+            <a:off x="219456" y="3680459"/>
+            <a:ext cx="8686800" cy="173736"/>
+          </a:xfrm>
+          <a:prstGeom prst="rect">
+            <a:avLst/>
+          </a:prstGeom>
+          <a:noFill/>
+        </p:spPr>
+        <p:txBody>
+          <a:bodyPr wrap="square">
+            <a:spAutoFit/>
+          </a:bodyPr>
+          <a:lstStyle/>
+          <a:p>
+            <a:pPr algn="l"/>
+            <a:r>
+              <a:rPr sz="800" b="1" i="0">
+                <a:solidFill>
+                  <a:srgbClr val="F26A21"/>
+                </a:solidFill>
+                <a:latin typeface="Calibri"/>
+              </a:rPr>
+              <a:t>UNBOOKED OFFSET  (illustrative — no written cost-sharing agreement on file)</a:t>
+            </a:r>
+          </a:p>
+        </p:txBody>
+      </p:sp>
+      <p:sp>
+        <p:nvSpPr>
+          <p:cNvPr id="45" name="TextBox 44"/>
+          <p:cNvSpPr txBox="1"/>
+          <p:nvPr/>
+        </p:nvSpPr>
+        <p:spPr>
+          <a:xfrm>
+            <a:off x="219456" y="3890772"/>
+            <a:ext cx="8686800" cy="457200"/>
+          </a:xfrm>
+          <a:prstGeom prst="rect">
+            <a:avLst/>
+          </a:prstGeom>
+          <a:noFill/>
+        </p:spPr>
+        <p:txBody>
+          <a:bodyPr wrap="square">
+            <a:spAutoFit/>
+          </a:bodyPr>
+          <a:lstStyle/>
+          <a:p>
+            <a:pPr algn="l"/>
+            <a:r>
+              <a:rPr sz="750" b="0" i="0">
+                <a:solidFill>
+                  <a:srgbClr val="CCCCCC"/>
+                </a:solidFill>
+                <a:latin typeface="Calibri"/>
+              </a:rPr>
+              <a:t>SSLC has paid ~100% of shared Torrance facility costs: ~$354K in FY26 (rent $294K + utilities $31K + other), ~$967K est. Jan 2024–Oct 2026.  At a 50% Microcosm share (illustrative) → ~$483K offsets $451K due to Microcosm = SSLC net creditor ~$32K.  "$864K 'billed-ahead' balance disputed; under review (full QuickBooks access requested)."</a:t>
+            </a:r>
+          </a:p>
+        </p:txBody>
+      </p:sp>
+      <p:sp>
+        <p:nvSpPr>
+          <p:cNvPr id="46" name="TextBox 45"/>
+          <p:cNvSpPr txBox="1"/>
+          <p:nvPr/>
+        </p:nvSpPr>
+        <p:spPr>
+          <a:xfrm>
+            <a:off x="228600" y="4416552"/>
+            <a:ext cx="8229600" cy="155448"/>
+          </a:xfrm>
+          <a:prstGeom prst="rect">
+            <a:avLst/>
+          </a:prstGeom>
+          <a:noFill/>
+        </p:spPr>
+        <p:txBody>
+          <a:bodyPr wrap="square">
+            <a:spAutoFit/>
+          </a:bodyPr>
+          <a:lstStyle/>
+          <a:p>
+            <a:pPr algn="l"/>
+            <a:r>
+              <a:rPr sz="700" b="0" i="1">
+                <a:solidFill>
+                  <a:srgbClr val="888888"/>
+                </a:solidFill>
+                <a:latin typeface="Calibri"/>
+              </a:rPr>
+              <a:t>per SSLC QuickBooks 8/21 and 10/2/2026; Microcosm offset illustrative</a:t>
+            </a:r>
+          </a:p>
+        </p:txBody>
+      </p:sp>
+      <p:sp>
+        <p:nvSpPr>
+          <p:cNvPr id="47" name="TextBox 46"/>
+          <p:cNvSpPr txBox="1"/>
+          <p:nvPr/>
+        </p:nvSpPr>
+        <p:spPr>
+          <a:xfrm>
+            <a:off x="1554480" y="4809744"/>
+            <a:ext cx="6035040" cy="201168"/>
+          </a:xfrm>
+          <a:prstGeom prst="rect">
+            <a:avLst/>
+          </a:prstGeom>
+          <a:noFill/>
+        </p:spPr>
+        <p:txBody>
+          <a:bodyPr wrap="square">
+            <a:spAutoFit/>
+          </a:bodyPr>
+          <a:lstStyle/>
+          <a:p>
+            <a:pPr algn="ctr"/>
+            <a:r>
+              <a:rPr sz="700" b="0" i="1">
+                <a:solidFill>
+                  <a:srgbClr val="888888"/>
+                </a:solidFill>
+                <a:latin typeface="Calibri"/>
+              </a:rPr>
+              <a:t>DRAFT — NEGOTIATING TERMS</a:t>
+            </a:r>
+          </a:p>
+        </p:txBody>
+      </p:sp>
+      <p:sp>
+        <p:nvSpPr>
+          <p:cNvPr id="48" name="TextBox 47"/>
+          <p:cNvSpPr txBox="1"/>
+          <p:nvPr/>
+        </p:nvSpPr>
+        <p:spPr>
+          <a:xfrm>
+            <a:off x="7772400" y="4809744"/>
+            <a:ext cx="1143000" cy="201168"/>
+          </a:xfrm>
+          <a:prstGeom prst="rect">
+            <a:avLst/>
+          </a:prstGeom>
+          <a:noFill/>
+        </p:spPr>
+        <p:txBody>
+          <a:bodyPr wrap="square">
+            <a:spAutoFit/>
+          </a:bodyPr>
+          <a:lstStyle/>
+          <a:p>
+            <a:pPr algn="r"/>
+            <a:r>
+              <a:rPr sz="700" b="0" i="1">
+                <a:solidFill>
+                  <a:srgbClr val="888888"/>
+                </a:solidFill>
+                <a:latin typeface="Calibri"/>
+              </a:rPr>
+              <a:t>CONFIDENTIAL</a:t>
+            </a:r>
+          </a:p>
+        </p:txBody>
+      </p:sp>
+    </p:spTree>
+  </p:cSld>
+  <p:clrMapOvr>
+    <a:masterClrMapping/>
+  </p:clrMapOvr>
+</p:sld>
+</file>
+
+<file path=ppt/slides/slide5.xml><?xml version="1.0" encoding="utf-8"?>
 <p:sld xmlns:a="http://schemas.openxmlformats.org/drawingml/2006/main" xmlns:r="http://schemas.openxmlformats.org/officeDocument/2006/relationships" xmlns:p="http://schemas.openxmlformats.org/presentationml/2006/main">
   <p:cSld name="Slide 4">
     <p:bg>
@@ -6822,7 +9119,7 @@
 </p:sld>
 </file>
 
-<file path=ppt/slides/slide5.xml><?xml version="1.0" encoding="utf-8"?>
+<file path=ppt/slides/slide6.xml><?xml version="1.0" encoding="utf-8"?>
 <p:sld xmlns:a="http://schemas.openxmlformats.org/drawingml/2006/main" xmlns:r="http://schemas.openxmlformats.org/officeDocument/2006/relationships" xmlns:p="http://schemas.openxmlformats.org/presentationml/2006/main">
   <p:cSld name="Slide 5">
     <p:bg>
@@ -10519,7 +12816,7 @@
 </p:sld>
 </file>
 
-<file path=ppt/slides/slide6.xml><?xml version="1.0" encoding="utf-8"?>
+<file path=ppt/slides/slide7.xml><?xml version="1.0" encoding="utf-8"?>
 <p:sld xmlns:a="http://schemas.openxmlformats.org/drawingml/2006/main" xmlns:r="http://schemas.openxmlformats.org/officeDocument/2006/relationships" xmlns:p="http://schemas.openxmlformats.org/presentationml/2006/main">
   <p:cSld name="Slide 6">
     <p:bg>
@@ -11859,7 +14156,7 @@
 </p:sld>
 </file>
 
-<file path=ppt/slides/slide7.xml><?xml version="1.0" encoding="utf-8"?>
+<file path=ppt/slides/slide8.xml><?xml version="1.0" encoding="utf-8"?>
 <p:sld xmlns:a="http://schemas.openxmlformats.org/drawingml/2006/main" xmlns:r="http://schemas.openxmlformats.org/officeDocument/2006/relationships" xmlns:p="http://schemas.openxmlformats.org/presentationml/2006/main">
   <p:cSld name="Slide 7">
     <p:bg>
@@ -12628,7 +14925,7 @@
 </p:sld>
 </file>
 
-<file path=ppt/slides/slide8.xml><?xml version="1.0" encoding="utf-8"?>
+<file path=ppt/slides/slide9.xml><?xml version="1.0" encoding="utf-8"?>
 <p:sld xmlns:a="http://schemas.openxmlformats.org/drawingml/2006/main" xmlns:r="http://schemas.openxmlformats.org/officeDocument/2006/relationships" xmlns:p="http://schemas.openxmlformats.org/presentationml/2006/main">
   <p:cSld name="Slide 8">
     <p:bg>
@@ -12988,998 +15285,6 @@
       <p:sp>
         <p:nvSpPr>
           <p:cNvPr id="12" name="Text 9"/>
-          <p:cNvSpPr txBox="1"/>
-          <p:nvPr/>
-        </p:nvSpPr>
-        <p:spPr>
-          <a:xfrm>
-            <a:off x="7772400" y="4800600"/>
-            <a:ext cx="1143000" cy="228600"/>
-          </a:xfrm>
-          <a:prstGeom prst="rect">
-            <a:avLst/>
-          </a:prstGeom>
-          <a:noFill/>
-          <a:ln/>
-        </p:spPr>
-        <p:txBody>
-          <a:bodyPr wrap="square" rtlCol="0" anchor="ctr"/>
-          <a:lstStyle/>
-          <a:p>
-            <a:pPr algn="r" indent="0" marL="0">
-              <a:buNone/>
-            </a:pPr>
-            <a:r>
-              <a:rPr lang="en-US" sz="700" i="1" dirty="0">
-                <a:solidFill>
-                  <a:srgbClr val="888888"/>
-                </a:solidFill>
-              </a:rPr>
-              <a:t>CONFIDENTIAL</a:t>
-            </a:r>
-            <a:endParaRPr lang="en-US" sz="700" dirty="0"/>
-          </a:p>
-        </p:txBody>
-      </p:sp>
-    </p:spTree>
-  </p:cSld>
-  <p:clrMapOvr>
-    <a:masterClrMapping/>
-  </p:clrMapOvr>
-</p:sld>
-</file>
-
-<file path=ppt/slides/slide9.xml><?xml version="1.0" encoding="utf-8"?>
-<p:sld xmlns:a="http://schemas.openxmlformats.org/drawingml/2006/main" xmlns:r="http://schemas.openxmlformats.org/officeDocument/2006/relationships" xmlns:p="http://schemas.openxmlformats.org/presentationml/2006/main">
-  <p:cSld name="Slide 9">
-    <p:bg>
-      <p:bgPr>
-        <a:solidFill>
-          <a:srgbClr val="111111"/>
-        </a:solidFill>
-      </p:bgPr>
-    </p:bg>
-    <p:spTree>
-      <p:nvGrpSpPr>
-        <p:cNvPr id="1" name=""/>
-        <p:cNvGrpSpPr/>
-        <p:nvPr/>
-      </p:nvGrpSpPr>
-      <p:grpSpPr>
-        <a:xfrm>
-          <a:off x="0" y="0"/>
-          <a:ext cx="0" cy="0"/>
-          <a:chOff x="0" y="0"/>
-          <a:chExt cx="0" cy="0"/>
-        </a:xfrm>
-      </p:grpSpPr>
-      <p:sp>
-        <p:nvSpPr>
-          <p:cNvPr id="2" name="Text 0"/>
-          <p:cNvSpPr txBox="1"/>
-          <p:nvPr/>
-        </p:nvSpPr>
-        <p:spPr>
-          <a:xfrm>
-            <a:off x="457200" y="274320"/>
-            <a:ext cx="8229600" cy="475488"/>
-          </a:xfrm>
-          <a:prstGeom prst="rect">
-            <a:avLst/>
-          </a:prstGeom>
-          <a:noFill/>
-          <a:ln/>
-        </p:spPr>
-        <p:txBody>
-          <a:bodyPr wrap="square" rtlCol="0" anchor="ctr"/>
-          <a:lstStyle/>
-          <a:p>
-            <a:pPr indent="0" marL="0">
-              <a:buNone/>
-            </a:pPr>
-            <a:r>
-              <a:rPr lang="en-US" sz="2200" b="1" dirty="0">
-                <a:solidFill>
-                  <a:srgbClr val="FFFFFF"/>
-                </a:solidFill>
-                <a:latin typeface="Cambria" pitchFamily="34" charset="0"/>
-                <a:ea typeface="Cambria" pitchFamily="34" charset="-122"/>
-                <a:cs typeface="Cambria" pitchFamily="34" charset="-120"/>
-              </a:rPr>
-              <a:t>Exos Funding Commitments</a:t>
-            </a:r>
-            <a:endParaRPr lang="en-US" sz="2200" dirty="0"/>
-          </a:p>
-        </p:txBody>
-      </p:sp>
-      <p:sp>
-        <p:nvSpPr>
-          <p:cNvPr id="3" name="Shape 1"/>
-          <p:cNvSpPr/>
-          <p:nvPr/>
-        </p:nvSpPr>
-        <p:spPr>
-          <a:xfrm>
-            <a:off x="457200" y="768096"/>
-            <a:ext cx="1371600" cy="36576"/>
-          </a:xfrm>
-          <a:prstGeom prst="rect">
-            <a:avLst/>
-          </a:prstGeom>
-          <a:solidFill>
-            <a:srgbClr val="F26A21"/>
-          </a:solidFill>
-          <a:ln/>
-        </p:spPr>
-        <p:txBody>
-          <a:bodyPr/>
-          <a:p/>
-        </p:txBody>
-      </p:sp>
-      <p:sp>
-        <p:nvSpPr>
-          <p:cNvPr id="4" name="Shape 2"/>
-          <p:cNvSpPr/>
-          <p:nvPr/>
-        </p:nvSpPr>
-        <p:spPr>
-          <a:xfrm>
-            <a:off x="411480" y="914400"/>
-            <a:ext cx="8321040" cy="365760"/>
-          </a:xfrm>
-          <a:prstGeom prst="rect">
-            <a:avLst/>
-          </a:prstGeom>
-          <a:solidFill>
-            <a:srgbClr val="1C1C1C"/>
-          </a:solidFill>
-          <a:ln w="12700">
-            <a:solidFill>
-              <a:srgbClr val="2A2A2A"/>
-            </a:solidFill>
-            <a:prstDash val="solid"/>
-          </a:ln>
-        </p:spPr>
-        <p:txBody>
-          <a:bodyPr/>
-          <a:p/>
-        </p:txBody>
-      </p:sp>
-      <p:sp>
-        <p:nvSpPr>
-          <p:cNvPr id="5" name="Text 3"/>
-          <p:cNvSpPr txBox="1"/>
-          <p:nvPr/>
-        </p:nvSpPr>
-        <p:spPr>
-          <a:xfrm>
-            <a:off x="548640" y="950976"/>
-            <a:ext cx="5303520" cy="292608"/>
-          </a:xfrm>
-          <a:prstGeom prst="rect">
-            <a:avLst/>
-          </a:prstGeom>
-          <a:noFill/>
-          <a:ln/>
-        </p:spPr>
-        <p:txBody>
-          <a:bodyPr wrap="square" rtlCol="0" anchor="ctr"/>
-          <a:lstStyle/>
-          <a:p>
-            <a:pPr indent="0" marL="0">
-              <a:buNone/>
-            </a:pPr>
-            <a:r>
-              <a:rPr lang="en-US" sz="1200" b="1" dirty="0">
-                <a:solidFill>
-                  <a:srgbClr val="FFFFFF"/>
-                </a:solidFill>
-              </a:rPr>
-              <a:t>$2.51M cash</a:t>
-            </a:r>
-            <a:endParaRPr lang="en-US" sz="1200" dirty="0"/>
-          </a:p>
-        </p:txBody>
-      </p:sp>
-      <p:sp>
-        <p:nvSpPr>
-          <p:cNvPr id="6" name="Text 4"/>
-          <p:cNvSpPr txBox="1"/>
-          <p:nvPr/>
-        </p:nvSpPr>
-        <p:spPr>
-          <a:xfrm>
-            <a:off x="5989320" y="950976"/>
-            <a:ext cx="2606040" cy="292608"/>
-          </a:xfrm>
-          <a:prstGeom prst="rect">
-            <a:avLst/>
-          </a:prstGeom>
-          <a:noFill/>
-          <a:ln/>
-        </p:spPr>
-        <p:txBody>
-          <a:bodyPr wrap="square" rtlCol="0" anchor="ctr"/>
-          <a:lstStyle/>
-          <a:p>
-            <a:pPr algn="r" indent="0" marL="0">
-              <a:buNone/>
-            </a:pPr>
-            <a:r>
-              <a:rPr lang="en-US" sz="1000" dirty="0">
-                <a:solidFill>
-                  <a:srgbClr val="888888"/>
-                </a:solidFill>
-              </a:rPr>
-              <a:t>at financing close (target Feb 15th)</a:t>
-            </a:r>
-            <a:endParaRPr lang="en-US" sz="1000" dirty="0"/>
-          </a:p>
-        </p:txBody>
-      </p:sp>
-      <p:sp>
-        <p:nvSpPr>
-          <p:cNvPr id="7" name="Shape 5"/>
-          <p:cNvSpPr/>
-          <p:nvPr/>
-        </p:nvSpPr>
-        <p:spPr>
-          <a:xfrm>
-            <a:off x="411480" y="1298448"/>
-            <a:ext cx="8321040" cy="365760"/>
-          </a:xfrm>
-          <a:prstGeom prst="rect">
-            <a:avLst/>
-          </a:prstGeom>
-          <a:solidFill>
-            <a:srgbClr val="212121"/>
-          </a:solidFill>
-          <a:ln w="12700">
-            <a:solidFill>
-              <a:srgbClr val="2A2A2A"/>
-            </a:solidFill>
-            <a:prstDash val="solid"/>
-          </a:ln>
-        </p:spPr>
-        <p:txBody>
-          <a:bodyPr/>
-          <a:p/>
-        </p:txBody>
-      </p:sp>
-      <p:sp>
-        <p:nvSpPr>
-          <p:cNvPr id="8" name="Text 6"/>
-          <p:cNvSpPr txBox="1"/>
-          <p:nvPr/>
-        </p:nvSpPr>
-        <p:spPr>
-          <a:xfrm>
-            <a:off x="548640" y="1335024"/>
-            <a:ext cx="5303520" cy="292608"/>
-          </a:xfrm>
-          <a:prstGeom prst="rect">
-            <a:avLst/>
-          </a:prstGeom>
-          <a:noFill/>
-          <a:ln/>
-        </p:spPr>
-        <p:txBody>
-          <a:bodyPr wrap="square" rtlCol="0" anchor="ctr"/>
-          <a:lstStyle/>
-          <a:p>
-            <a:pPr indent="0" marL="0">
-              <a:buNone/>
-            </a:pPr>
-            <a:r>
-              <a:rPr lang="en-US" sz="1200" b="1" dirty="0">
-                <a:solidFill>
-                  <a:srgbClr val="FFFFFF"/>
-                </a:solidFill>
-              </a:rPr>
-              <a:t>SSLC transaction costs</a:t>
-            </a:r>
-            <a:endParaRPr lang="en-US" sz="1200" dirty="0"/>
-          </a:p>
-        </p:txBody>
-      </p:sp>
-      <p:sp>
-        <p:nvSpPr>
-          <p:cNvPr id="9" name="Text 7"/>
-          <p:cNvSpPr txBox="1"/>
-          <p:nvPr/>
-        </p:nvSpPr>
-        <p:spPr>
-          <a:xfrm>
-            <a:off x="5989320" y="1335024"/>
-            <a:ext cx="2606040" cy="292608"/>
-          </a:xfrm>
-          <a:prstGeom prst="rect">
-            <a:avLst/>
-          </a:prstGeom>
-          <a:noFill/>
-          <a:ln/>
-        </p:spPr>
-        <p:txBody>
-          <a:bodyPr wrap="square" rtlCol="0" anchor="ctr"/>
-          <a:lstStyle/>
-          <a:p>
-            <a:pPr algn="r" indent="0" marL="0">
-              <a:buNone/>
-            </a:pPr>
-            <a:r>
-              <a:rPr lang="en-US" sz="1000" dirty="0">
-                <a:solidFill>
-                  <a:srgbClr val="888888"/>
-                </a:solidFill>
-              </a:rPr>
-              <a:t>at financing close (target Feb 15th)</a:t>
-            </a:r>
-            <a:endParaRPr lang="en-US" sz="1000" dirty="0"/>
-          </a:p>
-        </p:txBody>
-      </p:sp>
-      <p:sp>
-        <p:nvSpPr>
-          <p:cNvPr id="10" name="Shape 8"/>
-          <p:cNvSpPr/>
-          <p:nvPr/>
-        </p:nvSpPr>
-        <p:spPr>
-          <a:xfrm>
-            <a:off x="411480" y="1682496"/>
-            <a:ext cx="8321040" cy="365760"/>
-          </a:xfrm>
-          <a:prstGeom prst="rect">
-            <a:avLst/>
-          </a:prstGeom>
-          <a:solidFill>
-            <a:srgbClr val="1C1C1C"/>
-          </a:solidFill>
-          <a:ln w="12700">
-            <a:solidFill>
-              <a:srgbClr val="2A2A2A"/>
-            </a:solidFill>
-            <a:prstDash val="solid"/>
-          </a:ln>
-        </p:spPr>
-        <p:txBody>
-          <a:bodyPr/>
-          <a:p/>
-        </p:txBody>
-      </p:sp>
-      <p:sp>
-        <p:nvSpPr>
-          <p:cNvPr id="13" name="Shape 11"/>
-          <p:cNvSpPr/>
-          <p:nvPr/>
-        </p:nvSpPr>
-        <p:spPr>
-          <a:xfrm>
-            <a:off x="411480" y="2066544"/>
-            <a:ext cx="8321040" cy="365760"/>
-          </a:xfrm>
-          <a:prstGeom prst="rect">
-            <a:avLst/>
-          </a:prstGeom>
-          <a:solidFill>
-            <a:srgbClr val="212121"/>
-          </a:solidFill>
-          <a:ln w="12700">
-            <a:solidFill>
-              <a:srgbClr val="2A2A2A"/>
-            </a:solidFill>
-            <a:prstDash val="solid"/>
-          </a:ln>
-        </p:spPr>
-        <p:txBody>
-          <a:bodyPr/>
-          <a:p/>
-        </p:txBody>
-      </p:sp>
-      <p:sp>
-        <p:nvSpPr>
-          <p:cNvPr id="14" name="Text 12"/>
-          <p:cNvSpPr txBox="1"/>
-          <p:nvPr/>
-        </p:nvSpPr>
-        <p:spPr>
-          <a:xfrm>
-            <a:off x="548640" y="2103120"/>
-            <a:ext cx="5303520" cy="292608"/>
-          </a:xfrm>
-          <a:prstGeom prst="rect">
-            <a:avLst/>
-          </a:prstGeom>
-          <a:noFill/>
-          <a:ln/>
-        </p:spPr>
-        <p:txBody>
-          <a:bodyPr wrap="square" rtlCol="0" anchor="ctr"/>
-          <a:lstStyle/>
-          <a:p>
-            <a:pPr indent="0" marL="0">
-              <a:buNone/>
-            </a:pPr>
-            <a:r>
-              <a:rPr lang="en-US" sz="1200" b="1" dirty="0">
-                <a:solidFill>
-                  <a:srgbClr val="FFFFFF"/>
-                </a:solidFill>
-              </a:rPr>
-              <a:t>Working-capital bridge $500K</a:t>
-            </a:r>
-            <a:endParaRPr lang="en-US" sz="1200" dirty="0"/>
-          </a:p>
-        </p:txBody>
-      </p:sp>
-      <p:sp>
-        <p:nvSpPr>
-          <p:cNvPr id="15" name="Text 13"/>
-          <p:cNvSpPr txBox="1"/>
-          <p:nvPr/>
-        </p:nvSpPr>
-        <p:spPr>
-          <a:xfrm>
-            <a:off x="5989320" y="2103120"/>
-            <a:ext cx="2606040" cy="292608"/>
-          </a:xfrm>
-          <a:prstGeom prst="rect">
-            <a:avLst/>
-          </a:prstGeom>
-          <a:noFill/>
-          <a:ln/>
-        </p:spPr>
-        <p:txBody>
-          <a:bodyPr wrap="square" rtlCol="0" anchor="ctr"/>
-          <a:lstStyle/>
-          <a:p>
-            <a:pPr algn="r" indent="0" marL="0">
-              <a:buNone/>
-            </a:pPr>
-            <a:r>
-              <a:rPr lang="en-US" sz="1000" dirty="0">
-                <a:solidFill>
-                  <a:srgbClr val="888888"/>
-                </a:solidFill>
-              </a:rPr>
-              <a:t>at financing close (target Feb 15th)</a:t>
-            </a:r>
-            <a:endParaRPr lang="en-US" sz="1000" dirty="0"/>
-          </a:p>
-        </p:txBody>
-      </p:sp>
-      <p:sp>
-        <p:nvSpPr>
-          <p:cNvPr id="16" name="Shape 14"/>
-          <p:cNvSpPr/>
-          <p:nvPr/>
-        </p:nvSpPr>
-        <p:spPr>
-          <a:xfrm>
-            <a:off x="411480" y="2450592"/>
-            <a:ext cx="8321040" cy="365760"/>
-          </a:xfrm>
-          <a:prstGeom prst="rect">
-            <a:avLst/>
-          </a:prstGeom>
-          <a:solidFill>
-            <a:srgbClr val="1C1C1C"/>
-          </a:solidFill>
-          <a:ln w="12700">
-            <a:solidFill>
-              <a:srgbClr val="2A2A2A"/>
-            </a:solidFill>
-            <a:prstDash val="solid"/>
-          </a:ln>
-        </p:spPr>
-        <p:txBody>
-          <a:bodyPr/>
-          <a:p/>
-        </p:txBody>
-      </p:sp>
-      <p:sp>
-        <p:nvSpPr>
-          <p:cNvPr id="17" name="Text 15"/>
-          <p:cNvSpPr txBox="1"/>
-          <p:nvPr/>
-        </p:nvSpPr>
-        <p:spPr>
-          <a:xfrm>
-            <a:off x="548640" y="2487168"/>
-            <a:ext cx="5303520" cy="292608"/>
-          </a:xfrm>
-          <a:prstGeom prst="rect">
-            <a:avLst/>
-          </a:prstGeom>
-          <a:noFill/>
-          <a:ln/>
-        </p:spPr>
-        <p:txBody>
-          <a:bodyPr wrap="square" rtlCol="0" anchor="ctr"/>
-          <a:lstStyle/>
-          <a:p>
-            <a:pPr indent="0" marL="0">
-              <a:buNone/>
-            </a:pPr>
-            <a:r>
-              <a:rPr lang="en-US" sz="1200" b="1" dirty="0">
-                <a:solidFill>
-                  <a:srgbClr val="FFFFFF"/>
-                </a:solidFill>
-              </a:rPr>
-              <a:t>$1.0M Exos stock (EAI units, Rule 504)</a:t>
-            </a:r>
-            <a:endParaRPr lang="en-US" sz="1200" dirty="0"/>
-          </a:p>
-        </p:txBody>
-      </p:sp>
-      <p:sp>
-        <p:nvSpPr>
-          <p:cNvPr id="18" name="Text 16"/>
-          <p:cNvSpPr txBox="1"/>
-          <p:nvPr/>
-        </p:nvSpPr>
-        <p:spPr>
-          <a:xfrm>
-            <a:off x="5989320" y="2487168"/>
-            <a:ext cx="2606040" cy="292608"/>
-          </a:xfrm>
-          <a:prstGeom prst="rect">
-            <a:avLst/>
-          </a:prstGeom>
-          <a:noFill/>
-          <a:ln/>
-        </p:spPr>
-        <p:txBody>
-          <a:bodyPr wrap="square" rtlCol="0" anchor="ctr"/>
-          <a:lstStyle/>
-          <a:p>
-            <a:pPr algn="r" indent="0" marL="0">
-              <a:buNone/>
-            </a:pPr>
-            <a:r>
-              <a:rPr lang="en-US" sz="1000" dirty="0">
-                <a:solidFill>
-                  <a:srgbClr val="888888"/>
-                </a:solidFill>
-              </a:rPr>
-              <a:t>at financing close (target Feb 15th)</a:t>
-            </a:r>
-            <a:endParaRPr lang="en-US" sz="1000" dirty="0"/>
-          </a:p>
-        </p:txBody>
-      </p:sp>
-      <p:sp>
-        <p:nvSpPr>
-          <p:cNvPr id="19" name="Shape 17"/>
-          <p:cNvSpPr/>
-          <p:nvPr/>
-        </p:nvSpPr>
-        <p:spPr>
-          <a:xfrm>
-            <a:off x="411480" y="2834640"/>
-            <a:ext cx="8321040" cy="365760"/>
-          </a:xfrm>
-          <a:prstGeom prst="rect">
-            <a:avLst/>
-          </a:prstGeom>
-          <a:solidFill>
-            <a:srgbClr val="212121"/>
-          </a:solidFill>
-          <a:ln w="12700">
-            <a:solidFill>
-              <a:srgbClr val="2A2A2A"/>
-            </a:solidFill>
-            <a:prstDash val="solid"/>
-          </a:ln>
-        </p:spPr>
-        <p:txBody>
-          <a:bodyPr/>
-          <a:p/>
-        </p:txBody>
-      </p:sp>
-      <p:sp>
-        <p:nvSpPr>
-          <p:cNvPr id="20" name="Text 18"/>
-          <p:cNvSpPr txBox="1"/>
-          <p:nvPr/>
-        </p:nvSpPr>
-        <p:spPr>
-          <a:xfrm>
-            <a:off x="548640" y="2871216"/>
-            <a:ext cx="5303520" cy="292608"/>
-          </a:xfrm>
-          <a:prstGeom prst="rect">
-            <a:avLst/>
-          </a:prstGeom>
-          <a:noFill/>
-          <a:ln/>
-        </p:spPr>
-        <p:txBody>
-          <a:bodyPr wrap="square" rtlCol="0" anchor="ctr"/>
-          <a:lstStyle/>
-          <a:p>
-            <a:pPr indent="0" marL="0">
-              <a:buNone/>
-            </a:pPr>
-            <a:r>
-              <a:rPr lang="en-US" sz="1200" b="1" dirty="0">
-                <a:solidFill>
-                  <a:srgbClr val="FFFFFF"/>
-                </a:solidFill>
-              </a:rPr>
-              <a:t>Capital in the new year — physical space and a second winder</a:t>
-            </a:r>
-            <a:endParaRPr lang="en-US" sz="1200" dirty="0"/>
-          </a:p>
-        </p:txBody>
-      </p:sp>
-      <p:sp>
-        <p:nvSpPr>
-          <p:cNvPr id="21" name="Text 19"/>
-          <p:cNvSpPr txBox="1"/>
-          <p:nvPr/>
-        </p:nvSpPr>
-        <p:spPr>
-          <a:xfrm>
-            <a:off x="5989320" y="2871216"/>
-            <a:ext cx="2606040" cy="292608"/>
-          </a:xfrm>
-          <a:prstGeom prst="rect">
-            <a:avLst/>
-          </a:prstGeom>
-          <a:noFill/>
-          <a:ln/>
-        </p:spPr>
-        <p:txBody>
-          <a:bodyPr wrap="square" rtlCol="0" anchor="ctr"/>
-          <a:lstStyle/>
-          <a:p>
-            <a:pPr algn="r" indent="0" marL="0">
-              <a:buNone/>
-            </a:pPr>
-            <a:r>
-              <a:rPr lang="en-US" sz="1000" dirty="0">
-                <a:solidFill>
-                  <a:srgbClr val="888888"/>
-                </a:solidFill>
-              </a:rPr>
-              <a:t>(amount TBD; committed at financing close)</a:t>
-            </a:r>
-            <a:endParaRPr lang="en-US" sz="1000" dirty="0"/>
-          </a:p>
-        </p:txBody>
-      </p:sp>
-      <p:sp>
-        <p:nvSpPr>
-          <p:cNvPr id="22" name="Shape 20"/>
-          <p:cNvSpPr/>
-          <p:nvPr/>
-        </p:nvSpPr>
-        <p:spPr>
-          <a:xfrm>
-            <a:off x="411480" y="3218688"/>
-            <a:ext cx="8321040" cy="365760"/>
-          </a:xfrm>
-          <a:prstGeom prst="rect">
-            <a:avLst/>
-          </a:prstGeom>
-          <a:solidFill>
-            <a:srgbClr val="1C1C1C"/>
-          </a:solidFill>
-          <a:ln w="12700">
-            <a:solidFill>
-              <a:srgbClr val="2A2A2A"/>
-            </a:solidFill>
-            <a:prstDash val="solid"/>
-          </a:ln>
-        </p:spPr>
-        <p:txBody>
-          <a:bodyPr/>
-          <a:p/>
-        </p:txBody>
-      </p:sp>
-      <p:sp>
-        <p:nvSpPr>
-          <p:cNvPr id="23" name="Text 21"/>
-          <p:cNvSpPr txBox="1"/>
-          <p:nvPr/>
-        </p:nvSpPr>
-        <p:spPr>
-          <a:xfrm>
-            <a:off x="548640" y="3255264"/>
-            <a:ext cx="5303520" cy="292608"/>
-          </a:xfrm>
-          <a:prstGeom prst="rect">
-            <a:avLst/>
-          </a:prstGeom>
-          <a:noFill/>
-          <a:ln/>
-        </p:spPr>
-        <p:txBody>
-          <a:bodyPr wrap="square" rtlCol="0" anchor="ctr"/>
-          <a:lstStyle/>
-          <a:p>
-            <a:pPr indent="0" marL="0">
-              <a:buNone/>
-            </a:pPr>
-            <a:r>
-              <a:rPr lang="en-US" sz="1200" b="1" dirty="0">
-                <a:solidFill>
-                  <a:srgbClr val="FFFFFF"/>
-                </a:solidFill>
-              </a:rPr>
-              <a:t>Employment offers + option pool</a:t>
-            </a:r>
-            <a:endParaRPr lang="en-US" sz="1200" dirty="0"/>
-          </a:p>
-        </p:txBody>
-      </p:sp>
-      <p:sp>
-        <p:nvSpPr>
-          <p:cNvPr id="24" name="Text 22"/>
-          <p:cNvSpPr txBox="1"/>
-          <p:nvPr/>
-        </p:nvSpPr>
-        <p:spPr>
-          <a:xfrm>
-            <a:off x="5989320" y="3255264"/>
-            <a:ext cx="2606040" cy="292608"/>
-          </a:xfrm>
-          <a:prstGeom prst="rect">
-            <a:avLst/>
-          </a:prstGeom>
-          <a:noFill/>
-          <a:ln/>
-        </p:spPr>
-        <p:txBody>
-          <a:bodyPr wrap="square" rtlCol="0" anchor="ctr"/>
-          <a:lstStyle/>
-          <a:p>
-            <a:pPr algn="r" indent="0" marL="0">
-              <a:buNone/>
-            </a:pPr>
-            <a:r>
-              <a:rPr lang="en-US" sz="1000" dirty="0">
-                <a:solidFill>
-                  <a:srgbClr val="888888"/>
-                </a:solidFill>
-              </a:rPr>
-              <a:t>at financing close (target Feb 15th)</a:t>
-            </a:r>
-            <a:endParaRPr lang="en-US" sz="1000" dirty="0"/>
-          </a:p>
-        </p:txBody>
-      </p:sp>
-      <p:sp>
-        <p:nvSpPr>
-          <p:cNvPr id="25" name="Shape 23"/>
-          <p:cNvSpPr/>
-          <p:nvPr/>
-        </p:nvSpPr>
-        <p:spPr>
-          <a:xfrm>
-            <a:off x="411480" y="3602736"/>
-            <a:ext cx="8321040" cy="365760"/>
-          </a:xfrm>
-          <a:prstGeom prst="rect">
-            <a:avLst/>
-          </a:prstGeom>
-          <a:solidFill>
-            <a:srgbClr val="212121"/>
-          </a:solidFill>
-          <a:ln w="12700">
-            <a:solidFill>
-              <a:srgbClr val="2A2A2A"/>
-            </a:solidFill>
-            <a:prstDash val="solid"/>
-          </a:ln>
-        </p:spPr>
-        <p:txBody>
-          <a:bodyPr/>
-          <a:p/>
-        </p:txBody>
-      </p:sp>
-      <p:sp>
-        <p:nvSpPr>
-          <p:cNvPr id="26" name="Text 24"/>
-          <p:cNvSpPr txBox="1"/>
-          <p:nvPr/>
-        </p:nvSpPr>
-        <p:spPr>
-          <a:xfrm>
-            <a:off x="548640" y="3639312"/>
-            <a:ext cx="5303520" cy="292608"/>
-          </a:xfrm>
-          <a:prstGeom prst="rect">
-            <a:avLst/>
-          </a:prstGeom>
-          <a:noFill/>
-          <a:ln/>
-        </p:spPr>
-        <p:txBody>
-          <a:bodyPr wrap="square" rtlCol="0" anchor="ctr"/>
-          <a:lstStyle/>
-          <a:p>
-            <a:pPr indent="0" marL="0">
-              <a:buNone/>
-            </a:pPr>
-            <a:r>
-              <a:rPr lang="en-US" sz="1200" b="1" dirty="0">
-                <a:solidFill>
-                  <a:srgbClr val="FFFFFF"/>
-                </a:solidFill>
-              </a:rPr>
-              <a:t>Earn-outs on milestones and tank revenue</a:t>
-            </a:r>
-            <a:endParaRPr lang="en-US" sz="1200" dirty="0"/>
-          </a:p>
-        </p:txBody>
-      </p:sp>
-      <p:sp>
-        <p:nvSpPr>
-          <p:cNvPr id="27" name="Text 25"/>
-          <p:cNvSpPr txBox="1"/>
-          <p:nvPr/>
-        </p:nvSpPr>
-        <p:spPr>
-          <a:xfrm>
-            <a:off x="5989320" y="3639312"/>
-            <a:ext cx="2606040" cy="292608"/>
-          </a:xfrm>
-          <a:prstGeom prst="rect">
-            <a:avLst/>
-          </a:prstGeom>
-          <a:noFill/>
-          <a:ln/>
-        </p:spPr>
-        <p:txBody>
-          <a:bodyPr wrap="square" rtlCol="0" anchor="ctr"/>
-          <a:lstStyle/>
-          <a:p>
-            <a:pPr algn="r" indent="0" marL="0">
-              <a:buNone/>
-            </a:pPr>
-            <a:r>
-              <a:rPr lang="en-US" sz="1000" dirty="0">
-                <a:solidFill>
-                  <a:srgbClr val="888888"/>
-                </a:solidFill>
-              </a:rPr>
-              <a:t>FY27–FY31 as triggered</a:t>
-            </a:r>
-            <a:endParaRPr lang="en-US" sz="1000" dirty="0"/>
-          </a:p>
-        </p:txBody>
-      </p:sp>
-      <p:sp>
-        <p:nvSpPr>
-          <p:cNvPr id="28" name="Shape 26"/>
-          <p:cNvSpPr/>
-          <p:nvPr/>
-        </p:nvSpPr>
-        <p:spPr>
-          <a:xfrm>
-            <a:off x="365760" y="4078224"/>
-            <a:ext cx="8412480" cy="594360"/>
-          </a:xfrm>
-          <a:prstGeom prst="rect">
-            <a:avLst/>
-          </a:prstGeom>
-          <a:solidFill>
-            <a:srgbClr val="2A1000"/>
-          </a:solidFill>
-          <a:ln w="12700">
-            <a:solidFill>
-              <a:srgbClr val="F26A21"/>
-            </a:solidFill>
-            <a:prstDash val="solid"/>
-          </a:ln>
-        </p:spPr>
-        <p:txBody>
-          <a:bodyPr/>
-          <a:p/>
-        </p:txBody>
-      </p:sp>
-      <p:sp>
-        <p:nvSpPr>
-          <p:cNvPr id="29" name="Text 27"/>
-          <p:cNvSpPr txBox="1"/>
-          <p:nvPr/>
-        </p:nvSpPr>
-        <p:spPr>
-          <a:xfrm>
-            <a:off x="502920" y="4142232"/>
-            <a:ext cx="8229600" cy="457200"/>
-          </a:xfrm>
-          <a:prstGeom prst="rect">
-            <a:avLst/>
-          </a:prstGeom>
-          <a:noFill/>
-          <a:ln/>
-        </p:spPr>
-        <p:txBody>
-          <a:bodyPr wrap="square" rtlCol="0" anchor="ctr"/>
-          <a:lstStyle/>
-          <a:p>
-            <a:pPr algn="ctr" indent="0" marL="0">
-              <a:buNone/>
-            </a:pPr>
-            <a:r>
-              <a:rPr lang="en-US" sz="1500" b="1" dirty="0">
-                <a:solidFill>
-                  <a:srgbClr val="F26A21"/>
-                </a:solidFill>
-              </a:rPr>
-              <a:t>One decision today: confirm §3 exclusivity  →  90 days  →  financing close target Feb 15th</a:t>
-            </a:r>
-            <a:endParaRPr lang="en-US" sz="1500" dirty="0"/>
-          </a:p>
-        </p:txBody>
-      </p:sp>
-      <p:pic>
-        <p:nvPicPr>
-          <p:cNvPr id="30" name="Image 0" descr="/Users/exomac/.openclaw/workspace/drafts/_exos_white_official.png">    </p:cNvPr>
-          <p:cNvPicPr>
-            <a:picLocks noChangeAspect="1"/>
-          </p:cNvPicPr>
-          <p:nvPr/>
-        </p:nvPicPr>
-        <p:blipFill>
-          <a:blip r:embed="rId1"/>
-          <a:stretch>
-            <a:fillRect/>
-          </a:stretch>
-        </p:blipFill>
-        <p:spPr>
-          <a:xfrm>
-            <a:off x="228600" y="4754880"/>
-            <a:ext cx="1188720" cy="256032"/>
-          </a:xfrm>
-          <a:prstGeom prst="rect">
-            <a:avLst/>
-          </a:prstGeom>
-        </p:spPr>
-      </p:pic>
-      <p:sp>
-        <p:nvSpPr>
-          <p:cNvPr id="31" name="Text 28"/>
-          <p:cNvSpPr txBox="1"/>
-          <p:nvPr/>
-        </p:nvSpPr>
-        <p:spPr>
-          <a:xfrm>
-            <a:off x="1554480" y="4800600"/>
-            <a:ext cx="6035040" cy="228600"/>
-          </a:xfrm>
-          <a:prstGeom prst="rect">
-            <a:avLst/>
-          </a:prstGeom>
-          <a:noFill/>
-          <a:ln/>
-        </p:spPr>
-        <p:txBody>
-          <a:bodyPr wrap="square" rtlCol="0" anchor="ctr"/>
-          <a:lstStyle/>
-          <a:p>
-            <a:pPr algn="ctr" indent="0" marL="0">
-              <a:buNone/>
-            </a:pPr>
-            <a:r>
-              <a:rPr lang="en-US" sz="700" i="1" dirty="0">
-                <a:solidFill>
-                  <a:srgbClr val="888888"/>
-                </a:solidFill>
-              </a:rPr>
-              <a:t>DRAFT — NEGOTIATING TERMS</a:t>
-            </a:r>
-            <a:endParaRPr lang="en-US" sz="700" dirty="0"/>
-          </a:p>
-        </p:txBody>
-      </p:sp>
-      <p:sp>
-        <p:nvSpPr>
-          <p:cNvPr id="32" name="Text 29"/>
           <p:cNvSpPr txBox="1"/>
           <p:nvPr/>
         </p:nvSpPr>

--- a/drafts/Exos_SSLC_Board_Offer_Overview_2026-10-10_r2.pptx
+++ b/drafts/Exos_SSLC_Board_Offer_Overview_2026-10-10_r2.pptx
@@ -3839,6 +3839,17 @@
               <a:t>confirmatory diligence.  Confidential under the 7/27/2021 NDA.</a:t>
             </a:r>
           </a:p>
+          <a:p>
+            <a:r>
+              <a:rPr lang="en-US" sz="800" b="1" dirty="0">
+                <a:solidFill>
+                  <a:srgbClr val="F26A21"/>
+                </a:solidFill>
+                <a:latin typeface="Calibri"/>
+              </a:rPr>
+              <a:t>Access to be granted no later than October 15, 2026.</a:t>
+            </a:r>
+          </a:p>
         </p:txBody>
       </p:sp>
       <p:sp>

--- a/drafts/Exos_SSLC_Board_Offer_Overview_2026-10-10_r2.pptx
+++ b/drafts/Exos_SSLC_Board_Offer_Overview_2026-10-10_r2.pptx
@@ -687,59 +687,43 @@
           <a:lstStyle/>
           <a:p>
             <a:r>
-              <a:t>Sources:</a:t>
+              <a:t>Source: SSLC QB Balance Sheet 10/11/2026 (data-room/SSLC/qb-2026-10-11/SSLC_Balance_Sheet.xlsx).</a:t>
             </a:r>
             <a:br/>
             <a:r>
-              <a:t>  Equity: QB Balance Sheet 8/21/2026 (data-room/SSLC/2026-7_BS_8-21-26.pdf). Total paid-in $1,014,465; Exos paid $789,572 per AAA Oct 2023.</a:t>
+              <a:t>Cash $590,344; AR Unbilled (billed-ahead) −$942,177; deposits $120,000.</a:t>
             </a:r>
             <a:br/>
             <a:r>
-              <a:t>  Accum. deficit −$2,571,012.99 per QB BS 8/21/2026.</a:t>
+              <a:t>Loans &amp; notes $1,027,783 unchanged by lender.</a:t>
             </a:r>
             <a:br/>
             <a:r>
-              <a:t>  Total equity −$1,403,075 per Board Package 10/6/2026.</a:t>
+              <a:t>Total liabilities $1,296,521.</a:t>
             </a:r>
             <a:br/>
             <a:r>
-              <a:t>  Debt: Board Package 10/6/2026 + QB BS 8/21. Total loans &amp; notes $1,027,783 confirmed.</a:t>
+              <a:t>Paid-in capital $1,014,465 (unchanged).</a:t>
             </a:r>
             <a:br/>
             <a:r>
-              <a:t>  Facility costs: QB P&amp;L FY26 CONFIRMED $353,978; FY27 Jul–Aug21 $32,860 (partial).</a:t>
+              <a:t>Retained earnings −$2,571,013; FY27 YTD net income +$112,666.</a:t>
             </a:r>
             <a:br/>
             <a:r>
-              <a:t>  2-yr ~$967K estimate uses FY26 monthly rate ~$29.5K/mo for the remainder; CAVEAT: FY25 not on disk.</a:t>
+              <a:t>Total equity −$1,443,882 (10/11/2026).</a:t>
             </a:r>
             <a:br/>
             <a:r>
-              <a:t>  Microcosm offset: 50% share is MANAGEMENT ASSUMPTION — no written cost-sharing agreement found.</a:t>
+              <a:t>Exos loan $31,200 principal; ~$38,158 with 11% interest at 10/2. Board DENIED license; loan STANDS.</a:t>
             </a:r>
             <a:br/>
             <a:r>
-              <a:t>  Must verify: (1) SSLC paid 100% of costs, (2) written agreement, (3) Microcosm's share allocation.</a:t>
+              <a:t>Billed-ahead $942,177: Exos assessment is overstated; 40% start-billings not cleared at shipment; est. ~$100–200K genuinely in progress.</a:t>
             </a:r>
             <a:br/>
             <a:r>
-              <a:t>  At 50% share offset ~$483K &gt; Due-to-Microcosm $451K → net creditor ~$32K.</a:t>
-            </a:r>
-            <a:br/>
-            <a:r>
-              <a:t>  At 40%: net-owe ~$65K; at 60%: net creditor ~$129K.</a:t>
-            </a:r>
-            <a:br/>
-            <a:r>
-              <a:t>  $864K billed-ahead balance: from QB FY27 Q1 actual. Nature disputed; full QB access requested.</a:t>
-            </a:r>
-            <a:br/>
-            <a:r>
-              <a:t>  CAUTION: Do not represent offset as a verified legal claim without written agreement.</a:t>
-            </a:r>
-            <a:br/>
-            <a:r>
-              <a:t>Source file: drafts/SSLC_QB_Equity_Debt_Microcosm_Facility_2026-10-10.xlsx</a:t>
+              <a:t>Facility ~$805K since Jan 2024: rent $725K + other; doubled to ~$23.6K/mo Jul 2024. Paid via Microcosm invoices through Dec 2025, then directly to landlords. Never charged back to Microcosm on SSLC's books; Microcosm receivable = $3,529; loan to Microcosm = $0.</a:t>
             </a:r>
           </a:p>
         </p:txBody>
@@ -1002,8 +986,27 @@
           <a:lstStyle/>
           <a:p>
             <a:r>
-              <a:rPr lang="en-US" dirty="0"/>
-              <a:t>These are SSLC's own numbers, presented factually and respectfully. The $198K cash figure is from the email draft. The $713K last quarter is from the offer summary. The $5.1M milestone (M1) requires nearly double that quarterly pace starting immediately — this is the context for why the Exos offer provides meaningful value through financing close and earn-out structure.</a:t>
+              <a:t>Source: SSLC QuickBooks Balance Sheet 10/11/2026 (data-room/SSLC/qb-2026-10-11/SSLC_Balance_Sheet.xlsx).</a:t>
+            </a:r>
+            <a:br/>
+            <a:r>
+              <a:t>Cash $590,344 — almost entirely from one IM payment $421,421 on 10/7 for invoices 109-86/87/88 booked 9/25–9/30.</a:t>
+            </a:r>
+            <a:br/>
+            <a:r>
+              <a:t>$713K last quarter from offer summary (unchanged).</a:t>
+            </a:r>
+            <a:br/>
+            <a:r>
+              <a:t>$5.1M M1 milestone requires ~2× quarterly pace starting Oct 1st.</a:t>
+            </a:r>
+            <a:br/>
+            <a:r>
+              <a:t>$1.03M loans &amp; notes (unchanged by lender); equity −$1,443,882.</a:t>
+            </a:r>
+            <a:br/>
+            <a:r>
+              <a:t>Physical-space and single-winder constraints are SSLC's own reported challenges.</a:t>
             </a:r>
             <a:endParaRPr lang="en-US" dirty="0"/>
           </a:p>
@@ -3814,7 +3817,7 @@
                 </a:solidFill>
                 <a:latin typeface="Calibri"/>
               </a:rPr>
-              <a:t>Purpose: reconcile the $864K "billed-ahead" balance and shared-facility costs (Microcosm</a:t>
+              <a:t>Purpose: reconcile the $942K "billed-ahead" balance and shared-facility costs (Microcosm</a:t>
             </a:r>
           </a:p>
           <a:p>
@@ -5785,6 +5788,10 @@
           </a:solidFill>
           <a:ln/>
         </p:spPr>
+        <p:txBody>
+          <a:bodyPr/>
+          <a:p/>
+        </p:txBody>
       </p:sp>
       <p:sp>
         <p:nvSpPr>
@@ -5810,6 +5817,10 @@
             <a:prstDash val="solid"/>
           </a:ln>
         </p:spPr>
+        <p:txBody>
+          <a:bodyPr/>
+          <a:p/>
+        </p:txBody>
       </p:sp>
       <p:sp>
         <p:nvSpPr>
@@ -5841,7 +5852,7 @@
                   <a:srgbClr val="FFFFFF"/>
                 </a:solidFill>
               </a:rPr>
-              <a:t>$198K</a:t>
+              <a:t>$590K</a:t>
             </a:r>
             <a:endParaRPr lang="en-US" sz="3400" dirty="0"/>
           </a:p>
@@ -5877,7 +5888,7 @@
                   <a:srgbClr val="CCCCCC"/>
                 </a:solidFill>
               </a:rPr>
-              <a:t>Cash on hand</a:t>
+              <a:t>Cash at 10/11</a:t>
             </a:r>
             <a:endParaRPr lang="en-US" sz="1300" dirty="0"/>
           </a:p>
@@ -5913,7 +5924,7 @@
                   <a:srgbClr val="888888"/>
                 </a:solidFill>
               </a:rPr>
-              <a:t>Current working capital</a:t>
+              <a:t>One IM payment 10/7</a:t>
             </a:r>
             <a:endParaRPr lang="en-US" sz="1100" dirty="0"/>
           </a:p>
@@ -5943,6 +5954,10 @@
             <a:prstDash val="solid"/>
           </a:ln>
         </p:spPr>
+        <p:txBody>
+          <a:bodyPr/>
+          <a:p/>
+        </p:txBody>
       </p:sp>
       <p:sp>
         <p:nvSpPr>
@@ -6076,6 +6091,10 @@
             <a:prstDash val="solid"/>
           </a:ln>
         </p:spPr>
+        <p:txBody>
+          <a:bodyPr/>
+          <a:p/>
+        </p:txBody>
       </p:sp>
       <p:sp>
         <p:nvSpPr>
@@ -6209,6 +6228,10 @@
             <a:prstDash val="solid"/>
           </a:ln>
         </p:spPr>
+        <p:txBody>
+          <a:bodyPr/>
+          <a:p/>
+        </p:txBody>
       </p:sp>
       <p:sp>
         <p:nvSpPr>
@@ -6240,7 +6263,7 @@
                   <a:srgbClr val="CCCCCC"/>
                 </a:solidFill>
               </a:rPr>
-              <a:t>A $5.1M fiscal year requires approximately $1.46M per quarter — nearly double last quarter's pace of $713K — starting Oct 1st. Exos's offer removes the funding risk, solves the physical-space and single-winder constraints (with capital in the new year), and gives SSLC holders direct upside.</a:t>
+              <a:t>$590K cash at 10/11 came largely from one Intuitive Machines payment on 10/7 for start-billed tanks; a $5.1M year still requires ~2× last quarter's pace starting now. With $1.03M of debt, equity of −$1.44M, and physical-space and single-winder constraints, Exos's offer removes the funding risk and gives SSLC holders direct upside.</a:t>
             </a:r>
             <a:endParaRPr lang="en-US" sz="1300" dirty="0"/>
           </a:p>
@@ -6769,7 +6792,7 @@
                 </a:solidFill>
                 <a:latin typeface="Calibri"/>
               </a:rPr>
-              <a:t>WHAT SSLC OWES  (10/2/2026)</a:t>
+              <a:t>WHAT SSLC OWES  (10/11/2026)</a:t>
             </a:r>
           </a:p>
         </p:txBody>
@@ -7240,7 +7263,7 @@
                 </a:solidFill>
                 <a:latin typeface="Calibri"/>
               </a:rPr>
-              <a:t>Total equity (10/2/2026)</a:t>
+              <a:t>FY27 YTD net income (10/11)</a:t>
             </a:r>
           </a:p>
         </p:txBody>
@@ -7271,11 +7294,11 @@
             <a:r>
               <a:rPr sz="900" b="1" i="0">
                 <a:solidFill>
-                  <a:srgbClr val="FF6666"/>
+                  <a:srgbClr val="44BB44"/>
                 </a:solidFill>
                 <a:latin typeface="Calibri"/>
               </a:rPr>
-              <a:t>−$1,403,075</a:t>
+              <a:t>+$112,666</a:t>
             </a:r>
           </a:p>
         </p:txBody>
@@ -7703,7 +7726,7 @@
                 </a:solidFill>
                 <a:latin typeface="Calibri"/>
               </a:rPr>
-              <a:t>Exos loan (11%, Acct 2720)</a:t>
+              <a:t>Exos loan (11%; stands)</a:t>
             </a:r>
           </a:p>
         </p:txBody>
@@ -7738,7 +7761,7 @@
                 </a:solidFill>
                 <a:latin typeface="Calibri"/>
               </a:rPr>
-              <a:t>$31,200</a:t>
+              <a:t>$31,200 (~$38K+int)</a:t>
             </a:r>
           </a:p>
         </p:txBody>
@@ -7816,7 +7839,7 @@
                 </a:solidFill>
                 <a:latin typeface="Calibri"/>
               </a:rPr>
-              <a:t>Total liabilities (10/2)</a:t>
+              <a:t>Total liabilities (10/11)</a:t>
             </a:r>
           </a:p>
         </p:txBody>
@@ -7851,7 +7874,7 @@
                 </a:solidFill>
                 <a:latin typeface="Calibri"/>
               </a:rPr>
-              <a:t>$1,275,622</a:t>
+              <a:t>$1,296,521</a:t>
             </a:r>
           </a:p>
         </p:txBody>
@@ -7972,7 +7995,7 @@
                 </a:solidFill>
                 <a:latin typeface="Calibri"/>
               </a:rPr>
-              <a:t>UNBOOKED OFFSET  (illustrative — no written cost-sharing agreement on file)</a:t>
+              <a:t>OPEN ITEMS  (Exos assessment pending reconciliation via Motion 2)</a:t>
             </a:r>
           </a:p>
         </p:txBody>
@@ -8007,7 +8030,7 @@
                 </a:solidFill>
                 <a:latin typeface="Calibri"/>
               </a:rPr>
-              <a:t>SSLC has paid ~100% of shared Torrance facility costs: ~$354K in FY26 (rent $294K + utilities $31K + other), ~$967K est. Jan 2024–Oct 2026.  At a 50% Microcosm share (illustrative) → ~$483K offsets $451K due to Microcosm = SSLC net creditor ~$32K.  "$864K 'billed-ahead' balance disputed; under review (full QuickBooks access requested)."</a:t>
+              <a:t>"Billed-ahead" balance: $942,177 booked as of 10/11. Exos's assessment: overstated — SSLC bills IM ~40% at tank start; those start-billings appear not cleared at shipment. Est. ~$100–200K genuinely in progress. Reconciliation requested via Motion 2.  |  Facility costs since Jan 2024: ~$805K (rent $725K + other; doubled to ~$23.6K/mo Jul 2024). Never charged back to Microcosm on SSLC's books.</a:t>
             </a:r>
           </a:p>
         </p:txBody>
@@ -8042,7 +8065,7 @@
                 </a:solidFill>
                 <a:latin typeface="Calibri"/>
               </a:rPr>
-              <a:t>per SSLC QuickBooks 8/21 and 10/2/2026; Microcosm offset illustrative</a:t>
+              <a:t>per SSLC QuickBooks 10/11/2026; Exos billed-ahead assessment pending reconciliation</a:t>
             </a:r>
           </a:p>
         </p:txBody>
@@ -8113,6 +8136,118 @@
                 <a:latin typeface="Calibri"/>
               </a:rPr>
               <a:t>CONFIDENTIAL</a:t>
+            </a:r>
+          </a:p>
+        </p:txBody>
+      </p:sp>
+      <p:sp>
+        <p:nvSpPr>
+          <p:cNvPr id="49" name="Rectangle 48"/>
+          <p:cNvSpPr/>
+          <p:nvPr/>
+        </p:nvSpPr>
+        <p:spPr>
+          <a:xfrm>
+            <a:off x="329184" y="2679191"/>
+            <a:ext cx="2459736" cy="13716"/>
+          </a:xfrm>
+          <a:prstGeom prst="rect">
+            <a:avLst/>
+          </a:prstGeom>
+          <a:solidFill>
+            <a:srgbClr val="888888"/>
+          </a:solidFill>
+          <a:ln>
+            <a:noFill/>
+          </a:ln>
+        </p:spPr>
+        <p:style>
+          <a:lnRef idx="1">
+            <a:schemeClr val="accent1"/>
+          </a:lnRef>
+          <a:fillRef idx="3">
+            <a:schemeClr val="accent1"/>
+          </a:fillRef>
+          <a:effectRef idx="2">
+            <a:schemeClr val="accent1"/>
+          </a:effectRef>
+          <a:fontRef idx="minor">
+            <a:schemeClr val="lt1"/>
+          </a:fontRef>
+        </p:style>
+        <p:txBody>
+          <a:bodyPr rtlCol="0" anchor="ctr"/>
+          <a:lstStyle/>
+          <a:p>
+            <a:pPr algn="ctr"/>
+          </a:p>
+        </p:txBody>
+      </p:sp>
+      <p:sp>
+        <p:nvSpPr>
+          <p:cNvPr id="50" name="TextBox 49"/>
+          <p:cNvSpPr txBox="1"/>
+          <p:nvPr/>
+        </p:nvSpPr>
+        <p:spPr>
+          <a:xfrm>
+            <a:off x="219456" y="2697479"/>
+            <a:ext cx="2514600" cy="205740"/>
+          </a:xfrm>
+          <a:prstGeom prst="rect">
+            <a:avLst/>
+          </a:prstGeom>
+          <a:noFill/>
+        </p:spPr>
+        <p:txBody>
+          <a:bodyPr wrap="none">
+            <a:spAutoFit/>
+          </a:bodyPr>
+          <a:lstStyle/>
+          <a:p>
+            <a:r>
+              <a:rPr sz="800" b="0">
+                <a:solidFill>
+                  <a:srgbClr val="CCCCCC"/>
+                </a:solidFill>
+                <a:latin typeface="Calibri"/>
+              </a:rPr>
+              <a:t>Total equity (10/11/2026)</a:t>
+            </a:r>
+          </a:p>
+        </p:txBody>
+      </p:sp>
+      <p:sp>
+        <p:nvSpPr>
+          <p:cNvPr id="51" name="TextBox 50"/>
+          <p:cNvSpPr txBox="1"/>
+          <p:nvPr/>
+        </p:nvSpPr>
+        <p:spPr>
+          <a:xfrm>
+            <a:off x="2752344" y="2697479"/>
+            <a:ext cx="1481328" cy="205740"/>
+          </a:xfrm>
+          <a:prstGeom prst="rect">
+            <a:avLst/>
+          </a:prstGeom>
+          <a:noFill/>
+        </p:spPr>
+        <p:txBody>
+          <a:bodyPr wrap="none">
+            <a:spAutoFit/>
+          </a:bodyPr>
+          <a:lstStyle/>
+          <a:p>
+            <a:pPr algn="r"/>
+            <a:r>
+              <a:rPr sz="900" b="1">
+                <a:solidFill>
+                  <a:srgbClr val="FF6666"/>
+                </a:solidFill>
+                <a:latin typeface="Calibri"/>
+              </a:rPr>
+              <a:t>−$1,443,882</a:t>
             </a:r>
           </a:p>
         </p:txBody>

--- a/drafts/Exos_SSLC_Board_Offer_Overview_2026-10-10_r2.pptx
+++ b/drafts/Exos_SSLC_Board_Offer_Overview_2026-10-10_r2.pptx
@@ -600,7 +600,7 @@
           <a:lstStyle/>
           <a:p>
             <a:r>
-              <a:t>The three actions needed today: (1) confirm §3 exclusivity — starts the 90-day window; (2) grant full read-only QB access for reconciliation of the $864K balance and facility costs; (3) consent to ERP/inventory evaluation using the same data. All confidential under the 7/27/2021 NDA. Once Motion 1 is confirmed, the 90-day exclusivity period begins. Financing close target: Feb 15th.</a:t>
+              <a:t>Four actions needed today: (1) confirm §3 exclusivity — starts 90-day window; (2) grant full read-only QB access (Oct 15 deadline); (3) direct accounting firm to correct AR Unbilled + Deposits within 5 days; (4) consent to ERP/MRP evaluation. All confidential under the 7/27/2021 NDA. Financing close target: Feb 15th.</a:t>
             </a:r>
             <a:endParaRPr lang="en-US" dirty="0"/>
           </a:p>
@@ -793,27 +793,32 @@
           <a:lstStyle/>
           <a:p>
             <a:r>
-              <a:t>Three separate motions for the SSLC Board:</a:t>
+              <a:t>Four motions for the SSLC Board:</a:t>
             </a:r>
             <a:br/>
             <a:br/>
             <a:r>
-              <a:t>Motion 1: §3 exclusivity confirmation under May 2025 Asset Acquisition Agreement. 90-day period begins on board approval; extension not unreasonably withheld. This is the gate for diligence, definitive agreement, and financing close.</a:t>
+              <a:t>Motion 1: §3 exclusivity — 90-day period begins on board approval (May 2025 AAA).</a:t>
             </a:r>
             <a:br/>
             <a:br/>
             <a:r>
-              <a:t>Motion 2: Full read-only QB Online access — accountant or all-access user — for John Quinn and one Exos finance reviewer. Legal basis: Cal. Corp. Code §1602 (director inspection right) + AAA §4 confirmatory diligence. Confidential under the 7/27/2021 NDA. Purpose: reconcile the $864K 'billed-ahead' balance (FY27 Q1 QB) and verify the shared Microcosm facility-cost offset before close.</a:t>
+              <a:t>Motion 2: Full read-only QB Online access for John Quinn + one Exos finance reviewer. Cal. Corp. Code §1602 + AAA §4. NDA-confidential. Oct 15, 2026 deadline.</a:t>
             </a:r>
             <a:br/>
             <a:br/>
             <a:r>
-              <a:t>Motion 3 (separate): Consent to Exos using the same QB data to evaluate its ERP/MRP and inventory systems for the combined operation. Evaluation only — no obligation to implement. Confidential under the NDA.</a:t>
+              <a:t>Motion 3: Direct A La Carte Solutions (bookkeeper) + Singer Lewak / Welch &amp; Co. to reconcile and correct Acct 1110 AR Unbilled ($942,177) and Acct 2380 Deposits ($120,000) within 5 days. Must clear completed/shipped tank billings, post missing Jul–Sep 2026 revenue-recognition entries, tank-by-tank reconciliation (IM-109/122/134, EXOS-133), corrected balance sheet delivered to all directors.</a:t>
             </a:r>
             <a:br/>
             <a:br/>
             <a:r>
-              <a:t>Governance: John Quinn is an interested director (Exos is the offeror and Quinn holds an Exos loan to SSLC). He abstains on all three motions; each is decided by the disinterested directors.</a:t>
+              <a:t>Motion 4 (separate): Consent to Exos using QB data to evaluate ERP/MRP and inventory systems for combined operation. Evaluation only; NDA-confidential.</a:t>
+            </a:r>
+            <a:br/>
+            <a:br/>
+            <a:r>
+              <a:t>Governance: John Quinn abstains as interested director (Exos is offeror; Quinn holds Exos loan to SSLC).</a:t>
             </a:r>
           </a:p>
         </p:txBody>
@@ -883,23 +888,27 @@
           <a:lstStyle/>
           <a:p>
             <a:r>
-              <a:t>The three actions requested of the SSLC board at this meeting:</a:t>
+              <a:t>Four actions requested of the SSLC board:</a:t>
             </a:r>
             <a:br/>
             <a:r>
-              <a:t>  Motion 1: Confirm §3 exclusivity under the May 2025 Asset Acquisition Agreement. 90-day period begins on approval.</a:t>
+              <a:t>  Motion 1: Confirm §3 exclusivity. 90-day period begins on approval.</a:t>
             </a:r>
             <a:br/>
             <a:r>
-              <a:t>  Motion 2: Grant full read-only QuickBooks Online access to John Quinn and Exos's finance reviewer to reconcile the $864K 'billed-ahead' balance and shared-facility costs. Basis: Cal. Corp. Code §1602 inspection right + AAA confirmatory diligence. Confidential under the 7/27/2021 NDA.</a:t>
+              <a:t>  Motion 2: Grant full read-only QB Online access (Oct 15 deadline). §1602 + AAA §4. NDA.</a:t>
             </a:r>
             <a:br/>
             <a:r>
-              <a:t>  Motion 3: Consent to Exos using the same QB data to evaluate its in-house ERP/MRP and inventory systems for the combined operation. Confidential under the NDA.</a:t>
+              <a:t>  Motion 3: Direct A La Carte Solutions + outside CPAs to reconcile and correct AR Unbilled ($942K) and Deposits ($120K) within 5 days.</a:t>
             </a:r>
             <a:br/>
             <a:r>
-              <a:t>Governance: John Quinn abstains on all motions as an interested director.</a:t>
+              <a:t>  Motion 4: Consent to ERP/MRP &amp; inventory evaluation using QB data. NDA.</a:t>
+            </a:r>
+            <a:br/>
+            <a:r>
+              <a:t>Governance: John Quinn abstains as interested director.</a:t>
             </a:r>
             <a:endParaRPr lang="en-US" dirty="0"/>
           </a:p>
@@ -3305,7 +3314,7 @@
         <p:spPr>
           <a:xfrm>
             <a:off x="228600" y="457200"/>
-            <a:ext cx="1371600" cy="36576"/>
+            <a:ext cx="1371600" cy="32004"/>
           </a:xfrm>
           <a:prstGeom prst="rect">
             <a:avLst/>
@@ -3347,8 +3356,8 @@
         </p:nvSpPr>
         <p:spPr>
           <a:xfrm>
-            <a:off x="182880" y="530352"/>
-            <a:ext cx="8778240" cy="1261872"/>
+            <a:off x="182880" y="512064"/>
+            <a:ext cx="8778240" cy="896112"/>
           </a:xfrm>
           <a:prstGeom prst="rect">
             <a:avLst/>
@@ -3390,8 +3399,8 @@
         </p:nvSpPr>
         <p:spPr>
           <a:xfrm>
-            <a:off x="182880" y="530352"/>
-            <a:ext cx="50292" cy="1261872"/>
+            <a:off x="182880" y="512064"/>
+            <a:ext cx="50292" cy="896112"/>
           </a:xfrm>
           <a:prstGeom prst="rect">
             <a:avLst/>
@@ -3427,216 +3436,20 @@
       </p:sp>
       <p:sp>
         <p:nvSpPr>
-          <p:cNvPr id="7" name="TextBox 6"/>
-          <p:cNvSpPr txBox="1"/>
-          <p:nvPr/>
-        </p:nvSpPr>
-        <p:spPr>
-          <a:xfrm>
-            <a:off x="274320" y="603503"/>
-            <a:ext cx="457200" cy="457200"/>
-          </a:xfrm>
-          <a:prstGeom prst="rect">
-            <a:avLst/>
-          </a:prstGeom>
-          <a:noFill/>
-        </p:spPr>
-        <p:txBody>
-          <a:bodyPr wrap="square">
-            <a:spAutoFit/>
-          </a:bodyPr>
-          <a:lstStyle/>
-          <a:p>
-            <a:pPr algn="l"/>
-            <a:r>
-              <a:rPr sz="2600" b="1" i="0">
-                <a:solidFill>
-                  <a:srgbClr val="F26A21"/>
-                </a:solidFill>
-                <a:latin typeface="Cambria"/>
-              </a:rPr>
-              <a:t>1</a:t>
-            </a:r>
-          </a:p>
-        </p:txBody>
-      </p:sp>
-      <p:sp>
-        <p:nvSpPr>
-          <p:cNvPr id="8" name="TextBox 7"/>
-          <p:cNvSpPr txBox="1"/>
-          <p:nvPr/>
-        </p:nvSpPr>
-        <p:spPr>
-          <a:xfrm>
-            <a:off x="804672" y="612647"/>
-            <a:ext cx="6583680" cy="274320"/>
-          </a:xfrm>
-          <a:prstGeom prst="rect">
-            <a:avLst/>
-          </a:prstGeom>
-          <a:noFill/>
-        </p:spPr>
-        <p:txBody>
-          <a:bodyPr wrap="square">
-            <a:spAutoFit/>
-          </a:bodyPr>
-          <a:lstStyle/>
-          <a:p>
-            <a:pPr algn="l"/>
-            <a:r>
-              <a:rPr sz="1100" b="1" i="0">
-                <a:solidFill>
-                  <a:srgbClr val="FFFFFF"/>
-                </a:solidFill>
-                <a:latin typeface="Calibri"/>
-              </a:rPr>
-              <a:t>Confirm §3 Exclusivity (May 2025 Asset Acquisition Agreement)</a:t>
-            </a:r>
-          </a:p>
-        </p:txBody>
-      </p:sp>
-      <p:sp>
-        <p:nvSpPr>
-          <p:cNvPr id="9" name="TextBox 8"/>
-          <p:cNvSpPr txBox="1"/>
-          <p:nvPr/>
-        </p:nvSpPr>
-        <p:spPr>
-          <a:xfrm>
-            <a:off x="804672" y="914400"/>
-            <a:ext cx="6217920" cy="786383"/>
-          </a:xfrm>
-          <a:prstGeom prst="rect">
-            <a:avLst/>
-          </a:prstGeom>
-          <a:noFill/>
-        </p:spPr>
-        <p:txBody>
-          <a:bodyPr wrap="square">
-            <a:spAutoFit/>
-          </a:bodyPr>
-          <a:lstStyle/>
-          <a:p>
-            <a:r>
-              <a:rPr sz="800">
-                <a:solidFill>
-                  <a:srgbClr val="CCCCCC"/>
-                </a:solidFill>
-                <a:latin typeface="Calibri"/>
-              </a:rPr>
-              <a:t>Approve a 90-day exclusivity period beginning on the date of this approval.</a:t>
-            </a:r>
-          </a:p>
-          <a:p>
-            <a:r>
-              <a:rPr sz="800">
-                <a:solidFill>
-                  <a:srgbClr val="CCCCCC"/>
-                </a:solidFill>
-                <a:latin typeface="Calibri"/>
-              </a:rPr>
-              <a:t>Extension not unreasonably withheld (per §3). Allows both parties to proceed to</a:t>
-            </a:r>
-          </a:p>
-          <a:p>
-            <a:r>
-              <a:rPr sz="800">
-                <a:solidFill>
-                  <a:srgbClr val="CCCCCC"/>
-                </a:solidFill>
-                <a:latin typeface="Calibri"/>
-              </a:rPr>
-              <a:t>diligence, definitive agreement, and financing close (target: Feb 15th, 2027).</a:t>
-            </a:r>
-          </a:p>
-        </p:txBody>
-      </p:sp>
-      <p:sp>
-        <p:nvSpPr>
-          <p:cNvPr id="10" name="TextBox 9"/>
-          <p:cNvSpPr txBox="1"/>
-          <p:nvPr/>
-        </p:nvSpPr>
-        <p:spPr>
-          <a:xfrm>
-            <a:off x="7452359" y="713232"/>
-            <a:ext cx="1371600" cy="256032"/>
-          </a:xfrm>
-          <a:prstGeom prst="rect">
-            <a:avLst/>
-          </a:prstGeom>
-          <a:noFill/>
-        </p:spPr>
-        <p:txBody>
-          <a:bodyPr wrap="square">
-            <a:spAutoFit/>
-          </a:bodyPr>
-          <a:lstStyle/>
-          <a:p>
-            <a:pPr algn="l"/>
-            <a:r>
-              <a:rPr sz="900" b="0" i="0">
-                <a:solidFill>
-                  <a:srgbClr val="44BB44"/>
-                </a:solidFill>
-                <a:latin typeface="Calibri"/>
-              </a:rPr>
-              <a:t>☐  Approve</a:t>
-            </a:r>
-          </a:p>
-        </p:txBody>
-      </p:sp>
-      <p:sp>
-        <p:nvSpPr>
-          <p:cNvPr id="11" name="TextBox 10"/>
-          <p:cNvSpPr txBox="1"/>
-          <p:nvPr/>
-        </p:nvSpPr>
-        <p:spPr>
-          <a:xfrm>
-            <a:off x="7452359" y="969264"/>
-            <a:ext cx="1371600" cy="256032"/>
-          </a:xfrm>
-          <a:prstGeom prst="rect">
-            <a:avLst/>
-          </a:prstGeom>
-          <a:noFill/>
-        </p:spPr>
-        <p:txBody>
-          <a:bodyPr wrap="square">
-            <a:spAutoFit/>
-          </a:bodyPr>
-          <a:lstStyle/>
-          <a:p>
-            <a:pPr algn="l"/>
-            <a:r>
-              <a:rPr sz="900" b="0" i="0">
-                <a:solidFill>
-                  <a:srgbClr val="FF6666"/>
-                </a:solidFill>
-                <a:latin typeface="Calibri"/>
-              </a:rPr>
-              <a:t>☐  Decline</a:t>
-            </a:r>
-          </a:p>
-        </p:txBody>
-      </p:sp>
-      <p:sp>
-        <p:nvSpPr>
-          <p:cNvPr id="12" name="Rectangle 11"/>
+          <p:cNvPr id="7" name="Rectangle 6"/>
           <p:cNvSpPr/>
           <p:nvPr/>
         </p:nvSpPr>
         <p:spPr>
           <a:xfrm>
-            <a:off x="182880" y="1847088"/>
-            <a:ext cx="8778240" cy="1261872"/>
-          </a:xfrm>
-          <a:prstGeom prst="rect">
-            <a:avLst/>
-          </a:prstGeom>
-          <a:solidFill>
-            <a:srgbClr val="1E1E1E"/>
+            <a:off x="182880" y="512064"/>
+            <a:ext cx="8778240" cy="233172"/>
+          </a:xfrm>
+          <a:prstGeom prst="rect">
+            <a:avLst/>
+          </a:prstGeom>
+          <a:solidFill>
+            <a:srgbClr val="1A1A1A"/>
           </a:solidFill>
           <a:ln>
             <a:noFill/>
@@ -3666,14 +3479,14 @@
       </p:sp>
       <p:sp>
         <p:nvSpPr>
-          <p:cNvPr id="13" name="Rectangle 12"/>
+          <p:cNvPr id="8" name="Rectangle 7"/>
           <p:cNvSpPr/>
           <p:nvPr/>
         </p:nvSpPr>
         <p:spPr>
           <a:xfrm>
-            <a:off x="182880" y="1847088"/>
-            <a:ext cx="50292" cy="1261872"/>
+            <a:off x="182880" y="512064"/>
+            <a:ext cx="50292" cy="233172"/>
           </a:xfrm>
           <a:prstGeom prst="rect">
             <a:avLst/>
@@ -3709,14 +3522,14 @@
       </p:sp>
       <p:sp>
         <p:nvSpPr>
-          <p:cNvPr id="14" name="TextBox 13"/>
-          <p:cNvSpPr txBox="1"/>
-          <p:nvPr/>
-        </p:nvSpPr>
-        <p:spPr>
-          <a:xfrm>
-            <a:off x="274320" y="1920240"/>
-            <a:ext cx="457200" cy="457200"/>
+          <p:cNvPr id="9" name="TextBox 8"/>
+          <p:cNvSpPr txBox="1"/>
+          <p:nvPr/>
+        </p:nvSpPr>
+        <p:spPr>
+          <a:xfrm>
+            <a:off x="265176" y="539496"/>
+            <a:ext cx="411480" cy="196596"/>
           </a:xfrm>
           <a:prstGeom prst="rect">
             <a:avLst/>
@@ -3731,27 +3544,27 @@
           <a:p>
             <a:pPr algn="l"/>
             <a:r>
-              <a:rPr sz="2600" b="1" i="0">
+              <a:rPr sz="2200" b="1" i="0">
                 <a:solidFill>
                   <a:srgbClr val="F26A21"/>
                 </a:solidFill>
                 <a:latin typeface="Cambria"/>
               </a:rPr>
-              <a:t>2</a:t>
-            </a:r>
-          </a:p>
-        </p:txBody>
-      </p:sp>
-      <p:sp>
-        <p:nvSpPr>
-          <p:cNvPr id="15" name="TextBox 14"/>
-          <p:cNvSpPr txBox="1"/>
-          <p:nvPr/>
-        </p:nvSpPr>
-        <p:spPr>
-          <a:xfrm>
-            <a:off x="804672" y="1929384"/>
-            <a:ext cx="6583680" cy="274320"/>
+              <a:t>1</a:t>
+            </a:r>
+          </a:p>
+        </p:txBody>
+      </p:sp>
+      <p:sp>
+        <p:nvSpPr>
+          <p:cNvPr id="10" name="TextBox 9"/>
+          <p:cNvSpPr txBox="1"/>
+          <p:nvPr/>
+        </p:nvSpPr>
+        <p:spPr>
+          <a:xfrm>
+            <a:off x="731520" y="548640"/>
+            <a:ext cx="6629400" cy="178308"/>
           </a:xfrm>
           <a:prstGeom prst="rect">
             <a:avLst/>
@@ -3766,27 +3579,27 @@
           <a:p>
             <a:pPr algn="l"/>
             <a:r>
-              <a:rPr sz="1100" b="1" i="0">
+              <a:rPr sz="950" b="1" i="0">
                 <a:solidFill>
                   <a:srgbClr val="FFFFFF"/>
                 </a:solidFill>
                 <a:latin typeface="Calibri"/>
               </a:rPr>
-              <a:t>Grant Full Read-Only QuickBooks Online Access for Diligence</a:t>
-            </a:r>
-          </a:p>
-        </p:txBody>
-      </p:sp>
-      <p:sp>
-        <p:nvSpPr>
-          <p:cNvPr id="16" name="TextBox 15"/>
-          <p:cNvSpPr txBox="1"/>
-          <p:nvPr/>
-        </p:nvSpPr>
-        <p:spPr>
-          <a:xfrm>
-            <a:off x="804672" y="2231136"/>
-            <a:ext cx="6217920" cy="786383"/>
+              <a:t>Confirm §3 Exclusivity (May 2025 Asset Acquisition Agreement)</a:t>
+            </a:r>
+          </a:p>
+        </p:txBody>
+      </p:sp>
+      <p:sp>
+        <p:nvSpPr>
+          <p:cNvPr id="11" name="TextBox 10"/>
+          <p:cNvSpPr txBox="1"/>
+          <p:nvPr/>
+        </p:nvSpPr>
+        <p:spPr>
+          <a:xfrm>
+            <a:off x="7516367" y="530352"/>
+            <a:ext cx="1371600" cy="201168"/>
           </a:xfrm>
           <a:prstGeom prst="rect">
             <a:avLst/>
@@ -3799,72 +3612,29 @@
           </a:bodyPr>
           <a:lstStyle/>
           <a:p>
-            <a:r>
-              <a:rPr sz="800">
-                <a:solidFill>
-                  <a:srgbClr val="CCCCCC"/>
+            <a:pPr algn="l"/>
+            <a:r>
+              <a:rPr sz="850" b="0" i="0">
+                <a:solidFill>
+                  <a:srgbClr val="44BB44"/>
                 </a:solidFill>
                 <a:latin typeface="Calibri"/>
               </a:rPr>
-              <a:t>Authorize an all-access or accountant user for John Quinn and one Exos finance reviewer.</a:t>
-            </a:r>
-          </a:p>
-          <a:p>
-            <a:r>
-              <a:rPr sz="800">
-                <a:solidFill>
-                  <a:srgbClr val="CCCCCC"/>
-                </a:solidFill>
-                <a:latin typeface="Calibri"/>
-              </a:rPr>
-              <a:t>Purpose: reconcile the $942K "billed-ahead" balance and shared-facility costs (Microcosm</a:t>
-            </a:r>
-          </a:p>
-          <a:p>
-            <a:r>
-              <a:rPr sz="800">
-                <a:solidFill>
-                  <a:srgbClr val="CCCCCC"/>
-                </a:solidFill>
-                <a:latin typeface="Calibri"/>
-              </a:rPr>
-              <a:t>offset) before close.  Basis: Cal. Corp. Code §1602 director inspection right + AAA §4</a:t>
-            </a:r>
-          </a:p>
-          <a:p>
-            <a:r>
-              <a:rPr sz="800">
-                <a:solidFill>
-                  <a:srgbClr val="CCCCCC"/>
-                </a:solidFill>
-                <a:latin typeface="Calibri"/>
-              </a:rPr>
-              <a:t>confirmatory diligence.  Confidential under the 7/27/2021 NDA.</a:t>
-            </a:r>
-          </a:p>
-          <a:p>
-            <a:r>
-              <a:rPr lang="en-US" sz="800" b="1" dirty="0">
-                <a:solidFill>
-                  <a:srgbClr val="F26A21"/>
-                </a:solidFill>
-                <a:latin typeface="Calibri"/>
-              </a:rPr>
-              <a:t>Access to be granted no later than October 15, 2026.</a:t>
-            </a:r>
-          </a:p>
-        </p:txBody>
-      </p:sp>
-      <p:sp>
-        <p:nvSpPr>
-          <p:cNvPr id="17" name="TextBox 16"/>
-          <p:cNvSpPr txBox="1"/>
-          <p:nvPr/>
-        </p:nvSpPr>
-        <p:spPr>
-          <a:xfrm>
-            <a:off x="7452359" y="2029968"/>
-            <a:ext cx="1371600" cy="256032"/>
+              <a:t>☐  Approve</a:t>
+            </a:r>
+          </a:p>
+        </p:txBody>
+      </p:sp>
+      <p:sp>
+        <p:nvSpPr>
+          <p:cNvPr id="12" name="TextBox 11"/>
+          <p:cNvSpPr txBox="1"/>
+          <p:nvPr/>
+        </p:nvSpPr>
+        <p:spPr>
+          <a:xfrm>
+            <a:off x="7516367" y="676656"/>
+            <a:ext cx="1371600" cy="201168"/>
           </a:xfrm>
           <a:prstGeom prst="rect">
             <a:avLst/>
@@ -3879,27 +3649,27 @@
           <a:p>
             <a:pPr algn="l"/>
             <a:r>
-              <a:rPr sz="900" b="0" i="0">
-                <a:solidFill>
-                  <a:srgbClr val="44BB44"/>
+              <a:rPr sz="850" b="0" i="0">
+                <a:solidFill>
+                  <a:srgbClr val="FF6666"/>
                 </a:solidFill>
                 <a:latin typeface="Calibri"/>
               </a:rPr>
-              <a:t>☐  Approve</a:t>
-            </a:r>
-          </a:p>
-        </p:txBody>
-      </p:sp>
-      <p:sp>
-        <p:nvSpPr>
-          <p:cNvPr id="18" name="TextBox 17"/>
-          <p:cNvSpPr txBox="1"/>
-          <p:nvPr/>
-        </p:nvSpPr>
-        <p:spPr>
-          <a:xfrm>
-            <a:off x="7452359" y="2286000"/>
-            <a:ext cx="1371600" cy="256032"/>
+              <a:t>☐  Decline</a:t>
+            </a:r>
+          </a:p>
+        </p:txBody>
+      </p:sp>
+      <p:sp>
+        <p:nvSpPr>
+          <p:cNvPr id="13" name="TextBox 12"/>
+          <p:cNvSpPr txBox="1"/>
+          <p:nvPr/>
+        </p:nvSpPr>
+        <p:spPr>
+          <a:xfrm>
+            <a:off x="731520" y="781812"/>
+            <a:ext cx="6629400" cy="608076"/>
           </a:xfrm>
           <a:prstGeom prst="rect">
             <a:avLst/>
@@ -3912,29 +3682,50 @@
           </a:bodyPr>
           <a:lstStyle/>
           <a:p>
-            <a:pPr algn="l"/>
-            <a:r>
-              <a:rPr sz="900" b="0" i="0">
-                <a:solidFill>
-                  <a:srgbClr val="FF6666"/>
+            <a:r>
+              <a:rPr sz="750" b="0">
+                <a:solidFill>
+                  <a:srgbClr val="CCCCCC"/>
                 </a:solidFill>
                 <a:latin typeface="Calibri"/>
               </a:rPr>
-              <a:t>☐  Decline</a:t>
-            </a:r>
-          </a:p>
-        </p:txBody>
-      </p:sp>
-      <p:sp>
-        <p:nvSpPr>
-          <p:cNvPr id="19" name="Rectangle 18"/>
+              <a:t>Approve a 90-day exclusivity period beginning on the date of this approval.</a:t>
+            </a:r>
+          </a:p>
+          <a:p>
+            <a:r>
+              <a:rPr sz="750" b="0">
+                <a:solidFill>
+                  <a:srgbClr val="CCCCCC"/>
+                </a:solidFill>
+                <a:latin typeface="Calibri"/>
+              </a:rPr>
+              <a:t>Extension not unreasonably withheld (per §3). Allows both parties to proceed to</a:t>
+            </a:r>
+          </a:p>
+          <a:p>
+            <a:r>
+              <a:rPr sz="750" b="0">
+                <a:solidFill>
+                  <a:srgbClr val="CCCCCC"/>
+                </a:solidFill>
+                <a:latin typeface="Calibri"/>
+              </a:rPr>
+              <a:t>diligence, definitive agreement, and financing close (target: Feb 15th, 2027).</a:t>
+            </a:r>
+          </a:p>
+        </p:txBody>
+      </p:sp>
+      <p:sp>
+        <p:nvSpPr>
+          <p:cNvPr id="14" name="Rectangle 13"/>
           <p:cNvSpPr/>
           <p:nvPr/>
         </p:nvSpPr>
         <p:spPr>
           <a:xfrm>
-            <a:off x="182880" y="3163824"/>
-            <a:ext cx="8778240" cy="1097280"/>
+            <a:off x="182880" y="1444752"/>
+            <a:ext cx="8778240" cy="987552"/>
           </a:xfrm>
           <a:prstGeom prst="rect">
             <a:avLst/>
@@ -3970,14 +3761,14 @@
       </p:sp>
       <p:sp>
         <p:nvSpPr>
-          <p:cNvPr id="20" name="Rectangle 19"/>
+          <p:cNvPr id="15" name="Rectangle 14"/>
           <p:cNvSpPr/>
           <p:nvPr/>
         </p:nvSpPr>
         <p:spPr>
           <a:xfrm>
-            <a:off x="182880" y="3163824"/>
-            <a:ext cx="50292" cy="1097280"/>
+            <a:off x="182880" y="1444752"/>
+            <a:ext cx="50292" cy="987552"/>
           </a:xfrm>
           <a:prstGeom prst="rect">
             <a:avLst/>
@@ -4013,216 +3804,20 @@
       </p:sp>
       <p:sp>
         <p:nvSpPr>
-          <p:cNvPr id="21" name="TextBox 20"/>
-          <p:cNvSpPr txBox="1"/>
-          <p:nvPr/>
-        </p:nvSpPr>
-        <p:spPr>
-          <a:xfrm>
-            <a:off x="274320" y="3236976"/>
-            <a:ext cx="457200" cy="457200"/>
-          </a:xfrm>
-          <a:prstGeom prst="rect">
-            <a:avLst/>
-          </a:prstGeom>
-          <a:noFill/>
-        </p:spPr>
-        <p:txBody>
-          <a:bodyPr wrap="square">
-            <a:spAutoFit/>
-          </a:bodyPr>
-          <a:lstStyle/>
-          <a:p>
-            <a:pPr algn="l"/>
-            <a:r>
-              <a:rPr sz="2600" b="1" i="0">
-                <a:solidFill>
-                  <a:srgbClr val="F26A21"/>
-                </a:solidFill>
-                <a:latin typeface="Cambria"/>
-              </a:rPr>
-              <a:t>3</a:t>
-            </a:r>
-          </a:p>
-        </p:txBody>
-      </p:sp>
-      <p:sp>
-        <p:nvSpPr>
-          <p:cNvPr id="22" name="TextBox 21"/>
-          <p:cNvSpPr txBox="1"/>
-          <p:nvPr/>
-        </p:nvSpPr>
-        <p:spPr>
-          <a:xfrm>
-            <a:off x="804672" y="3246120"/>
-            <a:ext cx="6583680" cy="274320"/>
-          </a:xfrm>
-          <a:prstGeom prst="rect">
-            <a:avLst/>
-          </a:prstGeom>
-          <a:noFill/>
-        </p:spPr>
-        <p:txBody>
-          <a:bodyPr wrap="square">
-            <a:spAutoFit/>
-          </a:bodyPr>
-          <a:lstStyle/>
-          <a:p>
-            <a:pPr algn="l"/>
-            <a:r>
-              <a:rPr sz="1100" b="1" i="0">
-                <a:solidFill>
-                  <a:srgbClr val="FFFFFF"/>
-                </a:solidFill>
-                <a:latin typeface="Calibri"/>
-              </a:rPr>
-              <a:t>Consent to ERP/MRP &amp; Inventory Evaluation (Separate Motion)</a:t>
-            </a:r>
-          </a:p>
-        </p:txBody>
-      </p:sp>
-      <p:sp>
-        <p:nvSpPr>
-          <p:cNvPr id="23" name="TextBox 22"/>
-          <p:cNvSpPr txBox="1"/>
-          <p:nvPr/>
-        </p:nvSpPr>
-        <p:spPr>
-          <a:xfrm>
-            <a:off x="804672" y="3547872"/>
-            <a:ext cx="6217920" cy="621792"/>
-          </a:xfrm>
-          <a:prstGeom prst="rect">
-            <a:avLst/>
-          </a:prstGeom>
-          <a:noFill/>
-        </p:spPr>
-        <p:txBody>
-          <a:bodyPr wrap="square">
-            <a:spAutoFit/>
-          </a:bodyPr>
-          <a:lstStyle/>
-          <a:p>
-            <a:r>
-              <a:rPr sz="800">
-                <a:solidFill>
-                  <a:srgbClr val="CCCCCC"/>
-                </a:solidFill>
-                <a:latin typeface="Calibri"/>
-              </a:rPr>
-              <a:t>Authorize Exos to use the same QB data to evaluate its in-house ERP/MRP and inventory</a:t>
-            </a:r>
-          </a:p>
-          <a:p>
-            <a:r>
-              <a:rPr sz="800">
-                <a:solidFill>
-                  <a:srgbClr val="CCCCCC"/>
-                </a:solidFill>
-                <a:latin typeface="Calibri"/>
-              </a:rPr>
-              <a:t>systems for the combined operation.  Confidential under the NDA.</a:t>
-            </a:r>
-          </a:p>
-          <a:p>
-            <a:r>
-              <a:rPr sz="800">
-                <a:solidFill>
-                  <a:srgbClr val="CCCCCC"/>
-                </a:solidFill>
-                <a:latin typeface="Calibri"/>
-              </a:rPr>
-              <a:t>Does not create any obligation to implement; evaluation only.</a:t>
-            </a:r>
-          </a:p>
-        </p:txBody>
-      </p:sp>
-      <p:sp>
-        <p:nvSpPr>
-          <p:cNvPr id="24" name="TextBox 23"/>
-          <p:cNvSpPr txBox="1"/>
-          <p:nvPr/>
-        </p:nvSpPr>
-        <p:spPr>
-          <a:xfrm>
-            <a:off x="7452359" y="3346704"/>
-            <a:ext cx="1371600" cy="256032"/>
-          </a:xfrm>
-          <a:prstGeom prst="rect">
-            <a:avLst/>
-          </a:prstGeom>
-          <a:noFill/>
-        </p:spPr>
-        <p:txBody>
-          <a:bodyPr wrap="square">
-            <a:spAutoFit/>
-          </a:bodyPr>
-          <a:lstStyle/>
-          <a:p>
-            <a:pPr algn="l"/>
-            <a:r>
-              <a:rPr sz="900" b="0" i="0">
-                <a:solidFill>
-                  <a:srgbClr val="44BB44"/>
-                </a:solidFill>
-                <a:latin typeface="Calibri"/>
-              </a:rPr>
-              <a:t>☐  Approve</a:t>
-            </a:r>
-          </a:p>
-        </p:txBody>
-      </p:sp>
-      <p:sp>
-        <p:nvSpPr>
-          <p:cNvPr id="25" name="TextBox 24"/>
-          <p:cNvSpPr txBox="1"/>
-          <p:nvPr/>
-        </p:nvSpPr>
-        <p:spPr>
-          <a:xfrm>
-            <a:off x="7452359" y="3602736"/>
-            <a:ext cx="1371600" cy="256032"/>
-          </a:xfrm>
-          <a:prstGeom prst="rect">
-            <a:avLst/>
-          </a:prstGeom>
-          <a:noFill/>
-        </p:spPr>
-        <p:txBody>
-          <a:bodyPr wrap="square">
-            <a:spAutoFit/>
-          </a:bodyPr>
-          <a:lstStyle/>
-          <a:p>
-            <a:pPr algn="l"/>
-            <a:r>
-              <a:rPr sz="900" b="0" i="0">
-                <a:solidFill>
-                  <a:srgbClr val="FF6666"/>
-                </a:solidFill>
-                <a:latin typeface="Calibri"/>
-              </a:rPr>
-              <a:t>☐  Decline</a:t>
-            </a:r>
-          </a:p>
-        </p:txBody>
-      </p:sp>
-      <p:sp>
-        <p:nvSpPr>
-          <p:cNvPr id="26" name="Rectangle 25"/>
+          <p:cNvPr id="16" name="Rectangle 15"/>
           <p:cNvSpPr/>
           <p:nvPr/>
         </p:nvSpPr>
         <p:spPr>
           <a:xfrm>
-            <a:off x="182880" y="4325112"/>
-            <a:ext cx="8778240" cy="201168"/>
-          </a:xfrm>
-          <a:prstGeom prst="rect">
-            <a:avLst/>
-          </a:prstGeom>
-          <a:solidFill>
-            <a:srgbClr val="1A0A00"/>
+            <a:off x="182880" y="1444752"/>
+            <a:ext cx="8778240" cy="233172"/>
+          </a:xfrm>
+          <a:prstGeom prst="rect">
+            <a:avLst/>
+          </a:prstGeom>
+          <a:solidFill>
+            <a:srgbClr val="1A1A1A"/>
           </a:solidFill>
           <a:ln>
             <a:noFill/>
@@ -4252,14 +3847,57 @@
       </p:sp>
       <p:sp>
         <p:nvSpPr>
-          <p:cNvPr id="27" name="TextBox 26"/>
-          <p:cNvSpPr txBox="1"/>
-          <p:nvPr/>
-        </p:nvSpPr>
-        <p:spPr>
-          <a:xfrm>
-            <a:off x="292608" y="4352544"/>
-            <a:ext cx="8549640" cy="155448"/>
+          <p:cNvPr id="17" name="Rectangle 16"/>
+          <p:cNvSpPr/>
+          <p:nvPr/>
+        </p:nvSpPr>
+        <p:spPr>
+          <a:xfrm>
+            <a:off x="182880" y="1444752"/>
+            <a:ext cx="50292" cy="233172"/>
+          </a:xfrm>
+          <a:prstGeom prst="rect">
+            <a:avLst/>
+          </a:prstGeom>
+          <a:solidFill>
+            <a:srgbClr val="F26A21"/>
+          </a:solidFill>
+          <a:ln>
+            <a:noFill/>
+          </a:ln>
+        </p:spPr>
+        <p:style>
+          <a:lnRef idx="1">
+            <a:schemeClr val="accent1"/>
+          </a:lnRef>
+          <a:fillRef idx="3">
+            <a:schemeClr val="accent1"/>
+          </a:fillRef>
+          <a:effectRef idx="2">
+            <a:schemeClr val="accent1"/>
+          </a:effectRef>
+          <a:fontRef idx="minor">
+            <a:schemeClr val="lt1"/>
+          </a:fontRef>
+        </p:style>
+        <p:txBody>
+          <a:bodyPr rtlCol="0" anchor="ctr"/>
+          <a:lstStyle/>
+          <a:p>
+            <a:pPr algn="ctr"/>
+          </a:p>
+        </p:txBody>
+      </p:sp>
+      <p:sp>
+        <p:nvSpPr>
+          <p:cNvPr id="18" name="TextBox 17"/>
+          <p:cNvSpPr txBox="1"/>
+          <p:nvPr/>
+        </p:nvSpPr>
+        <p:spPr>
+          <a:xfrm>
+            <a:off x="265176" y="1472184"/>
+            <a:ext cx="411480" cy="196596"/>
           </a:xfrm>
           <a:prstGeom prst="rect">
             <a:avLst/>
@@ -4274,27 +3912,27 @@
           <a:p>
             <a:pPr algn="l"/>
             <a:r>
-              <a:rPr sz="750" b="0" i="1">
+              <a:rPr sz="2200" b="1" i="0">
                 <a:solidFill>
                   <a:srgbClr val="F26A21"/>
                 </a:solidFill>
-                <a:latin typeface="Calibri"/>
-              </a:rPr>
-              <a:t>Governance: John Quinn abstains on all motions as an interested director; motions are decided by the disinterested directors.</a:t>
-            </a:r>
-          </a:p>
-        </p:txBody>
-      </p:sp>
-      <p:sp>
-        <p:nvSpPr>
-          <p:cNvPr id="28" name="TextBox 27"/>
-          <p:cNvSpPr txBox="1"/>
-          <p:nvPr/>
-        </p:nvSpPr>
-        <p:spPr>
-          <a:xfrm>
-            <a:off x="1554480" y="4892040"/>
-            <a:ext cx="6035040" cy="201168"/>
+                <a:latin typeface="Cambria"/>
+              </a:rPr>
+              <a:t>2</a:t>
+            </a:r>
+          </a:p>
+        </p:txBody>
+      </p:sp>
+      <p:sp>
+        <p:nvSpPr>
+          <p:cNvPr id="19" name="TextBox 18"/>
+          <p:cNvSpPr txBox="1"/>
+          <p:nvPr/>
+        </p:nvSpPr>
+        <p:spPr>
+          <a:xfrm>
+            <a:off x="731520" y="1481328"/>
+            <a:ext cx="6629400" cy="178308"/>
           </a:xfrm>
           <a:prstGeom prst="rect">
             <a:avLst/>
@@ -4307,7 +3945,1004 @@
           </a:bodyPr>
           <a:lstStyle/>
           <a:p>
+            <a:pPr algn="l"/>
+            <a:r>
+              <a:rPr sz="950" b="1" i="0">
+                <a:solidFill>
+                  <a:srgbClr val="FFFFFF"/>
+                </a:solidFill>
+                <a:latin typeface="Calibri"/>
+              </a:rPr>
+              <a:t>Grant Full Read-Only QuickBooks Online Access for Diligence</a:t>
+            </a:r>
+          </a:p>
+        </p:txBody>
+      </p:sp>
+      <p:sp>
+        <p:nvSpPr>
+          <p:cNvPr id="20" name="TextBox 19"/>
+          <p:cNvSpPr txBox="1"/>
+          <p:nvPr/>
+        </p:nvSpPr>
+        <p:spPr>
+          <a:xfrm>
+            <a:off x="7516367" y="1463040"/>
+            <a:ext cx="1371600" cy="201168"/>
+          </a:xfrm>
+          <a:prstGeom prst="rect">
+            <a:avLst/>
+          </a:prstGeom>
+          <a:noFill/>
+        </p:spPr>
+        <p:txBody>
+          <a:bodyPr wrap="square">
+            <a:spAutoFit/>
+          </a:bodyPr>
+          <a:lstStyle/>
+          <a:p>
+            <a:pPr algn="l"/>
+            <a:r>
+              <a:rPr sz="850" b="0" i="0">
+                <a:solidFill>
+                  <a:srgbClr val="44BB44"/>
+                </a:solidFill>
+                <a:latin typeface="Calibri"/>
+              </a:rPr>
+              <a:t>☐  Approve</a:t>
+            </a:r>
+          </a:p>
+        </p:txBody>
+      </p:sp>
+      <p:sp>
+        <p:nvSpPr>
+          <p:cNvPr id="21" name="TextBox 20"/>
+          <p:cNvSpPr txBox="1"/>
+          <p:nvPr/>
+        </p:nvSpPr>
+        <p:spPr>
+          <a:xfrm>
+            <a:off x="7516367" y="1609344"/>
+            <a:ext cx="1371600" cy="201168"/>
+          </a:xfrm>
+          <a:prstGeom prst="rect">
+            <a:avLst/>
+          </a:prstGeom>
+          <a:noFill/>
+        </p:spPr>
+        <p:txBody>
+          <a:bodyPr wrap="square">
+            <a:spAutoFit/>
+          </a:bodyPr>
+          <a:lstStyle/>
+          <a:p>
+            <a:pPr algn="l"/>
+            <a:r>
+              <a:rPr sz="850" b="0" i="0">
+                <a:solidFill>
+                  <a:srgbClr val="FF6666"/>
+                </a:solidFill>
+                <a:latin typeface="Calibri"/>
+              </a:rPr>
+              <a:t>☐  Decline</a:t>
+            </a:r>
+          </a:p>
+        </p:txBody>
+      </p:sp>
+      <p:sp>
+        <p:nvSpPr>
+          <p:cNvPr id="22" name="TextBox 21"/>
+          <p:cNvSpPr txBox="1"/>
+          <p:nvPr/>
+        </p:nvSpPr>
+        <p:spPr>
+          <a:xfrm>
+            <a:off x="731520" y="1714500"/>
+            <a:ext cx="6629400" cy="699516"/>
+          </a:xfrm>
+          <a:prstGeom prst="rect">
+            <a:avLst/>
+          </a:prstGeom>
+          <a:noFill/>
+        </p:spPr>
+        <p:txBody>
+          <a:bodyPr wrap="square">
+            <a:spAutoFit/>
+          </a:bodyPr>
+          <a:lstStyle/>
+          <a:p>
+            <a:r>
+              <a:rPr sz="750" b="0">
+                <a:solidFill>
+                  <a:srgbClr val="CCCCCC"/>
+                </a:solidFill>
+                <a:latin typeface="Calibri"/>
+              </a:rPr>
+              <a:t>Authorize an all-access or accountant user for John Quinn and one Exos finance reviewer.</a:t>
+            </a:r>
+          </a:p>
+          <a:p>
+            <a:r>
+              <a:rPr sz="750" b="0">
+                <a:solidFill>
+                  <a:srgbClr val="CCCCCC"/>
+                </a:solidFill>
+                <a:latin typeface="Calibri"/>
+              </a:rPr>
+              <a:t>Purpose: reconcile the $942K "billed-ahead" balance and shared-facility costs before close.</a:t>
+            </a:r>
+          </a:p>
+          <a:p>
+            <a:r>
+              <a:rPr sz="750" b="0">
+                <a:solidFill>
+                  <a:srgbClr val="CCCCCC"/>
+                </a:solidFill>
+                <a:latin typeface="Calibri"/>
+              </a:rPr>
+              <a:t>Basis: Cal. Corp. Code §1602 director inspection right + AAA §4 confirmatory diligence.</a:t>
+            </a:r>
+          </a:p>
+          <a:p>
+            <a:r>
+              <a:rPr sz="750" b="1">
+                <a:solidFill>
+                  <a:srgbClr val="F26A21"/>
+                </a:solidFill>
+                <a:latin typeface="Calibri"/>
+              </a:rPr>
+              <a:t>Confidential under the 7/27/2021 NDA.  Access to be granted no later than October 15, 2026.</a:t>
+            </a:r>
+          </a:p>
+        </p:txBody>
+      </p:sp>
+      <p:sp>
+        <p:nvSpPr>
+          <p:cNvPr id="23" name="Rectangle 22"/>
+          <p:cNvSpPr/>
+          <p:nvPr/>
+        </p:nvSpPr>
+        <p:spPr>
+          <a:xfrm>
+            <a:off x="182880" y="2468880"/>
+            <a:ext cx="8778240" cy="1170432"/>
+          </a:xfrm>
+          <a:prstGeom prst="rect">
+            <a:avLst/>
+          </a:prstGeom>
+          <a:solidFill>
+            <a:srgbClr val="1E1E1E"/>
+          </a:solidFill>
+          <a:ln>
+            <a:noFill/>
+          </a:ln>
+        </p:spPr>
+        <p:style>
+          <a:lnRef idx="1">
+            <a:schemeClr val="accent1"/>
+          </a:lnRef>
+          <a:fillRef idx="3">
+            <a:schemeClr val="accent1"/>
+          </a:fillRef>
+          <a:effectRef idx="2">
+            <a:schemeClr val="accent1"/>
+          </a:effectRef>
+          <a:fontRef idx="minor">
+            <a:schemeClr val="lt1"/>
+          </a:fontRef>
+        </p:style>
+        <p:txBody>
+          <a:bodyPr rtlCol="0" anchor="ctr"/>
+          <a:lstStyle/>
+          <a:p>
             <a:pPr algn="ctr"/>
+          </a:p>
+        </p:txBody>
+      </p:sp>
+      <p:sp>
+        <p:nvSpPr>
+          <p:cNvPr id="24" name="Rectangle 23"/>
+          <p:cNvSpPr/>
+          <p:nvPr/>
+        </p:nvSpPr>
+        <p:spPr>
+          <a:xfrm>
+            <a:off x="182880" y="2468880"/>
+            <a:ext cx="50292" cy="1170432"/>
+          </a:xfrm>
+          <a:prstGeom prst="rect">
+            <a:avLst/>
+          </a:prstGeom>
+          <a:solidFill>
+            <a:srgbClr val="F26A21"/>
+          </a:solidFill>
+          <a:ln>
+            <a:noFill/>
+          </a:ln>
+        </p:spPr>
+        <p:style>
+          <a:lnRef idx="1">
+            <a:schemeClr val="accent1"/>
+          </a:lnRef>
+          <a:fillRef idx="3">
+            <a:schemeClr val="accent1"/>
+          </a:fillRef>
+          <a:effectRef idx="2">
+            <a:schemeClr val="accent1"/>
+          </a:effectRef>
+          <a:fontRef idx="minor">
+            <a:schemeClr val="lt1"/>
+          </a:fontRef>
+        </p:style>
+        <p:txBody>
+          <a:bodyPr rtlCol="0" anchor="ctr"/>
+          <a:lstStyle/>
+          <a:p>
+            <a:pPr algn="ctr"/>
+          </a:p>
+        </p:txBody>
+      </p:sp>
+      <p:sp>
+        <p:nvSpPr>
+          <p:cNvPr id="25" name="Rectangle 24"/>
+          <p:cNvSpPr/>
+          <p:nvPr/>
+        </p:nvSpPr>
+        <p:spPr>
+          <a:xfrm>
+            <a:off x="182880" y="2468880"/>
+            <a:ext cx="8778240" cy="233172"/>
+          </a:xfrm>
+          <a:prstGeom prst="rect">
+            <a:avLst/>
+          </a:prstGeom>
+          <a:solidFill>
+            <a:srgbClr val="1A1A1A"/>
+          </a:solidFill>
+          <a:ln>
+            <a:noFill/>
+          </a:ln>
+        </p:spPr>
+        <p:style>
+          <a:lnRef idx="1">
+            <a:schemeClr val="accent1"/>
+          </a:lnRef>
+          <a:fillRef idx="3">
+            <a:schemeClr val="accent1"/>
+          </a:fillRef>
+          <a:effectRef idx="2">
+            <a:schemeClr val="accent1"/>
+          </a:effectRef>
+          <a:fontRef idx="minor">
+            <a:schemeClr val="lt1"/>
+          </a:fontRef>
+        </p:style>
+        <p:txBody>
+          <a:bodyPr rtlCol="0" anchor="ctr"/>
+          <a:lstStyle/>
+          <a:p>
+            <a:pPr algn="ctr"/>
+          </a:p>
+        </p:txBody>
+      </p:sp>
+      <p:sp>
+        <p:nvSpPr>
+          <p:cNvPr id="26" name="Rectangle 25"/>
+          <p:cNvSpPr/>
+          <p:nvPr/>
+        </p:nvSpPr>
+        <p:spPr>
+          <a:xfrm>
+            <a:off x="182880" y="2468880"/>
+            <a:ext cx="50292" cy="233172"/>
+          </a:xfrm>
+          <a:prstGeom prst="rect">
+            <a:avLst/>
+          </a:prstGeom>
+          <a:solidFill>
+            <a:srgbClr val="F26A21"/>
+          </a:solidFill>
+          <a:ln>
+            <a:noFill/>
+          </a:ln>
+        </p:spPr>
+        <p:style>
+          <a:lnRef idx="1">
+            <a:schemeClr val="accent1"/>
+          </a:lnRef>
+          <a:fillRef idx="3">
+            <a:schemeClr val="accent1"/>
+          </a:fillRef>
+          <a:effectRef idx="2">
+            <a:schemeClr val="accent1"/>
+          </a:effectRef>
+          <a:fontRef idx="minor">
+            <a:schemeClr val="lt1"/>
+          </a:fontRef>
+        </p:style>
+        <p:txBody>
+          <a:bodyPr rtlCol="0" anchor="ctr"/>
+          <a:lstStyle/>
+          <a:p>
+            <a:pPr algn="ctr"/>
+          </a:p>
+        </p:txBody>
+      </p:sp>
+      <p:sp>
+        <p:nvSpPr>
+          <p:cNvPr id="27" name="TextBox 26"/>
+          <p:cNvSpPr txBox="1"/>
+          <p:nvPr/>
+        </p:nvSpPr>
+        <p:spPr>
+          <a:xfrm>
+            <a:off x="265176" y="2496312"/>
+            <a:ext cx="411480" cy="196596"/>
+          </a:xfrm>
+          <a:prstGeom prst="rect">
+            <a:avLst/>
+          </a:prstGeom>
+          <a:noFill/>
+        </p:spPr>
+        <p:txBody>
+          <a:bodyPr wrap="square">
+            <a:spAutoFit/>
+          </a:bodyPr>
+          <a:lstStyle/>
+          <a:p>
+            <a:pPr algn="l"/>
+            <a:r>
+              <a:rPr sz="2200" b="1" i="0">
+                <a:solidFill>
+                  <a:srgbClr val="F26A21"/>
+                </a:solidFill>
+                <a:latin typeface="Cambria"/>
+              </a:rPr>
+              <a:t>3</a:t>
+            </a:r>
+          </a:p>
+        </p:txBody>
+      </p:sp>
+      <p:sp>
+        <p:nvSpPr>
+          <p:cNvPr id="28" name="TextBox 27"/>
+          <p:cNvSpPr txBox="1"/>
+          <p:nvPr/>
+        </p:nvSpPr>
+        <p:spPr>
+          <a:xfrm>
+            <a:off x="731520" y="2505456"/>
+            <a:ext cx="6629400" cy="178308"/>
+          </a:xfrm>
+          <a:prstGeom prst="rect">
+            <a:avLst/>
+          </a:prstGeom>
+          <a:noFill/>
+        </p:spPr>
+        <p:txBody>
+          <a:bodyPr wrap="square">
+            <a:spAutoFit/>
+          </a:bodyPr>
+          <a:lstStyle/>
+          <a:p>
+            <a:pPr algn="l"/>
+            <a:r>
+              <a:rPr sz="950" b="1" i="0">
+                <a:solidFill>
+                  <a:srgbClr val="FFFFFF"/>
+                </a:solidFill>
+                <a:latin typeface="Calibri"/>
+              </a:rPr>
+              <a:t>Correct AR Unbilled / Customer-Deposit Accounting Within 5 Days</a:t>
+            </a:r>
+          </a:p>
+        </p:txBody>
+      </p:sp>
+      <p:sp>
+        <p:nvSpPr>
+          <p:cNvPr id="29" name="TextBox 28"/>
+          <p:cNvSpPr txBox="1"/>
+          <p:nvPr/>
+        </p:nvSpPr>
+        <p:spPr>
+          <a:xfrm>
+            <a:off x="7516367" y="2487168"/>
+            <a:ext cx="1371600" cy="201168"/>
+          </a:xfrm>
+          <a:prstGeom prst="rect">
+            <a:avLst/>
+          </a:prstGeom>
+          <a:noFill/>
+        </p:spPr>
+        <p:txBody>
+          <a:bodyPr wrap="square">
+            <a:spAutoFit/>
+          </a:bodyPr>
+          <a:lstStyle/>
+          <a:p>
+            <a:pPr algn="l"/>
+            <a:r>
+              <a:rPr sz="850" b="0" i="0">
+                <a:solidFill>
+                  <a:srgbClr val="44BB44"/>
+                </a:solidFill>
+                <a:latin typeface="Calibri"/>
+              </a:rPr>
+              <a:t>☐  Approve</a:t>
+            </a:r>
+          </a:p>
+        </p:txBody>
+      </p:sp>
+      <p:sp>
+        <p:nvSpPr>
+          <p:cNvPr id="30" name="TextBox 29"/>
+          <p:cNvSpPr txBox="1"/>
+          <p:nvPr/>
+        </p:nvSpPr>
+        <p:spPr>
+          <a:xfrm>
+            <a:off x="7516367" y="2633472"/>
+            <a:ext cx="1371600" cy="201168"/>
+          </a:xfrm>
+          <a:prstGeom prst="rect">
+            <a:avLst/>
+          </a:prstGeom>
+          <a:noFill/>
+        </p:spPr>
+        <p:txBody>
+          <a:bodyPr wrap="square">
+            <a:spAutoFit/>
+          </a:bodyPr>
+          <a:lstStyle/>
+          <a:p>
+            <a:pPr algn="l"/>
+            <a:r>
+              <a:rPr sz="850" b="0" i="0">
+                <a:solidFill>
+                  <a:srgbClr val="FF6666"/>
+                </a:solidFill>
+                <a:latin typeface="Calibri"/>
+              </a:rPr>
+              <a:t>☐  Decline</a:t>
+            </a:r>
+          </a:p>
+        </p:txBody>
+      </p:sp>
+      <p:sp>
+        <p:nvSpPr>
+          <p:cNvPr id="31" name="TextBox 30"/>
+          <p:cNvSpPr txBox="1"/>
+          <p:nvPr/>
+        </p:nvSpPr>
+        <p:spPr>
+          <a:xfrm>
+            <a:off x="731520" y="2738628"/>
+            <a:ext cx="6629400" cy="882395"/>
+          </a:xfrm>
+          <a:prstGeom prst="rect">
+            <a:avLst/>
+          </a:prstGeom>
+          <a:noFill/>
+        </p:spPr>
+        <p:txBody>
+          <a:bodyPr wrap="square">
+            <a:spAutoFit/>
+          </a:bodyPr>
+          <a:lstStyle/>
+          <a:p>
+            <a:r>
+              <a:rPr sz="750" b="0">
+                <a:solidFill>
+                  <a:srgbClr val="CCCCCC"/>
+                </a:solidFill>
+                <a:latin typeface="Calibri"/>
+              </a:rPr>
+              <a:t>Direct A La Carte Solutions (bookkeeper) + Singer Lewak / Welch &amp; Co. to reconcile and correct:</a:t>
+            </a:r>
+          </a:p>
+          <a:p>
+            <a:r>
+              <a:rPr sz="750" b="0">
+                <a:solidFill>
+                  <a:srgbClr val="CCCCCC"/>
+                </a:solidFill>
+                <a:latin typeface="Calibri"/>
+              </a:rPr>
+              <a:t>• Acct 1110 AR Unbilled ($942,177) and Acct 2380 Deposits ($120,000) within 5 days of approval.</a:t>
+            </a:r>
+          </a:p>
+          <a:p>
+            <a:r>
+              <a:rPr sz="750" b="0">
+                <a:solidFill>
+                  <a:srgbClr val="CCCCCC"/>
+                </a:solidFill>
+                <a:latin typeface="Calibri"/>
+              </a:rPr>
+              <a:t>• Clear start-billings on completed/shipped tanks; post missing Jul–Sep 2026 rev-rec entries.</a:t>
+            </a:r>
+          </a:p>
+          <a:p>
+            <a:r>
+              <a:rPr sz="750" b="0">
+                <a:solidFill>
+                  <a:srgbClr val="CCCCCC"/>
+                </a:solidFill>
+                <a:latin typeface="Calibri"/>
+              </a:rPr>
+              <a:t>• Tank-by-tank reconciliation (IM-109/122/134, EXOS-133) + corrected balance sheet to all directors.</a:t>
+            </a:r>
+          </a:p>
+        </p:txBody>
+      </p:sp>
+      <p:sp>
+        <p:nvSpPr>
+          <p:cNvPr id="32" name="Rectangle 31"/>
+          <p:cNvSpPr/>
+          <p:nvPr/>
+        </p:nvSpPr>
+        <p:spPr>
+          <a:xfrm>
+            <a:off x="182880" y="3675887"/>
+            <a:ext cx="8778240" cy="850392"/>
+          </a:xfrm>
+          <a:prstGeom prst="rect">
+            <a:avLst/>
+          </a:prstGeom>
+          <a:solidFill>
+            <a:srgbClr val="1E1E1E"/>
+          </a:solidFill>
+          <a:ln>
+            <a:noFill/>
+          </a:ln>
+        </p:spPr>
+        <p:style>
+          <a:lnRef idx="1">
+            <a:schemeClr val="accent1"/>
+          </a:lnRef>
+          <a:fillRef idx="3">
+            <a:schemeClr val="accent1"/>
+          </a:fillRef>
+          <a:effectRef idx="2">
+            <a:schemeClr val="accent1"/>
+          </a:effectRef>
+          <a:fontRef idx="minor">
+            <a:schemeClr val="lt1"/>
+          </a:fontRef>
+        </p:style>
+        <p:txBody>
+          <a:bodyPr rtlCol="0" anchor="ctr"/>
+          <a:lstStyle/>
+          <a:p>
+            <a:pPr algn="ctr"/>
+          </a:p>
+        </p:txBody>
+      </p:sp>
+      <p:sp>
+        <p:nvSpPr>
+          <p:cNvPr id="33" name="Rectangle 32"/>
+          <p:cNvSpPr/>
+          <p:nvPr/>
+        </p:nvSpPr>
+        <p:spPr>
+          <a:xfrm>
+            <a:off x="182880" y="3675887"/>
+            <a:ext cx="50292" cy="850392"/>
+          </a:xfrm>
+          <a:prstGeom prst="rect">
+            <a:avLst/>
+          </a:prstGeom>
+          <a:solidFill>
+            <a:srgbClr val="F26A21"/>
+          </a:solidFill>
+          <a:ln>
+            <a:noFill/>
+          </a:ln>
+        </p:spPr>
+        <p:style>
+          <a:lnRef idx="1">
+            <a:schemeClr val="accent1"/>
+          </a:lnRef>
+          <a:fillRef idx="3">
+            <a:schemeClr val="accent1"/>
+          </a:fillRef>
+          <a:effectRef idx="2">
+            <a:schemeClr val="accent1"/>
+          </a:effectRef>
+          <a:fontRef idx="minor">
+            <a:schemeClr val="lt1"/>
+          </a:fontRef>
+        </p:style>
+        <p:txBody>
+          <a:bodyPr rtlCol="0" anchor="ctr"/>
+          <a:lstStyle/>
+          <a:p>
+            <a:pPr algn="ctr"/>
+          </a:p>
+        </p:txBody>
+      </p:sp>
+      <p:sp>
+        <p:nvSpPr>
+          <p:cNvPr id="34" name="Rectangle 33"/>
+          <p:cNvSpPr/>
+          <p:nvPr/>
+        </p:nvSpPr>
+        <p:spPr>
+          <a:xfrm>
+            <a:off x="182880" y="3675887"/>
+            <a:ext cx="8778240" cy="233172"/>
+          </a:xfrm>
+          <a:prstGeom prst="rect">
+            <a:avLst/>
+          </a:prstGeom>
+          <a:solidFill>
+            <a:srgbClr val="1A1A1A"/>
+          </a:solidFill>
+          <a:ln>
+            <a:noFill/>
+          </a:ln>
+        </p:spPr>
+        <p:style>
+          <a:lnRef idx="1">
+            <a:schemeClr val="accent1"/>
+          </a:lnRef>
+          <a:fillRef idx="3">
+            <a:schemeClr val="accent1"/>
+          </a:fillRef>
+          <a:effectRef idx="2">
+            <a:schemeClr val="accent1"/>
+          </a:effectRef>
+          <a:fontRef idx="minor">
+            <a:schemeClr val="lt1"/>
+          </a:fontRef>
+        </p:style>
+        <p:txBody>
+          <a:bodyPr rtlCol="0" anchor="ctr"/>
+          <a:lstStyle/>
+          <a:p>
+            <a:pPr algn="ctr"/>
+          </a:p>
+        </p:txBody>
+      </p:sp>
+      <p:sp>
+        <p:nvSpPr>
+          <p:cNvPr id="35" name="Rectangle 34"/>
+          <p:cNvSpPr/>
+          <p:nvPr/>
+        </p:nvSpPr>
+        <p:spPr>
+          <a:xfrm>
+            <a:off x="182880" y="3675887"/>
+            <a:ext cx="50292" cy="233172"/>
+          </a:xfrm>
+          <a:prstGeom prst="rect">
+            <a:avLst/>
+          </a:prstGeom>
+          <a:solidFill>
+            <a:srgbClr val="F26A21"/>
+          </a:solidFill>
+          <a:ln>
+            <a:noFill/>
+          </a:ln>
+        </p:spPr>
+        <p:style>
+          <a:lnRef idx="1">
+            <a:schemeClr val="accent1"/>
+          </a:lnRef>
+          <a:fillRef idx="3">
+            <a:schemeClr val="accent1"/>
+          </a:fillRef>
+          <a:effectRef idx="2">
+            <a:schemeClr val="accent1"/>
+          </a:effectRef>
+          <a:fontRef idx="minor">
+            <a:schemeClr val="lt1"/>
+          </a:fontRef>
+        </p:style>
+        <p:txBody>
+          <a:bodyPr rtlCol="0" anchor="ctr"/>
+          <a:lstStyle/>
+          <a:p>
+            <a:pPr algn="ctr"/>
+          </a:p>
+        </p:txBody>
+      </p:sp>
+      <p:sp>
+        <p:nvSpPr>
+          <p:cNvPr id="36" name="TextBox 35"/>
+          <p:cNvSpPr txBox="1"/>
+          <p:nvPr/>
+        </p:nvSpPr>
+        <p:spPr>
+          <a:xfrm>
+            <a:off x="265176" y="3703320"/>
+            <a:ext cx="411480" cy="196596"/>
+          </a:xfrm>
+          <a:prstGeom prst="rect">
+            <a:avLst/>
+          </a:prstGeom>
+          <a:noFill/>
+        </p:spPr>
+        <p:txBody>
+          <a:bodyPr wrap="square">
+            <a:spAutoFit/>
+          </a:bodyPr>
+          <a:lstStyle/>
+          <a:p>
+            <a:pPr algn="l"/>
+            <a:r>
+              <a:rPr sz="2200" b="1" i="0">
+                <a:solidFill>
+                  <a:srgbClr val="F26A21"/>
+                </a:solidFill>
+                <a:latin typeface="Cambria"/>
+              </a:rPr>
+              <a:t>4</a:t>
+            </a:r>
+          </a:p>
+        </p:txBody>
+      </p:sp>
+      <p:sp>
+        <p:nvSpPr>
+          <p:cNvPr id="37" name="TextBox 36"/>
+          <p:cNvSpPr txBox="1"/>
+          <p:nvPr/>
+        </p:nvSpPr>
+        <p:spPr>
+          <a:xfrm>
+            <a:off x="731520" y="3712463"/>
+            <a:ext cx="6629400" cy="178308"/>
+          </a:xfrm>
+          <a:prstGeom prst="rect">
+            <a:avLst/>
+          </a:prstGeom>
+          <a:noFill/>
+        </p:spPr>
+        <p:txBody>
+          <a:bodyPr wrap="square">
+            <a:spAutoFit/>
+          </a:bodyPr>
+          <a:lstStyle/>
+          <a:p>
+            <a:pPr algn="l"/>
+            <a:r>
+              <a:rPr sz="950" b="1" i="0">
+                <a:solidFill>
+                  <a:srgbClr val="FFFFFF"/>
+                </a:solidFill>
+                <a:latin typeface="Calibri"/>
+              </a:rPr>
+              <a:t>Consent to ERP/MRP &amp; Inventory Evaluation (Separate Motion)</a:t>
+            </a:r>
+          </a:p>
+        </p:txBody>
+      </p:sp>
+      <p:sp>
+        <p:nvSpPr>
+          <p:cNvPr id="38" name="TextBox 37"/>
+          <p:cNvSpPr txBox="1"/>
+          <p:nvPr/>
+        </p:nvSpPr>
+        <p:spPr>
+          <a:xfrm>
+            <a:off x="7516367" y="3694175"/>
+            <a:ext cx="1371600" cy="201168"/>
+          </a:xfrm>
+          <a:prstGeom prst="rect">
+            <a:avLst/>
+          </a:prstGeom>
+          <a:noFill/>
+        </p:spPr>
+        <p:txBody>
+          <a:bodyPr wrap="square">
+            <a:spAutoFit/>
+          </a:bodyPr>
+          <a:lstStyle/>
+          <a:p>
+            <a:pPr algn="l"/>
+            <a:r>
+              <a:rPr sz="850" b="0" i="0">
+                <a:solidFill>
+                  <a:srgbClr val="44BB44"/>
+                </a:solidFill>
+                <a:latin typeface="Calibri"/>
+              </a:rPr>
+              <a:t>☐  Approve</a:t>
+            </a:r>
+          </a:p>
+        </p:txBody>
+      </p:sp>
+      <p:sp>
+        <p:nvSpPr>
+          <p:cNvPr id="39" name="TextBox 38"/>
+          <p:cNvSpPr txBox="1"/>
+          <p:nvPr/>
+        </p:nvSpPr>
+        <p:spPr>
+          <a:xfrm>
+            <a:off x="7516367" y="3840479"/>
+            <a:ext cx="1371600" cy="201168"/>
+          </a:xfrm>
+          <a:prstGeom prst="rect">
+            <a:avLst/>
+          </a:prstGeom>
+          <a:noFill/>
+        </p:spPr>
+        <p:txBody>
+          <a:bodyPr wrap="square">
+            <a:spAutoFit/>
+          </a:bodyPr>
+          <a:lstStyle/>
+          <a:p>
+            <a:pPr algn="l"/>
+            <a:r>
+              <a:rPr sz="850" b="0" i="0">
+                <a:solidFill>
+                  <a:srgbClr val="FF6666"/>
+                </a:solidFill>
+                <a:latin typeface="Calibri"/>
+              </a:rPr>
+              <a:t>☐  Decline</a:t>
+            </a:r>
+          </a:p>
+        </p:txBody>
+      </p:sp>
+      <p:sp>
+        <p:nvSpPr>
+          <p:cNvPr id="40" name="TextBox 39"/>
+          <p:cNvSpPr txBox="1"/>
+          <p:nvPr/>
+        </p:nvSpPr>
+        <p:spPr>
+          <a:xfrm>
+            <a:off x="731520" y="3945635"/>
+            <a:ext cx="6629400" cy="562356"/>
+          </a:xfrm>
+          <a:prstGeom prst="rect">
+            <a:avLst/>
+          </a:prstGeom>
+          <a:noFill/>
+        </p:spPr>
+        <p:txBody>
+          <a:bodyPr wrap="square">
+            <a:spAutoFit/>
+          </a:bodyPr>
+          <a:lstStyle/>
+          <a:p>
+            <a:r>
+              <a:rPr sz="750" b="0">
+                <a:solidFill>
+                  <a:srgbClr val="CCCCCC"/>
+                </a:solidFill>
+                <a:latin typeface="Calibri"/>
+              </a:rPr>
+              <a:t>Authorize Exos to use the same QB data to evaluate its in-house ERP/MRP and inventory</a:t>
+            </a:r>
+          </a:p>
+          <a:p>
+            <a:r>
+              <a:rPr sz="750" b="0">
+                <a:solidFill>
+                  <a:srgbClr val="CCCCCC"/>
+                </a:solidFill>
+                <a:latin typeface="Calibri"/>
+              </a:rPr>
+              <a:t>systems for the combined operation.  Confidential under the NDA.</a:t>
+            </a:r>
+          </a:p>
+          <a:p>
+            <a:r>
+              <a:rPr sz="750" b="0">
+                <a:solidFill>
+                  <a:srgbClr val="CCCCCC"/>
+                </a:solidFill>
+                <a:latin typeface="Calibri"/>
+              </a:rPr>
+              <a:t>Does not create any obligation to implement; evaluation only.</a:t>
+            </a:r>
+          </a:p>
+        </p:txBody>
+      </p:sp>
+      <p:sp>
+        <p:nvSpPr>
+          <p:cNvPr id="41" name="Rectangle 40"/>
+          <p:cNvSpPr/>
+          <p:nvPr/>
+        </p:nvSpPr>
+        <p:spPr>
+          <a:xfrm>
+            <a:off x="182880" y="4553712"/>
+            <a:ext cx="8778240" cy="182880"/>
+          </a:xfrm>
+          <a:prstGeom prst="rect">
+            <a:avLst/>
+          </a:prstGeom>
+          <a:solidFill>
+            <a:srgbClr val="1A0A00"/>
+          </a:solidFill>
+          <a:ln>
+            <a:noFill/>
+          </a:ln>
+        </p:spPr>
+        <p:style>
+          <a:lnRef idx="1">
+            <a:schemeClr val="accent1"/>
+          </a:lnRef>
+          <a:fillRef idx="3">
+            <a:schemeClr val="accent1"/>
+          </a:fillRef>
+          <a:effectRef idx="2">
+            <a:schemeClr val="accent1"/>
+          </a:effectRef>
+          <a:fontRef idx="minor">
+            <a:schemeClr val="lt1"/>
+          </a:fontRef>
+        </p:style>
+        <p:txBody>
+          <a:bodyPr rtlCol="0" anchor="ctr"/>
+          <a:lstStyle/>
+          <a:p>
+            <a:pPr algn="ctr"/>
+          </a:p>
+        </p:txBody>
+      </p:sp>
+      <p:sp>
+        <p:nvSpPr>
+          <p:cNvPr id="42" name="TextBox 41"/>
+          <p:cNvSpPr txBox="1"/>
+          <p:nvPr/>
+        </p:nvSpPr>
+        <p:spPr>
+          <a:xfrm>
+            <a:off x="292608" y="4571999"/>
+            <a:ext cx="8549640" cy="155448"/>
+          </a:xfrm>
+          <a:prstGeom prst="rect">
+            <a:avLst/>
+          </a:prstGeom>
+          <a:noFill/>
+        </p:spPr>
+        <p:txBody>
+          <a:bodyPr wrap="square">
+            <a:spAutoFit/>
+          </a:bodyPr>
+          <a:lstStyle/>
+          <a:p>
+            <a:pPr algn="l"/>
+            <a:r>
+              <a:rPr sz="750" b="0" i="1">
+                <a:solidFill>
+                  <a:srgbClr val="F26A21"/>
+                </a:solidFill>
+                <a:latin typeface="Calibri"/>
+              </a:rPr>
+              <a:t>Governance: John Quinn abstains on all motions as an interested director; motions are decided by the disinterested directors.</a:t>
+            </a:r>
+          </a:p>
+        </p:txBody>
+      </p:sp>
+      <p:sp>
+        <p:nvSpPr>
+          <p:cNvPr id="43" name="TextBox 42"/>
+          <p:cNvSpPr txBox="1"/>
+          <p:nvPr/>
+        </p:nvSpPr>
+        <p:spPr>
+          <a:xfrm>
+            <a:off x="1554480" y="4892040"/>
+            <a:ext cx="6035040" cy="201168"/>
+          </a:xfrm>
+          <a:prstGeom prst="rect">
+            <a:avLst/>
+          </a:prstGeom>
+          <a:noFill/>
+        </p:spPr>
+        <p:txBody>
+          <a:bodyPr wrap="square">
+            <a:spAutoFit/>
+          </a:bodyPr>
+          <a:lstStyle/>
+          <a:p>
+            <a:pPr algn="ctr"/>
             <a:r>
               <a:rPr sz="700" b="0" i="1">
                 <a:solidFill>
@@ -4322,7 +4957,7 @@
       </p:sp>
       <p:sp>
         <p:nvSpPr>
-          <p:cNvPr id="29" name="TextBox 28"/>
+          <p:cNvPr id="44" name="TextBox 43"/>
           <p:cNvSpPr txBox="1"/>
           <p:nvPr/>
         </p:nvSpPr>
@@ -4598,7 +5233,7 @@
                   <a:srgbClr val="FFFFFF"/>
                 </a:solidFill>
               </a:rPr>
-              <a:t>Board Votes — Three Motions</a:t>
+              <a:t>Board Votes — Four Motions</a:t>
             </a:r>
             <a:endParaRPr lang="en-US" sz="1400" dirty="0"/>
           </a:p>
@@ -5328,7 +5963,7 @@
                   <a:srgbClr val="F26A21"/>
                 </a:solidFill>
               </a:rPr>
-              <a:t>The Board is asked to vote on Motions 1–3. Questions and open items welcome.</a:t>
+              <a:t>The Board is asked to vote on Motions 1–4. Questions and open items welcome.</a:t>
             </a:r>
             <a:endParaRPr lang="en-US" sz="1300" dirty="0"/>
           </a:p>
@@ -5438,7 +6073,7 @@
                 <a:ea typeface="Cambria" pitchFamily="34" charset="-122"/>
                 <a:cs typeface="Cambria" pitchFamily="34" charset="-120"/>
               </a:rPr>
-              <a:t>The Board is asked to vote on three motions today.</a:t>
+              <a:t>The Board is asked to vote on four motions today.</a:t>
             </a:r>
             <a:endParaRPr lang="en-US" sz="3400" dirty="0"/>
           </a:p>
@@ -5534,7 +6169,7 @@
               <a:buNone/>
             </a:pPr>
             <a:r>
-              <a:rPr lang="en-US" sz="1400" b="1" dirty="0">
+              <a:rPr lang="en-US" sz="1200" b="1" dirty="0">
                 <a:solidFill>
                   <a:srgbClr val="F26A21"/>
                 </a:solidFill>
@@ -5545,7 +6180,7 @@
               <a:buNone/>
             </a:pPr>
             <a:r>
-              <a:rPr lang="en-US" sz="1400" dirty="0">
+              <a:rPr lang="en-US" sz="1200" dirty="0">
                 <a:solidFill>
                   <a:srgbClr val="CCCCCC"/>
                 </a:solidFill>
@@ -5557,7 +6192,7 @@
               <a:buNone/>
             </a:pPr>
             <a:r>
-              <a:rPr lang="en-US" sz="1400" b="1" dirty="0">
+              <a:rPr lang="en-US" sz="1200" b="1" dirty="0">
                 <a:solidFill>
                   <a:srgbClr val="F26A21"/>
                 </a:solidFill>
@@ -5568,7 +6203,7 @@
               <a:buNone/>
             </a:pPr>
             <a:r>
-              <a:rPr lang="en-US" sz="1400" dirty="0">
+              <a:rPr lang="en-US" sz="1200" dirty="0">
                 <a:solidFill>
                   <a:srgbClr val="CCCCCC"/>
                 </a:solidFill>
@@ -5580,18 +6215,35 @@
               <a:buNone/>
             </a:pPr>
             <a:r>
-              <a:rPr lang="en-US" sz="1400" b="1" dirty="0">
+              <a:rPr lang="en-US" sz="1200" b="1" dirty="0">
                 <a:solidFill>
                   <a:srgbClr val="F26A21"/>
                 </a:solidFill>
               </a:rPr>
               <a:t>Motion 3: </a:t>
             </a:r>
+            <a:r>
+              <a:rPr lang="en-US" sz="1200" dirty="0" b="0">
+                <a:solidFill>
+                  <a:srgbClr val="CCCCCC"/>
+                </a:solidFill>
+              </a:rPr>
+              <a:t>Correct AR Unbilled &amp; Deposits accounting within 5 days (A La Carte + outside CPAs)
+</a:t>
+            </a:r>
+            <a:r>
+              <a:rPr lang="en-US" sz="1200" b="1" dirty="0">
+                <a:solidFill>
+                  <a:srgbClr val="F26A21"/>
+                </a:solidFill>
+              </a:rPr>
+              <a:t>Motion 4: </a:t>
+            </a:r>
             <a:pPr indent="0" marL="0">
               <a:buNone/>
             </a:pPr>
             <a:r>
-              <a:rPr lang="en-US" sz="1400" dirty="0">
+              <a:rPr lang="en-US" sz="1200" dirty="0">
                 <a:solidFill>
                   <a:srgbClr val="CCCCCC"/>
                 </a:solidFill>

--- a/drafts/Exos_SSLC_Board_Offer_Overview_2026-10-10_r2.pptx
+++ b/drafts/Exos_SSLC_Board_Offer_Overview_2026-10-10_r2.pptx
@@ -4051,7 +4051,7 @@
           <a:lstStyle/>
           <a:p>
             <a:r>
-              <a:rPr sz="750" b="0">
+              <a:rPr sz="700" b="0">
                 <a:solidFill>
                   <a:srgbClr val="CCCCCC"/>
                 </a:solidFill>
@@ -4062,7 +4062,7 @@
           </a:p>
           <a:p>
             <a:r>
-              <a:rPr sz="750" b="0">
+              <a:rPr sz="700" b="0">
                 <a:solidFill>
                   <a:srgbClr val="CCCCCC"/>
                 </a:solidFill>
@@ -4073,13 +4073,35 @@
           </a:p>
           <a:p>
             <a:r>
-              <a:rPr sz="750" b="0">
+              <a:rPr sz="700" b="0">
                 <a:solidFill>
                   <a:srgbClr val="CCCCCC"/>
                 </a:solidFill>
                 <a:latin typeface="Calibri"/>
               </a:rPr>
               <a:t>Basis: Cal. Corp. Code §1602 director inspection right + AAA §4 confirmatory diligence.</a:t>
+            </a:r>
+          </a:p>
+          <a:p>
+            <a:r>
+              <a:rPr sz="700" b="0">
+                <a:solidFill>
+                  <a:srgbClr val="CCCCCC"/>
+                </a:solidFill>
+                <a:latin typeface="Calibri"/>
+              </a:rPr>
+              <a:t>Also provide: stock ledger, cap table, subscription agreements, and paid-in capital</a:t>
+            </a:r>
+          </a:p>
+          <a:p>
+            <a:r>
+              <a:rPr sz="700" b="0">
+                <a:solidFill>
+                  <a:srgbClr val="CCCCCC"/>
+                </a:solidFill>
+                <a:latin typeface="Calibri"/>
+              </a:rPr>
+              <a:t>by shareholder (books: $1,014,465 total paid-in; need per-holder to compare payout vs. invested).</a:t>
             </a:r>
           </a:p>
           <a:p>

--- a/drafts/Exos_SSLC_Board_Offer_Overview_2026-10-10_r2.pptx
+++ b/drafts/Exos_SSLC_Board_Offer_Overview_2026-10-10_r2.pptx
@@ -15,6 +15,7 @@
     <p:sldId id="262" r:id="rId8"/>
     <p:sldId id="263" r:id="rId9"/>
     <p:sldId id="264" r:id="rId10"/>
+    <p:sldId id="268" r:id="rId19"/>
     <p:sldId id="267" r:id="rId18"/>
     <p:sldId id="265" r:id="rId11"/>
   </p:sldIdLst>
@@ -819,6 +820,147 @@
             <a:br/>
             <a:r>
               <a:t>Governance: John Quinn abstains as interested director (Exos is offeror; Quinn holds Exos loan to SSLC).</a:t>
+            </a:r>
+          </a:p>
+        </p:txBody>
+      </p:sp>
+      <p:sp>
+        <p:nvSpPr>
+          <p:cNvPr id="4" name="Slide Number Placeholder 3"/>
+          <p:cNvSpPr>
+            <a:spLocks noGrp="1"/>
+          </p:cNvSpPr>
+          <p:nvPr>
+            <p:ph type="sldNum" idx="5" sz="quarter"/>
+          </p:nvPr>
+        </p:nvSpPr>
+        <p:spPr/>
+      </p:sp>
+    </p:spTree>
+  </p:cSld>
+  <p:clrMapOvr>
+    <a:masterClrMapping/>
+  </p:clrMapOvr>
+</p:notes>
+</file>
+
+<file path=ppt/notesSlides/notesSlide13.xml><?xml version="1.0" encoding="utf-8"?>
+<p:notes xmlns:a="http://schemas.openxmlformats.org/drawingml/2006/main" xmlns:p="http://schemas.openxmlformats.org/presentationml/2006/main" xmlns:r="http://schemas.openxmlformats.org/officeDocument/2006/relationships">
+  <p:cSld>
+    <p:spTree>
+      <p:nvGrpSpPr>
+        <p:cNvPr id="1" name=""/>
+        <p:cNvGrpSpPr/>
+        <p:nvPr/>
+      </p:nvGrpSpPr>
+      <p:grpSpPr>
+        <a:xfrm>
+          <a:off x="0" y="0"/>
+          <a:ext cx="0" cy="0"/>
+          <a:chOff x="0" y="0"/>
+          <a:chExt cx="0" cy="0"/>
+        </a:xfrm>
+      </p:grpSpPr>
+      <p:sp>
+        <p:nvSpPr>
+          <p:cNvPr id="2" name="Slide Image Placeholder 1"/>
+          <p:cNvSpPr>
+            <a:spLocks noGrp="1"/>
+          </p:cNvSpPr>
+          <p:nvPr>
+            <p:ph type="sldImg" idx="2"/>
+          </p:nvPr>
+        </p:nvSpPr>
+        <p:spPr/>
+      </p:sp>
+      <p:sp>
+        <p:nvSpPr>
+          <p:cNvPr id="3" name="Notes Placeholder 2"/>
+          <p:cNvSpPr>
+            <a:spLocks noGrp="1"/>
+          </p:cNvSpPr>
+          <p:nvPr>
+            <p:ph type="body" idx="3" sz="quarter"/>
+          </p:nvPr>
+        </p:nvSpPr>
+        <p:spPr/>
+        <p:txBody>
+          <a:bodyPr/>
+          <a:lstStyle/>
+          <a:p>
+            <a:r>
+              <a:t>Projected Shareholder Payout — Sources and Ranges</a:t>
+            </a:r>
+            <a:br/>
+            <a:br/>
+            <a:r>
+              <a:t>BASE CASE:</a:t>
+            </a:r>
+            <a:br/>
+            <a:r>
+              <a:t>  Exos cash price: $2,510,000 (Offer ①)</a:t>
+            </a:r>
+            <a:br/>
+            <a:r>
+              <a:t>  SSLC cash at close: ~$675,000 (est. from $590K on 10/11 + IM pace through Jan 2027)</a:t>
+            </a:r>
+            <a:br/>
+            <a:r>
+              <a:t>  Less: loans &amp; notes $1,027,783 (Microcosm $451K, Bookstore $321K, EIDL $132K, Wertz $92.5K, Exos $31.2K)</a:t>
+            </a:r>
+            <a:br/>
+            <a:r>
+              <a:t>  Less: Exos loan interest ~$8K (11% to 1/15/27)</a:t>
+            </a:r>
+            <a:br/>
+            <a:r>
+              <a:t>  Less: other current liabilities $148,738 (10/11 QB)</a:t>
+            </a:r>
+            <a:br/>
+            <a:r>
+              <a:t>  Less: customer deposits $120,000 (IM; buyer assumes performance)</a:t>
+            </a:r>
+            <a:br/>
+            <a:r>
+              <a:t>  Less: billed-ahead work $250,000 (Exos assessment: base; range $100K–$390K)</a:t>
+            </a:r>
+            <a:br/>
+            <a:r>
+              <a:t>  Less: 5% escrow $125,500 (AAA §7; released at 12 months barring claims)</a:t>
+            </a:r>
+            <a:br/>
+            <a:r>
+              <a:t>  Net cash at close: ~$1.51M</a:t>
+            </a:r>
+            <a:br/>
+            <a:r>
+              <a:t>  Plus: Exos stock $1.0M (EAI units, Rule 504, 409A)</a:t>
+            </a:r>
+            <a:br/>
+            <a:r>
+              <a:t>  Plus: escrow release $126K</a:t>
+            </a:r>
+            <a:br/>
+            <a:r>
+              <a:t>  Plus: earn-outs $2.525M base (FY27–FY31 tank milestones + stock)</a:t>
+            </a:r>
+            <a:br/>
+            <a:r>
+              <a:t>  Total: ~$5.16M</a:t>
+            </a:r>
+            <a:br/>
+            <a:br/>
+            <a:r>
+              <a:t>LOW CASE (net cash $1.28M / 5-yr $3.4M): billed-ahead $390K; SSLC cash stays at $590K; earn-outs $950K</a:t>
+            </a:r>
+            <a:br/>
+            <a:r>
+              <a:t>HIGH CASE (net cash $1.74M / 5-yr $7.0M): billed-ahead $100K; SSLC cash $761K; earn-outs $4.1M</a:t>
+            </a:r>
+            <a:br/>
+            <a:br/>
+            <a:r>
+              <a:t>Stock ledger need: Exos's 18.06% stake credited via $790K in purchase price. Other holders' exact per-share payout cannot be confirmed without stock ledger and subscription agreements. GL records 7/24/2024 conversion: $30K Exos loan → 5,464 shares. Must be reconciled.</a:t>
             </a:r>
           </a:p>
         </p:txBody>
@@ -3279,7 +3421,7 @@
         <p:spPr>
           <a:xfrm>
             <a:off x="228600" y="64008"/>
-            <a:ext cx="8686800" cy="384048"/>
+            <a:ext cx="8686800" cy="402336"/>
           </a:xfrm>
           <a:prstGeom prst="rect">
             <a:avLst/>
@@ -3294,13 +3436,13 @@
           <a:p>
             <a:pPr algn="l"/>
             <a:r>
-              <a:rPr sz="2000" b="1" i="0">
+              <a:rPr sz="1500" b="1">
                 <a:solidFill>
                   <a:srgbClr val="FFFFFF"/>
                 </a:solidFill>
                 <a:latin typeface="Cambria"/>
               </a:rPr>
-              <a:t>Board Motions</a:t>
+              <a:t>Projected Shareholder Payout — Close Jan 15, 2027  (Base Case, Current Books)</a:t>
             </a:r>
           </a:p>
         </p:txBody>
@@ -3313,8 +3455,8 @@
         </p:nvSpPr>
         <p:spPr>
           <a:xfrm>
-            <a:off x="228600" y="457200"/>
-            <a:ext cx="1371600" cy="32004"/>
+            <a:off x="228600" y="466344"/>
+            <a:ext cx="2011680" cy="32004"/>
           </a:xfrm>
           <a:prstGeom prst="rect">
             <a:avLst/>
@@ -3356,8 +3498,8 @@
         </p:nvSpPr>
         <p:spPr>
           <a:xfrm>
-            <a:off x="182880" y="512064"/>
-            <a:ext cx="8778240" cy="896112"/>
+            <a:off x="164592" y="521207"/>
+            <a:ext cx="4315968" cy="3511296"/>
           </a:xfrm>
           <a:prstGeom prst="rect">
             <a:avLst/>
@@ -3399,8 +3541,8 @@
         </p:nvSpPr>
         <p:spPr>
           <a:xfrm>
-            <a:off x="182880" y="512064"/>
-            <a:ext cx="50292" cy="896112"/>
+            <a:off x="164592" y="521207"/>
+            <a:ext cx="45720" cy="3511296"/>
           </a:xfrm>
           <a:prstGeom prst="rect">
             <a:avLst/>
@@ -3436,20 +3578,195 @@
       </p:sp>
       <p:sp>
         <p:nvSpPr>
-          <p:cNvPr id="7" name="Rectangle 6"/>
+          <p:cNvPr id="7" name="TextBox 6"/>
+          <p:cNvSpPr txBox="1"/>
+          <p:nvPr/>
+        </p:nvSpPr>
+        <p:spPr>
+          <a:xfrm>
+            <a:off x="274320" y="576071"/>
+            <a:ext cx="4151376" cy="201168"/>
+          </a:xfrm>
+          <a:prstGeom prst="rect">
+            <a:avLst/>
+          </a:prstGeom>
+          <a:noFill/>
+        </p:spPr>
+        <p:txBody>
+          <a:bodyPr wrap="square">
+            <a:spAutoFit/>
+          </a:bodyPr>
+          <a:lstStyle/>
+          <a:p>
+            <a:pPr algn="l"/>
+            <a:r>
+              <a:rPr sz="950" b="1" i="0">
+                <a:solidFill>
+                  <a:srgbClr val="F26A21"/>
+                </a:solidFill>
+                <a:latin typeface="Calibri"/>
+              </a:rPr>
+              <a:t>Cash to Shareholders at Close</a:t>
+            </a:r>
+          </a:p>
+        </p:txBody>
+      </p:sp>
+      <p:sp>
+        <p:nvSpPr>
+          <p:cNvPr id="8" name="TextBox 7"/>
+          <p:cNvSpPr txBox="1"/>
+          <p:nvPr/>
+        </p:nvSpPr>
+        <p:spPr>
+          <a:xfrm>
+            <a:off x="274320" y="795527"/>
+            <a:ext cx="3154679" cy="169164"/>
+          </a:xfrm>
+          <a:prstGeom prst="rect">
+            <a:avLst/>
+          </a:prstGeom>
+          <a:noFill/>
+        </p:spPr>
+        <p:txBody>
+          <a:bodyPr wrap="square">
+            <a:spAutoFit/>
+          </a:bodyPr>
+          <a:lstStyle/>
+          <a:p>
+            <a:pPr algn="l"/>
+            <a:r>
+              <a:rPr sz="750" b="0" i="0">
+                <a:solidFill>
+                  <a:srgbClr val="CCCCCC"/>
+                </a:solidFill>
+                <a:latin typeface="Calibri"/>
+              </a:rPr>
+              <a:t>Exos cash purchase price</a:t>
+            </a:r>
+          </a:p>
+        </p:txBody>
+      </p:sp>
+      <p:sp>
+        <p:nvSpPr>
+          <p:cNvPr id="9" name="TextBox 8"/>
+          <p:cNvSpPr txBox="1"/>
+          <p:nvPr/>
+        </p:nvSpPr>
+        <p:spPr>
+          <a:xfrm>
+            <a:off x="3474719" y="795527"/>
+            <a:ext cx="914400" cy="169164"/>
+          </a:xfrm>
+          <a:prstGeom prst="rect">
+            <a:avLst/>
+          </a:prstGeom>
+          <a:noFill/>
+        </p:spPr>
+        <p:txBody>
+          <a:bodyPr wrap="square">
+            <a:spAutoFit/>
+          </a:bodyPr>
+          <a:lstStyle/>
+          <a:p>
+            <a:pPr algn="r"/>
+            <a:r>
+              <a:rPr sz="750" b="0" i="0">
+                <a:solidFill>
+                  <a:srgbClr val="FFFFFF"/>
+                </a:solidFill>
+                <a:latin typeface="Calibri"/>
+              </a:rPr>
+              <a:t>+$2,510,000</a:t>
+            </a:r>
+          </a:p>
+        </p:txBody>
+      </p:sp>
+      <p:sp>
+        <p:nvSpPr>
+          <p:cNvPr id="10" name="TextBox 9"/>
+          <p:cNvSpPr txBox="1"/>
+          <p:nvPr/>
+        </p:nvSpPr>
+        <p:spPr>
+          <a:xfrm>
+            <a:off x="274320" y="960119"/>
+            <a:ext cx="3154679" cy="169164"/>
+          </a:xfrm>
+          <a:prstGeom prst="rect">
+            <a:avLst/>
+          </a:prstGeom>
+          <a:noFill/>
+        </p:spPr>
+        <p:txBody>
+          <a:bodyPr wrap="square">
+            <a:spAutoFit/>
+          </a:bodyPr>
+          <a:lstStyle/>
+          <a:p>
+            <a:pPr algn="l"/>
+            <a:r>
+              <a:rPr sz="750" b="0" i="1">
+                <a:solidFill>
+                  <a:srgbClr val="888888"/>
+                </a:solidFill>
+                <a:latin typeface="Calibri"/>
+              </a:rPr>
+              <a:t>+ SSLC cash at close (est.; $590K on 10/11)</a:t>
+            </a:r>
+          </a:p>
+        </p:txBody>
+      </p:sp>
+      <p:sp>
+        <p:nvSpPr>
+          <p:cNvPr id="11" name="TextBox 10"/>
+          <p:cNvSpPr txBox="1"/>
+          <p:nvPr/>
+        </p:nvSpPr>
+        <p:spPr>
+          <a:xfrm>
+            <a:off x="3474719" y="960119"/>
+            <a:ext cx="914400" cy="169164"/>
+          </a:xfrm>
+          <a:prstGeom prst="rect">
+            <a:avLst/>
+          </a:prstGeom>
+          <a:noFill/>
+        </p:spPr>
+        <p:txBody>
+          <a:bodyPr wrap="square">
+            <a:spAutoFit/>
+          </a:bodyPr>
+          <a:lstStyle/>
+          <a:p>
+            <a:pPr algn="r"/>
+            <a:r>
+              <a:rPr sz="750" b="0" i="0">
+                <a:solidFill>
+                  <a:srgbClr val="888888"/>
+                </a:solidFill>
+                <a:latin typeface="Calibri"/>
+              </a:rPr>
+              <a:t>+$675,000</a:t>
+            </a:r>
+          </a:p>
+        </p:txBody>
+      </p:sp>
+      <p:sp>
+        <p:nvSpPr>
+          <p:cNvPr id="12" name="Rectangle 11"/>
           <p:cNvSpPr/>
           <p:nvPr/>
         </p:nvSpPr>
         <p:spPr>
           <a:xfrm>
-            <a:off x="182880" y="512064"/>
-            <a:ext cx="8778240" cy="233172"/>
+            <a:off x="274320" y="1161287"/>
+            <a:ext cx="4151376" cy="9144"/>
           </a:xfrm>
           <a:prstGeom prst="rect">
             <a:avLst/>
           </a:prstGeom>
           <a:solidFill>
-            <a:srgbClr val="1A1A1A"/>
+            <a:srgbClr val="444444"/>
           </a:solidFill>
           <a:ln>
             <a:noFill/>
@@ -3479,14 +3796,469 @@
       </p:sp>
       <p:sp>
         <p:nvSpPr>
-          <p:cNvPr id="8" name="Rectangle 7"/>
+          <p:cNvPr id="13" name="TextBox 12"/>
+          <p:cNvSpPr txBox="1"/>
+          <p:nvPr/>
+        </p:nvSpPr>
+        <p:spPr>
+          <a:xfrm>
+            <a:off x="274320" y="1124711"/>
+            <a:ext cx="3154679" cy="169164"/>
+          </a:xfrm>
+          <a:prstGeom prst="rect">
+            <a:avLst/>
+          </a:prstGeom>
+          <a:noFill/>
+        </p:spPr>
+        <p:txBody>
+          <a:bodyPr wrap="square">
+            <a:spAutoFit/>
+          </a:bodyPr>
+          <a:lstStyle/>
+          <a:p>
+            <a:pPr algn="l"/>
+            <a:r>
+              <a:rPr sz="750" b="0" i="0">
+                <a:solidFill>
+                  <a:srgbClr val="CCCCCC"/>
+                </a:solidFill>
+                <a:latin typeface="Calibri"/>
+              </a:rPr>
+              <a:t>Subtotal inflows</a:t>
+            </a:r>
+          </a:p>
+        </p:txBody>
+      </p:sp>
+      <p:sp>
+        <p:nvSpPr>
+          <p:cNvPr id="14" name="TextBox 13"/>
+          <p:cNvSpPr txBox="1"/>
+          <p:nvPr/>
+        </p:nvSpPr>
+        <p:spPr>
+          <a:xfrm>
+            <a:off x="3474719" y="1124711"/>
+            <a:ext cx="914400" cy="169164"/>
+          </a:xfrm>
+          <a:prstGeom prst="rect">
+            <a:avLst/>
+          </a:prstGeom>
+          <a:noFill/>
+        </p:spPr>
+        <p:txBody>
+          <a:bodyPr wrap="square">
+            <a:spAutoFit/>
+          </a:bodyPr>
+          <a:lstStyle/>
+          <a:p>
+            <a:pPr algn="r"/>
+            <a:r>
+              <a:rPr sz="750" b="1" i="0">
+                <a:solidFill>
+                  <a:srgbClr val="CCCCCC"/>
+                </a:solidFill>
+                <a:latin typeface="Calibri"/>
+              </a:rPr>
+              <a:t>$3,185,000</a:t>
+            </a:r>
+          </a:p>
+        </p:txBody>
+      </p:sp>
+      <p:sp>
+        <p:nvSpPr>
+          <p:cNvPr id="15" name="TextBox 14"/>
+          <p:cNvSpPr txBox="1"/>
+          <p:nvPr/>
+        </p:nvSpPr>
+        <p:spPr>
+          <a:xfrm>
+            <a:off x="274320" y="1298447"/>
+            <a:ext cx="3154679" cy="169164"/>
+          </a:xfrm>
+          <a:prstGeom prst="rect">
+            <a:avLst/>
+          </a:prstGeom>
+          <a:noFill/>
+        </p:spPr>
+        <p:txBody>
+          <a:bodyPr wrap="square">
+            <a:spAutoFit/>
+          </a:bodyPr>
+          <a:lstStyle/>
+          <a:p>
+            <a:pPr algn="l"/>
+            <a:r>
+              <a:rPr sz="750" b="0" i="0">
+                <a:solidFill>
+                  <a:srgbClr val="CCCCCC"/>
+                </a:solidFill>
+                <a:latin typeface="Calibri"/>
+              </a:rPr>
+              <a:t>− SSLC loans &amp; notes</a:t>
+            </a:r>
+          </a:p>
+        </p:txBody>
+      </p:sp>
+      <p:sp>
+        <p:nvSpPr>
+          <p:cNvPr id="16" name="TextBox 15"/>
+          <p:cNvSpPr txBox="1"/>
+          <p:nvPr/>
+        </p:nvSpPr>
+        <p:spPr>
+          <a:xfrm>
+            <a:off x="3474719" y="1298447"/>
+            <a:ext cx="914400" cy="169164"/>
+          </a:xfrm>
+          <a:prstGeom prst="rect">
+            <a:avLst/>
+          </a:prstGeom>
+          <a:noFill/>
+        </p:spPr>
+        <p:txBody>
+          <a:bodyPr wrap="square">
+            <a:spAutoFit/>
+          </a:bodyPr>
+          <a:lstStyle/>
+          <a:p>
+            <a:pPr algn="r"/>
+            <a:r>
+              <a:rPr sz="750" b="0" i="0">
+                <a:solidFill>
+                  <a:srgbClr val="FF7755"/>
+                </a:solidFill>
+                <a:latin typeface="Calibri"/>
+              </a:rPr>
+              <a:t>($1,027,783)</a:t>
+            </a:r>
+          </a:p>
+        </p:txBody>
+      </p:sp>
+      <p:sp>
+        <p:nvSpPr>
+          <p:cNvPr id="17" name="TextBox 16"/>
+          <p:cNvSpPr txBox="1"/>
+          <p:nvPr/>
+        </p:nvSpPr>
+        <p:spPr>
+          <a:xfrm>
+            <a:off x="274320" y="1449323"/>
+            <a:ext cx="4151376" cy="146304"/>
+          </a:xfrm>
+          <a:prstGeom prst="rect">
+            <a:avLst/>
+          </a:prstGeom>
+          <a:noFill/>
+        </p:spPr>
+        <p:txBody>
+          <a:bodyPr wrap="square">
+            <a:spAutoFit/>
+          </a:bodyPr>
+          <a:lstStyle/>
+          <a:p>
+            <a:pPr algn="l"/>
+            <a:r>
+              <a:rPr sz="650" b="0" i="1">
+                <a:solidFill>
+                  <a:srgbClr val="888888"/>
+                </a:solidFill>
+                <a:latin typeface="Calibri"/>
+              </a:rPr>
+              <a:t>  Microcosm $451K · Bookstore $321K · EIDL $132K · Wertz $92.5K · Exos $31.2K+int</a:t>
+            </a:r>
+          </a:p>
+        </p:txBody>
+      </p:sp>
+      <p:sp>
+        <p:nvSpPr>
+          <p:cNvPr id="18" name="TextBox 17"/>
+          <p:cNvSpPr txBox="1"/>
+          <p:nvPr/>
+        </p:nvSpPr>
+        <p:spPr>
+          <a:xfrm>
+            <a:off x="274320" y="1591055"/>
+            <a:ext cx="3154679" cy="169164"/>
+          </a:xfrm>
+          <a:prstGeom prst="rect">
+            <a:avLst/>
+          </a:prstGeom>
+          <a:noFill/>
+        </p:spPr>
+        <p:txBody>
+          <a:bodyPr wrap="square">
+            <a:spAutoFit/>
+          </a:bodyPr>
+          <a:lstStyle/>
+          <a:p>
+            <a:pPr algn="l"/>
+            <a:r>
+              <a:rPr sz="750" b="0" i="0">
+                <a:solidFill>
+                  <a:srgbClr val="CCCCCC"/>
+                </a:solidFill>
+                <a:latin typeface="Calibri"/>
+              </a:rPr>
+              <a:t>− Other current liabilities (AP, accruals)</a:t>
+            </a:r>
+          </a:p>
+        </p:txBody>
+      </p:sp>
+      <p:sp>
+        <p:nvSpPr>
+          <p:cNvPr id="19" name="TextBox 18"/>
+          <p:cNvSpPr txBox="1"/>
+          <p:nvPr/>
+        </p:nvSpPr>
+        <p:spPr>
+          <a:xfrm>
+            <a:off x="3474719" y="1591055"/>
+            <a:ext cx="914400" cy="169164"/>
+          </a:xfrm>
+          <a:prstGeom prst="rect">
+            <a:avLst/>
+          </a:prstGeom>
+          <a:noFill/>
+        </p:spPr>
+        <p:txBody>
+          <a:bodyPr wrap="square">
+            <a:spAutoFit/>
+          </a:bodyPr>
+          <a:lstStyle/>
+          <a:p>
+            <a:pPr algn="r"/>
+            <a:r>
+              <a:rPr sz="750" b="0" i="0">
+                <a:solidFill>
+                  <a:srgbClr val="FF7755"/>
+                </a:solidFill>
+                <a:latin typeface="Calibri"/>
+              </a:rPr>
+              <a:t>($148,738)</a:t>
+            </a:r>
+          </a:p>
+        </p:txBody>
+      </p:sp>
+      <p:sp>
+        <p:nvSpPr>
+          <p:cNvPr id="20" name="TextBox 19"/>
+          <p:cNvSpPr txBox="1"/>
+          <p:nvPr/>
+        </p:nvSpPr>
+        <p:spPr>
+          <a:xfrm>
+            <a:off x="274320" y="1755647"/>
+            <a:ext cx="3154679" cy="169164"/>
+          </a:xfrm>
+          <a:prstGeom prst="rect">
+            <a:avLst/>
+          </a:prstGeom>
+          <a:noFill/>
+        </p:spPr>
+        <p:txBody>
+          <a:bodyPr wrap="square">
+            <a:spAutoFit/>
+          </a:bodyPr>
+          <a:lstStyle/>
+          <a:p>
+            <a:pPr algn="l"/>
+            <a:r>
+              <a:rPr sz="750" b="0" i="0">
+                <a:solidFill>
+                  <a:srgbClr val="CCCCCC"/>
+                </a:solidFill>
+                <a:latin typeface="Calibri"/>
+              </a:rPr>
+              <a:t>− Customer deposits (IM, transferred)</a:t>
+            </a:r>
+          </a:p>
+        </p:txBody>
+      </p:sp>
+      <p:sp>
+        <p:nvSpPr>
+          <p:cNvPr id="21" name="TextBox 20"/>
+          <p:cNvSpPr txBox="1"/>
+          <p:nvPr/>
+        </p:nvSpPr>
+        <p:spPr>
+          <a:xfrm>
+            <a:off x="3474719" y="1755647"/>
+            <a:ext cx="914400" cy="169164"/>
+          </a:xfrm>
+          <a:prstGeom prst="rect">
+            <a:avLst/>
+          </a:prstGeom>
+          <a:noFill/>
+        </p:spPr>
+        <p:txBody>
+          <a:bodyPr wrap="square">
+            <a:spAutoFit/>
+          </a:bodyPr>
+          <a:lstStyle/>
+          <a:p>
+            <a:pPr algn="r"/>
+            <a:r>
+              <a:rPr sz="750" b="0" i="0">
+                <a:solidFill>
+                  <a:srgbClr val="FF7755"/>
+                </a:solidFill>
+                <a:latin typeface="Calibri"/>
+              </a:rPr>
+              <a:t>($120,000)</a:t>
+            </a:r>
+          </a:p>
+        </p:txBody>
+      </p:sp>
+      <p:sp>
+        <p:nvSpPr>
+          <p:cNvPr id="22" name="TextBox 21"/>
+          <p:cNvSpPr txBox="1"/>
+          <p:nvPr/>
+        </p:nvSpPr>
+        <p:spPr>
+          <a:xfrm>
+            <a:off x="274320" y="1920239"/>
+            <a:ext cx="3154679" cy="169164"/>
+          </a:xfrm>
+          <a:prstGeom prst="rect">
+            <a:avLst/>
+          </a:prstGeom>
+          <a:noFill/>
+        </p:spPr>
+        <p:txBody>
+          <a:bodyPr wrap="square">
+            <a:spAutoFit/>
+          </a:bodyPr>
+          <a:lstStyle/>
+          <a:p>
+            <a:pPr algn="l"/>
+            <a:r>
+              <a:rPr sz="750" b="0" i="0">
+                <a:solidFill>
+                  <a:srgbClr val="CCCCCC"/>
+                </a:solidFill>
+                <a:latin typeface="Calibri"/>
+              </a:rPr>
+              <a:t>− Billed-ahead work, genuine (Exos est.)</a:t>
+            </a:r>
+          </a:p>
+        </p:txBody>
+      </p:sp>
+      <p:sp>
+        <p:nvSpPr>
+          <p:cNvPr id="23" name="TextBox 22"/>
+          <p:cNvSpPr txBox="1"/>
+          <p:nvPr/>
+        </p:nvSpPr>
+        <p:spPr>
+          <a:xfrm>
+            <a:off x="3474719" y="1920239"/>
+            <a:ext cx="914400" cy="169164"/>
+          </a:xfrm>
+          <a:prstGeom prst="rect">
+            <a:avLst/>
+          </a:prstGeom>
+          <a:noFill/>
+        </p:spPr>
+        <p:txBody>
+          <a:bodyPr wrap="square">
+            <a:spAutoFit/>
+          </a:bodyPr>
+          <a:lstStyle/>
+          <a:p>
+            <a:pPr algn="r"/>
+            <a:r>
+              <a:rPr sz="750" b="0" i="0">
+                <a:solidFill>
+                  <a:srgbClr val="FF7755"/>
+                </a:solidFill>
+                <a:latin typeface="Calibri"/>
+              </a:rPr>
+              <a:t>($250,000)</a:t>
+            </a:r>
+          </a:p>
+        </p:txBody>
+      </p:sp>
+      <p:sp>
+        <p:nvSpPr>
+          <p:cNvPr id="24" name="TextBox 23"/>
+          <p:cNvSpPr txBox="1"/>
+          <p:nvPr/>
+        </p:nvSpPr>
+        <p:spPr>
+          <a:xfrm>
+            <a:off x="274320" y="2084831"/>
+            <a:ext cx="3154679" cy="169164"/>
+          </a:xfrm>
+          <a:prstGeom prst="rect">
+            <a:avLst/>
+          </a:prstGeom>
+          <a:noFill/>
+        </p:spPr>
+        <p:txBody>
+          <a:bodyPr wrap="square">
+            <a:spAutoFit/>
+          </a:bodyPr>
+          <a:lstStyle/>
+          <a:p>
+            <a:pPr algn="l"/>
+            <a:r>
+              <a:rPr sz="750" b="0" i="0">
+                <a:solidFill>
+                  <a:srgbClr val="CCCCCC"/>
+                </a:solidFill>
+                <a:latin typeface="Calibri"/>
+              </a:rPr>
+              <a:t>− 5% escrow holdback (released 12 months)</a:t>
+            </a:r>
+          </a:p>
+        </p:txBody>
+      </p:sp>
+      <p:sp>
+        <p:nvSpPr>
+          <p:cNvPr id="25" name="TextBox 24"/>
+          <p:cNvSpPr txBox="1"/>
+          <p:nvPr/>
+        </p:nvSpPr>
+        <p:spPr>
+          <a:xfrm>
+            <a:off x="3474719" y="2084831"/>
+            <a:ext cx="914400" cy="169164"/>
+          </a:xfrm>
+          <a:prstGeom prst="rect">
+            <a:avLst/>
+          </a:prstGeom>
+          <a:noFill/>
+        </p:spPr>
+        <p:txBody>
+          <a:bodyPr wrap="square">
+            <a:spAutoFit/>
+          </a:bodyPr>
+          <a:lstStyle/>
+          <a:p>
+            <a:pPr algn="r"/>
+            <a:r>
+              <a:rPr sz="750" b="0" i="0">
+                <a:solidFill>
+                  <a:srgbClr val="FF7755"/>
+                </a:solidFill>
+                <a:latin typeface="Calibri"/>
+              </a:rPr>
+              <a:t>($125,500)</a:t>
+            </a:r>
+          </a:p>
+        </p:txBody>
+      </p:sp>
+      <p:sp>
+        <p:nvSpPr>
+          <p:cNvPr id="26" name="Rectangle 25"/>
           <p:cNvSpPr/>
           <p:nvPr/>
         </p:nvSpPr>
         <p:spPr>
           <a:xfrm>
-            <a:off x="182880" y="512064"/>
-            <a:ext cx="50292" cy="233172"/>
+            <a:off x="274320" y="2258568"/>
+            <a:ext cx="4151376" cy="13716"/>
           </a:xfrm>
           <a:prstGeom prst="rect">
             <a:avLst/>
@@ -3522,14 +4294,14 @@
       </p:sp>
       <p:sp>
         <p:nvSpPr>
-          <p:cNvPr id="9" name="TextBox 8"/>
-          <p:cNvSpPr txBox="1"/>
-          <p:nvPr/>
-        </p:nvSpPr>
-        <p:spPr>
-          <a:xfrm>
-            <a:off x="265176" y="539496"/>
-            <a:ext cx="411480" cy="196596"/>
+          <p:cNvPr id="27" name="TextBox 26"/>
+          <p:cNvSpPr txBox="1"/>
+          <p:nvPr/>
+        </p:nvSpPr>
+        <p:spPr>
+          <a:xfrm>
+            <a:off x="274320" y="2286000"/>
+            <a:ext cx="3154679" cy="201168"/>
           </a:xfrm>
           <a:prstGeom prst="rect">
             <a:avLst/>
@@ -3544,27 +4316,27 @@
           <a:p>
             <a:pPr algn="l"/>
             <a:r>
-              <a:rPr sz="2200" b="1" i="0">
-                <a:solidFill>
-                  <a:srgbClr val="F26A21"/>
-                </a:solidFill>
-                <a:latin typeface="Cambria"/>
-              </a:rPr>
-              <a:t>1</a:t>
-            </a:r>
-          </a:p>
-        </p:txBody>
-      </p:sp>
-      <p:sp>
-        <p:nvSpPr>
-          <p:cNvPr id="10" name="TextBox 9"/>
-          <p:cNvSpPr txBox="1"/>
-          <p:nvPr/>
-        </p:nvSpPr>
-        <p:spPr>
-          <a:xfrm>
-            <a:off x="731520" y="548640"/>
-            <a:ext cx="6629400" cy="178308"/>
+              <a:rPr sz="900" b="1" i="0">
+                <a:solidFill>
+                  <a:srgbClr val="FFFFFF"/>
+                </a:solidFill>
+                <a:latin typeface="Calibri"/>
+              </a:rPr>
+              <a:t>Net cash distributable at close</a:t>
+            </a:r>
+          </a:p>
+        </p:txBody>
+      </p:sp>
+      <p:sp>
+        <p:nvSpPr>
+          <p:cNvPr id="28" name="TextBox 27"/>
+          <p:cNvSpPr txBox="1"/>
+          <p:nvPr/>
+        </p:nvSpPr>
+        <p:spPr>
+          <a:xfrm>
+            <a:off x="3474719" y="2286000"/>
+            <a:ext cx="914400" cy="201168"/>
           </a:xfrm>
           <a:prstGeom prst="rect">
             <a:avLst/>
@@ -3577,29 +4349,29 @@
           </a:bodyPr>
           <a:lstStyle/>
           <a:p>
-            <a:pPr algn="l"/>
-            <a:r>
-              <a:rPr sz="950" b="1" i="0">
-                <a:solidFill>
-                  <a:srgbClr val="FFFFFF"/>
+            <a:pPr algn="r"/>
+            <a:r>
+              <a:rPr sz="1100" b="1" i="0">
+                <a:solidFill>
+                  <a:srgbClr val="F26A21"/>
                 </a:solidFill>
                 <a:latin typeface="Calibri"/>
               </a:rPr>
-              <a:t>Confirm §3 Exclusivity (May 2025 Asset Acquisition Agreement)</a:t>
-            </a:r>
-          </a:p>
-        </p:txBody>
-      </p:sp>
-      <p:sp>
-        <p:nvSpPr>
-          <p:cNvPr id="11" name="TextBox 10"/>
-          <p:cNvSpPr txBox="1"/>
-          <p:nvPr/>
-        </p:nvSpPr>
-        <p:spPr>
-          <a:xfrm>
-            <a:off x="7516367" y="530352"/>
-            <a:ext cx="1371600" cy="201168"/>
+              <a:t>~$1.51M</a:t>
+            </a:r>
+          </a:p>
+        </p:txBody>
+      </p:sp>
+      <p:sp>
+        <p:nvSpPr>
+          <p:cNvPr id="29" name="TextBox 28"/>
+          <p:cNvSpPr txBox="1"/>
+          <p:nvPr/>
+        </p:nvSpPr>
+        <p:spPr>
+          <a:xfrm>
+            <a:off x="274320" y="2500884"/>
+            <a:ext cx="3154679" cy="169164"/>
           </a:xfrm>
           <a:prstGeom prst="rect">
             <a:avLst/>
@@ -3614,27 +4386,27 @@
           <a:p>
             <a:pPr algn="l"/>
             <a:r>
-              <a:rPr sz="850" b="0" i="0">
-                <a:solidFill>
-                  <a:srgbClr val="44BB44"/>
+              <a:rPr sz="750" b="0" i="0">
+                <a:solidFill>
+                  <a:srgbClr val="CCCCCC"/>
                 </a:solidFill>
                 <a:latin typeface="Calibri"/>
               </a:rPr>
-              <a:t>☐  Approve</a:t>
-            </a:r>
-          </a:p>
-        </p:txBody>
-      </p:sp>
-      <p:sp>
-        <p:nvSpPr>
-          <p:cNvPr id="12" name="TextBox 11"/>
-          <p:cNvSpPr txBox="1"/>
-          <p:nvPr/>
-        </p:nvSpPr>
-        <p:spPr>
-          <a:xfrm>
-            <a:off x="7516367" y="676656"/>
-            <a:ext cx="1371600" cy="201168"/>
+              <a:t>+ Exos stock (EAI units, Rule 504, 409A)</a:t>
+            </a:r>
+          </a:p>
+        </p:txBody>
+      </p:sp>
+      <p:sp>
+        <p:nvSpPr>
+          <p:cNvPr id="30" name="TextBox 29"/>
+          <p:cNvSpPr txBox="1"/>
+          <p:nvPr/>
+        </p:nvSpPr>
+        <p:spPr>
+          <a:xfrm>
+            <a:off x="3474719" y="2500884"/>
+            <a:ext cx="914400" cy="169164"/>
           </a:xfrm>
           <a:prstGeom prst="rect">
             <a:avLst/>
@@ -3647,29 +4419,29 @@
           </a:bodyPr>
           <a:lstStyle/>
           <a:p>
-            <a:pPr algn="l"/>
-            <a:r>
-              <a:rPr sz="850" b="0" i="0">
-                <a:solidFill>
-                  <a:srgbClr val="FF6666"/>
+            <a:pPr algn="r"/>
+            <a:r>
+              <a:rPr sz="750" b="0" i="0">
+                <a:solidFill>
+                  <a:srgbClr val="44BB44"/>
                 </a:solidFill>
                 <a:latin typeface="Calibri"/>
               </a:rPr>
-              <a:t>☐  Decline</a:t>
-            </a:r>
-          </a:p>
-        </p:txBody>
-      </p:sp>
-      <p:sp>
-        <p:nvSpPr>
-          <p:cNvPr id="13" name="TextBox 12"/>
-          <p:cNvSpPr txBox="1"/>
-          <p:nvPr/>
-        </p:nvSpPr>
-        <p:spPr>
-          <a:xfrm>
-            <a:off x="731520" y="781812"/>
-            <a:ext cx="6629400" cy="608076"/>
+              <a:t>+$1,000,000</a:t>
+            </a:r>
+          </a:p>
+        </p:txBody>
+      </p:sp>
+      <p:sp>
+        <p:nvSpPr>
+          <p:cNvPr id="31" name="TextBox 30"/>
+          <p:cNvSpPr txBox="1"/>
+          <p:nvPr/>
+        </p:nvSpPr>
+        <p:spPr>
+          <a:xfrm>
+            <a:off x="274320" y="2665476"/>
+            <a:ext cx="3154679" cy="169164"/>
           </a:xfrm>
           <a:prstGeom prst="rect">
             <a:avLst/>
@@ -3682,56 +4454,140 @@
           </a:bodyPr>
           <a:lstStyle/>
           <a:p>
-            <a:r>
-              <a:rPr sz="750" b="0">
+            <a:pPr algn="l"/>
+            <a:r>
+              <a:rPr sz="750" b="0" i="0">
                 <a:solidFill>
                   <a:srgbClr val="CCCCCC"/>
                 </a:solidFill>
                 <a:latin typeface="Calibri"/>
               </a:rPr>
-              <a:t>Approve a 90-day exclusivity period beginning on the date of this approval.</a:t>
-            </a:r>
-          </a:p>
-          <a:p>
-            <a:r>
-              <a:rPr sz="750" b="0">
+              <a:t>+ Escrow release at 12 months</a:t>
+            </a:r>
+          </a:p>
+        </p:txBody>
+      </p:sp>
+      <p:sp>
+        <p:nvSpPr>
+          <p:cNvPr id="32" name="TextBox 31"/>
+          <p:cNvSpPr txBox="1"/>
+          <p:nvPr/>
+        </p:nvSpPr>
+        <p:spPr>
+          <a:xfrm>
+            <a:off x="3474719" y="2665476"/>
+            <a:ext cx="914400" cy="169164"/>
+          </a:xfrm>
+          <a:prstGeom prst="rect">
+            <a:avLst/>
+          </a:prstGeom>
+          <a:noFill/>
+        </p:spPr>
+        <p:txBody>
+          <a:bodyPr wrap="square">
+            <a:spAutoFit/>
+          </a:bodyPr>
+          <a:lstStyle/>
+          <a:p>
+            <a:pPr algn="r"/>
+            <a:r>
+              <a:rPr sz="750" b="0" i="0">
+                <a:solidFill>
+                  <a:srgbClr val="44BB44"/>
+                </a:solidFill>
+                <a:latin typeface="Calibri"/>
+              </a:rPr>
+              <a:t>+$126,000</a:t>
+            </a:r>
+          </a:p>
+        </p:txBody>
+      </p:sp>
+      <p:sp>
+        <p:nvSpPr>
+          <p:cNvPr id="33" name="TextBox 32"/>
+          <p:cNvSpPr txBox="1"/>
+          <p:nvPr/>
+        </p:nvSpPr>
+        <p:spPr>
+          <a:xfrm>
+            <a:off x="274320" y="2830068"/>
+            <a:ext cx="3154679" cy="169164"/>
+          </a:xfrm>
+          <a:prstGeom prst="rect">
+            <a:avLst/>
+          </a:prstGeom>
+          <a:noFill/>
+        </p:spPr>
+        <p:txBody>
+          <a:bodyPr wrap="square">
+            <a:spAutoFit/>
+          </a:bodyPr>
+          <a:lstStyle/>
+          <a:p>
+            <a:pPr algn="l"/>
+            <a:r>
+              <a:rPr sz="750" b="0" i="0">
                 <a:solidFill>
                   <a:srgbClr val="CCCCCC"/>
                 </a:solidFill>
                 <a:latin typeface="Calibri"/>
               </a:rPr>
-              <a:t>Extension not unreasonably withheld (per §3). Allows both parties to proceed to</a:t>
-            </a:r>
-          </a:p>
-          <a:p>
-            <a:r>
-              <a:rPr sz="750" b="0">
-                <a:solidFill>
-                  <a:srgbClr val="CCCCCC"/>
+              <a:t>+ Earn-outs base case (FY27–FY31)</a:t>
+            </a:r>
+          </a:p>
+        </p:txBody>
+      </p:sp>
+      <p:sp>
+        <p:nvSpPr>
+          <p:cNvPr id="34" name="TextBox 33"/>
+          <p:cNvSpPr txBox="1"/>
+          <p:nvPr/>
+        </p:nvSpPr>
+        <p:spPr>
+          <a:xfrm>
+            <a:off x="3474719" y="2830068"/>
+            <a:ext cx="914400" cy="169164"/>
+          </a:xfrm>
+          <a:prstGeom prst="rect">
+            <a:avLst/>
+          </a:prstGeom>
+          <a:noFill/>
+        </p:spPr>
+        <p:txBody>
+          <a:bodyPr wrap="square">
+            <a:spAutoFit/>
+          </a:bodyPr>
+          <a:lstStyle/>
+          <a:p>
+            <a:pPr algn="r"/>
+            <a:r>
+              <a:rPr sz="750" b="0" i="0">
+                <a:solidFill>
+                  <a:srgbClr val="44BB44"/>
                 </a:solidFill>
                 <a:latin typeface="Calibri"/>
               </a:rPr>
-              <a:t>diligence, definitive agreement, and financing close (target: Feb 15th, 2027).</a:t>
-            </a:r>
-          </a:p>
-        </p:txBody>
-      </p:sp>
-      <p:sp>
-        <p:nvSpPr>
-          <p:cNvPr id="14" name="Rectangle 13"/>
+              <a:t>+$2,525,000</a:t>
+            </a:r>
+          </a:p>
+        </p:txBody>
+      </p:sp>
+      <p:sp>
+        <p:nvSpPr>
+          <p:cNvPr id="35" name="Rectangle 34"/>
           <p:cNvSpPr/>
           <p:nvPr/>
         </p:nvSpPr>
         <p:spPr>
           <a:xfrm>
-            <a:off x="182880" y="1444752"/>
-            <a:ext cx="8778240" cy="987552"/>
+            <a:off x="274320" y="3003804"/>
+            <a:ext cx="4151376" cy="13716"/>
           </a:xfrm>
           <a:prstGeom prst="rect">
             <a:avLst/>
           </a:prstGeom>
           <a:solidFill>
-            <a:srgbClr val="1E1E1E"/>
+            <a:srgbClr val="F26A21"/>
           </a:solidFill>
           <a:ln>
             <a:noFill/>
@@ -3761,20 +4617,90 @@
       </p:sp>
       <p:sp>
         <p:nvSpPr>
-          <p:cNvPr id="15" name="Rectangle 14"/>
+          <p:cNvPr id="36" name="TextBox 35"/>
+          <p:cNvSpPr txBox="1"/>
+          <p:nvPr/>
+        </p:nvSpPr>
+        <p:spPr>
+          <a:xfrm>
+            <a:off x="274320" y="3031236"/>
+            <a:ext cx="3154679" cy="228600"/>
+          </a:xfrm>
+          <a:prstGeom prst="rect">
+            <a:avLst/>
+          </a:prstGeom>
+          <a:noFill/>
+        </p:spPr>
+        <p:txBody>
+          <a:bodyPr wrap="square">
+            <a:spAutoFit/>
+          </a:bodyPr>
+          <a:lstStyle/>
+          <a:p>
+            <a:pPr algn="l"/>
+            <a:r>
+              <a:rPr sz="950" b="1" i="0">
+                <a:solidFill>
+                  <a:srgbClr val="FFFFFF"/>
+                </a:solidFill>
+                <a:latin typeface="Calibri"/>
+              </a:rPr>
+              <a:t>~5-year total to SSLC shareholders</a:t>
+            </a:r>
+          </a:p>
+        </p:txBody>
+      </p:sp>
+      <p:sp>
+        <p:nvSpPr>
+          <p:cNvPr id="37" name="TextBox 36"/>
+          <p:cNvSpPr txBox="1"/>
+          <p:nvPr/>
+        </p:nvSpPr>
+        <p:spPr>
+          <a:xfrm>
+            <a:off x="3383279" y="3031236"/>
+            <a:ext cx="1005840" cy="228600"/>
+          </a:xfrm>
+          <a:prstGeom prst="rect">
+            <a:avLst/>
+          </a:prstGeom>
+          <a:noFill/>
+        </p:spPr>
+        <p:txBody>
+          <a:bodyPr wrap="square">
+            <a:spAutoFit/>
+          </a:bodyPr>
+          <a:lstStyle/>
+          <a:p>
+            <a:pPr algn="r"/>
+            <a:r>
+              <a:rPr sz="1300" b="1" i="0">
+                <a:solidFill>
+                  <a:srgbClr val="F26A21"/>
+                </a:solidFill>
+                <a:latin typeface="Calibri"/>
+              </a:rPr>
+              <a:t>~$5.16M</a:t>
+            </a:r>
+          </a:p>
+        </p:txBody>
+      </p:sp>
+      <p:sp>
+        <p:nvSpPr>
+          <p:cNvPr id="38" name="Rectangle 37"/>
           <p:cNvSpPr/>
           <p:nvPr/>
         </p:nvSpPr>
         <p:spPr>
           <a:xfrm>
-            <a:off x="182880" y="1444752"/>
-            <a:ext cx="50292" cy="987552"/>
+            <a:off x="4645152" y="521207"/>
+            <a:ext cx="4315968" cy="3511296"/>
           </a:xfrm>
           <a:prstGeom prst="rect">
             <a:avLst/>
           </a:prstGeom>
           <a:solidFill>
-            <a:srgbClr val="F26A21"/>
+            <a:srgbClr val="1E1E1E"/>
           </a:solidFill>
           <a:ln>
             <a:noFill/>
@@ -3804,20 +4730,20 @@
       </p:sp>
       <p:sp>
         <p:nvSpPr>
-          <p:cNvPr id="16" name="Rectangle 15"/>
+          <p:cNvPr id="39" name="Rectangle 38"/>
           <p:cNvSpPr/>
           <p:nvPr/>
         </p:nvSpPr>
         <p:spPr>
           <a:xfrm>
-            <a:off x="182880" y="1444752"/>
-            <a:ext cx="8778240" cy="233172"/>
+            <a:off x="4645152" y="521207"/>
+            <a:ext cx="45720" cy="3511296"/>
           </a:xfrm>
           <a:prstGeom prst="rect">
             <a:avLst/>
           </a:prstGeom>
           <a:solidFill>
-            <a:srgbClr val="1A1A1A"/>
+            <a:srgbClr val="F26A21"/>
           </a:solidFill>
           <a:ln>
             <a:noFill/>
@@ -3847,20 +4773,230 @@
       </p:sp>
       <p:sp>
         <p:nvSpPr>
-          <p:cNvPr id="17" name="Rectangle 16"/>
+          <p:cNvPr id="40" name="TextBox 39"/>
+          <p:cNvSpPr txBox="1"/>
+          <p:nvPr/>
+        </p:nvSpPr>
+        <p:spPr>
+          <a:xfrm>
+            <a:off x="4754880" y="576071"/>
+            <a:ext cx="4151376" cy="201168"/>
+          </a:xfrm>
+          <a:prstGeom prst="rect">
+            <a:avLst/>
+          </a:prstGeom>
+          <a:noFill/>
+        </p:spPr>
+        <p:txBody>
+          <a:bodyPr wrap="square">
+            <a:spAutoFit/>
+          </a:bodyPr>
+          <a:lstStyle/>
+          <a:p>
+            <a:pPr algn="l"/>
+            <a:r>
+              <a:rPr sz="950" b="1" i="0">
+                <a:solidFill>
+                  <a:srgbClr val="F26A21"/>
+                </a:solidFill>
+                <a:latin typeface="Calibri"/>
+              </a:rPr>
+              <a:t>What Shareholders Paid In vs. Will Receive</a:t>
+            </a:r>
+          </a:p>
+        </p:txBody>
+      </p:sp>
+      <p:sp>
+        <p:nvSpPr>
+          <p:cNvPr id="41" name="TextBox 40"/>
+          <p:cNvSpPr txBox="1"/>
+          <p:nvPr/>
+        </p:nvSpPr>
+        <p:spPr>
+          <a:xfrm>
+            <a:off x="4754880" y="813815"/>
+            <a:ext cx="4151376" cy="164592"/>
+          </a:xfrm>
+          <a:prstGeom prst="rect">
+            <a:avLst/>
+          </a:prstGeom>
+          <a:noFill/>
+        </p:spPr>
+        <p:txBody>
+          <a:bodyPr wrap="square">
+            <a:spAutoFit/>
+          </a:bodyPr>
+          <a:lstStyle/>
+          <a:p>
+            <a:pPr algn="l"/>
+            <a:r>
+              <a:rPr sz="750" b="1" i="0">
+                <a:solidFill>
+                  <a:srgbClr val="888888"/>
+                </a:solidFill>
+                <a:latin typeface="Calibri"/>
+              </a:rPr>
+              <a:t>PAID-IN CAPITAL (per SSLC books)</a:t>
+            </a:r>
+          </a:p>
+        </p:txBody>
+      </p:sp>
+      <p:sp>
+        <p:nvSpPr>
+          <p:cNvPr id="42" name="TextBox 41"/>
+          <p:cNvSpPr txBox="1"/>
+          <p:nvPr/>
+        </p:nvSpPr>
+        <p:spPr>
+          <a:xfrm>
+            <a:off x="4754880" y="996695"/>
+            <a:ext cx="3063240" cy="169164"/>
+          </a:xfrm>
+          <a:prstGeom prst="rect">
+            <a:avLst/>
+          </a:prstGeom>
+          <a:noFill/>
+        </p:spPr>
+        <p:txBody>
+          <a:bodyPr wrap="square">
+            <a:spAutoFit/>
+          </a:bodyPr>
+          <a:lstStyle/>
+          <a:p>
+            <a:pPr algn="l"/>
+            <a:r>
+              <a:rPr sz="750" b="0" i="0">
+                <a:solidFill>
+                  <a:srgbClr val="888888"/>
+                </a:solidFill>
+                <a:latin typeface="Calibri"/>
+              </a:rPr>
+              <a:t>Common stock</a:t>
+            </a:r>
+          </a:p>
+        </p:txBody>
+      </p:sp>
+      <p:sp>
+        <p:nvSpPr>
+          <p:cNvPr id="43" name="TextBox 42"/>
+          <p:cNvSpPr txBox="1"/>
+          <p:nvPr/>
+        </p:nvSpPr>
+        <p:spPr>
+          <a:xfrm>
+            <a:off x="7863840" y="996695"/>
+            <a:ext cx="1005840" cy="169164"/>
+          </a:xfrm>
+          <a:prstGeom prst="rect">
+            <a:avLst/>
+          </a:prstGeom>
+          <a:noFill/>
+        </p:spPr>
+        <p:txBody>
+          <a:bodyPr wrap="square">
+            <a:spAutoFit/>
+          </a:bodyPr>
+          <a:lstStyle/>
+          <a:p>
+            <a:pPr algn="r"/>
+            <a:r>
+              <a:rPr sz="750" b="0" i="0">
+                <a:solidFill>
+                  <a:srgbClr val="888888"/>
+                </a:solidFill>
+                <a:latin typeface="Calibri"/>
+              </a:rPr>
+              <a:t>$1,010,423</a:t>
+            </a:r>
+          </a:p>
+        </p:txBody>
+      </p:sp>
+      <p:sp>
+        <p:nvSpPr>
+          <p:cNvPr id="44" name="TextBox 43"/>
+          <p:cNvSpPr txBox="1"/>
+          <p:nvPr/>
+        </p:nvSpPr>
+        <p:spPr>
+          <a:xfrm>
+            <a:off x="4754880" y="1161287"/>
+            <a:ext cx="3063240" cy="169164"/>
+          </a:xfrm>
+          <a:prstGeom prst="rect">
+            <a:avLst/>
+          </a:prstGeom>
+          <a:noFill/>
+        </p:spPr>
+        <p:txBody>
+          <a:bodyPr wrap="square">
+            <a:spAutoFit/>
+          </a:bodyPr>
+          <a:lstStyle/>
+          <a:p>
+            <a:pPr algn="l"/>
+            <a:r>
+              <a:rPr sz="750" b="0" i="0">
+                <a:solidFill>
+                  <a:srgbClr val="888888"/>
+                </a:solidFill>
+                <a:latin typeface="Calibri"/>
+              </a:rPr>
+              <a:t>Additional paid-in capital (APIC)</a:t>
+            </a:r>
+          </a:p>
+        </p:txBody>
+      </p:sp>
+      <p:sp>
+        <p:nvSpPr>
+          <p:cNvPr id="45" name="TextBox 44"/>
+          <p:cNvSpPr txBox="1"/>
+          <p:nvPr/>
+        </p:nvSpPr>
+        <p:spPr>
+          <a:xfrm>
+            <a:off x="7863840" y="1161287"/>
+            <a:ext cx="1005840" cy="169164"/>
+          </a:xfrm>
+          <a:prstGeom prst="rect">
+            <a:avLst/>
+          </a:prstGeom>
+          <a:noFill/>
+        </p:spPr>
+        <p:txBody>
+          <a:bodyPr wrap="square">
+            <a:spAutoFit/>
+          </a:bodyPr>
+          <a:lstStyle/>
+          <a:p>
+            <a:pPr algn="r"/>
+            <a:r>
+              <a:rPr sz="750" b="0" i="0">
+                <a:solidFill>
+                  <a:srgbClr val="888888"/>
+                </a:solidFill>
+                <a:latin typeface="Calibri"/>
+              </a:rPr>
+              <a:t>$4,042</a:t>
+            </a:r>
+          </a:p>
+        </p:txBody>
+      </p:sp>
+      <p:sp>
+        <p:nvSpPr>
+          <p:cNvPr id="46" name="Rectangle 45"/>
           <p:cNvSpPr/>
           <p:nvPr/>
         </p:nvSpPr>
         <p:spPr>
           <a:xfrm>
-            <a:off x="182880" y="1444752"/>
-            <a:ext cx="50292" cy="233172"/>
+            <a:off x="4754880" y="1344167"/>
+            <a:ext cx="4151376" cy="9144"/>
           </a:xfrm>
           <a:prstGeom prst="rect">
             <a:avLst/>
           </a:prstGeom>
           <a:solidFill>
-            <a:srgbClr val="F26A21"/>
+            <a:srgbClr val="444444"/>
           </a:solidFill>
           <a:ln>
             <a:noFill/>
@@ -3890,14 +5026,14 @@
       </p:sp>
       <p:sp>
         <p:nvSpPr>
-          <p:cNvPr id="18" name="TextBox 17"/>
-          <p:cNvSpPr txBox="1"/>
-          <p:nvPr/>
-        </p:nvSpPr>
-        <p:spPr>
-          <a:xfrm>
-            <a:off x="265176" y="1472184"/>
-            <a:ext cx="411480" cy="196596"/>
+          <p:cNvPr id="47" name="TextBox 46"/>
+          <p:cNvSpPr txBox="1"/>
+          <p:nvPr/>
+        </p:nvSpPr>
+        <p:spPr>
+          <a:xfrm>
+            <a:off x="4754880" y="1325879"/>
+            <a:ext cx="3063240" cy="169164"/>
           </a:xfrm>
           <a:prstGeom prst="rect">
             <a:avLst/>
@@ -3912,27 +5048,27 @@
           <a:p>
             <a:pPr algn="l"/>
             <a:r>
-              <a:rPr sz="2200" b="1" i="0">
-                <a:solidFill>
-                  <a:srgbClr val="F26A21"/>
-                </a:solidFill>
-                <a:latin typeface="Cambria"/>
-              </a:rPr>
-              <a:t>2</a:t>
-            </a:r>
-          </a:p>
-        </p:txBody>
-      </p:sp>
-      <p:sp>
-        <p:nvSpPr>
-          <p:cNvPr id="19" name="TextBox 18"/>
-          <p:cNvSpPr txBox="1"/>
-          <p:nvPr/>
-        </p:nvSpPr>
-        <p:spPr>
-          <a:xfrm>
-            <a:off x="731520" y="1481328"/>
-            <a:ext cx="6629400" cy="178308"/>
+              <a:rPr sz="750" b="0" i="0">
+                <a:solidFill>
+                  <a:srgbClr val="CCCCCC"/>
+                </a:solidFill>
+                <a:latin typeface="Calibri"/>
+              </a:rPr>
+              <a:t>Total paid-in capital</a:t>
+            </a:r>
+          </a:p>
+        </p:txBody>
+      </p:sp>
+      <p:sp>
+        <p:nvSpPr>
+          <p:cNvPr id="48" name="TextBox 47"/>
+          <p:cNvSpPr txBox="1"/>
+          <p:nvPr/>
+        </p:nvSpPr>
+        <p:spPr>
+          <a:xfrm>
+            <a:off x="7863840" y="1325879"/>
+            <a:ext cx="1005840" cy="169164"/>
           </a:xfrm>
           <a:prstGeom prst="rect">
             <a:avLst/>
@@ -3945,29 +5081,29 @@
           </a:bodyPr>
           <a:lstStyle/>
           <a:p>
-            <a:pPr algn="l"/>
-            <a:r>
-              <a:rPr sz="950" b="1" i="0">
+            <a:pPr algn="r"/>
+            <a:r>
+              <a:rPr sz="750" b="1" i="0">
                 <a:solidFill>
                   <a:srgbClr val="FFFFFF"/>
                 </a:solidFill>
                 <a:latin typeface="Calibri"/>
               </a:rPr>
-              <a:t>Grant Full Read-Only QuickBooks Online Access for Diligence</a:t>
-            </a:r>
-          </a:p>
-        </p:txBody>
-      </p:sp>
-      <p:sp>
-        <p:nvSpPr>
-          <p:cNvPr id="20" name="TextBox 19"/>
-          <p:cNvSpPr txBox="1"/>
-          <p:nvPr/>
-        </p:nvSpPr>
-        <p:spPr>
-          <a:xfrm>
-            <a:off x="7516367" y="1463040"/>
-            <a:ext cx="1371600" cy="201168"/>
+              <a:t>$1,014,465</a:t>
+            </a:r>
+          </a:p>
+        </p:txBody>
+      </p:sp>
+      <p:sp>
+        <p:nvSpPr>
+          <p:cNvPr id="49" name="TextBox 48"/>
+          <p:cNvSpPr txBox="1"/>
+          <p:nvPr/>
+        </p:nvSpPr>
+        <p:spPr>
+          <a:xfrm>
+            <a:off x="4754880" y="1499615"/>
+            <a:ext cx="4151376" cy="173736"/>
           </a:xfrm>
           <a:prstGeom prst="rect">
             <a:avLst/>
@@ -3982,27 +5118,27 @@
           <a:p>
             <a:pPr algn="l"/>
             <a:r>
-              <a:rPr sz="850" b="0" i="0">
-                <a:solidFill>
-                  <a:srgbClr val="44BB44"/>
+              <a:rPr sz="650" b="0" i="1">
+                <a:solidFill>
+                  <a:srgbClr val="888888"/>
                 </a:solidFill>
                 <a:latin typeface="Calibri"/>
               </a:rPr>
-              <a:t>☐  Approve</a:t>
-            </a:r>
-          </a:p>
-        </p:txBody>
-      </p:sp>
-      <p:sp>
-        <p:nvSpPr>
-          <p:cNvPr id="21" name="TextBox 20"/>
-          <p:cNvSpPr txBox="1"/>
-          <p:nvPr/>
-        </p:nvSpPr>
-        <p:spPr>
-          <a:xfrm>
-            <a:off x="7516367" y="1609344"/>
-            <a:ext cx="1371600" cy="201168"/>
+              <a:t>  Exos: $790,000 for 18.06% — recognized via $790K stake credit in price</a:t>
+            </a:r>
+          </a:p>
+        </p:txBody>
+      </p:sp>
+      <p:sp>
+        <p:nvSpPr>
+          <p:cNvPr id="50" name="TextBox 49"/>
+          <p:cNvSpPr txBox="1"/>
+          <p:nvPr/>
+        </p:nvSpPr>
+        <p:spPr>
+          <a:xfrm>
+            <a:off x="4754880" y="1659635"/>
+            <a:ext cx="4151376" cy="173736"/>
           </a:xfrm>
           <a:prstGeom prst="rect">
             <a:avLst/>
@@ -4017,27 +5153,27 @@
           <a:p>
             <a:pPr algn="l"/>
             <a:r>
-              <a:rPr sz="850" b="0" i="0">
-                <a:solidFill>
-                  <a:srgbClr val="FF6666"/>
+              <a:rPr sz="650" b="0" i="1">
+                <a:solidFill>
+                  <a:srgbClr val="888888"/>
                 </a:solidFill>
                 <a:latin typeface="Calibri"/>
               </a:rPr>
-              <a:t>☐  Decline</a:t>
-            </a:r>
-          </a:p>
-        </p:txBody>
-      </p:sp>
-      <p:sp>
-        <p:nvSpPr>
-          <p:cNvPr id="22" name="TextBox 21"/>
-          <p:cNvSpPr txBox="1"/>
-          <p:nvPr/>
-        </p:nvSpPr>
-        <p:spPr>
-          <a:xfrm>
-            <a:off x="731520" y="1714500"/>
-            <a:ext cx="6629400" cy="699516"/>
+              <a:t>  All other holders: ~$224,000 combined for 81.94%</a:t>
+            </a:r>
+          </a:p>
+        </p:txBody>
+      </p:sp>
+      <p:sp>
+        <p:nvSpPr>
+          <p:cNvPr id="51" name="TextBox 50"/>
+          <p:cNvSpPr txBox="1"/>
+          <p:nvPr/>
+        </p:nvSpPr>
+        <p:spPr>
+          <a:xfrm>
+            <a:off x="4754880" y="1851660"/>
+            <a:ext cx="4151376" cy="164592"/>
           </a:xfrm>
           <a:prstGeom prst="rect">
             <a:avLst/>
@@ -4050,89 +5186,175 @@
           </a:bodyPr>
           <a:lstStyle/>
           <a:p>
-            <a:r>
-              <a:rPr sz="700" b="0">
+            <a:pPr algn="l"/>
+            <a:r>
+              <a:rPr sz="750" b="1" i="0">
+                <a:solidFill>
+                  <a:srgbClr val="888888"/>
+                </a:solidFill>
+                <a:latin typeface="Calibri"/>
+              </a:rPr>
+              <a:t>PROJECTED RETURN  (OTHER HOLDERS, 81.94%)</a:t>
+            </a:r>
+          </a:p>
+        </p:txBody>
+      </p:sp>
+      <p:sp>
+        <p:nvSpPr>
+          <p:cNvPr id="52" name="TextBox 51"/>
+          <p:cNvSpPr txBox="1"/>
+          <p:nvPr/>
+        </p:nvSpPr>
+        <p:spPr>
+          <a:xfrm>
+            <a:off x="4754880" y="2043684"/>
+            <a:ext cx="3063240" cy="169164"/>
+          </a:xfrm>
+          <a:prstGeom prst="rect">
+            <a:avLst/>
+          </a:prstGeom>
+          <a:noFill/>
+        </p:spPr>
+        <p:txBody>
+          <a:bodyPr wrap="square">
+            <a:spAutoFit/>
+          </a:bodyPr>
+          <a:lstStyle/>
+          <a:p>
+            <a:pPr algn="l"/>
+            <a:r>
+              <a:rPr sz="750" b="0" i="0">
                 <a:solidFill>
                   <a:srgbClr val="CCCCCC"/>
                 </a:solidFill>
                 <a:latin typeface="Calibri"/>
               </a:rPr>
-              <a:t>Authorize an all-access or accountant user for John Quinn and one Exos finance reviewer.</a:t>
-            </a:r>
-          </a:p>
-          <a:p>
-            <a:r>
-              <a:rPr sz="700" b="0">
+              <a:t>Cash + stock at close (est.)</a:t>
+            </a:r>
+          </a:p>
+        </p:txBody>
+      </p:sp>
+      <p:sp>
+        <p:nvSpPr>
+          <p:cNvPr id="53" name="TextBox 52"/>
+          <p:cNvSpPr txBox="1"/>
+          <p:nvPr/>
+        </p:nvSpPr>
+        <p:spPr>
+          <a:xfrm>
+            <a:off x="7863840" y="2043684"/>
+            <a:ext cx="1005840" cy="169164"/>
+          </a:xfrm>
+          <a:prstGeom prst="rect">
+            <a:avLst/>
+          </a:prstGeom>
+          <a:noFill/>
+        </p:spPr>
+        <p:txBody>
+          <a:bodyPr wrap="square">
+            <a:spAutoFit/>
+          </a:bodyPr>
+          <a:lstStyle/>
+          <a:p>
+            <a:pPr algn="r"/>
+            <a:r>
+              <a:rPr sz="750" b="0" i="0">
+                <a:solidFill>
+                  <a:srgbClr val="44BB44"/>
+                </a:solidFill>
+                <a:latin typeface="Calibri"/>
+              </a:rPr>
+              <a:t>~$2.5M</a:t>
+            </a:r>
+          </a:p>
+        </p:txBody>
+      </p:sp>
+      <p:sp>
+        <p:nvSpPr>
+          <p:cNvPr id="54" name="TextBox 53"/>
+          <p:cNvSpPr txBox="1"/>
+          <p:nvPr/>
+        </p:nvSpPr>
+        <p:spPr>
+          <a:xfrm>
+            <a:off x="4754880" y="2208276"/>
+            <a:ext cx="3063240" cy="169164"/>
+          </a:xfrm>
+          <a:prstGeom prst="rect">
+            <a:avLst/>
+          </a:prstGeom>
+          <a:noFill/>
+        </p:spPr>
+        <p:txBody>
+          <a:bodyPr wrap="square">
+            <a:spAutoFit/>
+          </a:bodyPr>
+          <a:lstStyle/>
+          <a:p>
+            <a:pPr algn="l"/>
+            <a:r>
+              <a:rPr sz="750" b="0" i="0">
                 <a:solidFill>
                   <a:srgbClr val="CCCCCC"/>
                 </a:solidFill>
                 <a:latin typeface="Calibri"/>
               </a:rPr>
-              <a:t>Purpose: reconcile the $942K "billed-ahead" balance and shared-facility costs before close.</a:t>
-            </a:r>
-          </a:p>
-          <a:p>
-            <a:r>
-              <a:rPr sz="700" b="0">
-                <a:solidFill>
-                  <a:srgbClr val="CCCCCC"/>
+              <a:t>Total over 5 years incl. earn-outs</a:t>
+            </a:r>
+          </a:p>
+        </p:txBody>
+      </p:sp>
+      <p:sp>
+        <p:nvSpPr>
+          <p:cNvPr id="55" name="TextBox 54"/>
+          <p:cNvSpPr txBox="1"/>
+          <p:nvPr/>
+        </p:nvSpPr>
+        <p:spPr>
+          <a:xfrm>
+            <a:off x="7863840" y="2208276"/>
+            <a:ext cx="1005840" cy="169164"/>
+          </a:xfrm>
+          <a:prstGeom prst="rect">
+            <a:avLst/>
+          </a:prstGeom>
+          <a:noFill/>
+        </p:spPr>
+        <p:txBody>
+          <a:bodyPr wrap="square">
+            <a:spAutoFit/>
+          </a:bodyPr>
+          <a:lstStyle/>
+          <a:p>
+            <a:pPr algn="r"/>
+            <a:r>
+              <a:rPr sz="750" b="0" i="0">
+                <a:solidFill>
+                  <a:srgbClr val="44BB44"/>
                 </a:solidFill>
                 <a:latin typeface="Calibri"/>
               </a:rPr>
-              <a:t>Basis: Cal. Corp. Code §1602 director inspection right + AAA §4 confirmatory diligence.</a:t>
-            </a:r>
-          </a:p>
-          <a:p>
-            <a:r>
-              <a:rPr sz="700" b="0">
-                <a:solidFill>
-                  <a:srgbClr val="CCCCCC"/>
-                </a:solidFill>
-                <a:latin typeface="Calibri"/>
-              </a:rPr>
-              <a:t>Also provide: stock ledger, cap table, subscription agreements, and paid-in capital</a:t>
-            </a:r>
-          </a:p>
-          <a:p>
-            <a:r>
-              <a:rPr sz="700" b="0">
-                <a:solidFill>
-                  <a:srgbClr val="CCCCCC"/>
-                </a:solidFill>
-                <a:latin typeface="Calibri"/>
-              </a:rPr>
-              <a:t>by shareholder (books: $1,014,465 total paid-in; need per-holder to compare payout vs. invested).</a:t>
-            </a:r>
-          </a:p>
-          <a:p>
-            <a:r>
-              <a:rPr sz="750" b="1">
-                <a:solidFill>
-                  <a:srgbClr val="F26A21"/>
-                </a:solidFill>
-                <a:latin typeface="Calibri"/>
-              </a:rPr>
-              <a:t>Confidential under the 7/27/2021 NDA.  Access to be granted no later than October 15, 2026.</a:t>
-            </a:r>
-          </a:p>
-        </p:txBody>
-      </p:sp>
-      <p:sp>
-        <p:nvSpPr>
-          <p:cNvPr id="23" name="Rectangle 22"/>
+              <a:t>~$5.2M</a:t>
+            </a:r>
+          </a:p>
+        </p:txBody>
+      </p:sp>
+      <p:sp>
+        <p:nvSpPr>
+          <p:cNvPr id="56" name="Rectangle 55"/>
           <p:cNvSpPr/>
           <p:nvPr/>
         </p:nvSpPr>
         <p:spPr>
           <a:xfrm>
-            <a:off x="182880" y="2468880"/>
-            <a:ext cx="8778240" cy="1170432"/>
+            <a:off x="4754880" y="2391156"/>
+            <a:ext cx="4151376" cy="9144"/>
           </a:xfrm>
           <a:prstGeom prst="rect">
             <a:avLst/>
           </a:prstGeom>
           <a:solidFill>
-            <a:srgbClr val="1E1E1E"/>
+            <a:srgbClr val="444444"/>
           </a:solidFill>
           <a:ln>
             <a:noFill/>
@@ -4162,20 +5384,127 @@
       </p:sp>
       <p:sp>
         <p:nvSpPr>
-          <p:cNvPr id="24" name="Rectangle 23"/>
+          <p:cNvPr id="57" name="TextBox 56"/>
+          <p:cNvSpPr txBox="1"/>
+          <p:nvPr/>
+        </p:nvSpPr>
+        <p:spPr>
+          <a:xfrm>
+            <a:off x="4754880" y="2409444"/>
+            <a:ext cx="3063240" cy="173736"/>
+          </a:xfrm>
+          <a:prstGeom prst="rect">
+            <a:avLst/>
+          </a:prstGeom>
+          <a:noFill/>
+        </p:spPr>
+        <p:txBody>
+          <a:bodyPr wrap="square">
+            <a:spAutoFit/>
+          </a:bodyPr>
+          <a:lstStyle/>
+          <a:p>
+            <a:pPr algn="l"/>
+            <a:r>
+              <a:rPr sz="750" b="0" i="0">
+                <a:solidFill>
+                  <a:srgbClr val="CCCCCC"/>
+                </a:solidFill>
+                <a:latin typeface="Calibri"/>
+              </a:rPr>
+              <a:t>Implied return on invested capital</a:t>
+            </a:r>
+          </a:p>
+        </p:txBody>
+      </p:sp>
+      <p:sp>
+        <p:nvSpPr>
+          <p:cNvPr id="58" name="TextBox 57"/>
+          <p:cNvSpPr txBox="1"/>
+          <p:nvPr/>
+        </p:nvSpPr>
+        <p:spPr>
+          <a:xfrm>
+            <a:off x="7406640" y="2409444"/>
+            <a:ext cx="1463040" cy="173736"/>
+          </a:xfrm>
+          <a:prstGeom prst="rect">
+            <a:avLst/>
+          </a:prstGeom>
+          <a:noFill/>
+        </p:spPr>
+        <p:txBody>
+          <a:bodyPr wrap="square">
+            <a:spAutoFit/>
+          </a:bodyPr>
+          <a:lstStyle/>
+          <a:p>
+            <a:pPr algn="r"/>
+            <a:r>
+              <a:rPr sz="850" b="1" i="0">
+                <a:solidFill>
+                  <a:srgbClr val="FFCC44"/>
+                </a:solidFill>
+                <a:latin typeface="Calibri"/>
+              </a:rPr>
+              <a:t>11× at close / 23× over 5 yrs</a:t>
+            </a:r>
+          </a:p>
+        </p:txBody>
+      </p:sp>
+      <p:sp>
+        <p:nvSpPr>
+          <p:cNvPr id="59" name="TextBox 58"/>
+          <p:cNvSpPr txBox="1"/>
+          <p:nvPr/>
+        </p:nvSpPr>
+        <p:spPr>
+          <a:xfrm>
+            <a:off x="4754880" y="2610612"/>
+            <a:ext cx="4151376" cy="420624"/>
+          </a:xfrm>
+          <a:prstGeom prst="rect">
+            <a:avLst/>
+          </a:prstGeom>
+          <a:noFill/>
+        </p:spPr>
+        <p:txBody>
+          <a:bodyPr wrap="square">
+            <a:spAutoFit/>
+          </a:bodyPr>
+          <a:lstStyle/>
+          <a:p>
+            <a:pPr algn="l"/>
+            <a:r>
+              <a:rPr sz="700" b="0" i="1">
+                <a:solidFill>
+                  <a:srgbClr val="888888"/>
+                </a:solidFill>
+                <a:latin typeface="Calibri"/>
+              </a:rPr>
+              <a:t>Framed as: holders who invested ~$224K receive a strong return.
+Exos’s 18.06% is absorbed in the $790K credit built into the purchase price —
+no additional cash from Exos for Exos’s own stake.</a:t>
+            </a:r>
+          </a:p>
+        </p:txBody>
+      </p:sp>
+      <p:sp>
+        <p:nvSpPr>
+          <p:cNvPr id="60" name="Rectangle 59"/>
           <p:cNvSpPr/>
           <p:nvPr/>
         </p:nvSpPr>
         <p:spPr>
           <a:xfrm>
-            <a:off x="182880" y="2468880"/>
-            <a:ext cx="50292" cy="1170432"/>
+            <a:off x="4754880" y="3049524"/>
+            <a:ext cx="4151376" cy="260603"/>
           </a:xfrm>
           <a:prstGeom prst="rect">
             <a:avLst/>
           </a:prstGeom>
           <a:solidFill>
-            <a:srgbClr val="F26A21"/>
+            <a:srgbClr val="221808"/>
           </a:solidFill>
           <a:ln>
             <a:noFill/>
@@ -4205,20 +5534,56 @@
       </p:sp>
       <p:sp>
         <p:nvSpPr>
-          <p:cNvPr id="25" name="Rectangle 24"/>
+          <p:cNvPr id="61" name="TextBox 60"/>
+          <p:cNvSpPr txBox="1"/>
+          <p:nvPr/>
+        </p:nvSpPr>
+        <p:spPr>
+          <a:xfrm>
+            <a:off x="4828032" y="3086100"/>
+            <a:ext cx="4041648" cy="201168"/>
+          </a:xfrm>
+          <a:prstGeom prst="rect">
+            <a:avLst/>
+          </a:prstGeom>
+          <a:noFill/>
+        </p:spPr>
+        <p:txBody>
+          <a:bodyPr wrap="square">
+            <a:spAutoFit/>
+          </a:bodyPr>
+          <a:lstStyle/>
+          <a:p>
+            <a:pPr algn="l"/>
+            <a:r>
+              <a:rPr sz="650" b="0" i="1">
+                <a:solidFill>
+                  <a:srgbClr val="FFCC44"/>
+                </a:solidFill>
+                <a:latin typeface="Calibri"/>
+              </a:rPr>
+              <a:t>Note: insiders receive ~$544K debt repayment at close ahead of equity distributions
+(Microcosm $451K + Wertz $93K + Exos $39K with interest).</a:t>
+            </a:r>
+          </a:p>
+        </p:txBody>
+      </p:sp>
+      <p:sp>
+        <p:nvSpPr>
+          <p:cNvPr id="62" name="Rectangle 61"/>
           <p:cNvSpPr/>
           <p:nvPr/>
         </p:nvSpPr>
         <p:spPr>
           <a:xfrm>
-            <a:off x="182880" y="2468880"/>
-            <a:ext cx="8778240" cy="233172"/>
+            <a:off x="164592" y="4069080"/>
+            <a:ext cx="8814816" cy="13716"/>
           </a:xfrm>
           <a:prstGeom prst="rect">
             <a:avLst/>
           </a:prstGeom>
           <a:solidFill>
-            <a:srgbClr val="1A1A1A"/>
+            <a:srgbClr val="F26A21"/>
           </a:solidFill>
           <a:ln>
             <a:noFill/>
@@ -4248,20 +5613,20 @@
       </p:sp>
       <p:sp>
         <p:nvSpPr>
-          <p:cNvPr id="26" name="Rectangle 25"/>
+          <p:cNvPr id="63" name="Rectangle 62"/>
           <p:cNvSpPr/>
           <p:nvPr/>
         </p:nvSpPr>
         <p:spPr>
           <a:xfrm>
-            <a:off x="182880" y="2468880"/>
-            <a:ext cx="50292" cy="233172"/>
+            <a:off x="164592" y="4087368"/>
+            <a:ext cx="8814816" cy="694944"/>
           </a:xfrm>
           <a:prstGeom prst="rect">
             <a:avLst/>
           </a:prstGeom>
           <a:solidFill>
-            <a:srgbClr val="F26A21"/>
+            <a:srgbClr val="1A0A00"/>
           </a:solidFill>
           <a:ln>
             <a:noFill/>
@@ -4291,14 +5656,14 @@
       </p:sp>
       <p:sp>
         <p:nvSpPr>
-          <p:cNvPr id="27" name="TextBox 26"/>
-          <p:cNvSpPr txBox="1"/>
-          <p:nvPr/>
-        </p:nvSpPr>
-        <p:spPr>
-          <a:xfrm>
-            <a:off x="265176" y="2496312"/>
-            <a:ext cx="411480" cy="196596"/>
+          <p:cNvPr id="64" name="TextBox 63"/>
+          <p:cNvSpPr txBox="1"/>
+          <p:nvPr/>
+        </p:nvSpPr>
+        <p:spPr>
+          <a:xfrm>
+            <a:off x="274320" y="4123944"/>
+            <a:ext cx="4572000" cy="182880"/>
           </a:xfrm>
           <a:prstGeom prst="rect">
             <a:avLst/>
@@ -4313,27 +5678,27 @@
           <a:p>
             <a:pPr algn="l"/>
             <a:r>
-              <a:rPr sz="2200" b="1" i="0">
+              <a:rPr sz="850" b="1" i="0">
                 <a:solidFill>
                   <a:srgbClr val="F26A21"/>
                 </a:solidFill>
-                <a:latin typeface="Cambria"/>
-              </a:rPr>
-              <a:t>3</a:t>
-            </a:r>
-          </a:p>
-        </p:txBody>
-      </p:sp>
-      <p:sp>
-        <p:nvSpPr>
-          <p:cNvPr id="28" name="TextBox 27"/>
-          <p:cNvSpPr txBox="1"/>
-          <p:nvPr/>
-        </p:nvSpPr>
-        <p:spPr>
-          <a:xfrm>
-            <a:off x="731520" y="2505456"/>
-            <a:ext cx="6629400" cy="178308"/>
+                <a:latin typeface="Calibri"/>
+              </a:rPr>
+              <a:t>Why We Need the Stock Ledger (Motion 2)</a:t>
+            </a:r>
+          </a:p>
+        </p:txBody>
+      </p:sp>
+      <p:sp>
+        <p:nvSpPr>
+          <p:cNvPr id="65" name="TextBox 64"/>
+          <p:cNvSpPr txBox="1"/>
+          <p:nvPr/>
+        </p:nvSpPr>
+        <p:spPr>
+          <a:xfrm>
+            <a:off x="274320" y="4315968"/>
+            <a:ext cx="8503920" cy="141732"/>
           </a:xfrm>
           <a:prstGeom prst="rect">
             <a:avLst/>
@@ -4348,27 +5713,27 @@
           <a:p>
             <a:pPr algn="l"/>
             <a:r>
-              <a:rPr sz="950" b="1" i="0">
-                <a:solidFill>
-                  <a:srgbClr val="FFFFFF"/>
+              <a:rPr sz="700" b="0" i="0">
+                <a:solidFill>
+                  <a:srgbClr val="CCCCCC"/>
                 </a:solidFill>
                 <a:latin typeface="Calibri"/>
               </a:rPr>
-              <a:t>Correct AR Unbilled / Customer-Deposit Accounting Within 5 Days</a:t>
-            </a:r>
-          </a:p>
-        </p:txBody>
-      </p:sp>
-      <p:sp>
-        <p:nvSpPr>
-          <p:cNvPr id="29" name="TextBox 28"/>
-          <p:cNvSpPr txBox="1"/>
-          <p:nvPr/>
-        </p:nvSpPr>
-        <p:spPr>
-          <a:xfrm>
-            <a:off x="7516367" y="2487168"/>
-            <a:ext cx="1371600" cy="201168"/>
+              <a:t>• SSLC’s books carry paid-in capital only as one total ($1,014,465); per-holder amounts and share counts are not on the books.</a:t>
+            </a:r>
+          </a:p>
+        </p:txBody>
+      </p:sp>
+      <p:sp>
+        <p:nvSpPr>
+          <p:cNvPr id="66" name="TextBox 65"/>
+          <p:cNvSpPr txBox="1"/>
+          <p:nvPr/>
+        </p:nvSpPr>
+        <p:spPr>
+          <a:xfrm>
+            <a:off x="274320" y="4457700"/>
+            <a:ext cx="8503920" cy="141732"/>
           </a:xfrm>
           <a:prstGeom prst="rect">
             <a:avLst/>
@@ -4383,27 +5748,27 @@
           <a:p>
             <a:pPr algn="l"/>
             <a:r>
-              <a:rPr sz="850" b="0" i="0">
-                <a:solidFill>
-                  <a:srgbClr val="44BB44"/>
+              <a:rPr sz="700" b="0" i="0">
+                <a:solidFill>
+                  <a:srgbClr val="CCCCCC"/>
                 </a:solidFill>
                 <a:latin typeface="Calibri"/>
               </a:rPr>
-              <a:t>☐  Approve</a:t>
-            </a:r>
-          </a:p>
-        </p:txBody>
-      </p:sp>
-      <p:sp>
-        <p:nvSpPr>
-          <p:cNvPr id="30" name="TextBox 29"/>
-          <p:cNvSpPr txBox="1"/>
-          <p:nvPr/>
-        </p:nvSpPr>
-        <p:spPr>
-          <a:xfrm>
-            <a:off x="7516367" y="2633472"/>
-            <a:ext cx="1371600" cy="201168"/>
+              <a:t>• GL shows a 7/24/2024 conversion of a $30K Exos loan into 5,464 shares that must be reconciled to the $790K stake credit.</a:t>
+            </a:r>
+          </a:p>
+        </p:txBody>
+      </p:sp>
+      <p:sp>
+        <p:nvSpPr>
+          <p:cNvPr id="67" name="TextBox 66"/>
+          <p:cNvSpPr txBox="1"/>
+          <p:nvPr/>
+        </p:nvSpPr>
+        <p:spPr>
+          <a:xfrm>
+            <a:off x="274320" y="4599432"/>
+            <a:ext cx="8503920" cy="141732"/>
           </a:xfrm>
           <a:prstGeom prst="rect">
             <a:avLst/>
@@ -4418,27 +5783,27 @@
           <a:p>
             <a:pPr algn="l"/>
             <a:r>
-              <a:rPr sz="850" b="0" i="0">
-                <a:solidFill>
-                  <a:srgbClr val="FF6666"/>
+              <a:rPr sz="700" b="0" i="0">
+                <a:solidFill>
+                  <a:srgbClr val="CCCCCC"/>
                 </a:solidFill>
                 <a:latin typeface="Calibri"/>
               </a:rPr>
-              <a:t>☐  Decline</a:t>
-            </a:r>
-          </a:p>
-        </p:txBody>
-      </p:sp>
-      <p:sp>
-        <p:nvSpPr>
-          <p:cNvPr id="31" name="TextBox 30"/>
-          <p:cNvSpPr txBox="1"/>
-          <p:nvPr/>
-        </p:nvSpPr>
-        <p:spPr>
-          <a:xfrm>
-            <a:off x="731520" y="2738628"/>
-            <a:ext cx="6629400" cy="882395"/>
+              <a:t>• ~$544K of insider debt is repaid at close ahead of equity distributions; the 81.94% split can’t be validated without the stock ledger, cap table and subscription agreements.</a:t>
+            </a:r>
+          </a:p>
+        </p:txBody>
+      </p:sp>
+      <p:sp>
+        <p:nvSpPr>
+          <p:cNvPr id="68" name="TextBox 67"/>
+          <p:cNvSpPr txBox="1"/>
+          <p:nvPr/>
+        </p:nvSpPr>
+        <p:spPr>
+          <a:xfrm>
+            <a:off x="182880" y="4782312"/>
+            <a:ext cx="8778240" cy="201168"/>
           </a:xfrm>
           <a:prstGeom prst="rect">
             <a:avLst/>
@@ -4451,67 +5816,131 @@
           </a:bodyPr>
           <a:lstStyle/>
           <a:p>
-            <a:r>
-              <a:rPr sz="750" b="0">
-                <a:solidFill>
-                  <a:srgbClr val="CCCCCC"/>
+            <a:pPr algn="l"/>
+            <a:r>
+              <a:rPr sz="650" b="0" i="1">
+                <a:solidFill>
+                  <a:srgbClr val="888888"/>
                 </a:solidFill>
                 <a:latin typeface="Calibri"/>
               </a:rPr>
-              <a:t>Direct A La Carte Solutions (bookkeeper) + Singer Lewak / Welch &amp; Co. to reconcile and correct:</a:t>
-            </a:r>
-          </a:p>
-          <a:p>
-            <a:r>
-              <a:rPr sz="750" b="0">
-                <a:solidFill>
-                  <a:srgbClr val="CCCCCC"/>
+              <a:t>Projection on current SSLC books (10/11/2026) and Exos estimates; not a guarantee.  Billed-ahead balance under reconciliation (Motion 3).  Low/high: net cash $1.28M–$1.74M; 5-yr total $3.4M–$7.0M.</a:t>
+            </a:r>
+          </a:p>
+        </p:txBody>
+      </p:sp>
+      <p:sp>
+        <p:nvSpPr>
+          <p:cNvPr id="69" name="TextBox 68"/>
+          <p:cNvSpPr txBox="1"/>
+          <p:nvPr/>
+        </p:nvSpPr>
+        <p:spPr>
+          <a:xfrm>
+            <a:off x="1554480" y="4956048"/>
+            <a:ext cx="6035040" cy="164592"/>
+          </a:xfrm>
+          <a:prstGeom prst="rect">
+            <a:avLst/>
+          </a:prstGeom>
+          <a:noFill/>
+        </p:spPr>
+        <p:txBody>
+          <a:bodyPr wrap="square">
+            <a:spAutoFit/>
+          </a:bodyPr>
+          <a:lstStyle/>
+          <a:p>
+            <a:pPr algn="ctr"/>
+            <a:r>
+              <a:rPr sz="700" b="0" i="1">
+                <a:solidFill>
+                  <a:srgbClr val="888888"/>
                 </a:solidFill>
                 <a:latin typeface="Calibri"/>
               </a:rPr>
-              <a:t>• Acct 1110 AR Unbilled ($942,177) and Acct 2380 Deposits ($120,000) within 5 days of approval.</a:t>
-            </a:r>
-          </a:p>
-          <a:p>
-            <a:r>
-              <a:rPr sz="750" b="0">
-                <a:solidFill>
-                  <a:srgbClr val="CCCCCC"/>
+              <a:t>DRAFT — NEGOTIATING TERMS</a:t>
+            </a:r>
+          </a:p>
+        </p:txBody>
+      </p:sp>
+      <p:sp>
+        <p:nvSpPr>
+          <p:cNvPr id="70" name="TextBox 69"/>
+          <p:cNvSpPr txBox="1"/>
+          <p:nvPr/>
+        </p:nvSpPr>
+        <p:spPr>
+          <a:xfrm>
+            <a:off x="7772400" y="4956048"/>
+            <a:ext cx="1143000" cy="164592"/>
+          </a:xfrm>
+          <a:prstGeom prst="rect">
+            <a:avLst/>
+          </a:prstGeom>
+          <a:noFill/>
+        </p:spPr>
+        <p:txBody>
+          <a:bodyPr wrap="square">
+            <a:spAutoFit/>
+          </a:bodyPr>
+          <a:lstStyle/>
+          <a:p>
+            <a:pPr algn="r"/>
+            <a:r>
+              <a:rPr sz="700" b="0" i="1">
+                <a:solidFill>
+                  <a:srgbClr val="888888"/>
                 </a:solidFill>
                 <a:latin typeface="Calibri"/>
               </a:rPr>
-              <a:t>• Clear start-billings on completed/shipped tanks; post missing Jul–Sep 2026 rev-rec entries.</a:t>
-            </a:r>
-          </a:p>
-          <a:p>
-            <a:r>
-              <a:rPr sz="750" b="0">
-                <a:solidFill>
-                  <a:srgbClr val="CCCCCC"/>
-                </a:solidFill>
-                <a:latin typeface="Calibri"/>
-              </a:rPr>
-              <a:t>• Tank-by-tank reconciliation (IM-109/122/134, EXOS-133) + corrected balance sheet to all directors.</a:t>
-            </a:r>
-          </a:p>
-        </p:txBody>
-      </p:sp>
-      <p:sp>
-        <p:nvSpPr>
-          <p:cNvPr id="32" name="Rectangle 31"/>
+              <a:t>CONFIDENTIAL</a:t>
+            </a:r>
+          </a:p>
+        </p:txBody>
+      </p:sp>
+    </p:spTree>
+  </p:cSld>
+  <p:clrMapOvr>
+    <a:masterClrMapping/>
+  </p:clrMapOvr>
+</p:sld>
+</file>
+
+<file path=ppt/slides/slide12.xml><?xml version="1.0" encoding="utf-8"?>
+<p:sld xmlns:a="http://schemas.openxmlformats.org/drawingml/2006/main" xmlns:p="http://schemas.openxmlformats.org/presentationml/2006/main" xmlns:r="http://schemas.openxmlformats.org/officeDocument/2006/relationships">
+  <p:cSld>
+    <p:bg>
+      <p:bgPr>
+        <a:solidFill>
+          <a:srgbClr val="111111"/>
+        </a:solidFill>
+        <a:effectLst/>
+      </p:bgPr>
+    </p:bg>
+    <p:spTree>
+      <p:nvGrpSpPr>
+        <p:cNvPr id="1" name=""/>
+        <p:cNvGrpSpPr/>
+        <p:nvPr/>
+      </p:nvGrpSpPr>
+      <p:grpSpPr/>
+      <p:sp>
+        <p:nvSpPr>
+          <p:cNvPr id="2" name="Rectangle 1"/>
           <p:cNvSpPr/>
           <p:nvPr/>
         </p:nvSpPr>
         <p:spPr>
           <a:xfrm>
-            <a:off x="182880" y="3675887"/>
-            <a:ext cx="8778240" cy="850392"/>
+            <a:off x="0" y="0"/>
+            <a:ext cx="9144000" cy="50292"/>
           </a:xfrm>
           <a:prstGeom prst="rect">
             <a:avLst/>
           </a:prstGeom>
           <a:solidFill>
-            <a:srgbClr val="1E1E1E"/>
+            <a:srgbClr val="F26A21"/>
           </a:solidFill>
           <a:ln>
             <a:noFill/>
@@ -4541,14 +5970,49 @@
       </p:sp>
       <p:sp>
         <p:nvSpPr>
-          <p:cNvPr id="33" name="Rectangle 32"/>
+          <p:cNvPr id="3" name="TextBox 2"/>
+          <p:cNvSpPr txBox="1"/>
+          <p:nvPr/>
+        </p:nvSpPr>
+        <p:spPr>
+          <a:xfrm>
+            <a:off x="228600" y="64008"/>
+            <a:ext cx="8686800" cy="384048"/>
+          </a:xfrm>
+          <a:prstGeom prst="rect">
+            <a:avLst/>
+          </a:prstGeom>
+          <a:noFill/>
+        </p:spPr>
+        <p:txBody>
+          <a:bodyPr wrap="square">
+            <a:spAutoFit/>
+          </a:bodyPr>
+          <a:lstStyle/>
+          <a:p>
+            <a:pPr algn="l"/>
+            <a:r>
+              <a:rPr sz="2000" b="1" i="0">
+                <a:solidFill>
+                  <a:srgbClr val="FFFFFF"/>
+                </a:solidFill>
+                <a:latin typeface="Cambria"/>
+              </a:rPr>
+              <a:t>Board Motions</a:t>
+            </a:r>
+          </a:p>
+        </p:txBody>
+      </p:sp>
+      <p:sp>
+        <p:nvSpPr>
+          <p:cNvPr id="4" name="Rectangle 3"/>
           <p:cNvSpPr/>
           <p:nvPr/>
         </p:nvSpPr>
         <p:spPr>
           <a:xfrm>
-            <a:off x="182880" y="3675887"/>
-            <a:ext cx="50292" cy="850392"/>
+            <a:off x="228600" y="457200"/>
+            <a:ext cx="1371600" cy="32004"/>
           </a:xfrm>
           <a:prstGeom prst="rect">
             <a:avLst/>
@@ -4584,20 +6048,20 @@
       </p:sp>
       <p:sp>
         <p:nvSpPr>
-          <p:cNvPr id="34" name="Rectangle 33"/>
+          <p:cNvPr id="5" name="Rectangle 4"/>
           <p:cNvSpPr/>
           <p:nvPr/>
         </p:nvSpPr>
         <p:spPr>
           <a:xfrm>
-            <a:off x="182880" y="3675887"/>
-            <a:ext cx="8778240" cy="233172"/>
+            <a:off x="182880" y="512064"/>
+            <a:ext cx="8778240" cy="896112"/>
           </a:xfrm>
           <a:prstGeom prst="rect">
             <a:avLst/>
           </a:prstGeom>
           <a:solidFill>
-            <a:srgbClr val="1A1A1A"/>
+            <a:srgbClr val="1E1E1E"/>
           </a:solidFill>
           <a:ln>
             <a:noFill/>
@@ -4627,14 +6091,14 @@
       </p:sp>
       <p:sp>
         <p:nvSpPr>
-          <p:cNvPr id="35" name="Rectangle 34"/>
+          <p:cNvPr id="6" name="Rectangle 5"/>
           <p:cNvSpPr/>
           <p:nvPr/>
         </p:nvSpPr>
         <p:spPr>
           <a:xfrm>
-            <a:off x="182880" y="3675887"/>
-            <a:ext cx="50292" cy="233172"/>
+            <a:off x="182880" y="512064"/>
+            <a:ext cx="50292" cy="896112"/>
           </a:xfrm>
           <a:prstGeom prst="rect">
             <a:avLst/>
@@ -4670,216 +6134,20 @@
       </p:sp>
       <p:sp>
         <p:nvSpPr>
-          <p:cNvPr id="36" name="TextBox 35"/>
-          <p:cNvSpPr txBox="1"/>
-          <p:nvPr/>
-        </p:nvSpPr>
-        <p:spPr>
-          <a:xfrm>
-            <a:off x="265176" y="3703320"/>
-            <a:ext cx="411480" cy="196596"/>
-          </a:xfrm>
-          <a:prstGeom prst="rect">
-            <a:avLst/>
-          </a:prstGeom>
-          <a:noFill/>
-        </p:spPr>
-        <p:txBody>
-          <a:bodyPr wrap="square">
-            <a:spAutoFit/>
-          </a:bodyPr>
-          <a:lstStyle/>
-          <a:p>
-            <a:pPr algn="l"/>
-            <a:r>
-              <a:rPr sz="2200" b="1" i="0">
-                <a:solidFill>
-                  <a:srgbClr val="F26A21"/>
-                </a:solidFill>
-                <a:latin typeface="Cambria"/>
-              </a:rPr>
-              <a:t>4</a:t>
-            </a:r>
-          </a:p>
-        </p:txBody>
-      </p:sp>
-      <p:sp>
-        <p:nvSpPr>
-          <p:cNvPr id="37" name="TextBox 36"/>
-          <p:cNvSpPr txBox="1"/>
-          <p:nvPr/>
-        </p:nvSpPr>
-        <p:spPr>
-          <a:xfrm>
-            <a:off x="731520" y="3712463"/>
-            <a:ext cx="6629400" cy="178308"/>
-          </a:xfrm>
-          <a:prstGeom prst="rect">
-            <a:avLst/>
-          </a:prstGeom>
-          <a:noFill/>
-        </p:spPr>
-        <p:txBody>
-          <a:bodyPr wrap="square">
-            <a:spAutoFit/>
-          </a:bodyPr>
-          <a:lstStyle/>
-          <a:p>
-            <a:pPr algn="l"/>
-            <a:r>
-              <a:rPr sz="950" b="1" i="0">
-                <a:solidFill>
-                  <a:srgbClr val="FFFFFF"/>
-                </a:solidFill>
-                <a:latin typeface="Calibri"/>
-              </a:rPr>
-              <a:t>Consent to ERP/MRP &amp; Inventory Evaluation (Separate Motion)</a:t>
-            </a:r>
-          </a:p>
-        </p:txBody>
-      </p:sp>
-      <p:sp>
-        <p:nvSpPr>
-          <p:cNvPr id="38" name="TextBox 37"/>
-          <p:cNvSpPr txBox="1"/>
-          <p:nvPr/>
-        </p:nvSpPr>
-        <p:spPr>
-          <a:xfrm>
-            <a:off x="7516367" y="3694175"/>
-            <a:ext cx="1371600" cy="201168"/>
-          </a:xfrm>
-          <a:prstGeom prst="rect">
-            <a:avLst/>
-          </a:prstGeom>
-          <a:noFill/>
-        </p:spPr>
-        <p:txBody>
-          <a:bodyPr wrap="square">
-            <a:spAutoFit/>
-          </a:bodyPr>
-          <a:lstStyle/>
-          <a:p>
-            <a:pPr algn="l"/>
-            <a:r>
-              <a:rPr sz="850" b="0" i="0">
-                <a:solidFill>
-                  <a:srgbClr val="44BB44"/>
-                </a:solidFill>
-                <a:latin typeface="Calibri"/>
-              </a:rPr>
-              <a:t>☐  Approve</a:t>
-            </a:r>
-          </a:p>
-        </p:txBody>
-      </p:sp>
-      <p:sp>
-        <p:nvSpPr>
-          <p:cNvPr id="39" name="TextBox 38"/>
-          <p:cNvSpPr txBox="1"/>
-          <p:nvPr/>
-        </p:nvSpPr>
-        <p:spPr>
-          <a:xfrm>
-            <a:off x="7516367" y="3840479"/>
-            <a:ext cx="1371600" cy="201168"/>
-          </a:xfrm>
-          <a:prstGeom prst="rect">
-            <a:avLst/>
-          </a:prstGeom>
-          <a:noFill/>
-        </p:spPr>
-        <p:txBody>
-          <a:bodyPr wrap="square">
-            <a:spAutoFit/>
-          </a:bodyPr>
-          <a:lstStyle/>
-          <a:p>
-            <a:pPr algn="l"/>
-            <a:r>
-              <a:rPr sz="850" b="0" i="0">
-                <a:solidFill>
-                  <a:srgbClr val="FF6666"/>
-                </a:solidFill>
-                <a:latin typeface="Calibri"/>
-              </a:rPr>
-              <a:t>☐  Decline</a:t>
-            </a:r>
-          </a:p>
-        </p:txBody>
-      </p:sp>
-      <p:sp>
-        <p:nvSpPr>
-          <p:cNvPr id="40" name="TextBox 39"/>
-          <p:cNvSpPr txBox="1"/>
-          <p:nvPr/>
-        </p:nvSpPr>
-        <p:spPr>
-          <a:xfrm>
-            <a:off x="731520" y="3945635"/>
-            <a:ext cx="6629400" cy="562356"/>
-          </a:xfrm>
-          <a:prstGeom prst="rect">
-            <a:avLst/>
-          </a:prstGeom>
-          <a:noFill/>
-        </p:spPr>
-        <p:txBody>
-          <a:bodyPr wrap="square">
-            <a:spAutoFit/>
-          </a:bodyPr>
-          <a:lstStyle/>
-          <a:p>
-            <a:r>
-              <a:rPr sz="750" b="0">
-                <a:solidFill>
-                  <a:srgbClr val="CCCCCC"/>
-                </a:solidFill>
-                <a:latin typeface="Calibri"/>
-              </a:rPr>
-              <a:t>Authorize Exos to use the same QB data to evaluate its in-house ERP/MRP and inventory</a:t>
-            </a:r>
-          </a:p>
-          <a:p>
-            <a:r>
-              <a:rPr sz="750" b="0">
-                <a:solidFill>
-                  <a:srgbClr val="CCCCCC"/>
-                </a:solidFill>
-                <a:latin typeface="Calibri"/>
-              </a:rPr>
-              <a:t>systems for the combined operation.  Confidential under the NDA.</a:t>
-            </a:r>
-          </a:p>
-          <a:p>
-            <a:r>
-              <a:rPr sz="750" b="0">
-                <a:solidFill>
-                  <a:srgbClr val="CCCCCC"/>
-                </a:solidFill>
-                <a:latin typeface="Calibri"/>
-              </a:rPr>
-              <a:t>Does not create any obligation to implement; evaluation only.</a:t>
-            </a:r>
-          </a:p>
-        </p:txBody>
-      </p:sp>
-      <p:sp>
-        <p:nvSpPr>
-          <p:cNvPr id="41" name="Rectangle 40"/>
+          <p:cNvPr id="7" name="Rectangle 6"/>
           <p:cNvSpPr/>
           <p:nvPr/>
         </p:nvSpPr>
         <p:spPr>
           <a:xfrm>
-            <a:off x="182880" y="4553712"/>
-            <a:ext cx="8778240" cy="182880"/>
+            <a:off x="182880" y="512064"/>
+            <a:ext cx="8778240" cy="233172"/>
           </a:xfrm>
           <a:prstGeom prst="rect">
             <a:avLst/>
           </a:prstGeom>
           <a:solidFill>
-            <a:srgbClr val="1A0A00"/>
+            <a:srgbClr val="1A1A1A"/>
           </a:solidFill>
           <a:ln>
             <a:noFill/>
@@ -4909,6 +6177,1436 @@
       </p:sp>
       <p:sp>
         <p:nvSpPr>
+          <p:cNvPr id="8" name="Rectangle 7"/>
+          <p:cNvSpPr/>
+          <p:nvPr/>
+        </p:nvSpPr>
+        <p:spPr>
+          <a:xfrm>
+            <a:off x="182880" y="512064"/>
+            <a:ext cx="50292" cy="233172"/>
+          </a:xfrm>
+          <a:prstGeom prst="rect">
+            <a:avLst/>
+          </a:prstGeom>
+          <a:solidFill>
+            <a:srgbClr val="F26A21"/>
+          </a:solidFill>
+          <a:ln>
+            <a:noFill/>
+          </a:ln>
+        </p:spPr>
+        <p:style>
+          <a:lnRef idx="1">
+            <a:schemeClr val="accent1"/>
+          </a:lnRef>
+          <a:fillRef idx="3">
+            <a:schemeClr val="accent1"/>
+          </a:fillRef>
+          <a:effectRef idx="2">
+            <a:schemeClr val="accent1"/>
+          </a:effectRef>
+          <a:fontRef idx="minor">
+            <a:schemeClr val="lt1"/>
+          </a:fontRef>
+        </p:style>
+        <p:txBody>
+          <a:bodyPr rtlCol="0" anchor="ctr"/>
+          <a:lstStyle/>
+          <a:p>
+            <a:pPr algn="ctr"/>
+          </a:p>
+        </p:txBody>
+      </p:sp>
+      <p:sp>
+        <p:nvSpPr>
+          <p:cNvPr id="9" name="TextBox 8"/>
+          <p:cNvSpPr txBox="1"/>
+          <p:nvPr/>
+        </p:nvSpPr>
+        <p:spPr>
+          <a:xfrm>
+            <a:off x="265176" y="539496"/>
+            <a:ext cx="411480" cy="196596"/>
+          </a:xfrm>
+          <a:prstGeom prst="rect">
+            <a:avLst/>
+          </a:prstGeom>
+          <a:noFill/>
+        </p:spPr>
+        <p:txBody>
+          <a:bodyPr wrap="square">
+            <a:spAutoFit/>
+          </a:bodyPr>
+          <a:lstStyle/>
+          <a:p>
+            <a:pPr algn="l"/>
+            <a:r>
+              <a:rPr sz="2200" b="1" i="0">
+                <a:solidFill>
+                  <a:srgbClr val="F26A21"/>
+                </a:solidFill>
+                <a:latin typeface="Cambria"/>
+              </a:rPr>
+              <a:t>1</a:t>
+            </a:r>
+          </a:p>
+        </p:txBody>
+      </p:sp>
+      <p:sp>
+        <p:nvSpPr>
+          <p:cNvPr id="10" name="TextBox 9"/>
+          <p:cNvSpPr txBox="1"/>
+          <p:nvPr/>
+        </p:nvSpPr>
+        <p:spPr>
+          <a:xfrm>
+            <a:off x="731520" y="548640"/>
+            <a:ext cx="6629400" cy="178308"/>
+          </a:xfrm>
+          <a:prstGeom prst="rect">
+            <a:avLst/>
+          </a:prstGeom>
+          <a:noFill/>
+        </p:spPr>
+        <p:txBody>
+          <a:bodyPr wrap="square">
+            <a:spAutoFit/>
+          </a:bodyPr>
+          <a:lstStyle/>
+          <a:p>
+            <a:pPr algn="l"/>
+            <a:r>
+              <a:rPr sz="950" b="1" i="0">
+                <a:solidFill>
+                  <a:srgbClr val="FFFFFF"/>
+                </a:solidFill>
+                <a:latin typeface="Calibri"/>
+              </a:rPr>
+              <a:t>Confirm §3 Exclusivity (May 2025 Asset Acquisition Agreement)</a:t>
+            </a:r>
+          </a:p>
+        </p:txBody>
+      </p:sp>
+      <p:sp>
+        <p:nvSpPr>
+          <p:cNvPr id="11" name="TextBox 10"/>
+          <p:cNvSpPr txBox="1"/>
+          <p:nvPr/>
+        </p:nvSpPr>
+        <p:spPr>
+          <a:xfrm>
+            <a:off x="7516367" y="530352"/>
+            <a:ext cx="1371600" cy="201168"/>
+          </a:xfrm>
+          <a:prstGeom prst="rect">
+            <a:avLst/>
+          </a:prstGeom>
+          <a:noFill/>
+        </p:spPr>
+        <p:txBody>
+          <a:bodyPr wrap="square">
+            <a:spAutoFit/>
+          </a:bodyPr>
+          <a:lstStyle/>
+          <a:p>
+            <a:pPr algn="l"/>
+            <a:r>
+              <a:rPr sz="850" b="0" i="0">
+                <a:solidFill>
+                  <a:srgbClr val="44BB44"/>
+                </a:solidFill>
+                <a:latin typeface="Calibri"/>
+              </a:rPr>
+              <a:t>☐  Approve</a:t>
+            </a:r>
+          </a:p>
+        </p:txBody>
+      </p:sp>
+      <p:sp>
+        <p:nvSpPr>
+          <p:cNvPr id="12" name="TextBox 11"/>
+          <p:cNvSpPr txBox="1"/>
+          <p:nvPr/>
+        </p:nvSpPr>
+        <p:spPr>
+          <a:xfrm>
+            <a:off x="7516367" y="676656"/>
+            <a:ext cx="1371600" cy="201168"/>
+          </a:xfrm>
+          <a:prstGeom prst="rect">
+            <a:avLst/>
+          </a:prstGeom>
+          <a:noFill/>
+        </p:spPr>
+        <p:txBody>
+          <a:bodyPr wrap="square">
+            <a:spAutoFit/>
+          </a:bodyPr>
+          <a:lstStyle/>
+          <a:p>
+            <a:pPr algn="l"/>
+            <a:r>
+              <a:rPr sz="850" b="0" i="0">
+                <a:solidFill>
+                  <a:srgbClr val="FF6666"/>
+                </a:solidFill>
+                <a:latin typeface="Calibri"/>
+              </a:rPr>
+              <a:t>☐  Decline</a:t>
+            </a:r>
+          </a:p>
+        </p:txBody>
+      </p:sp>
+      <p:sp>
+        <p:nvSpPr>
+          <p:cNvPr id="13" name="TextBox 12"/>
+          <p:cNvSpPr txBox="1"/>
+          <p:nvPr/>
+        </p:nvSpPr>
+        <p:spPr>
+          <a:xfrm>
+            <a:off x="731520" y="781812"/>
+            <a:ext cx="6629400" cy="608076"/>
+          </a:xfrm>
+          <a:prstGeom prst="rect">
+            <a:avLst/>
+          </a:prstGeom>
+          <a:noFill/>
+        </p:spPr>
+        <p:txBody>
+          <a:bodyPr wrap="square">
+            <a:spAutoFit/>
+          </a:bodyPr>
+          <a:lstStyle/>
+          <a:p>
+            <a:r>
+              <a:rPr sz="750" b="0">
+                <a:solidFill>
+                  <a:srgbClr val="CCCCCC"/>
+                </a:solidFill>
+                <a:latin typeface="Calibri"/>
+              </a:rPr>
+              <a:t>Approve a 90-day exclusivity period beginning on the date of this approval.</a:t>
+            </a:r>
+          </a:p>
+          <a:p>
+            <a:r>
+              <a:rPr sz="750" b="0">
+                <a:solidFill>
+                  <a:srgbClr val="CCCCCC"/>
+                </a:solidFill>
+                <a:latin typeface="Calibri"/>
+              </a:rPr>
+              <a:t>Extension not unreasonably withheld (per §3). Allows both parties to proceed to</a:t>
+            </a:r>
+          </a:p>
+          <a:p>
+            <a:r>
+              <a:rPr sz="750" b="0">
+                <a:solidFill>
+                  <a:srgbClr val="CCCCCC"/>
+                </a:solidFill>
+                <a:latin typeface="Calibri"/>
+              </a:rPr>
+              <a:t>diligence, definitive agreement, and financing close (target: Feb 15th, 2027).</a:t>
+            </a:r>
+          </a:p>
+        </p:txBody>
+      </p:sp>
+      <p:sp>
+        <p:nvSpPr>
+          <p:cNvPr id="14" name="Rectangle 13"/>
+          <p:cNvSpPr/>
+          <p:nvPr/>
+        </p:nvSpPr>
+        <p:spPr>
+          <a:xfrm>
+            <a:off x="182880" y="1444752"/>
+            <a:ext cx="8778240" cy="987552"/>
+          </a:xfrm>
+          <a:prstGeom prst="rect">
+            <a:avLst/>
+          </a:prstGeom>
+          <a:solidFill>
+            <a:srgbClr val="1E1E1E"/>
+          </a:solidFill>
+          <a:ln>
+            <a:noFill/>
+          </a:ln>
+        </p:spPr>
+        <p:style>
+          <a:lnRef idx="1">
+            <a:schemeClr val="accent1"/>
+          </a:lnRef>
+          <a:fillRef idx="3">
+            <a:schemeClr val="accent1"/>
+          </a:fillRef>
+          <a:effectRef idx="2">
+            <a:schemeClr val="accent1"/>
+          </a:effectRef>
+          <a:fontRef idx="minor">
+            <a:schemeClr val="lt1"/>
+          </a:fontRef>
+        </p:style>
+        <p:txBody>
+          <a:bodyPr rtlCol="0" anchor="ctr"/>
+          <a:lstStyle/>
+          <a:p>
+            <a:pPr algn="ctr"/>
+          </a:p>
+        </p:txBody>
+      </p:sp>
+      <p:sp>
+        <p:nvSpPr>
+          <p:cNvPr id="15" name="Rectangle 14"/>
+          <p:cNvSpPr/>
+          <p:nvPr/>
+        </p:nvSpPr>
+        <p:spPr>
+          <a:xfrm>
+            <a:off x="182880" y="1444752"/>
+            <a:ext cx="50292" cy="987552"/>
+          </a:xfrm>
+          <a:prstGeom prst="rect">
+            <a:avLst/>
+          </a:prstGeom>
+          <a:solidFill>
+            <a:srgbClr val="F26A21"/>
+          </a:solidFill>
+          <a:ln>
+            <a:noFill/>
+          </a:ln>
+        </p:spPr>
+        <p:style>
+          <a:lnRef idx="1">
+            <a:schemeClr val="accent1"/>
+          </a:lnRef>
+          <a:fillRef idx="3">
+            <a:schemeClr val="accent1"/>
+          </a:fillRef>
+          <a:effectRef idx="2">
+            <a:schemeClr val="accent1"/>
+          </a:effectRef>
+          <a:fontRef idx="minor">
+            <a:schemeClr val="lt1"/>
+          </a:fontRef>
+        </p:style>
+        <p:txBody>
+          <a:bodyPr rtlCol="0" anchor="ctr"/>
+          <a:lstStyle/>
+          <a:p>
+            <a:pPr algn="ctr"/>
+          </a:p>
+        </p:txBody>
+      </p:sp>
+      <p:sp>
+        <p:nvSpPr>
+          <p:cNvPr id="16" name="Rectangle 15"/>
+          <p:cNvSpPr/>
+          <p:nvPr/>
+        </p:nvSpPr>
+        <p:spPr>
+          <a:xfrm>
+            <a:off x="182880" y="1444752"/>
+            <a:ext cx="8778240" cy="233172"/>
+          </a:xfrm>
+          <a:prstGeom prst="rect">
+            <a:avLst/>
+          </a:prstGeom>
+          <a:solidFill>
+            <a:srgbClr val="1A1A1A"/>
+          </a:solidFill>
+          <a:ln>
+            <a:noFill/>
+          </a:ln>
+        </p:spPr>
+        <p:style>
+          <a:lnRef idx="1">
+            <a:schemeClr val="accent1"/>
+          </a:lnRef>
+          <a:fillRef idx="3">
+            <a:schemeClr val="accent1"/>
+          </a:fillRef>
+          <a:effectRef idx="2">
+            <a:schemeClr val="accent1"/>
+          </a:effectRef>
+          <a:fontRef idx="minor">
+            <a:schemeClr val="lt1"/>
+          </a:fontRef>
+        </p:style>
+        <p:txBody>
+          <a:bodyPr rtlCol="0" anchor="ctr"/>
+          <a:lstStyle/>
+          <a:p>
+            <a:pPr algn="ctr"/>
+          </a:p>
+        </p:txBody>
+      </p:sp>
+      <p:sp>
+        <p:nvSpPr>
+          <p:cNvPr id="17" name="Rectangle 16"/>
+          <p:cNvSpPr/>
+          <p:nvPr/>
+        </p:nvSpPr>
+        <p:spPr>
+          <a:xfrm>
+            <a:off x="182880" y="1444752"/>
+            <a:ext cx="50292" cy="233172"/>
+          </a:xfrm>
+          <a:prstGeom prst="rect">
+            <a:avLst/>
+          </a:prstGeom>
+          <a:solidFill>
+            <a:srgbClr val="F26A21"/>
+          </a:solidFill>
+          <a:ln>
+            <a:noFill/>
+          </a:ln>
+        </p:spPr>
+        <p:style>
+          <a:lnRef idx="1">
+            <a:schemeClr val="accent1"/>
+          </a:lnRef>
+          <a:fillRef idx="3">
+            <a:schemeClr val="accent1"/>
+          </a:fillRef>
+          <a:effectRef idx="2">
+            <a:schemeClr val="accent1"/>
+          </a:effectRef>
+          <a:fontRef idx="minor">
+            <a:schemeClr val="lt1"/>
+          </a:fontRef>
+        </p:style>
+        <p:txBody>
+          <a:bodyPr rtlCol="0" anchor="ctr"/>
+          <a:lstStyle/>
+          <a:p>
+            <a:pPr algn="ctr"/>
+          </a:p>
+        </p:txBody>
+      </p:sp>
+      <p:sp>
+        <p:nvSpPr>
+          <p:cNvPr id="18" name="TextBox 17"/>
+          <p:cNvSpPr txBox="1"/>
+          <p:nvPr/>
+        </p:nvSpPr>
+        <p:spPr>
+          <a:xfrm>
+            <a:off x="265176" y="1472184"/>
+            <a:ext cx="411480" cy="196596"/>
+          </a:xfrm>
+          <a:prstGeom prst="rect">
+            <a:avLst/>
+          </a:prstGeom>
+          <a:noFill/>
+        </p:spPr>
+        <p:txBody>
+          <a:bodyPr wrap="square">
+            <a:spAutoFit/>
+          </a:bodyPr>
+          <a:lstStyle/>
+          <a:p>
+            <a:pPr algn="l"/>
+            <a:r>
+              <a:rPr sz="2200" b="1" i="0">
+                <a:solidFill>
+                  <a:srgbClr val="F26A21"/>
+                </a:solidFill>
+                <a:latin typeface="Cambria"/>
+              </a:rPr>
+              <a:t>2</a:t>
+            </a:r>
+          </a:p>
+        </p:txBody>
+      </p:sp>
+      <p:sp>
+        <p:nvSpPr>
+          <p:cNvPr id="19" name="TextBox 18"/>
+          <p:cNvSpPr txBox="1"/>
+          <p:nvPr/>
+        </p:nvSpPr>
+        <p:spPr>
+          <a:xfrm>
+            <a:off x="731520" y="1481328"/>
+            <a:ext cx="6629400" cy="178308"/>
+          </a:xfrm>
+          <a:prstGeom prst="rect">
+            <a:avLst/>
+          </a:prstGeom>
+          <a:noFill/>
+        </p:spPr>
+        <p:txBody>
+          <a:bodyPr wrap="square">
+            <a:spAutoFit/>
+          </a:bodyPr>
+          <a:lstStyle/>
+          <a:p>
+            <a:pPr algn="l"/>
+            <a:r>
+              <a:rPr sz="950" b="1" i="0">
+                <a:solidFill>
+                  <a:srgbClr val="FFFFFF"/>
+                </a:solidFill>
+                <a:latin typeface="Calibri"/>
+              </a:rPr>
+              <a:t>Grant Full Read-Only QuickBooks Online Access for Diligence</a:t>
+            </a:r>
+          </a:p>
+        </p:txBody>
+      </p:sp>
+      <p:sp>
+        <p:nvSpPr>
+          <p:cNvPr id="20" name="TextBox 19"/>
+          <p:cNvSpPr txBox="1"/>
+          <p:nvPr/>
+        </p:nvSpPr>
+        <p:spPr>
+          <a:xfrm>
+            <a:off x="7516367" y="1463040"/>
+            <a:ext cx="1371600" cy="201168"/>
+          </a:xfrm>
+          <a:prstGeom prst="rect">
+            <a:avLst/>
+          </a:prstGeom>
+          <a:noFill/>
+        </p:spPr>
+        <p:txBody>
+          <a:bodyPr wrap="square">
+            <a:spAutoFit/>
+          </a:bodyPr>
+          <a:lstStyle/>
+          <a:p>
+            <a:pPr algn="l"/>
+            <a:r>
+              <a:rPr sz="850" b="0" i="0">
+                <a:solidFill>
+                  <a:srgbClr val="44BB44"/>
+                </a:solidFill>
+                <a:latin typeface="Calibri"/>
+              </a:rPr>
+              <a:t>☐  Approve</a:t>
+            </a:r>
+          </a:p>
+        </p:txBody>
+      </p:sp>
+      <p:sp>
+        <p:nvSpPr>
+          <p:cNvPr id="21" name="TextBox 20"/>
+          <p:cNvSpPr txBox="1"/>
+          <p:nvPr/>
+        </p:nvSpPr>
+        <p:spPr>
+          <a:xfrm>
+            <a:off x="7516367" y="1609344"/>
+            <a:ext cx="1371600" cy="201168"/>
+          </a:xfrm>
+          <a:prstGeom prst="rect">
+            <a:avLst/>
+          </a:prstGeom>
+          <a:noFill/>
+        </p:spPr>
+        <p:txBody>
+          <a:bodyPr wrap="square">
+            <a:spAutoFit/>
+          </a:bodyPr>
+          <a:lstStyle/>
+          <a:p>
+            <a:pPr algn="l"/>
+            <a:r>
+              <a:rPr sz="850" b="0" i="0">
+                <a:solidFill>
+                  <a:srgbClr val="FF6666"/>
+                </a:solidFill>
+                <a:latin typeface="Calibri"/>
+              </a:rPr>
+              <a:t>☐  Decline</a:t>
+            </a:r>
+          </a:p>
+        </p:txBody>
+      </p:sp>
+      <p:sp>
+        <p:nvSpPr>
+          <p:cNvPr id="22" name="TextBox 21"/>
+          <p:cNvSpPr txBox="1"/>
+          <p:nvPr/>
+        </p:nvSpPr>
+        <p:spPr>
+          <a:xfrm>
+            <a:off x="731520" y="1714500"/>
+            <a:ext cx="6629400" cy="699516"/>
+          </a:xfrm>
+          <a:prstGeom prst="rect">
+            <a:avLst/>
+          </a:prstGeom>
+          <a:noFill/>
+        </p:spPr>
+        <p:txBody>
+          <a:bodyPr wrap="square">
+            <a:spAutoFit/>
+          </a:bodyPr>
+          <a:lstStyle/>
+          <a:p>
+            <a:r>
+              <a:rPr sz="700" b="0">
+                <a:solidFill>
+                  <a:srgbClr val="CCCCCC"/>
+                </a:solidFill>
+                <a:latin typeface="Calibri"/>
+              </a:rPr>
+              <a:t>Authorize an all-access or accountant user for John Quinn and one Exos finance reviewer.</a:t>
+            </a:r>
+          </a:p>
+          <a:p>
+            <a:r>
+              <a:rPr sz="700" b="0">
+                <a:solidFill>
+                  <a:srgbClr val="CCCCCC"/>
+                </a:solidFill>
+                <a:latin typeface="Calibri"/>
+              </a:rPr>
+              <a:t>Purpose: reconcile the $942K "billed-ahead" balance and shared-facility costs before close.</a:t>
+            </a:r>
+          </a:p>
+          <a:p>
+            <a:r>
+              <a:rPr sz="700" b="0">
+                <a:solidFill>
+                  <a:srgbClr val="CCCCCC"/>
+                </a:solidFill>
+                <a:latin typeface="Calibri"/>
+              </a:rPr>
+              <a:t>Basis: Cal. Corp. Code §1602 director inspection right + AAA §4 confirmatory diligence.</a:t>
+            </a:r>
+          </a:p>
+          <a:p>
+            <a:r>
+              <a:rPr sz="700" b="0">
+                <a:solidFill>
+                  <a:srgbClr val="CCCCCC"/>
+                </a:solidFill>
+                <a:latin typeface="Calibri"/>
+              </a:rPr>
+              <a:t>Also provide: stock ledger, cap table, subscription agreements, and paid-in capital</a:t>
+            </a:r>
+          </a:p>
+          <a:p>
+            <a:r>
+              <a:rPr sz="700" b="0">
+                <a:solidFill>
+                  <a:srgbClr val="CCCCCC"/>
+                </a:solidFill>
+                <a:latin typeface="Calibri"/>
+              </a:rPr>
+              <a:t>by shareholder (books: $1,014,465 total paid-in; need per-holder to compare payout vs. invested).</a:t>
+            </a:r>
+          </a:p>
+          <a:p>
+            <a:r>
+              <a:rPr sz="750" b="1">
+                <a:solidFill>
+                  <a:srgbClr val="F26A21"/>
+                </a:solidFill>
+                <a:latin typeface="Calibri"/>
+              </a:rPr>
+              <a:t>Confidential under the 7/27/2021 NDA.  Access to be granted no later than October 15, 2026.</a:t>
+            </a:r>
+          </a:p>
+        </p:txBody>
+      </p:sp>
+      <p:sp>
+        <p:nvSpPr>
+          <p:cNvPr id="23" name="Rectangle 22"/>
+          <p:cNvSpPr/>
+          <p:nvPr/>
+        </p:nvSpPr>
+        <p:spPr>
+          <a:xfrm>
+            <a:off x="182880" y="2468880"/>
+            <a:ext cx="8778240" cy="1170432"/>
+          </a:xfrm>
+          <a:prstGeom prst="rect">
+            <a:avLst/>
+          </a:prstGeom>
+          <a:solidFill>
+            <a:srgbClr val="1E1E1E"/>
+          </a:solidFill>
+          <a:ln>
+            <a:noFill/>
+          </a:ln>
+        </p:spPr>
+        <p:style>
+          <a:lnRef idx="1">
+            <a:schemeClr val="accent1"/>
+          </a:lnRef>
+          <a:fillRef idx="3">
+            <a:schemeClr val="accent1"/>
+          </a:fillRef>
+          <a:effectRef idx="2">
+            <a:schemeClr val="accent1"/>
+          </a:effectRef>
+          <a:fontRef idx="minor">
+            <a:schemeClr val="lt1"/>
+          </a:fontRef>
+        </p:style>
+        <p:txBody>
+          <a:bodyPr rtlCol="0" anchor="ctr"/>
+          <a:lstStyle/>
+          <a:p>
+            <a:pPr algn="ctr"/>
+          </a:p>
+        </p:txBody>
+      </p:sp>
+      <p:sp>
+        <p:nvSpPr>
+          <p:cNvPr id="24" name="Rectangle 23"/>
+          <p:cNvSpPr/>
+          <p:nvPr/>
+        </p:nvSpPr>
+        <p:spPr>
+          <a:xfrm>
+            <a:off x="182880" y="2468880"/>
+            <a:ext cx="50292" cy="1170432"/>
+          </a:xfrm>
+          <a:prstGeom prst="rect">
+            <a:avLst/>
+          </a:prstGeom>
+          <a:solidFill>
+            <a:srgbClr val="F26A21"/>
+          </a:solidFill>
+          <a:ln>
+            <a:noFill/>
+          </a:ln>
+        </p:spPr>
+        <p:style>
+          <a:lnRef idx="1">
+            <a:schemeClr val="accent1"/>
+          </a:lnRef>
+          <a:fillRef idx="3">
+            <a:schemeClr val="accent1"/>
+          </a:fillRef>
+          <a:effectRef idx="2">
+            <a:schemeClr val="accent1"/>
+          </a:effectRef>
+          <a:fontRef idx="minor">
+            <a:schemeClr val="lt1"/>
+          </a:fontRef>
+        </p:style>
+        <p:txBody>
+          <a:bodyPr rtlCol="0" anchor="ctr"/>
+          <a:lstStyle/>
+          <a:p>
+            <a:pPr algn="ctr"/>
+          </a:p>
+        </p:txBody>
+      </p:sp>
+      <p:sp>
+        <p:nvSpPr>
+          <p:cNvPr id="25" name="Rectangle 24"/>
+          <p:cNvSpPr/>
+          <p:nvPr/>
+        </p:nvSpPr>
+        <p:spPr>
+          <a:xfrm>
+            <a:off x="182880" y="2468880"/>
+            <a:ext cx="8778240" cy="233172"/>
+          </a:xfrm>
+          <a:prstGeom prst="rect">
+            <a:avLst/>
+          </a:prstGeom>
+          <a:solidFill>
+            <a:srgbClr val="1A1A1A"/>
+          </a:solidFill>
+          <a:ln>
+            <a:noFill/>
+          </a:ln>
+        </p:spPr>
+        <p:style>
+          <a:lnRef idx="1">
+            <a:schemeClr val="accent1"/>
+          </a:lnRef>
+          <a:fillRef idx="3">
+            <a:schemeClr val="accent1"/>
+          </a:fillRef>
+          <a:effectRef idx="2">
+            <a:schemeClr val="accent1"/>
+          </a:effectRef>
+          <a:fontRef idx="minor">
+            <a:schemeClr val="lt1"/>
+          </a:fontRef>
+        </p:style>
+        <p:txBody>
+          <a:bodyPr rtlCol="0" anchor="ctr"/>
+          <a:lstStyle/>
+          <a:p>
+            <a:pPr algn="ctr"/>
+          </a:p>
+        </p:txBody>
+      </p:sp>
+      <p:sp>
+        <p:nvSpPr>
+          <p:cNvPr id="26" name="Rectangle 25"/>
+          <p:cNvSpPr/>
+          <p:nvPr/>
+        </p:nvSpPr>
+        <p:spPr>
+          <a:xfrm>
+            <a:off x="182880" y="2468880"/>
+            <a:ext cx="50292" cy="233172"/>
+          </a:xfrm>
+          <a:prstGeom prst="rect">
+            <a:avLst/>
+          </a:prstGeom>
+          <a:solidFill>
+            <a:srgbClr val="F26A21"/>
+          </a:solidFill>
+          <a:ln>
+            <a:noFill/>
+          </a:ln>
+        </p:spPr>
+        <p:style>
+          <a:lnRef idx="1">
+            <a:schemeClr val="accent1"/>
+          </a:lnRef>
+          <a:fillRef idx="3">
+            <a:schemeClr val="accent1"/>
+          </a:fillRef>
+          <a:effectRef idx="2">
+            <a:schemeClr val="accent1"/>
+          </a:effectRef>
+          <a:fontRef idx="minor">
+            <a:schemeClr val="lt1"/>
+          </a:fontRef>
+        </p:style>
+        <p:txBody>
+          <a:bodyPr rtlCol="0" anchor="ctr"/>
+          <a:lstStyle/>
+          <a:p>
+            <a:pPr algn="ctr"/>
+          </a:p>
+        </p:txBody>
+      </p:sp>
+      <p:sp>
+        <p:nvSpPr>
+          <p:cNvPr id="27" name="TextBox 26"/>
+          <p:cNvSpPr txBox="1"/>
+          <p:nvPr/>
+        </p:nvSpPr>
+        <p:spPr>
+          <a:xfrm>
+            <a:off x="265176" y="2496312"/>
+            <a:ext cx="411480" cy="196596"/>
+          </a:xfrm>
+          <a:prstGeom prst="rect">
+            <a:avLst/>
+          </a:prstGeom>
+          <a:noFill/>
+        </p:spPr>
+        <p:txBody>
+          <a:bodyPr wrap="square">
+            <a:spAutoFit/>
+          </a:bodyPr>
+          <a:lstStyle/>
+          <a:p>
+            <a:pPr algn="l"/>
+            <a:r>
+              <a:rPr sz="2200" b="1" i="0">
+                <a:solidFill>
+                  <a:srgbClr val="F26A21"/>
+                </a:solidFill>
+                <a:latin typeface="Cambria"/>
+              </a:rPr>
+              <a:t>3</a:t>
+            </a:r>
+          </a:p>
+        </p:txBody>
+      </p:sp>
+      <p:sp>
+        <p:nvSpPr>
+          <p:cNvPr id="28" name="TextBox 27"/>
+          <p:cNvSpPr txBox="1"/>
+          <p:nvPr/>
+        </p:nvSpPr>
+        <p:spPr>
+          <a:xfrm>
+            <a:off x="731520" y="2505456"/>
+            <a:ext cx="6629400" cy="178308"/>
+          </a:xfrm>
+          <a:prstGeom prst="rect">
+            <a:avLst/>
+          </a:prstGeom>
+          <a:noFill/>
+        </p:spPr>
+        <p:txBody>
+          <a:bodyPr wrap="square">
+            <a:spAutoFit/>
+          </a:bodyPr>
+          <a:lstStyle/>
+          <a:p>
+            <a:pPr algn="l"/>
+            <a:r>
+              <a:rPr sz="950" b="1" i="0">
+                <a:solidFill>
+                  <a:srgbClr val="FFFFFF"/>
+                </a:solidFill>
+                <a:latin typeface="Calibri"/>
+              </a:rPr>
+              <a:t>Correct AR Unbilled / Customer-Deposit Accounting Within 5 Days</a:t>
+            </a:r>
+          </a:p>
+        </p:txBody>
+      </p:sp>
+      <p:sp>
+        <p:nvSpPr>
+          <p:cNvPr id="29" name="TextBox 28"/>
+          <p:cNvSpPr txBox="1"/>
+          <p:nvPr/>
+        </p:nvSpPr>
+        <p:spPr>
+          <a:xfrm>
+            <a:off x="7516367" y="2487168"/>
+            <a:ext cx="1371600" cy="201168"/>
+          </a:xfrm>
+          <a:prstGeom prst="rect">
+            <a:avLst/>
+          </a:prstGeom>
+          <a:noFill/>
+        </p:spPr>
+        <p:txBody>
+          <a:bodyPr wrap="square">
+            <a:spAutoFit/>
+          </a:bodyPr>
+          <a:lstStyle/>
+          <a:p>
+            <a:pPr algn="l"/>
+            <a:r>
+              <a:rPr sz="850" b="0" i="0">
+                <a:solidFill>
+                  <a:srgbClr val="44BB44"/>
+                </a:solidFill>
+                <a:latin typeface="Calibri"/>
+              </a:rPr>
+              <a:t>☐  Approve</a:t>
+            </a:r>
+          </a:p>
+        </p:txBody>
+      </p:sp>
+      <p:sp>
+        <p:nvSpPr>
+          <p:cNvPr id="30" name="TextBox 29"/>
+          <p:cNvSpPr txBox="1"/>
+          <p:nvPr/>
+        </p:nvSpPr>
+        <p:spPr>
+          <a:xfrm>
+            <a:off x="7516367" y="2633472"/>
+            <a:ext cx="1371600" cy="201168"/>
+          </a:xfrm>
+          <a:prstGeom prst="rect">
+            <a:avLst/>
+          </a:prstGeom>
+          <a:noFill/>
+        </p:spPr>
+        <p:txBody>
+          <a:bodyPr wrap="square">
+            <a:spAutoFit/>
+          </a:bodyPr>
+          <a:lstStyle/>
+          <a:p>
+            <a:pPr algn="l"/>
+            <a:r>
+              <a:rPr sz="850" b="0" i="0">
+                <a:solidFill>
+                  <a:srgbClr val="FF6666"/>
+                </a:solidFill>
+                <a:latin typeface="Calibri"/>
+              </a:rPr>
+              <a:t>☐  Decline</a:t>
+            </a:r>
+          </a:p>
+        </p:txBody>
+      </p:sp>
+      <p:sp>
+        <p:nvSpPr>
+          <p:cNvPr id="31" name="TextBox 30"/>
+          <p:cNvSpPr txBox="1"/>
+          <p:nvPr/>
+        </p:nvSpPr>
+        <p:spPr>
+          <a:xfrm>
+            <a:off x="731520" y="2738628"/>
+            <a:ext cx="6629400" cy="882395"/>
+          </a:xfrm>
+          <a:prstGeom prst="rect">
+            <a:avLst/>
+          </a:prstGeom>
+          <a:noFill/>
+        </p:spPr>
+        <p:txBody>
+          <a:bodyPr wrap="square">
+            <a:spAutoFit/>
+          </a:bodyPr>
+          <a:lstStyle/>
+          <a:p>
+            <a:r>
+              <a:rPr sz="750" b="0">
+                <a:solidFill>
+                  <a:srgbClr val="CCCCCC"/>
+                </a:solidFill>
+                <a:latin typeface="Calibri"/>
+              </a:rPr>
+              <a:t>Direct A La Carte Solutions (bookkeeper) + Singer Lewak / Welch &amp; Co. to reconcile and correct:</a:t>
+            </a:r>
+          </a:p>
+          <a:p>
+            <a:r>
+              <a:rPr sz="750" b="0">
+                <a:solidFill>
+                  <a:srgbClr val="CCCCCC"/>
+                </a:solidFill>
+                <a:latin typeface="Calibri"/>
+              </a:rPr>
+              <a:t>• Acct 1110 AR Unbilled ($942,177) and Acct 2380 Deposits ($120,000) within 5 days of approval.</a:t>
+            </a:r>
+          </a:p>
+          <a:p>
+            <a:r>
+              <a:rPr sz="750" b="0">
+                <a:solidFill>
+                  <a:srgbClr val="CCCCCC"/>
+                </a:solidFill>
+                <a:latin typeface="Calibri"/>
+              </a:rPr>
+              <a:t>• Clear start-billings on completed/shipped tanks; post missing Jul–Sep 2026 rev-rec entries.</a:t>
+            </a:r>
+          </a:p>
+          <a:p>
+            <a:r>
+              <a:rPr sz="750" b="0">
+                <a:solidFill>
+                  <a:srgbClr val="CCCCCC"/>
+                </a:solidFill>
+                <a:latin typeface="Calibri"/>
+              </a:rPr>
+              <a:t>• Tank-by-tank reconciliation (IM-109/122/134, EXOS-133) + corrected balance sheet to all directors.</a:t>
+            </a:r>
+          </a:p>
+        </p:txBody>
+      </p:sp>
+      <p:sp>
+        <p:nvSpPr>
+          <p:cNvPr id="32" name="Rectangle 31"/>
+          <p:cNvSpPr/>
+          <p:nvPr/>
+        </p:nvSpPr>
+        <p:spPr>
+          <a:xfrm>
+            <a:off x="182880" y="3675887"/>
+            <a:ext cx="8778240" cy="850392"/>
+          </a:xfrm>
+          <a:prstGeom prst="rect">
+            <a:avLst/>
+          </a:prstGeom>
+          <a:solidFill>
+            <a:srgbClr val="1E1E1E"/>
+          </a:solidFill>
+          <a:ln>
+            <a:noFill/>
+          </a:ln>
+        </p:spPr>
+        <p:style>
+          <a:lnRef idx="1">
+            <a:schemeClr val="accent1"/>
+          </a:lnRef>
+          <a:fillRef idx="3">
+            <a:schemeClr val="accent1"/>
+          </a:fillRef>
+          <a:effectRef idx="2">
+            <a:schemeClr val="accent1"/>
+          </a:effectRef>
+          <a:fontRef idx="minor">
+            <a:schemeClr val="lt1"/>
+          </a:fontRef>
+        </p:style>
+        <p:txBody>
+          <a:bodyPr rtlCol="0" anchor="ctr"/>
+          <a:lstStyle/>
+          <a:p>
+            <a:pPr algn="ctr"/>
+          </a:p>
+        </p:txBody>
+      </p:sp>
+      <p:sp>
+        <p:nvSpPr>
+          <p:cNvPr id="33" name="Rectangle 32"/>
+          <p:cNvSpPr/>
+          <p:nvPr/>
+        </p:nvSpPr>
+        <p:spPr>
+          <a:xfrm>
+            <a:off x="182880" y="3675887"/>
+            <a:ext cx="50292" cy="850392"/>
+          </a:xfrm>
+          <a:prstGeom prst="rect">
+            <a:avLst/>
+          </a:prstGeom>
+          <a:solidFill>
+            <a:srgbClr val="F26A21"/>
+          </a:solidFill>
+          <a:ln>
+            <a:noFill/>
+          </a:ln>
+        </p:spPr>
+        <p:style>
+          <a:lnRef idx="1">
+            <a:schemeClr val="accent1"/>
+          </a:lnRef>
+          <a:fillRef idx="3">
+            <a:schemeClr val="accent1"/>
+          </a:fillRef>
+          <a:effectRef idx="2">
+            <a:schemeClr val="accent1"/>
+          </a:effectRef>
+          <a:fontRef idx="minor">
+            <a:schemeClr val="lt1"/>
+          </a:fontRef>
+        </p:style>
+        <p:txBody>
+          <a:bodyPr rtlCol="0" anchor="ctr"/>
+          <a:lstStyle/>
+          <a:p>
+            <a:pPr algn="ctr"/>
+          </a:p>
+        </p:txBody>
+      </p:sp>
+      <p:sp>
+        <p:nvSpPr>
+          <p:cNvPr id="34" name="Rectangle 33"/>
+          <p:cNvSpPr/>
+          <p:nvPr/>
+        </p:nvSpPr>
+        <p:spPr>
+          <a:xfrm>
+            <a:off x="182880" y="3675887"/>
+            <a:ext cx="8778240" cy="233172"/>
+          </a:xfrm>
+          <a:prstGeom prst="rect">
+            <a:avLst/>
+          </a:prstGeom>
+          <a:solidFill>
+            <a:srgbClr val="1A1A1A"/>
+          </a:solidFill>
+          <a:ln>
+            <a:noFill/>
+          </a:ln>
+        </p:spPr>
+        <p:style>
+          <a:lnRef idx="1">
+            <a:schemeClr val="accent1"/>
+          </a:lnRef>
+          <a:fillRef idx="3">
+            <a:schemeClr val="accent1"/>
+          </a:fillRef>
+          <a:effectRef idx="2">
+            <a:schemeClr val="accent1"/>
+          </a:effectRef>
+          <a:fontRef idx="minor">
+            <a:schemeClr val="lt1"/>
+          </a:fontRef>
+        </p:style>
+        <p:txBody>
+          <a:bodyPr rtlCol="0" anchor="ctr"/>
+          <a:lstStyle/>
+          <a:p>
+            <a:pPr algn="ctr"/>
+          </a:p>
+        </p:txBody>
+      </p:sp>
+      <p:sp>
+        <p:nvSpPr>
+          <p:cNvPr id="35" name="Rectangle 34"/>
+          <p:cNvSpPr/>
+          <p:nvPr/>
+        </p:nvSpPr>
+        <p:spPr>
+          <a:xfrm>
+            <a:off x="182880" y="3675887"/>
+            <a:ext cx="50292" cy="233172"/>
+          </a:xfrm>
+          <a:prstGeom prst="rect">
+            <a:avLst/>
+          </a:prstGeom>
+          <a:solidFill>
+            <a:srgbClr val="F26A21"/>
+          </a:solidFill>
+          <a:ln>
+            <a:noFill/>
+          </a:ln>
+        </p:spPr>
+        <p:style>
+          <a:lnRef idx="1">
+            <a:schemeClr val="accent1"/>
+          </a:lnRef>
+          <a:fillRef idx="3">
+            <a:schemeClr val="accent1"/>
+          </a:fillRef>
+          <a:effectRef idx="2">
+            <a:schemeClr val="accent1"/>
+          </a:effectRef>
+          <a:fontRef idx="minor">
+            <a:schemeClr val="lt1"/>
+          </a:fontRef>
+        </p:style>
+        <p:txBody>
+          <a:bodyPr rtlCol="0" anchor="ctr"/>
+          <a:lstStyle/>
+          <a:p>
+            <a:pPr algn="ctr"/>
+          </a:p>
+        </p:txBody>
+      </p:sp>
+      <p:sp>
+        <p:nvSpPr>
+          <p:cNvPr id="36" name="TextBox 35"/>
+          <p:cNvSpPr txBox="1"/>
+          <p:nvPr/>
+        </p:nvSpPr>
+        <p:spPr>
+          <a:xfrm>
+            <a:off x="265176" y="3703320"/>
+            <a:ext cx="411480" cy="196596"/>
+          </a:xfrm>
+          <a:prstGeom prst="rect">
+            <a:avLst/>
+          </a:prstGeom>
+          <a:noFill/>
+        </p:spPr>
+        <p:txBody>
+          <a:bodyPr wrap="square">
+            <a:spAutoFit/>
+          </a:bodyPr>
+          <a:lstStyle/>
+          <a:p>
+            <a:pPr algn="l"/>
+            <a:r>
+              <a:rPr sz="2200" b="1" i="0">
+                <a:solidFill>
+                  <a:srgbClr val="F26A21"/>
+                </a:solidFill>
+                <a:latin typeface="Cambria"/>
+              </a:rPr>
+              <a:t>4</a:t>
+            </a:r>
+          </a:p>
+        </p:txBody>
+      </p:sp>
+      <p:sp>
+        <p:nvSpPr>
+          <p:cNvPr id="37" name="TextBox 36"/>
+          <p:cNvSpPr txBox="1"/>
+          <p:nvPr/>
+        </p:nvSpPr>
+        <p:spPr>
+          <a:xfrm>
+            <a:off x="731520" y="3712463"/>
+            <a:ext cx="6629400" cy="178308"/>
+          </a:xfrm>
+          <a:prstGeom prst="rect">
+            <a:avLst/>
+          </a:prstGeom>
+          <a:noFill/>
+        </p:spPr>
+        <p:txBody>
+          <a:bodyPr wrap="square">
+            <a:spAutoFit/>
+          </a:bodyPr>
+          <a:lstStyle/>
+          <a:p>
+            <a:pPr algn="l"/>
+            <a:r>
+              <a:rPr sz="950" b="1" i="0">
+                <a:solidFill>
+                  <a:srgbClr val="FFFFFF"/>
+                </a:solidFill>
+                <a:latin typeface="Calibri"/>
+              </a:rPr>
+              <a:t>Consent to ERP/MRP &amp; Inventory Evaluation (Separate Motion)</a:t>
+            </a:r>
+          </a:p>
+        </p:txBody>
+      </p:sp>
+      <p:sp>
+        <p:nvSpPr>
+          <p:cNvPr id="38" name="TextBox 37"/>
+          <p:cNvSpPr txBox="1"/>
+          <p:nvPr/>
+        </p:nvSpPr>
+        <p:spPr>
+          <a:xfrm>
+            <a:off x="7516367" y="3694175"/>
+            <a:ext cx="1371600" cy="201168"/>
+          </a:xfrm>
+          <a:prstGeom prst="rect">
+            <a:avLst/>
+          </a:prstGeom>
+          <a:noFill/>
+        </p:spPr>
+        <p:txBody>
+          <a:bodyPr wrap="square">
+            <a:spAutoFit/>
+          </a:bodyPr>
+          <a:lstStyle/>
+          <a:p>
+            <a:pPr algn="l"/>
+            <a:r>
+              <a:rPr sz="850" b="0" i="0">
+                <a:solidFill>
+                  <a:srgbClr val="44BB44"/>
+                </a:solidFill>
+                <a:latin typeface="Calibri"/>
+              </a:rPr>
+              <a:t>☐  Approve</a:t>
+            </a:r>
+          </a:p>
+        </p:txBody>
+      </p:sp>
+      <p:sp>
+        <p:nvSpPr>
+          <p:cNvPr id="39" name="TextBox 38"/>
+          <p:cNvSpPr txBox="1"/>
+          <p:nvPr/>
+        </p:nvSpPr>
+        <p:spPr>
+          <a:xfrm>
+            <a:off x="7516367" y="3840479"/>
+            <a:ext cx="1371600" cy="201168"/>
+          </a:xfrm>
+          <a:prstGeom prst="rect">
+            <a:avLst/>
+          </a:prstGeom>
+          <a:noFill/>
+        </p:spPr>
+        <p:txBody>
+          <a:bodyPr wrap="square">
+            <a:spAutoFit/>
+          </a:bodyPr>
+          <a:lstStyle/>
+          <a:p>
+            <a:pPr algn="l"/>
+            <a:r>
+              <a:rPr sz="850" b="0" i="0">
+                <a:solidFill>
+                  <a:srgbClr val="FF6666"/>
+                </a:solidFill>
+                <a:latin typeface="Calibri"/>
+              </a:rPr>
+              <a:t>☐  Decline</a:t>
+            </a:r>
+          </a:p>
+        </p:txBody>
+      </p:sp>
+      <p:sp>
+        <p:nvSpPr>
+          <p:cNvPr id="40" name="TextBox 39"/>
+          <p:cNvSpPr txBox="1"/>
+          <p:nvPr/>
+        </p:nvSpPr>
+        <p:spPr>
+          <a:xfrm>
+            <a:off x="731520" y="3945635"/>
+            <a:ext cx="6629400" cy="562356"/>
+          </a:xfrm>
+          <a:prstGeom prst="rect">
+            <a:avLst/>
+          </a:prstGeom>
+          <a:noFill/>
+        </p:spPr>
+        <p:txBody>
+          <a:bodyPr wrap="square">
+            <a:spAutoFit/>
+          </a:bodyPr>
+          <a:lstStyle/>
+          <a:p>
+            <a:r>
+              <a:rPr sz="750" b="0">
+                <a:solidFill>
+                  <a:srgbClr val="CCCCCC"/>
+                </a:solidFill>
+                <a:latin typeface="Calibri"/>
+              </a:rPr>
+              <a:t>Authorize Exos to use the same QB data to evaluate its in-house ERP/MRP and inventory</a:t>
+            </a:r>
+          </a:p>
+          <a:p>
+            <a:r>
+              <a:rPr sz="750" b="0">
+                <a:solidFill>
+                  <a:srgbClr val="CCCCCC"/>
+                </a:solidFill>
+                <a:latin typeface="Calibri"/>
+              </a:rPr>
+              <a:t>systems for the combined operation.  Confidential under the NDA.</a:t>
+            </a:r>
+          </a:p>
+          <a:p>
+            <a:r>
+              <a:rPr sz="750" b="0">
+                <a:solidFill>
+                  <a:srgbClr val="CCCCCC"/>
+                </a:solidFill>
+                <a:latin typeface="Calibri"/>
+              </a:rPr>
+              <a:t>Does not create any obligation to implement; evaluation only.</a:t>
+            </a:r>
+          </a:p>
+        </p:txBody>
+      </p:sp>
+      <p:sp>
+        <p:nvSpPr>
+          <p:cNvPr id="41" name="Rectangle 40"/>
+          <p:cNvSpPr/>
+          <p:nvPr/>
+        </p:nvSpPr>
+        <p:spPr>
+          <a:xfrm>
+            <a:off x="182880" y="4553712"/>
+            <a:ext cx="8778240" cy="182880"/>
+          </a:xfrm>
+          <a:prstGeom prst="rect">
+            <a:avLst/>
+          </a:prstGeom>
+          <a:solidFill>
+            <a:srgbClr val="1A0A00"/>
+          </a:solidFill>
+          <a:ln>
+            <a:noFill/>
+          </a:ln>
+        </p:spPr>
+        <p:style>
+          <a:lnRef idx="1">
+            <a:schemeClr val="accent1"/>
+          </a:lnRef>
+          <a:fillRef idx="3">
+            <a:schemeClr val="accent1"/>
+          </a:fillRef>
+          <a:effectRef idx="2">
+            <a:schemeClr val="accent1"/>
+          </a:effectRef>
+          <a:fontRef idx="minor">
+            <a:schemeClr val="lt1"/>
+          </a:fontRef>
+        </p:style>
+        <p:txBody>
+          <a:bodyPr rtlCol="0" anchor="ctr"/>
+          <a:lstStyle/>
+          <a:p>
+            <a:pPr algn="ctr"/>
+          </a:p>
+        </p:txBody>
+      </p:sp>
+      <p:sp>
+        <p:nvSpPr>
           <p:cNvPr id="42" name="TextBox 41"/>
           <p:cNvSpPr txBox="1"/>
           <p:nvPr/>
@@ -5020,7 +7718,7 @@
 </p:sld>
 </file>
 
-<file path=ppt/slides/slide12.xml><?xml version="1.0" encoding="utf-8"?>
+<file path=ppt/slides/slide13.xml><?xml version="1.0" encoding="utf-8"?>
 <p:sld xmlns:a="http://schemas.openxmlformats.org/drawingml/2006/main" xmlns:r="http://schemas.openxmlformats.org/officeDocument/2006/relationships" xmlns:p="http://schemas.openxmlformats.org/presentationml/2006/main">
   <p:cSld name="Slide 10">
     <p:bg>

--- a/drafts/Exos_SSLC_Board_Offer_Overview_2026-10-10_r2.pptx
+++ b/drafts/Exos_SSLC_Board_Offer_Overview_2026-10-10_r2.pptx
@@ -960,7 +960,16 @@
             <a:br/>
             <a:br/>
             <a:r>
-              <a:t>Stock ledger need: Exos's 18.06% stake credited via $790K in purchase price. Other holders' exact per-share payout cannot be confirmed without stock ledger and subscription agreements. GL records 7/24/2024 conversion: $30K Exos loan → 5,464 shares. Must be reconciled.</a:t>
+              <a:t>RETURN RATE CONTEXT (for presenter):</a:t>
+            </a:r>
+            <a:br/>
+            <a:r>
+              <a:t>Over a 25-year hold, ~11× is roughly 10%/yr (CAGR) and ~23× is roughly 13%/yr. That is a solid but not outsized return — comparable to a long-term equity index. The stock ledger confirms the investment dates; without it the return rate cannot be stated precisely.</a:t>
+            </a:r>
+            <a:br/>
+            <a:br/>
+            <a:r>
+              <a:t>Stock ledger need: Exos's 18.06% stake credited via $790K in purchase price. Other holders' exact per-share payout cannot be confirmed without stock ledger and subscription agreements. GL records 7/24/2024 conversion: $30K Exos loan → 5,464 shares. Must be reconciled. Per John Quinn, most other holders invested 25+ years ago; Exos invested 2021–2024.</a:t>
             </a:r>
           </a:p>
         </p:txBody>
@@ -5172,8 +5181,8 @@
         </p:nvSpPr>
         <p:spPr>
           <a:xfrm>
-            <a:off x="4754880" y="1851660"/>
-            <a:ext cx="4151376" cy="164592"/>
+            <a:off x="4754880" y="1819655"/>
+            <a:ext cx="4151376" cy="260603"/>
           </a:xfrm>
           <a:prstGeom prst="rect">
             <a:avLst/>
@@ -5188,13 +5197,14 @@
           <a:p>
             <a:pPr algn="l"/>
             <a:r>
-              <a:rPr sz="750" b="1" i="0">
-                <a:solidFill>
-                  <a:srgbClr val="888888"/>
+              <a:rPr sz="650" b="0" i="1">
+                <a:solidFill>
+                  <a:srgbClr val="FF7755"/>
                 </a:solidFill>
                 <a:latin typeface="Calibri"/>
               </a:rPr>
-              <a:t>PROJECTED RETURN  (OTHER HOLDERS, 81.94%)</a:t>
+              <a:t>  Invested largely 25+ years ago (per John Quinn; to be confirmed in the stock ledger).
+  Exos’s $790K was invested 2021–2024 to keep SSLC operating.</a:t>
             </a:r>
           </a:p>
         </p:txBody>
@@ -5207,8 +5217,8 @@
         </p:nvSpPr>
         <p:spPr>
           <a:xfrm>
-            <a:off x="4754880" y="2043684"/>
-            <a:ext cx="3063240" cy="169164"/>
+            <a:off x="4754880" y="2093975"/>
+            <a:ext cx="4151376" cy="164592"/>
           </a:xfrm>
           <a:prstGeom prst="rect">
             <a:avLst/>
@@ -5223,13 +5233,13 @@
           <a:p>
             <a:pPr algn="l"/>
             <a:r>
-              <a:rPr sz="750" b="0" i="0">
-                <a:solidFill>
-                  <a:srgbClr val="CCCCCC"/>
+              <a:rPr sz="750" b="1" i="0">
+                <a:solidFill>
+                  <a:srgbClr val="888888"/>
                 </a:solidFill>
                 <a:latin typeface="Calibri"/>
               </a:rPr>
-              <a:t>Cash + stock at close (est.)</a:t>
+              <a:t>PROJECTED RETURN  (OTHER HOLDERS, 81.94%)</a:t>
             </a:r>
           </a:p>
         </p:txBody>
@@ -5242,8 +5252,8 @@
         </p:nvSpPr>
         <p:spPr>
           <a:xfrm>
-            <a:off x="7863840" y="2043684"/>
-            <a:ext cx="1005840" cy="169164"/>
+            <a:off x="4754880" y="2276856"/>
+            <a:ext cx="3063240" cy="169164"/>
           </a:xfrm>
           <a:prstGeom prst="rect">
             <a:avLst/>
@@ -5256,15 +5266,15 @@
           </a:bodyPr>
           <a:lstStyle/>
           <a:p>
-            <a:pPr algn="r"/>
+            <a:pPr algn="l"/>
             <a:r>
               <a:rPr sz="750" b="0" i="0">
                 <a:solidFill>
-                  <a:srgbClr val="44BB44"/>
+                  <a:srgbClr val="CCCCCC"/>
                 </a:solidFill>
                 <a:latin typeface="Calibri"/>
               </a:rPr>
-              <a:t>~$2.5M</a:t>
+              <a:t>Cash + stock at close (est.)</a:t>
             </a:r>
           </a:p>
         </p:txBody>
@@ -5277,8 +5287,8 @@
         </p:nvSpPr>
         <p:spPr>
           <a:xfrm>
-            <a:off x="4754880" y="2208276"/>
-            <a:ext cx="3063240" cy="169164"/>
+            <a:off x="7863840" y="2276856"/>
+            <a:ext cx="1005840" cy="169164"/>
           </a:xfrm>
           <a:prstGeom prst="rect">
             <a:avLst/>
@@ -5291,15 +5301,15 @@
           </a:bodyPr>
           <a:lstStyle/>
           <a:p>
-            <a:pPr algn="l"/>
+            <a:pPr algn="r"/>
             <a:r>
               <a:rPr sz="750" b="0" i="0">
                 <a:solidFill>
-                  <a:srgbClr val="CCCCCC"/>
+                  <a:srgbClr val="44BB44"/>
                 </a:solidFill>
                 <a:latin typeface="Calibri"/>
               </a:rPr>
-              <a:t>Total over 5 years incl. earn-outs</a:t>
+              <a:t>~$2.5M</a:t>
             </a:r>
           </a:p>
         </p:txBody>
@@ -5312,8 +5322,8 @@
         </p:nvSpPr>
         <p:spPr>
           <a:xfrm>
-            <a:off x="7863840" y="2208276"/>
-            <a:ext cx="1005840" cy="169164"/>
+            <a:off x="4754880" y="2441448"/>
+            <a:ext cx="3063240" cy="169164"/>
           </a:xfrm>
           <a:prstGeom prst="rect">
             <a:avLst/>
@@ -5326,6 +5336,41 @@
           </a:bodyPr>
           <a:lstStyle/>
           <a:p>
+            <a:pPr algn="l"/>
+            <a:r>
+              <a:rPr sz="750" b="0" i="0">
+                <a:solidFill>
+                  <a:srgbClr val="CCCCCC"/>
+                </a:solidFill>
+                <a:latin typeface="Calibri"/>
+              </a:rPr>
+              <a:t>Total over 5 years incl. earn-outs</a:t>
+            </a:r>
+          </a:p>
+        </p:txBody>
+      </p:sp>
+      <p:sp>
+        <p:nvSpPr>
+          <p:cNvPr id="56" name="TextBox 55"/>
+          <p:cNvSpPr txBox="1"/>
+          <p:nvPr/>
+        </p:nvSpPr>
+        <p:spPr>
+          <a:xfrm>
+            <a:off x="7863840" y="2441448"/>
+            <a:ext cx="1005840" cy="169164"/>
+          </a:xfrm>
+          <a:prstGeom prst="rect">
+            <a:avLst/>
+          </a:prstGeom>
+          <a:noFill/>
+        </p:spPr>
+        <p:txBody>
+          <a:bodyPr wrap="square">
+            <a:spAutoFit/>
+          </a:bodyPr>
+          <a:lstStyle/>
+          <a:p>
             <a:pPr algn="r"/>
             <a:r>
               <a:rPr sz="750" b="0" i="0">
@@ -5341,13 +5386,13 @@
       </p:sp>
       <p:sp>
         <p:nvSpPr>
-          <p:cNvPr id="56" name="Rectangle 55"/>
+          <p:cNvPr id="57" name="Rectangle 56"/>
           <p:cNvSpPr/>
           <p:nvPr/>
         </p:nvSpPr>
         <p:spPr>
           <a:xfrm>
-            <a:off x="4754880" y="2391156"/>
+            <a:off x="4754880" y="2624328"/>
             <a:ext cx="4151376" cy="9144"/>
           </a:xfrm>
           <a:prstGeom prst="rect">
@@ -5384,13 +5429,13 @@
       </p:sp>
       <p:sp>
         <p:nvSpPr>
-          <p:cNvPr id="57" name="TextBox 56"/>
-          <p:cNvSpPr txBox="1"/>
-          <p:nvPr/>
-        </p:nvSpPr>
-        <p:spPr>
-          <a:xfrm>
-            <a:off x="4754880" y="2409444"/>
+          <p:cNvPr id="58" name="TextBox 57"/>
+          <p:cNvSpPr txBox="1"/>
+          <p:nvPr/>
+        </p:nvSpPr>
+        <p:spPr>
+          <a:xfrm>
+            <a:off x="4754880" y="2642616"/>
             <a:ext cx="3063240" cy="173736"/>
           </a:xfrm>
           <a:prstGeom prst="rect">
@@ -5419,13 +5464,13 @@
       </p:sp>
       <p:sp>
         <p:nvSpPr>
-          <p:cNvPr id="58" name="TextBox 57"/>
-          <p:cNvSpPr txBox="1"/>
-          <p:nvPr/>
-        </p:nvSpPr>
-        <p:spPr>
-          <a:xfrm>
-            <a:off x="7406640" y="2409444"/>
+          <p:cNvPr id="59" name="TextBox 58"/>
+          <p:cNvSpPr txBox="1"/>
+          <p:nvPr/>
+        </p:nvSpPr>
+        <p:spPr>
+          <a:xfrm>
+            <a:off x="7406640" y="2642616"/>
             <a:ext cx="1463040" cy="173736"/>
           </a:xfrm>
           <a:prstGeom prst="rect">
@@ -5454,14 +5499,14 @@
       </p:sp>
       <p:sp>
         <p:nvSpPr>
-          <p:cNvPr id="59" name="TextBox 58"/>
-          <p:cNvSpPr txBox="1"/>
-          <p:nvPr/>
-        </p:nvSpPr>
-        <p:spPr>
-          <a:xfrm>
-            <a:off x="4754880" y="2610612"/>
-            <a:ext cx="4151376" cy="420624"/>
+          <p:cNvPr id="60" name="TextBox 59"/>
+          <p:cNvSpPr txBox="1"/>
+          <p:nvPr/>
+        </p:nvSpPr>
+        <p:spPr>
+          <a:xfrm>
+            <a:off x="4754880" y="2834640"/>
+            <a:ext cx="4151376" cy="347472"/>
           </a:xfrm>
           <a:prstGeom prst="rect">
             <a:avLst/>
@@ -5476,29 +5521,28 @@
           <a:p>
             <a:pPr algn="l"/>
             <a:r>
-              <a:rPr sz="700" b="0" i="1">
+              <a:rPr sz="650" b="0" i="1">
                 <a:solidFill>
                   <a:srgbClr val="888888"/>
                 </a:solidFill>
                 <a:latin typeface="Calibri"/>
               </a:rPr>
               <a:t>Framed as: holders who invested ~$224K receive a strong return.
-Exos’s 18.06% is absorbed in the $790K credit built into the purchase price —
-no additional cash from Exos for Exos’s own stake.</a:t>
-            </a:r>
-          </a:p>
-        </p:txBody>
-      </p:sp>
-      <p:sp>
-        <p:nvSpPr>
-          <p:cNvPr id="60" name="Rectangle 59"/>
+Exos’s 18.06% is absorbed in the $790K credit — no extra cash from Exos for its own stake.</a:t>
+            </a:r>
+          </a:p>
+        </p:txBody>
+      </p:sp>
+      <p:sp>
+        <p:nvSpPr>
+          <p:cNvPr id="61" name="Rectangle 60"/>
           <p:cNvSpPr/>
           <p:nvPr/>
         </p:nvSpPr>
         <p:spPr>
           <a:xfrm>
-            <a:off x="4754880" y="3049524"/>
-            <a:ext cx="4151376" cy="260603"/>
+            <a:off x="4754880" y="3200400"/>
+            <a:ext cx="4151376" cy="224028"/>
           </a:xfrm>
           <a:prstGeom prst="rect">
             <a:avLst/>
@@ -5534,14 +5578,14 @@
       </p:sp>
       <p:sp>
         <p:nvSpPr>
-          <p:cNvPr id="61" name="TextBox 60"/>
-          <p:cNvSpPr txBox="1"/>
-          <p:nvPr/>
-        </p:nvSpPr>
-        <p:spPr>
-          <a:xfrm>
-            <a:off x="4828032" y="3086100"/>
-            <a:ext cx="4041648" cy="201168"/>
+          <p:cNvPr id="62" name="TextBox 61"/>
+          <p:cNvSpPr txBox="1"/>
+          <p:nvPr/>
+        </p:nvSpPr>
+        <p:spPr>
+          <a:xfrm>
+            <a:off x="4828032" y="3227832"/>
+            <a:ext cx="4041648" cy="182880"/>
           </a:xfrm>
           <a:prstGeom prst="rect">
             <a:avLst/>
@@ -5570,13 +5614,13 @@
       </p:sp>
       <p:sp>
         <p:nvSpPr>
-          <p:cNvPr id="62" name="Rectangle 61"/>
+          <p:cNvPr id="63" name="Rectangle 62"/>
           <p:cNvSpPr/>
           <p:nvPr/>
         </p:nvSpPr>
         <p:spPr>
           <a:xfrm>
-            <a:off x="164592" y="4069080"/>
+            <a:off x="164592" y="4059936"/>
             <a:ext cx="8814816" cy="13716"/>
           </a:xfrm>
           <a:prstGeom prst="rect">
@@ -5613,14 +5657,14 @@
       </p:sp>
       <p:sp>
         <p:nvSpPr>
-          <p:cNvPr id="63" name="Rectangle 62"/>
+          <p:cNvPr id="64" name="Rectangle 63"/>
           <p:cNvSpPr/>
           <p:nvPr/>
         </p:nvSpPr>
         <p:spPr>
           <a:xfrm>
-            <a:off x="164592" y="4087368"/>
-            <a:ext cx="8814816" cy="694944"/>
+            <a:off x="164592" y="4078224"/>
+            <a:ext cx="8814816" cy="713232"/>
           </a:xfrm>
           <a:prstGeom prst="rect">
             <a:avLst/>
@@ -5656,13 +5700,13 @@
       </p:sp>
       <p:sp>
         <p:nvSpPr>
-          <p:cNvPr id="64" name="TextBox 63"/>
-          <p:cNvSpPr txBox="1"/>
-          <p:nvPr/>
-        </p:nvSpPr>
-        <p:spPr>
-          <a:xfrm>
-            <a:off x="274320" y="4123944"/>
+          <p:cNvPr id="65" name="TextBox 64"/>
+          <p:cNvSpPr txBox="1"/>
+          <p:nvPr/>
+        </p:nvSpPr>
+        <p:spPr>
+          <a:xfrm>
+            <a:off x="274320" y="4110228"/>
             <a:ext cx="4572000" cy="182880"/>
           </a:xfrm>
           <a:prstGeom prst="rect">
@@ -5691,13 +5735,13 @@
       </p:sp>
       <p:sp>
         <p:nvSpPr>
-          <p:cNvPr id="65" name="TextBox 64"/>
-          <p:cNvSpPr txBox="1"/>
-          <p:nvPr/>
-        </p:nvSpPr>
-        <p:spPr>
-          <a:xfrm>
-            <a:off x="274320" y="4315968"/>
+          <p:cNvPr id="66" name="TextBox 65"/>
+          <p:cNvSpPr txBox="1"/>
+          <p:nvPr/>
+        </p:nvSpPr>
+        <p:spPr>
+          <a:xfrm>
+            <a:off x="274320" y="4302252"/>
             <a:ext cx="8503920" cy="141732"/>
           </a:xfrm>
           <a:prstGeom prst="rect">
@@ -5719,20 +5763,20 @@
                 </a:solidFill>
                 <a:latin typeface="Calibri"/>
               </a:rPr>
-              <a:t>• SSLC’s books carry paid-in capital only as one total ($1,014,465); per-holder amounts and share counts are not on the books.</a:t>
-            </a:r>
-          </a:p>
-        </p:txBody>
-      </p:sp>
-      <p:sp>
-        <p:nvSpPr>
-          <p:cNvPr id="66" name="TextBox 65"/>
-          <p:cNvSpPr txBox="1"/>
-          <p:nvPr/>
-        </p:nvSpPr>
-        <p:spPr>
-          <a:xfrm>
-            <a:off x="274320" y="4457700"/>
+              <a:t>• SSLC’s books carry paid-in capital only as one total ($1,014,465); per-holder amounts, share counts, and dates and amounts of each holder’s investment are not on the books.</a:t>
+            </a:r>
+          </a:p>
+        </p:txBody>
+      </p:sp>
+      <p:sp>
+        <p:nvSpPr>
+          <p:cNvPr id="67" name="TextBox 66"/>
+          <p:cNvSpPr txBox="1"/>
+          <p:nvPr/>
+        </p:nvSpPr>
+        <p:spPr>
+          <a:xfrm>
+            <a:off x="274320" y="4443984"/>
             <a:ext cx="8503920" cy="141732"/>
           </a:xfrm>
           <a:prstGeom prst="rect">
@@ -5761,13 +5805,13 @@
       </p:sp>
       <p:sp>
         <p:nvSpPr>
-          <p:cNvPr id="67" name="TextBox 66"/>
-          <p:cNvSpPr txBox="1"/>
-          <p:nvPr/>
-        </p:nvSpPr>
-        <p:spPr>
-          <a:xfrm>
-            <a:off x="274320" y="4599432"/>
+          <p:cNvPr id="68" name="TextBox 67"/>
+          <p:cNvSpPr txBox="1"/>
+          <p:nvPr/>
+        </p:nvSpPr>
+        <p:spPr>
+          <a:xfrm>
+            <a:off x="274320" y="4585716"/>
             <a:ext cx="8503920" cy="141732"/>
           </a:xfrm>
           <a:prstGeom prst="rect">
@@ -5796,13 +5840,13 @@
       </p:sp>
       <p:sp>
         <p:nvSpPr>
-          <p:cNvPr id="68" name="TextBox 67"/>
-          <p:cNvSpPr txBox="1"/>
-          <p:nvPr/>
-        </p:nvSpPr>
-        <p:spPr>
-          <a:xfrm>
-            <a:off x="182880" y="4782312"/>
+          <p:cNvPr id="69" name="TextBox 68"/>
+          <p:cNvSpPr txBox="1"/>
+          <p:nvPr/>
+        </p:nvSpPr>
+        <p:spPr>
+          <a:xfrm>
+            <a:off x="182880" y="4800600"/>
             <a:ext cx="8778240" cy="201168"/>
           </a:xfrm>
           <a:prstGeom prst="rect">
@@ -5831,7 +5875,7 @@
       </p:sp>
       <p:sp>
         <p:nvSpPr>
-          <p:cNvPr id="69" name="TextBox 68"/>
+          <p:cNvPr id="70" name="TextBox 69"/>
           <p:cNvSpPr txBox="1"/>
           <p:nvPr/>
         </p:nvSpPr>
@@ -5866,7 +5910,7 @@
       </p:sp>
       <p:sp>
         <p:nvSpPr>
-          <p:cNvPr id="70" name="TextBox 69"/>
+          <p:cNvPr id="71" name="TextBox 70"/>
           <p:cNvSpPr txBox="1"/>
           <p:nvPr/>
         </p:nvSpPr>

--- a/drafts/Exos_SSLC_Board_Offer_Overview_2026-10-10_r2.pptx
+++ b/drafts/Exos_SSLC_Board_Offer_Overview_2026-10-10_r2.pptx
@@ -688,43 +688,68 @@
           <a:lstStyle/>
           <a:p>
             <a:r>
-              <a:t>Source: SSLC QB Balance Sheet 10/11/2026 (data-room/SSLC/qb-2026-10-11/SSLC_Balance_Sheet.xlsx).</a:t>
+              <a:t>SSLC Capital &amp; Debt — Sources (10/11/2026 QB)</a:t>
             </a:r>
             <a:br/>
-            <a:r>
-              <a:t>Cash $590,344; AR Unbilled (billed-ahead) −$942,177; deposits $120,000.</a:t>
-            </a:r>
             <a:br/>
             <a:r>
-              <a:t>Loans &amp; notes $1,027,783 unchanged by lender.</a:t>
+              <a:t>Left: Equity per QB — Common stock $1,010,423 (Acct 3010); APIC $4,042 (Acct 3020); Exos 18.06% → ~$789,572 (~78% of total paid-in); Accum. deficit −$2,571,013 (thru FY26); FY27 YTD NI +$112,666; Total equity −$1,443,882.</a:t>
             </a:r>
             <a:br/>
-            <a:r>
-              <a:t>Total liabilities $1,296,521.</a:t>
-            </a:r>
             <a:br/>
             <a:r>
-              <a:t>Paid-in capital $1,014,465 (unchanged).</a:t>
+              <a:t>Right: Loans &amp; notes $1,027,783 — Microcosm $451,429 (Acct 2385); Notes Payable Bookstore $320,582; SBA EIDL $132,072 (Acct 2712); Wertz $92,500 (Acct 2714); Exos $31,200 (11%; past due 1+ yr).</a:t>
             </a:r>
             <a:br/>
-            <a:r>
-              <a:t>Retained earnings −$2,571,013; FY27 YTD net income +$112,666.</a:t>
-            </a:r>
             <a:br/>
             <a:r>
-              <a:t>Total equity −$1,443,882 (10/11/2026).</a:t>
+              <a:t>EXOS LOAN DETAIL:</a:t>
             </a:r>
             <a:br/>
             <a:r>
-              <a:t>Exos loan $31,200 principal; ~$38,158 with 11% interest at 10/2. Board DENIED license; loan STANDS.</a:t>
+              <a:t>  $60,000 originated 10/10/2024.</a:t>
             </a:r>
             <a:br/>
             <a:r>
-              <a:t>Billed-ahead $942,177: Exos assessment is overstated; 40% start-billings not cleared at shipment; est. ~$100–200K genuinely in progress.</a:t>
+              <a:t>  $15,000 repaid 3/19/2025; $13,800 repaid 5/2/2025 → $31,200 balance.</a:t>
             </a:r>
             <a:br/>
             <a:r>
-              <a:t>Facility ~$805K since Jan 2024: rent $725K + other; doubled to ~$23.6K/mo Jul 2024. Paid via Microcosm invoices through Dec 2025, then directly to landlords. Never charged back to Microcosm on SSLC's books; Microcosm receivable = $3,529; loan to Microcosm = $0.</a:t>
+              <a:t>  11% interest; total with interest ~$38K. Past due over 1 year. Still owed.</a:t>
+            </a:r>
+            <a:br/>
+            <a:r>
+              <a:t>  SSLC and Exos records match on this loan.</a:t>
+            </a:r>
+            <a:br/>
+            <a:r>
+              <a:t>  (Note: on the Exos side, the ledger may show a different balance; that is an Exos bookkeeping</a:t>
+            </a:r>
+            <a:br/>
+            <a:r>
+              <a:t>  timing issue only — SSLC's $31,200 balance is the correct, agreed amount.)</a:t>
+            </a:r>
+            <a:br/>
+            <a:br/>
+            <a:r>
+              <a:t>SEPARATE CONVERTED LOAN:</a:t>
+            </a:r>
+            <a:br/>
+            <a:r>
+              <a:t>  $30,000 loan made 5/9/2024.</a:t>
+            </a:r>
+            <a:br/>
+            <a:r>
+              <a:t>  Converted to 5,464 SSLC shares on 7/24/2024.</a:t>
+            </a:r>
+            <a:br/>
+            <a:r>
+              <a:t>  Included in Exos's $790K paid-in capital; no longer a liability.</a:t>
+            </a:r>
+            <a:br/>
+            <a:br/>
+            <a:r>
+              <a:t>Open items: AR Unbilled $942,177 (Acct 1110) and Deposits $120,000 (Acct 2380) under reconciliation per Motion 3. Facility costs ~$805K (Jan 2024–Oct 2026) never charged to Microcosm.</a:t>
             </a:r>
           </a:p>
         </p:txBody>
@@ -960,16 +985,41 @@
             <a:br/>
             <a:br/>
             <a:r>
-              <a:t>RETURN RATE CONTEXT (for presenter):</a:t>
+              <a:t>RETURN RATE CONTEXT:</a:t>
             </a:r>
             <a:br/>
             <a:r>
-              <a:t>Over a 25-year hold, ~11× is roughly 10%/yr (CAGR) and ~23× is roughly 13%/yr. That is a solid but not outsized return — comparable to a long-term equity index. The stock ledger confirms the investment dates; without it the return rate cannot be stated precisely.</a:t>
+              <a:t>Over a 25-year hold, ~11× is roughly 10%/yr (CAGR) and ~23× roughly 13%/yr. Solid but not outsized — comparable to a long-term equity index. Stock ledger confirms investment dates; without it the precise CAGR can't be stated.</a:t>
             </a:r>
             <a:br/>
             <a:br/>
             <a:r>
-              <a:t>Stock ledger need: Exos's 18.06% stake credited via $790K in purchase price. Other holders' exact per-share payout cannot be confirmed without stock ledger and subscription agreements. GL records 7/24/2024 conversion: $30K Exos loan → 5,464 shares. Must be reconciled. Per John Quinn, most other holders invested 25+ years ago; Exos invested 2021–2024.</a:t>
+              <a:t>EXOS LOAN DETAIL (for presenter):</a:t>
+            </a:r>
+            <a:br/>
+            <a:r>
+              <a:t>  $60,000 loan originated 10/10/2024.</a:t>
+            </a:r>
+            <a:br/>
+            <a:r>
+              <a:t>  $15,000 repaid 3/19/2025; $13,800 repaid 5/2/2025 → $31,200 balance.</a:t>
+            </a:r>
+            <a:br/>
+            <a:r>
+              <a:t>  11% interest; ~$38K total with interest. Past due over 1 year. Still owed.</a:t>
+            </a:r>
+            <a:br/>
+            <a:r>
+              <a:t>  SSLC and Exos records match on this loan.</a:t>
+            </a:r>
+            <a:br/>
+            <a:r>
+              <a:t>  Separate $30K loan (5/9/2024) converted to 5,464 SSLC shares on 7/24/2024 — included in Exos's $790K paid-in capital; no longer a liability.</a:t>
+            </a:r>
+            <a:br/>
+            <a:br/>
+            <a:r>
+              <a:t>Stock ledger: Exos's 18.06% credited via $790K in price. Other holders' per-share payout can't be confirmed without ledger. Per John Quinn, most other holders invested 25+ years ago; Exos invested 2021–2024.</a:t>
             </a:r>
           </a:p>
         </p:txBody>
@@ -3698,7 +3748,7 @@
         </p:nvSpPr>
         <p:spPr>
           <a:xfrm>
-            <a:off x="274320" y="960119"/>
+            <a:off x="274320" y="955547"/>
             <a:ext cx="3154679" cy="169164"/>
           </a:xfrm>
           <a:prstGeom prst="rect">
@@ -3733,7 +3783,7 @@
         </p:nvSpPr>
         <p:spPr>
           <a:xfrm>
-            <a:off x="3474719" y="960119"/>
+            <a:off x="3474719" y="955547"/>
             <a:ext cx="914400" cy="169164"/>
           </a:xfrm>
           <a:prstGeom prst="rect">
@@ -3768,7 +3818,7 @@
         </p:nvSpPr>
         <p:spPr>
           <a:xfrm>
-            <a:off x="274320" y="1161287"/>
+            <a:off x="274320" y="1152144"/>
             <a:ext cx="4151376" cy="9144"/>
           </a:xfrm>
           <a:prstGeom prst="rect">
@@ -3811,7 +3861,7 @@
         </p:nvSpPr>
         <p:spPr>
           <a:xfrm>
-            <a:off x="274320" y="1124711"/>
+            <a:off x="274320" y="1115568"/>
             <a:ext cx="3154679" cy="169164"/>
           </a:xfrm>
           <a:prstGeom prst="rect">
@@ -3846,7 +3896,7 @@
         </p:nvSpPr>
         <p:spPr>
           <a:xfrm>
-            <a:off x="3474719" y="1124711"/>
+            <a:off x="3474719" y="1115568"/>
             <a:ext cx="914400" cy="169164"/>
           </a:xfrm>
           <a:prstGeom prst="rect">
@@ -3881,7 +3931,7 @@
         </p:nvSpPr>
         <p:spPr>
           <a:xfrm>
-            <a:off x="274320" y="1298447"/>
+            <a:off x="274320" y="1284732"/>
             <a:ext cx="3154679" cy="169164"/>
           </a:xfrm>
           <a:prstGeom prst="rect">
@@ -3916,7 +3966,7 @@
         </p:nvSpPr>
         <p:spPr>
           <a:xfrm>
-            <a:off x="3474719" y="1298447"/>
+            <a:off x="3474719" y="1284732"/>
             <a:ext cx="914400" cy="169164"/>
           </a:xfrm>
           <a:prstGeom prst="rect">
@@ -3951,8 +4001,8 @@
         </p:nvSpPr>
         <p:spPr>
           <a:xfrm>
-            <a:off x="274320" y="1449323"/>
-            <a:ext cx="4151376" cy="146304"/>
+            <a:off x="274320" y="1431036"/>
+            <a:ext cx="4151376" cy="141732"/>
           </a:xfrm>
           <a:prstGeom prst="rect">
             <a:avLst/>
@@ -3986,8 +4036,8 @@
         </p:nvSpPr>
         <p:spPr>
           <a:xfrm>
-            <a:off x="274320" y="1591055"/>
-            <a:ext cx="3154679" cy="169164"/>
+            <a:off x="274320" y="1566367"/>
+            <a:ext cx="4151376" cy="141732"/>
           </a:xfrm>
           <a:prstGeom prst="rect">
             <a:avLst/>
@@ -4002,13 +4052,13 @@
           <a:p>
             <a:pPr algn="l"/>
             <a:r>
-              <a:rPr sz="750" b="0" i="0">
-                <a:solidFill>
-                  <a:srgbClr val="CCCCCC"/>
+              <a:rPr sz="600" b="0" i="1">
+                <a:solidFill>
+                  <a:srgbClr val="888888"/>
                 </a:solidFill>
                 <a:latin typeface="Calibri"/>
               </a:rPr>
-              <a:t>− Other current liabilities (AP, accruals)</a:t>
+              <a:t>  Exos loan reconciled: $60K→$31.2K bal.; $30K prior converted to 5,464 shares (incl. in $790K paid-in).</a:t>
             </a:r>
           </a:p>
         </p:txBody>
@@ -4021,8 +4071,8 @@
         </p:nvSpPr>
         <p:spPr>
           <a:xfrm>
-            <a:off x="3474719" y="1591055"/>
-            <a:ext cx="914400" cy="169164"/>
+            <a:off x="274320" y="1701698"/>
+            <a:ext cx="3154679" cy="169164"/>
           </a:xfrm>
           <a:prstGeom prst="rect">
             <a:avLst/>
@@ -4035,15 +4085,15 @@
           </a:bodyPr>
           <a:lstStyle/>
           <a:p>
-            <a:pPr algn="r"/>
+            <a:pPr algn="l"/>
             <a:r>
               <a:rPr sz="750" b="0" i="0">
                 <a:solidFill>
-                  <a:srgbClr val="FF7755"/>
+                  <a:srgbClr val="CCCCCC"/>
                 </a:solidFill>
                 <a:latin typeface="Calibri"/>
               </a:rPr>
-              <a:t>($148,738)</a:t>
+              <a:t>− Other current liabilities (AP, accruals)</a:t>
             </a:r>
           </a:p>
         </p:txBody>
@@ -4056,8 +4106,8 @@
         </p:nvSpPr>
         <p:spPr>
           <a:xfrm>
-            <a:off x="274320" y="1755647"/>
-            <a:ext cx="3154679" cy="169164"/>
+            <a:off x="3474719" y="1701698"/>
+            <a:ext cx="914400" cy="169164"/>
           </a:xfrm>
           <a:prstGeom prst="rect">
             <a:avLst/>
@@ -4070,15 +4120,15 @@
           </a:bodyPr>
           <a:lstStyle/>
           <a:p>
-            <a:pPr algn="l"/>
+            <a:pPr algn="r"/>
             <a:r>
               <a:rPr sz="750" b="0" i="0">
                 <a:solidFill>
-                  <a:srgbClr val="CCCCCC"/>
+                  <a:srgbClr val="FF7755"/>
                 </a:solidFill>
                 <a:latin typeface="Calibri"/>
               </a:rPr>
-              <a:t>− Customer deposits (IM, transferred)</a:t>
+              <a:t>($148,738)</a:t>
             </a:r>
           </a:p>
         </p:txBody>
@@ -4091,8 +4141,8 @@
         </p:nvSpPr>
         <p:spPr>
           <a:xfrm>
-            <a:off x="3474719" y="1755647"/>
-            <a:ext cx="914400" cy="169164"/>
+            <a:off x="274320" y="1861718"/>
+            <a:ext cx="3154679" cy="169164"/>
           </a:xfrm>
           <a:prstGeom prst="rect">
             <a:avLst/>
@@ -4105,15 +4155,15 @@
           </a:bodyPr>
           <a:lstStyle/>
           <a:p>
-            <a:pPr algn="r"/>
+            <a:pPr algn="l"/>
             <a:r>
               <a:rPr sz="750" b="0" i="0">
                 <a:solidFill>
-                  <a:srgbClr val="FF7755"/>
+                  <a:srgbClr val="CCCCCC"/>
                 </a:solidFill>
                 <a:latin typeface="Calibri"/>
               </a:rPr>
-              <a:t>($120,000)</a:t>
+              <a:t>− Customer deposits (IM, transferred)</a:t>
             </a:r>
           </a:p>
         </p:txBody>
@@ -4126,8 +4176,8 @@
         </p:nvSpPr>
         <p:spPr>
           <a:xfrm>
-            <a:off x="274320" y="1920239"/>
-            <a:ext cx="3154679" cy="169164"/>
+            <a:off x="3474719" y="1861718"/>
+            <a:ext cx="914400" cy="169164"/>
           </a:xfrm>
           <a:prstGeom prst="rect">
             <a:avLst/>
@@ -4140,15 +4190,15 @@
           </a:bodyPr>
           <a:lstStyle/>
           <a:p>
-            <a:pPr algn="l"/>
+            <a:pPr algn="r"/>
             <a:r>
               <a:rPr sz="750" b="0" i="0">
                 <a:solidFill>
-                  <a:srgbClr val="CCCCCC"/>
+                  <a:srgbClr val="FF7755"/>
                 </a:solidFill>
                 <a:latin typeface="Calibri"/>
               </a:rPr>
-              <a:t>− Billed-ahead work, genuine (Exos est.)</a:t>
+              <a:t>($120,000)</a:t>
             </a:r>
           </a:p>
         </p:txBody>
@@ -4161,8 +4211,8 @@
         </p:nvSpPr>
         <p:spPr>
           <a:xfrm>
-            <a:off x="3474719" y="1920239"/>
-            <a:ext cx="914400" cy="169164"/>
+            <a:off x="274320" y="2021738"/>
+            <a:ext cx="3154679" cy="169164"/>
           </a:xfrm>
           <a:prstGeom prst="rect">
             <a:avLst/>
@@ -4175,15 +4225,15 @@
           </a:bodyPr>
           <a:lstStyle/>
           <a:p>
-            <a:pPr algn="r"/>
+            <a:pPr algn="l"/>
             <a:r>
               <a:rPr sz="750" b="0" i="0">
                 <a:solidFill>
-                  <a:srgbClr val="FF7755"/>
+                  <a:srgbClr val="CCCCCC"/>
                 </a:solidFill>
                 <a:latin typeface="Calibri"/>
               </a:rPr>
-              <a:t>($250,000)</a:t>
+              <a:t>− Billed-ahead work, genuine (Exos est.)</a:t>
             </a:r>
           </a:p>
         </p:txBody>
@@ -4196,8 +4246,8 @@
         </p:nvSpPr>
         <p:spPr>
           <a:xfrm>
-            <a:off x="274320" y="2084831"/>
-            <a:ext cx="3154679" cy="169164"/>
+            <a:off x="3474719" y="2021738"/>
+            <a:ext cx="914400" cy="169164"/>
           </a:xfrm>
           <a:prstGeom prst="rect">
             <a:avLst/>
@@ -4210,15 +4260,15 @@
           </a:bodyPr>
           <a:lstStyle/>
           <a:p>
-            <a:pPr algn="l"/>
+            <a:pPr algn="r"/>
             <a:r>
               <a:rPr sz="750" b="0" i="0">
                 <a:solidFill>
-                  <a:srgbClr val="CCCCCC"/>
+                  <a:srgbClr val="FF7755"/>
                 </a:solidFill>
                 <a:latin typeface="Calibri"/>
               </a:rPr>
-              <a:t>− 5% escrow holdback (released 12 months)</a:t>
+              <a:t>($250,000)</a:t>
             </a:r>
           </a:p>
         </p:txBody>
@@ -4231,8 +4281,8 @@
         </p:nvSpPr>
         <p:spPr>
           <a:xfrm>
-            <a:off x="3474719" y="2084831"/>
-            <a:ext cx="914400" cy="169164"/>
+            <a:off x="274320" y="2181758"/>
+            <a:ext cx="3154679" cy="169164"/>
           </a:xfrm>
           <a:prstGeom prst="rect">
             <a:avLst/>
@@ -4245,6 +4295,41 @@
           </a:bodyPr>
           <a:lstStyle/>
           <a:p>
+            <a:pPr algn="l"/>
+            <a:r>
+              <a:rPr sz="750" b="0" i="0">
+                <a:solidFill>
+                  <a:srgbClr val="CCCCCC"/>
+                </a:solidFill>
+                <a:latin typeface="Calibri"/>
+              </a:rPr>
+              <a:t>− 5% escrow holdback (released 12 months)</a:t>
+            </a:r>
+          </a:p>
+        </p:txBody>
+      </p:sp>
+      <p:sp>
+        <p:nvSpPr>
+          <p:cNvPr id="26" name="TextBox 25"/>
+          <p:cNvSpPr txBox="1"/>
+          <p:nvPr/>
+        </p:nvSpPr>
+        <p:spPr>
+          <a:xfrm>
+            <a:off x="3474719" y="2181758"/>
+            <a:ext cx="914400" cy="169164"/>
+          </a:xfrm>
+          <a:prstGeom prst="rect">
+            <a:avLst/>
+          </a:prstGeom>
+          <a:noFill/>
+        </p:spPr>
+        <p:txBody>
+          <a:bodyPr wrap="square">
+            <a:spAutoFit/>
+          </a:bodyPr>
+          <a:lstStyle/>
+          <a:p>
             <a:pPr algn="r"/>
             <a:r>
               <a:rPr sz="750" b="0" i="0">
@@ -4260,13 +4345,13 @@
       </p:sp>
       <p:sp>
         <p:nvSpPr>
-          <p:cNvPr id="26" name="Rectangle 25"/>
+          <p:cNvPr id="27" name="Rectangle 26"/>
           <p:cNvSpPr/>
           <p:nvPr/>
         </p:nvSpPr>
         <p:spPr>
           <a:xfrm>
-            <a:off x="274320" y="2258568"/>
+            <a:off x="274320" y="2350922"/>
             <a:ext cx="4151376" cy="13716"/>
           </a:xfrm>
           <a:prstGeom prst="rect">
@@ -4303,13 +4388,13 @@
       </p:sp>
       <p:sp>
         <p:nvSpPr>
-          <p:cNvPr id="27" name="TextBox 26"/>
-          <p:cNvSpPr txBox="1"/>
-          <p:nvPr/>
-        </p:nvSpPr>
-        <p:spPr>
-          <a:xfrm>
-            <a:off x="274320" y="2286000"/>
+          <p:cNvPr id="28" name="TextBox 27"/>
+          <p:cNvSpPr txBox="1"/>
+          <p:nvPr/>
+        </p:nvSpPr>
+        <p:spPr>
+          <a:xfrm>
+            <a:off x="274320" y="2378354"/>
             <a:ext cx="3154679" cy="201168"/>
           </a:xfrm>
           <a:prstGeom prst="rect">
@@ -4338,13 +4423,13 @@
       </p:sp>
       <p:sp>
         <p:nvSpPr>
-          <p:cNvPr id="28" name="TextBox 27"/>
-          <p:cNvSpPr txBox="1"/>
-          <p:nvPr/>
-        </p:nvSpPr>
-        <p:spPr>
-          <a:xfrm>
-            <a:off x="3474719" y="2286000"/>
+          <p:cNvPr id="29" name="TextBox 28"/>
+          <p:cNvSpPr txBox="1"/>
+          <p:nvPr/>
+        </p:nvSpPr>
+        <p:spPr>
+          <a:xfrm>
+            <a:off x="3474719" y="2378354"/>
             <a:ext cx="914400" cy="201168"/>
           </a:xfrm>
           <a:prstGeom prst="rect">
@@ -4373,13 +4458,13 @@
       </p:sp>
       <p:sp>
         <p:nvSpPr>
-          <p:cNvPr id="29" name="TextBox 28"/>
-          <p:cNvSpPr txBox="1"/>
-          <p:nvPr/>
-        </p:nvSpPr>
-        <p:spPr>
-          <a:xfrm>
-            <a:off x="274320" y="2500884"/>
+          <p:cNvPr id="30" name="TextBox 29"/>
+          <p:cNvSpPr txBox="1"/>
+          <p:nvPr/>
+        </p:nvSpPr>
+        <p:spPr>
+          <a:xfrm>
+            <a:off x="274320" y="2588666"/>
             <a:ext cx="3154679" cy="169164"/>
           </a:xfrm>
           <a:prstGeom prst="rect">
@@ -4408,13 +4493,13 @@
       </p:sp>
       <p:sp>
         <p:nvSpPr>
-          <p:cNvPr id="30" name="TextBox 29"/>
-          <p:cNvSpPr txBox="1"/>
-          <p:nvPr/>
-        </p:nvSpPr>
-        <p:spPr>
-          <a:xfrm>
-            <a:off x="3474719" y="2500884"/>
+          <p:cNvPr id="31" name="TextBox 30"/>
+          <p:cNvSpPr txBox="1"/>
+          <p:nvPr/>
+        </p:nvSpPr>
+        <p:spPr>
+          <a:xfrm>
+            <a:off x="3474719" y="2588666"/>
             <a:ext cx="914400" cy="169164"/>
           </a:xfrm>
           <a:prstGeom prst="rect">
@@ -4443,13 +4528,13 @@
       </p:sp>
       <p:sp>
         <p:nvSpPr>
-          <p:cNvPr id="31" name="TextBox 30"/>
-          <p:cNvSpPr txBox="1"/>
-          <p:nvPr/>
-        </p:nvSpPr>
-        <p:spPr>
-          <a:xfrm>
-            <a:off x="274320" y="2665476"/>
+          <p:cNvPr id="32" name="TextBox 31"/>
+          <p:cNvSpPr txBox="1"/>
+          <p:nvPr/>
+        </p:nvSpPr>
+        <p:spPr>
+          <a:xfrm>
+            <a:off x="274320" y="2748686"/>
             <a:ext cx="3154679" cy="169164"/>
           </a:xfrm>
           <a:prstGeom prst="rect">
@@ -4478,13 +4563,13 @@
       </p:sp>
       <p:sp>
         <p:nvSpPr>
-          <p:cNvPr id="32" name="TextBox 31"/>
-          <p:cNvSpPr txBox="1"/>
-          <p:nvPr/>
-        </p:nvSpPr>
-        <p:spPr>
-          <a:xfrm>
-            <a:off x="3474719" y="2665476"/>
+          <p:cNvPr id="33" name="TextBox 32"/>
+          <p:cNvSpPr txBox="1"/>
+          <p:nvPr/>
+        </p:nvSpPr>
+        <p:spPr>
+          <a:xfrm>
+            <a:off x="3474719" y="2748686"/>
             <a:ext cx="914400" cy="169164"/>
           </a:xfrm>
           <a:prstGeom prst="rect">
@@ -4513,13 +4598,13 @@
       </p:sp>
       <p:sp>
         <p:nvSpPr>
-          <p:cNvPr id="33" name="TextBox 32"/>
-          <p:cNvSpPr txBox="1"/>
-          <p:nvPr/>
-        </p:nvSpPr>
-        <p:spPr>
-          <a:xfrm>
-            <a:off x="274320" y="2830068"/>
+          <p:cNvPr id="34" name="TextBox 33"/>
+          <p:cNvSpPr txBox="1"/>
+          <p:nvPr/>
+        </p:nvSpPr>
+        <p:spPr>
+          <a:xfrm>
+            <a:off x="274320" y="2908706"/>
             <a:ext cx="3154679" cy="169164"/>
           </a:xfrm>
           <a:prstGeom prst="rect">
@@ -4548,13 +4633,13 @@
       </p:sp>
       <p:sp>
         <p:nvSpPr>
-          <p:cNvPr id="34" name="TextBox 33"/>
-          <p:cNvSpPr txBox="1"/>
-          <p:nvPr/>
-        </p:nvSpPr>
-        <p:spPr>
-          <a:xfrm>
-            <a:off x="3474719" y="2830068"/>
+          <p:cNvPr id="35" name="TextBox 34"/>
+          <p:cNvSpPr txBox="1"/>
+          <p:nvPr/>
+        </p:nvSpPr>
+        <p:spPr>
+          <a:xfrm>
+            <a:off x="3474719" y="2908706"/>
             <a:ext cx="914400" cy="169164"/>
           </a:xfrm>
           <a:prstGeom prst="rect">
@@ -4583,13 +4668,13 @@
       </p:sp>
       <p:sp>
         <p:nvSpPr>
-          <p:cNvPr id="35" name="Rectangle 34"/>
+          <p:cNvPr id="36" name="Rectangle 35"/>
           <p:cNvSpPr/>
           <p:nvPr/>
         </p:nvSpPr>
         <p:spPr>
           <a:xfrm>
-            <a:off x="274320" y="3003804"/>
+            <a:off x="274320" y="3077870"/>
             <a:ext cx="4151376" cy="13716"/>
           </a:xfrm>
           <a:prstGeom prst="rect">
@@ -4626,13 +4711,13 @@
       </p:sp>
       <p:sp>
         <p:nvSpPr>
-          <p:cNvPr id="36" name="TextBox 35"/>
-          <p:cNvSpPr txBox="1"/>
-          <p:nvPr/>
-        </p:nvSpPr>
-        <p:spPr>
-          <a:xfrm>
-            <a:off x="274320" y="3031236"/>
+          <p:cNvPr id="37" name="TextBox 36"/>
+          <p:cNvSpPr txBox="1"/>
+          <p:nvPr/>
+        </p:nvSpPr>
+        <p:spPr>
+          <a:xfrm>
+            <a:off x="274320" y="3105302"/>
             <a:ext cx="3154679" cy="228600"/>
           </a:xfrm>
           <a:prstGeom prst="rect">
@@ -4661,13 +4746,13 @@
       </p:sp>
       <p:sp>
         <p:nvSpPr>
-          <p:cNvPr id="37" name="TextBox 36"/>
-          <p:cNvSpPr txBox="1"/>
-          <p:nvPr/>
-        </p:nvSpPr>
-        <p:spPr>
-          <a:xfrm>
-            <a:off x="3383279" y="3031236"/>
+          <p:cNvPr id="38" name="TextBox 37"/>
+          <p:cNvSpPr txBox="1"/>
+          <p:nvPr/>
+        </p:nvSpPr>
+        <p:spPr>
+          <a:xfrm>
+            <a:off x="3383279" y="3105302"/>
             <a:ext cx="1005840" cy="228600"/>
           </a:xfrm>
           <a:prstGeom prst="rect">
@@ -4696,7 +4781,7 @@
       </p:sp>
       <p:sp>
         <p:nvSpPr>
-          <p:cNvPr id="38" name="Rectangle 37"/>
+          <p:cNvPr id="39" name="Rectangle 38"/>
           <p:cNvSpPr/>
           <p:nvPr/>
         </p:nvSpPr>
@@ -4739,7 +4824,7 @@
       </p:sp>
       <p:sp>
         <p:nvSpPr>
-          <p:cNvPr id="39" name="Rectangle 38"/>
+          <p:cNvPr id="40" name="Rectangle 39"/>
           <p:cNvSpPr/>
           <p:nvPr/>
         </p:nvSpPr>
@@ -4782,7 +4867,7 @@
       </p:sp>
       <p:sp>
         <p:nvSpPr>
-          <p:cNvPr id="40" name="TextBox 39"/>
+          <p:cNvPr id="41" name="TextBox 40"/>
           <p:cNvSpPr txBox="1"/>
           <p:nvPr/>
         </p:nvSpPr>
@@ -4817,7 +4902,7 @@
       </p:sp>
       <p:sp>
         <p:nvSpPr>
-          <p:cNvPr id="41" name="TextBox 40"/>
+          <p:cNvPr id="42" name="TextBox 41"/>
           <p:cNvSpPr txBox="1"/>
           <p:nvPr/>
         </p:nvSpPr>
@@ -4852,7 +4937,7 @@
       </p:sp>
       <p:sp>
         <p:nvSpPr>
-          <p:cNvPr id="42" name="TextBox 41"/>
+          <p:cNvPr id="43" name="TextBox 42"/>
           <p:cNvSpPr txBox="1"/>
           <p:nvPr/>
         </p:nvSpPr>
@@ -4887,7 +4972,7 @@
       </p:sp>
       <p:sp>
         <p:nvSpPr>
-          <p:cNvPr id="43" name="TextBox 42"/>
+          <p:cNvPr id="44" name="TextBox 43"/>
           <p:cNvSpPr txBox="1"/>
           <p:nvPr/>
         </p:nvSpPr>
@@ -4922,13 +5007,13 @@
       </p:sp>
       <p:sp>
         <p:nvSpPr>
-          <p:cNvPr id="44" name="TextBox 43"/>
-          <p:cNvSpPr txBox="1"/>
-          <p:nvPr/>
-        </p:nvSpPr>
-        <p:spPr>
-          <a:xfrm>
-            <a:off x="4754880" y="1161287"/>
+          <p:cNvPr id="45" name="TextBox 44"/>
+          <p:cNvSpPr txBox="1"/>
+          <p:nvPr/>
+        </p:nvSpPr>
+        <p:spPr>
+          <a:xfrm>
+            <a:off x="4754880" y="1156716"/>
             <a:ext cx="3063240" cy="169164"/>
           </a:xfrm>
           <a:prstGeom prst="rect">
@@ -4957,13 +5042,13 @@
       </p:sp>
       <p:sp>
         <p:nvSpPr>
-          <p:cNvPr id="45" name="TextBox 44"/>
-          <p:cNvSpPr txBox="1"/>
-          <p:nvPr/>
-        </p:nvSpPr>
-        <p:spPr>
-          <a:xfrm>
-            <a:off x="7863840" y="1161287"/>
+          <p:cNvPr id="46" name="TextBox 45"/>
+          <p:cNvSpPr txBox="1"/>
+          <p:nvPr/>
+        </p:nvSpPr>
+        <p:spPr>
+          <a:xfrm>
+            <a:off x="7863840" y="1156716"/>
             <a:ext cx="1005840" cy="169164"/>
           </a:xfrm>
           <a:prstGeom prst="rect">
@@ -4992,13 +5077,13 @@
       </p:sp>
       <p:sp>
         <p:nvSpPr>
-          <p:cNvPr id="46" name="Rectangle 45"/>
+          <p:cNvPr id="47" name="Rectangle 46"/>
           <p:cNvSpPr/>
           <p:nvPr/>
         </p:nvSpPr>
         <p:spPr>
           <a:xfrm>
-            <a:off x="4754880" y="1344167"/>
+            <a:off x="4754880" y="1335024"/>
             <a:ext cx="4151376" cy="9144"/>
           </a:xfrm>
           <a:prstGeom prst="rect">
@@ -5035,13 +5120,13 @@
       </p:sp>
       <p:sp>
         <p:nvSpPr>
-          <p:cNvPr id="47" name="TextBox 46"/>
-          <p:cNvSpPr txBox="1"/>
-          <p:nvPr/>
-        </p:nvSpPr>
-        <p:spPr>
-          <a:xfrm>
-            <a:off x="4754880" y="1325879"/>
+          <p:cNvPr id="48" name="TextBox 47"/>
+          <p:cNvSpPr txBox="1"/>
+          <p:nvPr/>
+        </p:nvSpPr>
+        <p:spPr>
+          <a:xfrm>
+            <a:off x="4754880" y="1316736"/>
             <a:ext cx="3063240" cy="169164"/>
           </a:xfrm>
           <a:prstGeom prst="rect">
@@ -5070,13 +5155,13 @@
       </p:sp>
       <p:sp>
         <p:nvSpPr>
-          <p:cNvPr id="48" name="TextBox 47"/>
-          <p:cNvSpPr txBox="1"/>
-          <p:nvPr/>
-        </p:nvSpPr>
-        <p:spPr>
-          <a:xfrm>
-            <a:off x="7863840" y="1325879"/>
+          <p:cNvPr id="49" name="TextBox 48"/>
+          <p:cNvSpPr txBox="1"/>
+          <p:nvPr/>
+        </p:nvSpPr>
+        <p:spPr>
+          <a:xfrm>
+            <a:off x="7863840" y="1316736"/>
             <a:ext cx="1005840" cy="169164"/>
           </a:xfrm>
           <a:prstGeom prst="rect">
@@ -5105,13 +5190,13 @@
       </p:sp>
       <p:sp>
         <p:nvSpPr>
-          <p:cNvPr id="49" name="TextBox 48"/>
-          <p:cNvSpPr txBox="1"/>
-          <p:nvPr/>
-        </p:nvSpPr>
-        <p:spPr>
-          <a:xfrm>
-            <a:off x="4754880" y="1499615"/>
+          <p:cNvPr id="50" name="TextBox 49"/>
+          <p:cNvSpPr txBox="1"/>
+          <p:nvPr/>
+        </p:nvSpPr>
+        <p:spPr>
+          <a:xfrm>
+            <a:off x="4754880" y="1485900"/>
             <a:ext cx="4151376" cy="173736"/>
           </a:xfrm>
           <a:prstGeom prst="rect">
@@ -5140,13 +5225,13 @@
       </p:sp>
       <p:sp>
         <p:nvSpPr>
-          <p:cNvPr id="50" name="TextBox 49"/>
-          <p:cNvSpPr txBox="1"/>
-          <p:nvPr/>
-        </p:nvSpPr>
-        <p:spPr>
-          <a:xfrm>
-            <a:off x="4754880" y="1659635"/>
+          <p:cNvPr id="51" name="TextBox 50"/>
+          <p:cNvSpPr txBox="1"/>
+          <p:nvPr/>
+        </p:nvSpPr>
+        <p:spPr>
+          <a:xfrm>
+            <a:off x="4754880" y="1645920"/>
             <a:ext cx="4151376" cy="173736"/>
           </a:xfrm>
           <a:prstGeom prst="rect">
@@ -5175,13 +5260,13 @@
       </p:sp>
       <p:sp>
         <p:nvSpPr>
-          <p:cNvPr id="51" name="TextBox 50"/>
-          <p:cNvSpPr txBox="1"/>
-          <p:nvPr/>
-        </p:nvSpPr>
-        <p:spPr>
-          <a:xfrm>
-            <a:off x="4754880" y="1819655"/>
+          <p:cNvPr id="52" name="TextBox 51"/>
+          <p:cNvSpPr txBox="1"/>
+          <p:nvPr/>
+        </p:nvSpPr>
+        <p:spPr>
+          <a:xfrm>
+            <a:off x="4754880" y="1805940"/>
             <a:ext cx="4151376" cy="260603"/>
           </a:xfrm>
           <a:prstGeom prst="rect">
@@ -5211,13 +5296,13 @@
       </p:sp>
       <p:sp>
         <p:nvSpPr>
-          <p:cNvPr id="52" name="TextBox 51"/>
-          <p:cNvSpPr txBox="1"/>
-          <p:nvPr/>
-        </p:nvSpPr>
-        <p:spPr>
-          <a:xfrm>
-            <a:off x="4754880" y="2093975"/>
+          <p:cNvPr id="53" name="TextBox 52"/>
+          <p:cNvSpPr txBox="1"/>
+          <p:nvPr/>
+        </p:nvSpPr>
+        <p:spPr>
+          <a:xfrm>
+            <a:off x="4754880" y="2080260"/>
             <a:ext cx="4151376" cy="164592"/>
           </a:xfrm>
           <a:prstGeom prst="rect">
@@ -5246,13 +5331,13 @@
       </p:sp>
       <p:sp>
         <p:nvSpPr>
-          <p:cNvPr id="53" name="TextBox 52"/>
-          <p:cNvSpPr txBox="1"/>
-          <p:nvPr/>
-        </p:nvSpPr>
-        <p:spPr>
-          <a:xfrm>
-            <a:off x="4754880" y="2276856"/>
+          <p:cNvPr id="54" name="TextBox 53"/>
+          <p:cNvSpPr txBox="1"/>
+          <p:nvPr/>
+        </p:nvSpPr>
+        <p:spPr>
+          <a:xfrm>
+            <a:off x="4754880" y="2263140"/>
             <a:ext cx="3063240" cy="169164"/>
           </a:xfrm>
           <a:prstGeom prst="rect">
@@ -5281,13 +5366,13 @@
       </p:sp>
       <p:sp>
         <p:nvSpPr>
-          <p:cNvPr id="54" name="TextBox 53"/>
-          <p:cNvSpPr txBox="1"/>
-          <p:nvPr/>
-        </p:nvSpPr>
-        <p:spPr>
-          <a:xfrm>
-            <a:off x="7863840" y="2276856"/>
+          <p:cNvPr id="55" name="TextBox 54"/>
+          <p:cNvSpPr txBox="1"/>
+          <p:nvPr/>
+        </p:nvSpPr>
+        <p:spPr>
+          <a:xfrm>
+            <a:off x="7863840" y="2263140"/>
             <a:ext cx="1005840" cy="169164"/>
           </a:xfrm>
           <a:prstGeom prst="rect">
@@ -5316,13 +5401,13 @@
       </p:sp>
       <p:sp>
         <p:nvSpPr>
-          <p:cNvPr id="55" name="TextBox 54"/>
-          <p:cNvSpPr txBox="1"/>
-          <p:nvPr/>
-        </p:nvSpPr>
-        <p:spPr>
-          <a:xfrm>
-            <a:off x="4754880" y="2441448"/>
+          <p:cNvPr id="56" name="TextBox 55"/>
+          <p:cNvSpPr txBox="1"/>
+          <p:nvPr/>
+        </p:nvSpPr>
+        <p:spPr>
+          <a:xfrm>
+            <a:off x="4754880" y="2423160"/>
             <a:ext cx="3063240" cy="169164"/>
           </a:xfrm>
           <a:prstGeom prst="rect">
@@ -5351,13 +5436,13 @@
       </p:sp>
       <p:sp>
         <p:nvSpPr>
-          <p:cNvPr id="56" name="TextBox 55"/>
-          <p:cNvSpPr txBox="1"/>
-          <p:nvPr/>
-        </p:nvSpPr>
-        <p:spPr>
-          <a:xfrm>
-            <a:off x="7863840" y="2441448"/>
+          <p:cNvPr id="57" name="TextBox 56"/>
+          <p:cNvSpPr txBox="1"/>
+          <p:nvPr/>
+        </p:nvSpPr>
+        <p:spPr>
+          <a:xfrm>
+            <a:off x="7863840" y="2423160"/>
             <a:ext cx="1005840" cy="169164"/>
           </a:xfrm>
           <a:prstGeom prst="rect">
@@ -5386,13 +5471,13 @@
       </p:sp>
       <p:sp>
         <p:nvSpPr>
-          <p:cNvPr id="57" name="Rectangle 56"/>
+          <p:cNvPr id="58" name="Rectangle 57"/>
           <p:cNvSpPr/>
           <p:nvPr/>
         </p:nvSpPr>
         <p:spPr>
           <a:xfrm>
-            <a:off x="4754880" y="2624328"/>
+            <a:off x="4754880" y="2601468"/>
             <a:ext cx="4151376" cy="9144"/>
           </a:xfrm>
           <a:prstGeom prst="rect">
@@ -5429,13 +5514,13 @@
       </p:sp>
       <p:sp>
         <p:nvSpPr>
-          <p:cNvPr id="58" name="TextBox 57"/>
-          <p:cNvSpPr txBox="1"/>
-          <p:nvPr/>
-        </p:nvSpPr>
-        <p:spPr>
-          <a:xfrm>
-            <a:off x="4754880" y="2642616"/>
+          <p:cNvPr id="59" name="TextBox 58"/>
+          <p:cNvSpPr txBox="1"/>
+          <p:nvPr/>
+        </p:nvSpPr>
+        <p:spPr>
+          <a:xfrm>
+            <a:off x="4754880" y="2619756"/>
             <a:ext cx="3063240" cy="173736"/>
           </a:xfrm>
           <a:prstGeom prst="rect">
@@ -5464,13 +5549,13 @@
       </p:sp>
       <p:sp>
         <p:nvSpPr>
-          <p:cNvPr id="59" name="TextBox 58"/>
-          <p:cNvSpPr txBox="1"/>
-          <p:nvPr/>
-        </p:nvSpPr>
-        <p:spPr>
-          <a:xfrm>
-            <a:off x="7406640" y="2642616"/>
+          <p:cNvPr id="60" name="TextBox 59"/>
+          <p:cNvSpPr txBox="1"/>
+          <p:nvPr/>
+        </p:nvSpPr>
+        <p:spPr>
+          <a:xfrm>
+            <a:off x="7406640" y="2619756"/>
             <a:ext cx="1463040" cy="173736"/>
           </a:xfrm>
           <a:prstGeom prst="rect">
@@ -5499,13 +5584,13 @@
       </p:sp>
       <p:sp>
         <p:nvSpPr>
-          <p:cNvPr id="60" name="TextBox 59"/>
-          <p:cNvSpPr txBox="1"/>
-          <p:nvPr/>
-        </p:nvSpPr>
-        <p:spPr>
-          <a:xfrm>
-            <a:off x="4754880" y="2834640"/>
+          <p:cNvPr id="61" name="TextBox 60"/>
+          <p:cNvSpPr txBox="1"/>
+          <p:nvPr/>
+        </p:nvSpPr>
+        <p:spPr>
+          <a:xfrm>
+            <a:off x="4754880" y="2807208"/>
             <a:ext cx="4151376" cy="347472"/>
           </a:xfrm>
           <a:prstGeom prst="rect">
@@ -5535,13 +5620,13 @@
       </p:sp>
       <p:sp>
         <p:nvSpPr>
-          <p:cNvPr id="61" name="Rectangle 60"/>
+          <p:cNvPr id="62" name="Rectangle 61"/>
           <p:cNvSpPr/>
           <p:nvPr/>
         </p:nvSpPr>
         <p:spPr>
           <a:xfrm>
-            <a:off x="4754880" y="3200400"/>
+            <a:off x="4754880" y="3172968"/>
             <a:ext cx="4151376" cy="224028"/>
           </a:xfrm>
           <a:prstGeom prst="rect">
@@ -5578,13 +5663,13 @@
       </p:sp>
       <p:sp>
         <p:nvSpPr>
-          <p:cNvPr id="62" name="TextBox 61"/>
-          <p:cNvSpPr txBox="1"/>
-          <p:nvPr/>
-        </p:nvSpPr>
-        <p:spPr>
-          <a:xfrm>
-            <a:off x="4828032" y="3227832"/>
+          <p:cNvPr id="63" name="TextBox 62"/>
+          <p:cNvSpPr txBox="1"/>
+          <p:nvPr/>
+        </p:nvSpPr>
+        <p:spPr>
+          <a:xfrm>
+            <a:off x="4828032" y="3200399"/>
             <a:ext cx="4041648" cy="182880"/>
           </a:xfrm>
           <a:prstGeom prst="rect">
@@ -5614,7 +5699,7 @@
       </p:sp>
       <p:sp>
         <p:nvSpPr>
-          <p:cNvPr id="63" name="Rectangle 62"/>
+          <p:cNvPr id="64" name="Rectangle 63"/>
           <p:cNvSpPr/>
           <p:nvPr/>
         </p:nvSpPr>
@@ -5657,7 +5742,7 @@
       </p:sp>
       <p:sp>
         <p:nvSpPr>
-          <p:cNvPr id="64" name="Rectangle 63"/>
+          <p:cNvPr id="65" name="Rectangle 64"/>
           <p:cNvSpPr/>
           <p:nvPr/>
         </p:nvSpPr>
@@ -5700,7 +5785,7 @@
       </p:sp>
       <p:sp>
         <p:nvSpPr>
-          <p:cNvPr id="65" name="TextBox 64"/>
+          <p:cNvPr id="66" name="TextBox 65"/>
           <p:cNvSpPr txBox="1"/>
           <p:nvPr/>
         </p:nvSpPr>
@@ -5735,7 +5820,7 @@
       </p:sp>
       <p:sp>
         <p:nvSpPr>
-          <p:cNvPr id="66" name="TextBox 65"/>
+          <p:cNvPr id="67" name="TextBox 66"/>
           <p:cNvSpPr txBox="1"/>
           <p:nvPr/>
         </p:nvSpPr>
@@ -5770,7 +5855,7 @@
       </p:sp>
       <p:sp>
         <p:nvSpPr>
-          <p:cNvPr id="67" name="TextBox 66"/>
+          <p:cNvPr id="68" name="TextBox 67"/>
           <p:cNvSpPr txBox="1"/>
           <p:nvPr/>
         </p:nvSpPr>
@@ -5805,7 +5890,7 @@
       </p:sp>
       <p:sp>
         <p:nvSpPr>
-          <p:cNvPr id="68" name="TextBox 67"/>
+          <p:cNvPr id="69" name="TextBox 68"/>
           <p:cNvSpPr txBox="1"/>
           <p:nvPr/>
         </p:nvSpPr>
@@ -5840,7 +5925,7 @@
       </p:sp>
       <p:sp>
         <p:nvSpPr>
-          <p:cNvPr id="69" name="TextBox 68"/>
+          <p:cNvPr id="70" name="TextBox 69"/>
           <p:cNvSpPr txBox="1"/>
           <p:nvPr/>
         </p:nvSpPr>
@@ -5875,7 +5960,7 @@
       </p:sp>
       <p:sp>
         <p:nvSpPr>
-          <p:cNvPr id="70" name="TextBox 69"/>
+          <p:cNvPr id="71" name="TextBox 70"/>
           <p:cNvSpPr txBox="1"/>
           <p:nvPr/>
         </p:nvSpPr>
@@ -5910,7 +5995,7 @@
       </p:sp>
       <p:sp>
         <p:nvSpPr>
-          <p:cNvPr id="71" name="TextBox 70"/>
+          <p:cNvPr id="72" name="TextBox 71"/>
           <p:cNvSpPr txBox="1"/>
           <p:nvPr/>
         </p:nvSpPr>
@@ -11664,6 +11749,111 @@
                 <a:latin typeface="Calibri"/>
               </a:rPr>
               <a:t>−$1,443,882</a:t>
+            </a:r>
+          </a:p>
+        </p:txBody>
+      </p:sp>
+      <p:sp>
+        <p:nvSpPr>
+          <p:cNvPr id="52" name="TextBox 51"/>
+          <p:cNvSpPr txBox="1"/>
+          <p:nvPr/>
+        </p:nvSpPr>
+        <p:spPr>
+          <a:xfrm>
+            <a:off x="4517136" y="2720340"/>
+            <a:ext cx="4224528" cy="160020"/>
+          </a:xfrm>
+          <a:prstGeom prst="rect">
+            <a:avLst/>
+          </a:prstGeom>
+          <a:noFill/>
+        </p:spPr>
+        <p:txBody>
+          <a:bodyPr wrap="square">
+            <a:spAutoFit/>
+          </a:bodyPr>
+          <a:lstStyle/>
+          <a:p>
+            <a:pPr algn="l"/>
+            <a:r>
+              <a:rPr sz="700" b="1" i="0">
+                <a:solidFill>
+                  <a:srgbClr val="CCCCCC"/>
+                </a:solidFill>
+                <a:latin typeface="Calibri"/>
+              </a:rPr>
+              <a:t>Exos loan reconciled:</a:t>
+            </a:r>
+          </a:p>
+        </p:txBody>
+      </p:sp>
+      <p:sp>
+        <p:nvSpPr>
+          <p:cNvPr id="53" name="TextBox 52"/>
+          <p:cNvSpPr txBox="1"/>
+          <p:nvPr/>
+        </p:nvSpPr>
+        <p:spPr>
+          <a:xfrm>
+            <a:off x="4517136" y="2875788"/>
+            <a:ext cx="4224528" cy="242316"/>
+          </a:xfrm>
+          <a:prstGeom prst="rect">
+            <a:avLst/>
+          </a:prstGeom>
+          <a:noFill/>
+        </p:spPr>
+        <p:txBody>
+          <a:bodyPr wrap="square">
+            <a:spAutoFit/>
+          </a:bodyPr>
+          <a:lstStyle/>
+          <a:p>
+            <a:pPr algn="l"/>
+            <a:r>
+              <a:rPr sz="650" b="0" i="1">
+                <a:solidFill>
+                  <a:srgbClr val="888888"/>
+                </a:solidFill>
+                <a:latin typeface="Calibri"/>
+              </a:rPr>
+              <a:t>$60K originated 10/10/2024; $28.8K repaid (3/19 + 5/2/2025); $31,200 balance. 11% interest (~$38K total w/ int.); past due 1+ yr. SSLC and Exos records confirmed.</a:t>
+            </a:r>
+          </a:p>
+        </p:txBody>
+      </p:sp>
+      <p:sp>
+        <p:nvSpPr>
+          <p:cNvPr id="54" name="TextBox 53"/>
+          <p:cNvSpPr txBox="1"/>
+          <p:nvPr/>
+        </p:nvSpPr>
+        <p:spPr>
+          <a:xfrm>
+            <a:off x="4517136" y="3122676"/>
+            <a:ext cx="4224528" cy="155448"/>
+          </a:xfrm>
+          <a:prstGeom prst="rect">
+            <a:avLst/>
+          </a:prstGeom>
+          <a:noFill/>
+        </p:spPr>
+        <p:txBody>
+          <a:bodyPr wrap="square">
+            <a:spAutoFit/>
+          </a:bodyPr>
+          <a:lstStyle/>
+          <a:p>
+            <a:pPr algn="l"/>
+            <a:r>
+              <a:rPr sz="650" b="0" i="1">
+                <a:solidFill>
+                  <a:srgbClr val="888888"/>
+                </a:solidFill>
+                <a:latin typeface="Calibri"/>
+              </a:rPr>
+              <a:t>Separate $30K loan (5/9/2024) converted to 5,464 shares on 7/24/2024 — included in Exos’s $790K paid-in capital.</a:t>
             </a:r>
           </a:p>
         </p:txBody>

--- a/drafts/Exos_SSLC_Board_Offer_Overview_2026-10-10_r2.pptx
+++ b/drafts/Exos_SSLC_Board_Offer_Overview_2026-10-10_r2.pptx
@@ -2162,6 +2162,10 @@
           </a:solidFill>
           <a:ln/>
         </p:spPr>
+        <p:txBody>
+          <a:bodyPr/>
+          <a:p/>
+        </p:txBody>
       </p:sp>
       <p:sp>
         <p:nvSpPr>
@@ -2277,6 +2281,10 @@
           </a:solidFill>
           <a:ln/>
         </p:spPr>
+        <p:txBody>
+          <a:bodyPr/>
+          <a:p/>
+        </p:txBody>
       </p:sp>
       <p:sp>
         <p:nvSpPr>
@@ -3295,12 +3303,12 @@
               <a:buNone/>
             </a:pPr>
             <a:r>
-              <a:rPr lang="en-US" sz="1500" b="1" dirty="0">
+              <a:rPr lang="en-US" sz="1200" b="1" dirty="0">
                 <a:solidFill>
                   <a:srgbClr val="F26A21"/>
                 </a:solidFill>
               </a:rPr>
-              <a:t>One decision today: confirm §3 exclusivity  →  90 days  →  financing close target Feb 15th</a:t>
+              <a:t>Four motions today: approve offer + §3 exclusivity + ROFR  →  90-day window  →  financing close target Feb 15th</a:t>
             </a:r>
             <a:endParaRPr lang="en-US" sz="1500" dirty="0"/>
           </a:p>
@@ -3355,7 +3363,7 @@
               <a:buNone/>
             </a:pPr>
             <a:r>
-              <a:rPr lang="en-US" sz="700" i="1" dirty="0">
+              <a:rPr lang="en-US" sz="1000" i="1" dirty="0">
                 <a:solidFill>
                   <a:srgbClr val="888888"/>
                 </a:solidFill>
@@ -3391,7 +3399,7 @@
               <a:buNone/>
             </a:pPr>
             <a:r>
-              <a:rPr lang="en-US" sz="700" i="1" dirty="0">
+              <a:rPr lang="en-US" sz="1000" i="1" dirty="0">
                 <a:solidFill>
                   <a:srgbClr val="888888"/>
                 </a:solidFill>
@@ -3659,7 +3667,7 @@
           <a:p>
             <a:pPr algn="l"/>
             <a:r>
-              <a:rPr sz="950" b="1" i="0">
+              <a:rPr sz="1000" b="1" i="0">
                 <a:solidFill>
                   <a:srgbClr val="F26A21"/>
                 </a:solidFill>
@@ -3694,7 +3702,7 @@
           <a:p>
             <a:pPr algn="l"/>
             <a:r>
-              <a:rPr sz="750" b="0" i="0">
+              <a:rPr sz="1000" b="0" i="0">
                 <a:solidFill>
                   <a:srgbClr val="CCCCCC"/>
                 </a:solidFill>
@@ -3729,7 +3737,7 @@
           <a:p>
             <a:pPr algn="r"/>
             <a:r>
-              <a:rPr sz="750" b="0" i="0">
+              <a:rPr sz="1000" b="0" i="0">
                 <a:solidFill>
                   <a:srgbClr val="FFFFFF"/>
                 </a:solidFill>
@@ -3764,7 +3772,7 @@
           <a:p>
             <a:pPr algn="l"/>
             <a:r>
-              <a:rPr sz="750" b="0" i="1">
+              <a:rPr sz="1000" b="0" i="1">
                 <a:solidFill>
                   <a:srgbClr val="888888"/>
                 </a:solidFill>
@@ -3799,7 +3807,7 @@
           <a:p>
             <a:pPr algn="r"/>
             <a:r>
-              <a:rPr sz="750" b="0" i="0">
+              <a:rPr sz="1000" b="0" i="0">
                 <a:solidFill>
                   <a:srgbClr val="888888"/>
                 </a:solidFill>
@@ -3877,7 +3885,7 @@
           <a:p>
             <a:pPr algn="l"/>
             <a:r>
-              <a:rPr sz="750" b="0" i="0">
+              <a:rPr sz="1000" b="0" i="0">
                 <a:solidFill>
                   <a:srgbClr val="CCCCCC"/>
                 </a:solidFill>
@@ -3912,7 +3920,7 @@
           <a:p>
             <a:pPr algn="r"/>
             <a:r>
-              <a:rPr sz="750" b="1" i="0">
+              <a:rPr sz="1000" b="1" i="0">
                 <a:solidFill>
                   <a:srgbClr val="CCCCCC"/>
                 </a:solidFill>
@@ -3947,7 +3955,7 @@
           <a:p>
             <a:pPr algn="l"/>
             <a:r>
-              <a:rPr sz="750" b="0" i="0">
+              <a:rPr sz="1000" b="0" i="0">
                 <a:solidFill>
                   <a:srgbClr val="CCCCCC"/>
                 </a:solidFill>
@@ -3982,7 +3990,7 @@
           <a:p>
             <a:pPr algn="r"/>
             <a:r>
-              <a:rPr sz="750" b="0" i="0">
+              <a:rPr sz="1000" b="0" i="0">
                 <a:solidFill>
                   <a:srgbClr val="FF7755"/>
                 </a:solidFill>
@@ -3995,14 +4003,14 @@
       </p:sp>
       <p:sp>
         <p:nvSpPr>
-          <p:cNvPr id="17" name="TextBox 16"/>
-          <p:cNvSpPr txBox="1"/>
-          <p:nvPr/>
-        </p:nvSpPr>
-        <p:spPr>
-          <a:xfrm>
-            <a:off x="274320" y="1431036"/>
-            <a:ext cx="4151376" cy="141732"/>
+          <p:cNvPr id="19" name="TextBox 18"/>
+          <p:cNvSpPr txBox="1"/>
+          <p:nvPr/>
+        </p:nvSpPr>
+        <p:spPr>
+          <a:xfrm>
+            <a:off x="274320" y="1701698"/>
+            <a:ext cx="3154679" cy="169164"/>
           </a:xfrm>
           <a:prstGeom prst="rect">
             <a:avLst/>
@@ -4017,27 +4025,27 @@
           <a:p>
             <a:pPr algn="l"/>
             <a:r>
-              <a:rPr sz="650" b="0" i="1">
-                <a:solidFill>
-                  <a:srgbClr val="888888"/>
+              <a:rPr sz="1000" b="0" i="0">
+                <a:solidFill>
+                  <a:srgbClr val="CCCCCC"/>
                 </a:solidFill>
                 <a:latin typeface="Calibri"/>
               </a:rPr>
-              <a:t>  Microcosm $451K · Bookstore $321K · EIDL $132K · Wertz $92.5K · Exos $31.2K+int</a:t>
-            </a:r>
-          </a:p>
-        </p:txBody>
-      </p:sp>
-      <p:sp>
-        <p:nvSpPr>
-          <p:cNvPr id="18" name="TextBox 17"/>
-          <p:cNvSpPr txBox="1"/>
-          <p:nvPr/>
-        </p:nvSpPr>
-        <p:spPr>
-          <a:xfrm>
-            <a:off x="274320" y="1566367"/>
-            <a:ext cx="4151376" cy="141732"/>
+              <a:t>− Other current liabilities (AP, accruals)</a:t>
+            </a:r>
+          </a:p>
+        </p:txBody>
+      </p:sp>
+      <p:sp>
+        <p:nvSpPr>
+          <p:cNvPr id="20" name="TextBox 19"/>
+          <p:cNvSpPr txBox="1"/>
+          <p:nvPr/>
+        </p:nvSpPr>
+        <p:spPr>
+          <a:xfrm>
+            <a:off x="3474719" y="1701698"/>
+            <a:ext cx="914400" cy="169164"/>
           </a:xfrm>
           <a:prstGeom prst="rect">
             <a:avLst/>
@@ -4050,28 +4058,28 @@
           </a:bodyPr>
           <a:lstStyle/>
           <a:p>
-            <a:pPr algn="l"/>
-            <a:r>
-              <a:rPr sz="600" b="0" i="1">
-                <a:solidFill>
-                  <a:srgbClr val="888888"/>
+            <a:pPr algn="r"/>
+            <a:r>
+              <a:rPr sz="1000" b="0" i="0">
+                <a:solidFill>
+                  <a:srgbClr val="FF7755"/>
                 </a:solidFill>
                 <a:latin typeface="Calibri"/>
               </a:rPr>
-              <a:t>  Exos loan reconciled: $60K→$31.2K bal.; $30K prior converted to 5,464 shares (incl. in $790K paid-in).</a:t>
-            </a:r>
-          </a:p>
-        </p:txBody>
-      </p:sp>
-      <p:sp>
-        <p:nvSpPr>
-          <p:cNvPr id="19" name="TextBox 18"/>
-          <p:cNvSpPr txBox="1"/>
-          <p:nvPr/>
-        </p:nvSpPr>
-        <p:spPr>
-          <a:xfrm>
-            <a:off x="274320" y="1701698"/>
+              <a:t>($148,738)</a:t>
+            </a:r>
+          </a:p>
+        </p:txBody>
+      </p:sp>
+      <p:sp>
+        <p:nvSpPr>
+          <p:cNvPr id="21" name="TextBox 20"/>
+          <p:cNvSpPr txBox="1"/>
+          <p:nvPr/>
+        </p:nvSpPr>
+        <p:spPr>
+          <a:xfrm>
+            <a:off x="274320" y="1861718"/>
             <a:ext cx="3154679" cy="169164"/>
           </a:xfrm>
           <a:prstGeom prst="rect">
@@ -4087,26 +4095,26 @@
           <a:p>
             <a:pPr algn="l"/>
             <a:r>
-              <a:rPr sz="750" b="0" i="0">
+              <a:rPr sz="1000" b="0" i="0">
                 <a:solidFill>
                   <a:srgbClr val="CCCCCC"/>
                 </a:solidFill>
                 <a:latin typeface="Calibri"/>
               </a:rPr>
-              <a:t>− Other current liabilities (AP, accruals)</a:t>
-            </a:r>
-          </a:p>
-        </p:txBody>
-      </p:sp>
-      <p:sp>
-        <p:nvSpPr>
-          <p:cNvPr id="20" name="TextBox 19"/>
-          <p:cNvSpPr txBox="1"/>
-          <p:nvPr/>
-        </p:nvSpPr>
-        <p:spPr>
-          <a:xfrm>
-            <a:off x="3474719" y="1701698"/>
+              <a:t>− Customer deposits (IM, transferred)</a:t>
+            </a:r>
+          </a:p>
+        </p:txBody>
+      </p:sp>
+      <p:sp>
+        <p:nvSpPr>
+          <p:cNvPr id="22" name="TextBox 21"/>
+          <p:cNvSpPr txBox="1"/>
+          <p:nvPr/>
+        </p:nvSpPr>
+        <p:spPr>
+          <a:xfrm>
+            <a:off x="3474719" y="1861718"/>
             <a:ext cx="914400" cy="169164"/>
           </a:xfrm>
           <a:prstGeom prst="rect">
@@ -4122,26 +4130,26 @@
           <a:p>
             <a:pPr algn="r"/>
             <a:r>
-              <a:rPr sz="750" b="0" i="0">
+              <a:rPr sz="1000" b="0" i="0">
                 <a:solidFill>
                   <a:srgbClr val="FF7755"/>
                 </a:solidFill>
                 <a:latin typeface="Calibri"/>
               </a:rPr>
-              <a:t>($148,738)</a:t>
-            </a:r>
-          </a:p>
-        </p:txBody>
-      </p:sp>
-      <p:sp>
-        <p:nvSpPr>
-          <p:cNvPr id="21" name="TextBox 20"/>
-          <p:cNvSpPr txBox="1"/>
-          <p:nvPr/>
-        </p:nvSpPr>
-        <p:spPr>
-          <a:xfrm>
-            <a:off x="274320" y="1861718"/>
+              <a:t>($120,000)</a:t>
+            </a:r>
+          </a:p>
+        </p:txBody>
+      </p:sp>
+      <p:sp>
+        <p:nvSpPr>
+          <p:cNvPr id="23" name="TextBox 22"/>
+          <p:cNvSpPr txBox="1"/>
+          <p:nvPr/>
+        </p:nvSpPr>
+        <p:spPr>
+          <a:xfrm>
+            <a:off x="274320" y="2021738"/>
             <a:ext cx="3154679" cy="169164"/>
           </a:xfrm>
           <a:prstGeom prst="rect">
@@ -4157,26 +4165,26 @@
           <a:p>
             <a:pPr algn="l"/>
             <a:r>
-              <a:rPr sz="750" b="0" i="0">
+              <a:rPr sz="1000" b="0" i="0">
                 <a:solidFill>
                   <a:srgbClr val="CCCCCC"/>
                 </a:solidFill>
                 <a:latin typeface="Calibri"/>
               </a:rPr>
-              <a:t>− Customer deposits (IM, transferred)</a:t>
-            </a:r>
-          </a:p>
-        </p:txBody>
-      </p:sp>
-      <p:sp>
-        <p:nvSpPr>
-          <p:cNvPr id="22" name="TextBox 21"/>
-          <p:cNvSpPr txBox="1"/>
-          <p:nvPr/>
-        </p:nvSpPr>
-        <p:spPr>
-          <a:xfrm>
-            <a:off x="3474719" y="1861718"/>
+              <a:t>− Billed-ahead work, genuine (Exos est.)</a:t>
+            </a:r>
+          </a:p>
+        </p:txBody>
+      </p:sp>
+      <p:sp>
+        <p:nvSpPr>
+          <p:cNvPr id="24" name="TextBox 23"/>
+          <p:cNvSpPr txBox="1"/>
+          <p:nvPr/>
+        </p:nvSpPr>
+        <p:spPr>
+          <a:xfrm>
+            <a:off x="3474719" y="2021738"/>
             <a:ext cx="914400" cy="169164"/>
           </a:xfrm>
           <a:prstGeom prst="rect">
@@ -4192,26 +4200,26 @@
           <a:p>
             <a:pPr algn="r"/>
             <a:r>
-              <a:rPr sz="750" b="0" i="0">
+              <a:rPr sz="1000" b="0" i="0">
                 <a:solidFill>
                   <a:srgbClr val="FF7755"/>
                 </a:solidFill>
                 <a:latin typeface="Calibri"/>
               </a:rPr>
-              <a:t>($120,000)</a:t>
-            </a:r>
-          </a:p>
-        </p:txBody>
-      </p:sp>
-      <p:sp>
-        <p:nvSpPr>
-          <p:cNvPr id="23" name="TextBox 22"/>
-          <p:cNvSpPr txBox="1"/>
-          <p:nvPr/>
-        </p:nvSpPr>
-        <p:spPr>
-          <a:xfrm>
-            <a:off x="274320" y="2021738"/>
+              <a:t>($250,000)</a:t>
+            </a:r>
+          </a:p>
+        </p:txBody>
+      </p:sp>
+      <p:sp>
+        <p:nvSpPr>
+          <p:cNvPr id="25" name="TextBox 24"/>
+          <p:cNvSpPr txBox="1"/>
+          <p:nvPr/>
+        </p:nvSpPr>
+        <p:spPr>
+          <a:xfrm>
+            <a:off x="274320" y="2181758"/>
             <a:ext cx="3154679" cy="169164"/>
           </a:xfrm>
           <a:prstGeom prst="rect">
@@ -4227,26 +4235,26 @@
           <a:p>
             <a:pPr algn="l"/>
             <a:r>
-              <a:rPr sz="750" b="0" i="0">
+              <a:rPr sz="1000" b="0" i="0">
                 <a:solidFill>
                   <a:srgbClr val="CCCCCC"/>
                 </a:solidFill>
                 <a:latin typeface="Calibri"/>
               </a:rPr>
-              <a:t>− Billed-ahead work, genuine (Exos est.)</a:t>
-            </a:r>
-          </a:p>
-        </p:txBody>
-      </p:sp>
-      <p:sp>
-        <p:nvSpPr>
-          <p:cNvPr id="24" name="TextBox 23"/>
-          <p:cNvSpPr txBox="1"/>
-          <p:nvPr/>
-        </p:nvSpPr>
-        <p:spPr>
-          <a:xfrm>
-            <a:off x="3474719" y="2021738"/>
+              <a:t>− 5% escrow holdback (released 12 months)</a:t>
+            </a:r>
+          </a:p>
+        </p:txBody>
+      </p:sp>
+      <p:sp>
+        <p:nvSpPr>
+          <p:cNvPr id="26" name="TextBox 25"/>
+          <p:cNvSpPr txBox="1"/>
+          <p:nvPr/>
+        </p:nvSpPr>
+        <p:spPr>
+          <a:xfrm>
+            <a:off x="3474719" y="2181758"/>
             <a:ext cx="914400" cy="169164"/>
           </a:xfrm>
           <a:prstGeom prst="rect">
@@ -4262,77 +4270,7 @@
           <a:p>
             <a:pPr algn="r"/>
             <a:r>
-              <a:rPr sz="750" b="0" i="0">
-                <a:solidFill>
-                  <a:srgbClr val="FF7755"/>
-                </a:solidFill>
-                <a:latin typeface="Calibri"/>
-              </a:rPr>
-              <a:t>($250,000)</a:t>
-            </a:r>
-          </a:p>
-        </p:txBody>
-      </p:sp>
-      <p:sp>
-        <p:nvSpPr>
-          <p:cNvPr id="25" name="TextBox 24"/>
-          <p:cNvSpPr txBox="1"/>
-          <p:nvPr/>
-        </p:nvSpPr>
-        <p:spPr>
-          <a:xfrm>
-            <a:off x="274320" y="2181758"/>
-            <a:ext cx="3154679" cy="169164"/>
-          </a:xfrm>
-          <a:prstGeom prst="rect">
-            <a:avLst/>
-          </a:prstGeom>
-          <a:noFill/>
-        </p:spPr>
-        <p:txBody>
-          <a:bodyPr wrap="square">
-            <a:spAutoFit/>
-          </a:bodyPr>
-          <a:lstStyle/>
-          <a:p>
-            <a:pPr algn="l"/>
-            <a:r>
-              <a:rPr sz="750" b="0" i="0">
-                <a:solidFill>
-                  <a:srgbClr val="CCCCCC"/>
-                </a:solidFill>
-                <a:latin typeface="Calibri"/>
-              </a:rPr>
-              <a:t>− 5% escrow holdback (released 12 months)</a:t>
-            </a:r>
-          </a:p>
-        </p:txBody>
-      </p:sp>
-      <p:sp>
-        <p:nvSpPr>
-          <p:cNvPr id="26" name="TextBox 25"/>
-          <p:cNvSpPr txBox="1"/>
-          <p:nvPr/>
-        </p:nvSpPr>
-        <p:spPr>
-          <a:xfrm>
-            <a:off x="3474719" y="2181758"/>
-            <a:ext cx="914400" cy="169164"/>
-          </a:xfrm>
-          <a:prstGeom prst="rect">
-            <a:avLst/>
-          </a:prstGeom>
-          <a:noFill/>
-        </p:spPr>
-        <p:txBody>
-          <a:bodyPr wrap="square">
-            <a:spAutoFit/>
-          </a:bodyPr>
-          <a:lstStyle/>
-          <a:p>
-            <a:pPr algn="r"/>
-            <a:r>
-              <a:rPr sz="750" b="0" i="0">
+              <a:rPr sz="1000" b="0" i="0">
                 <a:solidFill>
                   <a:srgbClr val="FF7755"/>
                 </a:solidFill>
@@ -4410,7 +4348,7 @@
           <a:p>
             <a:pPr algn="l"/>
             <a:r>
-              <a:rPr sz="900" b="1" i="0">
+              <a:rPr sz="1000" b="1" i="0">
                 <a:solidFill>
                   <a:srgbClr val="FFFFFF"/>
                 </a:solidFill>
@@ -4480,7 +4418,7 @@
           <a:p>
             <a:pPr algn="l"/>
             <a:r>
-              <a:rPr sz="750" b="0" i="0">
+              <a:rPr sz="1000" b="0" i="0">
                 <a:solidFill>
                   <a:srgbClr val="CCCCCC"/>
                 </a:solidFill>
@@ -4515,7 +4453,7 @@
           <a:p>
             <a:pPr algn="r"/>
             <a:r>
-              <a:rPr sz="750" b="0" i="0">
+              <a:rPr sz="1000" b="0" i="0">
                 <a:solidFill>
                   <a:srgbClr val="44BB44"/>
                 </a:solidFill>
@@ -4550,7 +4488,7 @@
           <a:p>
             <a:pPr algn="l"/>
             <a:r>
-              <a:rPr sz="750" b="0" i="0">
+              <a:rPr sz="1000" b="0" i="0">
                 <a:solidFill>
                   <a:srgbClr val="CCCCCC"/>
                 </a:solidFill>
@@ -4585,7 +4523,7 @@
           <a:p>
             <a:pPr algn="r"/>
             <a:r>
-              <a:rPr sz="750" b="0" i="0">
+              <a:rPr sz="1000" b="0" i="0">
                 <a:solidFill>
                   <a:srgbClr val="44BB44"/>
                 </a:solidFill>
@@ -4620,7 +4558,7 @@
           <a:p>
             <a:pPr algn="l"/>
             <a:r>
-              <a:rPr sz="750" b="0" i="0">
+              <a:rPr sz="1000" b="0" i="0">
                 <a:solidFill>
                   <a:srgbClr val="CCCCCC"/>
                 </a:solidFill>
@@ -4655,7 +4593,7 @@
           <a:p>
             <a:pPr algn="r"/>
             <a:r>
-              <a:rPr sz="750" b="0" i="0">
+              <a:rPr sz="1000" b="0" i="0">
                 <a:solidFill>
                   <a:srgbClr val="44BB44"/>
                 </a:solidFill>
@@ -4733,7 +4671,7 @@
           <a:p>
             <a:pPr algn="l"/>
             <a:r>
-              <a:rPr sz="950" b="1" i="0">
+              <a:rPr sz="1000" b="1" i="0">
                 <a:solidFill>
                   <a:srgbClr val="FFFFFF"/>
                 </a:solidFill>
@@ -4889,7 +4827,7 @@
           <a:p>
             <a:pPr algn="l"/>
             <a:r>
-              <a:rPr sz="950" b="1" i="0">
+              <a:rPr sz="1000" b="1" i="0">
                 <a:solidFill>
                   <a:srgbClr val="F26A21"/>
                 </a:solidFill>
@@ -4924,7 +4862,7 @@
           <a:p>
             <a:pPr algn="l"/>
             <a:r>
-              <a:rPr sz="750" b="1" i="0">
+              <a:rPr sz="1000" b="1" i="0">
                 <a:solidFill>
                   <a:srgbClr val="888888"/>
                 </a:solidFill>
@@ -4959,7 +4897,7 @@
           <a:p>
             <a:pPr algn="l"/>
             <a:r>
-              <a:rPr sz="750" b="0" i="0">
+              <a:rPr sz="1000" b="0" i="0">
                 <a:solidFill>
                   <a:srgbClr val="888888"/>
                 </a:solidFill>
@@ -4994,7 +4932,7 @@
           <a:p>
             <a:pPr algn="r"/>
             <a:r>
-              <a:rPr sz="750" b="0" i="0">
+              <a:rPr sz="1000" b="0" i="0">
                 <a:solidFill>
                   <a:srgbClr val="888888"/>
                 </a:solidFill>
@@ -5029,7 +4967,7 @@
           <a:p>
             <a:pPr algn="l"/>
             <a:r>
-              <a:rPr sz="750" b="0" i="0">
+              <a:rPr sz="1000" b="0" i="0">
                 <a:solidFill>
                   <a:srgbClr val="888888"/>
                 </a:solidFill>
@@ -5064,7 +5002,7 @@
           <a:p>
             <a:pPr algn="r"/>
             <a:r>
-              <a:rPr sz="750" b="0" i="0">
+              <a:rPr sz="1000" b="0" i="0">
                 <a:solidFill>
                   <a:srgbClr val="888888"/>
                 </a:solidFill>
@@ -5142,7 +5080,7 @@
           <a:p>
             <a:pPr algn="l"/>
             <a:r>
-              <a:rPr sz="750" b="0" i="0">
+              <a:rPr sz="1000" b="0" i="0">
                 <a:solidFill>
                   <a:srgbClr val="CCCCCC"/>
                 </a:solidFill>
@@ -5177,7 +5115,7 @@
           <a:p>
             <a:pPr algn="r"/>
             <a:r>
-              <a:rPr sz="750" b="1" i="0">
+              <a:rPr sz="1000" b="1" i="0">
                 <a:solidFill>
                   <a:srgbClr val="FFFFFF"/>
                 </a:solidFill>
@@ -5212,7 +5150,7 @@
           <a:p>
             <a:pPr algn="l"/>
             <a:r>
-              <a:rPr sz="650" b="0" i="1">
+              <a:rPr sz="1000" b="0" i="1">
                 <a:solidFill>
                   <a:srgbClr val="888888"/>
                 </a:solidFill>
@@ -5247,7 +5185,7 @@
           <a:p>
             <a:pPr algn="l"/>
             <a:r>
-              <a:rPr sz="650" b="0" i="1">
+              <a:rPr sz="1000" b="0" i="1">
                 <a:solidFill>
                   <a:srgbClr val="888888"/>
                 </a:solidFill>
@@ -5267,7 +5205,7 @@
         <p:spPr>
           <a:xfrm>
             <a:off x="4754880" y="1805940"/>
-            <a:ext cx="4151376" cy="260603"/>
+            <a:ext cx="4151376" cy="182880"/>
           </a:xfrm>
           <a:prstGeom prst="rect">
             <a:avLst/>
@@ -5282,14 +5220,13 @@
           <a:p>
             <a:pPr algn="l"/>
             <a:r>
-              <a:rPr sz="650" b="0" i="1">
+              <a:rPr sz="1000" b="0" i="1">
                 <a:solidFill>
                   <a:srgbClr val="FF7755"/>
                 </a:solidFill>
                 <a:latin typeface="Calibri"/>
               </a:rPr>
-              <a:t>  Invested largely 25+ years ago (per John Quinn; to be confirmed in the stock ledger).
-  Exos’s $790K was invested 2021–2024 to keep SSLC operating.</a:t>
+              <a:t>Invested largely 25+ yrs ago (per John Quinn; to be confirmed via stock ledger). Exos: 2021–2024.</a:t>
             </a:r>
           </a:p>
         </p:txBody>
@@ -5318,7 +5255,7 @@
           <a:p>
             <a:pPr algn="l"/>
             <a:r>
-              <a:rPr sz="750" b="1" i="0">
+              <a:rPr sz="1000" b="1" i="0">
                 <a:solidFill>
                   <a:srgbClr val="888888"/>
                 </a:solidFill>
@@ -5353,7 +5290,7 @@
           <a:p>
             <a:pPr algn="l"/>
             <a:r>
-              <a:rPr sz="750" b="0" i="0">
+              <a:rPr sz="1000" b="0" i="0">
                 <a:solidFill>
                   <a:srgbClr val="CCCCCC"/>
                 </a:solidFill>
@@ -5388,7 +5325,7 @@
           <a:p>
             <a:pPr algn="r"/>
             <a:r>
-              <a:rPr sz="750" b="0" i="0">
+              <a:rPr sz="1000" b="0" i="0">
                 <a:solidFill>
                   <a:srgbClr val="44BB44"/>
                 </a:solidFill>
@@ -5423,7 +5360,7 @@
           <a:p>
             <a:pPr algn="l"/>
             <a:r>
-              <a:rPr sz="750" b="0" i="0">
+              <a:rPr sz="1000" b="0" i="0">
                 <a:solidFill>
                   <a:srgbClr val="CCCCCC"/>
                 </a:solidFill>
@@ -5458,7 +5395,7 @@
           <a:p>
             <a:pPr algn="r"/>
             <a:r>
-              <a:rPr sz="750" b="0" i="0">
+              <a:rPr sz="1000" b="0" i="0">
                 <a:solidFill>
                   <a:srgbClr val="44BB44"/>
                 </a:solidFill>
@@ -5536,7 +5473,7 @@
           <a:p>
             <a:pPr algn="l"/>
             <a:r>
-              <a:rPr sz="750" b="0" i="0">
+              <a:rPr sz="1000" b="0" i="0">
                 <a:solidFill>
                   <a:srgbClr val="CCCCCC"/>
                 </a:solidFill>
@@ -5571,49 +5508,13 @@
           <a:p>
             <a:pPr algn="r"/>
             <a:r>
-              <a:rPr sz="850" b="1" i="0">
+              <a:rPr sz="1000" b="1" i="0">
                 <a:solidFill>
                   <a:srgbClr val="FFCC44"/>
                 </a:solidFill>
                 <a:latin typeface="Calibri"/>
               </a:rPr>
               <a:t>11× at close / 23× over 5 yrs</a:t>
-            </a:r>
-          </a:p>
-        </p:txBody>
-      </p:sp>
-      <p:sp>
-        <p:nvSpPr>
-          <p:cNvPr id="61" name="TextBox 60"/>
-          <p:cNvSpPr txBox="1"/>
-          <p:nvPr/>
-        </p:nvSpPr>
-        <p:spPr>
-          <a:xfrm>
-            <a:off x="4754880" y="2807208"/>
-            <a:ext cx="4151376" cy="347472"/>
-          </a:xfrm>
-          <a:prstGeom prst="rect">
-            <a:avLst/>
-          </a:prstGeom>
-          <a:noFill/>
-        </p:spPr>
-        <p:txBody>
-          <a:bodyPr wrap="square">
-            <a:spAutoFit/>
-          </a:bodyPr>
-          <a:lstStyle/>
-          <a:p>
-            <a:pPr algn="l"/>
-            <a:r>
-              <a:rPr sz="650" b="0" i="1">
-                <a:solidFill>
-                  <a:srgbClr val="888888"/>
-                </a:solidFill>
-                <a:latin typeface="Calibri"/>
-              </a:rPr>
-              <a:t>Framed as: holders who invested ~$224K receive a strong return.
-Exos’s 18.06% is absorbed in the $790K credit — no extra cash from Exos for its own stake.</a:t>
             </a:r>
           </a:p>
         </p:txBody>
@@ -5663,42 +5564,6 @@
       </p:sp>
       <p:sp>
         <p:nvSpPr>
-          <p:cNvPr id="63" name="TextBox 62"/>
-          <p:cNvSpPr txBox="1"/>
-          <p:nvPr/>
-        </p:nvSpPr>
-        <p:spPr>
-          <a:xfrm>
-            <a:off x="4828032" y="3200399"/>
-            <a:ext cx="4041648" cy="182880"/>
-          </a:xfrm>
-          <a:prstGeom prst="rect">
-            <a:avLst/>
-          </a:prstGeom>
-          <a:noFill/>
-        </p:spPr>
-        <p:txBody>
-          <a:bodyPr wrap="square">
-            <a:spAutoFit/>
-          </a:bodyPr>
-          <a:lstStyle/>
-          <a:p>
-            <a:pPr algn="l"/>
-            <a:r>
-              <a:rPr sz="650" b="0" i="1">
-                <a:solidFill>
-                  <a:srgbClr val="FFCC44"/>
-                </a:solidFill>
-                <a:latin typeface="Calibri"/>
-              </a:rPr>
-              <a:t>Note: insiders receive ~$544K debt repayment at close ahead of equity distributions
-(Microcosm $451K + Wertz $93K + Exos $39K with interest).</a:t>
-            </a:r>
-          </a:p>
-        </p:txBody>
-      </p:sp>
-      <p:sp>
-        <p:nvSpPr>
           <p:cNvPr id="64" name="Rectangle 63"/>
           <p:cNvSpPr/>
           <p:nvPr/>
@@ -5807,7 +5672,7 @@
           <a:p>
             <a:pPr algn="l"/>
             <a:r>
-              <a:rPr sz="850" b="1" i="0">
+              <a:rPr sz="1000" b="1" i="0">
                 <a:solidFill>
                   <a:srgbClr val="F26A21"/>
                 </a:solidFill>
@@ -5827,7 +5692,7 @@
         <p:spPr>
           <a:xfrm>
             <a:off x="274320" y="4302252"/>
-            <a:ext cx="8503920" cy="141732"/>
+            <a:ext cx="8503920" cy="182880"/>
           </a:xfrm>
           <a:prstGeom prst="rect">
             <a:avLst/>
@@ -5842,13 +5707,13 @@
           <a:p>
             <a:pPr algn="l"/>
             <a:r>
-              <a:rPr sz="700" b="0" i="0">
+              <a:rPr sz="1000" b="0" i="0">
                 <a:solidFill>
                   <a:srgbClr val="CCCCCC"/>
                 </a:solidFill>
                 <a:latin typeface="Calibri"/>
               </a:rPr>
-              <a:t>• SSLC’s books carry paid-in capital only as one total ($1,014,465); per-holder amounts, share counts, and dates and amounts of each holder’s investment are not on the books.</a:t>
+              <a:t>• Books show $1,014,465 total paid-in; the stock ledger allocates it by shareholder.</a:t>
             </a:r>
           </a:p>
         </p:txBody>
@@ -5861,8 +5726,8 @@
         </p:nvSpPr>
         <p:spPr>
           <a:xfrm>
-            <a:off x="274320" y="4443984"/>
-            <a:ext cx="8503920" cy="141732"/>
+            <a:off x="274320" y="4489704"/>
+            <a:ext cx="8503920" cy="182880"/>
           </a:xfrm>
           <a:prstGeom prst="rect">
             <a:avLst/>
@@ -5877,27 +5742,27 @@
           <a:p>
             <a:pPr algn="l"/>
             <a:r>
-              <a:rPr sz="700" b="0" i="0">
+              <a:rPr sz="1000" b="0" i="0">
                 <a:solidFill>
                   <a:srgbClr val="CCCCCC"/>
                 </a:solidFill>
                 <a:latin typeface="Calibri"/>
               </a:rPr>
-              <a:t>• GL shows a 7/24/2024 conversion of a $30K Exos loan into 5,464 shares that must be reconciled to the $790K stake credit.</a:t>
-            </a:r>
-          </a:p>
-        </p:txBody>
-      </p:sp>
-      <p:sp>
-        <p:nvSpPr>
-          <p:cNvPr id="69" name="TextBox 68"/>
-          <p:cNvSpPr txBox="1"/>
-          <p:nvPr/>
-        </p:nvSpPr>
-        <p:spPr>
-          <a:xfrm>
-            <a:off x="274320" y="4585716"/>
-            <a:ext cx="8503920" cy="141732"/>
+              <a:t>• Ledger confirms cap structure: which shares were issued for cash vs. debt conversion.</a:t>
+            </a:r>
+          </a:p>
+        </p:txBody>
+      </p:sp>
+      <p:sp>
+        <p:nvSpPr>
+          <p:cNvPr id="70" name="TextBox 69"/>
+          <p:cNvSpPr txBox="1"/>
+          <p:nvPr/>
+        </p:nvSpPr>
+        <p:spPr>
+          <a:xfrm>
+            <a:off x="182880" y="4809744"/>
+            <a:ext cx="8778240" cy="182880"/>
           </a:xfrm>
           <a:prstGeom prst="rect">
             <a:avLst/>
@@ -5912,27 +5777,27 @@
           <a:p>
             <a:pPr algn="l"/>
             <a:r>
-              <a:rPr sz="700" b="0" i="0">
-                <a:solidFill>
-                  <a:srgbClr val="CCCCCC"/>
+              <a:rPr sz="1000" b="0" i="1">
+                <a:solidFill>
+                  <a:srgbClr val="888888"/>
                 </a:solidFill>
                 <a:latin typeface="Calibri"/>
               </a:rPr>
-              <a:t>• ~$544K of insider debt is repaid at close ahead of equity distributions; the 81.94% split can’t be validated without the stock ledger, cap table and subscription agreements.</a:t>
-            </a:r>
-          </a:p>
-        </p:txBody>
-      </p:sp>
-      <p:sp>
-        <p:nvSpPr>
-          <p:cNvPr id="70" name="TextBox 69"/>
-          <p:cNvSpPr txBox="1"/>
-          <p:nvPr/>
-        </p:nvSpPr>
-        <p:spPr>
-          <a:xfrm>
-            <a:off x="182880" y="4800600"/>
-            <a:ext cx="8778240" cy="201168"/>
+              <a:t>Projection based on SSLC books 10/11/2026 + Exos offer terms. Low/high: net cash $1.28M–$1.74M; 5-yr $3.4M–$7.0M. Not a guarantee.</a:t>
+            </a:r>
+          </a:p>
+        </p:txBody>
+      </p:sp>
+      <p:sp>
+        <p:nvSpPr>
+          <p:cNvPr id="71" name="TextBox 70"/>
+          <p:cNvSpPr txBox="1"/>
+          <p:nvPr/>
+        </p:nvSpPr>
+        <p:spPr>
+          <a:xfrm>
+            <a:off x="1554480" y="4956048"/>
+            <a:ext cx="6035040" cy="164592"/>
           </a:xfrm>
           <a:prstGeom prst="rect">
             <a:avLst/>
@@ -5945,29 +5810,29 @@
           </a:bodyPr>
           <a:lstStyle/>
           <a:p>
-            <a:pPr algn="l"/>
-            <a:r>
-              <a:rPr sz="650" b="0" i="1">
+            <a:pPr algn="ctr"/>
+            <a:r>
+              <a:rPr sz="1000" b="0" i="1">
                 <a:solidFill>
                   <a:srgbClr val="888888"/>
                 </a:solidFill>
                 <a:latin typeface="Calibri"/>
               </a:rPr>
-              <a:t>Projection on current SSLC books (10/11/2026) and Exos estimates; not a guarantee.  Billed-ahead balance under reconciliation (Motion 3).  Low/high: net cash $1.28M–$1.74M; 5-yr total $3.4M–$7.0M.</a:t>
-            </a:r>
-          </a:p>
-        </p:txBody>
-      </p:sp>
-      <p:sp>
-        <p:nvSpPr>
-          <p:cNvPr id="71" name="TextBox 70"/>
-          <p:cNvSpPr txBox="1"/>
-          <p:nvPr/>
-        </p:nvSpPr>
-        <p:spPr>
-          <a:xfrm>
-            <a:off x="1554480" y="4956048"/>
-            <a:ext cx="6035040" cy="164592"/>
+              <a:t>DRAFT — NEGOTIATING TERMS</a:t>
+            </a:r>
+          </a:p>
+        </p:txBody>
+      </p:sp>
+      <p:sp>
+        <p:nvSpPr>
+          <p:cNvPr id="72" name="TextBox 71"/>
+          <p:cNvSpPr txBox="1"/>
+          <p:nvPr/>
+        </p:nvSpPr>
+        <p:spPr>
+          <a:xfrm>
+            <a:off x="7772400" y="4956048"/>
+            <a:ext cx="1143000" cy="164592"/>
           </a:xfrm>
           <a:prstGeom prst="rect">
             <a:avLst/>
@@ -5980,44 +5845,9 @@
           </a:bodyPr>
           <a:lstStyle/>
           <a:p>
-            <a:pPr algn="ctr"/>
-            <a:r>
-              <a:rPr sz="700" b="0" i="1">
-                <a:solidFill>
-                  <a:srgbClr val="888888"/>
-                </a:solidFill>
-                <a:latin typeface="Calibri"/>
-              </a:rPr>
-              <a:t>DRAFT — NEGOTIATING TERMS</a:t>
-            </a:r>
-          </a:p>
-        </p:txBody>
-      </p:sp>
-      <p:sp>
-        <p:nvSpPr>
-          <p:cNvPr id="72" name="TextBox 71"/>
-          <p:cNvSpPr txBox="1"/>
-          <p:nvPr/>
-        </p:nvSpPr>
-        <p:spPr>
-          <a:xfrm>
-            <a:off x="7772400" y="4956048"/>
-            <a:ext cx="1143000" cy="164592"/>
-          </a:xfrm>
-          <a:prstGeom prst="rect">
-            <a:avLst/>
-          </a:prstGeom>
-          <a:noFill/>
-        </p:spPr>
-        <p:txBody>
-          <a:bodyPr wrap="square">
-            <a:spAutoFit/>
-          </a:bodyPr>
-          <a:lstStyle/>
-          <a:p>
             <a:pPr algn="r"/>
             <a:r>
-              <a:rPr sz="700" b="0" i="1">
+              <a:rPr sz="1000" b="0" i="1">
                 <a:solidFill>
                   <a:srgbClr val="888888"/>
                 </a:solidFill>
@@ -6355,7 +6185,7 @@
         </p:nvSpPr>
         <p:spPr>
           <a:xfrm>
-            <a:off x="265176" y="539496"/>
+            <a:off x="265176" y="534924"/>
             <a:ext cx="411480" cy="196596"/>
           </a:xfrm>
           <a:prstGeom prst="rect">
@@ -6406,13 +6236,13 @@
           <a:p>
             <a:pPr algn="l"/>
             <a:r>
-              <a:rPr sz="950" b="1" i="0">
-                <a:solidFill>
-                  <a:srgbClr val="FFFFFF"/>
+              <a:rPr sz="1000" b="1">
+                <a:solidFill>
+                  <a:srgbClr val="F26A21"/>
                 </a:solidFill>
                 <a:latin typeface="Calibri"/>
               </a:rPr>
-              <a:t>Confirm §3 Exclusivity (May 2025 Asset Acquisition Agreement)</a:t>
+              <a:t>Approve Exos's Offer, Confirm §3 Exclusivity and Grant a ROFR</a:t>
             </a:r>
           </a:p>
         </p:txBody>
@@ -6441,7 +6271,7 @@
           <a:p>
             <a:pPr algn="l"/>
             <a:r>
-              <a:rPr sz="850" b="0" i="0">
+              <a:rPr sz="1000" b="0" i="0">
                 <a:solidFill>
                   <a:srgbClr val="44BB44"/>
                 </a:solidFill>
@@ -6476,7 +6306,7 @@
           <a:p>
             <a:pPr algn="l"/>
             <a:r>
-              <a:rPr sz="850" b="0" i="0">
+              <a:rPr sz="1000" b="0" i="0">
                 <a:solidFill>
                   <a:srgbClr val="FF6666"/>
                 </a:solidFill>
@@ -6496,7 +6326,7 @@
         <p:spPr>
           <a:xfrm>
             <a:off x="731520" y="781812"/>
-            <a:ext cx="6629400" cy="608076"/>
+            <a:ext cx="6629400" cy="891540"/>
           </a:xfrm>
           <a:prstGeom prst="rect">
             <a:avLst/>
@@ -6510,35 +6340,57 @@
           <a:lstStyle/>
           <a:p>
             <a:r>
-              <a:rPr sz="750" b="0">
+              <a:rPr sz="1000" b="0" i="0">
                 <a:solidFill>
                   <a:srgbClr val="CCCCCC"/>
                 </a:solidFill>
                 <a:latin typeface="Calibri"/>
               </a:rPr>
-              <a:t>Approve a 90-day exclusivity period beginning on the date of this approval.</a:t>
-            </a:r>
-          </a:p>
-          <a:p>
-            <a:r>
-              <a:rPr sz="750" b="0">
+              <a:t>The Board approves the Exos offer (Option B terms), confirms Exos's 90-day §3 exclusivity</a:t>
+            </a:r>
+          </a:p>
+          <a:p>
+            <a:r>
+              <a:rPr sz="1000" b="0" i="0">
                 <a:solidFill>
                   <a:srgbClr val="CCCCCC"/>
                 </a:solidFill>
                 <a:latin typeface="Calibri"/>
               </a:rPr>
-              <a:t>Extension not unreasonably withheld (per §3). Allows both parties to proceed to</a:t>
-            </a:r>
-          </a:p>
-          <a:p>
-            <a:r>
-              <a:rPr sz="750" b="0">
+              <a:t>under the May 2025 Asset Acquisition Agreement, and grants Exos a right of first refusal</a:t>
+            </a:r>
+          </a:p>
+          <a:p>
+            <a:r>
+              <a:rPr sz="1000" b="0" i="0">
                 <a:solidFill>
                   <a:srgbClr val="CCCCCC"/>
                 </a:solidFill>
                 <a:latin typeface="Calibri"/>
               </a:rPr>
-              <a:t>diligence, definitive agreement, and financing close (target: Feb 15th, 2027).</a:t>
+              <a:t>on any sale of SSLC's assets or a controlling interest.</a:t>
+            </a:r>
+          </a:p>
+          <a:p>
+            <a:r>
+              <a:rPr sz="1000" b="0" i="0">
+                <a:solidFill>
+                  <a:srgbClr val="CCCCCC"/>
+                </a:solidFill>
+                <a:latin typeface="Calibri"/>
+              </a:rPr>
+              <a:t>ROFR term: 6 months from approval; auto-extends while a definitive APA is under negotiation.</a:t>
+            </a:r>
+          </a:p>
+          <a:p>
+            <a:r>
+              <a:rPr sz="1000" b="0" i="0">
+                <a:solidFill>
+                  <a:srgbClr val="CCCCCC"/>
+                </a:solidFill>
+                <a:latin typeface="Calibri"/>
+              </a:rPr>
+              <a:t>Extension not unreasonably withheld.   Target financing close: February 15, 2027.</a:t>
             </a:r>
           </a:p>
         </p:txBody>
@@ -6723,7 +6575,7 @@
         </p:nvSpPr>
         <p:spPr>
           <a:xfrm>
-            <a:off x="265176" y="1472184"/>
+            <a:off x="265176" y="1719072"/>
             <a:ext cx="411480" cy="196596"/>
           </a:xfrm>
           <a:prstGeom prst="rect">
@@ -6758,7 +6610,7 @@
         </p:nvSpPr>
         <p:spPr>
           <a:xfrm>
-            <a:off x="731520" y="1481328"/>
+            <a:off x="731520" y="1732788"/>
             <a:ext cx="6629400" cy="178308"/>
           </a:xfrm>
           <a:prstGeom prst="rect">
@@ -6774,7 +6626,7 @@
           <a:p>
             <a:pPr algn="l"/>
             <a:r>
-              <a:rPr sz="950" b="1" i="0">
+              <a:rPr sz="1000" b="1" i="0">
                 <a:solidFill>
                   <a:srgbClr val="FFFFFF"/>
                 </a:solidFill>
@@ -6793,7 +6645,7 @@
         </p:nvSpPr>
         <p:spPr>
           <a:xfrm>
-            <a:off x="7516367" y="1463040"/>
+            <a:off x="7516367" y="1714500"/>
             <a:ext cx="1371600" cy="201168"/>
           </a:xfrm>
           <a:prstGeom prst="rect">
@@ -6809,7 +6661,7 @@
           <a:p>
             <a:pPr algn="l"/>
             <a:r>
-              <a:rPr sz="850" b="0" i="0">
+              <a:rPr sz="1000" b="0" i="0">
                 <a:solidFill>
                   <a:srgbClr val="44BB44"/>
                 </a:solidFill>
@@ -6828,7 +6680,7 @@
         </p:nvSpPr>
         <p:spPr>
           <a:xfrm>
-            <a:off x="7516367" y="1609344"/>
+            <a:off x="7516367" y="1860804"/>
             <a:ext cx="1371600" cy="201168"/>
           </a:xfrm>
           <a:prstGeom prst="rect">
@@ -6844,7 +6696,7 @@
           <a:p>
             <a:pPr algn="l"/>
             <a:r>
-              <a:rPr sz="850" b="0" i="0">
+              <a:rPr sz="1000" b="0" i="0">
                 <a:solidFill>
                   <a:srgbClr val="FF6666"/>
                 </a:solidFill>
@@ -6863,8 +6715,8 @@
         </p:nvSpPr>
         <p:spPr>
           <a:xfrm>
-            <a:off x="731520" y="1714500"/>
-            <a:ext cx="6629400" cy="699516"/>
+            <a:off x="731520" y="1965960"/>
+            <a:ext cx="6629400" cy="534924"/>
           </a:xfrm>
           <a:prstGeom prst="rect">
             <a:avLst/>
@@ -6878,68 +6730,35 @@
           <a:lstStyle/>
           <a:p>
             <a:r>
-              <a:rPr sz="700" b="0">
+              <a:rPr sz="1000" b="0" i="0">
                 <a:solidFill>
                   <a:srgbClr val="CCCCCC"/>
                 </a:solidFill>
                 <a:latin typeface="Calibri"/>
               </a:rPr>
-              <a:t>Authorize an all-access or accountant user for John Quinn and one Exos finance reviewer.</a:t>
-            </a:r>
-          </a:p>
-          <a:p>
-            <a:r>
-              <a:rPr sz="700" b="0">
+              <a:t>Authorize all-access QB Online for John Quinn + one Exos finance reviewer.</a:t>
+            </a:r>
+          </a:p>
+          <a:p>
+            <a:r>
+              <a:rPr sz="1000" b="0" i="0">
                 <a:solidFill>
                   <a:srgbClr val="CCCCCC"/>
                 </a:solidFill>
                 <a:latin typeface="Calibri"/>
               </a:rPr>
-              <a:t>Purpose: reconcile the $942K "billed-ahead" balance and shared-facility costs before close.</a:t>
-            </a:r>
-          </a:p>
-          <a:p>
-            <a:r>
-              <a:rPr sz="700" b="0">
+              <a:t>Provide: stock ledger, cap table, subscription agreements, paid-in capital by shareholder.</a:t>
+            </a:r>
+          </a:p>
+          <a:p>
+            <a:r>
+              <a:rPr sz="1000" b="0" i="0">
                 <a:solidFill>
                   <a:srgbClr val="CCCCCC"/>
                 </a:solidFill>
                 <a:latin typeface="Calibri"/>
               </a:rPr>
-              <a:t>Basis: Cal. Corp. Code §1602 director inspection right + AAA §4 confirmatory diligence.</a:t>
-            </a:r>
-          </a:p>
-          <a:p>
-            <a:r>
-              <a:rPr sz="700" b="0">
-                <a:solidFill>
-                  <a:srgbClr val="CCCCCC"/>
-                </a:solidFill>
-                <a:latin typeface="Calibri"/>
-              </a:rPr>
-              <a:t>Also provide: stock ledger, cap table, subscription agreements, and paid-in capital</a:t>
-            </a:r>
-          </a:p>
-          <a:p>
-            <a:r>
-              <a:rPr sz="700" b="0">
-                <a:solidFill>
-                  <a:srgbClr val="CCCCCC"/>
-                </a:solidFill>
-                <a:latin typeface="Calibri"/>
-              </a:rPr>
-              <a:t>by shareholder (books: $1,014,465 total paid-in; need per-holder to compare payout vs. invested).</a:t>
-            </a:r>
-          </a:p>
-          <a:p>
-            <a:r>
-              <a:rPr sz="750" b="1">
-                <a:solidFill>
-                  <a:srgbClr val="F26A21"/>
-                </a:solidFill>
-                <a:latin typeface="Calibri"/>
-              </a:rPr>
-              <a:t>Confidential under the 7/27/2021 NDA.  Access to be granted no later than October 15, 2026.</a:t>
+              <a:t>Deadline: Oct 15, 2026.   §1602 inspection right + AAA §4.   NDA 7/27/2021.</a:t>
             </a:r>
           </a:p>
         </p:txBody>
@@ -7124,7 +6943,7 @@
         </p:nvSpPr>
         <p:spPr>
           <a:xfrm>
-            <a:off x="265176" y="2496312"/>
+            <a:off x="265176" y="2546603"/>
             <a:ext cx="411480" cy="196596"/>
           </a:xfrm>
           <a:prstGeom prst="rect">
@@ -7159,7 +6978,7 @@
         </p:nvSpPr>
         <p:spPr>
           <a:xfrm>
-            <a:off x="731520" y="2505456"/>
+            <a:off x="731520" y="2560320"/>
             <a:ext cx="6629400" cy="178308"/>
           </a:xfrm>
           <a:prstGeom prst="rect">
@@ -7175,7 +6994,7 @@
           <a:p>
             <a:pPr algn="l"/>
             <a:r>
-              <a:rPr sz="950" b="1" i="0">
+              <a:rPr sz="1000" b="1" i="0">
                 <a:solidFill>
                   <a:srgbClr val="FFFFFF"/>
                 </a:solidFill>
@@ -7194,7 +7013,7 @@
         </p:nvSpPr>
         <p:spPr>
           <a:xfrm>
-            <a:off x="7516367" y="2487168"/>
+            <a:off x="7516367" y="2542032"/>
             <a:ext cx="1371600" cy="201168"/>
           </a:xfrm>
           <a:prstGeom prst="rect">
@@ -7210,7 +7029,7 @@
           <a:p>
             <a:pPr algn="l"/>
             <a:r>
-              <a:rPr sz="850" b="0" i="0">
+              <a:rPr sz="1000" b="0" i="0">
                 <a:solidFill>
                   <a:srgbClr val="44BB44"/>
                 </a:solidFill>
@@ -7229,7 +7048,7 @@
         </p:nvSpPr>
         <p:spPr>
           <a:xfrm>
-            <a:off x="7516367" y="2633472"/>
+            <a:off x="7516367" y="2688336"/>
             <a:ext cx="1371600" cy="201168"/>
           </a:xfrm>
           <a:prstGeom prst="rect">
@@ -7245,7 +7064,7 @@
           <a:p>
             <a:pPr algn="l"/>
             <a:r>
-              <a:rPr sz="850" b="0" i="0">
+              <a:rPr sz="1000" b="0" i="0">
                 <a:solidFill>
                   <a:srgbClr val="FF6666"/>
                 </a:solidFill>
@@ -7264,8 +7083,8 @@
         </p:nvSpPr>
         <p:spPr>
           <a:xfrm>
-            <a:off x="731520" y="2738628"/>
-            <a:ext cx="6629400" cy="882395"/>
+            <a:off x="731520" y="2793491"/>
+            <a:ext cx="6629400" cy="713232"/>
           </a:xfrm>
           <a:prstGeom prst="rect">
             <a:avLst/>
@@ -7279,46 +7098,46 @@
           <a:lstStyle/>
           <a:p>
             <a:r>
-              <a:rPr sz="750" b="0">
+              <a:rPr sz="1000" b="0" i="0">
                 <a:solidFill>
                   <a:srgbClr val="CCCCCC"/>
                 </a:solidFill>
                 <a:latin typeface="Calibri"/>
               </a:rPr>
-              <a:t>Direct A La Carte Solutions (bookkeeper) + Singer Lewak / Welch &amp; Co. to reconcile and correct:</a:t>
-            </a:r>
-          </a:p>
-          <a:p>
-            <a:r>
-              <a:rPr sz="750" b="0">
+              <a:t>Direct A La Carte Solutions + Singer Lewak / Welch &amp; Co. to reconcile within 5 days:</a:t>
+            </a:r>
+          </a:p>
+          <a:p>
+            <a:r>
+              <a:rPr sz="1000" b="0" i="0">
                 <a:solidFill>
                   <a:srgbClr val="CCCCCC"/>
                 </a:solidFill>
                 <a:latin typeface="Calibri"/>
               </a:rPr>
-              <a:t>• Acct 1110 AR Unbilled ($942,177) and Acct 2380 Deposits ($120,000) within 5 days of approval.</a:t>
-            </a:r>
-          </a:p>
-          <a:p>
-            <a:r>
-              <a:rPr sz="750" b="0">
+              <a:t>• Acct 1110 AR Unbilled ($942,177) and Acct 2380 Customer Deposits ($120,000).</a:t>
+            </a:r>
+          </a:p>
+          <a:p>
+            <a:r>
+              <a:rPr sz="1000" b="0" i="0">
                 <a:solidFill>
                   <a:srgbClr val="CCCCCC"/>
                 </a:solidFill>
                 <a:latin typeface="Calibri"/>
               </a:rPr>
-              <a:t>• Clear start-billings on completed/shipped tanks; post missing Jul–Sep 2026 rev-rec entries.</a:t>
-            </a:r>
-          </a:p>
-          <a:p>
-            <a:r>
-              <a:rPr sz="750" b="0">
+              <a:t>• Clear start-billings on shipped tanks; post Jul–Sep 2026 revenue-recognition entries.</a:t>
+            </a:r>
+          </a:p>
+          <a:p>
+            <a:r>
+              <a:rPr sz="1000" b="0" i="0">
                 <a:solidFill>
                   <a:srgbClr val="CCCCCC"/>
                 </a:solidFill>
                 <a:latin typeface="Calibri"/>
               </a:rPr>
-              <a:t>• Tank-by-tank reconciliation (IM-109/122/134, EXOS-133) + corrected balance sheet to all directors.</a:t>
+              <a:t>• Tank recon (IM-109/122/134, EXOS-133) + corrected balance sheet to all directors.</a:t>
             </a:r>
           </a:p>
         </p:txBody>
@@ -7503,7 +7322,7 @@
         </p:nvSpPr>
         <p:spPr>
           <a:xfrm>
-            <a:off x="265176" y="3703320"/>
+            <a:off x="265176" y="3552444"/>
             <a:ext cx="411480" cy="196596"/>
           </a:xfrm>
           <a:prstGeom prst="rect">
@@ -7538,7 +7357,7 @@
         </p:nvSpPr>
         <p:spPr>
           <a:xfrm>
-            <a:off x="731520" y="3712463"/>
+            <a:off x="731520" y="3566160"/>
             <a:ext cx="6629400" cy="178308"/>
           </a:xfrm>
           <a:prstGeom prst="rect">
@@ -7554,7 +7373,7 @@
           <a:p>
             <a:pPr algn="l"/>
             <a:r>
-              <a:rPr sz="950" b="1" i="0">
+              <a:rPr sz="1000" b="1" i="0">
                 <a:solidFill>
                   <a:srgbClr val="FFFFFF"/>
                 </a:solidFill>
@@ -7573,7 +7392,7 @@
         </p:nvSpPr>
         <p:spPr>
           <a:xfrm>
-            <a:off x="7516367" y="3694175"/>
+            <a:off x="7516367" y="3547872"/>
             <a:ext cx="1371600" cy="201168"/>
           </a:xfrm>
           <a:prstGeom prst="rect">
@@ -7589,7 +7408,7 @@
           <a:p>
             <a:pPr algn="l"/>
             <a:r>
-              <a:rPr sz="850" b="0" i="0">
+              <a:rPr sz="1000" b="0" i="0">
                 <a:solidFill>
                   <a:srgbClr val="44BB44"/>
                 </a:solidFill>
@@ -7608,7 +7427,7 @@
         </p:nvSpPr>
         <p:spPr>
           <a:xfrm>
-            <a:off x="7516367" y="3840479"/>
+            <a:off x="7516367" y="3694176"/>
             <a:ext cx="1371600" cy="201168"/>
           </a:xfrm>
           <a:prstGeom prst="rect">
@@ -7624,7 +7443,7 @@
           <a:p>
             <a:pPr algn="l"/>
             <a:r>
-              <a:rPr sz="850" b="0" i="0">
+              <a:rPr sz="1000" b="0" i="0">
                 <a:solidFill>
                   <a:srgbClr val="FF6666"/>
                 </a:solidFill>
@@ -7643,8 +7462,8 @@
         </p:nvSpPr>
         <p:spPr>
           <a:xfrm>
-            <a:off x="731520" y="3945635"/>
-            <a:ext cx="6629400" cy="562356"/>
+            <a:off x="731520" y="3799332"/>
+            <a:ext cx="6629400" cy="356616"/>
           </a:xfrm>
           <a:prstGeom prst="rect">
             <a:avLst/>
@@ -7658,35 +7477,24 @@
           <a:lstStyle/>
           <a:p>
             <a:r>
-              <a:rPr sz="750" b="0">
+              <a:rPr sz="1000" b="0" i="0">
                 <a:solidFill>
                   <a:srgbClr val="CCCCCC"/>
                 </a:solidFill>
                 <a:latin typeface="Calibri"/>
               </a:rPr>
-              <a:t>Authorize Exos to use the same QB data to evaluate its in-house ERP/MRP and inventory</a:t>
-            </a:r>
-          </a:p>
-          <a:p>
-            <a:r>
-              <a:rPr sz="750" b="0">
+              <a:t>Authorize Exos to use the QB data to evaluate compatible ERP/MRP and inventory systems.</a:t>
+            </a:r>
+          </a:p>
+          <a:p>
+            <a:r>
+              <a:rPr sz="1000" b="0" i="0">
                 <a:solidFill>
                   <a:srgbClr val="CCCCCC"/>
                 </a:solidFill>
                 <a:latin typeface="Calibri"/>
               </a:rPr>
-              <a:t>systems for the combined operation.  Confidential under the NDA.</a:t>
-            </a:r>
-          </a:p>
-          <a:p>
-            <a:r>
-              <a:rPr sz="750" b="0">
-                <a:solidFill>
-                  <a:srgbClr val="CCCCCC"/>
-                </a:solidFill>
-                <a:latin typeface="Calibri"/>
-              </a:rPr>
-              <a:t>Does not create any obligation to implement; evaluation only.</a:t>
+              <a:t>Evaluation only; no implementation obligation.   Confidential under the NDA.</a:t>
             </a:r>
           </a:p>
         </p:txBody>
@@ -7742,7 +7550,7 @@
         </p:nvSpPr>
         <p:spPr>
           <a:xfrm>
-            <a:off x="292608" y="4571999"/>
+            <a:off x="292608" y="4192524"/>
             <a:ext cx="8549640" cy="155448"/>
           </a:xfrm>
           <a:prstGeom prst="rect">
@@ -7758,7 +7566,7 @@
           <a:p>
             <a:pPr algn="l"/>
             <a:r>
-              <a:rPr sz="750" b="0" i="1">
+              <a:rPr sz="1000" b="0" i="1">
                 <a:solidFill>
                   <a:srgbClr val="F26A21"/>
                 </a:solidFill>
@@ -7793,7 +7601,7 @@
           <a:p>
             <a:pPr algn="ctr"/>
             <a:r>
-              <a:rPr sz="700" b="0" i="1">
+              <a:rPr sz="1000" b="0" i="1">
                 <a:solidFill>
                   <a:srgbClr val="888888"/>
                 </a:solidFill>
@@ -7828,7 +7636,7 @@
           <a:p>
             <a:pPr algn="r"/>
             <a:r>
-              <a:rPr sz="700" b="0" i="1">
+              <a:rPr sz="1000" b="0" i="1">
                 <a:solidFill>
                   <a:srgbClr val="888888"/>
                 </a:solidFill>
@@ -8807,12 +8615,12 @@
               <a:buNone/>
             </a:pPr>
             <a:r>
-              <a:rPr lang="en-US" sz="1300" b="1" dirty="0">
+              <a:rPr lang="en-US" sz="1000" b="1" dirty="0">
                 <a:solidFill>
                   <a:srgbClr val="F26A21"/>
                 </a:solidFill>
               </a:rPr>
-              <a:t>The Board is asked to vote on Motions 1–4. Questions and open items welcome.</a:t>
+              <a:t>The Board is asked today to vote on Motions 1–4: approving the Exos offer and granting exclusivity + ROFR (Motion 1), QB access (Motion 2), accounting correction (Motion 3), and ERP evaluation (Motion 4). Declining Motion 1 is a judgment that SSLC alone — without new capital — is more likely to create more than the $18.9M maximum this offer projects (if Exos stock held to 2031). Not a guarantee; "projects" is the operative word.</a:t>
             </a:r>
             <a:endParaRPr lang="en-US" sz="1300" dirty="0"/>
           </a:p>
@@ -9029,12 +8837,12 @@
               <a:buNone/>
             </a:pPr>
             <a:r>
-              <a:rPr lang="en-US" sz="1200" dirty="0">
+              <a:rPr lang="en-US" sz="1000" dirty="0">
                 <a:solidFill>
                   <a:srgbClr val="CCCCCC"/>
                 </a:solidFill>
               </a:rPr>
-              <a:t>§3 exclusivity — 90-day window begins on board approval (May 2025 AAA)
+              <a:t>Approve Exos offer (Option B) + §3 exclusivity (90-day) + ROFR on asset sale
 </a:t>
             </a:r>
             <a:pPr indent="0" marL="0">
@@ -9152,7 +8960,7 @@
               <a:buNone/>
             </a:pPr>
             <a:r>
-              <a:rPr lang="en-US" sz="700" i="1" dirty="0">
+              <a:rPr lang="en-US" sz="1000" i="1" dirty="0">
                 <a:solidFill>
                   <a:srgbClr val="888888"/>
                 </a:solidFill>
@@ -9188,7 +8996,7 @@
               <a:buNone/>
             </a:pPr>
             <a:r>
-              <a:rPr lang="en-US" sz="700" i="1" dirty="0">
+              <a:rPr lang="en-US" sz="1000" i="1" dirty="0">
                 <a:solidFill>
                   <a:srgbClr val="888888"/>
                 </a:solidFill>
@@ -9819,7 +9627,7 @@
               <a:buNone/>
             </a:pPr>
             <a:r>
-              <a:rPr lang="en-US" sz="700" i="1" dirty="0">
+              <a:rPr lang="en-US" sz="1000" i="1" dirty="0">
                 <a:solidFill>
                   <a:srgbClr val="888888"/>
                 </a:solidFill>
@@ -9855,7 +9663,7 @@
               <a:buNone/>
             </a:pPr>
             <a:r>
-              <a:rPr lang="en-US" sz="700" i="1" dirty="0">
+              <a:rPr lang="en-US" sz="1000" i="1" dirty="0">
                 <a:solidFill>
                   <a:srgbClr val="888888"/>
                 </a:solidFill>
@@ -10252,7 +10060,7 @@
           <a:p>
             <a:pPr algn="l"/>
             <a:r>
-              <a:rPr sz="850" b="1" i="0">
+              <a:rPr sz="1000" b="1" i="0">
                 <a:solidFill>
                   <a:srgbClr val="F26A21"/>
                 </a:solidFill>
@@ -10287,7 +10095,7 @@
           <a:p>
             <a:pPr algn="l"/>
             <a:r>
-              <a:rPr sz="850" b="1" i="0">
+              <a:rPr sz="1000" b="1" i="0">
                 <a:solidFill>
                   <a:srgbClr val="F26A21"/>
                 </a:solidFill>
@@ -10322,7 +10130,7 @@
           <a:p>
             <a:pPr algn="l"/>
             <a:r>
-              <a:rPr sz="800" b="0" i="0">
+              <a:rPr sz="1000" b="0" i="0">
                 <a:solidFill>
                   <a:srgbClr val="CCCCCC"/>
                 </a:solidFill>
@@ -10357,7 +10165,7 @@
           <a:p>
             <a:pPr algn="r"/>
             <a:r>
-              <a:rPr sz="900" b="0" i="0">
+              <a:rPr sz="1000" b="0" i="0">
                 <a:solidFill>
                   <a:srgbClr val="CCCCCC"/>
                 </a:solidFill>
@@ -10392,7 +10200,7 @@
           <a:p>
             <a:pPr algn="l"/>
             <a:r>
-              <a:rPr sz="800" b="0" i="0">
+              <a:rPr sz="1000" b="0" i="0">
                 <a:solidFill>
                   <a:srgbClr val="CCCCCC"/>
                 </a:solidFill>
@@ -10427,7 +10235,7 @@
           <a:p>
             <a:pPr algn="r"/>
             <a:r>
-              <a:rPr sz="900" b="0" i="0">
+              <a:rPr sz="1000" b="0" i="0">
                 <a:solidFill>
                   <a:srgbClr val="CCCCCC"/>
                 </a:solidFill>
@@ -10505,7 +10313,7 @@
           <a:p>
             <a:pPr algn="l"/>
             <a:r>
-              <a:rPr sz="800" b="0" i="0">
+              <a:rPr sz="1000" b="0" i="0">
                 <a:solidFill>
                   <a:srgbClr val="CCCCCC"/>
                 </a:solidFill>
@@ -10540,7 +10348,7 @@
           <a:p>
             <a:pPr algn="r"/>
             <a:r>
-              <a:rPr sz="900" b="1" i="0">
+              <a:rPr sz="1000" b="1" i="0">
                 <a:solidFill>
                   <a:srgbClr val="FFFFFF"/>
                 </a:solidFill>
@@ -10575,7 +10383,7 @@
           <a:p>
             <a:pPr algn="l"/>
             <a:r>
-              <a:rPr sz="800" b="0" i="0">
+              <a:rPr sz="1000" b="0" i="0">
                 <a:solidFill>
                   <a:srgbClr val="CCCCCC"/>
                 </a:solidFill>
@@ -10610,7 +10418,7 @@
           <a:p>
             <a:pPr algn="r"/>
             <a:r>
-              <a:rPr sz="900" b="1" i="0">
+              <a:rPr sz="1000" b="1" i="0">
                 <a:solidFill>
                   <a:srgbClr val="F26A21"/>
                 </a:solidFill>
@@ -10688,7 +10496,7 @@
           <a:p>
             <a:pPr algn="l"/>
             <a:r>
-              <a:rPr sz="800" b="0" i="0">
+              <a:rPr sz="1000" b="0" i="0">
                 <a:solidFill>
                   <a:srgbClr val="CCCCCC"/>
                 </a:solidFill>
@@ -10723,7 +10531,7 @@
           <a:p>
             <a:pPr algn="r"/>
             <a:r>
-              <a:rPr sz="900" b="1" i="0">
+              <a:rPr sz="1000" b="1" i="0">
                 <a:solidFill>
                   <a:srgbClr val="FF6666"/>
                 </a:solidFill>
@@ -10758,7 +10566,7 @@
           <a:p>
             <a:pPr algn="l"/>
             <a:r>
-              <a:rPr sz="800" b="0" i="0">
+              <a:rPr sz="1000" b="0" i="0">
                 <a:solidFill>
                   <a:srgbClr val="CCCCCC"/>
                 </a:solidFill>
@@ -10793,7 +10601,7 @@
           <a:p>
             <a:pPr algn="r"/>
             <a:r>
-              <a:rPr sz="900" b="1" i="0">
+              <a:rPr sz="1000" b="1" i="0">
                 <a:solidFill>
                   <a:srgbClr val="44BB44"/>
                 </a:solidFill>
@@ -10828,7 +10636,7 @@
           <a:p>
             <a:pPr algn="l"/>
             <a:r>
-              <a:rPr sz="800" b="0" i="0">
+              <a:rPr sz="1000" b="0" i="0">
                 <a:solidFill>
                   <a:srgbClr val="CCCCCC"/>
                 </a:solidFill>
@@ -10941,7 +10749,7 @@
           <a:p>
             <a:pPr algn="l"/>
             <a:r>
-              <a:rPr sz="800" b="0" i="0">
+              <a:rPr sz="1000" b="0" i="0">
                 <a:solidFill>
                   <a:srgbClr val="CCCCCC"/>
                 </a:solidFill>
@@ -10976,7 +10784,7 @@
           <a:p>
             <a:pPr algn="r"/>
             <a:r>
-              <a:rPr sz="900" b="1" i="0">
+              <a:rPr sz="1000" b="1" i="0">
                 <a:solidFill>
                   <a:srgbClr val="FF6666"/>
                 </a:solidFill>
@@ -11011,7 +10819,7 @@
           <a:p>
             <a:pPr algn="l"/>
             <a:r>
-              <a:rPr sz="800" b="0" i="0">
+              <a:rPr sz="1000" b="0" i="0">
                 <a:solidFill>
                   <a:srgbClr val="CCCCCC"/>
                 </a:solidFill>
@@ -11046,7 +10854,7 @@
           <a:p>
             <a:pPr algn="r"/>
             <a:r>
-              <a:rPr sz="900" b="1" i="0">
+              <a:rPr sz="1000" b="1" i="0">
                 <a:solidFill>
                   <a:srgbClr val="FF6666"/>
                 </a:solidFill>
@@ -11081,7 +10889,7 @@
           <a:p>
             <a:pPr algn="l"/>
             <a:r>
-              <a:rPr sz="800" b="0" i="0">
+              <a:rPr sz="1000" b="0" i="0">
                 <a:solidFill>
                   <a:srgbClr val="CCCCCC"/>
                 </a:solidFill>
@@ -11116,7 +10924,7 @@
           <a:p>
             <a:pPr algn="r"/>
             <a:r>
-              <a:rPr sz="900" b="1" i="0">
+              <a:rPr sz="1000" b="1" i="0">
                 <a:solidFill>
                   <a:srgbClr val="FF6666"/>
                 </a:solidFill>
@@ -11151,7 +10959,7 @@
           <a:p>
             <a:pPr algn="l"/>
             <a:r>
-              <a:rPr sz="800" b="0" i="0">
+              <a:rPr sz="1000" b="0" i="0">
                 <a:solidFill>
                   <a:srgbClr val="CCCCCC"/>
                 </a:solidFill>
@@ -11186,7 +10994,7 @@
           <a:p>
             <a:pPr algn="r"/>
             <a:r>
-              <a:rPr sz="900" b="1" i="0">
+              <a:rPr sz="1000" b="1" i="0">
                 <a:solidFill>
                   <a:srgbClr val="FF6666"/>
                 </a:solidFill>
@@ -11221,7 +11029,7 @@
           <a:p>
             <a:pPr algn="l"/>
             <a:r>
-              <a:rPr sz="800" b="0" i="0">
+              <a:rPr sz="1000" b="0" i="0">
                 <a:solidFill>
                   <a:srgbClr val="CCCCCC"/>
                 </a:solidFill>
@@ -11256,7 +11064,7 @@
           <a:p>
             <a:pPr algn="r"/>
             <a:r>
-              <a:rPr sz="900" b="1" i="0">
+              <a:rPr sz="1000" b="1" i="0">
                 <a:solidFill>
                   <a:srgbClr val="F26A21"/>
                 </a:solidFill>
@@ -11334,7 +11142,7 @@
           <a:p>
             <a:pPr algn="l"/>
             <a:r>
-              <a:rPr sz="800" b="0" i="0">
+              <a:rPr sz="1000" b="0" i="0">
                 <a:solidFill>
                   <a:srgbClr val="CCCCCC"/>
                 </a:solidFill>
@@ -11369,7 +11177,7 @@
           <a:p>
             <a:pPr algn="r"/>
             <a:r>
-              <a:rPr sz="900" b="1" i="0">
+              <a:rPr sz="1000" b="1" i="0">
                 <a:solidFill>
                   <a:srgbClr val="FF6666"/>
                 </a:solidFill>
@@ -11490,7 +11298,7 @@
           <a:p>
             <a:pPr algn="l"/>
             <a:r>
-              <a:rPr sz="800" b="1" i="0">
+              <a:rPr sz="1000" b="1" i="0">
                 <a:solidFill>
                   <a:srgbClr val="F26A21"/>
                 </a:solidFill>
@@ -11525,13 +11333,13 @@
           <a:p>
             <a:pPr algn="l"/>
             <a:r>
-              <a:rPr sz="750" b="0" i="0">
+              <a:rPr sz="1000" b="0" i="0">
                 <a:solidFill>
                   <a:srgbClr val="CCCCCC"/>
                 </a:solidFill>
                 <a:latin typeface="Calibri"/>
               </a:rPr>
-              <a:t>"Billed-ahead" balance: $942,177 booked as of 10/11. Exos's assessment: overstated — SSLC bills IM ~40% at tank start; those start-billings appear not cleared at shipment. Est. ~$100–200K genuinely in progress. Reconciliation requested via Motion 2.  |  Facility costs since Jan 2024: ~$805K (rent $725K + other; doubled to ~$23.6K/mo Jul 2024). Never charged back to Microcosm on SSLC's books.</a:t>
+              <a:t>"Billed-ahead" balance: $942,177 at 10/11. Exos assessment: overstated — start-billings not cleared at shipment. True billed-ahead est. $100K–$250K. Reconciliation via Motion 3. Facility costs since Jan 2024: ~$805K never charged back to Microcosm.</a:t>
             </a:r>
           </a:p>
         </p:txBody>
@@ -11560,13 +11368,13 @@
           <a:p>
             <a:pPr algn="l"/>
             <a:r>
-              <a:rPr sz="700" b="0" i="1">
+              <a:rPr sz="1000" b="0" i="1">
                 <a:solidFill>
                   <a:srgbClr val="888888"/>
                 </a:solidFill>
                 <a:latin typeface="Calibri"/>
               </a:rPr>
-              <a:t>per SSLC QuickBooks 10/11/2026; Exos billed-ahead assessment pending reconciliation</a:t>
+              <a:t>Source: SSLC QuickBooks 10/11/2026; billed-ahead pending reconciliation (Motion 3)</a:t>
             </a:r>
           </a:p>
         </p:txBody>
@@ -11595,7 +11403,7 @@
           <a:p>
             <a:pPr algn="ctr"/>
             <a:r>
-              <a:rPr sz="700" b="0" i="1">
+              <a:rPr sz="1000" b="0" i="1">
                 <a:solidFill>
                   <a:srgbClr val="888888"/>
                 </a:solidFill>
@@ -11630,7 +11438,7 @@
           <a:p>
             <a:pPr algn="r"/>
             <a:r>
-              <a:rPr sz="700" b="0" i="1">
+              <a:rPr sz="1000" b="0" i="1">
                 <a:solidFill>
                   <a:srgbClr val="888888"/>
                 </a:solidFill>
@@ -11707,7 +11515,7 @@
           <a:lstStyle/>
           <a:p>
             <a:r>
-              <a:rPr sz="800" b="0">
+              <a:rPr sz="1000" b="0">
                 <a:solidFill>
                   <a:srgbClr val="CCCCCC"/>
                 </a:solidFill>
@@ -11742,7 +11550,7 @@
           <a:p>
             <a:pPr algn="r"/>
             <a:r>
-              <a:rPr sz="900" b="1">
+              <a:rPr sz="1000" b="1">
                 <a:solidFill>
                   <a:srgbClr val="FF6666"/>
                 </a:solidFill>
@@ -11777,13 +11585,13 @@
           <a:p>
             <a:pPr algn="l"/>
             <a:r>
-              <a:rPr sz="700" b="1" i="0">
+              <a:rPr sz="1000" b="1" i="0">
                 <a:solidFill>
                   <a:srgbClr val="CCCCCC"/>
                 </a:solidFill>
                 <a:latin typeface="Calibri"/>
               </a:rPr>
-              <a:t>Exos loan reconciled:</a:t>
+              <a:t>Exos loan reconciled: $60K→$31.2K (11% int.); records match. $30K prior loan→5,464 shares (incl. in $790K paid-in).</a:t>
             </a:r>
           </a:p>
         </p:txBody>
@@ -11812,13 +11620,13 @@
           <a:p>
             <a:pPr algn="l"/>
             <a:r>
-              <a:rPr sz="650" b="0" i="1">
+              <a:rPr sz="1000" b="0" i="1">
                 <a:solidFill>
                   <a:srgbClr val="888888"/>
                 </a:solidFill>
                 <a:latin typeface="Calibri"/>
               </a:rPr>
-              <a:t>$60K originated 10/10/2024; $28.8K repaid (3/19 + 5/2/2025); $31,200 balance. 11% interest (~$38K total w/ int.); past due 1+ yr. SSLC and Exos records confirmed.</a:t>
+              <a:t/>
             </a:r>
           </a:p>
         </p:txBody>
@@ -11847,13 +11655,13 @@
           <a:p>
             <a:pPr algn="l"/>
             <a:r>
-              <a:rPr sz="650" b="0" i="1">
+              <a:rPr sz="1000" b="0" i="1">
                 <a:solidFill>
                   <a:srgbClr val="888888"/>
                 </a:solidFill>
                 <a:latin typeface="Calibri"/>
               </a:rPr>
-              <a:t>Separate $30K loan (5/9/2024) converted to 5,464 shares on 7/24/2024 — included in Exos’s $790K paid-in capital.</a:t>
+              <a:t/>
             </a:r>
           </a:p>
         </p:txBody>
@@ -12816,7 +12624,7 @@
               <a:buNone/>
             </a:pPr>
             <a:r>
-              <a:rPr lang="en-US" sz="700" i="1" dirty="0">
+              <a:rPr lang="en-US" sz="1000" i="1" dirty="0">
                 <a:solidFill>
                   <a:srgbClr val="888888"/>
                 </a:solidFill>
@@ -12852,7 +12660,7 @@
               <a:buNone/>
             </a:pPr>
             <a:r>
-              <a:rPr lang="en-US" sz="700" i="1" dirty="0">
+              <a:rPr lang="en-US" sz="1000" i="1" dirty="0">
                 <a:solidFill>
                   <a:srgbClr val="888888"/>
                 </a:solidFill>
@@ -12953,6 +12761,10 @@
           </a:solidFill>
           <a:ln/>
         </p:spPr>
+        <p:txBody>
+          <a:bodyPr/>
+          <a:p/>
+        </p:txBody>
       </p:sp>
       <p:sp>
         <p:nvSpPr>
@@ -12978,6 +12790,10 @@
             <a:prstDash val="solid"/>
           </a:ln>
         </p:spPr>
+        <p:txBody>
+          <a:bodyPr/>
+          <a:p/>
+        </p:txBody>
       </p:sp>
       <p:sp>
         <p:nvSpPr>
@@ -13039,6 +12855,10 @@
             <a:prstDash val="solid"/>
           </a:ln>
         </p:spPr>
+        <p:txBody>
+          <a:bodyPr/>
+          <a:p/>
+        </p:txBody>
       </p:sp>
       <p:sp>
         <p:nvSpPr>
@@ -13100,6 +12920,10 @@
             <a:prstDash val="solid"/>
           </a:ln>
         </p:spPr>
+        <p:txBody>
+          <a:bodyPr/>
+          <a:p/>
+        </p:txBody>
       </p:sp>
       <p:sp>
         <p:nvSpPr>
@@ -13161,6 +12985,10 @@
             <a:prstDash val="solid"/>
           </a:ln>
         </p:spPr>
+        <p:txBody>
+          <a:bodyPr/>
+          <a:p/>
+        </p:txBody>
       </p:sp>
       <p:sp>
         <p:nvSpPr>
@@ -13222,6 +13050,10 @@
             <a:prstDash val="solid"/>
           </a:ln>
         </p:spPr>
+        <p:txBody>
+          <a:bodyPr/>
+          <a:p/>
+        </p:txBody>
       </p:sp>
       <p:sp>
         <p:nvSpPr>
@@ -13283,6 +13115,10 @@
             <a:prstDash val="solid"/>
           </a:ln>
         </p:spPr>
+        <p:txBody>
+          <a:bodyPr/>
+          <a:p/>
+        </p:txBody>
       </p:sp>
       <p:sp>
         <p:nvSpPr>
@@ -13344,6 +13180,10 @@
             <a:prstDash val="solid"/>
           </a:ln>
         </p:spPr>
+        <p:txBody>
+          <a:bodyPr/>
+          <a:p/>
+        </p:txBody>
       </p:sp>
       <p:sp>
         <p:nvSpPr>
@@ -13370,7 +13210,7 @@
               <a:buNone/>
             </a:pPr>
             <a:r>
-              <a:rPr lang="en-US" sz="900" dirty="0">
+              <a:rPr lang="en-US" sz="1000" dirty="0">
                 <a:solidFill>
                   <a:srgbClr val="CCCCCC"/>
                 </a:solidFill>
@@ -13384,7 +13224,7 @@
               <a:buNone/>
             </a:pPr>
             <a:r>
-              <a:rPr lang="en-US" sz="900" dirty="0">
+              <a:rPr lang="en-US" sz="1000" dirty="0">
                 <a:solidFill>
                   <a:srgbClr val="CCCCCC"/>
                 </a:solidFill>
@@ -13419,6 +13259,10 @@
             <a:prstDash val="solid"/>
           </a:ln>
         </p:spPr>
+        <p:txBody>
+          <a:bodyPr/>
+          <a:p/>
+        </p:txBody>
       </p:sp>
       <p:sp>
         <p:nvSpPr>
@@ -13445,7 +13289,7 @@
               <a:buNone/>
             </a:pPr>
             <a:r>
-              <a:rPr lang="en-US" sz="900" dirty="0">
+              <a:rPr lang="en-US" sz="1000" dirty="0">
                 <a:solidFill>
                   <a:srgbClr val="CCCCCC"/>
                 </a:solidFill>
@@ -13459,7 +13303,7 @@
               <a:buNone/>
             </a:pPr>
             <a:r>
-              <a:rPr lang="en-US" sz="900" dirty="0">
+              <a:rPr lang="en-US" sz="1000" dirty="0">
                 <a:solidFill>
                   <a:srgbClr val="CCCCCC"/>
                 </a:solidFill>
@@ -13494,6 +13338,10 @@
             <a:prstDash val="solid"/>
           </a:ln>
         </p:spPr>
+        <p:txBody>
+          <a:bodyPr/>
+          <a:p/>
+        </p:txBody>
       </p:sp>
       <p:sp>
         <p:nvSpPr>
@@ -13520,7 +13368,7 @@
               <a:buNone/>
             </a:pPr>
             <a:r>
-              <a:rPr lang="en-US" sz="900" dirty="0">
+              <a:rPr lang="en-US" sz="1000" dirty="0">
                 <a:solidFill>
                   <a:srgbClr val="F26A21"/>
                 </a:solidFill>
@@ -13534,7 +13382,7 @@
               <a:buNone/>
             </a:pPr>
             <a:r>
-              <a:rPr lang="en-US" sz="900" dirty="0">
+              <a:rPr lang="en-US" sz="1000" dirty="0">
                 <a:solidFill>
                   <a:srgbClr val="F26A21"/>
                 </a:solidFill>
@@ -13548,7 +13396,7 @@
               <a:buNone/>
             </a:pPr>
             <a:r>
-              <a:rPr lang="en-US" sz="900" dirty="0">
+              <a:rPr lang="en-US" sz="1000" dirty="0">
                 <a:solidFill>
                   <a:srgbClr val="F26A21"/>
                 </a:solidFill>
@@ -13583,6 +13431,10 @@
             <a:prstDash val="solid"/>
           </a:ln>
         </p:spPr>
+        <p:txBody>
+          <a:bodyPr/>
+          <a:p/>
+        </p:txBody>
       </p:sp>
       <p:sp>
         <p:nvSpPr>
@@ -13609,7 +13461,7 @@
               <a:buNone/>
             </a:pPr>
             <a:r>
-              <a:rPr lang="en-US" sz="900" dirty="0">
+              <a:rPr lang="en-US" sz="1000" dirty="0">
                 <a:solidFill>
                   <a:srgbClr val="F26A21"/>
                 </a:solidFill>
@@ -13623,7 +13475,7 @@
               <a:buNone/>
             </a:pPr>
             <a:r>
-              <a:rPr lang="en-US" sz="900" dirty="0">
+              <a:rPr lang="en-US" sz="1000" dirty="0">
                 <a:solidFill>
                   <a:srgbClr val="F26A21"/>
                 </a:solidFill>
@@ -13637,7 +13489,7 @@
               <a:buNone/>
             </a:pPr>
             <a:r>
-              <a:rPr lang="en-US" sz="900" dirty="0">
+              <a:rPr lang="en-US" sz="1000" dirty="0">
                 <a:solidFill>
                   <a:srgbClr val="F26A21"/>
                 </a:solidFill>
@@ -13672,6 +13524,10 @@
             <a:prstDash val="solid"/>
           </a:ln>
         </p:spPr>
+        <p:txBody>
+          <a:bodyPr/>
+          <a:p/>
+        </p:txBody>
       </p:sp>
       <p:sp>
         <p:nvSpPr>
@@ -13698,7 +13554,7 @@
               <a:buNone/>
             </a:pPr>
             <a:r>
-              <a:rPr lang="en-US" sz="900" dirty="0">
+              <a:rPr lang="en-US" sz="1000" dirty="0">
                 <a:solidFill>
                   <a:srgbClr val="F26A21"/>
                 </a:solidFill>
@@ -13712,7 +13568,7 @@
               <a:buNone/>
             </a:pPr>
             <a:r>
-              <a:rPr lang="en-US" sz="900" dirty="0">
+              <a:rPr lang="en-US" sz="1000" dirty="0">
                 <a:solidFill>
                   <a:srgbClr val="F26A21"/>
                 </a:solidFill>
@@ -13726,7 +13582,7 @@
               <a:buNone/>
             </a:pPr>
             <a:r>
-              <a:rPr lang="en-US" sz="900" dirty="0">
+              <a:rPr lang="en-US" sz="1000" dirty="0">
                 <a:solidFill>
                   <a:srgbClr val="F26A21"/>
                 </a:solidFill>
@@ -13761,6 +13617,10 @@
             <a:prstDash val="solid"/>
           </a:ln>
         </p:spPr>
+        <p:txBody>
+          <a:bodyPr/>
+          <a:p/>
+        </p:txBody>
       </p:sp>
       <p:sp>
         <p:nvSpPr>
@@ -13787,7 +13647,7 @@
               <a:buNone/>
             </a:pPr>
             <a:r>
-              <a:rPr lang="en-US" sz="900" dirty="0">
+              <a:rPr lang="en-US" sz="1000" dirty="0">
                 <a:solidFill>
                   <a:srgbClr val="F26A21"/>
                 </a:solidFill>
@@ -13801,7 +13661,7 @@
               <a:buNone/>
             </a:pPr>
             <a:r>
-              <a:rPr lang="en-US" sz="900" dirty="0">
+              <a:rPr lang="en-US" sz="1000" dirty="0">
                 <a:solidFill>
                   <a:srgbClr val="F26A21"/>
                 </a:solidFill>
@@ -13836,6 +13696,10 @@
             <a:prstDash val="solid"/>
           </a:ln>
         </p:spPr>
+        <p:txBody>
+          <a:bodyPr/>
+          <a:p/>
+        </p:txBody>
       </p:sp>
       <p:sp>
         <p:nvSpPr>
@@ -13862,7 +13726,7 @@
               <a:buNone/>
             </a:pPr>
             <a:r>
-              <a:rPr lang="en-US" sz="900" dirty="0">
+              <a:rPr lang="en-US" sz="1000" dirty="0">
                 <a:solidFill>
                   <a:srgbClr val="CCCCCC"/>
                 </a:solidFill>
@@ -13897,6 +13761,10 @@
             <a:prstDash val="solid"/>
           </a:ln>
         </p:spPr>
+        <p:txBody>
+          <a:bodyPr/>
+          <a:p/>
+        </p:txBody>
       </p:sp>
       <p:sp>
         <p:nvSpPr>
@@ -13923,7 +13791,7 @@
               <a:buNone/>
             </a:pPr>
             <a:r>
-              <a:rPr lang="en-US" sz="900" dirty="0">
+              <a:rPr lang="en-US" sz="1000" dirty="0">
                 <a:solidFill>
                   <a:srgbClr val="CCCCCC"/>
                 </a:solidFill>
@@ -13958,6 +13826,10 @@
             <a:prstDash val="solid"/>
           </a:ln>
         </p:spPr>
+        <p:txBody>
+          <a:bodyPr/>
+          <a:p/>
+        </p:txBody>
       </p:sp>
       <p:sp>
         <p:nvSpPr>
@@ -14019,6 +13891,10 @@
             <a:prstDash val="solid"/>
           </a:ln>
         </p:spPr>
+        <p:txBody>
+          <a:bodyPr/>
+          <a:p/>
+        </p:txBody>
       </p:sp>
       <p:sp>
         <p:nvSpPr>
@@ -14080,6 +13956,10 @@
             <a:prstDash val="solid"/>
           </a:ln>
         </p:spPr>
+        <p:txBody>
+          <a:bodyPr/>
+          <a:p/>
+        </p:txBody>
       </p:sp>
       <p:sp>
         <p:nvSpPr>
@@ -14141,6 +14021,10 @@
             <a:prstDash val="solid"/>
           </a:ln>
         </p:spPr>
+        <p:txBody>
+          <a:bodyPr/>
+          <a:p/>
+        </p:txBody>
       </p:sp>
       <p:sp>
         <p:nvSpPr>
@@ -14202,6 +14086,10 @@
             <a:prstDash val="solid"/>
           </a:ln>
         </p:spPr>
+        <p:txBody>
+          <a:bodyPr/>
+          <a:p/>
+        </p:txBody>
       </p:sp>
       <p:sp>
         <p:nvSpPr>
@@ -14228,7 +14116,7 @@
               <a:buNone/>
             </a:pPr>
             <a:r>
-              <a:rPr lang="en-US" sz="900" dirty="0">
+              <a:rPr lang="en-US" sz="1000" dirty="0">
                 <a:solidFill>
                   <a:srgbClr val="CCCCCC"/>
                 </a:solidFill>
@@ -14263,6 +14151,10 @@
             <a:prstDash val="solid"/>
           </a:ln>
         </p:spPr>
+        <p:txBody>
+          <a:bodyPr/>
+          <a:p/>
+        </p:txBody>
       </p:sp>
       <p:sp>
         <p:nvSpPr>
@@ -14289,7 +14181,7 @@
               <a:buNone/>
             </a:pPr>
             <a:r>
-              <a:rPr lang="en-US" sz="900" dirty="0">
+              <a:rPr lang="en-US" sz="1000" dirty="0">
                 <a:solidFill>
                   <a:srgbClr val="CCCCCC"/>
                 </a:solidFill>
@@ -14324,6 +14216,10 @@
             <a:prstDash val="solid"/>
           </a:ln>
         </p:spPr>
+        <p:txBody>
+          <a:bodyPr/>
+          <a:p/>
+        </p:txBody>
       </p:sp>
       <p:sp>
         <p:nvSpPr>
@@ -14385,6 +14281,10 @@
             <a:prstDash val="solid"/>
           </a:ln>
         </p:spPr>
+        <p:txBody>
+          <a:bodyPr/>
+          <a:p/>
+        </p:txBody>
       </p:sp>
       <p:sp>
         <p:nvSpPr>
@@ -14446,6 +14346,10 @@
             <a:prstDash val="solid"/>
           </a:ln>
         </p:spPr>
+        <p:txBody>
+          <a:bodyPr/>
+          <a:p/>
+        </p:txBody>
       </p:sp>
       <p:sp>
         <p:nvSpPr>
@@ -14507,6 +14411,10 @@
             <a:prstDash val="solid"/>
           </a:ln>
         </p:spPr>
+        <p:txBody>
+          <a:bodyPr/>
+          <a:p/>
+        </p:txBody>
       </p:sp>
       <p:sp>
         <p:nvSpPr>
@@ -14568,6 +14476,10 @@
             <a:prstDash val="solid"/>
           </a:ln>
         </p:spPr>
+        <p:txBody>
+          <a:bodyPr/>
+          <a:p/>
+        </p:txBody>
       </p:sp>
       <p:sp>
         <p:nvSpPr>
@@ -14594,7 +14506,7 @@
               <a:buNone/>
             </a:pPr>
             <a:r>
-              <a:rPr lang="en-US" sz="900" dirty="0">
+              <a:rPr lang="en-US" sz="1000" dirty="0">
                 <a:solidFill>
                   <a:srgbClr val="CCCCCC"/>
                 </a:solidFill>
@@ -14629,6 +14541,10 @@
             <a:prstDash val="solid"/>
           </a:ln>
         </p:spPr>
+        <p:txBody>
+          <a:bodyPr/>
+          <a:p/>
+        </p:txBody>
       </p:sp>
       <p:sp>
         <p:nvSpPr>
@@ -14655,7 +14571,7 @@
               <a:buNone/>
             </a:pPr>
             <a:r>
-              <a:rPr lang="en-US" sz="900" dirty="0">
+              <a:rPr lang="en-US" sz="1000" dirty="0">
                 <a:solidFill>
                   <a:srgbClr val="CCCCCC"/>
                 </a:solidFill>
@@ -14690,6 +14606,10 @@
             <a:prstDash val="solid"/>
           </a:ln>
         </p:spPr>
+        <p:txBody>
+          <a:bodyPr/>
+          <a:p/>
+        </p:txBody>
       </p:sp>
       <p:sp>
         <p:nvSpPr>
@@ -14751,6 +14671,10 @@
             <a:prstDash val="solid"/>
           </a:ln>
         </p:spPr>
+        <p:txBody>
+          <a:bodyPr/>
+          <a:p/>
+        </p:txBody>
       </p:sp>
       <p:sp>
         <p:nvSpPr>
@@ -14812,6 +14736,10 @@
             <a:prstDash val="solid"/>
           </a:ln>
         </p:spPr>
+        <p:txBody>
+          <a:bodyPr/>
+          <a:p/>
+        </p:txBody>
       </p:sp>
       <p:sp>
         <p:nvSpPr>
@@ -14873,6 +14801,10 @@
             <a:prstDash val="solid"/>
           </a:ln>
         </p:spPr>
+        <p:txBody>
+          <a:bodyPr/>
+          <a:p/>
+        </p:txBody>
       </p:sp>
       <p:sp>
         <p:nvSpPr>
@@ -14934,6 +14866,10 @@
             <a:prstDash val="solid"/>
           </a:ln>
         </p:spPr>
+        <p:txBody>
+          <a:bodyPr/>
+          <a:p/>
+        </p:txBody>
       </p:sp>
       <p:sp>
         <p:nvSpPr>
@@ -14960,7 +14896,7 @@
               <a:buNone/>
             </a:pPr>
             <a:r>
-              <a:rPr lang="en-US" sz="900" dirty="0">
+              <a:rPr lang="en-US" sz="1000" dirty="0">
                 <a:solidFill>
                   <a:srgbClr val="CCCCCC"/>
                 </a:solidFill>
@@ -14995,6 +14931,10 @@
             <a:prstDash val="solid"/>
           </a:ln>
         </p:spPr>
+        <p:txBody>
+          <a:bodyPr/>
+          <a:p/>
+        </p:txBody>
       </p:sp>
       <p:sp>
         <p:nvSpPr>
@@ -15021,7 +14961,7 @@
               <a:buNone/>
             </a:pPr>
             <a:r>
-              <a:rPr lang="en-US" sz="900" dirty="0">
+              <a:rPr lang="en-US" sz="1000" dirty="0">
                 <a:solidFill>
                   <a:srgbClr val="CCCCCC"/>
                 </a:solidFill>
@@ -15056,6 +14996,10 @@
             <a:prstDash val="solid"/>
           </a:ln>
         </p:spPr>
+        <p:txBody>
+          <a:bodyPr/>
+          <a:p/>
+        </p:txBody>
       </p:sp>
       <p:sp>
         <p:nvSpPr>
@@ -15117,6 +15061,10 @@
             <a:prstDash val="solid"/>
           </a:ln>
         </p:spPr>
+        <p:txBody>
+          <a:bodyPr/>
+          <a:p/>
+        </p:txBody>
       </p:sp>
       <p:sp>
         <p:nvSpPr>
@@ -15178,6 +15126,10 @@
             <a:prstDash val="solid"/>
           </a:ln>
         </p:spPr>
+        <p:txBody>
+          <a:bodyPr/>
+          <a:p/>
+        </p:txBody>
       </p:sp>
       <p:sp>
         <p:nvSpPr>
@@ -15239,6 +15191,10 @@
             <a:prstDash val="solid"/>
           </a:ln>
         </p:spPr>
+        <p:txBody>
+          <a:bodyPr/>
+          <a:p/>
+        </p:txBody>
       </p:sp>
       <p:sp>
         <p:nvSpPr>
@@ -15300,6 +15256,10 @@
             <a:prstDash val="solid"/>
           </a:ln>
         </p:spPr>
+        <p:txBody>
+          <a:bodyPr/>
+          <a:p/>
+        </p:txBody>
       </p:sp>
       <p:sp>
         <p:nvSpPr>
@@ -15326,7 +15286,7 @@
               <a:buNone/>
             </a:pPr>
             <a:r>
-              <a:rPr lang="en-US" sz="900" dirty="0">
+              <a:rPr lang="en-US" sz="1000" dirty="0">
                 <a:solidFill>
                   <a:srgbClr val="CCCCCC"/>
                 </a:solidFill>
@@ -15340,7 +15300,7 @@
               <a:buNone/>
             </a:pPr>
             <a:r>
-              <a:rPr lang="en-US" sz="900" dirty="0">
+              <a:rPr lang="en-US" sz="1000" dirty="0">
                 <a:solidFill>
                   <a:srgbClr val="CCCCCC"/>
                 </a:solidFill>
@@ -15375,6 +15335,10 @@
             <a:prstDash val="solid"/>
           </a:ln>
         </p:spPr>
+        <p:txBody>
+          <a:bodyPr/>
+          <a:p/>
+        </p:txBody>
       </p:sp>
       <p:sp>
         <p:nvSpPr>
@@ -15401,7 +15365,7 @@
               <a:buNone/>
             </a:pPr>
             <a:r>
-              <a:rPr lang="en-US" sz="900" dirty="0">
+              <a:rPr lang="en-US" sz="1000" dirty="0">
                 <a:solidFill>
                   <a:srgbClr val="CCCCCC"/>
                 </a:solidFill>
@@ -15415,7 +15379,7 @@
               <a:buNone/>
             </a:pPr>
             <a:r>
-              <a:rPr lang="en-US" sz="900" dirty="0">
+              <a:rPr lang="en-US" sz="1000" dirty="0">
                 <a:solidFill>
                   <a:srgbClr val="CCCCCC"/>
                 </a:solidFill>
@@ -15450,6 +15414,10 @@
             <a:prstDash val="solid"/>
           </a:ln>
         </p:spPr>
+        <p:txBody>
+          <a:bodyPr/>
+          <a:p/>
+        </p:txBody>
       </p:sp>
       <p:sp>
         <p:nvSpPr>
@@ -15511,6 +15479,10 @@
             <a:prstDash val="solid"/>
           </a:ln>
         </p:spPr>
+        <p:txBody>
+          <a:bodyPr/>
+          <a:p/>
+        </p:txBody>
       </p:sp>
       <p:sp>
         <p:nvSpPr>
@@ -15572,6 +15544,10 @@
             <a:prstDash val="solid"/>
           </a:ln>
         </p:spPr>
+        <p:txBody>
+          <a:bodyPr/>
+          <a:p/>
+        </p:txBody>
       </p:sp>
       <p:sp>
         <p:nvSpPr>
@@ -15633,6 +15609,10 @@
             <a:prstDash val="solid"/>
           </a:ln>
         </p:spPr>
+        <p:txBody>
+          <a:bodyPr/>
+          <a:p/>
+        </p:txBody>
       </p:sp>
       <p:sp>
         <p:nvSpPr>
@@ -15694,6 +15674,10 @@
             <a:prstDash val="solid"/>
           </a:ln>
         </p:spPr>
+        <p:txBody>
+          <a:bodyPr/>
+          <a:p/>
+        </p:txBody>
       </p:sp>
       <p:sp>
         <p:nvSpPr>
@@ -15720,7 +15704,7 @@
               <a:buNone/>
             </a:pPr>
             <a:r>
-              <a:rPr lang="en-US" sz="900" dirty="0">
+              <a:rPr lang="en-US" sz="1000" dirty="0">
                 <a:solidFill>
                   <a:srgbClr val="CCCCCC"/>
                 </a:solidFill>
@@ -15734,7 +15718,7 @@
               <a:buNone/>
             </a:pPr>
             <a:r>
-              <a:rPr lang="en-US" sz="900" dirty="0">
+              <a:rPr lang="en-US" sz="1000" dirty="0">
                 <a:solidFill>
                   <a:srgbClr val="CCCCCC"/>
                 </a:solidFill>
@@ -15769,6 +15753,10 @@
             <a:prstDash val="solid"/>
           </a:ln>
         </p:spPr>
+        <p:txBody>
+          <a:bodyPr/>
+          <a:p/>
+        </p:txBody>
       </p:sp>
       <p:sp>
         <p:nvSpPr>
@@ -15795,7 +15783,7 @@
               <a:buNone/>
             </a:pPr>
             <a:r>
-              <a:rPr lang="en-US" sz="900" dirty="0">
+              <a:rPr lang="en-US" sz="1000" dirty="0">
                 <a:solidFill>
                   <a:srgbClr val="CCCCCC"/>
                 </a:solidFill>
@@ -15830,6 +15818,10 @@
             <a:prstDash val="solid"/>
           </a:ln>
         </p:spPr>
+        <p:txBody>
+          <a:bodyPr/>
+          <a:p/>
+        </p:txBody>
       </p:sp>
       <p:sp>
         <p:nvSpPr>
@@ -15905,6 +15897,10 @@
             <a:prstDash val="solid"/>
           </a:ln>
         </p:spPr>
+        <p:txBody>
+          <a:bodyPr/>
+          <a:p/>
+        </p:txBody>
       </p:sp>
       <p:sp>
         <p:nvSpPr>
@@ -15980,6 +15976,10 @@
             <a:prstDash val="solid"/>
           </a:ln>
         </p:spPr>
+        <p:txBody>
+          <a:bodyPr/>
+          <a:p/>
+        </p:txBody>
       </p:sp>
       <p:sp>
         <p:nvSpPr>
@@ -16055,6 +16055,10 @@
             <a:prstDash val="solid"/>
           </a:ln>
         </p:spPr>
+        <p:txBody>
+          <a:bodyPr/>
+          <a:p/>
+        </p:txBody>
       </p:sp>
       <p:sp>
         <p:nvSpPr>
@@ -16130,6 +16134,10 @@
             <a:prstDash val="solid"/>
           </a:ln>
         </p:spPr>
+        <p:txBody>
+          <a:bodyPr/>
+          <a:p/>
+        </p:txBody>
       </p:sp>
       <p:sp>
         <p:nvSpPr>
@@ -16156,7 +16164,7 @@
               <a:buNone/>
             </a:pPr>
             <a:r>
-              <a:rPr lang="en-US" sz="900" b="1" dirty="0">
+              <a:rPr lang="en-US" sz="1000" b="1" dirty="0">
                 <a:solidFill>
                   <a:srgbClr val="CCCCCC"/>
                 </a:solidFill>
@@ -16191,6 +16199,10 @@
             <a:prstDash val="solid"/>
           </a:ln>
         </p:spPr>
+        <p:txBody>
+          <a:bodyPr/>
+          <a:p/>
+        </p:txBody>
       </p:sp>
       <p:sp>
         <p:nvSpPr>
@@ -16244,6 +16256,10 @@
             <a:prstDash val="solid"/>
           </a:ln>
         </p:spPr>
+        <p:txBody>
+          <a:bodyPr/>
+          <a:p/>
+        </p:txBody>
       </p:sp>
       <p:sp>
         <p:nvSpPr>
@@ -16305,6 +16321,10 @@
             <a:prstDash val="solid"/>
           </a:ln>
         </p:spPr>
+        <p:txBody>
+          <a:bodyPr/>
+          <a:p/>
+        </p:txBody>
       </p:sp>
       <p:sp>
         <p:nvSpPr>
@@ -16366,6 +16386,10 @@
             <a:prstDash val="solid"/>
           </a:ln>
         </p:spPr>
+        <p:txBody>
+          <a:bodyPr/>
+          <a:p/>
+        </p:txBody>
       </p:sp>
       <p:sp>
         <p:nvSpPr>
@@ -16427,6 +16451,10 @@
             <a:prstDash val="solid"/>
           </a:ln>
         </p:spPr>
+        <p:txBody>
+          <a:bodyPr/>
+          <a:p/>
+        </p:txBody>
       </p:sp>
       <p:sp>
         <p:nvSpPr>
@@ -16513,7 +16541,7 @@
               <a:buNone/>
             </a:pPr>
             <a:r>
-              <a:rPr lang="en-US" sz="700" i="1" dirty="0">
+              <a:rPr lang="en-US" sz="1000" i="1" dirty="0">
                 <a:solidFill>
                   <a:srgbClr val="888888"/>
                 </a:solidFill>
@@ -16549,7 +16577,7 @@
               <a:buNone/>
             </a:pPr>
             <a:r>
-              <a:rPr lang="en-US" sz="700" i="1" dirty="0">
+              <a:rPr lang="en-US" sz="1000" i="1" dirty="0">
                 <a:solidFill>
                   <a:srgbClr val="888888"/>
                 </a:solidFill>
@@ -16841,7 +16869,7 @@
               <a:buNone/>
             </a:pPr>
             <a:r>
-              <a:rPr lang="en-US" sz="900" dirty="0">
+              <a:rPr lang="en-US" sz="1000" dirty="0">
                 <a:solidFill>
                   <a:srgbClr val="888888"/>
                 </a:solidFill>
@@ -17002,7 +17030,7 @@
               <a:buNone/>
             </a:pPr>
             <a:r>
-              <a:rPr lang="en-US" sz="900" dirty="0">
+              <a:rPr lang="en-US" sz="1000" dirty="0">
                 <a:solidFill>
                   <a:srgbClr val="888888"/>
                 </a:solidFill>
@@ -17163,7 +17191,7 @@
               <a:buNone/>
             </a:pPr>
             <a:r>
-              <a:rPr lang="en-US" sz="900" dirty="0">
+              <a:rPr lang="en-US" sz="1000" dirty="0">
                 <a:solidFill>
                   <a:srgbClr val="888888"/>
                 </a:solidFill>
@@ -17387,7 +17415,7 @@
               <a:buNone/>
             </a:pPr>
             <a:r>
-              <a:rPr lang="en-US" sz="900" dirty="0">
+              <a:rPr lang="en-US" sz="1000" dirty="0">
                 <a:solidFill>
                   <a:srgbClr val="888888"/>
                 </a:solidFill>
@@ -17548,7 +17576,7 @@
               <a:buNone/>
             </a:pPr>
             <a:r>
-              <a:rPr lang="en-US" sz="900" dirty="0">
+              <a:rPr lang="en-US" sz="1000" dirty="0">
                 <a:solidFill>
                   <a:srgbClr val="888888"/>
                 </a:solidFill>
@@ -17709,7 +17737,7 @@
               <a:buNone/>
             </a:pPr>
             <a:r>
-              <a:rPr lang="en-US" sz="900" dirty="0">
+              <a:rPr lang="en-US" sz="1000" dirty="0">
                 <a:solidFill>
                   <a:srgbClr val="888888"/>
                 </a:solidFill>
@@ -17720,30 +17748,6 @@
           </a:p>
         </p:txBody>
       </p:sp>
-      <p:pic>
-        <p:nvPicPr>
-          <p:cNvPr id="37" name="Image 0" descr="/Users/exomac/.openclaw/workspace/drafts/SSLC_OptionB_Total_Compensation_5yr_2026-10-07.png">    </p:cNvPr>
-          <p:cNvPicPr>
-            <a:picLocks noChangeAspect="1"/>
-          </p:cNvPicPr>
-          <p:nvPr/>
-        </p:nvPicPr>
-        <p:blipFill>
-          <a:blip r:embed="rId1"/>
-          <a:stretch>
-            <a:fillRect/>
-          </a:stretch>
-        </p:blipFill>
-        <p:spPr>
-          <a:xfrm>
-            <a:off x="320040" y="2606040"/>
-            <a:ext cx="8503920" cy="2194560"/>
-          </a:xfrm>
-          <a:prstGeom prst="rect">
-            <a:avLst/>
-          </a:prstGeom>
-        </p:spPr>
-      </p:pic>
       <p:sp>
         <p:nvSpPr>
           <p:cNvPr id="38" name="Shape 35"/>
@@ -17793,12 +17797,12 @@
               <a:buNone/>
             </a:pPr>
             <a:r>
-              <a:rPr lang="en-US" sz="800" i="1" dirty="0">
+              <a:rPr lang="en-US" sz="1000" i="1" dirty="0">
                 <a:solidFill>
                   <a:srgbClr val="888888"/>
                 </a:solidFill>
               </a:rPr>
-              <a:t>④ is a forward-looking projection, not a guarantee; an alternative to ③ — not added to it. RTO may not close.</a:t>
+              <a:t>④ is a forward-looking projection, not a guarantee; an alternative to ③, not additive.</a:t>
             </a:r>
             <a:endParaRPr lang="en-US" sz="800" dirty="0"/>
           </a:p>
@@ -17853,7 +17857,7 @@
               <a:buNone/>
             </a:pPr>
             <a:r>
-              <a:rPr lang="en-US" sz="700" i="1" dirty="0">
+              <a:rPr lang="en-US" sz="1000" i="1" dirty="0">
                 <a:solidFill>
                   <a:srgbClr val="888888"/>
                 </a:solidFill>
@@ -17889,7 +17893,7 @@
               <a:buNone/>
             </a:pPr>
             <a:r>
-              <a:rPr lang="en-US" sz="700" i="1" dirty="0">
+              <a:rPr lang="en-US" sz="1000" i="1" dirty="0">
                 <a:solidFill>
                   <a:srgbClr val="888888"/>
                 </a:solidFill>
@@ -17897,6 +17901,660 @@
               <a:t>CONFIDENTIAL</a:t>
             </a:r>
             <a:endParaRPr lang="en-US" sz="700" dirty="0"/>
+          </a:p>
+        </p:txBody>
+      </p:sp>
+      <p:sp>
+        <p:nvSpPr>
+          <p:cNvPr id="43" name="Rectangle 42"/>
+          <p:cNvSpPr/>
+          <p:nvPr/>
+        </p:nvSpPr>
+        <p:spPr>
+          <a:xfrm>
+            <a:off x="365760" y="2743200"/>
+            <a:ext cx="8412480" cy="13716"/>
+          </a:xfrm>
+          <a:prstGeom prst="rect">
+            <a:avLst/>
+          </a:prstGeom>
+          <a:solidFill>
+            <a:srgbClr val="F26A21"/>
+          </a:solidFill>
+          <a:ln>
+            <a:noFill/>
+          </a:ln>
+        </p:spPr>
+        <p:style>
+          <a:lnRef idx="1">
+            <a:schemeClr val="accent1"/>
+          </a:lnRef>
+          <a:fillRef idx="3">
+            <a:schemeClr val="accent1"/>
+          </a:fillRef>
+          <a:effectRef idx="2">
+            <a:schemeClr val="accent1"/>
+          </a:effectRef>
+          <a:fontRef idx="minor">
+            <a:schemeClr val="lt1"/>
+          </a:fontRef>
+        </p:style>
+        <p:txBody>
+          <a:bodyPr rtlCol="0" anchor="ctr"/>
+          <a:lstStyle/>
+          <a:p>
+            <a:pPr algn="ctr"/>
+          </a:p>
+        </p:txBody>
+      </p:sp>
+      <p:sp>
+        <p:nvSpPr>
+          <p:cNvPr id="44" name="TextBox 43"/>
+          <p:cNvSpPr txBox="1"/>
+          <p:nvPr/>
+        </p:nvSpPr>
+        <p:spPr>
+          <a:xfrm>
+            <a:off x="365760" y="2761488"/>
+            <a:ext cx="5943600" cy="219456"/>
+          </a:xfrm>
+          <a:prstGeom prst="rect">
+            <a:avLst/>
+          </a:prstGeom>
+          <a:noFill/>
+        </p:spPr>
+        <p:txBody>
+          <a:bodyPr wrap="square">
+            <a:spAutoFit/>
+          </a:bodyPr>
+          <a:lstStyle/>
+          <a:p>
+            <a:pPr algn="l"/>
+            <a:r>
+              <a:rPr sz="1100" b="1" i="0">
+                <a:solidFill>
+                  <a:srgbClr val="F26A21"/>
+                </a:solidFill>
+                <a:latin typeface="Calibri"/>
+              </a:rPr>
+              <a:t>Offer Value as a Multiple of SSLC Revenue</a:t>
+            </a:r>
+          </a:p>
+        </p:txBody>
+      </p:sp>
+      <p:sp>
+        <p:nvSpPr>
+          <p:cNvPr id="45" name="TextBox 44"/>
+          <p:cNvSpPr txBox="1"/>
+          <p:nvPr/>
+        </p:nvSpPr>
+        <p:spPr>
+          <a:xfrm>
+            <a:off x="6217920" y="2761488"/>
+            <a:ext cx="2743200" cy="219456"/>
+          </a:xfrm>
+          <a:prstGeom prst="rect">
+            <a:avLst/>
+          </a:prstGeom>
+          <a:noFill/>
+        </p:spPr>
+        <p:txBody>
+          <a:bodyPr wrap="square">
+            <a:spAutoFit/>
+          </a:bodyPr>
+          <a:lstStyle/>
+          <a:p>
+            <a:pPr algn="r"/>
+            <a:r>
+              <a:rPr sz="1000" b="0" i="0">
+                <a:solidFill>
+                  <a:srgbClr val="888888"/>
+                </a:solidFill>
+                <a:latin typeface="Calibri"/>
+              </a:rPr>
+              <a:t>FY26 actual: $1.925M  |  FY27 target: $5.1M</a:t>
+            </a:r>
+          </a:p>
+        </p:txBody>
+      </p:sp>
+      <p:sp>
+        <p:nvSpPr>
+          <p:cNvPr id="46" name="TextBox 45"/>
+          <p:cNvSpPr txBox="1"/>
+          <p:nvPr/>
+        </p:nvSpPr>
+        <p:spPr>
+          <a:xfrm>
+            <a:off x="365760" y="2999232"/>
+            <a:ext cx="3474720" cy="201168"/>
+          </a:xfrm>
+          <a:prstGeom prst="rect">
+            <a:avLst/>
+          </a:prstGeom>
+          <a:noFill/>
+        </p:spPr>
+        <p:txBody>
+          <a:bodyPr wrap="square">
+            <a:spAutoFit/>
+          </a:bodyPr>
+          <a:lstStyle/>
+          <a:p>
+            <a:pPr algn="l"/>
+            <a:r>
+              <a:rPr sz="1000" b="0" i="0">
+                <a:solidFill>
+                  <a:srgbClr val="FFFFFF"/>
+                </a:solidFill>
+                <a:latin typeface="Calibri"/>
+              </a:rPr>
+              <a:t/>
+            </a:r>
+          </a:p>
+        </p:txBody>
+      </p:sp>
+      <p:sp>
+        <p:nvSpPr>
+          <p:cNvPr id="47" name="TextBox 46"/>
+          <p:cNvSpPr txBox="1"/>
+          <p:nvPr/>
+        </p:nvSpPr>
+        <p:spPr>
+          <a:xfrm>
+            <a:off x="3931920" y="2999232"/>
+            <a:ext cx="2194560" cy="201168"/>
+          </a:xfrm>
+          <a:prstGeom prst="rect">
+            <a:avLst/>
+          </a:prstGeom>
+          <a:noFill/>
+        </p:spPr>
+        <p:txBody>
+          <a:bodyPr wrap="square">
+            <a:spAutoFit/>
+          </a:bodyPr>
+          <a:lstStyle/>
+          <a:p>
+            <a:pPr algn="ctr"/>
+            <a:r>
+              <a:rPr sz="1000" b="0" i="0">
+                <a:solidFill>
+                  <a:srgbClr val="CCCCCC"/>
+                </a:solidFill>
+                <a:latin typeface="Calibri"/>
+              </a:rPr>
+              <a:t>vs. FY26 actual ($1.925M)</a:t>
+            </a:r>
+          </a:p>
+        </p:txBody>
+      </p:sp>
+      <p:sp>
+        <p:nvSpPr>
+          <p:cNvPr id="48" name="TextBox 47"/>
+          <p:cNvSpPr txBox="1"/>
+          <p:nvPr/>
+        </p:nvSpPr>
+        <p:spPr>
+          <a:xfrm>
+            <a:off x="6217920" y="2999232"/>
+            <a:ext cx="2194560" cy="201168"/>
+          </a:xfrm>
+          <a:prstGeom prst="rect">
+            <a:avLst/>
+          </a:prstGeom>
+          <a:noFill/>
+        </p:spPr>
+        <p:txBody>
+          <a:bodyPr wrap="square">
+            <a:spAutoFit/>
+          </a:bodyPr>
+          <a:lstStyle/>
+          <a:p>
+            <a:pPr algn="ctr"/>
+            <a:r>
+              <a:rPr sz="1000" b="0" i="0">
+                <a:solidFill>
+                  <a:srgbClr val="CCCCCC"/>
+                </a:solidFill>
+                <a:latin typeface="Calibri"/>
+              </a:rPr>
+              <a:t>vs. FY27 target ($5.1M)</a:t>
+            </a:r>
+          </a:p>
+        </p:txBody>
+      </p:sp>
+      <p:sp>
+        <p:nvSpPr>
+          <p:cNvPr id="49" name="Rectangle 48"/>
+          <p:cNvSpPr/>
+          <p:nvPr/>
+        </p:nvSpPr>
+        <p:spPr>
+          <a:xfrm>
+            <a:off x="365760" y="3182112"/>
+            <a:ext cx="8412480" cy="7315"/>
+          </a:xfrm>
+          <a:prstGeom prst="rect">
+            <a:avLst/>
+          </a:prstGeom>
+          <a:solidFill>
+            <a:srgbClr val="444444"/>
+          </a:solidFill>
+          <a:ln>
+            <a:noFill/>
+          </a:ln>
+        </p:spPr>
+        <p:style>
+          <a:lnRef idx="1">
+            <a:schemeClr val="accent1"/>
+          </a:lnRef>
+          <a:fillRef idx="3">
+            <a:schemeClr val="accent1"/>
+          </a:fillRef>
+          <a:effectRef idx="2">
+            <a:schemeClr val="accent1"/>
+          </a:effectRef>
+          <a:fontRef idx="minor">
+            <a:schemeClr val="lt1"/>
+          </a:fontRef>
+        </p:style>
+        <p:txBody>
+          <a:bodyPr rtlCol="0" anchor="ctr"/>
+          <a:lstStyle/>
+          <a:p>
+            <a:pPr algn="ctr"/>
+          </a:p>
+        </p:txBody>
+      </p:sp>
+      <p:sp>
+        <p:nvSpPr>
+          <p:cNvPr id="50" name="TextBox 49"/>
+          <p:cNvSpPr txBox="1"/>
+          <p:nvPr/>
+        </p:nvSpPr>
+        <p:spPr>
+          <a:xfrm>
+            <a:off x="365760" y="3200400"/>
+            <a:ext cx="3474720" cy="201168"/>
+          </a:xfrm>
+          <a:prstGeom prst="rect">
+            <a:avLst/>
+          </a:prstGeom>
+          <a:noFill/>
+        </p:spPr>
+        <p:txBody>
+          <a:bodyPr wrap="square">
+            <a:spAutoFit/>
+          </a:bodyPr>
+          <a:lstStyle/>
+          <a:p>
+            <a:pPr algn="l"/>
+            <a:r>
+              <a:rPr sz="1000" b="0" i="0">
+                <a:solidFill>
+                  <a:srgbClr val="FFFFFF"/>
+                </a:solidFill>
+                <a:latin typeface="Calibri"/>
+              </a:rPr>
+              <a:t>② At close: $4.86M</a:t>
+            </a:r>
+          </a:p>
+        </p:txBody>
+      </p:sp>
+      <p:sp>
+        <p:nvSpPr>
+          <p:cNvPr id="51" name="TextBox 50"/>
+          <p:cNvSpPr txBox="1"/>
+          <p:nvPr/>
+        </p:nvSpPr>
+        <p:spPr>
+          <a:xfrm>
+            <a:off x="3931920" y="3200400"/>
+            <a:ext cx="2194560" cy="201168"/>
+          </a:xfrm>
+          <a:prstGeom prst="rect">
+            <a:avLst/>
+          </a:prstGeom>
+          <a:noFill/>
+        </p:spPr>
+        <p:txBody>
+          <a:bodyPr wrap="square">
+            <a:spAutoFit/>
+          </a:bodyPr>
+          <a:lstStyle/>
+          <a:p>
+            <a:pPr algn="ctr"/>
+            <a:r>
+              <a:rPr sz="1000" b="1" i="0">
+                <a:solidFill>
+                  <a:srgbClr val="44BB44"/>
+                </a:solidFill>
+                <a:latin typeface="Calibri"/>
+              </a:rPr>
+              <a:t>~2.5×</a:t>
+            </a:r>
+          </a:p>
+        </p:txBody>
+      </p:sp>
+      <p:sp>
+        <p:nvSpPr>
+          <p:cNvPr id="52" name="TextBox 51"/>
+          <p:cNvSpPr txBox="1"/>
+          <p:nvPr/>
+        </p:nvSpPr>
+        <p:spPr>
+          <a:xfrm>
+            <a:off x="6217920" y="3200400"/>
+            <a:ext cx="2194560" cy="201168"/>
+          </a:xfrm>
+          <a:prstGeom prst="rect">
+            <a:avLst/>
+          </a:prstGeom>
+          <a:noFill/>
+        </p:spPr>
+        <p:txBody>
+          <a:bodyPr wrap="square">
+            <a:spAutoFit/>
+          </a:bodyPr>
+          <a:lstStyle/>
+          <a:p>
+            <a:pPr algn="ctr"/>
+            <a:r>
+              <a:rPr sz="1000" b="1" i="0">
+                <a:solidFill>
+                  <a:srgbClr val="44BB44"/>
+                </a:solidFill>
+                <a:latin typeface="Calibri"/>
+              </a:rPr>
+              <a:t>~0.95×</a:t>
+            </a:r>
+          </a:p>
+        </p:txBody>
+      </p:sp>
+      <p:sp>
+        <p:nvSpPr>
+          <p:cNvPr id="53" name="TextBox 52"/>
+          <p:cNvSpPr txBox="1"/>
+          <p:nvPr/>
+        </p:nvSpPr>
+        <p:spPr>
+          <a:xfrm>
+            <a:off x="365760" y="3415284"/>
+            <a:ext cx="3474720" cy="201168"/>
+          </a:xfrm>
+          <a:prstGeom prst="rect">
+            <a:avLst/>
+          </a:prstGeom>
+          <a:noFill/>
+        </p:spPr>
+        <p:txBody>
+          <a:bodyPr wrap="square">
+            <a:spAutoFit/>
+          </a:bodyPr>
+          <a:lstStyle/>
+          <a:p>
+            <a:pPr algn="l"/>
+            <a:r>
+              <a:rPr sz="1000" b="0" i="0">
+                <a:solidFill>
+                  <a:srgbClr val="FFFFFF"/>
+                </a:solidFill>
+                <a:latin typeface="Calibri"/>
+              </a:rPr>
+              <a:t>③ 5-year: $5.8M – $9.0M</a:t>
+            </a:r>
+          </a:p>
+        </p:txBody>
+      </p:sp>
+      <p:sp>
+        <p:nvSpPr>
+          <p:cNvPr id="54" name="TextBox 53"/>
+          <p:cNvSpPr txBox="1"/>
+          <p:nvPr/>
+        </p:nvSpPr>
+        <p:spPr>
+          <a:xfrm>
+            <a:off x="3931920" y="3415284"/>
+            <a:ext cx="2194560" cy="201168"/>
+          </a:xfrm>
+          <a:prstGeom prst="rect">
+            <a:avLst/>
+          </a:prstGeom>
+          <a:noFill/>
+        </p:spPr>
+        <p:txBody>
+          <a:bodyPr wrap="square">
+            <a:spAutoFit/>
+          </a:bodyPr>
+          <a:lstStyle/>
+          <a:p>
+            <a:pPr algn="ctr"/>
+            <a:r>
+              <a:rPr sz="1000" b="1" i="0">
+                <a:solidFill>
+                  <a:srgbClr val="44BB44"/>
+                </a:solidFill>
+                <a:latin typeface="Calibri"/>
+              </a:rPr>
+              <a:t>~3.0–4.7×</a:t>
+            </a:r>
+          </a:p>
+        </p:txBody>
+      </p:sp>
+      <p:sp>
+        <p:nvSpPr>
+          <p:cNvPr id="55" name="TextBox 54"/>
+          <p:cNvSpPr txBox="1"/>
+          <p:nvPr/>
+        </p:nvSpPr>
+        <p:spPr>
+          <a:xfrm>
+            <a:off x="6217920" y="3415284"/>
+            <a:ext cx="2194560" cy="201168"/>
+          </a:xfrm>
+          <a:prstGeom prst="rect">
+            <a:avLst/>
+          </a:prstGeom>
+          <a:noFill/>
+        </p:spPr>
+        <p:txBody>
+          <a:bodyPr wrap="square">
+            <a:spAutoFit/>
+          </a:bodyPr>
+          <a:lstStyle/>
+          <a:p>
+            <a:pPr algn="ctr"/>
+            <a:r>
+              <a:rPr sz="1000" b="1" i="0">
+                <a:solidFill>
+                  <a:srgbClr val="44BB44"/>
+                </a:solidFill>
+                <a:latin typeface="Calibri"/>
+              </a:rPr>
+              <a:t>~1.1–1.8×</a:t>
+            </a:r>
+          </a:p>
+        </p:txBody>
+      </p:sp>
+      <p:sp>
+        <p:nvSpPr>
+          <p:cNvPr id="56" name="TextBox 55"/>
+          <p:cNvSpPr txBox="1"/>
+          <p:nvPr/>
+        </p:nvSpPr>
+        <p:spPr>
+          <a:xfrm>
+            <a:off x="365760" y="3630168"/>
+            <a:ext cx="3474720" cy="201168"/>
+          </a:xfrm>
+          <a:prstGeom prst="rect">
+            <a:avLst/>
+          </a:prstGeom>
+          <a:noFill/>
+        </p:spPr>
+        <p:txBody>
+          <a:bodyPr wrap="square">
+            <a:spAutoFit/>
+          </a:bodyPr>
+          <a:lstStyle/>
+          <a:p>
+            <a:pPr algn="l"/>
+            <a:r>
+              <a:rPr sz="1000" b="0" i="0">
+                <a:solidFill>
+                  <a:srgbClr val="F26A21"/>
+                </a:solidFill>
+                <a:latin typeface="Calibri"/>
+              </a:rPr>
+              <a:t>④ Max $18.9M (held to 2031)</a:t>
+            </a:r>
+          </a:p>
+        </p:txBody>
+      </p:sp>
+      <p:sp>
+        <p:nvSpPr>
+          <p:cNvPr id="57" name="TextBox 56"/>
+          <p:cNvSpPr txBox="1"/>
+          <p:nvPr/>
+        </p:nvSpPr>
+        <p:spPr>
+          <a:xfrm>
+            <a:off x="3931920" y="3630168"/>
+            <a:ext cx="2194560" cy="201168"/>
+          </a:xfrm>
+          <a:prstGeom prst="rect">
+            <a:avLst/>
+          </a:prstGeom>
+          <a:noFill/>
+        </p:spPr>
+        <p:txBody>
+          <a:bodyPr wrap="square">
+            <a:spAutoFit/>
+          </a:bodyPr>
+          <a:lstStyle/>
+          <a:p>
+            <a:pPr algn="ctr"/>
+            <a:r>
+              <a:rPr sz="1000" b="1" i="0">
+                <a:solidFill>
+                  <a:srgbClr val="44BB44"/>
+                </a:solidFill>
+                <a:latin typeface="Calibri"/>
+              </a:rPr>
+              <a:t>~9.8×</a:t>
+            </a:r>
+          </a:p>
+        </p:txBody>
+      </p:sp>
+      <p:sp>
+        <p:nvSpPr>
+          <p:cNvPr id="58" name="TextBox 57"/>
+          <p:cNvSpPr txBox="1"/>
+          <p:nvPr/>
+        </p:nvSpPr>
+        <p:spPr>
+          <a:xfrm>
+            <a:off x="6217920" y="3630168"/>
+            <a:ext cx="2194560" cy="201168"/>
+          </a:xfrm>
+          <a:prstGeom prst="rect">
+            <a:avLst/>
+          </a:prstGeom>
+          <a:noFill/>
+        </p:spPr>
+        <p:txBody>
+          <a:bodyPr wrap="square">
+            <a:spAutoFit/>
+          </a:bodyPr>
+          <a:lstStyle/>
+          <a:p>
+            <a:pPr algn="ctr"/>
+            <a:r>
+              <a:rPr sz="1000" b="1" i="0">
+                <a:solidFill>
+                  <a:srgbClr val="44BB44"/>
+                </a:solidFill>
+                <a:latin typeface="Calibri"/>
+              </a:rPr>
+              <a:t>~3.7×</a:t>
+            </a:r>
+          </a:p>
+        </p:txBody>
+      </p:sp>
+      <p:sp>
+        <p:nvSpPr>
+          <p:cNvPr id="59" name="Rectangle 58"/>
+          <p:cNvSpPr/>
+          <p:nvPr/>
+        </p:nvSpPr>
+        <p:spPr>
+          <a:xfrm>
+            <a:off x="365760" y="3881628"/>
+            <a:ext cx="8412480" cy="10972"/>
+          </a:xfrm>
+          <a:prstGeom prst="rect">
+            <a:avLst/>
+          </a:prstGeom>
+          <a:solidFill>
+            <a:srgbClr val="F26A21"/>
+          </a:solidFill>
+          <a:ln>
+            <a:noFill/>
+          </a:ln>
+        </p:spPr>
+        <p:style>
+          <a:lnRef idx="1">
+            <a:schemeClr val="accent1"/>
+          </a:lnRef>
+          <a:fillRef idx="3">
+            <a:schemeClr val="accent1"/>
+          </a:fillRef>
+          <a:effectRef idx="2">
+            <a:schemeClr val="accent1"/>
+          </a:effectRef>
+          <a:fontRef idx="minor">
+            <a:schemeClr val="lt1"/>
+          </a:fontRef>
+        </p:style>
+        <p:txBody>
+          <a:bodyPr rtlCol="0" anchor="ctr"/>
+          <a:lstStyle/>
+          <a:p>
+            <a:pPr algn="ctr"/>
+          </a:p>
+        </p:txBody>
+      </p:sp>
+      <p:sp>
+        <p:nvSpPr>
+          <p:cNvPr id="60" name="TextBox 59"/>
+          <p:cNvSpPr txBox="1"/>
+          <p:nvPr/>
+        </p:nvSpPr>
+        <p:spPr>
+          <a:xfrm>
+            <a:off x="365760" y="3904488"/>
+            <a:ext cx="8412480" cy="384048"/>
+          </a:xfrm>
+          <a:prstGeom prst="rect">
+            <a:avLst/>
+          </a:prstGeom>
+          <a:noFill/>
+        </p:spPr>
+        <p:txBody>
+          <a:bodyPr wrap="square">
+            <a:spAutoFit/>
+          </a:bodyPr>
+          <a:lstStyle/>
+          <a:p>
+            <a:pPr algn="l"/>
+            <a:r>
+              <a:rPr sz="1000" b="0" i="1">
+                <a:solidFill>
+                  <a:srgbClr val="CCCCCC"/>
+                </a:solidFill>
+                <a:latin typeface="Calibri"/>
+              </a:rPr>
+              <a:t>Declining this offer is a judgment that SSLC alone, without new capital, is more likely to create more than the $18.9M maximum this offer projects (if Exos stock is held to 2031). Not a guarantee; "projects" is the operative word.</a:t>
+            </a:r>
           </a:p>
         </p:txBody>
       </p:sp>
@@ -17990,6 +18648,10 @@
           </a:solidFill>
           <a:ln/>
         </p:spPr>
+        <p:txBody>
+          <a:bodyPr/>
+          <a:p/>
+        </p:txBody>
       </p:sp>
       <p:sp>
         <p:nvSpPr>
@@ -18015,6 +18677,10 @@
             <a:prstDash val="solid"/>
           </a:ln>
         </p:spPr>
+        <p:txBody>
+          <a:bodyPr/>
+          <a:p/>
+        </p:txBody>
       </p:sp>
       <p:sp>
         <p:nvSpPr>
@@ -18112,6 +18778,10 @@
             <a:prstDash val="solid"/>
           </a:ln>
         </p:spPr>
+        <p:txBody>
+          <a:bodyPr/>
+          <a:p/>
+        </p:txBody>
       </p:sp>
       <p:sp>
         <p:nvSpPr>
@@ -18209,6 +18879,10 @@
             <a:prstDash val="solid"/>
           </a:ln>
         </p:spPr>
+        <p:txBody>
+          <a:bodyPr/>
+          <a:p/>
+        </p:txBody>
       </p:sp>
       <p:sp>
         <p:nvSpPr>
@@ -18306,6 +18980,10 @@
             <a:prstDash val="solid"/>
           </a:ln>
         </p:spPr>
+        <p:txBody>
+          <a:bodyPr/>
+          <a:p/>
+        </p:txBody>
       </p:sp>
       <p:sp>
         <p:nvSpPr>
@@ -18403,6 +19081,10 @@
             <a:prstDash val="solid"/>
           </a:ln>
         </p:spPr>
+        <p:txBody>
+          <a:bodyPr/>
+          <a:p/>
+        </p:txBody>
       </p:sp>
       <p:sp>
         <p:nvSpPr>
@@ -18500,6 +19182,10 @@
             <a:prstDash val="solid"/>
           </a:ln>
         </p:spPr>
+        <p:txBody>
+          <a:bodyPr/>
+          <a:p/>
+        </p:txBody>
       </p:sp>
       <p:sp>
         <p:nvSpPr>
@@ -18622,7 +19308,7 @@
               <a:buNone/>
             </a:pPr>
             <a:r>
-              <a:rPr lang="en-US" sz="700" i="1" dirty="0">
+              <a:rPr lang="en-US" sz="1000" i="1" dirty="0">
                 <a:solidFill>
                   <a:srgbClr val="888888"/>
                 </a:solidFill>
@@ -18658,7 +19344,7 @@
               <a:buNone/>
             </a:pPr>
             <a:r>
-              <a:rPr lang="en-US" sz="700" i="1" dirty="0">
+              <a:rPr lang="en-US" sz="1000" i="1" dirty="0">
                 <a:solidFill>
                   <a:srgbClr val="888888"/>
                 </a:solidFill>
@@ -18759,6 +19445,10 @@
           </a:solidFill>
           <a:ln/>
         </p:spPr>
+        <p:txBody>
+          <a:bodyPr/>
+          <a:p/>
+        </p:txBody>
       </p:sp>
       <p:sp>
         <p:nvSpPr>
@@ -18784,6 +19474,10 @@
             <a:prstDash val="solid"/>
           </a:ln>
         </p:spPr>
+        <p:txBody>
+          <a:bodyPr/>
+          <a:p/>
+        </p:txBody>
       </p:sp>
       <p:sp>
         <p:nvSpPr>
@@ -18901,6 +19595,10 @@
             <a:prstDash val="solid"/>
           </a:ln>
         </p:spPr>
+        <p:txBody>
+          <a:bodyPr/>
+          <a:p/>
+        </p:txBody>
       </p:sp>
       <p:sp>
         <p:nvSpPr>
@@ -19023,7 +19721,7 @@
               <a:buNone/>
             </a:pPr>
             <a:r>
-              <a:rPr lang="en-US" sz="700" i="1" dirty="0">
+              <a:rPr lang="en-US" sz="1000" i="1" dirty="0">
                 <a:solidFill>
                   <a:srgbClr val="888888"/>
                 </a:solidFill>
@@ -19059,7 +19757,7 @@
               <a:buNone/>
             </a:pPr>
             <a:r>
-              <a:rPr lang="en-US" sz="700" i="1" dirty="0">
+              <a:rPr lang="en-US" sz="1000" i="1" dirty="0">
                 <a:solidFill>
                   <a:srgbClr val="888888"/>
                 </a:solidFill>

--- a/drafts/Exos_SSLC_Board_Offer_Overview_2026-10-10_r2.pptx
+++ b/drafts/Exos_SSLC_Board_Offer_Overview_2026-10-10_r2.pptx
@@ -1020,6 +1020,32 @@
             <a:br/>
             <a:r>
               <a:t>Stock ledger: Exos's 18.06% credited via $790K in price. Other holders' per-share payout can't be confirmed without ledger. Per John Quinn, most other holders invested 25+ years ago; Exos invested 2021–2024.</a:t>
+            </a:r>
+          </a:p>
+          <a:p>
+            <a:r>
+              <a:rPr lang="en-US"/>
+              <a:t>
+--- MICROCOSM RENT CREDIT (Robert Conger question, 10/12) ---
+Source: SSLC GL per John Quinn. All figures approximate pending stock ledger / full diligence.
+Jan–Jun 2024: SSLC paid Microcosm $11,470/mo (~50% of $23,647 total rent).
+Jul 2024 onward: SSLC paid 100% of rent:
+  - Jul–Dec 2024: $23,647/mo (paid to Microcosm or sub-landlord)
+  - Jan–Dec 2025: $24,238/mo
+  - Jan–Aug 2026: $24,844/mo (paid directly to landlords Izadi/Vahidi)
+Microcosm continues to occupy the building and is named on the lease.
+Microcosm's 50% share Jul 2024–Aug 2026 (14 months): ~$316K (rent only; utilities billed separately).
+Microcosm loan history (for context):
+  - SSLC lent Microcosm $812,699 total (2019–Oct 2025, booked 4/30/2026).
+  - On 4/30/2026, fully netted against Microcosm balances:
+      $294,499 vs. Loan Payable–Microcosm
+      $423,965 vs. pre-6/2025 Microcosm reimbursables
+      $61,290 vs. 'Judy's time'
+      $32,946 reimbursable
+  - After netting: $451,429 still 'Due to Microcosm' on SSLC's books.
+  - This ~$316K rent credit has NOT been netted against the $451K balance.
+If the board asserts this credit before close, net cash to holders increases by ~$316K:
+  ~$1.51M (base case) → ~$1.82M at close. 5-yr total: ~$5.16M → ~$5.47M.</a:t>
             </a:r>
           </a:p>
         </p:txBody>
@@ -5858,6 +5884,196 @@
           </a:p>
         </p:txBody>
       </p:sp>
+      <p:sp>
+        <p:nvSpPr>
+          <p:cNvPr id="73" name="Rectangle 72"/>
+          <p:cNvSpPr/>
+          <p:nvPr/>
+        </p:nvSpPr>
+        <p:spPr>
+          <a:xfrm>
+            <a:off x="4645152" y="2834640"/>
+            <a:ext cx="4315968" cy="210312"/>
+          </a:xfrm>
+          <a:prstGeom prst="rect">
+            <a:avLst/>
+          </a:prstGeom>
+          <a:solidFill>
+            <a:srgbClr val="FFCC44"/>
+          </a:solidFill>
+          <a:ln>
+            <a:noFill/>
+          </a:ln>
+        </p:spPr>
+        <p:style>
+          <a:lnRef idx="1">
+            <a:schemeClr val="accent1"/>
+          </a:lnRef>
+          <a:fillRef idx="3">
+            <a:schemeClr val="accent1"/>
+          </a:fillRef>
+          <a:effectRef idx="2">
+            <a:schemeClr val="accent1"/>
+          </a:effectRef>
+          <a:fontRef idx="minor">
+            <a:schemeClr val="lt1"/>
+          </a:fontRef>
+        </p:style>
+        <p:txBody>
+          <a:bodyPr rtlCol="0" anchor="ctr"/>
+          <a:lstStyle/>
+          <a:p>
+            <a:pPr algn="ctr"/>
+          </a:p>
+        </p:txBody>
+      </p:sp>
+      <p:sp>
+        <p:nvSpPr>
+          <p:cNvPr id="74" name="TextBox 73"/>
+          <p:cNvSpPr txBox="1"/>
+          <p:nvPr/>
+        </p:nvSpPr>
+        <p:spPr>
+          <a:xfrm>
+            <a:off x="4718304" y="2852928"/>
+            <a:ext cx="4169663" cy="173736"/>
+          </a:xfrm>
+          <a:prstGeom prst="rect">
+            <a:avLst/>
+          </a:prstGeom>
+          <a:noFill/>
+        </p:spPr>
+        <p:txBody>
+          <a:bodyPr wrap="none">
+            <a:spAutoFit/>
+          </a:bodyPr>
+          <a:lstStyle/>
+          <a:p>
+            <a:pPr algn="ctr"/>
+            <a:r>
+              <a:rPr sz="1000" b="1">
+                <a:solidFill>
+                  <a:srgbClr val="111111"/>
+                </a:solidFill>
+                <a:latin typeface="Calibri"/>
+              </a:rPr>
+              <a:t>⚠  NOT YET CREDITED TO SSLC HOLDERS</a:t>
+            </a:r>
+          </a:p>
+        </p:txBody>
+      </p:sp>
+      <p:sp>
+        <p:nvSpPr>
+          <p:cNvPr id="75" name="Rectangle 74"/>
+          <p:cNvSpPr/>
+          <p:nvPr/>
+        </p:nvSpPr>
+        <p:spPr>
+          <a:xfrm>
+            <a:off x="4645152" y="3044952"/>
+            <a:ext cx="4315968" cy="868680"/>
+          </a:xfrm>
+          <a:prstGeom prst="rect">
+            <a:avLst/>
+          </a:prstGeom>
+          <a:solidFill>
+            <a:srgbClr val="2A1800"/>
+          </a:solidFill>
+          <a:ln w="9525">
+            <a:solidFill>
+              <a:srgbClr val="FFCC44"/>
+            </a:solidFill>
+          </a:ln>
+        </p:spPr>
+        <p:style>
+          <a:lnRef idx="1">
+            <a:schemeClr val="accent1"/>
+          </a:lnRef>
+          <a:fillRef idx="3">
+            <a:schemeClr val="accent1"/>
+          </a:fillRef>
+          <a:effectRef idx="2">
+            <a:schemeClr val="accent1"/>
+          </a:effectRef>
+          <a:fontRef idx="minor">
+            <a:schemeClr val="lt1"/>
+          </a:fontRef>
+        </p:style>
+        <p:txBody>
+          <a:bodyPr rtlCol="0" anchor="ctr"/>
+          <a:lstStyle/>
+          <a:p>
+            <a:pPr algn="ctr"/>
+          </a:p>
+        </p:txBody>
+      </p:sp>
+      <p:sp>
+        <p:nvSpPr>
+          <p:cNvPr id="76" name="TextBox 75"/>
+          <p:cNvSpPr txBox="1"/>
+          <p:nvPr/>
+        </p:nvSpPr>
+        <p:spPr>
+          <a:xfrm>
+            <a:off x="4736592" y="3099816"/>
+            <a:ext cx="4133087" cy="777240"/>
+          </a:xfrm>
+          <a:prstGeom prst="rect">
+            <a:avLst/>
+          </a:prstGeom>
+          <a:noFill/>
+        </p:spPr>
+        <p:txBody>
+          <a:bodyPr wrap="square">
+            <a:spAutoFit/>
+          </a:bodyPr>
+          <a:lstStyle/>
+          <a:p>
+            <a:r>
+              <a:rPr sz="1000" b="1">
+                <a:solidFill>
+                  <a:srgbClr val="FFEE88"/>
+                </a:solidFill>
+                <a:latin typeface="Calibri"/>
+              </a:rPr>
+              <a:t>Microcosm's 50% share of facility rent, Jul 2024–Aug 2026: ~$316K (rent only; utilities extra).</a:t>
+            </a:r>
+          </a:p>
+          <a:p>
+            <a:r>
+              <a:rPr sz="1000" b="0">
+                <a:solidFill>
+                  <a:srgbClr val="CCCCCC"/>
+                </a:solidFill>
+                <a:latin typeface="Calibri"/>
+              </a:rPr>
+              <a:t>Not credited against the $451K 'Due to Microcosm' balance. Microcosm still occupies the building.</a:t>
+            </a:r>
+          </a:p>
+          <a:p>
+            <a:r>
+              <a:rPr sz="1000" b="0">
+                <a:solidFill>
+                  <a:srgbClr val="CCCCCC"/>
+                </a:solidFill>
+                <a:latin typeface="Calibri"/>
+              </a:rPr>
+              <a:t>If applied: reduces SSLC's Microcosm debt by ~$316K → more cash distributable at close.</a:t>
+            </a:r>
+          </a:p>
+          <a:p>
+            <a:r>
+              <a:rPr sz="1000" b="1">
+                <a:solidFill>
+                  <a:srgbClr val="FFEE88"/>
+                </a:solidFill>
+                <a:latin typeface="Calibri"/>
+              </a:rPr>
+              <a:t>Base case net cash: ~$1.51M → ~$1.82M if rent offset recognized before close.</a:t>
+            </a:r>
+          </a:p>
+        </p:txBody>
+      </p:sp>
     </p:spTree>
   </p:cSld>
   <p:clrMapOvr>

--- a/drafts/Exos_SSLC_Board_Offer_Overview_2026-10-10_r2.pptx
+++ b/drafts/Exos_SSLC_Board_Offer_Overview_2026-10-10_r2.pptx
@@ -1046,6 +1046,30 @@
   - This ~$316K rent credit has NOT been netted against the $451K balance.
 If the board asserts this credit before close, net cash to holders increases by ~$316K:
   ~$1.51M (base case) → ~$1.82M at close. 5-yr total: ~$5.16M → ~$5.47M.</a:t>
+            </a:r>
+          </a:p>
+          <a:p>
+            <a:r>
+              <a:rPr lang="en-US"/>
+              <a:t>
+--- MICROCOSM UTILITIES UPDATE (John 06:43) ---
+Source: SSLC GL account 6195 (utilities). All figures approximate.
+Utilities (Acct 6195):
+  - Jan–Jun 2024 (50% split period): avg ~$1,059/mo → Microcosm's 50% share ~$530/mo
+  - Jul 2024–Aug 2026 (SSLC paying 100%): avg ~$2,727/mo (~2.6× jump; some summer seasonality)
+  - Jul 2024–Aug 2026 = 14 months; total utilities paid = ~$38,178
+  - Microcosm's 50% share of that period: $70,048 / 2 = $35,024 (~$35K)
+Updated totals:
+  - Rent credit (Jul 2024–Aug 2026): ~$316K
+  - Utilities credit (Jul 2024–Aug 2026, 50%): ~$35K
+  - Total facility cost credit: ~$351K
+Impact if recognized before close:
+  - Net cash at close: ~$1.51M → ~$1.86M (+$351K on $1.51M; ~$1.86M = $1.51M + $0.35M)
+  - 'Due to Microcosm' (currently $451K): $451K − $351K = ~$100K remaining
+  - Total equity: currently ~−$1.44M; improves by $351K → ~−$1.09M
+  - 5-yr total: ~$5.16M → ~$5.51M
+Note: Microcosm continues to occupy the building and is named on the lease.
+This credit has not been asserted or netted on SSLC's books as of 10/11/2026.</a:t>
             </a:r>
           </a:p>
         </p:txBody>
@@ -5971,7 +5995,7 @@
         <p:spPr>
           <a:xfrm>
             <a:off x="4645152" y="3044952"/>
-            <a:ext cx="4315968" cy="868680"/>
+            <a:ext cx="4315968" cy="1005840"/>
           </a:xfrm>
           <a:prstGeom prst="rect">
             <a:avLst/>
@@ -6015,8 +6039,8 @@
         </p:nvSpPr>
         <p:spPr>
           <a:xfrm>
-            <a:off x="4736592" y="3099816"/>
-            <a:ext cx="4133087" cy="777240"/>
+            <a:off x="4736592" y="3095244"/>
+            <a:ext cx="4133087" cy="923544"/>
           </a:xfrm>
           <a:prstGeom prst="rect">
             <a:avLst/>
@@ -6036,7 +6060,7 @@
                 </a:solidFill>
                 <a:latin typeface="Calibri"/>
               </a:rPr>
-              <a:t>Microcosm's 50% share of facility rent, Jul 2024–Aug 2026: ~$316K (rent only; utilities extra).</a:t>
+              <a:t>Microcosm's 50% facility costs, Jul 2024–Aug 2026: ~$351K</a:t>
             </a:r>
           </a:p>
           <a:p>
@@ -6047,18 +6071,18 @@
                 </a:solidFill>
                 <a:latin typeface="Calibri"/>
               </a:rPr>
-              <a:t>Not credited against the $451K 'Due to Microcosm' balance. Microcosm still occupies the building.</a:t>
-            </a:r>
-          </a:p>
-          <a:p>
-            <a:r>
-              <a:rPr sz="1000" b="0">
-                <a:solidFill>
-                  <a:srgbClr val="CCCCCC"/>
+              <a:t>  (rent ~$316K + utilities ~$35K). Not credited vs. $451K owed to Microcosm.</a:t>
+            </a:r>
+          </a:p>
+          <a:p>
+            <a:r>
+              <a:rPr sz="1000" b="1">
+                <a:solidFill>
+                  <a:srgbClr val="FFEE88"/>
                 </a:solidFill>
                 <a:latin typeface="Calibri"/>
               </a:rPr>
-              <a:t>If applied: reduces SSLC's Microcosm debt by ~$316K → more cash distributable at close.</a:t>
+              <a:t>If applied: SSLC holders' cash at close ~$1.51M → ~$1.86M (base case).</a:t>
             </a:r>
           </a:p>
           <a:p>
@@ -6069,7 +6093,18 @@
                 </a:solidFill>
                 <a:latin typeface="Calibri"/>
               </a:rPr>
-              <a:t>Base case net cash: ~$1.51M → ~$1.82M if rent offset recognized before close.</a:t>
+              <a:t>'Due to Microcosm' falls to ~$100K.</a:t>
+            </a:r>
+          </a:p>
+          <a:p>
+            <a:r>
+              <a:rPr sz="1000" b="1">
+                <a:solidFill>
+                  <a:srgbClr val="FFEE88"/>
+                </a:solidFill>
+                <a:latin typeface="Calibri"/>
+              </a:rPr>
+              <a:t>Equity improves: -$1.44M to ~-$1.09M.</a:t>
             </a:r>
           </a:p>
         </p:txBody>

--- a/drafts/Exos_SSLC_Board_Offer_Overview_2026-10-10_r2.pptx
+++ b/drafts/Exos_SSLC_Board_Offer_Overview_2026-10-10_r2.pptx
@@ -750,6 +750,29 @@
             <a:br/>
             <a:r>
               <a:t>Open items: AR Unbilled $942,177 (Acct 1110) and Deposits $120,000 (Acct 2380) under reconciliation per Motion 3. Facility costs ~$805K (Jan 2024–Oct 2026) never charged to Microcosm.</a:t>
+            </a:r>
+          </a:p>
+          <a:p>
+            <a:r>
+              <a:rPr lang="en-US"/>
+              <a:t>SPEAKER NOTES — SLIDE 4 (Exos-adjusted comparison):
+Per SSLC's GL, the 'Notes Payable – Bookstore' ($320,582) is owed to Microcosm Astronautics Books (the Bookstore).
+Key 4/30/2026 journal entries:
+  $426,687  AP→Due to Microcosm (re-classing payables to Microcosm)
+  $97,302   Interest capitalized into Bookstore note (not separately disclosed on 4/30)
+  $812,699  SSLC loans-to-Microcosm fully netted vs. Microcosm balances:
+              $294,499 vs. Loan Payable–Microcosm
+              $423,965 vs. pre-6/2025 Microcosm reimbursables
+              $61,290 vs. 'Judy's time'
+              $32,946 reimbursable
+            After netting: $451,429 'Due to Microcosm' remains.
+Exos adjustments (not yet on SSLC books):
+  - Microcosm 50% facility share Jul 2024–Aug 2026: ~$351K (rent ~$316K + utilities ~$35K)
+    → reduces 'Due to Microcosm' $451K→~$100K
+  - Bookstore $97K interest: Exos requests supporting amortization schedule
+  - Billed-ahead: start-billings booked at tank start, not cleared at IM shipment
+    → est. genuine billed-ahead ~$100K–$250K (Motion 3 directs correction)
+  - Equity: base improvement −$1.44M→~−$1.09M (facility credit only); further improvement if billed-ahead reconciled.</a:t>
             </a:r>
           </a:p>
         </p:txBody>
@@ -9258,6 +9281,76 @@
           </a:p>
         </p:txBody>
       </p:sp>
+      <p:sp>
+        <p:nvSpPr>
+          <p:cNvPr id="10" name="TextBox 9"/>
+          <p:cNvSpPr txBox="1"/>
+          <p:nvPr/>
+        </p:nvSpPr>
+        <p:spPr>
+          <a:xfrm>
+            <a:off x="411480" y="4325112"/>
+            <a:ext cx="8321040" cy="256032"/>
+          </a:xfrm>
+          <a:prstGeom prst="rect">
+            <a:avLst/>
+          </a:prstGeom>
+          <a:noFill/>
+        </p:spPr>
+        <p:txBody>
+          <a:bodyPr wrap="square">
+            <a:spAutoFit/>
+          </a:bodyPr>
+          <a:lstStyle/>
+          <a:p>
+            <a:pPr algn="l"/>
+            <a:r>
+              <a:rPr sz="1000" b="1" i="0">
+                <a:solidFill>
+                  <a:srgbClr val="F26A21"/>
+                </a:solidFill>
+                <a:latin typeface="Calibri"/>
+              </a:rPr>
+              <a:t>These motions protect every SSLC holder outside the Microcosm/Wertz group, including Exos (18%), by correcting the books before any payout.</a:t>
+            </a:r>
+          </a:p>
+        </p:txBody>
+      </p:sp>
+      <p:sp>
+        <p:nvSpPr>
+          <p:cNvPr id="11" name="TextBox 10"/>
+          <p:cNvSpPr txBox="1"/>
+          <p:nvPr/>
+        </p:nvSpPr>
+        <p:spPr>
+          <a:xfrm>
+            <a:off x="411480" y="4590288"/>
+            <a:ext cx="8321040" cy="173736"/>
+          </a:xfrm>
+          <a:prstGeom prst="rect">
+            <a:avLst/>
+          </a:prstGeom>
+          <a:noFill/>
+        </p:spPr>
+        <p:txBody>
+          <a:bodyPr wrap="square">
+            <a:spAutoFit/>
+          </a:bodyPr>
+          <a:lstStyle/>
+          <a:p>
+            <a:pPr algn="l"/>
+            <a:r>
+              <a:rPr sz="1000" b="0" i="1">
+                <a:solidFill>
+                  <a:srgbClr val="888888"/>
+                </a:solidFill>
+                <a:latin typeface="Calibri"/>
+              </a:rPr>
+              <a:t>Ownership: Jim Wertz held most of SSLC until Exos's ~10% purchase, then Exos's ~8% follow-on to keep SSLC cash-flow positive.</a:t>
+            </a:r>
+          </a:p>
+        </p:txBody>
+      </p:sp>
     </p:spTree>
   </p:cSld>
   <p:clrMapOvr>
@@ -11441,20 +11534,90 @@
       </p:sp>
       <p:sp>
         <p:nvSpPr>
-          <p:cNvPr id="42" name="Rectangle 41"/>
+          <p:cNvPr id="47" name="TextBox 46"/>
+          <p:cNvSpPr txBox="1"/>
+          <p:nvPr/>
+        </p:nvSpPr>
+        <p:spPr>
+          <a:xfrm>
+            <a:off x="1554480" y="4809744"/>
+            <a:ext cx="6035040" cy="201168"/>
+          </a:xfrm>
+          <a:prstGeom prst="rect">
+            <a:avLst/>
+          </a:prstGeom>
+          <a:noFill/>
+        </p:spPr>
+        <p:txBody>
+          <a:bodyPr wrap="square">
+            <a:spAutoFit/>
+          </a:bodyPr>
+          <a:lstStyle/>
+          <a:p>
+            <a:pPr algn="ctr"/>
+            <a:r>
+              <a:rPr sz="1000" b="0" i="1">
+                <a:solidFill>
+                  <a:srgbClr val="888888"/>
+                </a:solidFill>
+                <a:latin typeface="Calibri"/>
+              </a:rPr>
+              <a:t>DRAFT — NEGOTIATING TERMS</a:t>
+            </a:r>
+          </a:p>
+        </p:txBody>
+      </p:sp>
+      <p:sp>
+        <p:nvSpPr>
+          <p:cNvPr id="48" name="TextBox 47"/>
+          <p:cNvSpPr txBox="1"/>
+          <p:nvPr/>
+        </p:nvSpPr>
+        <p:spPr>
+          <a:xfrm>
+            <a:off x="7772400" y="4809744"/>
+            <a:ext cx="1143000" cy="201168"/>
+          </a:xfrm>
+          <a:prstGeom prst="rect">
+            <a:avLst/>
+          </a:prstGeom>
+          <a:noFill/>
+        </p:spPr>
+        <p:txBody>
+          <a:bodyPr wrap="square">
+            <a:spAutoFit/>
+          </a:bodyPr>
+          <a:lstStyle/>
+          <a:p>
+            <a:pPr algn="r"/>
+            <a:r>
+              <a:rPr sz="1000" b="0" i="1">
+                <a:solidFill>
+                  <a:srgbClr val="888888"/>
+                </a:solidFill>
+                <a:latin typeface="Calibri"/>
+              </a:rPr>
+              <a:t>CONFIDENTIAL</a:t>
+            </a:r>
+          </a:p>
+        </p:txBody>
+      </p:sp>
+      <p:sp>
+        <p:nvSpPr>
+          <p:cNvPr id="49" name="Rectangle 48"/>
           <p:cNvSpPr/>
           <p:nvPr/>
         </p:nvSpPr>
         <p:spPr>
           <a:xfrm>
-            <a:off x="109728" y="3643884"/>
-            <a:ext cx="8924544" cy="749808"/>
+            <a:off x="329184" y="2679191"/>
+            <a:ext cx="2459736" cy="13716"/>
           </a:xfrm>
           <a:prstGeom prst="rect">
             <a:avLst/>
           </a:prstGeom>
           <a:solidFill>
-            <a:srgbClr val="1E1400"/>
+            <a:srgbClr val="888888"/>
           </a:solidFill>
           <a:ln>
             <a:noFill/>
@@ -11484,20 +11647,124 @@
       </p:sp>
       <p:sp>
         <p:nvSpPr>
-          <p:cNvPr id="43" name="Rectangle 42"/>
+          <p:cNvPr id="50" name="TextBox 49"/>
+          <p:cNvSpPr txBox="1"/>
+          <p:nvPr/>
+        </p:nvSpPr>
+        <p:spPr>
+          <a:xfrm>
+            <a:off x="219456" y="2697479"/>
+            <a:ext cx="2514600" cy="205740"/>
+          </a:xfrm>
+          <a:prstGeom prst="rect">
+            <a:avLst/>
+          </a:prstGeom>
+          <a:noFill/>
+        </p:spPr>
+        <p:txBody>
+          <a:bodyPr wrap="none">
+            <a:spAutoFit/>
+          </a:bodyPr>
+          <a:lstStyle/>
+          <a:p>
+            <a:r>
+              <a:rPr sz="1000" b="0">
+                <a:solidFill>
+                  <a:srgbClr val="CCCCCC"/>
+                </a:solidFill>
+                <a:latin typeface="Calibri"/>
+              </a:rPr>
+              <a:t>Total equity (10/11/2026)</a:t>
+            </a:r>
+          </a:p>
+        </p:txBody>
+      </p:sp>
+      <p:sp>
+        <p:nvSpPr>
+          <p:cNvPr id="51" name="TextBox 50"/>
+          <p:cNvSpPr txBox="1"/>
+          <p:nvPr/>
+        </p:nvSpPr>
+        <p:spPr>
+          <a:xfrm>
+            <a:off x="2752344" y="2697479"/>
+            <a:ext cx="1481328" cy="205740"/>
+          </a:xfrm>
+          <a:prstGeom prst="rect">
+            <a:avLst/>
+          </a:prstGeom>
+          <a:noFill/>
+        </p:spPr>
+        <p:txBody>
+          <a:bodyPr wrap="none">
+            <a:spAutoFit/>
+          </a:bodyPr>
+          <a:lstStyle/>
+          <a:p>
+            <a:pPr algn="r"/>
+            <a:r>
+              <a:rPr sz="1000" b="1">
+                <a:solidFill>
+                  <a:srgbClr val="FF6666"/>
+                </a:solidFill>
+                <a:latin typeface="Calibri"/>
+              </a:rPr>
+              <a:t>−$1,443,882</a:t>
+            </a:r>
+          </a:p>
+        </p:txBody>
+      </p:sp>
+      <p:sp>
+        <p:nvSpPr>
+          <p:cNvPr id="52" name="TextBox 51"/>
+          <p:cNvSpPr txBox="1"/>
+          <p:nvPr/>
+        </p:nvSpPr>
+        <p:spPr>
+          <a:xfrm>
+            <a:off x="4517136" y="2720340"/>
+            <a:ext cx="4224528" cy="160020"/>
+          </a:xfrm>
+          <a:prstGeom prst="rect">
+            <a:avLst/>
+          </a:prstGeom>
+          <a:noFill/>
+        </p:spPr>
+        <p:txBody>
+          <a:bodyPr wrap="square">
+            <a:spAutoFit/>
+          </a:bodyPr>
+          <a:lstStyle/>
+          <a:p>
+            <a:pPr algn="l"/>
+            <a:r>
+              <a:rPr sz="1000" b="1" i="0">
+                <a:solidFill>
+                  <a:srgbClr val="CCCCCC"/>
+                </a:solidFill>
+                <a:latin typeface="Calibri"/>
+              </a:rPr>
+              <a:t>Exos loan reconciled: $60K→$31.2K (11% int.); records match. $30K prior loan→5,464 shares (incl. in $790K paid-in).</a:t>
+            </a:r>
+          </a:p>
+        </p:txBody>
+      </p:sp>
+      <p:sp>
+        <p:nvSpPr>
+          <p:cNvPr id="53" name="Rectangle 52"/>
           <p:cNvSpPr/>
           <p:nvPr/>
         </p:nvSpPr>
         <p:spPr>
           <a:xfrm>
-            <a:off x="109728" y="3643884"/>
-            <a:ext cx="50292" cy="749808"/>
+            <a:off x="201168" y="3593592"/>
+            <a:ext cx="8741664" cy="1175004"/>
           </a:xfrm>
           <a:prstGeom prst="rect">
             <a:avLst/>
           </a:prstGeom>
           <a:solidFill>
-            <a:srgbClr val="F26A21"/>
+            <a:srgbClr val="1E1E1E"/>
           </a:solidFill>
           <a:ln>
             <a:noFill/>
@@ -11527,195 +11794,20 @@
       </p:sp>
       <p:sp>
         <p:nvSpPr>
-          <p:cNvPr id="44" name="TextBox 43"/>
-          <p:cNvSpPr txBox="1"/>
-          <p:nvPr/>
-        </p:nvSpPr>
-        <p:spPr>
-          <a:xfrm>
-            <a:off x="219456" y="3680459"/>
-            <a:ext cx="8686800" cy="173736"/>
-          </a:xfrm>
-          <a:prstGeom prst="rect">
-            <a:avLst/>
-          </a:prstGeom>
-          <a:noFill/>
-        </p:spPr>
-        <p:txBody>
-          <a:bodyPr wrap="square">
-            <a:spAutoFit/>
-          </a:bodyPr>
-          <a:lstStyle/>
-          <a:p>
-            <a:pPr algn="l"/>
-            <a:r>
-              <a:rPr sz="1000" b="1" i="0">
-                <a:solidFill>
-                  <a:srgbClr val="F26A21"/>
-                </a:solidFill>
-                <a:latin typeface="Calibri"/>
-              </a:rPr>
-              <a:t>OPEN ITEMS  (Exos assessment pending reconciliation via Motion 2)</a:t>
-            </a:r>
-          </a:p>
-        </p:txBody>
-      </p:sp>
-      <p:sp>
-        <p:nvSpPr>
-          <p:cNvPr id="45" name="TextBox 44"/>
-          <p:cNvSpPr txBox="1"/>
-          <p:nvPr/>
-        </p:nvSpPr>
-        <p:spPr>
-          <a:xfrm>
-            <a:off x="219456" y="3890772"/>
-            <a:ext cx="8686800" cy="457200"/>
-          </a:xfrm>
-          <a:prstGeom prst="rect">
-            <a:avLst/>
-          </a:prstGeom>
-          <a:noFill/>
-        </p:spPr>
-        <p:txBody>
-          <a:bodyPr wrap="square">
-            <a:spAutoFit/>
-          </a:bodyPr>
-          <a:lstStyle/>
-          <a:p>
-            <a:pPr algn="l"/>
-            <a:r>
-              <a:rPr sz="1000" b="0" i="0">
-                <a:solidFill>
-                  <a:srgbClr val="CCCCCC"/>
-                </a:solidFill>
-                <a:latin typeface="Calibri"/>
-              </a:rPr>
-              <a:t>"Billed-ahead" balance: $942,177 at 10/11. Exos assessment: overstated — start-billings not cleared at shipment. True billed-ahead est. $100K–$250K. Reconciliation via Motion 3. Facility costs since Jan 2024: ~$805K never charged back to Microcosm.</a:t>
-            </a:r>
-          </a:p>
-        </p:txBody>
-      </p:sp>
-      <p:sp>
-        <p:nvSpPr>
-          <p:cNvPr id="46" name="TextBox 45"/>
-          <p:cNvSpPr txBox="1"/>
-          <p:nvPr/>
-        </p:nvSpPr>
-        <p:spPr>
-          <a:xfrm>
-            <a:off x="228600" y="4416552"/>
-            <a:ext cx="8229600" cy="155448"/>
-          </a:xfrm>
-          <a:prstGeom prst="rect">
-            <a:avLst/>
-          </a:prstGeom>
-          <a:noFill/>
-        </p:spPr>
-        <p:txBody>
-          <a:bodyPr wrap="square">
-            <a:spAutoFit/>
-          </a:bodyPr>
-          <a:lstStyle/>
-          <a:p>
-            <a:pPr algn="l"/>
-            <a:r>
-              <a:rPr sz="1000" b="0" i="1">
-                <a:solidFill>
-                  <a:srgbClr val="888888"/>
-                </a:solidFill>
-                <a:latin typeface="Calibri"/>
-              </a:rPr>
-              <a:t>Source: SSLC QuickBooks 10/11/2026; billed-ahead pending reconciliation (Motion 3)</a:t>
-            </a:r>
-          </a:p>
-        </p:txBody>
-      </p:sp>
-      <p:sp>
-        <p:nvSpPr>
-          <p:cNvPr id="47" name="TextBox 46"/>
-          <p:cNvSpPr txBox="1"/>
-          <p:nvPr/>
-        </p:nvSpPr>
-        <p:spPr>
-          <a:xfrm>
-            <a:off x="1554480" y="4809744"/>
-            <a:ext cx="6035040" cy="201168"/>
-          </a:xfrm>
-          <a:prstGeom prst="rect">
-            <a:avLst/>
-          </a:prstGeom>
-          <a:noFill/>
-        </p:spPr>
-        <p:txBody>
-          <a:bodyPr wrap="square">
-            <a:spAutoFit/>
-          </a:bodyPr>
-          <a:lstStyle/>
-          <a:p>
-            <a:pPr algn="ctr"/>
-            <a:r>
-              <a:rPr sz="1000" b="0" i="1">
-                <a:solidFill>
-                  <a:srgbClr val="888888"/>
-                </a:solidFill>
-                <a:latin typeface="Calibri"/>
-              </a:rPr>
-              <a:t>DRAFT — NEGOTIATING TERMS</a:t>
-            </a:r>
-          </a:p>
-        </p:txBody>
-      </p:sp>
-      <p:sp>
-        <p:nvSpPr>
-          <p:cNvPr id="48" name="TextBox 47"/>
-          <p:cNvSpPr txBox="1"/>
-          <p:nvPr/>
-        </p:nvSpPr>
-        <p:spPr>
-          <a:xfrm>
-            <a:off x="7772400" y="4809744"/>
-            <a:ext cx="1143000" cy="201168"/>
-          </a:xfrm>
-          <a:prstGeom prst="rect">
-            <a:avLst/>
-          </a:prstGeom>
-          <a:noFill/>
-        </p:spPr>
-        <p:txBody>
-          <a:bodyPr wrap="square">
-            <a:spAutoFit/>
-          </a:bodyPr>
-          <a:lstStyle/>
-          <a:p>
-            <a:pPr algn="r"/>
-            <a:r>
-              <a:rPr sz="1000" b="0" i="1">
-                <a:solidFill>
-                  <a:srgbClr val="888888"/>
-                </a:solidFill>
-                <a:latin typeface="Calibri"/>
-              </a:rPr>
-              <a:t>CONFIDENTIAL</a:t>
-            </a:r>
-          </a:p>
-        </p:txBody>
-      </p:sp>
-      <p:sp>
-        <p:nvSpPr>
-          <p:cNvPr id="49" name="Rectangle 48"/>
+          <p:cNvPr id="54" name="Rectangle 53"/>
           <p:cNvSpPr/>
           <p:nvPr/>
         </p:nvSpPr>
         <p:spPr>
           <a:xfrm>
-            <a:off x="329184" y="2679191"/>
-            <a:ext cx="2459736" cy="13716"/>
+            <a:off x="201168" y="3593592"/>
+            <a:ext cx="8741664" cy="14630"/>
           </a:xfrm>
           <a:prstGeom prst="rect">
             <a:avLst/>
           </a:prstGeom>
           <a:solidFill>
-            <a:srgbClr val="888888"/>
+            <a:srgbClr val="F26A21"/>
           </a:solidFill>
           <a:ln>
             <a:noFill/>
@@ -11745,14 +11837,14 @@
       </p:sp>
       <p:sp>
         <p:nvSpPr>
-          <p:cNvPr id="50" name="TextBox 49"/>
-          <p:cNvSpPr txBox="1"/>
-          <p:nvPr/>
-        </p:nvSpPr>
-        <p:spPr>
-          <a:xfrm>
-            <a:off x="219456" y="2697479"/>
-            <a:ext cx="2514600" cy="205740"/>
+          <p:cNvPr id="55" name="TextBox 54"/>
+          <p:cNvSpPr txBox="1"/>
+          <p:nvPr/>
+        </p:nvSpPr>
+        <p:spPr>
+          <a:xfrm>
+            <a:off x="292608" y="3610051"/>
+            <a:ext cx="5486400" cy="173736"/>
           </a:xfrm>
           <a:prstGeom prst="rect">
             <a:avLst/>
@@ -11765,28 +11857,29 @@
           </a:bodyPr>
           <a:lstStyle/>
           <a:p>
-            <a:r>
-              <a:rPr sz="1000" b="0">
-                <a:solidFill>
-                  <a:srgbClr val="CCCCCC"/>
+            <a:pPr algn="l"/>
+            <a:r>
+              <a:rPr sz="1000" b="1" i="0">
+                <a:solidFill>
+                  <a:srgbClr val="F26A21"/>
                 </a:solidFill>
                 <a:latin typeface="Calibri"/>
               </a:rPr>
-              <a:t>Total equity (10/11/2026)</a:t>
-            </a:r>
-          </a:p>
-        </p:txBody>
-      </p:sp>
-      <p:sp>
-        <p:nvSpPr>
-          <p:cNvPr id="51" name="TextBox 50"/>
-          <p:cNvSpPr txBox="1"/>
-          <p:nvPr/>
-        </p:nvSpPr>
-        <p:spPr>
-          <a:xfrm>
-            <a:off x="2752344" y="2697479"/>
-            <a:ext cx="1481328" cy="205740"/>
+              <a:t>Exos Assessment  (Motions 2 &amp; 3)  — As Booked vs. Adjusted</a:t>
+            </a:r>
+          </a:p>
+        </p:txBody>
+      </p:sp>
+      <p:sp>
+        <p:nvSpPr>
+          <p:cNvPr id="56" name="TextBox 55"/>
+          <p:cNvSpPr txBox="1"/>
+          <p:nvPr/>
+        </p:nvSpPr>
+        <p:spPr>
+          <a:xfrm>
+            <a:off x="7360920" y="3610051"/>
+            <a:ext cx="1463040" cy="173736"/>
           </a:xfrm>
           <a:prstGeom prst="rect">
             <a:avLst/>
@@ -11801,35 +11894,35 @@
           <a:p>
             <a:pPr algn="r"/>
             <a:r>
-              <a:rPr sz="1000" b="1">
-                <a:solidFill>
-                  <a:srgbClr val="FF6666"/>
+              <a:rPr sz="1000" b="0" i="1">
+                <a:solidFill>
+                  <a:srgbClr val="888888"/>
                 </a:solidFill>
                 <a:latin typeface="Calibri"/>
               </a:rPr>
-              <a:t>−$1,443,882</a:t>
-            </a:r>
-          </a:p>
-        </p:txBody>
-      </p:sp>
-      <p:sp>
-        <p:nvSpPr>
-          <p:cNvPr id="52" name="TextBox 51"/>
-          <p:cNvSpPr txBox="1"/>
-          <p:nvPr/>
-        </p:nvSpPr>
-        <p:spPr>
-          <a:xfrm>
-            <a:off x="4517136" y="2720340"/>
-            <a:ext cx="4224528" cy="160020"/>
-          </a:xfrm>
-          <a:prstGeom prst="rect">
-            <a:avLst/>
-          </a:prstGeom>
-          <a:noFill/>
-        </p:spPr>
-        <p:txBody>
-          <a:bodyPr wrap="square">
+              <a:t>pending reconciliation</a:t>
+            </a:r>
+          </a:p>
+        </p:txBody>
+      </p:sp>
+      <p:sp>
+        <p:nvSpPr>
+          <p:cNvPr id="57" name="TextBox 56"/>
+          <p:cNvSpPr txBox="1"/>
+          <p:nvPr/>
+        </p:nvSpPr>
+        <p:spPr>
+          <a:xfrm>
+            <a:off x="292608" y="3802075"/>
+            <a:ext cx="2926080" cy="160020"/>
+          </a:xfrm>
+          <a:prstGeom prst="rect">
+            <a:avLst/>
+          </a:prstGeom>
+          <a:noFill/>
+        </p:spPr>
+        <p:txBody>
+          <a:bodyPr wrap="none">
             <a:spAutoFit/>
           </a:bodyPr>
           <a:lstStyle/>
@@ -11842,77 +11935,855 @@
                 </a:solidFill>
                 <a:latin typeface="Calibri"/>
               </a:rPr>
-              <a:t>Exos loan reconciled: $60K→$31.2K (11% int.); records match. $30K prior loan→5,464 shares (incl. in $790K paid-in).</a:t>
-            </a:r>
-          </a:p>
-        </p:txBody>
-      </p:sp>
-      <p:sp>
-        <p:nvSpPr>
-          <p:cNvPr id="53" name="TextBox 52"/>
-          <p:cNvSpPr txBox="1"/>
-          <p:nvPr/>
-        </p:nvSpPr>
-        <p:spPr>
-          <a:xfrm>
-            <a:off x="4517136" y="2875788"/>
-            <a:ext cx="4224528" cy="242316"/>
-          </a:xfrm>
-          <a:prstGeom prst="rect">
-            <a:avLst/>
-          </a:prstGeom>
-          <a:noFill/>
-        </p:spPr>
-        <p:txBody>
-          <a:bodyPr wrap="square">
+              <a:t>Line item</a:t>
+            </a:r>
+          </a:p>
+        </p:txBody>
+      </p:sp>
+      <p:sp>
+        <p:nvSpPr>
+          <p:cNvPr id="58" name="TextBox 57"/>
+          <p:cNvSpPr txBox="1"/>
+          <p:nvPr/>
+        </p:nvSpPr>
+        <p:spPr>
+          <a:xfrm>
+            <a:off x="3310128" y="3802075"/>
+            <a:ext cx="1170432" cy="160020"/>
+          </a:xfrm>
+          <a:prstGeom prst="rect">
+            <a:avLst/>
+          </a:prstGeom>
+          <a:noFill/>
+        </p:spPr>
+        <p:txBody>
+          <a:bodyPr wrap="none">
             <a:spAutoFit/>
           </a:bodyPr>
           <a:lstStyle/>
           <a:p>
-            <a:pPr algn="l"/>
-            <a:r>
-              <a:rPr sz="1000" b="0" i="1">
-                <a:solidFill>
-                  <a:srgbClr val="888888"/>
+            <a:pPr algn="r"/>
+            <a:r>
+              <a:rPr sz="1000" b="1" i="0">
+                <a:solidFill>
+                  <a:srgbClr val="CCCCCC"/>
                 </a:solidFill>
                 <a:latin typeface="Calibri"/>
               </a:rPr>
-              <a:t/>
-            </a:r>
-          </a:p>
-        </p:txBody>
-      </p:sp>
-      <p:sp>
-        <p:nvSpPr>
-          <p:cNvPr id="54" name="TextBox 53"/>
-          <p:cNvSpPr txBox="1"/>
-          <p:nvPr/>
-        </p:nvSpPr>
-        <p:spPr>
-          <a:xfrm>
-            <a:off x="4517136" y="3122676"/>
-            <a:ext cx="4224528" cy="155448"/>
-          </a:xfrm>
-          <a:prstGeom prst="rect">
-            <a:avLst/>
-          </a:prstGeom>
-          <a:noFill/>
-        </p:spPr>
-        <p:txBody>
-          <a:bodyPr wrap="square">
+              <a:t>As booked</a:t>
+            </a:r>
+          </a:p>
+        </p:txBody>
+      </p:sp>
+      <p:sp>
+        <p:nvSpPr>
+          <p:cNvPr id="59" name="TextBox 58"/>
+          <p:cNvSpPr txBox="1"/>
+          <p:nvPr/>
+        </p:nvSpPr>
+        <p:spPr>
+          <a:xfrm>
+            <a:off x="4572000" y="3802075"/>
+            <a:ext cx="1143000" cy="160020"/>
+          </a:xfrm>
+          <a:prstGeom prst="rect">
+            <a:avLst/>
+          </a:prstGeom>
+          <a:noFill/>
+        </p:spPr>
+        <p:txBody>
+          <a:bodyPr wrap="none">
             <a:spAutoFit/>
           </a:bodyPr>
           <a:lstStyle/>
           <a:p>
+            <a:pPr algn="r"/>
+            <a:r>
+              <a:rPr sz="1000" b="1" i="0">
+                <a:solidFill>
+                  <a:srgbClr val="CCCCCC"/>
+                </a:solidFill>
+                <a:latin typeface="Calibri"/>
+              </a:rPr>
+              <a:t>Adjusted</a:t>
+            </a:r>
+          </a:p>
+        </p:txBody>
+      </p:sp>
+      <p:sp>
+        <p:nvSpPr>
+          <p:cNvPr id="60" name="TextBox 59"/>
+          <p:cNvSpPr txBox="1"/>
+          <p:nvPr/>
+        </p:nvSpPr>
+        <p:spPr>
+          <a:xfrm>
+            <a:off x="5806440" y="3802075"/>
+            <a:ext cx="2980944" cy="160020"/>
+          </a:xfrm>
+          <a:prstGeom prst="rect">
+            <a:avLst/>
+          </a:prstGeom>
+          <a:noFill/>
+        </p:spPr>
+        <p:txBody>
+          <a:bodyPr wrap="none">
+            <a:spAutoFit/>
+          </a:bodyPr>
+          <a:lstStyle/>
+          <a:p>
             <a:pPr algn="l"/>
             <a:r>
+              <a:rPr sz="1000" b="1" i="0">
+                <a:solidFill>
+                  <a:srgbClr val="CCCCCC"/>
+                </a:solidFill>
+                <a:latin typeface="Calibri"/>
+              </a:rPr>
+              <a:t>Basis</a:t>
+            </a:r>
+          </a:p>
+        </p:txBody>
+      </p:sp>
+      <p:sp>
+        <p:nvSpPr>
+          <p:cNvPr id="61" name="Rectangle 60"/>
+          <p:cNvSpPr/>
+          <p:nvPr/>
+        </p:nvSpPr>
+        <p:spPr>
+          <a:xfrm>
+            <a:off x="201168" y="3962095"/>
+            <a:ext cx="8741664" cy="7315"/>
+          </a:xfrm>
+          <a:prstGeom prst="rect">
+            <a:avLst/>
+          </a:prstGeom>
+          <a:solidFill>
+            <a:srgbClr val="444444"/>
+          </a:solidFill>
+          <a:ln>
+            <a:noFill/>
+          </a:ln>
+        </p:spPr>
+        <p:style>
+          <a:lnRef idx="1">
+            <a:schemeClr val="accent1"/>
+          </a:lnRef>
+          <a:fillRef idx="3">
+            <a:schemeClr val="accent1"/>
+          </a:fillRef>
+          <a:effectRef idx="2">
+            <a:schemeClr val="accent1"/>
+          </a:effectRef>
+          <a:fontRef idx="minor">
+            <a:schemeClr val="lt1"/>
+          </a:fontRef>
+        </p:style>
+        <p:txBody>
+          <a:bodyPr rtlCol="0" anchor="ctr"/>
+          <a:lstStyle/>
+          <a:p>
+            <a:pPr algn="ctr"/>
+          </a:p>
+        </p:txBody>
+      </p:sp>
+      <p:sp>
+        <p:nvSpPr>
+          <p:cNvPr id="62" name="TextBox 61"/>
+          <p:cNvSpPr txBox="1"/>
+          <p:nvPr/>
+        </p:nvSpPr>
+        <p:spPr>
+          <a:xfrm>
+            <a:off x="4498848" y="3973068"/>
+            <a:ext cx="228600" cy="173736"/>
+          </a:xfrm>
+          <a:prstGeom prst="rect">
+            <a:avLst/>
+          </a:prstGeom>
+          <a:noFill/>
+        </p:spPr>
+        <p:txBody>
+          <a:bodyPr wrap="none">
+            <a:spAutoFit/>
+          </a:bodyPr>
+          <a:lstStyle/>
+          <a:p>
+            <a:pPr algn="ctr"/>
+            <a:r>
+              <a:rPr sz="1000" b="0" i="0">
+                <a:solidFill>
+                  <a:srgbClr val="888888"/>
+                </a:solidFill>
+                <a:latin typeface="Calibri"/>
+              </a:rPr>
+              <a:t>-&gt;</a:t>
+            </a:r>
+          </a:p>
+        </p:txBody>
+      </p:sp>
+      <p:sp>
+        <p:nvSpPr>
+          <p:cNvPr id="63" name="TextBox 62"/>
+          <p:cNvSpPr txBox="1"/>
+          <p:nvPr/>
+        </p:nvSpPr>
+        <p:spPr>
+          <a:xfrm>
+            <a:off x="4498848" y="4165091"/>
+            <a:ext cx="228600" cy="173736"/>
+          </a:xfrm>
+          <a:prstGeom prst="rect">
+            <a:avLst/>
+          </a:prstGeom>
+          <a:noFill/>
+        </p:spPr>
+        <p:txBody>
+          <a:bodyPr wrap="none">
+            <a:spAutoFit/>
+          </a:bodyPr>
+          <a:lstStyle/>
+          <a:p>
+            <a:pPr algn="ctr"/>
+            <a:r>
+              <a:rPr sz="1000" b="0" i="0">
+                <a:solidFill>
+                  <a:srgbClr val="888888"/>
+                </a:solidFill>
+                <a:latin typeface="Calibri"/>
+              </a:rPr>
+              <a:t>-&gt;</a:t>
+            </a:r>
+          </a:p>
+        </p:txBody>
+      </p:sp>
+      <p:sp>
+        <p:nvSpPr>
+          <p:cNvPr id="64" name="TextBox 63"/>
+          <p:cNvSpPr txBox="1"/>
+          <p:nvPr/>
+        </p:nvSpPr>
+        <p:spPr>
+          <a:xfrm>
+            <a:off x="4498848" y="4357116"/>
+            <a:ext cx="228600" cy="173736"/>
+          </a:xfrm>
+          <a:prstGeom prst="rect">
+            <a:avLst/>
+          </a:prstGeom>
+          <a:noFill/>
+        </p:spPr>
+        <p:txBody>
+          <a:bodyPr wrap="none">
+            <a:spAutoFit/>
+          </a:bodyPr>
+          <a:lstStyle/>
+          <a:p>
+            <a:pPr algn="ctr"/>
+            <a:r>
+              <a:rPr sz="1000" b="0" i="0">
+                <a:solidFill>
+                  <a:srgbClr val="888888"/>
+                </a:solidFill>
+                <a:latin typeface="Calibri"/>
+              </a:rPr>
+              <a:t>-&gt;</a:t>
+            </a:r>
+          </a:p>
+        </p:txBody>
+      </p:sp>
+      <p:sp>
+        <p:nvSpPr>
+          <p:cNvPr id="65" name="TextBox 64"/>
+          <p:cNvSpPr txBox="1"/>
+          <p:nvPr/>
+        </p:nvSpPr>
+        <p:spPr>
+          <a:xfrm>
+            <a:off x="4498848" y="4549140"/>
+            <a:ext cx="228600" cy="173736"/>
+          </a:xfrm>
+          <a:prstGeom prst="rect">
+            <a:avLst/>
+          </a:prstGeom>
+          <a:noFill/>
+        </p:spPr>
+        <p:txBody>
+          <a:bodyPr wrap="none">
+            <a:spAutoFit/>
+          </a:bodyPr>
+          <a:lstStyle/>
+          <a:p>
+            <a:pPr algn="ctr"/>
+            <a:r>
+              <a:rPr sz="1000" b="0" i="0">
+                <a:solidFill>
+                  <a:srgbClr val="888888"/>
+                </a:solidFill>
+                <a:latin typeface="Calibri"/>
+              </a:rPr>
+              <a:t>-&gt;</a:t>
+            </a:r>
+          </a:p>
+        </p:txBody>
+      </p:sp>
+      <p:sp>
+        <p:nvSpPr>
+          <p:cNvPr id="66" name="TextBox 65"/>
+          <p:cNvSpPr txBox="1"/>
+          <p:nvPr/>
+        </p:nvSpPr>
+        <p:spPr>
+          <a:xfrm>
+            <a:off x="292608" y="3973068"/>
+            <a:ext cx="2926080" cy="182880"/>
+          </a:xfrm>
+          <a:prstGeom prst="rect">
+            <a:avLst/>
+          </a:prstGeom>
+          <a:noFill/>
+        </p:spPr>
+        <p:txBody>
+          <a:bodyPr wrap="none">
+            <a:spAutoFit/>
+          </a:bodyPr>
+          <a:lstStyle/>
+          <a:p>
+            <a:pPr algn="l"/>
+            <a:r>
+              <a:rPr sz="1000" b="1" i="0">
+                <a:solidFill>
+                  <a:srgbClr val="FFCC44"/>
+                </a:solidFill>
+                <a:latin typeface="Calibri"/>
+              </a:rPr>
+              <a:t>Due to Microcosm</a:t>
+            </a:r>
+          </a:p>
+        </p:txBody>
+      </p:sp>
+      <p:sp>
+        <p:nvSpPr>
+          <p:cNvPr id="67" name="TextBox 66"/>
+          <p:cNvSpPr txBox="1"/>
+          <p:nvPr/>
+        </p:nvSpPr>
+        <p:spPr>
+          <a:xfrm>
+            <a:off x="3310128" y="3973068"/>
+            <a:ext cx="1170432" cy="182880"/>
+          </a:xfrm>
+          <a:prstGeom prst="rect">
+            <a:avLst/>
+          </a:prstGeom>
+          <a:noFill/>
+        </p:spPr>
+        <p:txBody>
+          <a:bodyPr wrap="none">
+            <a:spAutoFit/>
+          </a:bodyPr>
+          <a:lstStyle/>
+          <a:p>
+            <a:pPr algn="r"/>
+            <a:r>
+              <a:rPr sz="1000" b="0" i="0">
+                <a:solidFill>
+                  <a:srgbClr val="888888"/>
+                </a:solidFill>
+                <a:latin typeface="Calibri"/>
+              </a:rPr>
+              <a:t>$451K</a:t>
+            </a:r>
+          </a:p>
+        </p:txBody>
+      </p:sp>
+      <p:sp>
+        <p:nvSpPr>
+          <p:cNvPr id="68" name="TextBox 67"/>
+          <p:cNvSpPr txBox="1"/>
+          <p:nvPr/>
+        </p:nvSpPr>
+        <p:spPr>
+          <a:xfrm>
+            <a:off x="4572000" y="3973068"/>
+            <a:ext cx="1143000" cy="182880"/>
+          </a:xfrm>
+          <a:prstGeom prst="rect">
+            <a:avLst/>
+          </a:prstGeom>
+          <a:noFill/>
+        </p:spPr>
+        <p:txBody>
+          <a:bodyPr wrap="none">
+            <a:spAutoFit/>
+          </a:bodyPr>
+          <a:lstStyle/>
+          <a:p>
+            <a:pPr algn="r"/>
+            <a:r>
+              <a:rPr sz="1000" b="1" i="0">
+                <a:solidFill>
+                  <a:srgbClr val="44BB44"/>
+                </a:solidFill>
+                <a:latin typeface="Calibri"/>
+              </a:rPr>
+              <a:t>~$100K</a:t>
+            </a:r>
+          </a:p>
+        </p:txBody>
+      </p:sp>
+      <p:sp>
+        <p:nvSpPr>
+          <p:cNvPr id="69" name="TextBox 68"/>
+          <p:cNvSpPr txBox="1"/>
+          <p:nvPr/>
+        </p:nvSpPr>
+        <p:spPr>
+          <a:xfrm>
+            <a:off x="5806440" y="3973068"/>
+            <a:ext cx="2980944" cy="182880"/>
+          </a:xfrm>
+          <a:prstGeom prst="rect">
+            <a:avLst/>
+          </a:prstGeom>
+          <a:noFill/>
+        </p:spPr>
+        <p:txBody>
+          <a:bodyPr wrap="none">
+            <a:spAutoFit/>
+          </a:bodyPr>
+          <a:lstStyle/>
+          <a:p>
+            <a:pPr algn="l"/>
+            <a:r>
               <a:rPr sz="1000" b="0" i="1">
                 <a:solidFill>
+                  <a:srgbClr val="CCCCCC"/>
+                </a:solidFill>
+                <a:latin typeface="Calibri"/>
+              </a:rPr>
+              <a:t>Rent+util credit ~$351K (Jul '24-Aug '26)</a:t>
+            </a:r>
+          </a:p>
+        </p:txBody>
+      </p:sp>
+      <p:sp>
+        <p:nvSpPr>
+          <p:cNvPr id="70" name="TextBox 69"/>
+          <p:cNvSpPr txBox="1"/>
+          <p:nvPr/>
+        </p:nvSpPr>
+        <p:spPr>
+          <a:xfrm>
+            <a:off x="292608" y="4165091"/>
+            <a:ext cx="2926080" cy="182880"/>
+          </a:xfrm>
+          <a:prstGeom prst="rect">
+            <a:avLst/>
+          </a:prstGeom>
+          <a:noFill/>
+        </p:spPr>
+        <p:txBody>
+          <a:bodyPr wrap="none">
+            <a:spAutoFit/>
+          </a:bodyPr>
+          <a:lstStyle/>
+          <a:p>
+            <a:pPr algn="l"/>
+            <a:r>
+              <a:rPr sz="1000" b="0" i="0">
+                <a:solidFill>
+                  <a:srgbClr val="FFFFFF"/>
+                </a:solidFill>
+                <a:latin typeface="Calibri"/>
+              </a:rPr>
+              <a:t>Bookstore note</a:t>
+            </a:r>
+          </a:p>
+        </p:txBody>
+      </p:sp>
+      <p:sp>
+        <p:nvSpPr>
+          <p:cNvPr id="71" name="TextBox 70"/>
+          <p:cNvSpPr txBox="1"/>
+          <p:nvPr/>
+        </p:nvSpPr>
+        <p:spPr>
+          <a:xfrm>
+            <a:off x="3310128" y="4165091"/>
+            <a:ext cx="1170432" cy="182880"/>
+          </a:xfrm>
+          <a:prstGeom prst="rect">
+            <a:avLst/>
+          </a:prstGeom>
+          <a:noFill/>
+        </p:spPr>
+        <p:txBody>
+          <a:bodyPr wrap="none">
+            <a:spAutoFit/>
+          </a:bodyPr>
+          <a:lstStyle/>
+          <a:p>
+            <a:pPr algn="r"/>
+            <a:r>
+              <a:rPr sz="1000" b="0" i="0">
+                <a:solidFill>
                   <a:srgbClr val="888888"/>
                 </a:solidFill>
                 <a:latin typeface="Calibri"/>
               </a:rPr>
-              <a:t/>
+              <a:t>$321K</a:t>
+            </a:r>
+          </a:p>
+        </p:txBody>
+      </p:sp>
+      <p:sp>
+        <p:nvSpPr>
+          <p:cNvPr id="72" name="TextBox 71"/>
+          <p:cNvSpPr txBox="1"/>
+          <p:nvPr/>
+        </p:nvSpPr>
+        <p:spPr>
+          <a:xfrm>
+            <a:off x="4572000" y="4165091"/>
+            <a:ext cx="1143000" cy="182880"/>
+          </a:xfrm>
+          <a:prstGeom prst="rect">
+            <a:avLst/>
+          </a:prstGeom>
+          <a:noFill/>
+        </p:spPr>
+        <p:txBody>
+          <a:bodyPr wrap="none">
+            <a:spAutoFit/>
+          </a:bodyPr>
+          <a:lstStyle/>
+          <a:p>
+            <a:pPr algn="r"/>
+            <a:r>
+              <a:rPr sz="1000" b="0" i="0">
+                <a:solidFill>
+                  <a:srgbClr val="CCCCCC"/>
+                </a:solidFill>
+                <a:latin typeface="Calibri"/>
+              </a:rPr>
+              <a:t>$224K</a:t>
+            </a:r>
+          </a:p>
+        </p:txBody>
+      </p:sp>
+      <p:sp>
+        <p:nvSpPr>
+          <p:cNvPr id="73" name="TextBox 72"/>
+          <p:cNvSpPr txBox="1"/>
+          <p:nvPr/>
+        </p:nvSpPr>
+        <p:spPr>
+          <a:xfrm>
+            <a:off x="5806440" y="4165091"/>
+            <a:ext cx="2980944" cy="182880"/>
+          </a:xfrm>
+          <a:prstGeom prst="rect">
+            <a:avLst/>
+          </a:prstGeom>
+          <a:noFill/>
+        </p:spPr>
+        <p:txBody>
+          <a:bodyPr wrap="none">
+            <a:spAutoFit/>
+          </a:bodyPr>
+          <a:lstStyle/>
+          <a:p>
+            <a:pPr algn="l"/>
+            <a:r>
+              <a:rPr sz="1000" b="0" i="1">
+                <a:solidFill>
+                  <a:srgbClr val="CCCCCC"/>
+                </a:solidFill>
+                <a:latin typeface="Calibri"/>
+              </a:rPr>
+              <a:t>$97K interest capitalized 4/30/2026</a:t>
+            </a:r>
+          </a:p>
+        </p:txBody>
+      </p:sp>
+      <p:sp>
+        <p:nvSpPr>
+          <p:cNvPr id="74" name="TextBox 73"/>
+          <p:cNvSpPr txBox="1"/>
+          <p:nvPr/>
+        </p:nvSpPr>
+        <p:spPr>
+          <a:xfrm>
+            <a:off x="292608" y="4357116"/>
+            <a:ext cx="2926080" cy="182880"/>
+          </a:xfrm>
+          <a:prstGeom prst="rect">
+            <a:avLst/>
+          </a:prstGeom>
+          <a:noFill/>
+        </p:spPr>
+        <p:txBody>
+          <a:bodyPr wrap="none">
+            <a:spAutoFit/>
+          </a:bodyPr>
+          <a:lstStyle/>
+          <a:p>
+            <a:pPr algn="l"/>
+            <a:r>
+              <a:rPr sz="1000" b="0" i="0">
+                <a:solidFill>
+                  <a:srgbClr val="FFFFFF"/>
+                </a:solidFill>
+                <a:latin typeface="Calibri"/>
+              </a:rPr>
+              <a:t>Billed ahead (est.)</a:t>
+            </a:r>
+          </a:p>
+        </p:txBody>
+      </p:sp>
+      <p:sp>
+        <p:nvSpPr>
+          <p:cNvPr id="75" name="TextBox 74"/>
+          <p:cNvSpPr txBox="1"/>
+          <p:nvPr/>
+        </p:nvSpPr>
+        <p:spPr>
+          <a:xfrm>
+            <a:off x="3310128" y="4357116"/>
+            <a:ext cx="1170432" cy="182880"/>
+          </a:xfrm>
+          <a:prstGeom prst="rect">
+            <a:avLst/>
+          </a:prstGeom>
+          <a:noFill/>
+        </p:spPr>
+        <p:txBody>
+          <a:bodyPr wrap="none">
+            <a:spAutoFit/>
+          </a:bodyPr>
+          <a:lstStyle/>
+          <a:p>
+            <a:pPr algn="r"/>
+            <a:r>
+              <a:rPr sz="1000" b="0" i="0">
+                <a:solidFill>
+                  <a:srgbClr val="888888"/>
+                </a:solidFill>
+                <a:latin typeface="Calibri"/>
+              </a:rPr>
+              <a:t>$942K</a:t>
+            </a:r>
+          </a:p>
+        </p:txBody>
+      </p:sp>
+      <p:sp>
+        <p:nvSpPr>
+          <p:cNvPr id="76" name="TextBox 75"/>
+          <p:cNvSpPr txBox="1"/>
+          <p:nvPr/>
+        </p:nvSpPr>
+        <p:spPr>
+          <a:xfrm>
+            <a:off x="4572000" y="4357116"/>
+            <a:ext cx="1143000" cy="182880"/>
+          </a:xfrm>
+          <a:prstGeom prst="rect">
+            <a:avLst/>
+          </a:prstGeom>
+          <a:noFill/>
+        </p:spPr>
+        <p:txBody>
+          <a:bodyPr wrap="none">
+            <a:spAutoFit/>
+          </a:bodyPr>
+          <a:lstStyle/>
+          <a:p>
+            <a:pPr algn="r"/>
+            <a:r>
+              <a:rPr sz="1000" b="0" i="0">
+                <a:solidFill>
+                  <a:srgbClr val="CCCCCC"/>
+                </a:solidFill>
+                <a:latin typeface="Calibri"/>
+              </a:rPr>
+              <a:t>~$100-250K</a:t>
+            </a:r>
+          </a:p>
+        </p:txBody>
+      </p:sp>
+      <p:sp>
+        <p:nvSpPr>
+          <p:cNvPr id="77" name="TextBox 76"/>
+          <p:cNvSpPr txBox="1"/>
+          <p:nvPr/>
+        </p:nvSpPr>
+        <p:spPr>
+          <a:xfrm>
+            <a:off x="5806440" y="4357116"/>
+            <a:ext cx="2980944" cy="182880"/>
+          </a:xfrm>
+          <a:prstGeom prst="rect">
+            <a:avLst/>
+          </a:prstGeom>
+          <a:noFill/>
+        </p:spPr>
+        <p:txBody>
+          <a:bodyPr wrap="none">
+            <a:spAutoFit/>
+          </a:bodyPr>
+          <a:lstStyle/>
+          <a:p>
+            <a:pPr algn="l"/>
+            <a:r>
+              <a:rPr sz="1000" b="0" i="1">
+                <a:solidFill>
+                  <a:srgbClr val="CCCCCC"/>
+                </a:solidFill>
+                <a:latin typeface="Calibri"/>
+              </a:rPr>
+              <a:t>Start-billings uncleared at ship (Motion 3)</a:t>
+            </a:r>
+          </a:p>
+        </p:txBody>
+      </p:sp>
+      <p:sp>
+        <p:nvSpPr>
+          <p:cNvPr id="78" name="TextBox 77"/>
+          <p:cNvSpPr txBox="1"/>
+          <p:nvPr/>
+        </p:nvSpPr>
+        <p:spPr>
+          <a:xfrm>
+            <a:off x="292608" y="4549140"/>
+            <a:ext cx="2926080" cy="182880"/>
+          </a:xfrm>
+          <a:prstGeom prst="rect">
+            <a:avLst/>
+          </a:prstGeom>
+          <a:noFill/>
+        </p:spPr>
+        <p:txBody>
+          <a:bodyPr wrap="none">
+            <a:spAutoFit/>
+          </a:bodyPr>
+          <a:lstStyle/>
+          <a:p>
+            <a:pPr algn="l"/>
+            <a:r>
+              <a:rPr sz="1000" b="1" i="0">
+                <a:solidFill>
+                  <a:srgbClr val="FFCC44"/>
+                </a:solidFill>
+                <a:latin typeface="Calibri"/>
+              </a:rPr>
+              <a:t>Total equity</a:t>
+            </a:r>
+          </a:p>
+        </p:txBody>
+      </p:sp>
+      <p:sp>
+        <p:nvSpPr>
+          <p:cNvPr id="79" name="TextBox 78"/>
+          <p:cNvSpPr txBox="1"/>
+          <p:nvPr/>
+        </p:nvSpPr>
+        <p:spPr>
+          <a:xfrm>
+            <a:off x="3310128" y="4549140"/>
+            <a:ext cx="1170432" cy="182880"/>
+          </a:xfrm>
+          <a:prstGeom prst="rect">
+            <a:avLst/>
+          </a:prstGeom>
+          <a:noFill/>
+        </p:spPr>
+        <p:txBody>
+          <a:bodyPr wrap="none">
+            <a:spAutoFit/>
+          </a:bodyPr>
+          <a:lstStyle/>
+          <a:p>
+            <a:pPr algn="r"/>
+            <a:r>
+              <a:rPr sz="1000" b="0" i="0">
+                <a:solidFill>
+                  <a:srgbClr val="888888"/>
+                </a:solidFill>
+                <a:latin typeface="Calibri"/>
+              </a:rPr>
+              <a:t>-$1.44M</a:t>
+            </a:r>
+          </a:p>
+        </p:txBody>
+      </p:sp>
+      <p:sp>
+        <p:nvSpPr>
+          <p:cNvPr id="80" name="TextBox 79"/>
+          <p:cNvSpPr txBox="1"/>
+          <p:nvPr/>
+        </p:nvSpPr>
+        <p:spPr>
+          <a:xfrm>
+            <a:off x="4572000" y="4549140"/>
+            <a:ext cx="1143000" cy="182880"/>
+          </a:xfrm>
+          <a:prstGeom prst="rect">
+            <a:avLst/>
+          </a:prstGeom>
+          <a:noFill/>
+        </p:spPr>
+        <p:txBody>
+          <a:bodyPr wrap="none">
+            <a:spAutoFit/>
+          </a:bodyPr>
+          <a:lstStyle/>
+          <a:p>
+            <a:pPr algn="r"/>
+            <a:r>
+              <a:rPr sz="1000" b="1" i="0">
+                <a:solidFill>
+                  <a:srgbClr val="44BB44"/>
+                </a:solidFill>
+                <a:latin typeface="Calibri"/>
+              </a:rPr>
+              <a:t>~-$1.09M+</a:t>
+            </a:r>
+          </a:p>
+        </p:txBody>
+      </p:sp>
+      <p:sp>
+        <p:nvSpPr>
+          <p:cNvPr id="81" name="TextBox 80"/>
+          <p:cNvSpPr txBox="1"/>
+          <p:nvPr/>
+        </p:nvSpPr>
+        <p:spPr>
+          <a:xfrm>
+            <a:off x="5806440" y="4549140"/>
+            <a:ext cx="2980944" cy="182880"/>
+          </a:xfrm>
+          <a:prstGeom prst="rect">
+            <a:avLst/>
+          </a:prstGeom>
+          <a:noFill/>
+        </p:spPr>
+        <p:txBody>
+          <a:bodyPr wrap="none">
+            <a:spAutoFit/>
+          </a:bodyPr>
+          <a:lstStyle/>
+          <a:p>
+            <a:pPr algn="l"/>
+            <a:r>
+              <a:rPr sz="1000" b="0" i="1">
+                <a:solidFill>
+                  <a:srgbClr val="CCCCCC"/>
+                </a:solidFill>
+                <a:latin typeface="Calibri"/>
+              </a:rPr>
+              <a:t>Credit alone; more if billed-ahead corrected</a:t>
             </a:r>
           </a:p>
         </p:txBody>

--- a/drafts/Exos_SSLC_Board_Offer_Overview_2026-10-10_r2.pptx
+++ b/drafts/Exos_SSLC_Board_Offer_Overview_2026-10-10_r2.pptx
@@ -10,6 +10,7 @@
     <p:sldId id="258" r:id="rId4"/>
     <p:sldId id="266" r:id="rId17"/>
     <p:sldId id="269" r:id="rId20"/>
+    <p:sldId id="271" r:id="rId22"/>
     <p:sldId id="259" r:id="rId5"/>
     <p:sldId id="260" r:id="rId6"/>
     <p:sldId id="261" r:id="rId7"/>
@@ -9996,6 +9997,2458 @@
 </p:sld>
 </file>
 
+<file path=ppt/slides/slide16.xml><?xml version="1.0" encoding="utf-8"?>
+<p:sld xmlns:a="http://schemas.openxmlformats.org/drawingml/2006/main" xmlns:p="http://schemas.openxmlformats.org/presentationml/2006/main" xmlns:r="http://schemas.openxmlformats.org/officeDocument/2006/relationships">
+  <p:cSld>
+    <p:spTree>
+      <p:nvGrpSpPr>
+        <p:cNvPr id="1" name=""/>
+        <p:cNvGrpSpPr/>
+        <p:nvPr/>
+      </p:nvGrpSpPr>
+      <p:grpSpPr/>
+      <p:sp>
+        <p:nvSpPr>
+          <p:cNvPr id="2" name="Rectangle 1"/>
+          <p:cNvSpPr/>
+          <p:nvPr/>
+        </p:nvSpPr>
+        <p:spPr>
+          <a:xfrm>
+            <a:off x="0" y="0"/>
+            <a:ext cx="9144000" cy="5143500"/>
+          </a:xfrm>
+          <a:prstGeom prst="rect">
+            <a:avLst/>
+          </a:prstGeom>
+          <a:solidFill>
+            <a:srgbClr val="111111"/>
+          </a:solidFill>
+          <a:ln>
+            <a:noFill/>
+          </a:ln>
+        </p:spPr>
+        <p:style>
+          <a:lnRef idx="1">
+            <a:schemeClr val="accent1"/>
+          </a:lnRef>
+          <a:fillRef idx="3">
+            <a:schemeClr val="accent1"/>
+          </a:fillRef>
+          <a:effectRef idx="2">
+            <a:schemeClr val="accent1"/>
+          </a:effectRef>
+          <a:fontRef idx="minor">
+            <a:schemeClr val="lt1"/>
+          </a:fontRef>
+        </p:style>
+        <p:txBody>
+          <a:bodyPr rtlCol="0" anchor="ctr"/>
+          <a:lstStyle/>
+          <a:p>
+            <a:pPr algn="ctr"/>
+          </a:p>
+        </p:txBody>
+      </p:sp>
+      <p:sp>
+        <p:nvSpPr>
+          <p:cNvPr id="3" name="Rectangle 2"/>
+          <p:cNvSpPr/>
+          <p:nvPr/>
+        </p:nvSpPr>
+        <p:spPr>
+          <a:xfrm>
+            <a:off x="0" y="0"/>
+            <a:ext cx="9144000" cy="50292"/>
+          </a:xfrm>
+          <a:prstGeom prst="rect">
+            <a:avLst/>
+          </a:prstGeom>
+          <a:solidFill>
+            <a:srgbClr val="F26A21"/>
+          </a:solidFill>
+          <a:ln>
+            <a:noFill/>
+          </a:ln>
+        </p:spPr>
+        <p:style>
+          <a:lnRef idx="1">
+            <a:schemeClr val="accent1"/>
+          </a:lnRef>
+          <a:fillRef idx="3">
+            <a:schemeClr val="accent1"/>
+          </a:fillRef>
+          <a:effectRef idx="2">
+            <a:schemeClr val="accent1"/>
+          </a:effectRef>
+          <a:fontRef idx="minor">
+            <a:schemeClr val="lt1"/>
+          </a:fontRef>
+        </p:style>
+        <p:txBody>
+          <a:bodyPr rtlCol="0" anchor="ctr"/>
+          <a:lstStyle/>
+          <a:p>
+            <a:pPr algn="ctr"/>
+          </a:p>
+        </p:txBody>
+      </p:sp>
+      <p:sp>
+        <p:nvSpPr>
+          <p:cNvPr id="4" name="Rectangle 3"/>
+          <p:cNvSpPr/>
+          <p:nvPr/>
+        </p:nvSpPr>
+        <p:spPr>
+          <a:xfrm>
+            <a:off x="0" y="50292"/>
+            <a:ext cx="9144000" cy="457200"/>
+          </a:xfrm>
+          <a:prstGeom prst="rect">
+            <a:avLst/>
+          </a:prstGeom>
+          <a:solidFill>
+            <a:srgbClr val="1E1E1E"/>
+          </a:solidFill>
+          <a:ln>
+            <a:noFill/>
+          </a:ln>
+        </p:spPr>
+        <p:style>
+          <a:lnRef idx="1">
+            <a:schemeClr val="accent1"/>
+          </a:lnRef>
+          <a:fillRef idx="3">
+            <a:schemeClr val="accent1"/>
+          </a:fillRef>
+          <a:effectRef idx="2">
+            <a:schemeClr val="accent1"/>
+          </a:effectRef>
+          <a:fontRef idx="minor">
+            <a:schemeClr val="lt1"/>
+          </a:fontRef>
+        </p:style>
+        <p:txBody>
+          <a:bodyPr rtlCol="0" anchor="ctr"/>
+          <a:lstStyle/>
+          <a:p>
+            <a:pPr algn="ctr"/>
+          </a:p>
+        </p:txBody>
+      </p:sp>
+      <p:sp>
+        <p:nvSpPr>
+          <p:cNvPr id="5" name="TextBox 4"/>
+          <p:cNvSpPr txBox="1"/>
+          <p:nvPr/>
+        </p:nvSpPr>
+        <p:spPr>
+          <a:xfrm>
+            <a:off x="256032" y="73152"/>
+            <a:ext cx="8631936" cy="402336"/>
+          </a:xfrm>
+          <a:prstGeom prst="rect">
+            <a:avLst/>
+          </a:prstGeom>
+          <a:noFill/>
+        </p:spPr>
+        <p:txBody>
+          <a:bodyPr wrap="none">
+            <a:spAutoFit/>
+          </a:bodyPr>
+          <a:lstStyle/>
+          <a:p>
+            <a:pPr algn="l"/>
+            <a:r>
+              <a:rPr sz="1500" b="1" i="0">
+                <a:solidFill>
+                  <a:srgbClr val="FFFFFF"/>
+                </a:solidFill>
+                <a:latin typeface="Calibri"/>
+              </a:rPr>
+              <a:t>What SSLC Shareholders Get  (answering Bob Conger)</a:t>
+            </a:r>
+          </a:p>
+        </p:txBody>
+      </p:sp>
+      <p:sp>
+        <p:nvSpPr>
+          <p:cNvPr id="6" name="Rectangle 5"/>
+          <p:cNvSpPr/>
+          <p:nvPr/>
+        </p:nvSpPr>
+        <p:spPr>
+          <a:xfrm>
+            <a:off x="4617720" y="548640"/>
+            <a:ext cx="10972" cy="1783080"/>
+          </a:xfrm>
+          <a:prstGeom prst="rect">
+            <a:avLst/>
+          </a:prstGeom>
+          <a:solidFill>
+            <a:srgbClr val="444444"/>
+          </a:solidFill>
+          <a:ln>
+            <a:noFill/>
+          </a:ln>
+        </p:spPr>
+        <p:style>
+          <a:lnRef idx="1">
+            <a:schemeClr val="accent1"/>
+          </a:lnRef>
+          <a:fillRef idx="3">
+            <a:schemeClr val="accent1"/>
+          </a:fillRef>
+          <a:effectRef idx="2">
+            <a:schemeClr val="accent1"/>
+          </a:effectRef>
+          <a:fontRef idx="minor">
+            <a:schemeClr val="lt1"/>
+          </a:fontRef>
+        </p:style>
+        <p:txBody>
+          <a:bodyPr rtlCol="0" anchor="ctr"/>
+          <a:lstStyle/>
+          <a:p>
+            <a:pPr algn="ctr"/>
+          </a:p>
+        </p:txBody>
+      </p:sp>
+      <p:sp>
+        <p:nvSpPr>
+          <p:cNvPr id="7" name="TextBox 6"/>
+          <p:cNvSpPr txBox="1"/>
+          <p:nvPr/>
+        </p:nvSpPr>
+        <p:spPr>
+          <a:xfrm>
+            <a:off x="256032" y="566928"/>
+            <a:ext cx="4206240" cy="201168"/>
+          </a:xfrm>
+          <a:prstGeom prst="rect">
+            <a:avLst/>
+          </a:prstGeom>
+          <a:noFill/>
+        </p:spPr>
+        <p:txBody>
+          <a:bodyPr wrap="none">
+            <a:spAutoFit/>
+          </a:bodyPr>
+          <a:lstStyle/>
+          <a:p>
+            <a:pPr algn="l"/>
+            <a:r>
+              <a:rPr sz="1000" b="1" i="0">
+                <a:solidFill>
+                  <a:srgbClr val="F26A21"/>
+                </a:solidFill>
+                <a:latin typeface="Calibri"/>
+              </a:rPr>
+              <a:t>Value per 1% of SSLC  (= 8,725 shares; 1⁄82 of non-Exos pool)</a:t>
+            </a:r>
+          </a:p>
+        </p:txBody>
+      </p:sp>
+      <p:sp>
+        <p:nvSpPr>
+          <p:cNvPr id="8" name="TextBox 7"/>
+          <p:cNvSpPr txBox="1"/>
+          <p:nvPr/>
+        </p:nvSpPr>
+        <p:spPr>
+          <a:xfrm>
+            <a:off x="256032" y="795528"/>
+            <a:ext cx="2286000" cy="182880"/>
+          </a:xfrm>
+          <a:prstGeom prst="rect">
+            <a:avLst/>
+          </a:prstGeom>
+          <a:noFill/>
+        </p:spPr>
+        <p:txBody>
+          <a:bodyPr wrap="none">
+            <a:spAutoFit/>
+          </a:bodyPr>
+          <a:lstStyle/>
+          <a:p>
+            <a:pPr algn="l"/>
+            <a:r>
+              <a:rPr sz="1000" b="1" i="0">
+                <a:solidFill>
+                  <a:srgbClr val="CCCCCC"/>
+                </a:solidFill>
+                <a:latin typeface="Calibri"/>
+              </a:rPr>
+              <a:t>Scenario</a:t>
+            </a:r>
+          </a:p>
+        </p:txBody>
+      </p:sp>
+      <p:sp>
+        <p:nvSpPr>
+          <p:cNvPr id="9" name="TextBox 8"/>
+          <p:cNvSpPr txBox="1"/>
+          <p:nvPr/>
+        </p:nvSpPr>
+        <p:spPr>
+          <a:xfrm>
+            <a:off x="2606040" y="795528"/>
+            <a:ext cx="713232" cy="182880"/>
+          </a:xfrm>
+          <a:prstGeom prst="rect">
+            <a:avLst/>
+          </a:prstGeom>
+          <a:noFill/>
+        </p:spPr>
+        <p:txBody>
+          <a:bodyPr wrap="none">
+            <a:spAutoFit/>
+          </a:bodyPr>
+          <a:lstStyle/>
+          <a:p>
+            <a:pPr algn="r"/>
+            <a:r>
+              <a:rPr sz="1000" b="1" i="0">
+                <a:solidFill>
+                  <a:srgbClr val="F26A21"/>
+                </a:solidFill>
+                <a:latin typeface="Calibri"/>
+              </a:rPr>
+              <a:t>Low</a:t>
+            </a:r>
+          </a:p>
+        </p:txBody>
+      </p:sp>
+      <p:sp>
+        <p:nvSpPr>
+          <p:cNvPr id="10" name="TextBox 9"/>
+          <p:cNvSpPr txBox="1"/>
+          <p:nvPr/>
+        </p:nvSpPr>
+        <p:spPr>
+          <a:xfrm>
+            <a:off x="3383280" y="795528"/>
+            <a:ext cx="694944" cy="182880"/>
+          </a:xfrm>
+          <a:prstGeom prst="rect">
+            <a:avLst/>
+          </a:prstGeom>
+          <a:noFill/>
+        </p:spPr>
+        <p:txBody>
+          <a:bodyPr wrap="none">
+            <a:spAutoFit/>
+          </a:bodyPr>
+          <a:lstStyle/>
+          <a:p>
+            <a:pPr algn="r"/>
+            <a:r>
+              <a:rPr sz="1000" b="1" i="0">
+                <a:solidFill>
+                  <a:srgbClr val="F26A21"/>
+                </a:solidFill>
+                <a:latin typeface="Calibri"/>
+              </a:rPr>
+              <a:t>Base</a:t>
+            </a:r>
+          </a:p>
+        </p:txBody>
+      </p:sp>
+      <p:sp>
+        <p:nvSpPr>
+          <p:cNvPr id="11" name="TextBox 10"/>
+          <p:cNvSpPr txBox="1"/>
+          <p:nvPr/>
+        </p:nvSpPr>
+        <p:spPr>
+          <a:xfrm>
+            <a:off x="4133087" y="795528"/>
+            <a:ext cx="658368" cy="182880"/>
+          </a:xfrm>
+          <a:prstGeom prst="rect">
+            <a:avLst/>
+          </a:prstGeom>
+          <a:noFill/>
+        </p:spPr>
+        <p:txBody>
+          <a:bodyPr wrap="none">
+            <a:spAutoFit/>
+          </a:bodyPr>
+          <a:lstStyle/>
+          <a:p>
+            <a:pPr algn="r"/>
+            <a:r>
+              <a:rPr sz="1000" b="1" i="0">
+                <a:solidFill>
+                  <a:srgbClr val="F26A21"/>
+                </a:solidFill>
+                <a:latin typeface="Calibri"/>
+              </a:rPr>
+              <a:t>High</a:t>
+            </a:r>
+          </a:p>
+        </p:txBody>
+      </p:sp>
+      <p:sp>
+        <p:nvSpPr>
+          <p:cNvPr id="12" name="Rectangle 11"/>
+          <p:cNvSpPr/>
+          <p:nvPr/>
+        </p:nvSpPr>
+        <p:spPr>
+          <a:xfrm>
+            <a:off x="256032" y="987552"/>
+            <a:ext cx="4251960" cy="7315"/>
+          </a:xfrm>
+          <a:prstGeom prst="rect">
+            <a:avLst/>
+          </a:prstGeom>
+          <a:solidFill>
+            <a:srgbClr val="444444"/>
+          </a:solidFill>
+          <a:ln>
+            <a:noFill/>
+          </a:ln>
+        </p:spPr>
+        <p:style>
+          <a:lnRef idx="1">
+            <a:schemeClr val="accent1"/>
+          </a:lnRef>
+          <a:fillRef idx="3">
+            <a:schemeClr val="accent1"/>
+          </a:fillRef>
+          <a:effectRef idx="2">
+            <a:schemeClr val="accent1"/>
+          </a:effectRef>
+          <a:fontRef idx="minor">
+            <a:schemeClr val="lt1"/>
+          </a:fontRef>
+        </p:style>
+        <p:txBody>
+          <a:bodyPr rtlCol="0" anchor="ctr"/>
+          <a:lstStyle/>
+          <a:p>
+            <a:pPr algn="ctr"/>
+          </a:p>
+        </p:txBody>
+      </p:sp>
+      <p:sp>
+        <p:nvSpPr>
+          <p:cNvPr id="13" name="TextBox 12"/>
+          <p:cNvSpPr txBox="1"/>
+          <p:nvPr/>
+        </p:nvSpPr>
+        <p:spPr>
+          <a:xfrm>
+            <a:off x="256032" y="1005840"/>
+            <a:ext cx="2286000" cy="246888"/>
+          </a:xfrm>
+          <a:prstGeom prst="rect">
+            <a:avLst/>
+          </a:prstGeom>
+          <a:noFill/>
+        </p:spPr>
+        <p:txBody>
+          <a:bodyPr wrap="none">
+            <a:spAutoFit/>
+          </a:bodyPr>
+          <a:lstStyle/>
+          <a:p>
+            <a:pPr algn="l"/>
+            <a:r>
+              <a:rPr sz="1000" b="0" i="0">
+                <a:solidFill>
+                  <a:srgbClr val="FFFFFF"/>
+                </a:solidFill>
+                <a:latin typeface="Calibri"/>
+              </a:rPr>
+              <a:t>At close, cash only  (as booked)</a:t>
+            </a:r>
+          </a:p>
+        </p:txBody>
+      </p:sp>
+      <p:sp>
+        <p:nvSpPr>
+          <p:cNvPr id="14" name="TextBox 13"/>
+          <p:cNvSpPr txBox="1"/>
+          <p:nvPr/>
+        </p:nvSpPr>
+        <p:spPr>
+          <a:xfrm>
+            <a:off x="2606040" y="1005840"/>
+            <a:ext cx="713232" cy="246888"/>
+          </a:xfrm>
+          <a:prstGeom prst="rect">
+            <a:avLst/>
+          </a:prstGeom>
+          <a:noFill/>
+        </p:spPr>
+        <p:txBody>
+          <a:bodyPr wrap="none">
+            <a:spAutoFit/>
+          </a:bodyPr>
+          <a:lstStyle/>
+          <a:p>
+            <a:pPr algn="r"/>
+            <a:r>
+              <a:rPr sz="1000" b="0" i="0">
+                <a:solidFill>
+                  <a:srgbClr val="FFFFFF"/>
+                </a:solidFill>
+                <a:latin typeface="Calibri"/>
+              </a:rPr>
+              <a:t>$15.6K</a:t>
+            </a:r>
+          </a:p>
+        </p:txBody>
+      </p:sp>
+      <p:sp>
+        <p:nvSpPr>
+          <p:cNvPr id="15" name="TextBox 14"/>
+          <p:cNvSpPr txBox="1"/>
+          <p:nvPr/>
+        </p:nvSpPr>
+        <p:spPr>
+          <a:xfrm>
+            <a:off x="3383280" y="1005840"/>
+            <a:ext cx="694944" cy="246888"/>
+          </a:xfrm>
+          <a:prstGeom prst="rect">
+            <a:avLst/>
+          </a:prstGeom>
+          <a:noFill/>
+        </p:spPr>
+        <p:txBody>
+          <a:bodyPr wrap="none">
+            <a:spAutoFit/>
+          </a:bodyPr>
+          <a:lstStyle/>
+          <a:p>
+            <a:pPr algn="r"/>
+            <a:r>
+              <a:rPr sz="1000" b="1" i="0">
+                <a:solidFill>
+                  <a:srgbClr val="44BB44"/>
+                </a:solidFill>
+                <a:latin typeface="Calibri"/>
+              </a:rPr>
+              <a:t>$18.4K</a:t>
+            </a:r>
+          </a:p>
+        </p:txBody>
+      </p:sp>
+      <p:sp>
+        <p:nvSpPr>
+          <p:cNvPr id="16" name="TextBox 15"/>
+          <p:cNvSpPr txBox="1"/>
+          <p:nvPr/>
+        </p:nvSpPr>
+        <p:spPr>
+          <a:xfrm>
+            <a:off x="4133087" y="1005840"/>
+            <a:ext cx="658368" cy="246888"/>
+          </a:xfrm>
+          <a:prstGeom prst="rect">
+            <a:avLst/>
+          </a:prstGeom>
+          <a:noFill/>
+        </p:spPr>
+        <p:txBody>
+          <a:bodyPr wrap="none">
+            <a:spAutoFit/>
+          </a:bodyPr>
+          <a:lstStyle/>
+          <a:p>
+            <a:pPr algn="r"/>
+            <a:r>
+              <a:rPr sz="1000" b="0" i="0">
+                <a:solidFill>
+                  <a:srgbClr val="FFFFFF"/>
+                </a:solidFill>
+                <a:latin typeface="Calibri"/>
+              </a:rPr>
+              <a:t>$21.2K</a:t>
+            </a:r>
+          </a:p>
+        </p:txBody>
+      </p:sp>
+      <p:sp>
+        <p:nvSpPr>
+          <p:cNvPr id="17" name="TextBox 16"/>
+          <p:cNvSpPr txBox="1"/>
+          <p:nvPr/>
+        </p:nvSpPr>
+        <p:spPr>
+          <a:xfrm>
+            <a:off x="256032" y="1252728"/>
+            <a:ext cx="2286000" cy="246888"/>
+          </a:xfrm>
+          <a:prstGeom prst="rect">
+            <a:avLst/>
+          </a:prstGeom>
+          <a:noFill/>
+        </p:spPr>
+        <p:txBody>
+          <a:bodyPr wrap="none">
+            <a:spAutoFit/>
+          </a:bodyPr>
+          <a:lstStyle/>
+          <a:p>
+            <a:pPr algn="l"/>
+            <a:r>
+              <a:rPr sz="1000" b="0" i="0">
+                <a:solidFill>
+                  <a:srgbClr val="CCCCCC"/>
+                </a:solidFill>
+                <a:latin typeface="Calibri"/>
+              </a:rPr>
+              <a:t>At close, books corrected  (+$351K)</a:t>
+            </a:r>
+          </a:p>
+        </p:txBody>
+      </p:sp>
+      <p:sp>
+        <p:nvSpPr>
+          <p:cNvPr id="18" name="TextBox 17"/>
+          <p:cNvSpPr txBox="1"/>
+          <p:nvPr/>
+        </p:nvSpPr>
+        <p:spPr>
+          <a:xfrm>
+            <a:off x="2606040" y="1252728"/>
+            <a:ext cx="713232" cy="246888"/>
+          </a:xfrm>
+          <a:prstGeom prst="rect">
+            <a:avLst/>
+          </a:prstGeom>
+          <a:noFill/>
+        </p:spPr>
+        <p:txBody>
+          <a:bodyPr wrap="none">
+            <a:spAutoFit/>
+          </a:bodyPr>
+          <a:lstStyle/>
+          <a:p>
+            <a:pPr algn="r"/>
+            <a:r>
+              <a:rPr sz="1000" b="0" i="0">
+                <a:solidFill>
+                  <a:srgbClr val="CCCCCC"/>
+                </a:solidFill>
+                <a:latin typeface="Calibri"/>
+              </a:rPr>
+              <a:t>—</a:t>
+            </a:r>
+          </a:p>
+        </p:txBody>
+      </p:sp>
+      <p:sp>
+        <p:nvSpPr>
+          <p:cNvPr id="19" name="TextBox 18"/>
+          <p:cNvSpPr txBox="1"/>
+          <p:nvPr/>
+        </p:nvSpPr>
+        <p:spPr>
+          <a:xfrm>
+            <a:off x="3383280" y="1252728"/>
+            <a:ext cx="694944" cy="246888"/>
+          </a:xfrm>
+          <a:prstGeom prst="rect">
+            <a:avLst/>
+          </a:prstGeom>
+          <a:noFill/>
+        </p:spPr>
+        <p:txBody>
+          <a:bodyPr wrap="none">
+            <a:spAutoFit/>
+          </a:bodyPr>
+          <a:lstStyle/>
+          <a:p>
+            <a:pPr algn="r"/>
+            <a:r>
+              <a:rPr sz="1000" b="1" i="0">
+                <a:solidFill>
+                  <a:srgbClr val="FFCC44"/>
+                </a:solidFill>
+                <a:latin typeface="Calibri"/>
+              </a:rPr>
+              <a:t>$22.6K</a:t>
+            </a:r>
+          </a:p>
+        </p:txBody>
+      </p:sp>
+      <p:sp>
+        <p:nvSpPr>
+          <p:cNvPr id="20" name="TextBox 19"/>
+          <p:cNvSpPr txBox="1"/>
+          <p:nvPr/>
+        </p:nvSpPr>
+        <p:spPr>
+          <a:xfrm>
+            <a:off x="4133087" y="1252728"/>
+            <a:ext cx="658368" cy="246888"/>
+          </a:xfrm>
+          <a:prstGeom prst="rect">
+            <a:avLst/>
+          </a:prstGeom>
+          <a:noFill/>
+        </p:spPr>
+        <p:txBody>
+          <a:bodyPr wrap="none">
+            <a:spAutoFit/>
+          </a:bodyPr>
+          <a:lstStyle/>
+          <a:p>
+            <a:pPr algn="r"/>
+            <a:r>
+              <a:rPr sz="1000" b="0" i="0">
+                <a:solidFill>
+                  <a:srgbClr val="CCCCCC"/>
+                </a:solidFill>
+                <a:latin typeface="Calibri"/>
+              </a:rPr>
+              <a:t>—</a:t>
+            </a:r>
+          </a:p>
+        </p:txBody>
+      </p:sp>
+      <p:sp>
+        <p:nvSpPr>
+          <p:cNvPr id="21" name="TextBox 20"/>
+          <p:cNvSpPr txBox="1"/>
+          <p:nvPr/>
+        </p:nvSpPr>
+        <p:spPr>
+          <a:xfrm>
+            <a:off x="256032" y="1499616"/>
+            <a:ext cx="2286000" cy="246888"/>
+          </a:xfrm>
+          <a:prstGeom prst="rect">
+            <a:avLst/>
+          </a:prstGeom>
+          <a:noFill/>
+        </p:spPr>
+        <p:txBody>
+          <a:bodyPr wrap="none">
+            <a:spAutoFit/>
+          </a:bodyPr>
+          <a:lstStyle/>
+          <a:p>
+            <a:pPr algn="l"/>
+            <a:r>
+              <a:rPr sz="1000" b="0" i="0">
+                <a:solidFill>
+                  <a:srgbClr val="FFFFFF"/>
+                </a:solidFill>
+                <a:latin typeface="Calibri"/>
+              </a:rPr>
+              <a:t>5-year, Structure A  (low/base/high)</a:t>
+            </a:r>
+          </a:p>
+        </p:txBody>
+      </p:sp>
+      <p:sp>
+        <p:nvSpPr>
+          <p:cNvPr id="22" name="TextBox 21"/>
+          <p:cNvSpPr txBox="1"/>
+          <p:nvPr/>
+        </p:nvSpPr>
+        <p:spPr>
+          <a:xfrm>
+            <a:off x="2606040" y="1499616"/>
+            <a:ext cx="713232" cy="246888"/>
+          </a:xfrm>
+          <a:prstGeom prst="rect">
+            <a:avLst/>
+          </a:prstGeom>
+          <a:noFill/>
+        </p:spPr>
+        <p:txBody>
+          <a:bodyPr wrap="none">
+            <a:spAutoFit/>
+          </a:bodyPr>
+          <a:lstStyle/>
+          <a:p>
+            <a:pPr algn="r"/>
+            <a:r>
+              <a:rPr sz="1000" b="0" i="0">
+                <a:solidFill>
+                  <a:srgbClr val="FFFFFF"/>
+                </a:solidFill>
+                <a:latin typeface="Calibri"/>
+              </a:rPr>
+              <a:t>$41.0K</a:t>
+            </a:r>
+          </a:p>
+        </p:txBody>
+      </p:sp>
+      <p:sp>
+        <p:nvSpPr>
+          <p:cNvPr id="23" name="TextBox 22"/>
+          <p:cNvSpPr txBox="1"/>
+          <p:nvPr/>
+        </p:nvSpPr>
+        <p:spPr>
+          <a:xfrm>
+            <a:off x="3383280" y="1499616"/>
+            <a:ext cx="694944" cy="246888"/>
+          </a:xfrm>
+          <a:prstGeom prst="rect">
+            <a:avLst/>
+          </a:prstGeom>
+          <a:noFill/>
+        </p:spPr>
+        <p:txBody>
+          <a:bodyPr wrap="none">
+            <a:spAutoFit/>
+          </a:bodyPr>
+          <a:lstStyle/>
+          <a:p>
+            <a:pPr algn="r"/>
+            <a:r>
+              <a:rPr sz="1000" b="1" i="0">
+                <a:solidFill>
+                  <a:srgbClr val="44BB44"/>
+                </a:solidFill>
+                <a:latin typeface="Calibri"/>
+              </a:rPr>
+              <a:t>$63.0K</a:t>
+            </a:r>
+          </a:p>
+        </p:txBody>
+      </p:sp>
+      <p:sp>
+        <p:nvSpPr>
+          <p:cNvPr id="24" name="TextBox 23"/>
+          <p:cNvSpPr txBox="1"/>
+          <p:nvPr/>
+        </p:nvSpPr>
+        <p:spPr>
+          <a:xfrm>
+            <a:off x="4133087" y="1499616"/>
+            <a:ext cx="658368" cy="246888"/>
+          </a:xfrm>
+          <a:prstGeom prst="rect">
+            <a:avLst/>
+          </a:prstGeom>
+          <a:noFill/>
+        </p:spPr>
+        <p:txBody>
+          <a:bodyPr wrap="none">
+            <a:spAutoFit/>
+          </a:bodyPr>
+          <a:lstStyle/>
+          <a:p>
+            <a:pPr algn="r"/>
+            <a:r>
+              <a:rPr sz="1000" b="0" i="0">
+                <a:solidFill>
+                  <a:srgbClr val="FFFFFF"/>
+                </a:solidFill>
+                <a:latin typeface="Calibri"/>
+              </a:rPr>
+              <a:t>$85.1K</a:t>
+            </a:r>
+          </a:p>
+        </p:txBody>
+      </p:sp>
+      <p:sp>
+        <p:nvSpPr>
+          <p:cNvPr id="25" name="TextBox 24"/>
+          <p:cNvSpPr txBox="1"/>
+          <p:nvPr/>
+        </p:nvSpPr>
+        <p:spPr>
+          <a:xfrm>
+            <a:off x="256032" y="1746504"/>
+            <a:ext cx="2286000" cy="246888"/>
+          </a:xfrm>
+          <a:prstGeom prst="rect">
+            <a:avLst/>
+          </a:prstGeom>
+          <a:noFill/>
+        </p:spPr>
+        <p:txBody>
+          <a:bodyPr wrap="none">
+            <a:spAutoFit/>
+          </a:bodyPr>
+          <a:lstStyle/>
+          <a:p>
+            <a:pPr algn="l"/>
+            <a:r>
+              <a:rPr sz="1000" b="0" i="0">
+                <a:solidFill>
+                  <a:srgbClr val="DD4444"/>
+                </a:solidFill>
+                <a:latin typeface="Calibri"/>
+              </a:rPr>
+              <a:t>No sale  (book equity −$1.44M today)</a:t>
+            </a:r>
+          </a:p>
+        </p:txBody>
+      </p:sp>
+      <p:sp>
+        <p:nvSpPr>
+          <p:cNvPr id="26" name="TextBox 25"/>
+          <p:cNvSpPr txBox="1"/>
+          <p:nvPr/>
+        </p:nvSpPr>
+        <p:spPr>
+          <a:xfrm>
+            <a:off x="2606040" y="1746504"/>
+            <a:ext cx="713232" cy="246888"/>
+          </a:xfrm>
+          <a:prstGeom prst="rect">
+            <a:avLst/>
+          </a:prstGeom>
+          <a:noFill/>
+        </p:spPr>
+        <p:txBody>
+          <a:bodyPr wrap="none">
+            <a:spAutoFit/>
+          </a:bodyPr>
+          <a:lstStyle/>
+          <a:p>
+            <a:pPr algn="r"/>
+            <a:r>
+              <a:rPr sz="1000" b="0" i="0">
+                <a:solidFill>
+                  <a:srgbClr val="DD4444"/>
+                </a:solidFill>
+                <a:latin typeface="Calibri"/>
+              </a:rPr>
+              <a:t>$0</a:t>
+            </a:r>
+          </a:p>
+        </p:txBody>
+      </p:sp>
+      <p:sp>
+        <p:nvSpPr>
+          <p:cNvPr id="27" name="TextBox 26"/>
+          <p:cNvSpPr txBox="1"/>
+          <p:nvPr/>
+        </p:nvSpPr>
+        <p:spPr>
+          <a:xfrm>
+            <a:off x="3383280" y="1746504"/>
+            <a:ext cx="694944" cy="246888"/>
+          </a:xfrm>
+          <a:prstGeom prst="rect">
+            <a:avLst/>
+          </a:prstGeom>
+          <a:noFill/>
+        </p:spPr>
+        <p:txBody>
+          <a:bodyPr wrap="none">
+            <a:spAutoFit/>
+          </a:bodyPr>
+          <a:lstStyle/>
+          <a:p>
+            <a:pPr algn="r"/>
+            <a:r>
+              <a:rPr sz="1000" b="0" i="0">
+                <a:solidFill>
+                  <a:srgbClr val="DD4444"/>
+                </a:solidFill>
+                <a:latin typeface="Calibri"/>
+              </a:rPr>
+              <a:t>$0</a:t>
+            </a:r>
+          </a:p>
+        </p:txBody>
+      </p:sp>
+      <p:sp>
+        <p:nvSpPr>
+          <p:cNvPr id="28" name="TextBox 27"/>
+          <p:cNvSpPr txBox="1"/>
+          <p:nvPr/>
+        </p:nvSpPr>
+        <p:spPr>
+          <a:xfrm>
+            <a:off x="4133087" y="1746504"/>
+            <a:ext cx="658368" cy="246888"/>
+          </a:xfrm>
+          <a:prstGeom prst="rect">
+            <a:avLst/>
+          </a:prstGeom>
+          <a:noFill/>
+        </p:spPr>
+        <p:txBody>
+          <a:bodyPr wrap="none">
+            <a:spAutoFit/>
+          </a:bodyPr>
+          <a:lstStyle/>
+          <a:p>
+            <a:pPr algn="r"/>
+            <a:r>
+              <a:rPr sz="1000" b="0" i="0">
+                <a:solidFill>
+                  <a:srgbClr val="DD4444"/>
+                </a:solidFill>
+                <a:latin typeface="Calibri"/>
+              </a:rPr>
+              <a:t>—</a:t>
+            </a:r>
+          </a:p>
+        </p:txBody>
+      </p:sp>
+      <p:sp>
+        <p:nvSpPr>
+          <p:cNvPr id="29" name="TextBox 28"/>
+          <p:cNvSpPr txBox="1"/>
+          <p:nvPr/>
+        </p:nvSpPr>
+        <p:spPr>
+          <a:xfrm>
+            <a:off x="256032" y="2029968"/>
+            <a:ext cx="4251960" cy="182880"/>
+          </a:xfrm>
+          <a:prstGeom prst="rect">
+            <a:avLst/>
+          </a:prstGeom>
+          <a:noFill/>
+        </p:spPr>
+        <p:txBody>
+          <a:bodyPr wrap="none">
+            <a:spAutoFit/>
+          </a:bodyPr>
+          <a:lstStyle/>
+          <a:p>
+            <a:pPr algn="l"/>
+            <a:r>
+              <a:rPr sz="1000" b="0" i="1">
+                <a:solidFill>
+                  <a:srgbClr val="CCCCCC"/>
+                </a:solidFill>
+                <a:latin typeface="Calibri"/>
+              </a:rPr>
+              <a:t>Per share (base):  $2.10 at close  ·  $7.22 over 5 years</a:t>
+            </a:r>
+          </a:p>
+        </p:txBody>
+      </p:sp>
+      <p:sp>
+        <p:nvSpPr>
+          <p:cNvPr id="30" name="TextBox 29"/>
+          <p:cNvSpPr txBox="1"/>
+          <p:nvPr/>
+        </p:nvSpPr>
+        <p:spPr>
+          <a:xfrm>
+            <a:off x="4736592" y="566928"/>
+            <a:ext cx="4160520" cy="201168"/>
+          </a:xfrm>
+          <a:prstGeom prst="rect">
+            <a:avLst/>
+          </a:prstGeom>
+          <a:noFill/>
+        </p:spPr>
+        <p:txBody>
+          <a:bodyPr wrap="none">
+            <a:spAutoFit/>
+          </a:bodyPr>
+          <a:lstStyle/>
+          <a:p>
+            <a:pPr algn="l"/>
+            <a:r>
+              <a:rPr sz="1100" b="1" i="0">
+                <a:solidFill>
+                  <a:srgbClr val="F26A21"/>
+                </a:solidFill>
+                <a:latin typeface="Calibri"/>
+              </a:rPr>
+              <a:t>Bob Conger — 73,000 shares</a:t>
+            </a:r>
+          </a:p>
+        </p:txBody>
+      </p:sp>
+      <p:sp>
+        <p:nvSpPr>
+          <p:cNvPr id="31" name="TextBox 30"/>
+          <p:cNvSpPr txBox="1"/>
+          <p:nvPr/>
+        </p:nvSpPr>
+        <p:spPr>
+          <a:xfrm>
+            <a:off x="4736592" y="795528"/>
+            <a:ext cx="4160520" cy="201168"/>
+          </a:xfrm>
+          <a:prstGeom prst="rect">
+            <a:avLst/>
+          </a:prstGeom>
+          <a:noFill/>
+        </p:spPr>
+        <p:txBody>
+          <a:bodyPr wrap="none">
+            <a:spAutoFit/>
+          </a:bodyPr>
+          <a:lstStyle/>
+          <a:p>
+            <a:pPr algn="l"/>
+            <a:r>
+              <a:rPr sz="1000" b="0" i="0">
+                <a:solidFill>
+                  <a:srgbClr val="CCCCCC"/>
+                </a:solidFill>
+                <a:latin typeface="Calibri"/>
+              </a:rPr>
+              <a:t>8.37% of SSLC  ·  10.21% of payout distributions</a:t>
+            </a:r>
+          </a:p>
+        </p:txBody>
+      </p:sp>
+      <p:sp>
+        <p:nvSpPr>
+          <p:cNvPr id="32" name="TextBox 31"/>
+          <p:cNvSpPr txBox="1"/>
+          <p:nvPr/>
+        </p:nvSpPr>
+        <p:spPr>
+          <a:xfrm>
+            <a:off x="4736592" y="932688"/>
+            <a:ext cx="4160520" cy="182880"/>
+          </a:xfrm>
+          <a:prstGeom prst="rect">
+            <a:avLst/>
+          </a:prstGeom>
+          <a:noFill/>
+        </p:spPr>
+        <p:txBody>
+          <a:bodyPr wrap="none">
+            <a:spAutoFit/>
+          </a:bodyPr>
+          <a:lstStyle/>
+          <a:p>
+            <a:pPr algn="l"/>
+            <a:r>
+              <a:rPr sz="1000" b="0" i="1">
+                <a:solidFill>
+                  <a:srgbClr val="888888"/>
+                </a:solidFill>
+                <a:latin typeface="Calibri"/>
+              </a:rPr>
+              <a:t>Cert #3 (44,000) + Cert #43 (29,000)</a:t>
+            </a:r>
+          </a:p>
+        </p:txBody>
+      </p:sp>
+      <p:sp>
+        <p:nvSpPr>
+          <p:cNvPr id="33" name="TextBox 32"/>
+          <p:cNvSpPr txBox="1"/>
+          <p:nvPr/>
+        </p:nvSpPr>
+        <p:spPr>
+          <a:xfrm>
+            <a:off x="4736592" y="1170432"/>
+            <a:ext cx="2286000" cy="219456"/>
+          </a:xfrm>
+          <a:prstGeom prst="rect">
+            <a:avLst/>
+          </a:prstGeom>
+          <a:noFill/>
+        </p:spPr>
+        <p:txBody>
+          <a:bodyPr wrap="none">
+            <a:spAutoFit/>
+          </a:bodyPr>
+          <a:lstStyle/>
+          <a:p>
+            <a:pPr algn="l"/>
+            <a:r>
+              <a:rPr sz="1000" b="0" i="0">
+                <a:solidFill>
+                  <a:srgbClr val="CCCCCC"/>
+                </a:solidFill>
+                <a:latin typeface="Calibri"/>
+              </a:rPr>
+              <a:t>At close  (as booked):</a:t>
+            </a:r>
+          </a:p>
+        </p:txBody>
+      </p:sp>
+      <p:sp>
+        <p:nvSpPr>
+          <p:cNvPr id="34" name="TextBox 33"/>
+          <p:cNvSpPr txBox="1"/>
+          <p:nvPr/>
+        </p:nvSpPr>
+        <p:spPr>
+          <a:xfrm>
+            <a:off x="7068312" y="1170432"/>
+            <a:ext cx="1828800" cy="219456"/>
+          </a:xfrm>
+          <a:prstGeom prst="rect">
+            <a:avLst/>
+          </a:prstGeom>
+          <a:noFill/>
+        </p:spPr>
+        <p:txBody>
+          <a:bodyPr wrap="none">
+            <a:spAutoFit/>
+          </a:bodyPr>
+          <a:lstStyle/>
+          <a:p>
+            <a:pPr algn="r"/>
+            <a:r>
+              <a:rPr sz="1000" b="1" i="0">
+                <a:solidFill>
+                  <a:srgbClr val="44BB44"/>
+                </a:solidFill>
+                <a:latin typeface="Calibri"/>
+              </a:rPr>
+              <a:t>~$153.7K</a:t>
+            </a:r>
+          </a:p>
+        </p:txBody>
+      </p:sp>
+      <p:sp>
+        <p:nvSpPr>
+          <p:cNvPr id="35" name="TextBox 34"/>
+          <p:cNvSpPr txBox="1"/>
+          <p:nvPr/>
+        </p:nvSpPr>
+        <p:spPr>
+          <a:xfrm>
+            <a:off x="4736592" y="1399032"/>
+            <a:ext cx="2286000" cy="219456"/>
+          </a:xfrm>
+          <a:prstGeom prst="rect">
+            <a:avLst/>
+          </a:prstGeom>
+          <a:noFill/>
+        </p:spPr>
+        <p:txBody>
+          <a:bodyPr wrap="none">
+            <a:spAutoFit/>
+          </a:bodyPr>
+          <a:lstStyle/>
+          <a:p>
+            <a:pPr algn="l"/>
+            <a:r>
+              <a:rPr sz="1000" b="0" i="0">
+                <a:solidFill>
+                  <a:srgbClr val="CCCCCC"/>
+                </a:solidFill>
+                <a:latin typeface="Calibri"/>
+              </a:rPr>
+              <a:t>At close  (books corrected):</a:t>
+            </a:r>
+          </a:p>
+        </p:txBody>
+      </p:sp>
+      <p:sp>
+        <p:nvSpPr>
+          <p:cNvPr id="36" name="TextBox 35"/>
+          <p:cNvSpPr txBox="1"/>
+          <p:nvPr/>
+        </p:nvSpPr>
+        <p:spPr>
+          <a:xfrm>
+            <a:off x="7068312" y="1399032"/>
+            <a:ext cx="1828800" cy="219456"/>
+          </a:xfrm>
+          <a:prstGeom prst="rect">
+            <a:avLst/>
+          </a:prstGeom>
+          <a:noFill/>
+        </p:spPr>
+        <p:txBody>
+          <a:bodyPr wrap="none">
+            <a:spAutoFit/>
+          </a:bodyPr>
+          <a:lstStyle/>
+          <a:p>
+            <a:pPr algn="r"/>
+            <a:r>
+              <a:rPr sz="1000" b="1" i="0">
+                <a:solidFill>
+                  <a:srgbClr val="FFCC44"/>
+                </a:solidFill>
+                <a:latin typeface="Calibri"/>
+              </a:rPr>
+              <a:t>~$189.5K</a:t>
+            </a:r>
+          </a:p>
+        </p:txBody>
+      </p:sp>
+      <p:sp>
+        <p:nvSpPr>
+          <p:cNvPr id="37" name="TextBox 36"/>
+          <p:cNvSpPr txBox="1"/>
+          <p:nvPr/>
+        </p:nvSpPr>
+        <p:spPr>
+          <a:xfrm>
+            <a:off x="4736592" y="1627632"/>
+            <a:ext cx="2286000" cy="219456"/>
+          </a:xfrm>
+          <a:prstGeom prst="rect">
+            <a:avLst/>
+          </a:prstGeom>
+          <a:noFill/>
+        </p:spPr>
+        <p:txBody>
+          <a:bodyPr wrap="none">
+            <a:spAutoFit/>
+          </a:bodyPr>
+          <a:lstStyle/>
+          <a:p>
+            <a:pPr algn="l"/>
+            <a:r>
+              <a:rPr sz="1000" b="0" i="0">
+                <a:solidFill>
+                  <a:srgbClr val="CCCCCC"/>
+                </a:solidFill>
+                <a:latin typeface="Calibri"/>
+              </a:rPr>
+              <a:t>5-year base:</a:t>
+            </a:r>
+          </a:p>
+        </p:txBody>
+      </p:sp>
+      <p:sp>
+        <p:nvSpPr>
+          <p:cNvPr id="38" name="TextBox 37"/>
+          <p:cNvSpPr txBox="1"/>
+          <p:nvPr/>
+        </p:nvSpPr>
+        <p:spPr>
+          <a:xfrm>
+            <a:off x="7068312" y="1627632"/>
+            <a:ext cx="1828800" cy="219456"/>
+          </a:xfrm>
+          <a:prstGeom prst="rect">
+            <a:avLst/>
+          </a:prstGeom>
+          <a:noFill/>
+        </p:spPr>
+        <p:txBody>
+          <a:bodyPr wrap="none">
+            <a:spAutoFit/>
+          </a:bodyPr>
+          <a:lstStyle/>
+          <a:p>
+            <a:pPr algn="r"/>
+            <a:r>
+              <a:rPr sz="1000" b="1" i="0">
+                <a:solidFill>
+                  <a:srgbClr val="FFCC44"/>
+                </a:solidFill>
+                <a:latin typeface="Calibri"/>
+              </a:rPr>
+              <a:t>~$527K</a:t>
+            </a:r>
+          </a:p>
+        </p:txBody>
+      </p:sp>
+      <p:sp>
+        <p:nvSpPr>
+          <p:cNvPr id="39" name="TextBox 38"/>
+          <p:cNvSpPr txBox="1"/>
+          <p:nvPr/>
+        </p:nvSpPr>
+        <p:spPr>
+          <a:xfrm>
+            <a:off x="4736592" y="1856232"/>
+            <a:ext cx="2286000" cy="219456"/>
+          </a:xfrm>
+          <a:prstGeom prst="rect">
+            <a:avLst/>
+          </a:prstGeom>
+          <a:noFill/>
+        </p:spPr>
+        <p:txBody>
+          <a:bodyPr wrap="none">
+            <a:spAutoFit/>
+          </a:bodyPr>
+          <a:lstStyle/>
+          <a:p>
+            <a:pPr algn="l"/>
+            <a:r>
+              <a:rPr sz="1000" b="0" i="0">
+                <a:solidFill>
+                  <a:srgbClr val="CCCCCC"/>
+                </a:solidFill>
+                <a:latin typeface="Calibri"/>
+              </a:rPr>
+              <a:t>Paid in (est., ~$49.1K):</a:t>
+            </a:r>
+          </a:p>
+        </p:txBody>
+      </p:sp>
+      <p:sp>
+        <p:nvSpPr>
+          <p:cNvPr id="40" name="TextBox 39"/>
+          <p:cNvSpPr txBox="1"/>
+          <p:nvPr/>
+        </p:nvSpPr>
+        <p:spPr>
+          <a:xfrm>
+            <a:off x="7068312" y="1856232"/>
+            <a:ext cx="1828800" cy="219456"/>
+          </a:xfrm>
+          <a:prstGeom prst="rect">
+            <a:avLst/>
+          </a:prstGeom>
+          <a:noFill/>
+        </p:spPr>
+        <p:txBody>
+          <a:bodyPr wrap="none">
+            <a:spAutoFit/>
+          </a:bodyPr>
+          <a:lstStyle/>
+          <a:p>
+            <a:pPr algn="r"/>
+            <a:r>
+              <a:rPr sz="1000" b="1" i="0">
+                <a:solidFill>
+                  <a:srgbClr val="CCCCCC"/>
+                </a:solidFill>
+                <a:latin typeface="Calibri"/>
+              </a:rPr>
+              <a:t>10.7× return at 5-yr base</a:t>
+            </a:r>
+          </a:p>
+        </p:txBody>
+      </p:sp>
+      <p:sp>
+        <p:nvSpPr>
+          <p:cNvPr id="41" name="TextBox 40"/>
+          <p:cNvSpPr txBox="1"/>
+          <p:nvPr/>
+        </p:nvSpPr>
+        <p:spPr>
+          <a:xfrm>
+            <a:off x="4736592" y="2121408"/>
+            <a:ext cx="4160520" cy="384048"/>
+          </a:xfrm>
+          <a:prstGeom prst="rect">
+            <a:avLst/>
+          </a:prstGeom>
+          <a:noFill/>
+        </p:spPr>
+        <p:txBody>
+          <a:bodyPr wrap="square">
+            <a:spAutoFit/>
+          </a:bodyPr>
+          <a:lstStyle/>
+          <a:p>
+            <a:pPr algn="l"/>
+            <a:r>
+              <a:rPr sz="1000" b="0" i="1">
+                <a:solidFill>
+                  <a:srgbClr val="FFCC44"/>
+                </a:solidFill>
+                <a:latin typeface="Calibri"/>
+              </a:rPr>
+              <a:t>⚠ SSLC’s 6/3/2026 ledger lists only 29K shares (cert #43); cert #3 (44K) is missing.
+Motion 2 corrects the share register.</a:t>
+            </a:r>
+          </a:p>
+        </p:txBody>
+      </p:sp>
+      <p:sp>
+        <p:nvSpPr>
+          <p:cNvPr id="42" name="Rectangle 41"/>
+          <p:cNvSpPr/>
+          <p:nvPr/>
+        </p:nvSpPr>
+        <p:spPr>
+          <a:xfrm>
+            <a:off x="0" y="2596896"/>
+            <a:ext cx="9144000" cy="877824"/>
+          </a:xfrm>
+          <a:prstGeom prst="rect">
+            <a:avLst/>
+          </a:prstGeom>
+          <a:solidFill>
+            <a:srgbClr val="2A1800"/>
+          </a:solidFill>
+          <a:ln>
+            <a:noFill/>
+          </a:ln>
+        </p:spPr>
+        <p:style>
+          <a:lnRef idx="1">
+            <a:schemeClr val="accent1"/>
+          </a:lnRef>
+          <a:fillRef idx="3">
+            <a:schemeClr val="accent1"/>
+          </a:fillRef>
+          <a:effectRef idx="2">
+            <a:schemeClr val="accent1"/>
+          </a:effectRef>
+          <a:fontRef idx="minor">
+            <a:schemeClr val="lt1"/>
+          </a:fontRef>
+        </p:style>
+        <p:txBody>
+          <a:bodyPr rtlCol="0" anchor="ctr"/>
+          <a:lstStyle/>
+          <a:p>
+            <a:pPr algn="ctr"/>
+          </a:p>
+        </p:txBody>
+      </p:sp>
+      <p:sp>
+        <p:nvSpPr>
+          <p:cNvPr id="43" name="Rectangle 42"/>
+          <p:cNvSpPr/>
+          <p:nvPr/>
+        </p:nvSpPr>
+        <p:spPr>
+          <a:xfrm>
+            <a:off x="0" y="2596896"/>
+            <a:ext cx="9144000" cy="18288"/>
+          </a:xfrm>
+          <a:prstGeom prst="rect">
+            <a:avLst/>
+          </a:prstGeom>
+          <a:solidFill>
+            <a:srgbClr val="CC8800"/>
+          </a:solidFill>
+          <a:ln>
+            <a:noFill/>
+          </a:ln>
+        </p:spPr>
+        <p:style>
+          <a:lnRef idx="1">
+            <a:schemeClr val="accent1"/>
+          </a:lnRef>
+          <a:fillRef idx="3">
+            <a:schemeClr val="accent1"/>
+          </a:fillRef>
+          <a:effectRef idx="2">
+            <a:schemeClr val="accent1"/>
+          </a:effectRef>
+          <a:fontRef idx="minor">
+            <a:schemeClr val="lt1"/>
+          </a:fontRef>
+        </p:style>
+        <p:txBody>
+          <a:bodyPr rtlCol="0" anchor="ctr"/>
+          <a:lstStyle/>
+          <a:p>
+            <a:pPr algn="ctr"/>
+          </a:p>
+        </p:txBody>
+      </p:sp>
+      <p:sp>
+        <p:nvSpPr>
+          <p:cNvPr id="44" name="TextBox 43"/>
+          <p:cNvSpPr txBox="1"/>
+          <p:nvPr/>
+        </p:nvSpPr>
+        <p:spPr>
+          <a:xfrm>
+            <a:off x="256032" y="2624327"/>
+            <a:ext cx="8631936" cy="182880"/>
+          </a:xfrm>
+          <a:prstGeom prst="rect">
+            <a:avLst/>
+          </a:prstGeom>
+          <a:noFill/>
+        </p:spPr>
+        <p:txBody>
+          <a:bodyPr wrap="none">
+            <a:spAutoFit/>
+          </a:bodyPr>
+          <a:lstStyle/>
+          <a:p>
+            <a:pPr algn="l"/>
+            <a:r>
+              <a:rPr sz="1000" b="1" i="0">
+                <a:solidFill>
+                  <a:srgbClr val="CC8800"/>
+                </a:solidFill>
+                <a:latin typeface="Calibri"/>
+              </a:rPr>
+              <a:t>IMPACT OF UNCORRECTED APRIL 30 ENTRIES  (negative to non-Wertz holders)</a:t>
+            </a:r>
+          </a:p>
+        </p:txBody>
+      </p:sp>
+      <p:sp>
+        <p:nvSpPr>
+          <p:cNvPr id="45" name="TextBox 44"/>
+          <p:cNvSpPr txBox="1"/>
+          <p:nvPr/>
+        </p:nvSpPr>
+        <p:spPr>
+          <a:xfrm>
+            <a:off x="256032" y="2834639"/>
+            <a:ext cx="4754880" cy="201168"/>
+          </a:xfrm>
+          <a:prstGeom prst="rect">
+            <a:avLst/>
+          </a:prstGeom>
+          <a:noFill/>
+        </p:spPr>
+        <p:txBody>
+          <a:bodyPr wrap="none">
+            <a:spAutoFit/>
+          </a:bodyPr>
+          <a:lstStyle/>
+          <a:p>
+            <a:pPr algn="l"/>
+            <a:r>
+              <a:rPr sz="1000" b="0" i="0">
+                <a:solidFill>
+                  <a:srgbClr val="CCCCCC"/>
+                </a:solidFill>
+                <a:latin typeface="Calibri"/>
+              </a:rPr>
+              <a:t>Step 1  —  Facility credit + capitalized interest ($448K not credited):</a:t>
+            </a:r>
+          </a:p>
+        </p:txBody>
+      </p:sp>
+      <p:sp>
+        <p:nvSpPr>
+          <p:cNvPr id="46" name="TextBox 45"/>
+          <p:cNvSpPr txBox="1"/>
+          <p:nvPr/>
+        </p:nvSpPr>
+        <p:spPr>
+          <a:xfrm>
+            <a:off x="5074920" y="2834639"/>
+            <a:ext cx="1645920" cy="201168"/>
+          </a:xfrm>
+          <a:prstGeom prst="rect">
+            <a:avLst/>
+          </a:prstGeom>
+          <a:noFill/>
+        </p:spPr>
+        <p:txBody>
+          <a:bodyPr wrap="none">
+            <a:spAutoFit/>
+          </a:bodyPr>
+          <a:lstStyle/>
+          <a:p>
+            <a:pPr algn="r"/>
+            <a:r>
+              <a:rPr sz="1000" b="1" i="0">
+                <a:solidFill>
+                  <a:srgbClr val="DD4444"/>
+                </a:solidFill>
+                <a:latin typeface="Calibri"/>
+              </a:rPr>
+              <a:t>Per 1%: −$5.5K</a:t>
+            </a:r>
+          </a:p>
+        </p:txBody>
+      </p:sp>
+      <p:sp>
+        <p:nvSpPr>
+          <p:cNvPr id="47" name="TextBox 46"/>
+          <p:cNvSpPr txBox="1"/>
+          <p:nvPr/>
+        </p:nvSpPr>
+        <p:spPr>
+          <a:xfrm>
+            <a:off x="6748272" y="2834639"/>
+            <a:ext cx="164592" cy="201168"/>
+          </a:xfrm>
+          <a:prstGeom prst="rect">
+            <a:avLst/>
+          </a:prstGeom>
+          <a:noFill/>
+        </p:spPr>
+        <p:txBody>
+          <a:bodyPr wrap="none">
+            <a:spAutoFit/>
+          </a:bodyPr>
+          <a:lstStyle/>
+          <a:p>
+            <a:pPr algn="ctr"/>
+            <a:r>
+              <a:rPr sz="1000" b="0" i="0">
+                <a:solidFill>
+                  <a:srgbClr val="888888"/>
+                </a:solidFill>
+                <a:latin typeface="Calibri"/>
+              </a:rPr>
+              <a:t>|</a:t>
+            </a:r>
+          </a:p>
+        </p:txBody>
+      </p:sp>
+      <p:sp>
+        <p:nvSpPr>
+          <p:cNvPr id="48" name="TextBox 47"/>
+          <p:cNvSpPr txBox="1"/>
+          <p:nvPr/>
+        </p:nvSpPr>
+        <p:spPr>
+          <a:xfrm>
+            <a:off x="6931152" y="2834639"/>
+            <a:ext cx="1920240" cy="201168"/>
+          </a:xfrm>
+          <a:prstGeom prst="rect">
+            <a:avLst/>
+          </a:prstGeom>
+          <a:noFill/>
+        </p:spPr>
+        <p:txBody>
+          <a:bodyPr wrap="none">
+            <a:spAutoFit/>
+          </a:bodyPr>
+          <a:lstStyle/>
+          <a:p>
+            <a:pPr algn="r"/>
+            <a:r>
+              <a:rPr sz="1000" b="1" i="0">
+                <a:solidFill>
+                  <a:srgbClr val="DD4444"/>
+                </a:solidFill>
+                <a:latin typeface="Calibri"/>
+              </a:rPr>
+              <a:t>Conger: −$45.8K</a:t>
+            </a:r>
+          </a:p>
+        </p:txBody>
+      </p:sp>
+      <p:sp>
+        <p:nvSpPr>
+          <p:cNvPr id="49" name="TextBox 48"/>
+          <p:cNvSpPr txBox="1"/>
+          <p:nvPr/>
+        </p:nvSpPr>
+        <p:spPr>
+          <a:xfrm>
+            <a:off x="256032" y="3090672"/>
+            <a:ext cx="4754880" cy="201168"/>
+          </a:xfrm>
+          <a:prstGeom prst="rect">
+            <a:avLst/>
+          </a:prstGeom>
+          <a:noFill/>
+        </p:spPr>
+        <p:txBody>
+          <a:bodyPr wrap="none">
+            <a:spAutoFit/>
+          </a:bodyPr>
+          <a:lstStyle/>
+          <a:p>
+            <a:pPr algn="l"/>
+            <a:r>
+              <a:rPr sz="1000" b="0" i="0">
+                <a:solidFill>
+                  <a:srgbClr val="CCCCCC"/>
+                </a:solidFill>
+                <a:latin typeface="Calibri"/>
+              </a:rPr>
+              <a:t>Step 1+2  —  + Unsupported offsets if unresolved ($967K):</a:t>
+            </a:r>
+          </a:p>
+        </p:txBody>
+      </p:sp>
+      <p:sp>
+        <p:nvSpPr>
+          <p:cNvPr id="50" name="TextBox 49"/>
+          <p:cNvSpPr txBox="1"/>
+          <p:nvPr/>
+        </p:nvSpPr>
+        <p:spPr>
+          <a:xfrm>
+            <a:off x="5074920" y="3090672"/>
+            <a:ext cx="1645920" cy="201168"/>
+          </a:xfrm>
+          <a:prstGeom prst="rect">
+            <a:avLst/>
+          </a:prstGeom>
+          <a:noFill/>
+        </p:spPr>
+        <p:txBody>
+          <a:bodyPr wrap="none">
+            <a:spAutoFit/>
+          </a:bodyPr>
+          <a:lstStyle/>
+          <a:p>
+            <a:pPr algn="r"/>
+            <a:r>
+              <a:rPr sz="1000" b="1" i="0">
+                <a:solidFill>
+                  <a:srgbClr val="DD4444"/>
+                </a:solidFill>
+                <a:latin typeface="Calibri"/>
+              </a:rPr>
+              <a:t>Per 1%: −$11.8K</a:t>
+            </a:r>
+          </a:p>
+        </p:txBody>
+      </p:sp>
+      <p:sp>
+        <p:nvSpPr>
+          <p:cNvPr id="51" name="TextBox 50"/>
+          <p:cNvSpPr txBox="1"/>
+          <p:nvPr/>
+        </p:nvSpPr>
+        <p:spPr>
+          <a:xfrm>
+            <a:off x="6748272" y="3090672"/>
+            <a:ext cx="164592" cy="201168"/>
+          </a:xfrm>
+          <a:prstGeom prst="rect">
+            <a:avLst/>
+          </a:prstGeom>
+          <a:noFill/>
+        </p:spPr>
+        <p:txBody>
+          <a:bodyPr wrap="none">
+            <a:spAutoFit/>
+          </a:bodyPr>
+          <a:lstStyle/>
+          <a:p>
+            <a:pPr algn="ctr"/>
+            <a:r>
+              <a:rPr sz="1000" b="0" i="0">
+                <a:solidFill>
+                  <a:srgbClr val="888888"/>
+                </a:solidFill>
+                <a:latin typeface="Calibri"/>
+              </a:rPr>
+              <a:t>|</a:t>
+            </a:r>
+          </a:p>
+        </p:txBody>
+      </p:sp>
+      <p:sp>
+        <p:nvSpPr>
+          <p:cNvPr id="52" name="TextBox 51"/>
+          <p:cNvSpPr txBox="1"/>
+          <p:nvPr/>
+        </p:nvSpPr>
+        <p:spPr>
+          <a:xfrm>
+            <a:off x="6931152" y="3090672"/>
+            <a:ext cx="1920240" cy="201168"/>
+          </a:xfrm>
+          <a:prstGeom prst="rect">
+            <a:avLst/>
+          </a:prstGeom>
+          <a:noFill/>
+        </p:spPr>
+        <p:txBody>
+          <a:bodyPr wrap="none">
+            <a:spAutoFit/>
+          </a:bodyPr>
+          <a:lstStyle/>
+          <a:p>
+            <a:pPr algn="r"/>
+            <a:r>
+              <a:rPr sz="1000" b="1" i="0">
+                <a:solidFill>
+                  <a:srgbClr val="DD4444"/>
+                </a:solidFill>
+                <a:latin typeface="Calibri"/>
+              </a:rPr>
+              <a:t>Conger: −$98.7K  (Microcosm would owe SSLC)</a:t>
+            </a:r>
+          </a:p>
+        </p:txBody>
+      </p:sp>
+      <p:sp>
+        <p:nvSpPr>
+          <p:cNvPr id="53" name="Rectangle 52"/>
+          <p:cNvSpPr/>
+          <p:nvPr/>
+        </p:nvSpPr>
+        <p:spPr>
+          <a:xfrm>
+            <a:off x="0" y="3529584"/>
+            <a:ext cx="4572000" cy="1207007"/>
+          </a:xfrm>
+          <a:prstGeom prst="rect">
+            <a:avLst/>
+          </a:prstGeom>
+          <a:solidFill>
+            <a:srgbClr val="0A1A0A"/>
+          </a:solidFill>
+          <a:ln>
+            <a:noFill/>
+          </a:ln>
+        </p:spPr>
+        <p:style>
+          <a:lnRef idx="1">
+            <a:schemeClr val="accent1"/>
+          </a:lnRef>
+          <a:fillRef idx="3">
+            <a:schemeClr val="accent1"/>
+          </a:fillRef>
+          <a:effectRef idx="2">
+            <a:schemeClr val="accent1"/>
+          </a:effectRef>
+          <a:fontRef idx="minor">
+            <a:schemeClr val="lt1"/>
+          </a:fontRef>
+        </p:style>
+        <p:txBody>
+          <a:bodyPr rtlCol="0" anchor="ctr"/>
+          <a:lstStyle/>
+          <a:p>
+            <a:pPr algn="ctr"/>
+          </a:p>
+        </p:txBody>
+      </p:sp>
+      <p:sp>
+        <p:nvSpPr>
+          <p:cNvPr id="54" name="Rectangle 53"/>
+          <p:cNvSpPr/>
+          <p:nvPr/>
+        </p:nvSpPr>
+        <p:spPr>
+          <a:xfrm>
+            <a:off x="4572000" y="3529584"/>
+            <a:ext cx="4572000" cy="1207007"/>
+          </a:xfrm>
+          <a:prstGeom prst="rect">
+            <a:avLst/>
+          </a:prstGeom>
+          <a:solidFill>
+            <a:srgbClr val="1A0808"/>
+          </a:solidFill>
+          <a:ln>
+            <a:noFill/>
+          </a:ln>
+        </p:spPr>
+        <p:style>
+          <a:lnRef idx="1">
+            <a:schemeClr val="accent1"/>
+          </a:lnRef>
+          <a:fillRef idx="3">
+            <a:schemeClr val="accent1"/>
+          </a:fillRef>
+          <a:effectRef idx="2">
+            <a:schemeClr val="accent1"/>
+          </a:effectRef>
+          <a:fontRef idx="minor">
+            <a:schemeClr val="lt1"/>
+          </a:fontRef>
+        </p:style>
+        <p:txBody>
+          <a:bodyPr rtlCol="0" anchor="ctr"/>
+          <a:lstStyle/>
+          <a:p>
+            <a:pPr algn="ctr"/>
+          </a:p>
+        </p:txBody>
+      </p:sp>
+      <p:sp>
+        <p:nvSpPr>
+          <p:cNvPr id="55" name="Rectangle 54"/>
+          <p:cNvSpPr/>
+          <p:nvPr/>
+        </p:nvSpPr>
+        <p:spPr>
+          <a:xfrm>
+            <a:off x="0" y="3529584"/>
+            <a:ext cx="9144000" cy="16459"/>
+          </a:xfrm>
+          <a:prstGeom prst="rect">
+            <a:avLst/>
+          </a:prstGeom>
+          <a:solidFill>
+            <a:srgbClr val="337733"/>
+          </a:solidFill>
+          <a:ln>
+            <a:noFill/>
+          </a:ln>
+        </p:spPr>
+        <p:style>
+          <a:lnRef idx="1">
+            <a:schemeClr val="accent1"/>
+          </a:lnRef>
+          <a:fillRef idx="3">
+            <a:schemeClr val="accent1"/>
+          </a:fillRef>
+          <a:effectRef idx="2">
+            <a:schemeClr val="accent1"/>
+          </a:effectRef>
+          <a:fontRef idx="minor">
+            <a:schemeClr val="lt1"/>
+          </a:fontRef>
+        </p:style>
+        <p:txBody>
+          <a:bodyPr rtlCol="0" anchor="ctr"/>
+          <a:lstStyle/>
+          <a:p>
+            <a:pPr algn="ctr"/>
+          </a:p>
+        </p:txBody>
+      </p:sp>
+      <p:sp>
+        <p:nvSpPr>
+          <p:cNvPr id="56" name="Rectangle 55"/>
+          <p:cNvSpPr/>
+          <p:nvPr/>
+        </p:nvSpPr>
+        <p:spPr>
+          <a:xfrm>
+            <a:off x="4572000" y="3529584"/>
+            <a:ext cx="10972" cy="1207007"/>
+          </a:xfrm>
+          <a:prstGeom prst="rect">
+            <a:avLst/>
+          </a:prstGeom>
+          <a:solidFill>
+            <a:srgbClr val="444444"/>
+          </a:solidFill>
+          <a:ln>
+            <a:noFill/>
+          </a:ln>
+        </p:spPr>
+        <p:style>
+          <a:lnRef idx="1">
+            <a:schemeClr val="accent1"/>
+          </a:lnRef>
+          <a:fillRef idx="3">
+            <a:schemeClr val="accent1"/>
+          </a:fillRef>
+          <a:effectRef idx="2">
+            <a:schemeClr val="accent1"/>
+          </a:effectRef>
+          <a:fontRef idx="minor">
+            <a:schemeClr val="lt1"/>
+          </a:fontRef>
+        </p:style>
+        <p:txBody>
+          <a:bodyPr rtlCol="0" anchor="ctr"/>
+          <a:lstStyle/>
+          <a:p>
+            <a:pPr algn="ctr"/>
+          </a:p>
+        </p:txBody>
+      </p:sp>
+      <p:sp>
+        <p:nvSpPr>
+          <p:cNvPr id="57" name="TextBox 56"/>
+          <p:cNvSpPr txBox="1"/>
+          <p:nvPr/>
+        </p:nvSpPr>
+        <p:spPr>
+          <a:xfrm>
+            <a:off x="256032" y="3566160"/>
+            <a:ext cx="4114800" cy="201168"/>
+          </a:xfrm>
+          <a:prstGeom prst="rect">
+            <a:avLst/>
+          </a:prstGeom>
+          <a:noFill/>
+        </p:spPr>
+        <p:txBody>
+          <a:bodyPr wrap="none">
+            <a:spAutoFit/>
+          </a:bodyPr>
+          <a:lstStyle/>
+          <a:p>
+            <a:pPr algn="l"/>
+            <a:r>
+              <a:rPr sz="1100" b="1" i="0">
+                <a:solidFill>
+                  <a:srgbClr val="44BB44"/>
+                </a:solidFill>
+                <a:latin typeface="Calibri"/>
+              </a:rPr>
+              <a:t>✔  SELL TO EXOS</a:t>
+            </a:r>
+          </a:p>
+        </p:txBody>
+      </p:sp>
+      <p:sp>
+        <p:nvSpPr>
+          <p:cNvPr id="58" name="TextBox 57"/>
+          <p:cNvSpPr txBox="1"/>
+          <p:nvPr/>
+        </p:nvSpPr>
+        <p:spPr>
+          <a:xfrm>
+            <a:off x="4736592" y="3566160"/>
+            <a:ext cx="4114800" cy="201168"/>
+          </a:xfrm>
+          <a:prstGeom prst="rect">
+            <a:avLst/>
+          </a:prstGeom>
+          <a:noFill/>
+        </p:spPr>
+        <p:txBody>
+          <a:bodyPr wrap="none">
+            <a:spAutoFit/>
+          </a:bodyPr>
+          <a:lstStyle/>
+          <a:p>
+            <a:pPr algn="l"/>
+            <a:r>
+              <a:rPr sz="1100" b="1" i="0">
+                <a:solidFill>
+                  <a:srgbClr val="DD4444"/>
+                </a:solidFill>
+                <a:latin typeface="Calibri"/>
+              </a:rPr>
+              <a:t>✘  DECLINE</a:t>
+            </a:r>
+          </a:p>
+        </p:txBody>
+      </p:sp>
+      <p:sp>
+        <p:nvSpPr>
+          <p:cNvPr id="59" name="TextBox 58"/>
+          <p:cNvSpPr txBox="1"/>
+          <p:nvPr/>
+        </p:nvSpPr>
+        <p:spPr>
+          <a:xfrm>
+            <a:off x="457200" y="3785615"/>
+            <a:ext cx="3977639" cy="201168"/>
+          </a:xfrm>
+          <a:prstGeom prst="rect">
+            <a:avLst/>
+          </a:prstGeom>
+          <a:noFill/>
+        </p:spPr>
+        <p:txBody>
+          <a:bodyPr wrap="none">
+            <a:spAutoFit/>
+          </a:bodyPr>
+          <a:lstStyle/>
+          <a:p>
+            <a:pPr algn="l"/>
+            <a:r>
+              <a:rPr sz="1000" b="0" i="0">
+                <a:solidFill>
+                  <a:srgbClr val="44BB44"/>
+                </a:solidFill>
+                <a:latin typeface="Calibri"/>
+              </a:rPr>
+              <a:t>~$18–23K per 1% in cash at close</a:t>
+            </a:r>
+          </a:p>
+        </p:txBody>
+      </p:sp>
+      <p:sp>
+        <p:nvSpPr>
+          <p:cNvPr id="60" name="TextBox 59"/>
+          <p:cNvSpPr txBox="1"/>
+          <p:nvPr/>
+        </p:nvSpPr>
+        <p:spPr>
+          <a:xfrm>
+            <a:off x="4736592" y="3785615"/>
+            <a:ext cx="4160520" cy="201168"/>
+          </a:xfrm>
+          <a:prstGeom prst="rect">
+            <a:avLst/>
+          </a:prstGeom>
+          <a:noFill/>
+        </p:spPr>
+        <p:txBody>
+          <a:bodyPr wrap="none">
+            <a:spAutoFit/>
+          </a:bodyPr>
+          <a:lstStyle/>
+          <a:p>
+            <a:pPr algn="l"/>
+            <a:r>
+              <a:rPr sz="1000" b="0" i="0">
+                <a:solidFill>
+                  <a:srgbClr val="DD4444"/>
+                </a:solidFill>
+                <a:latin typeface="Calibri"/>
+              </a:rPr>
+              <a:t>$0 per 1% at book value today (−$1.44M equity)</a:t>
+            </a:r>
+          </a:p>
+        </p:txBody>
+      </p:sp>
+      <p:sp>
+        <p:nvSpPr>
+          <p:cNvPr id="61" name="TextBox 60"/>
+          <p:cNvSpPr txBox="1"/>
+          <p:nvPr/>
+        </p:nvSpPr>
+        <p:spPr>
+          <a:xfrm>
+            <a:off x="457200" y="4005072"/>
+            <a:ext cx="3977639" cy="201168"/>
+          </a:xfrm>
+          <a:prstGeom prst="rect">
+            <a:avLst/>
+          </a:prstGeom>
+          <a:noFill/>
+        </p:spPr>
+        <p:txBody>
+          <a:bodyPr wrap="none">
+            <a:spAutoFit/>
+          </a:bodyPr>
+          <a:lstStyle/>
+          <a:p>
+            <a:pPr algn="l"/>
+            <a:r>
+              <a:rPr sz="1000" b="0" i="0">
+                <a:solidFill>
+                  <a:srgbClr val="44BB44"/>
+                </a:solidFill>
+                <a:latin typeface="Calibri"/>
+              </a:rPr>
+              <a:t>~$63K per 1% over 5 years (Structure A)</a:t>
+            </a:r>
+          </a:p>
+        </p:txBody>
+      </p:sp>
+      <p:sp>
+        <p:nvSpPr>
+          <p:cNvPr id="62" name="TextBox 61"/>
+          <p:cNvSpPr txBox="1"/>
+          <p:nvPr/>
+        </p:nvSpPr>
+        <p:spPr>
+          <a:xfrm>
+            <a:off x="4736592" y="4005072"/>
+            <a:ext cx="4160520" cy="201168"/>
+          </a:xfrm>
+          <a:prstGeom prst="rect">
+            <a:avLst/>
+          </a:prstGeom>
+          <a:noFill/>
+        </p:spPr>
+        <p:txBody>
+          <a:bodyPr wrap="none">
+            <a:spAutoFit/>
+          </a:bodyPr>
+          <a:lstStyle/>
+          <a:p>
+            <a:pPr algn="l"/>
+            <a:r>
+              <a:rPr sz="1000" b="0" i="0">
+                <a:solidFill>
+                  <a:srgbClr val="DD4444"/>
+                </a:solidFill>
+                <a:latin typeface="Calibri"/>
+              </a:rPr>
+              <a:t>$5.1M FY27 target still requires doubling last 3mo</a:t>
+            </a:r>
+          </a:p>
+        </p:txBody>
+      </p:sp>
+      <p:sp>
+        <p:nvSpPr>
+          <p:cNvPr id="63" name="TextBox 62"/>
+          <p:cNvSpPr txBox="1"/>
+          <p:nvPr/>
+        </p:nvSpPr>
+        <p:spPr>
+          <a:xfrm>
+            <a:off x="457200" y="4224528"/>
+            <a:ext cx="3977639" cy="201168"/>
+          </a:xfrm>
+          <a:prstGeom prst="rect">
+            <a:avLst/>
+          </a:prstGeom>
+          <a:noFill/>
+        </p:spPr>
+        <p:txBody>
+          <a:bodyPr wrap="none">
+            <a:spAutoFit/>
+          </a:bodyPr>
+          <a:lstStyle/>
+          <a:p>
+            <a:pPr algn="l"/>
+            <a:r>
+              <a:rPr sz="1000" b="0" i="0">
+                <a:solidFill>
+                  <a:srgbClr val="44BB44"/>
+                </a:solidFill>
+                <a:latin typeface="Calibri"/>
+              </a:rPr>
+              <a:t>Books corrected  ·  funding risk removed</a:t>
+            </a:r>
+          </a:p>
+        </p:txBody>
+      </p:sp>
+      <p:sp>
+        <p:nvSpPr>
+          <p:cNvPr id="64" name="TextBox 63"/>
+          <p:cNvSpPr txBox="1"/>
+          <p:nvPr/>
+        </p:nvSpPr>
+        <p:spPr>
+          <a:xfrm>
+            <a:off x="4736592" y="4224528"/>
+            <a:ext cx="4160520" cy="201168"/>
+          </a:xfrm>
+          <a:prstGeom prst="rect">
+            <a:avLst/>
+          </a:prstGeom>
+          <a:noFill/>
+        </p:spPr>
+        <p:txBody>
+          <a:bodyPr wrap="none">
+            <a:spAutoFit/>
+          </a:bodyPr>
+          <a:lstStyle/>
+          <a:p>
+            <a:pPr algn="l"/>
+            <a:r>
+              <a:rPr sz="1000" b="0" i="0">
+                <a:solidFill>
+                  <a:srgbClr val="DD4444"/>
+                </a:solidFill>
+                <a:latin typeface="Calibri"/>
+              </a:rPr>
+              <a:t>Insider balances ($864K as booked) paid first</a:t>
+            </a:r>
+          </a:p>
+        </p:txBody>
+      </p:sp>
+      <p:sp>
+        <p:nvSpPr>
+          <p:cNvPr id="65" name="TextBox 64"/>
+          <p:cNvSpPr txBox="1"/>
+          <p:nvPr/>
+        </p:nvSpPr>
+        <p:spPr>
+          <a:xfrm>
+            <a:off x="256032" y="4480560"/>
+            <a:ext cx="8631936" cy="182880"/>
+          </a:xfrm>
+          <a:prstGeom prst="rect">
+            <a:avLst/>
+          </a:prstGeom>
+          <a:noFill/>
+        </p:spPr>
+        <p:txBody>
+          <a:bodyPr wrap="none">
+            <a:spAutoFit/>
+          </a:bodyPr>
+          <a:lstStyle/>
+          <a:p>
+            <a:pPr algn="l"/>
+            <a:r>
+              <a:rPr sz="1000" b="0" i="1">
+                <a:solidFill>
+                  <a:srgbClr val="CCCCCC"/>
+                </a:solidFill>
+                <a:latin typeface="Calibri"/>
+              </a:rPr>
+              <a:t>Declining means believing SSLC alone beats this without new capital.</a:t>
+            </a:r>
+          </a:p>
+        </p:txBody>
+      </p:sp>
+      <p:sp>
+        <p:nvSpPr>
+          <p:cNvPr id="66" name="TextBox 65"/>
+          <p:cNvSpPr txBox="1"/>
+          <p:nvPr/>
+        </p:nvSpPr>
+        <p:spPr>
+          <a:xfrm>
+            <a:off x="256032" y="4736592"/>
+            <a:ext cx="8631936" cy="137160"/>
+          </a:xfrm>
+          <a:prstGeom prst="rect">
+            <a:avLst/>
+          </a:prstGeom>
+          <a:noFill/>
+        </p:spPr>
+        <p:txBody>
+          <a:bodyPr wrap="none">
+            <a:spAutoFit/>
+          </a:bodyPr>
+          <a:lstStyle/>
+          <a:p>
+            <a:pPr algn="l"/>
+            <a:r>
+              <a:rPr sz="1000" b="0" i="1">
+                <a:solidFill>
+                  <a:srgbClr val="888888"/>
+                </a:solidFill>
+                <a:latin typeface="Calibri"/>
+              </a:rPr>
+              <a:t>Projection, not a guarantee. Amounts estimated from SSLC QuickBooks (10/11/2026) and the 08-2024 share register.</a:t>
+            </a:r>
+          </a:p>
+        </p:txBody>
+      </p:sp>
+      <p:sp>
+        <p:nvSpPr>
+          <p:cNvPr id="67" name="TextBox 66"/>
+          <p:cNvSpPr txBox="1"/>
+          <p:nvPr/>
+        </p:nvSpPr>
+        <p:spPr>
+          <a:xfrm>
+            <a:off x="3200400" y="4910328"/>
+            <a:ext cx="2743200" cy="201168"/>
+          </a:xfrm>
+          <a:prstGeom prst="rect">
+            <a:avLst/>
+          </a:prstGeom>
+          <a:noFill/>
+        </p:spPr>
+        <p:txBody>
+          <a:bodyPr wrap="none">
+            <a:spAutoFit/>
+          </a:bodyPr>
+          <a:lstStyle/>
+          <a:p>
+            <a:pPr algn="ctr"/>
+            <a:r>
+              <a:rPr sz="1000" b="0" i="0">
+                <a:solidFill>
+                  <a:srgbClr val="888888"/>
+                </a:solidFill>
+                <a:latin typeface="Calibri"/>
+              </a:rPr>
+              <a:t>DRAFT — NEGOTIATING TERMS</a:t>
+            </a:r>
+          </a:p>
+        </p:txBody>
+      </p:sp>
+      <p:sp>
+        <p:nvSpPr>
+          <p:cNvPr id="68" name="TextBox 67"/>
+          <p:cNvSpPr txBox="1"/>
+          <p:nvPr/>
+        </p:nvSpPr>
+        <p:spPr>
+          <a:xfrm>
+            <a:off x="7863840" y="4910328"/>
+            <a:ext cx="1188720" cy="201168"/>
+          </a:xfrm>
+          <a:prstGeom prst="rect">
+            <a:avLst/>
+          </a:prstGeom>
+          <a:noFill/>
+        </p:spPr>
+        <p:txBody>
+          <a:bodyPr wrap="none">
+            <a:spAutoFit/>
+          </a:bodyPr>
+          <a:lstStyle/>
+          <a:p>
+            <a:pPr algn="r"/>
+            <a:r>
+              <a:rPr sz="1000" b="0" i="0">
+                <a:solidFill>
+                  <a:srgbClr val="888888"/>
+                </a:solidFill>
+                <a:latin typeface="Calibri"/>
+              </a:rPr>
+              <a:t>CONFIDENTIAL</a:t>
+            </a:r>
+          </a:p>
+        </p:txBody>
+      </p:sp>
+    </p:spTree>
+  </p:cSld>
+  <p:clrMapOvr>
+    <a:masterClrMapping/>
+  </p:clrMapOvr>
+</p:sld>
+</file>
+
 <file path=ppt/slides/slide2.xml><?xml version="1.0" encoding="utf-8"?>
 <p:sld xmlns:a="http://schemas.openxmlformats.org/drawingml/2006/main" xmlns:r="http://schemas.openxmlformats.org/officeDocument/2006/relationships" xmlns:p="http://schemas.openxmlformats.org/presentationml/2006/main">
   <p:cSld name="Slide 2">

--- a/drafts/Exos_SSLC_Board_Offer_Overview_2026-10-10_r2.pptx
+++ b/drafts/Exos_SSLC_Board_Offer_Overview_2026-10-10_r2.pptx
@@ -16644,7 +16644,7 @@
                 </a:solidFill>
                 <a:latin typeface="Calibri"/>
               </a:rPr>
-              <a:t>Value per 1% of SSLC  (= 8,725 shares; 1⁄82 of non-Exos pool)</a:t>
+              <a:t>Value per 1% of SSLC  (= 8,725 shares; 1/82 of non-Exos pool)</a:t>
             </a:r>
           </a:p>
         </p:txBody>
@@ -16762,8 +16762,8 @@
         </p:nvSpPr>
         <p:spPr>
           <a:xfrm>
-            <a:off x="4133087" y="795528"/>
-            <a:ext cx="658368" cy="182880"/>
+            <a:off x="4050791" y="795528"/>
+            <a:ext cx="548640" cy="182880"/>
           </a:xfrm>
           <a:prstGeom prst="rect">
             <a:avLst/>
@@ -16945,8 +16945,8 @@
         </p:nvSpPr>
         <p:spPr>
           <a:xfrm>
-            <a:off x="4133087" y="1005840"/>
-            <a:ext cx="658368" cy="246888"/>
+            <a:off x="4050791" y="1005840"/>
+            <a:ext cx="548640" cy="246888"/>
           </a:xfrm>
           <a:prstGeom prst="rect">
             <a:avLst/>
@@ -17085,8 +17085,8 @@
         </p:nvSpPr>
         <p:spPr>
           <a:xfrm>
-            <a:off x="4133087" y="1252728"/>
-            <a:ext cx="658368" cy="246888"/>
+            <a:off x="4050791" y="1252728"/>
+            <a:ext cx="548640" cy="246888"/>
           </a:xfrm>
           <a:prstGeom prst="rect">
             <a:avLst/>
@@ -17225,8 +17225,8 @@
         </p:nvSpPr>
         <p:spPr>
           <a:xfrm>
-            <a:off x="4133087" y="1499616"/>
-            <a:ext cx="658368" cy="246888"/>
+            <a:off x="4050791" y="1499616"/>
+            <a:ext cx="548640" cy="246888"/>
           </a:xfrm>
           <a:prstGeom prst="rect">
             <a:avLst/>
@@ -17365,8 +17365,8 @@
         </p:nvSpPr>
         <p:spPr>
           <a:xfrm>
-            <a:off x="4133087" y="1746504"/>
-            <a:ext cx="658368" cy="246888"/>
+            <a:off x="4050791" y="1746504"/>
+            <a:ext cx="548640" cy="246888"/>
           </a:xfrm>
           <a:prstGeom prst="rect">
             <a:avLst/>

--- a/drafts/Exos_SSLC_Board_Offer_Overview_2026-10-10_r2.pptx
+++ b/drafts/Exos_SSLC_Board_Offer_Overview_2026-10-10_r2.pptx
@@ -15315,57 +15315,64 @@
           <a:noFill/>
         </p:spPr>
         <p:txBody>
+          <a:bodyPr wrap="none">
+            <a:spAutoFit/>
+          </a:bodyPr>
+          <a:lstStyle/>
+          <a:p>
+            <a:r>
+              <a:rPr lang="en-US" b="1" sz="1000">
+                <a:solidFill>
+                  <a:srgbClr val="FFFFFF"/>
+                </a:solidFill>
+                <a:latin typeface="Calibri"/>
+              </a:rPr>
+              <a:t>Carried in Workman's Comp acct (1480); not shown as a receivable</a:t>
+            </a:r>
+          </a:p>
+        </p:txBody>
+      </p:sp>
+      <p:sp>
+        <p:nvSpPr>
+          <p:cNvPr id="17" name="TextBox 16"/>
+          <p:cNvSpPr txBox="1"/>
+          <p:nvPr/>
+        </p:nvSpPr>
+        <p:spPr>
+          <a:xfrm>
+            <a:off x="1152144" y="1947672"/>
+            <a:ext cx="3246120" cy="534924"/>
+          </a:xfrm>
+          <a:prstGeom prst="rect">
+            <a:avLst/>
+          </a:prstGeom>
+          <a:noFill/>
+        </p:spPr>
+        <p:txBody>
           <a:bodyPr wrap="square">
             <a:spAutoFit/>
           </a:bodyPr>
           <a:lstStyle/>
           <a:p>
-            <a:pPr algn="l"/>
-            <a:r>
-              <a:rPr sz="1000" b="1" i="0">
-                <a:solidFill>
-                  <a:srgbClr val="FFFFFF"/>
-                </a:solidFill>
-                <a:latin typeface="Calibri"/>
-              </a:rPr>
-              <a:t>SSLC loans to Microcosm fully netted against:</a:t>
-            </a:r>
-          </a:p>
-        </p:txBody>
-      </p:sp>
-      <p:sp>
-        <p:nvSpPr>
-          <p:cNvPr id="17" name="TextBox 16"/>
-          <p:cNvSpPr txBox="1"/>
-          <p:nvPr/>
-        </p:nvSpPr>
-        <p:spPr>
-          <a:xfrm>
-            <a:off x="1152144" y="1947672"/>
-            <a:ext cx="3246120" cy="534924"/>
-          </a:xfrm>
-          <a:prstGeom prst="rect">
-            <a:avLst/>
-          </a:prstGeom>
-          <a:noFill/>
-        </p:spPr>
-        <p:txBody>
-          <a:bodyPr wrap="square">
-            <a:spAutoFit/>
-          </a:bodyPr>
-          <a:lstStyle/>
-          <a:p>
-            <a:pPr algn="l"/>
-            <a:r>
-              <a:rPr sz="1000" b="0" i="1">
+            <a:r>
+              <a:rPr lang="en-US" i="1" sz="1000">
                 <a:solidFill>
                   <a:srgbClr val="CCCCCC"/>
                 </a:solidFill>
                 <a:latin typeface="Calibri"/>
               </a:rPr>
-              <a:t>$294,499 loan payable  ·  $423,965 “reimbursables”
-$61,290 “Judy’s time”  ·  $32,946 reimbursable  =  $518,201
-No invoices or agreements provided for these offsets</a:t>
+              <a:t>Netted 6/30/2025 (JEs #25925/#25926): $294,499 pre-2024 loan payable + $518,201 with no invoices</a:t>
+            </a:r>
+          </a:p>
+          <a:p>
+            <a:r>
+              <a:rPr lang="en-US" i="1" sz="1000">
+                <a:solidFill>
+                  <a:srgbClr val="CCCCCC"/>
+                </a:solidFill>
+                <a:latin typeface="Calibri"/>
+              </a:rPr>
+              <a:t>Reclassified 4/30/2026 to acct 1481 (‘Loan to Microcosm’); account now shows $0</a:t>
             </a:r>
           </a:p>
         </p:txBody>
@@ -15917,28 +15924,27 @@
         <p:spPr>
           <a:xfrm>
             <a:off x="4892040" y="2560320"/>
-            <a:ext cx="4023360" cy="384048"/>
-          </a:xfrm>
-          <a:prstGeom prst="rect">
-            <a:avLst/>
-          </a:prstGeom>
-          <a:noFill/>
-        </p:spPr>
-        <p:txBody>
-          <a:bodyPr wrap="square">
+            <a:ext cx="4023360" cy="530352"/>
+          </a:xfrm>
+          <a:prstGeom prst="rect">
+            <a:avLst/>
+          </a:prstGeom>
+          <a:noFill/>
+        </p:spPr>
+        <p:txBody>
+          <a:bodyPr wrap="none">
             <a:spAutoFit/>
           </a:bodyPr>
           <a:lstStyle/>
           <a:p>
-            <a:pPr algn="l"/>
-            <a:r>
-              <a:rPr sz="1000" b="0" i="0">
+            <a:r>
+              <a:rPr lang="en-US" sz="1000">
                 <a:solidFill>
                   <a:srgbClr val="FFFFFF"/>
                 </a:solidFill>
                 <a:latin typeface="Calibri"/>
               </a:rPr>
-              <a:t>Insider interest was capitalized while the one outside lender, Exos, went unpaid.</a:t>
+              <a:t>Insider interest was capitalized while Exos, the one outside lender, went unpaid — Microcosm’s 2026 short-term loans ($150K) were repaid within months; Exos’s $31K loan remains past due.</a:t>
             </a:r>
           </a:p>
         </p:txBody>
@@ -15951,7 +15957,7 @@
         </p:nvSpPr>
         <p:spPr>
           <a:xfrm>
-            <a:off x="4736592" y="3044951"/>
+            <a:off x="4736592" y="3145536"/>
             <a:ext cx="4160520" cy="365760"/>
           </a:xfrm>
           <a:prstGeom prst="rect">
@@ -16107,7 +16113,7 @@
         </p:nvSpPr>
         <p:spPr>
           <a:xfrm>
-            <a:off x="256032" y="3758183"/>
+            <a:off x="256032" y="3739896"/>
             <a:ext cx="8631936" cy="201168"/>
           </a:xfrm>
           <a:prstGeom prst="rect">
@@ -16142,7 +16148,7 @@
         </p:nvSpPr>
         <p:spPr>
           <a:xfrm>
-            <a:off x="256032" y="3977639"/>
+            <a:off x="256032" y="3931920"/>
             <a:ext cx="3749039" cy="201168"/>
           </a:xfrm>
           <a:prstGeom prst="rect">
@@ -16177,7 +16183,7 @@
         </p:nvSpPr>
         <p:spPr>
           <a:xfrm>
-            <a:off x="4069080" y="3977639"/>
+            <a:off x="4069080" y="3931920"/>
             <a:ext cx="4818888" cy="201168"/>
           </a:xfrm>
           <a:prstGeom prst="rect">
@@ -16212,29 +16218,28 @@
         </p:nvSpPr>
         <p:spPr>
           <a:xfrm>
-            <a:off x="256032" y="4197096"/>
-            <a:ext cx="8631936" cy="402336"/>
-          </a:xfrm>
-          <a:prstGeom prst="rect">
-            <a:avLst/>
-          </a:prstGeom>
-          <a:noFill/>
-        </p:spPr>
-        <p:txBody>
-          <a:bodyPr wrap="square">
+            <a:off x="256032" y="4123944"/>
+            <a:ext cx="3749039" cy="182880"/>
+          </a:xfrm>
+          <a:prstGeom prst="rect">
+            <a:avLst/>
+          </a:prstGeom>
+          <a:noFill/>
+        </p:spPr>
+        <p:txBody>
+          <a:bodyPr wrap="none">
             <a:spAutoFit/>
           </a:bodyPr>
           <a:lstStyle/>
           <a:p>
-            <a:pPr algn="l"/>
-            <a:r>
-              <a:rPr sz="1000" b="1" i="0">
-                <a:solidFill>
-                  <a:srgbClr val="FFCC44"/>
-                </a:solidFill>
-                <a:latin typeface="Calibri"/>
-              </a:rPr>
-              <a:t>Step 2  —  + Unsupported offsets if unresolved:    $967K total  ·  Non-Wertz holders lose ~$449K  (Conger ~$99K, Rufer ~$123K)  ·  Microcosm would owe SSLC</a:t>
+            <a:r>
+              <a:rPr lang="en-US" sz="1000">
+                <a:solidFill>
+                  <a:srgbClr val="FFFFFF"/>
+                </a:solidFill>
+                <a:latin typeface="Calibri"/>
+              </a:rPr>
+              <a:t>Step 2  —  + Unsupported offsets ($967K total):</a:t>
             </a:r>
           </a:p>
         </p:txBody>
@@ -16247,7 +16252,7 @@
         </p:nvSpPr>
         <p:spPr>
           <a:xfrm>
-            <a:off x="256032" y="4626864"/>
+            <a:off x="256032" y="4517136"/>
             <a:ext cx="8631936" cy="265176"/>
           </a:xfrm>
           <a:prstGeom prst="rect">
@@ -16292,7 +16297,7 @@
         </p:nvSpPr>
         <p:spPr>
           <a:xfrm>
-            <a:off x="457200" y="4672583"/>
+            <a:off x="457200" y="4562856"/>
             <a:ext cx="8229600" cy="182880"/>
           </a:xfrm>
           <a:prstGeom prst="rect">
@@ -16385,6 +16390,108 @@
                 <a:latin typeface="Calibri"/>
               </a:rPr>
               <a:t>CONFIDENTIAL</a:t>
+            </a:r>
+          </a:p>
+        </p:txBody>
+      </p:sp>
+      <p:sp>
+        <p:nvSpPr>
+          <p:cNvPr id="45" name="TextBox 44"/>
+          <p:cNvSpPr txBox="1"/>
+          <p:nvPr/>
+        </p:nvSpPr>
+        <p:spPr>
+          <a:xfrm>
+            <a:off x="4069080" y="4123944"/>
+            <a:ext cx="4818888" cy="182880"/>
+          </a:xfrm>
+          <a:prstGeom prst="rect">
+            <a:avLst/>
+          </a:prstGeom>
+          <a:noFill/>
+        </p:spPr>
+        <p:txBody>
+          <a:bodyPr wrap="none">
+            <a:spAutoFit/>
+          </a:bodyPr>
+          <a:lstStyle/>
+          <a:p>
+            <a:r>
+              <a:rPr lang="en-US" b="1" sz="1000">
+                <a:solidFill>
+                  <a:srgbClr val="FFCC44"/>
+                </a:solidFill>
+                <a:latin typeface="Calibri"/>
+              </a:rPr>
+              <a:t>Non-Wertz lose ~$449K  ·  Conger ~$99K  ·  Rufer ~$123K  ·  Microcosm would owe SSLC</a:t>
+            </a:r>
+          </a:p>
+        </p:txBody>
+      </p:sp>
+      <p:sp>
+        <p:nvSpPr>
+          <p:cNvPr id="46" name="TextBox 45"/>
+          <p:cNvSpPr txBox="1"/>
+          <p:nvPr/>
+        </p:nvSpPr>
+        <p:spPr>
+          <a:xfrm>
+            <a:off x="256032" y="4315968"/>
+            <a:ext cx="3749039" cy="182880"/>
+          </a:xfrm>
+          <a:prstGeom prst="rect">
+            <a:avLst/>
+          </a:prstGeom>
+          <a:noFill/>
+        </p:spPr>
+        <p:txBody>
+          <a:bodyPr wrap="none">
+            <a:spAutoFit/>
+          </a:bodyPr>
+          <a:lstStyle/>
+          <a:p>
+            <a:r>
+              <a:rPr lang="en-US" sz="1000">
+                <a:solidFill>
+                  <a:srgbClr val="FFFFFF"/>
+                </a:solidFill>
+                <a:latin typeface="Calibri"/>
+              </a:rPr>
+              <a:t>Step 3  —  Full $812K Microcosm loan undocumented ($1.26M):</a:t>
+            </a:r>
+          </a:p>
+        </p:txBody>
+      </p:sp>
+      <p:sp>
+        <p:nvSpPr>
+          <p:cNvPr id="47" name="TextBox 46"/>
+          <p:cNvSpPr txBox="1"/>
+          <p:nvPr/>
+        </p:nvSpPr>
+        <p:spPr>
+          <a:xfrm>
+            <a:off x="4069080" y="4315968"/>
+            <a:ext cx="4818888" cy="182880"/>
+          </a:xfrm>
+          <a:prstGeom prst="rect">
+            <a:avLst/>
+          </a:prstGeom>
+          <a:noFill/>
+        </p:spPr>
+        <p:txBody>
+          <a:bodyPr wrap="none">
+            <a:spAutoFit/>
+          </a:bodyPr>
+          <a:lstStyle/>
+          <a:p>
+            <a:r>
+              <a:rPr lang="en-US" b="1" sz="1000">
+                <a:solidFill>
+                  <a:srgbClr val="DD4444"/>
+                </a:solidFill>
+                <a:latin typeface="Calibri"/>
+              </a:rPr>
+              <a:t>Non-Wertz lose ~$585K  ·  Conger ~$129K  ·  Rufer ~$160K</a:t>
             </a:r>
           </a:p>
         </p:txBody>
@@ -17857,7 +17964,7 @@
         <p:spPr>
           <a:xfrm>
             <a:off x="0" y="2596896"/>
-            <a:ext cx="9144000" cy="877824"/>
+            <a:ext cx="9144000" cy="932688"/>
           </a:xfrm>
           <a:prstGeom prst="rect">
             <a:avLst/>
@@ -18837,6 +18944,142 @@
                 <a:latin typeface="Calibri"/>
               </a:rPr>
               <a:t>CONFIDENTIAL</a:t>
+            </a:r>
+          </a:p>
+        </p:txBody>
+      </p:sp>
+      <p:sp>
+        <p:nvSpPr>
+          <p:cNvPr id="69" name="TextBox 68"/>
+          <p:cNvSpPr txBox="1"/>
+          <p:nvPr/>
+        </p:nvSpPr>
+        <p:spPr>
+          <a:xfrm>
+            <a:off x="256032" y="3310128"/>
+            <a:ext cx="4754880" cy="201168"/>
+          </a:xfrm>
+          <a:prstGeom prst="rect">
+            <a:avLst/>
+          </a:prstGeom>
+          <a:noFill/>
+        </p:spPr>
+        <p:txBody>
+          <a:bodyPr wrap="none">
+            <a:spAutoFit/>
+          </a:bodyPr>
+          <a:lstStyle/>
+          <a:p>
+            <a:r>
+              <a:rPr lang="en-US" sz="1000">
+                <a:solidFill>
+                  <a:srgbClr val="CCCCCC"/>
+                </a:solidFill>
+                <a:latin typeface="Calibri"/>
+              </a:rPr>
+              <a:t>Step 3  —  If full $812K Microcosm loan undocumented ($1.26M total):</a:t>
+            </a:r>
+          </a:p>
+        </p:txBody>
+      </p:sp>
+      <p:sp>
+        <p:nvSpPr>
+          <p:cNvPr id="70" name="TextBox 69"/>
+          <p:cNvSpPr txBox="1"/>
+          <p:nvPr/>
+        </p:nvSpPr>
+        <p:spPr>
+          <a:xfrm>
+            <a:off x="5074920" y="3310128"/>
+            <a:ext cx="1645920" cy="201168"/>
+          </a:xfrm>
+          <a:prstGeom prst="rect">
+            <a:avLst/>
+          </a:prstGeom>
+          <a:noFill/>
+        </p:spPr>
+        <p:txBody>
+          <a:bodyPr wrap="none">
+            <a:spAutoFit/>
+          </a:bodyPr>
+          <a:lstStyle/>
+          <a:p>
+            <a:r>
+              <a:rPr lang="en-US" b="1" sz="1000">
+                <a:solidFill>
+                  <a:srgbClr val="DD4444"/>
+                </a:solidFill>
+                <a:latin typeface="Calibri"/>
+              </a:rPr>
+              <a:t>Per 1%: −$15.4K</a:t>
+            </a:r>
+          </a:p>
+        </p:txBody>
+      </p:sp>
+      <p:sp>
+        <p:nvSpPr>
+          <p:cNvPr id="71" name="TextBox 70"/>
+          <p:cNvSpPr txBox="1"/>
+          <p:nvPr/>
+        </p:nvSpPr>
+        <p:spPr>
+          <a:xfrm>
+            <a:off x="6748272" y="3310128"/>
+            <a:ext cx="164592" cy="201168"/>
+          </a:xfrm>
+          <a:prstGeom prst="rect">
+            <a:avLst/>
+          </a:prstGeom>
+          <a:noFill/>
+        </p:spPr>
+        <p:txBody>
+          <a:bodyPr wrap="none">
+            <a:spAutoFit/>
+          </a:bodyPr>
+          <a:lstStyle/>
+          <a:p>
+            <a:r>
+              <a:rPr lang="en-US" sz="1000">
+                <a:solidFill>
+                  <a:srgbClr val="CCCCCC"/>
+                </a:solidFill>
+                <a:latin typeface="Calibri"/>
+              </a:rPr>
+              <a:t>|</a:t>
+            </a:r>
+          </a:p>
+        </p:txBody>
+      </p:sp>
+      <p:sp>
+        <p:nvSpPr>
+          <p:cNvPr id="72" name="TextBox 71"/>
+          <p:cNvSpPr txBox="1"/>
+          <p:nvPr/>
+        </p:nvSpPr>
+        <p:spPr>
+          <a:xfrm>
+            <a:off x="6931152" y="3310128"/>
+            <a:ext cx="1920240" cy="201168"/>
+          </a:xfrm>
+          <a:prstGeom prst="rect">
+            <a:avLst/>
+          </a:prstGeom>
+          <a:noFill/>
+        </p:spPr>
+        <p:txBody>
+          <a:bodyPr wrap="none">
+            <a:spAutoFit/>
+          </a:bodyPr>
+          <a:lstStyle/>
+          <a:p>
+            <a:r>
+              <a:rPr lang="en-US" b="1" sz="1000">
+                <a:solidFill>
+                  <a:srgbClr val="DD4444"/>
+                </a:solidFill>
+                <a:latin typeface="Calibri"/>
+              </a:rPr>
+              <a:t>Conger: −$128.7K</a:t>
             </a:r>
           </a:p>
         </p:txBody>

--- a/drafts/Exos_SSLC_Board_Offer_Overview_2026-10-10_r2.pptx
+++ b/drafts/Exos_SSLC_Board_Offer_Overview_2026-10-10_r2.pptx
@@ -15327,7 +15327,7 @@
                 </a:solidFill>
                 <a:latin typeface="Calibri"/>
               </a:rPr>
-              <a:t>Carried in Workman's Comp acct (1480); not shown as a receivable</a:t>
+              <a:t>Loans to Microcosm, booked in workers’-comp acct 1480</a:t>
             </a:r>
           </a:p>
         </p:txBody>
@@ -15341,15 +15341,15 @@
         <p:spPr>
           <a:xfrm>
             <a:off x="1152144" y="1947672"/>
-            <a:ext cx="3246120" cy="534924"/>
-          </a:xfrm>
-          <a:prstGeom prst="rect">
-            <a:avLst/>
-          </a:prstGeom>
-          <a:noFill/>
-        </p:spPr>
-        <p:txBody>
-          <a:bodyPr wrap="square">
+            <a:ext cx="3246120" cy="594360"/>
+          </a:xfrm>
+          <a:prstGeom prst="rect">
+            <a:avLst/>
+          </a:prstGeom>
+          <a:noFill/>
+        </p:spPr>
+        <p:txBody>
+          <a:bodyPr wrap="none">
             <a:spAutoFit/>
           </a:bodyPr>
           <a:lstStyle/>
@@ -15361,7 +15361,7 @@
                 </a:solidFill>
                 <a:latin typeface="Calibri"/>
               </a:rPr>
-              <a:t>Netted 6/30/2025 (JEs #25925/#25926): $294,499 pre-2024 loan payable + $518,201 with no invoices</a:t>
+              <a:t>Not a receivable. Netted 6/30/2025 (#25925-26):</a:t>
             </a:r>
           </a:p>
           <a:p>
@@ -15372,7 +15372,18 @@
                 </a:solidFill>
                 <a:latin typeface="Calibri"/>
               </a:rPr>
-              <a:t>Reclassified 4/30/2026 to acct 1481 (‘Loan to Microcosm’); account now shows $0</a:t>
+              <a:t>$294,499 loan payable + $518,201 no invoices</a:t>
+            </a:r>
+          </a:p>
+          <a:p>
+            <a:r>
+              <a:rPr lang="en-US" i="1" sz="1000">
+                <a:solidFill>
+                  <a:srgbClr val="CCCCCC"/>
+                </a:solidFill>
+                <a:latin typeface="Calibri"/>
+              </a:rPr>
+              <a:t>Reclassified to acct 1481 on 4/30/2026; now $0</a:t>
             </a:r>
           </a:p>
         </p:txBody>
@@ -15385,7 +15396,7 @@
         </p:nvSpPr>
         <p:spPr>
           <a:xfrm>
-            <a:off x="256032" y="2574036"/>
+            <a:off x="256032" y="2606040"/>
             <a:ext cx="50292" cy="182880"/>
           </a:xfrm>
           <a:prstGeom prst="rect">
@@ -15428,7 +15439,7 @@
         </p:nvSpPr>
         <p:spPr>
           <a:xfrm>
-            <a:off x="365760" y="2574036"/>
+            <a:off x="365760" y="2606040"/>
             <a:ext cx="4023360" cy="182880"/>
           </a:xfrm>
           <a:prstGeom prst="rect">
@@ -15463,7 +15474,7 @@
         </p:nvSpPr>
         <p:spPr>
           <a:xfrm>
-            <a:off x="1152144" y="2775204"/>
+            <a:off x="1152144" y="2807208"/>
             <a:ext cx="3246120" cy="178308"/>
           </a:xfrm>
           <a:prstGeom prst="rect">

--- a/drafts/Exos_SSLC_Board_Offer_Overview_2026-10-10_r2.pptx
+++ b/drafts/Exos_SSLC_Board_Offer_Overview_2026-10-10_r2.pptx
@@ -11058,11 +11058,8 @@
               </a:rPr>
               <a:t>Motion 1: </a:t>
             </a:r>
-            <a:pPr indent="0" marL="0">
-              <a:buNone/>
-            </a:pPr>
-            <a:r>
-              <a:rPr lang="en-US" sz="1000" dirty="0">
+            <a:r>
+              <a:rPr lang="en-US" sz="1200" dirty="0">
                 <a:solidFill>
                   <a:srgbClr val="CCCCCC"/>
                 </a:solidFill>
@@ -11070,9 +11067,6 @@
               <a:t>Approve Exos offer (Option B) + §3 exclusivity (90-day) + ROFR on asset sale
 </a:t>
             </a:r>
-            <a:pPr indent="0" marL="0">
-              <a:buNone/>
-            </a:pPr>
             <a:r>
               <a:rPr lang="en-US" sz="1200" b="1" dirty="0">
                 <a:solidFill>
@@ -11081,9 +11075,6 @@
               </a:rPr>
               <a:t>Motion 2: </a:t>
             </a:r>
-            <a:pPr indent="0" marL="0">
-              <a:buNone/>
-            </a:pPr>
             <a:r>
               <a:rPr lang="en-US" sz="1200" dirty="0">
                 <a:solidFill>
@@ -11093,9 +11084,6 @@
               <a:t>Full read-only QB Online access for diligence (Cal. Corp. Code §1602 + AAA §4; under 7/27/2021 NDA)
 </a:t>
             </a:r>
-            <a:pPr indent="0" marL="0">
-              <a:buNone/>
-            </a:pPr>
             <a:r>
               <a:rPr lang="en-US" sz="1200" b="1" dirty="0">
                 <a:solidFill>
@@ -11121,9 +11109,6 @@
               </a:rPr>
               <a:t>Motion 4: </a:t>
             </a:r>
-            <a:pPr indent="0" marL="0">
-              <a:buNone/>
-            </a:pPr>
             <a:r>
               <a:rPr lang="en-US" sz="1200" dirty="0">
                 <a:solidFill>
@@ -11136,13 +11121,20 @@
           </a:p>
           <a:p>
             <a:r>
-              <a:rPr lang="en-US" sz="1000">
-                <a:solidFill>
-                  <a:srgbClr val="FFFFFF"/>
-                </a:solidFill>
-                <a:latin typeface="Calibri"/>
-              </a:rPr>
-              <a:t>Motion 5: Resolve related-party balances (4/30/2026 entries) — independent accountant; Microcosm/Wertz directors abstain</a:t>
+              <a:rPr lang="en-US" sz="1200" dirty="0" b="1">
+                <a:solidFill>
+                  <a:srgbClr val="F26A21"/>
+                </a:solidFill>
+              </a:rPr>
+              <a:t>Motion 5: </a:t>
+            </a:r>
+            <a:r>
+              <a:rPr lang="en-US" sz="1200" dirty="0">
+                <a:solidFill>
+                  <a:srgbClr val="CCCCCC"/>
+                </a:solidFill>
+              </a:rPr>
+              <a:t>Resolve related-party balances (4/30/2026 entries) — independent accountant; Microcosm/Wertz directors abstain</a:t>
             </a:r>
           </a:p>
         </p:txBody>

--- a/drafts/Exos_SSLC_Board_Offer_Overview_2026-10-10_r2.pptx
+++ b/drafts/Exos_SSLC_Board_Offer_Overview_2026-10-10_r2.pptx
@@ -19839,7 +19839,7 @@
           <a:lstStyle/>
           <a:p>
             <a:r>
-              <a:rPr lang="en-US" sz="900" dirty="0" b="1">
+              <a:rPr lang="en-US" sz="1000" dirty="0" b="1">
                 <a:solidFill>
                   <a:srgbClr val="F26A21"/>
                 </a:solidFill>
@@ -19873,7 +19873,7 @@
           <a:lstStyle/>
           <a:p>
             <a:r>
-              <a:rPr lang="en-US" sz="900" dirty="0">
+              <a:rPr lang="en-US" sz="1000" dirty="0">
                 <a:solidFill>
                   <a:srgbClr val="888888"/>
                 </a:solidFill>
@@ -19907,7 +19907,7 @@
           <a:lstStyle/>
           <a:p>
             <a:r>
-              <a:rPr lang="en-US" sz="900" dirty="0" b="1">
+              <a:rPr lang="en-US" sz="1000" dirty="0" b="1">
                 <a:solidFill>
                   <a:srgbClr val="F26A21"/>
                 </a:solidFill>
@@ -19941,7 +19941,7 @@
           <a:lstStyle/>
           <a:p>
             <a:r>
-              <a:rPr lang="en-US" sz="900" dirty="0" b="1">
+              <a:rPr lang="en-US" sz="1000" dirty="0" b="1">
                 <a:solidFill>
                   <a:srgbClr val="F26A21"/>
                 </a:solidFill>
@@ -19976,7 +19976,7 @@
           <a:lstStyle/>
           <a:p>
             <a:r>
-              <a:rPr lang="en-US" sz="900" dirty="0" b="1">
+              <a:rPr lang="en-US" sz="1000" dirty="0" b="1">
                 <a:solidFill>
                   <a:srgbClr val="F26A21"/>
                 </a:solidFill>
@@ -20011,7 +20011,7 @@
           <a:lstStyle/>
           <a:p>
             <a:r>
-              <a:rPr lang="en-US" sz="900" dirty="0" b="1">
+              <a:rPr lang="en-US" sz="1000" dirty="0" b="1">
                 <a:solidFill>
                   <a:srgbClr val="F26A21"/>
                 </a:solidFill>
@@ -20046,7 +20046,7 @@
           <a:lstStyle/>
           <a:p>
             <a:r>
-              <a:rPr lang="en-US" sz="900" dirty="0" b="1">
+              <a:rPr lang="en-US" sz="1000" dirty="0" b="1">
                 <a:solidFill>
                   <a:srgbClr val="F26A21"/>
                 </a:solidFill>
@@ -20123,7 +20123,7 @@
           <a:lstStyle/>
           <a:p>
             <a:r>
-              <a:rPr lang="en-US" sz="900" dirty="0">
+              <a:rPr lang="en-US" sz="1000" dirty="0">
                 <a:solidFill>
                   <a:srgbClr val="CCCCCC"/>
                 </a:solidFill>
@@ -20157,7 +20157,7 @@
           <a:lstStyle/>
           <a:p>
             <a:r>
-              <a:rPr lang="en-US" sz="900" dirty="0">
+              <a:rPr lang="en-US" sz="1000" dirty="0">
                 <a:solidFill>
                   <a:srgbClr val="CCCCCC"/>
                 </a:solidFill>
@@ -20191,7 +20191,7 @@
           <a:lstStyle/>
           <a:p>
             <a:r>
-              <a:rPr lang="en-US" sz="900" dirty="0">
+              <a:rPr lang="en-US" sz="1000" dirty="0">
                 <a:solidFill>
                   <a:srgbClr val="CCCCCC"/>
                 </a:solidFill>
@@ -20225,7 +20225,7 @@
           <a:lstStyle/>
           <a:p>
             <a:r>
-              <a:rPr lang="en-US" sz="900" dirty="0">
+              <a:rPr lang="en-US" sz="1000" dirty="0">
                 <a:solidFill>
                   <a:srgbClr val="44BB44"/>
                 </a:solidFill>
@@ -20259,7 +20259,7 @@
           <a:lstStyle/>
           <a:p>
             <a:r>
-              <a:rPr lang="en-US" sz="900" dirty="0">
+              <a:rPr lang="en-US" sz="1000" dirty="0">
                 <a:solidFill>
                   <a:srgbClr val="CCCCCC"/>
                 </a:solidFill>
@@ -20293,7 +20293,7 @@
           <a:lstStyle/>
           <a:p>
             <a:r>
-              <a:rPr lang="en-US" sz="700" dirty="0" b="1">
+              <a:rPr lang="en-US" sz="1000" dirty="0" b="1">
                 <a:solidFill>
                   <a:srgbClr val="F26A21"/>
                 </a:solidFill>
@@ -20327,7 +20327,7 @@
           <a:lstStyle/>
           <a:p>
             <a:r>
-              <a:rPr lang="en-US" sz="900" dirty="0">
+              <a:rPr lang="en-US" sz="1000" dirty="0">
                 <a:solidFill>
                   <a:srgbClr val="FFFFFF"/>
                 </a:solidFill>
@@ -20361,7 +20361,7 @@
           <a:lstStyle/>
           <a:p>
             <a:r>
-              <a:rPr lang="en-US" sz="900" dirty="0">
+              <a:rPr lang="en-US" sz="1000" dirty="0">
                 <a:solidFill>
                   <a:srgbClr val="FFFFFF"/>
                 </a:solidFill>
@@ -20395,7 +20395,7 @@
           <a:lstStyle/>
           <a:p>
             <a:r>
-              <a:rPr lang="en-US" sz="900" dirty="0">
+              <a:rPr lang="en-US" sz="1000" dirty="0">
                 <a:solidFill>
                   <a:srgbClr val="FFFFFF"/>
                 </a:solidFill>
@@ -20429,7 +20429,7 @@
           <a:lstStyle/>
           <a:p>
             <a:r>
-              <a:rPr lang="en-US" sz="900" dirty="0">
+              <a:rPr lang="en-US" sz="1000" dirty="0">
                 <a:solidFill>
                   <a:srgbClr val="44BB44"/>
                 </a:solidFill>
@@ -20463,7 +20463,7 @@
           <a:lstStyle/>
           <a:p>
             <a:r>
-              <a:rPr lang="en-US" sz="900" dirty="0">
+              <a:rPr lang="en-US" sz="1000" dirty="0">
                 <a:solidFill>
                   <a:srgbClr val="FFFFFF"/>
                 </a:solidFill>
@@ -20497,7 +20497,7 @@
           <a:lstStyle/>
           <a:p>
             <a:r>
-              <a:rPr lang="en-US" sz="700" dirty="0" b="1">
+              <a:rPr lang="en-US" sz="1000" dirty="0" b="1">
                 <a:solidFill>
                   <a:srgbClr val="F26A21"/>
                 </a:solidFill>
@@ -20531,7 +20531,7 @@
           <a:lstStyle/>
           <a:p>
             <a:r>
-              <a:rPr lang="en-US" sz="900" dirty="0">
+              <a:rPr lang="en-US" sz="1000" dirty="0">
                 <a:solidFill>
                   <a:srgbClr val="FFFFFF"/>
                 </a:solidFill>
@@ -20565,7 +20565,7 @@
           <a:lstStyle/>
           <a:p>
             <a:r>
-              <a:rPr lang="en-US" sz="900" dirty="0">
+              <a:rPr lang="en-US" sz="1000" dirty="0">
                 <a:solidFill>
                   <a:srgbClr val="FFFFFF"/>
                 </a:solidFill>
@@ -20599,7 +20599,7 @@
           <a:lstStyle/>
           <a:p>
             <a:r>
-              <a:rPr lang="en-US" sz="900" dirty="0">
+              <a:rPr lang="en-US" sz="1000" dirty="0">
                 <a:solidFill>
                   <a:srgbClr val="FFFFFF"/>
                 </a:solidFill>
@@ -20633,7 +20633,7 @@
           <a:lstStyle/>
           <a:p>
             <a:r>
-              <a:rPr lang="en-US" sz="900" dirty="0">
+              <a:rPr lang="en-US" sz="1000" dirty="0">
                 <a:solidFill>
                   <a:srgbClr val="44BB44"/>
                 </a:solidFill>
@@ -20667,7 +20667,7 @@
           <a:lstStyle/>
           <a:p>
             <a:r>
-              <a:rPr lang="en-US" sz="900" dirty="0">
+              <a:rPr lang="en-US" sz="1000" dirty="0">
                 <a:solidFill>
                   <a:srgbClr val="FFFFFF"/>
                 </a:solidFill>
@@ -20701,7 +20701,7 @@
           <a:lstStyle/>
           <a:p>
             <a:r>
-              <a:rPr lang="en-US" sz="700" dirty="0" b="1">
+              <a:rPr lang="en-US" sz="1000" dirty="0" b="1">
                 <a:solidFill>
                   <a:srgbClr val="F26A21"/>
                 </a:solidFill>
@@ -20735,7 +20735,7 @@
           <a:lstStyle/>
           <a:p>
             <a:r>
-              <a:rPr lang="en-US" sz="900" dirty="0">
+              <a:rPr lang="en-US" sz="1000" dirty="0">
                 <a:solidFill>
                   <a:srgbClr val="CCCCCC"/>
                 </a:solidFill>
@@ -20769,7 +20769,7 @@
           <a:lstStyle/>
           <a:p>
             <a:r>
-              <a:rPr lang="en-US" sz="900" dirty="0">
+              <a:rPr lang="en-US" sz="1000" dirty="0">
                 <a:solidFill>
                   <a:srgbClr val="CCCCCC"/>
                 </a:solidFill>
@@ -20803,7 +20803,7 @@
           <a:lstStyle/>
           <a:p>
             <a:r>
-              <a:rPr lang="en-US" sz="900" dirty="0">
+              <a:rPr lang="en-US" sz="1000" dirty="0">
                 <a:solidFill>
                   <a:srgbClr val="CCCCCC"/>
                 </a:solidFill>
@@ -20837,7 +20837,7 @@
           <a:lstStyle/>
           <a:p>
             <a:r>
-              <a:rPr lang="en-US" sz="900" dirty="0">
+              <a:rPr lang="en-US" sz="1000" dirty="0">
                 <a:solidFill>
                   <a:srgbClr val="FFCC44"/>
                 </a:solidFill>
@@ -20871,7 +20871,7 @@
           <a:lstStyle/>
           <a:p>
             <a:r>
-              <a:rPr lang="en-US" sz="900" dirty="0">
+              <a:rPr lang="en-US" sz="1000" dirty="0">
                 <a:solidFill>
                   <a:srgbClr val="CCCCCC"/>
                 </a:solidFill>
@@ -20905,7 +20905,7 @@
           <a:lstStyle/>
           <a:p>
             <a:r>
-              <a:rPr lang="en-US" sz="700" dirty="0" b="1">
+              <a:rPr lang="en-US" sz="1000" dirty="0" b="1">
                 <a:solidFill>
                   <a:srgbClr val="F26A21"/>
                 </a:solidFill>
@@ -20939,7 +20939,7 @@
           <a:lstStyle/>
           <a:p>
             <a:r>
-              <a:rPr lang="en-US" sz="900" dirty="0">
+              <a:rPr lang="en-US" sz="1000" dirty="0">
                 <a:solidFill>
                   <a:srgbClr val="CCCCCC"/>
                 </a:solidFill>
@@ -20973,7 +20973,7 @@
           <a:lstStyle/>
           <a:p>
             <a:r>
-              <a:rPr lang="en-US" sz="900" dirty="0">
+              <a:rPr lang="en-US" sz="1000" dirty="0">
                 <a:solidFill>
                   <a:srgbClr val="CCCCCC"/>
                 </a:solidFill>
@@ -21007,7 +21007,7 @@
           <a:lstStyle/>
           <a:p>
             <a:r>
-              <a:rPr lang="en-US" sz="900" dirty="0">
+              <a:rPr lang="en-US" sz="1000" dirty="0">
                 <a:solidFill>
                   <a:srgbClr val="CCCCCC"/>
                 </a:solidFill>
@@ -21041,7 +21041,7 @@
           <a:lstStyle/>
           <a:p>
             <a:r>
-              <a:rPr lang="en-US" sz="900" dirty="0">
+              <a:rPr lang="en-US" sz="1000" dirty="0">
                 <a:solidFill>
                   <a:srgbClr val="FFCC44"/>
                 </a:solidFill>
@@ -21075,7 +21075,7 @@
           <a:lstStyle/>
           <a:p>
             <a:r>
-              <a:rPr lang="en-US" sz="900" dirty="0">
+              <a:rPr lang="en-US" sz="1000" dirty="0">
                 <a:solidFill>
                   <a:srgbClr val="CCCCCC"/>
                 </a:solidFill>
@@ -21109,7 +21109,7 @@
           <a:lstStyle/>
           <a:p>
             <a:r>
-              <a:rPr lang="en-US" sz="900" dirty="0">
+              <a:rPr lang="en-US" sz="1000" dirty="0">
                 <a:solidFill>
                   <a:srgbClr val="888888"/>
                 </a:solidFill>
@@ -21143,7 +21143,7 @@
           <a:lstStyle/>
           <a:p>
             <a:r>
-              <a:rPr lang="en-US" sz="900" dirty="0">
+              <a:rPr lang="en-US" sz="1000" dirty="0">
                 <a:solidFill>
                   <a:srgbClr val="888888"/>
                 </a:solidFill>
@@ -21177,7 +21177,7 @@
           <a:lstStyle/>
           <a:p>
             <a:r>
-              <a:rPr lang="en-US" sz="900" dirty="0">
+              <a:rPr lang="en-US" sz="1000" dirty="0">
                 <a:solidFill>
                   <a:srgbClr val="888888"/>
                 </a:solidFill>
@@ -21211,7 +21211,7 @@
           <a:lstStyle/>
           <a:p>
             <a:r>
-              <a:rPr lang="en-US" sz="900" dirty="0">
+              <a:rPr lang="en-US" sz="1000" dirty="0">
                 <a:solidFill>
                   <a:srgbClr val="888888"/>
                 </a:solidFill>
@@ -21245,7 +21245,7 @@
           <a:lstStyle/>
           <a:p>
             <a:r>
-              <a:rPr lang="en-US" sz="900" dirty="0">
+              <a:rPr lang="en-US" sz="1000" dirty="0">
                 <a:solidFill>
                   <a:srgbClr val="888888"/>
                 </a:solidFill>
@@ -21279,7 +21279,7 @@
           <a:lstStyle/>
           <a:p>
             <a:r>
-              <a:rPr lang="en-US" sz="900" dirty="0">
+              <a:rPr lang="en-US" sz="1000" dirty="0">
                 <a:solidFill>
                   <a:srgbClr val="888888"/>
                 </a:solidFill>
@@ -21313,7 +21313,7 @@
           <a:lstStyle/>
           <a:p>
             <a:r>
-              <a:rPr lang="en-US" sz="900" dirty="0">
+              <a:rPr lang="en-US" sz="1000" dirty="0">
                 <a:solidFill>
                   <a:srgbClr val="888888"/>
                 </a:solidFill>
@@ -21347,7 +21347,7 @@
           <a:lstStyle/>
           <a:p>
             <a:r>
-              <a:rPr lang="en-US" sz="900" dirty="0">
+              <a:rPr lang="en-US" sz="1000" dirty="0">
                 <a:solidFill>
                   <a:srgbClr val="888888"/>
                 </a:solidFill>
@@ -21381,7 +21381,7 @@
           <a:lstStyle/>
           <a:p>
             <a:r>
-              <a:rPr lang="en-US" sz="900" dirty="0">
+              <a:rPr lang="en-US" sz="1000" dirty="0">
                 <a:solidFill>
                   <a:srgbClr val="888888"/>
                 </a:solidFill>
@@ -21415,7 +21415,7 @@
           <a:lstStyle/>
           <a:p>
             <a:r>
-              <a:rPr lang="en-US" sz="900" dirty="0">
+              <a:rPr lang="en-US" sz="1000" dirty="0">
                 <a:solidFill>
                   <a:srgbClr val="888888"/>
                 </a:solidFill>
@@ -21492,7 +21492,7 @@
           <a:lstStyle/>
           <a:p>
             <a:r>
-              <a:rPr lang="en-US" sz="900" dirty="0" b="1">
+              <a:rPr lang="en-US" sz="1000" dirty="0" b="1">
                 <a:solidFill>
                   <a:srgbClr val="CCCCCC"/>
                 </a:solidFill>
@@ -21560,7 +21560,7 @@
           <a:lstStyle/>
           <a:p>
             <a:r>
-              <a:rPr lang="en-US" sz="900" dirty="0">
+              <a:rPr lang="en-US" sz="1000" dirty="0">
                 <a:solidFill>
                   <a:srgbClr val="CCCCCC"/>
                 </a:solidFill>
@@ -21594,7 +21594,7 @@
           <a:lstStyle/>
           <a:p>
             <a:r>
-              <a:rPr lang="en-US" sz="900" dirty="0" b="1">
+              <a:rPr lang="en-US" sz="1000" dirty="0" b="1">
                 <a:solidFill>
                   <a:srgbClr val="F26A21"/>
                 </a:solidFill>
@@ -21628,7 +21628,7 @@
           <a:lstStyle/>
           <a:p>
             <a:r>
-              <a:rPr lang="en-US" sz="900" dirty="0">
+              <a:rPr lang="en-US" sz="1000" dirty="0">
                 <a:solidFill>
                   <a:srgbClr val="CCCCCC"/>
                 </a:solidFill>
@@ -21662,7 +21662,7 @@
           <a:lstStyle/>
           <a:p>
             <a:r>
-              <a:rPr lang="en-US" sz="900" dirty="0" b="1">
+              <a:rPr lang="en-US" sz="1000" dirty="0" b="1">
                 <a:solidFill>
                   <a:srgbClr val="F26A21"/>
                 </a:solidFill>
@@ -21696,7 +21696,7 @@
           <a:lstStyle/>
           <a:p>
             <a:r>
-              <a:rPr lang="en-US" sz="900" dirty="0">
+              <a:rPr lang="en-US" sz="1000" dirty="0">
                 <a:solidFill>
                   <a:srgbClr val="CCCCCC"/>
                 </a:solidFill>
@@ -21730,7 +21730,7 @@
           <a:lstStyle/>
           <a:p>
             <a:r>
-              <a:rPr lang="en-US" sz="900" dirty="0" b="1">
+              <a:rPr lang="en-US" sz="1000" dirty="0" b="1">
                 <a:solidFill>
                   <a:srgbClr val="44BB44"/>
                 </a:solidFill>
@@ -21764,7 +21764,7 @@
           <a:lstStyle/>
           <a:p>
             <a:r>
-              <a:rPr lang="en-US" sz="800" dirty="0" i="1">
+              <a:rPr lang="en-US" sz="1000" dirty="0" i="1">
                 <a:solidFill>
                   <a:srgbClr val="888888"/>
                 </a:solidFill>
@@ -22507,7 +22507,7 @@
           <a:lstStyle/>
           <a:p>
             <a:r>
-              <a:rPr lang="en-US" sz="900" dirty="0" b="1">
+              <a:rPr lang="en-US" sz="1000" dirty="0" b="1">
                 <a:solidFill>
                   <a:srgbClr val="F26A21"/>
                 </a:solidFill>
@@ -22541,7 +22541,7 @@
           <a:lstStyle/>
           <a:p>
             <a:r>
-              <a:rPr lang="en-US" sz="900" dirty="0">
+              <a:rPr lang="en-US" sz="1000" dirty="0">
                 <a:solidFill>
                   <a:srgbClr val="888888"/>
                 </a:solidFill>
@@ -22575,7 +22575,7 @@
           <a:lstStyle/>
           <a:p>
             <a:r>
-              <a:rPr lang="en-US" sz="900" dirty="0" i="1">
+              <a:rPr lang="en-US" sz="1000" dirty="0" i="1">
                 <a:solidFill>
                   <a:srgbClr val="888888"/>
                 </a:solidFill>
@@ -22686,7 +22686,7 @@
           <a:lstStyle/>
           <a:p>
             <a:r>
-              <a:rPr lang="en-US" sz="900" dirty="0">
+              <a:rPr lang="en-US" sz="1000" dirty="0">
                 <a:solidFill>
                   <a:srgbClr val="DD4444"/>
                 </a:solidFill>
@@ -22720,7 +22720,7 @@
           <a:lstStyle/>
           <a:p>
             <a:r>
-              <a:rPr lang="en-US" sz="900" dirty="0">
+              <a:rPr lang="en-US" sz="1000" dirty="0">
                 <a:solidFill>
                   <a:srgbClr val="DD4444"/>
                 </a:solidFill>
@@ -22789,7 +22789,7 @@
           <a:lstStyle/>
           <a:p>
             <a:r>
-              <a:rPr lang="en-US" sz="900" dirty="0">
+              <a:rPr lang="en-US" sz="1000" dirty="0">
                 <a:solidFill>
                   <a:srgbClr val="F26A21"/>
                 </a:solidFill>
@@ -22857,7 +22857,7 @@
           <a:lstStyle/>
           <a:p>
             <a:r>
-              <a:rPr lang="en-US" sz="900" dirty="0">
+              <a:rPr lang="en-US" sz="1000" dirty="0">
                 <a:solidFill>
                   <a:srgbClr val="CCCCCC"/>
                 </a:solidFill>
@@ -22891,7 +22891,7 @@
           <a:lstStyle/>
           <a:p>
             <a:r>
-              <a:rPr lang="en-US" sz="900" dirty="0">
+              <a:rPr lang="en-US" sz="1000" dirty="0">
                 <a:solidFill>
                   <a:srgbClr val="F26A21"/>
                 </a:solidFill>
@@ -22925,7 +22925,7 @@
           <a:lstStyle/>
           <a:p>
             <a:r>
-              <a:rPr lang="en-US" sz="900" dirty="0">
+              <a:rPr lang="en-US" sz="1000" dirty="0">
                 <a:solidFill>
                   <a:srgbClr val="CCCCCC"/>
                 </a:solidFill>
@@ -22959,7 +22959,7 @@
           <a:lstStyle/>
           <a:p>
             <a:r>
-              <a:rPr lang="en-US" sz="900" dirty="0">
+              <a:rPr lang="en-US" sz="1000" dirty="0">
                 <a:solidFill>
                   <a:srgbClr val="F26A21"/>
                 </a:solidFill>
@@ -22993,7 +22993,7 @@
           <a:lstStyle/>
           <a:p>
             <a:r>
-              <a:rPr lang="en-US" sz="900" dirty="0">
+              <a:rPr lang="en-US" sz="1000" dirty="0">
                 <a:solidFill>
                   <a:srgbClr val="CCCCCC"/>
                 </a:solidFill>
@@ -23027,7 +23027,7 @@
           <a:lstStyle/>
           <a:p>
             <a:r>
-              <a:rPr lang="en-US" sz="900" dirty="0">
+              <a:rPr lang="en-US" sz="1000" dirty="0">
                 <a:solidFill>
                   <a:srgbClr val="F26A21"/>
                 </a:solidFill>
@@ -23061,7 +23061,7 @@
           <a:lstStyle/>
           <a:p>
             <a:r>
-              <a:rPr lang="en-US" sz="900" dirty="0" b="1">
+              <a:rPr lang="en-US" sz="1000" dirty="0" b="1">
                 <a:solidFill>
                   <a:srgbClr val="FFFFFF"/>
                 </a:solidFill>
@@ -23095,7 +23095,7 @@
           <a:lstStyle/>
           <a:p>
             <a:r>
-              <a:rPr lang="en-US" sz="900" dirty="0" b="1">
+              <a:rPr lang="en-US" sz="1000" dirty="0" b="1">
                 <a:solidFill>
                   <a:srgbClr val="44BB44"/>
                 </a:solidFill>
@@ -23206,7 +23206,7 @@
           <a:lstStyle/>
           <a:p>
             <a:r>
-              <a:rPr lang="en-US" sz="900" dirty="0">
+              <a:rPr lang="en-US" sz="1000" dirty="0">
                 <a:solidFill>
                   <a:srgbClr val="CCCCCC"/>
                 </a:solidFill>
@@ -23240,7 +23240,7 @@
           <a:lstStyle/>
           <a:p>
             <a:r>
-              <a:rPr lang="en-US" sz="900" dirty="0">
+              <a:rPr lang="en-US" sz="1000" dirty="0">
                 <a:solidFill>
                   <a:srgbClr val="CCCCCC"/>
                 </a:solidFill>
@@ -23274,7 +23274,7 @@
           <a:lstStyle/>
           <a:p>
             <a:r>
-              <a:rPr lang="en-US" sz="900" dirty="0">
+              <a:rPr lang="en-US" sz="1000" dirty="0">
                 <a:solidFill>
                   <a:srgbClr val="CCCCCC"/>
                 </a:solidFill>
@@ -23308,7 +23308,7 @@
           <a:lstStyle/>
           <a:p>
             <a:r>
-              <a:rPr lang="en-US" sz="900" dirty="0">
+              <a:rPr lang="en-US" sz="1000" dirty="0">
                 <a:solidFill>
                   <a:srgbClr val="CCCCCC"/>
                 </a:solidFill>
@@ -23342,7 +23342,7 @@
           <a:lstStyle/>
           <a:p>
             <a:r>
-              <a:rPr lang="en-US" sz="900" dirty="0" b="1">
+              <a:rPr lang="en-US" sz="1000" dirty="0" b="1">
                 <a:solidFill>
                   <a:srgbClr val="CCCCCC"/>
                 </a:solidFill>
@@ -23376,7 +23376,7 @@
           <a:lstStyle/>
           <a:p>
             <a:r>
-              <a:rPr lang="en-US" sz="900" dirty="0" b="1">
+              <a:rPr lang="en-US" sz="1000" dirty="0" b="1">
                 <a:solidFill>
                   <a:srgbClr val="FFFFFF"/>
                 </a:solidFill>
@@ -23410,7 +23410,7 @@
           <a:lstStyle/>
           <a:p>
             <a:r>
-              <a:rPr lang="en-US" sz="900" dirty="0">
+              <a:rPr lang="en-US" sz="1000" dirty="0">
                 <a:solidFill>
                   <a:srgbClr val="CCCCCC"/>
                 </a:solidFill>
@@ -23444,7 +23444,7 @@
           <a:lstStyle/>
           <a:p>
             <a:r>
-              <a:rPr lang="en-US" sz="900" dirty="0">
+              <a:rPr lang="en-US" sz="1000" dirty="0">
                 <a:solidFill>
                   <a:srgbClr val="F26A21"/>
                 </a:solidFill>
@@ -23478,7 +23478,7 @@
           <a:lstStyle/>
           <a:p>
             <a:r>
-              <a:rPr lang="en-US" sz="900" dirty="0">
+              <a:rPr lang="en-US" sz="1000" dirty="0">
                 <a:solidFill>
                   <a:srgbClr val="CCCCCC"/>
                 </a:solidFill>
@@ -23512,7 +23512,7 @@
           <a:lstStyle/>
           <a:p>
             <a:r>
-              <a:rPr lang="en-US" sz="900" dirty="0">
+              <a:rPr lang="en-US" sz="1000" dirty="0">
                 <a:solidFill>
                   <a:srgbClr val="CCCCCC"/>
                 </a:solidFill>
@@ -23546,7 +23546,7 @@
           <a:lstStyle/>
           <a:p>
             <a:r>
-              <a:rPr lang="en-US" sz="900" dirty="0" b="1">
+              <a:rPr lang="en-US" sz="1000" dirty="0" b="1">
                 <a:solidFill>
                   <a:srgbClr val="CCCCCC"/>
                 </a:solidFill>
@@ -23580,7 +23580,7 @@
           <a:lstStyle/>
           <a:p>
             <a:r>
-              <a:rPr lang="en-US" sz="900" dirty="0" b="1">
+              <a:rPr lang="en-US" sz="1000" dirty="0" b="1">
                 <a:solidFill>
                   <a:srgbClr val="FFCC44"/>
                 </a:solidFill>
@@ -23614,7 +23614,7 @@
           <a:lstStyle/>
           <a:p>
             <a:r>
-              <a:rPr lang="en-US" sz="900" dirty="0" i="1">
+              <a:rPr lang="en-US" sz="1000" dirty="0" i="1">
                 <a:solidFill>
                   <a:srgbClr val="FFCC44"/>
                 </a:solidFill>
@@ -23734,7 +23734,7 @@
           <a:lstStyle/>
           <a:p>
             <a:r>
-              <a:rPr lang="en-US" sz="900" dirty="0" b="1">
+              <a:rPr lang="en-US" sz="1000" dirty="0" b="1">
                 <a:solidFill>
                   <a:srgbClr val="CCCCCC"/>
                 </a:solidFill>
@@ -23836,7 +23836,7 @@
           <a:lstStyle/>
           <a:p>
             <a:r>
-              <a:rPr lang="en-US" sz="900" dirty="0" b="1">
+              <a:rPr lang="en-US" sz="1000" dirty="0" b="1">
                 <a:solidFill>
                   <a:srgbClr val="F26A21"/>
                 </a:solidFill>
@@ -23870,7 +23870,7 @@
           <a:lstStyle/>
           <a:p>
             <a:r>
-              <a:rPr lang="en-US" sz="900" dirty="0" b="1">
+              <a:rPr lang="en-US" sz="1000" dirty="0" b="1">
                 <a:solidFill>
                   <a:srgbClr val="F26A21"/>
                 </a:solidFill>
@@ -23904,7 +23904,7 @@
           <a:lstStyle/>
           <a:p>
             <a:r>
-              <a:rPr lang="en-US" sz="900" dirty="0" b="1">
+              <a:rPr lang="en-US" sz="1000" dirty="0" b="1">
                 <a:solidFill>
                   <a:srgbClr val="F26A21"/>
                 </a:solidFill>
@@ -23938,7 +23938,7 @@
           <a:lstStyle/>
           <a:p>
             <a:r>
-              <a:rPr lang="en-US" sz="900" dirty="0" b="1">
+              <a:rPr lang="en-US" sz="1000" dirty="0" b="1">
                 <a:solidFill>
                   <a:srgbClr val="F26A21"/>
                 </a:solidFill>
@@ -23972,7 +23972,7 @@
           <a:lstStyle/>
           <a:p>
             <a:r>
-              <a:rPr lang="en-US" sz="900" dirty="0" b="1">
+              <a:rPr lang="en-US" sz="1000" dirty="0" b="1">
                 <a:solidFill>
                   <a:srgbClr val="F26A21"/>
                 </a:solidFill>
@@ -24006,7 +24006,7 @@
           <a:lstStyle/>
           <a:p>
             <a:r>
-              <a:rPr lang="en-US" sz="900" dirty="0" b="1">
+              <a:rPr lang="en-US" sz="1000" dirty="0" b="1">
                 <a:solidFill>
                   <a:srgbClr val="F26A21"/>
                 </a:solidFill>
@@ -24083,7 +24083,7 @@
           <a:lstStyle/>
           <a:p>
             <a:r>
-              <a:rPr lang="en-US" sz="900" dirty="0">
+              <a:rPr lang="en-US" sz="1000" dirty="0">
                 <a:solidFill>
                   <a:srgbClr val="CCCCCC"/>
                 </a:solidFill>
@@ -24117,7 +24117,7 @@
           <a:lstStyle/>
           <a:p>
             <a:r>
-              <a:rPr lang="en-US" sz="900" dirty="0">
+              <a:rPr lang="en-US" sz="1000" dirty="0">
                 <a:solidFill>
                   <a:srgbClr val="CCCCCC"/>
                 </a:solidFill>
@@ -24151,7 +24151,7 @@
           <a:lstStyle/>
           <a:p>
             <a:r>
-              <a:rPr lang="en-US" sz="900" dirty="0">
+              <a:rPr lang="en-US" sz="1000" dirty="0">
                 <a:solidFill>
                   <a:srgbClr val="CCCCCC"/>
                 </a:solidFill>
@@ -24185,7 +24185,7 @@
           <a:lstStyle/>
           <a:p>
             <a:r>
-              <a:rPr lang="en-US" sz="900" dirty="0">
+              <a:rPr lang="en-US" sz="1000" dirty="0">
                 <a:solidFill>
                   <a:srgbClr val="CCCCCC"/>
                 </a:solidFill>
@@ -24219,7 +24219,7 @@
           <a:lstStyle/>
           <a:p>
             <a:r>
-              <a:rPr lang="en-US" sz="900" dirty="0">
+              <a:rPr lang="en-US" sz="1000" dirty="0">
                 <a:solidFill>
                   <a:srgbClr val="CCCCCC"/>
                 </a:solidFill>
@@ -24253,7 +24253,7 @@
           <a:lstStyle/>
           <a:p>
             <a:r>
-              <a:rPr lang="en-US" sz="900" dirty="0">
+              <a:rPr lang="en-US" sz="1000" dirty="0">
                 <a:solidFill>
                   <a:srgbClr val="CCCCCC"/>
                 </a:solidFill>
@@ -24287,7 +24287,7 @@
           <a:lstStyle/>
           <a:p>
             <a:r>
-              <a:rPr lang="en-US" sz="900" dirty="0">
+              <a:rPr lang="en-US" sz="1000" dirty="0">
                 <a:solidFill>
                   <a:srgbClr val="CCCCCC"/>
                 </a:solidFill>
@@ -24321,7 +24321,7 @@
           <a:lstStyle/>
           <a:p>
             <a:r>
-              <a:rPr lang="en-US" sz="900" dirty="0">
+              <a:rPr lang="en-US" sz="1000" dirty="0">
                 <a:solidFill>
                   <a:srgbClr val="CCCCCC"/>
                 </a:solidFill>
@@ -24355,7 +24355,7 @@
           <a:lstStyle/>
           <a:p>
             <a:r>
-              <a:rPr lang="en-US" sz="900" dirty="0">
+              <a:rPr lang="en-US" sz="1000" dirty="0">
                 <a:solidFill>
                   <a:srgbClr val="CCCCCC"/>
                 </a:solidFill>
@@ -24389,7 +24389,7 @@
           <a:lstStyle/>
           <a:p>
             <a:r>
-              <a:rPr lang="en-US" sz="900" dirty="0">
+              <a:rPr lang="en-US" sz="1000" dirty="0">
                 <a:solidFill>
                   <a:srgbClr val="CCCCCC"/>
                 </a:solidFill>
@@ -24423,7 +24423,7 @@
           <a:lstStyle/>
           <a:p>
             <a:r>
-              <a:rPr lang="en-US" sz="900" dirty="0">
+              <a:rPr lang="en-US" sz="1000" dirty="0">
                 <a:solidFill>
                   <a:srgbClr val="CCCCCC"/>
                 </a:solidFill>
@@ -24457,7 +24457,7 @@
           <a:lstStyle/>
           <a:p>
             <a:r>
-              <a:rPr lang="en-US" sz="900" dirty="0">
+              <a:rPr lang="en-US" sz="1000" dirty="0">
                 <a:solidFill>
                   <a:srgbClr val="CCCCCC"/>
                 </a:solidFill>
@@ -24491,7 +24491,7 @@
           <a:lstStyle/>
           <a:p>
             <a:r>
-              <a:rPr lang="en-US" sz="900" dirty="0">
+              <a:rPr lang="en-US" sz="1000" dirty="0">
                 <a:solidFill>
                   <a:srgbClr val="DD4444"/>
                 </a:solidFill>
@@ -24525,7 +24525,7 @@
           <a:lstStyle/>
           <a:p>
             <a:r>
-              <a:rPr lang="en-US" sz="900" dirty="0">
+              <a:rPr lang="en-US" sz="1000" dirty="0">
                 <a:solidFill>
                   <a:srgbClr val="DD4444"/>
                 </a:solidFill>
@@ -24559,7 +24559,7 @@
           <a:lstStyle/>
           <a:p>
             <a:r>
-              <a:rPr lang="en-US" sz="900" dirty="0">
+              <a:rPr lang="en-US" sz="1000" dirty="0">
                 <a:solidFill>
                   <a:srgbClr val="DD4444"/>
                 </a:solidFill>
@@ -24593,7 +24593,7 @@
           <a:lstStyle/>
           <a:p>
             <a:r>
-              <a:rPr lang="en-US" sz="900" dirty="0">
+              <a:rPr lang="en-US" sz="1000" dirty="0">
                 <a:solidFill>
                   <a:srgbClr val="DD4444"/>
                 </a:solidFill>
@@ -24627,7 +24627,7 @@
           <a:lstStyle/>
           <a:p>
             <a:r>
-              <a:rPr lang="en-US" sz="900" dirty="0">
+              <a:rPr lang="en-US" sz="1000" dirty="0">
                 <a:solidFill>
                   <a:srgbClr val="DD4444"/>
                 </a:solidFill>
@@ -24661,7 +24661,7 @@
           <a:lstStyle/>
           <a:p>
             <a:r>
-              <a:rPr lang="en-US" sz="900" dirty="0">
+              <a:rPr lang="en-US" sz="1000" dirty="0">
                 <a:solidFill>
                   <a:srgbClr val="DD4444"/>
                 </a:solidFill>
@@ -24695,7 +24695,7 @@
           <a:lstStyle/>
           <a:p>
             <a:r>
-              <a:rPr lang="en-US" sz="900" dirty="0">
+              <a:rPr lang="en-US" sz="1000" dirty="0">
                 <a:solidFill>
                   <a:srgbClr val="DD4444"/>
                 </a:solidFill>
@@ -24729,7 +24729,7 @@
           <a:lstStyle/>
           <a:p>
             <a:r>
-              <a:rPr lang="en-US" sz="900" dirty="0">
+              <a:rPr lang="en-US" sz="1000" dirty="0">
                 <a:solidFill>
                   <a:srgbClr val="DD4444"/>
                 </a:solidFill>
@@ -24763,7 +24763,7 @@
           <a:lstStyle/>
           <a:p>
             <a:r>
-              <a:rPr lang="en-US" sz="900" dirty="0">
+              <a:rPr lang="en-US" sz="1000" dirty="0">
                 <a:solidFill>
                   <a:srgbClr val="DD4444"/>
                 </a:solidFill>
@@ -24797,7 +24797,7 @@
           <a:lstStyle/>
           <a:p>
             <a:r>
-              <a:rPr lang="en-US" sz="900" dirty="0">
+              <a:rPr lang="en-US" sz="1000" dirty="0">
                 <a:solidFill>
                   <a:srgbClr val="DD4444"/>
                 </a:solidFill>
@@ -24831,7 +24831,7 @@
           <a:lstStyle/>
           <a:p>
             <a:r>
-              <a:rPr lang="en-US" sz="900" dirty="0">
+              <a:rPr lang="en-US" sz="1000" dirty="0">
                 <a:solidFill>
                   <a:srgbClr val="DD4444"/>
                 </a:solidFill>
@@ -24865,7 +24865,7 @@
           <a:lstStyle/>
           <a:p>
             <a:r>
-              <a:rPr lang="en-US" sz="900" dirty="0">
+              <a:rPr lang="en-US" sz="1000" dirty="0">
                 <a:solidFill>
                   <a:srgbClr val="DD4444"/>
                 </a:solidFill>
@@ -24899,7 +24899,7 @@
           <a:lstStyle/>
           <a:p>
             <a:r>
-              <a:rPr lang="en-US" sz="900" dirty="0">
+              <a:rPr lang="en-US" sz="1000" dirty="0">
                 <a:solidFill>
                   <a:srgbClr val="CCCCCC"/>
                 </a:solidFill>
@@ -24933,7 +24933,7 @@
           <a:lstStyle/>
           <a:p>
             <a:r>
-              <a:rPr lang="en-US" sz="900" dirty="0">
+              <a:rPr lang="en-US" sz="1000" dirty="0">
                 <a:solidFill>
                   <a:srgbClr val="CCCCCC"/>
                 </a:solidFill>
@@ -24967,7 +24967,7 @@
           <a:lstStyle/>
           <a:p>
             <a:r>
-              <a:rPr lang="en-US" sz="900" dirty="0">
+              <a:rPr lang="en-US" sz="1000" dirty="0">
                 <a:solidFill>
                   <a:srgbClr val="CCCCCC"/>
                 </a:solidFill>
@@ -25001,7 +25001,7 @@
           <a:lstStyle/>
           <a:p>
             <a:r>
-              <a:rPr lang="en-US" sz="900" dirty="0">
+              <a:rPr lang="en-US" sz="1000" dirty="0">
                 <a:solidFill>
                   <a:srgbClr val="CCCCCC"/>
                 </a:solidFill>
@@ -25035,7 +25035,7 @@
           <a:lstStyle/>
           <a:p>
             <a:r>
-              <a:rPr lang="en-US" sz="900" dirty="0">
+              <a:rPr lang="en-US" sz="1000" dirty="0">
                 <a:solidFill>
                   <a:srgbClr val="CCCCCC"/>
                 </a:solidFill>
@@ -25069,7 +25069,7 @@
           <a:lstStyle/>
           <a:p>
             <a:r>
-              <a:rPr lang="en-US" sz="900" dirty="0">
+              <a:rPr lang="en-US" sz="1000" dirty="0">
                 <a:solidFill>
                   <a:srgbClr val="CCCCCC"/>
                 </a:solidFill>
@@ -25103,7 +25103,7 @@
           <a:lstStyle/>
           <a:p>
             <a:r>
-              <a:rPr lang="en-US" sz="900" dirty="0">
+              <a:rPr lang="en-US" sz="1000" dirty="0">
                 <a:solidFill>
                   <a:srgbClr val="CCCCCC"/>
                 </a:solidFill>
@@ -25137,7 +25137,7 @@
           <a:lstStyle/>
           <a:p>
             <a:r>
-              <a:rPr lang="en-US" sz="900" dirty="0">
+              <a:rPr lang="en-US" sz="1000" dirty="0">
                 <a:solidFill>
                   <a:srgbClr val="CCCCCC"/>
                 </a:solidFill>
@@ -25171,7 +25171,7 @@
           <a:lstStyle/>
           <a:p>
             <a:r>
-              <a:rPr lang="en-US" sz="900" dirty="0">
+              <a:rPr lang="en-US" sz="1000" dirty="0">
                 <a:solidFill>
                   <a:srgbClr val="CCCCCC"/>
                 </a:solidFill>
@@ -25205,7 +25205,7 @@
           <a:lstStyle/>
           <a:p>
             <a:r>
-              <a:rPr lang="en-US" sz="900" dirty="0">
+              <a:rPr lang="en-US" sz="1000" dirty="0">
                 <a:solidFill>
                   <a:srgbClr val="CCCCCC"/>
                 </a:solidFill>
@@ -25239,7 +25239,7 @@
           <a:lstStyle/>
           <a:p>
             <a:r>
-              <a:rPr lang="en-US" sz="900" dirty="0">
+              <a:rPr lang="en-US" sz="1000" dirty="0">
                 <a:solidFill>
                   <a:srgbClr val="CCCCCC"/>
                 </a:solidFill>
@@ -25273,7 +25273,7 @@
           <a:lstStyle/>
           <a:p>
             <a:r>
-              <a:rPr lang="en-US" sz="900" dirty="0">
+              <a:rPr lang="en-US" sz="1000" dirty="0">
                 <a:solidFill>
                   <a:srgbClr val="CCCCCC"/>
                 </a:solidFill>
@@ -25307,7 +25307,7 @@
           <a:lstStyle/>
           <a:p>
             <a:r>
-              <a:rPr lang="en-US" sz="900" dirty="0" b="1">
+              <a:rPr lang="en-US" sz="1000" dirty="0" b="1">
                 <a:solidFill>
                   <a:srgbClr val="FFFFFF"/>
                 </a:solidFill>
@@ -25341,7 +25341,7 @@
           <a:lstStyle/>
           <a:p>
             <a:r>
-              <a:rPr lang="en-US" sz="900" dirty="0" b="1">
+              <a:rPr lang="en-US" sz="1000" dirty="0" b="1">
                 <a:solidFill>
                   <a:srgbClr val="FFFFFF"/>
                 </a:solidFill>
@@ -25375,7 +25375,7 @@
           <a:lstStyle/>
           <a:p>
             <a:r>
-              <a:rPr lang="en-US" sz="900" dirty="0" b="1">
+              <a:rPr lang="en-US" sz="1000" dirty="0" b="1">
                 <a:solidFill>
                   <a:srgbClr val="FFFFFF"/>
                 </a:solidFill>
@@ -25409,7 +25409,7 @@
           <a:lstStyle/>
           <a:p>
             <a:r>
-              <a:rPr lang="en-US" sz="900" dirty="0" b="1">
+              <a:rPr lang="en-US" sz="1000" dirty="0" b="1">
                 <a:solidFill>
                   <a:srgbClr val="FFFFFF"/>
                 </a:solidFill>
@@ -25443,7 +25443,7 @@
           <a:lstStyle/>
           <a:p>
             <a:r>
-              <a:rPr lang="en-US" sz="900" dirty="0" b="1">
+              <a:rPr lang="en-US" sz="1000" dirty="0" b="1">
                 <a:solidFill>
                   <a:srgbClr val="FFFFFF"/>
                 </a:solidFill>
@@ -25477,7 +25477,7 @@
           <a:lstStyle/>
           <a:p>
             <a:r>
-              <a:rPr lang="en-US" sz="900" dirty="0" b="1">
+              <a:rPr lang="en-US" sz="1000" dirty="0" b="1">
                 <a:solidFill>
                   <a:srgbClr val="F26A21"/>
                 </a:solidFill>
@@ -25554,7 +25554,7 @@
           <a:lstStyle/>
           <a:p>
             <a:r>
-              <a:rPr lang="en-US" sz="900" dirty="0">
+              <a:rPr lang="en-US" sz="1000" dirty="0">
                 <a:solidFill>
                   <a:srgbClr val="CCCCCC"/>
                 </a:solidFill>
@@ -25588,7 +25588,7 @@
           <a:lstStyle/>
           <a:p>
             <a:r>
-              <a:rPr lang="en-US" sz="900" dirty="0">
+              <a:rPr lang="en-US" sz="1000" dirty="0">
                 <a:solidFill>
                   <a:srgbClr val="F26A21"/>
                 </a:solidFill>

--- a/drafts/Exos_SSLC_Board_Offer_Overview_2026-10-10_r2.pptx
+++ b/drafts/Exos_SSLC_Board_Offer_Overview_2026-10-10_r2.pptx
@@ -20299,7 +20299,7 @@
                 </a:solidFill>
                 <a:latin typeface="Calibri"/>
               </a:rPr>
-              <a:t>S1</a:t>
+              <a:t>M3</a:t>
             </a:r>
           </a:p>
         </p:txBody>
@@ -20537,7 +20537,7 @@
                 </a:solidFill>
                 <a:latin typeface="Calibri"/>
               </a:rPr>
-              <a:t>2700 Notes Pay.–Bookstore</a:t>
+              <a:t>2700 Bookstore note</a:t>
             </a:r>
           </a:p>
         </p:txBody>
@@ -20673,7 +20673,7 @@
                 </a:solidFill>
                 <a:latin typeface="Calibri"/>
               </a:rPr>
-              <a:t>Interest capitalized 4/30/26 (JE #25926)</a:t>
+              <a:t>Interest capitalized 4/30/26; no approval</a:t>
             </a:r>
           </a:p>
         </p:txBody>
@@ -20707,7 +20707,7 @@
                 </a:solidFill>
                 <a:latin typeface="Calibri"/>
               </a:rPr>
-              <a:t>S2</a:t>
+              <a:t>S1</a:t>
             </a:r>
           </a:p>
         </p:txBody>
@@ -20741,7 +20741,7 @@
                 </a:solidFill>
                 <a:latin typeface="Calibri"/>
               </a:rPr>
-              <a:t>1480→1481 Loan to Microcosm</a:t>
+              <a:t>1481 Loan to Microcosm</a:t>
             </a:r>
           </a:p>
         </p:txBody>
@@ -20911,7 +20911,7 @@
                 </a:solidFill>
                 <a:latin typeface="Calibri"/>
               </a:rPr>
-              <a:t>S3</a:t>
+              <a:t>S2</a:t>
             </a:r>
           </a:p>
         </p:txBody>
@@ -20945,7 +20945,7 @@
                 </a:solidFill>
                 <a:latin typeface="Calibri"/>
               </a:rPr>
-              <a:t>2701 Microcosm payable (pre-2024)</a:t>
+              <a:t>2701 Microcosm loan (pre-24)</a:t>
             </a:r>
           </a:p>
         </p:txBody>
@@ -21081,7 +21081,7 @@
                 </a:solidFill>
                 <a:latin typeface="Calibri"/>
               </a:rPr>
-              <a:t>No note; no board approval (Mot. 5)</a:t>
+              <a:t>Support not provided (Q14; Motion 5)</a:t>
             </a:r>
           </a:p>
         </p:txBody>
@@ -22299,6 +22299,40 @@
                 <a:latin typeface="Calibri"/>
               </a:rPr>
               <a:t>$33.7K</a:t>
+            </a:r>
+          </a:p>
+        </p:txBody>
+      </p:sp>
+      <p:sp>
+        <p:nvSpPr>
+          <p:cNvPr id="37" name="TextBox 36"/>
+          <p:cNvSpPr txBox="1"/>
+          <p:nvPr/>
+        </p:nvSpPr>
+        <p:spPr>
+          <a:xfrm>
+            <a:off x="91440" y="1700784"/>
+            <a:ext cx="137160" cy="155448"/>
+          </a:xfrm>
+          <a:prstGeom prst="rect">
+            <a:avLst/>
+          </a:prstGeom>
+          <a:noFill/>
+        </p:spPr>
+        <p:txBody>
+          <a:bodyPr wrap="none" anchor="ctr">
+            <a:spAutoFit/>
+          </a:bodyPr>
+          <a:lstStyle/>
+          <a:p>
+            <a:r>
+              <a:rPr lang="en-US" sz="1000" dirty="0" b="1">
+                <a:solidFill>
+                  <a:srgbClr val="F26A21"/>
+                </a:solidFill>
+                <a:latin typeface="Calibri"/>
+              </a:rPr>
+              <a:t>S3</a:t>
             </a:r>
           </a:p>
         </p:txBody>
